--- a/presentations/kong-platform-journey-guided.pptx
+++ b/presentations/kong-platform-journey-guided.pptx
@@ -2,37 +2,37 @@
 <file path=ppt/presentation.xml><?xml version="1.0" encoding="utf-8"?>
 <p:presentation xmlns:p="http://schemas.openxmlformats.org/presentationml/2006/main">
   <p:sldMasterIdLst>
-    <p:sldMasterId xmlns:r="http://schemas.openxmlformats.org/officeDocument/2006/relationships" id="2147483648" r:id="R4b62eac0a0cd43bc"/>
+    <p:sldMasterId xmlns:r="http://schemas.openxmlformats.org/officeDocument/2006/relationships" id="2147483648" r:id="R60c804bd99cd4a7a"/>
   </p:sldMasterIdLst>
   <p:notesMasterIdLst>
-    <p:notesMasterId xmlns:r="http://schemas.openxmlformats.org/officeDocument/2006/relationships" r:id="Refe22afccc0d4e1a"/>
+    <p:notesMasterId xmlns:r="http://schemas.openxmlformats.org/officeDocument/2006/relationships" r:id="R8ea8645e99654ead"/>
   </p:notesMasterIdLst>
   <p:sldIdLst>
-    <p:sldId xmlns:r="http://schemas.openxmlformats.org/officeDocument/2006/relationships" id="256" r:id="Rc6a22fd6916c46a5"/>
-    <p:sldId xmlns:r="http://schemas.openxmlformats.org/officeDocument/2006/relationships" id="257" r:id="Ra7e3628821c34229"/>
-    <p:sldId xmlns:r="http://schemas.openxmlformats.org/officeDocument/2006/relationships" id="258" r:id="Re8002fe98f9a42d1"/>
-    <p:sldId xmlns:r="http://schemas.openxmlformats.org/officeDocument/2006/relationships" id="259" r:id="Rc80315ab95cf42b1"/>
-    <p:sldId xmlns:r="http://schemas.openxmlformats.org/officeDocument/2006/relationships" id="260" r:id="R5c6b2909eb3e4df9"/>
-    <p:sldId xmlns:r="http://schemas.openxmlformats.org/officeDocument/2006/relationships" id="261" r:id="R5c1cd965b7ff4d7b"/>
-    <p:sldId xmlns:r="http://schemas.openxmlformats.org/officeDocument/2006/relationships" id="262" r:id="Rc5f2f188bebf49fd"/>
-    <p:sldId xmlns:r="http://schemas.openxmlformats.org/officeDocument/2006/relationships" id="263" r:id="Re9eed9a85c4a48d3"/>
-    <p:sldId xmlns:r="http://schemas.openxmlformats.org/officeDocument/2006/relationships" id="264" r:id="R750b450220544c72"/>
-    <p:sldId xmlns:r="http://schemas.openxmlformats.org/officeDocument/2006/relationships" id="265" r:id="R57e1cabdedf149e4"/>
-    <p:sldId xmlns:r="http://schemas.openxmlformats.org/officeDocument/2006/relationships" id="266" r:id="R846a6820178b4e14"/>
-    <p:sldId xmlns:r="http://schemas.openxmlformats.org/officeDocument/2006/relationships" id="267" r:id="Rb255afcb79a748fc"/>
-    <p:sldId xmlns:r="http://schemas.openxmlformats.org/officeDocument/2006/relationships" id="268" r:id="R37b6d047d744418a"/>
-    <p:sldId xmlns:r="http://schemas.openxmlformats.org/officeDocument/2006/relationships" id="269" r:id="R9b550ffc8dad46a3"/>
-    <p:sldId xmlns:r="http://schemas.openxmlformats.org/officeDocument/2006/relationships" id="270" r:id="R1160fb4fb332414e"/>
-    <p:sldId xmlns:r="http://schemas.openxmlformats.org/officeDocument/2006/relationships" id="271" r:id="Rc2f0d51e11b5401b"/>
-    <p:sldId xmlns:r="http://schemas.openxmlformats.org/officeDocument/2006/relationships" id="272" r:id="R1b5e7818dade4164"/>
-    <p:sldId xmlns:r="http://schemas.openxmlformats.org/officeDocument/2006/relationships" id="273" r:id="Rb1592122740b4f1e"/>
-    <p:sldId xmlns:r="http://schemas.openxmlformats.org/officeDocument/2006/relationships" id="274" r:id="R1b496fcf14bb44f8"/>
-    <p:sldId xmlns:r="http://schemas.openxmlformats.org/officeDocument/2006/relationships" id="275" r:id="R4c87fe7f9aeb4b65"/>
-    <p:sldId xmlns:r="http://schemas.openxmlformats.org/officeDocument/2006/relationships" id="276" r:id="R99acaf84a52e4c79"/>
-    <p:sldId xmlns:r="http://schemas.openxmlformats.org/officeDocument/2006/relationships" id="277" r:id="R8e1755772fd54b80"/>
-    <p:sldId xmlns:r="http://schemas.openxmlformats.org/officeDocument/2006/relationships" id="278" r:id="R148767c57b5d446b"/>
-    <p:sldId xmlns:r="http://schemas.openxmlformats.org/officeDocument/2006/relationships" id="279" r:id="R3cc1731bb15940fb"/>
-    <p:sldId xmlns:r="http://schemas.openxmlformats.org/officeDocument/2006/relationships" id="280" r:id="R92122c1c0de34d4d"/>
+    <p:sldId xmlns:r="http://schemas.openxmlformats.org/officeDocument/2006/relationships" id="256" r:id="R60417037ab624d4e"/>
+    <p:sldId xmlns:r="http://schemas.openxmlformats.org/officeDocument/2006/relationships" id="257" r:id="R2c199ce8f9684364"/>
+    <p:sldId xmlns:r="http://schemas.openxmlformats.org/officeDocument/2006/relationships" id="258" r:id="R48ce7bd25dec4235"/>
+    <p:sldId xmlns:r="http://schemas.openxmlformats.org/officeDocument/2006/relationships" id="259" r:id="Re4762e8e39b04711"/>
+    <p:sldId xmlns:r="http://schemas.openxmlformats.org/officeDocument/2006/relationships" id="260" r:id="R16fd0fd65f784461"/>
+    <p:sldId xmlns:r="http://schemas.openxmlformats.org/officeDocument/2006/relationships" id="261" r:id="Re445c32833474ff5"/>
+    <p:sldId xmlns:r="http://schemas.openxmlformats.org/officeDocument/2006/relationships" id="262" r:id="R08461cd261c94f1e"/>
+    <p:sldId xmlns:r="http://schemas.openxmlformats.org/officeDocument/2006/relationships" id="263" r:id="Rffb9be0cbc5f4415"/>
+    <p:sldId xmlns:r="http://schemas.openxmlformats.org/officeDocument/2006/relationships" id="264" r:id="Rf781b49f08324795"/>
+    <p:sldId xmlns:r="http://schemas.openxmlformats.org/officeDocument/2006/relationships" id="265" r:id="R5bb1afb818294251"/>
+    <p:sldId xmlns:r="http://schemas.openxmlformats.org/officeDocument/2006/relationships" id="266" r:id="R6790b2e26b3a419a"/>
+    <p:sldId xmlns:r="http://schemas.openxmlformats.org/officeDocument/2006/relationships" id="267" r:id="R9804fcbc98614d06"/>
+    <p:sldId xmlns:r="http://schemas.openxmlformats.org/officeDocument/2006/relationships" id="268" r:id="R10e24505592b4505"/>
+    <p:sldId xmlns:r="http://schemas.openxmlformats.org/officeDocument/2006/relationships" id="269" r:id="Rcd5635638bcd45b5"/>
+    <p:sldId xmlns:r="http://schemas.openxmlformats.org/officeDocument/2006/relationships" id="270" r:id="Rd58c9f084f0b46b5"/>
+    <p:sldId xmlns:r="http://schemas.openxmlformats.org/officeDocument/2006/relationships" id="271" r:id="Rec23cc3e4a1e43dc"/>
+    <p:sldId xmlns:r="http://schemas.openxmlformats.org/officeDocument/2006/relationships" id="272" r:id="Rb5ae40211be346ad"/>
+    <p:sldId xmlns:r="http://schemas.openxmlformats.org/officeDocument/2006/relationships" id="273" r:id="R803f531d739240e5"/>
+    <p:sldId xmlns:r="http://schemas.openxmlformats.org/officeDocument/2006/relationships" id="274" r:id="R9ad9ab9f0b6a4e70"/>
+    <p:sldId xmlns:r="http://schemas.openxmlformats.org/officeDocument/2006/relationships" id="275" r:id="Rf59d9b1dddb24942"/>
+    <p:sldId xmlns:r="http://schemas.openxmlformats.org/officeDocument/2006/relationships" id="276" r:id="Rb14b10d23ac14a3a"/>
+    <p:sldId xmlns:r="http://schemas.openxmlformats.org/officeDocument/2006/relationships" id="277" r:id="R30310c1fae894f85"/>
+    <p:sldId xmlns:r="http://schemas.openxmlformats.org/officeDocument/2006/relationships" id="278" r:id="R4dc361fa1cda4753"/>
+    <p:sldId xmlns:r="http://schemas.openxmlformats.org/officeDocument/2006/relationships" id="279" r:id="R6eefa3814d5a4a13"/>
+    <p:sldId xmlns:r="http://schemas.openxmlformats.org/officeDocument/2006/relationships" id="280" r:id="Re9286a7dffdd4137"/>
   </p:sldIdLst>
   <p:sldSz cx="12192000" cy="6858000"/>
   <p:notesSz cx="6858000" cy="9144000"/>
@@ -1536,7 +1536,7 @@
           </a:p>
           <a:p xmlns:a="http://schemas.openxmlformats.org/drawingml/2006/main">
             <a:r>
-              <a:t>Sequence migration by evidence complexity rather than package count.</a:t>
+              <a:t>Use one stable-edge and evidence-gate doctrine while preserving the different migration units and state boundaries of Mule and Apigee.</a:t>
             </a:r>
           </a:p>
           <a:p xmlns:a="http://schemas.openxmlformats.org/drawingml/2006/main">
@@ -1551,7 +1551,7 @@
           </a:p>
           <a:p xmlns:a="http://schemas.openxmlformats.org/drawingml/2006/main">
             <a:r>
-              <a:t>M0 establishes inventory and safety; M1 handles gateway-dominant work; M2 proves representative hard integrations; M3 establishes the domain factory; M4 resolves the connector and batch tail; M5 retires the shared runtime only after dependency zero.</a:t>
+              <a:t>For Mule, M0 establishes inventory and safety; M1 handles gateway-dominant work; M2 proves representative hard integrations; M3 establishes the domain factory; M4 resolves the connector and batch tail; and M5 retires the shared runtime only after dependency zero. For Apigee, A0 inventories the complete object/state graph; A1 classifies semantic disposition; A2 builds a reversible target; A3 proves a hard representative slice; A4 runs bounded coexistence; A5 collects production-canary evidence; and A6 closes technical, operating, recovery, data, support, and commercial dependency zero.</a:t>
             </a:r>
           </a:p>
           <a:p xmlns:a="http://schemas.openxmlformats.org/drawingml/2006/main">
@@ -1566,7 +1566,7 @@
           </a:p>
           <a:p xmlns:a="http://schemas.openxmlformats.org/drawingml/2006/main">
             <a:r>
-              <a:t>Adopt entry/exit evidence as the wave control, not elapsed time or migrated object count.</a:t>
+              <a:t>Confirm the actual source archetype, choose the relevant rail, and adopt entry/exit evidence rather than elapsed time, package count, or exported proxy count. Assign migration architecture, API product, IAM/security, SRE, domain, FinOps/sourcing, and independent-review roles.</a:t>
             </a:r>
           </a:p>
           <a:p xmlns:a="http://schemas.openxmlformats.org/drawingml/2006/main">
@@ -1596,7 +1596,7 @@
           </a:p>
           <a:p xmlns:a="http://schemas.openxmlformats.org/drawingml/2006/main">
             <a:r>
-              <a:t>These phases are scenario planning. They do not assert current programme progress or duration.</a:t>
+              <a:t>These phases are proposed and not run. They do not assert current programme progress, duration, object count, converter success, or semantic parity. The terminology crosswalk supplies nearest analogues only; each mapping still requires behavior, state, lifecycle, authority, evidence, and ownership proof.</a:t>
             </a:r>
           </a:p>
           <a:p xmlns:a="http://schemas.openxmlformats.org/drawingml/2006/main">
@@ -1611,7 +1611,42 @@
           </a:p>
           <a:p xmlns:a="http://schemas.openxmlformats.org/drawingml/2006/main">
             <a:r>
-              <a:t>- docs/35-mule-migration-strategy.md</a:t>
+              <a:t>- 35-mule-migration-strategy.md</a:t>
+            </a:r>
+          </a:p>
+          <a:p xmlns:a="http://schemas.openxmlformats.org/drawingml/2006/main">
+            <a:r>
+              <a:t>- 50-apigee-migration-strategy.md#proposed-a0a6-migration-roadmap</a:t>
+            </a:r>
+          </a:p>
+          <a:p xmlns:a="http://schemas.openxmlformats.org/drawingml/2006/main">
+            <a:r>
+              <a:t>- 48-kong-guided-evaluation.md</a:t>
+            </a:r>
+          </a:p>
+          <a:p xmlns:a="http://schemas.openxmlformats.org/drawingml/2006/main">
+            <a:r>
+              <a:t>- ../research/glossary.md#kong-terminology-crosswalk</a:t>
+            </a:r>
+          </a:p>
+          <a:p xmlns:a="http://schemas.openxmlformats.org/drawingml/2006/main">
+            <a:r>
+              <a:t>- https://docs.mulesoft.com/gateway/latest/</a:t>
+            </a:r>
+          </a:p>
+          <a:p xmlns:a="http://schemas.openxmlformats.org/drawingml/2006/main">
+            <a:r>
+              <a:t>- https://docs.cloud.google.com/apigee/docs/api-platform/fundamentals/download-api-proxies</a:t>
+            </a:r>
+          </a:p>
+          <a:p xmlns:a="http://schemas.openxmlformats.org/drawingml/2006/main">
+            <a:r>
+              <a:t>- https://docs.cloud.google.com/apigee/docs/api-platform/reference/api-proxy-configuration-reference</a:t>
+            </a:r>
+          </a:p>
+          <a:p xmlns:a="http://schemas.openxmlformats.org/drawingml/2006/main">
+            <a:r>
+              <a:t>- https://developer.konghq.com/gateway/deployment-topologies/</a:t>
             </a:r>
           </a:p>
         </p:txBody>
@@ -1856,7 +1891,7 @@
           </a:p>
           <a:p xmlns:a="http://schemas.openxmlformats.org/drawingml/2006/main">
             <a:r>
-              <a:t>This is not a larger feature demonstration. Each workstream needs a representative environment, named owner, test method, measure, acceptance artifact, threshold and stop condition. The agentic-gateway study remains separate so emerging capabilities do not inflate confidence in the core gateway.</a:t>
+              <a:t>This is not a larger feature demonstration. GEP-01–06 prove the target, APIOps, regional resilience, enterprise IAM, separate agentic study, and evidence-gated recommendation. GEP-07 is a separate security-adjunct feasibility line for Kong plus Traceable against the security team’s Mule baseline. Each workstream needs a representative environment, public role owner, exact BOM, method, measure, acceptance artifact, threshold, independent reviewer, and stop condition.</a:t>
             </a:r>
           </a:p>
           <a:p xmlns:a="http://schemas.openxmlformats.org/drawingml/2006/main">
@@ -1871,7 +1906,7 @@
           </a:p>
           <a:p xmlns:a="http://schemas.openxmlformats.org/drawingml/2006/main">
             <a:r>
-              <a:t>Approve these six workstreams, their owners, capacity and evidence budget—not production scale.</a:t>
+              <a:t>Approve these seven workstreams, their role owners, capacity, evidence budget, reviewers, and stop authority—not production scale and not a Traceable production recommendation.</a:t>
             </a:r>
           </a:p>
           <a:p xmlns:a="http://schemas.openxmlformats.org/drawingml/2006/main">
@@ -1901,7 +1936,7 @@
           </a:p>
           <a:p xmlns:a="http://schemas.openxmlformats.org/drawingml/2006/main">
             <a:r>
-              <a:t>These are required proof activities, not completed results. Verify the Kong Enterprise 3.14 edition, licensing and support status before claiming any capability; retain explicit not-run states.</a:t>
+              <a:t>These are required proof activities, not completed results. For GEP-07, current documentation supports only an `E1` plugin/agent feasibility path. It does not certify the exact Kong Enterprise 3.14 patch, plugin/TPA/EDS BOM, topology, entitlement, support, performance, protocol/payload/streaming coverage, data handling, fail behavior, comparative parity, lifecycle, cost, or production outcome.</a:t>
             </a:r>
           </a:p>
           <a:p xmlns:a="http://schemas.openxmlformats.org/drawingml/2006/main">
@@ -1916,7 +1951,42 @@
           </a:p>
           <a:p xmlns:a="http://schemas.openxmlformats.org/drawingml/2006/main">
             <a:r>
-              <a:t>- docs/48-kong-guided-evaluation.md#six-workstream-target-aligned-proof-programme</a:t>
+              <a:t>- 48-kong-guided-evaluation.md#seven-workstream-target-aligned-proof-programme</a:t>
+            </a:r>
+          </a:p>
+          <a:p xmlns:a="http://schemas.openxmlformats.org/drawingml/2006/main">
+            <a:r>
+              <a:t>- 48-kong-guided-evaluation.md#traceable-by-harness-security-adjunct-feasibility</a:t>
+            </a:r>
+          </a:p>
+          <a:p xmlns:a="http://schemas.openxmlformats.org/drawingml/2006/main">
+            <a:r>
+              <a:t>- https://developer.konghq.com/gateway/version-support-policy/</a:t>
+            </a:r>
+          </a:p>
+          <a:p xmlns:a="http://schemas.openxmlformats.org/drawingml/2006/main">
+            <a:r>
+              <a:t>- https://developer.konghq.com/gateway/hybrid-mode/</a:t>
+            </a:r>
+          </a:p>
+          <a:p xmlns:a="http://schemas.openxmlformats.org/drawingml/2006/main">
+            <a:r>
+              <a:t>- https://developer.konghq.com/gateway/monitoring/</a:t>
+            </a:r>
+          </a:p>
+          <a:p xmlns:a="http://schemas.openxmlformats.org/drawingml/2006/main">
+            <a:r>
+              <a:t>- https://developer.konghq.com/ai-gateway/</a:t>
+            </a:r>
+          </a:p>
+          <a:p xmlns:a="http://schemas.openxmlformats.org/drawingml/2006/main">
+            <a:r>
+              <a:t>- https://docs.traceable.ai/docs/kong</a:t>
+            </a:r>
+          </a:p>
+          <a:p xmlns:a="http://schemas.openxmlformats.org/drawingml/2006/main">
+            <a:r>
+              <a:t>- https://developer.konghq.com/plugins/harness-waap/</a:t>
             </a:r>
           </a:p>
         </p:txBody>
@@ -2306,7 +2376,7 @@
           </a:p>
           <a:p xmlns:a="http://schemas.openxmlformats.org/drawingml/2006/main">
             <a:r>
-              <a:t>Capacity and evidence safety matter, but so do adoption, operating sustainability, exit readiness and accurate estate ownership. Telemetry must stay off the critical path, gaps must be quantified, and prohibited fields must remain absent.</a:t>
+              <a:t>Capacity and evidence safety matter, but so do adoption, operating sustainability, exit readiness and accurate estate ownership. KO-7 is an outcome: administrative/configuration audit, request and security-decision correlation, business evidence, quantified produced/queued/dropped/delivered gaps, and prohibited-field control. Traceable may be one candidate mechanism, but no product name can make KO-7 pass.</a:t>
             </a:r>
           </a:p>
           <a:p xmlns:a="http://schemas.openxmlformats.org/drawingml/2006/main">
@@ -2321,7 +2391,7 @@
           </a:p>
           <a:p xmlns:a="http://schemas.openxmlformats.org/drawingml/2006/main">
             <a:r>
-              <a:t>Confirm which outcome is currently the likely scale blocker and who owns its evidence.</a:t>
+              <a:t>Confirm which outcome is currently the likely scale blocker, which public role owns it, and whether any Traceable dependency is being treated as a mechanism to prove rather than an achieved outcome.</a:t>
             </a:r>
           </a:p>
           <a:p xmlns:a="http://schemas.openxmlformats.org/drawingml/2006/main">
@@ -2351,7 +2421,7 @@
           </a:p>
           <a:p xmlns:a="http://schemas.openxmlformats.org/drawingml/2006/main">
             <a:r>
-              <a:t>These are acceptance categories; no result is asserted on this slide.</a:t>
+              <a:t>These are acceptance categories; no result is asserted on this slide. GEP-07 evidence may inform KO-7 only inside its exact tested boundary and cannot substitute for configuration audit, signal-gap accounting, business correlation, or enterprise evidence controls.</a:t>
             </a:r>
           </a:p>
           <a:p xmlns:a="http://schemas.openxmlformats.org/drawingml/2006/main">
@@ -2366,7 +2436,37 @@
           </a:p>
           <a:p xmlns:a="http://schemas.openxmlformats.org/drawingml/2006/main">
             <a:r>
-              <a:t>- docs/47-kong-enterprise-platform-strategy.md</a:t>
+              <a:t>- 47-kong-enterprise-platform-strategy.md</a:t>
+            </a:r>
+          </a:p>
+          <a:p xmlns:a="http://schemas.openxmlformats.org/drawingml/2006/main">
+            <a:r>
+              <a:t>- 48-kong-guided-evaluation.md</a:t>
+            </a:r>
+          </a:p>
+          <a:p xmlns:a="http://schemas.openxmlformats.org/drawingml/2006/main">
+            <a:r>
+              <a:t>- 48-kong-guided-evaluation.md#traceable-by-harness-security-adjunct-feasibility</a:t>
+            </a:r>
+          </a:p>
+          <a:p xmlns:a="http://schemas.openxmlformats.org/drawingml/2006/main">
+            <a:r>
+              <a:t>- https://developer.konghq.com/gateway/hybrid-mode/</a:t>
+            </a:r>
+          </a:p>
+          <a:p xmlns:a="http://schemas.openxmlformats.org/drawingml/2006/main">
+            <a:r>
+              <a:t>- https://developer.konghq.com/gateway/monitoring/</a:t>
+            </a:r>
+          </a:p>
+          <a:p xmlns:a="http://schemas.openxmlformats.org/drawingml/2006/main">
+            <a:r>
+              <a:t>- https://docs.traceable.ai/docs/kong</a:t>
+            </a:r>
+          </a:p>
+          <a:p xmlns:a="http://schemas.openxmlformats.org/drawingml/2006/main">
+            <a:r>
+              <a:t>- https://developer.konghq.com/plugins/harness-waap/</a:t>
             </a:r>
           </a:p>
         </p:txBody>
@@ -2591,7 +2691,7 @@
           </a:p>
           <a:p xmlns:a="http://schemas.openxmlformats.org/drawingml/2006/main">
             <a:r>
-              <a:t>Preserve the source document's architectural comparison without turning it into a dense main-story slide.</a:t>
+              <a:t>Preserve the sanitized supplied evaluation’s architectural comparison while making the new multicloud, scalability, and robustness obligations explicit.</a:t>
             </a:r>
           </a:p>
           <a:p xmlns:a="http://schemas.openxmlformats.org/drawingml/2006/main">
@@ -2606,7 +2706,7 @@
           </a:p>
           <a:p xmlns:a="http://schemas.openxmlformats.org/drawingml/2006/main">
             <a:r>
-              <a:t>The supplied labels are shown explicitly as supplied assessments. Official documentation supports the high-level deployment models, but the relative ratings require an evidence rubric and versioned testing.</a:t>
+              <a:t>The supplied labels remain stakeholder assessments preserved in docs/48. Official documentation supports high-level deployment mechanisms, not relative outcomes. GEC-19 keeps scalability and robustness explicitly unscored until equivalent target-shaped load, saturation, clean-node scale, failure, recovery, and reconciliation evidence exists. Multicloud must separate runtime placement from management dependency, sovereignty, failure independence, support, and operating cost.</a:t>
             </a:r>
           </a:p>
           <a:p xmlns:a="http://schemas.openxmlformats.org/drawingml/2006/main">
@@ -2621,7 +2721,7 @@
           </a:p>
           <a:p xmlns:a="http://schemas.openxmlformats.org/drawingml/2006/main">
             <a:r>
-              <a:t>Use this table to identify proof questions, not to re-litigate the feature list in the room.</a:t>
+              <a:t>Use this table to assign symmetric architecture/SRE proof questions, not to add favorable labels or ratings in the room.</a:t>
             </a:r>
           </a:p>
           <a:p xmlns:a="http://schemas.openxmlformats.org/drawingml/2006/main">
@@ -2651,7 +2751,7 @@
           </a:p>
           <a:p xmlns:a="http://schemas.openxmlformats.org/drawingml/2006/main">
             <a:r>
-              <a:t>Qualitative ratings are not independently validated and may change by edition and release.</a:t>
+              <a:t>Qualitative ratings are not independently validated and may change by exact edition, release, topology, entitlement, workload, region, dependency, and operating model. “Multicloud” and “scalable” are not scoreable yes/no features.</a:t>
             </a:r>
           </a:p>
           <a:p xmlns:a="http://schemas.openxmlformats.org/drawingml/2006/main">
@@ -2666,7 +2766,22 @@
           </a:p>
           <a:p xmlns:a="http://schemas.openxmlformats.org/drawingml/2006/main">
             <a:r>
-              <a:t>- docs/48-kong-guided-evaluation.md#supplied-comparison-input-architecture-and-delivery</a:t>
+              <a:t>- 48-kong-guided-evaluation.md#supplied-comparison-input-architecture-and-delivery</a:t>
+            </a:r>
+          </a:p>
+          <a:p xmlns:a="http://schemas.openxmlformats.org/drawingml/2006/main">
+            <a:r>
+              <a:t>- 48-kong-guided-evaluation.md#meeting-feedback-assurance-crosswalk</a:t>
+            </a:r>
+          </a:p>
+          <a:p xmlns:a="http://schemas.openxmlformats.org/drawingml/2006/main">
+            <a:r>
+              <a:t>- 48-kong-guided-evaluation.md#proposed-governed-re-score</a:t>
+            </a:r>
+          </a:p>
+          <a:p xmlns:a="http://schemas.openxmlformats.org/drawingml/2006/main">
+            <a:r>
+              <a:t>- https://developer.konghq.com/gateway/deployment-topologies/</a:t>
             </a:r>
           </a:p>
           <a:p xmlns:a="http://schemas.openxmlformats.org/drawingml/2006/main">
@@ -2676,12 +2791,22 @@
           </a:p>
           <a:p xmlns:a="http://schemas.openxmlformats.org/drawingml/2006/main">
             <a:r>
+              <a:t>- https://developer.konghq.com/ai-gateway/</a:t>
+            </a:r>
+          </a:p>
+          <a:p xmlns:a="http://schemas.openxmlformats.org/drawingml/2006/main">
+            <a:r>
               <a:t>- https://docs.cloud.google.com/apigee/docs/hybrid/v1.16/what-is-hybrid</a:t>
             </a:r>
           </a:p>
           <a:p xmlns:a="http://schemas.openxmlformats.org/drawingml/2006/main">
             <a:r>
               <a:t>- https://docs.mulesoft.com/gateway/latest/</a:t>
+            </a:r>
+          </a:p>
+          <a:p xmlns:a="http://schemas.openxmlformats.org/drawingml/2006/main">
+            <a:r>
+              <a:t>- https://learn.microsoft.com/en-us/azure/api-management/self-hosted-gateway-overview</a:t>
             </a:r>
           </a:p>
         </p:txBody>
@@ -2756,7 +2881,7 @@
           </a:p>
           <a:p xmlns:a="http://schemas.openxmlformats.org/drawingml/2006/main">
             <a:r>
-              <a:t>Preserve the management and experience claims while making their evidence status explicit.</a:t>
+              <a:t>Preserve the management and experience claims while making emerging AI and third-party security-adjunct evidence boundaries explicit.</a:t>
             </a:r>
           </a:p>
           <a:p xmlns:a="http://schemas.openxmlformats.org/drawingml/2006/main">
@@ -2771,7 +2896,7 @@
           </a:p>
           <a:p xmlns:a="http://schemas.openxmlformats.org/drawingml/2006/main">
             <a:r>
-              <a:t>Lifecycle, governance, portal, developer experience, AI, customization, and best-fit claims must be tested against the required use cases. AI capabilities are changing rapidly and should always be dated and versioned.</a:t>
+              <a:t>Lifecycle, governance, portal, developer experience, AI, customization, and best-fit claims must be tested against required use cases. GEC-20 records Kong-plus-Traceable as documented feasibility only: a plugin/agent path does not prove exact 3.14 support, security effectiveness, traceability, data safety, performance, scaling, comparative parity, cost, or safe lifecycle behavior.</a:t>
             </a:r>
           </a:p>
           <a:p xmlns:a="http://schemas.openxmlformats.org/drawingml/2006/main">
@@ -2786,7 +2911,7 @@
           </a:p>
           <a:p xmlns:a="http://schemas.openxmlformats.org/drawingml/2006/main">
             <a:r>
-              <a:t>Move every unverified adjective into the proof backlog with an owner and artifact.</a:t>
+              <a:t>Move every unverified adjective into the proof backlog with a public role owner, exact option/BOM, artifact, reviewer, and stop rule. Confirm that Traceable remains GEP-07 rather than a gateway option or score.</a:t>
             </a:r>
           </a:p>
           <a:p xmlns:a="http://schemas.openxmlformats.org/drawingml/2006/main">
@@ -2816,7 +2941,7 @@
           </a:p>
           <a:p xmlns:a="http://schemas.openxmlformats.org/drawingml/2006/main">
             <a:r>
-              <a:t>Product capability and commercial terms are edition- and date-dependent.</a:t>
+              <a:t>Product, plugin, agent, entitlement, support, and commercial terms are edition-, version-, topology-, and date-dependent. Current Traceable/Kong documentation is `E1` mechanism evidence only.</a:t>
             </a:r>
           </a:p>
           <a:p xmlns:a="http://schemas.openxmlformats.org/drawingml/2006/main">
@@ -2831,7 +2956,17 @@
           </a:p>
           <a:p xmlns:a="http://schemas.openxmlformats.org/drawingml/2006/main">
             <a:r>
-              <a:t>- docs/48-kong-guided-evaluation.md#supplied-comparison-input-management-experience-and-ai</a:t>
+              <a:t>- 48-kong-guided-evaluation.md#supplied-comparison-input-management-experience-and-ai</a:t>
+            </a:r>
+          </a:p>
+          <a:p xmlns:a="http://schemas.openxmlformats.org/drawingml/2006/main">
+            <a:r>
+              <a:t>- 48-kong-guided-evaluation.md#traceable-by-harness-security-adjunct-feasibility</a:t>
+            </a:r>
+          </a:p>
+          <a:p xmlns:a="http://schemas.openxmlformats.org/drawingml/2006/main">
+            <a:r>
+              <a:t>- https://developer.konghq.com/gateway/deployment-topologies/</a:t>
             </a:r>
           </a:p>
           <a:p xmlns:a="http://schemas.openxmlformats.org/drawingml/2006/main">
@@ -2841,12 +2976,32 @@
           </a:p>
           <a:p xmlns:a="http://schemas.openxmlformats.org/drawingml/2006/main">
             <a:r>
+              <a:t>- https://docs.traceable.ai/docs/kong</a:t>
+            </a:r>
+          </a:p>
+          <a:p xmlns:a="http://schemas.openxmlformats.org/drawingml/2006/main">
+            <a:r>
+              <a:t>- https://developer.konghq.com/plugins/harness-waap/</a:t>
+            </a:r>
+          </a:p>
+          <a:p xmlns:a="http://schemas.openxmlformats.org/drawingml/2006/main">
+            <a:r>
+              <a:t>- https://docs.traceable.ai/docs/tracing-agents-rule-evaluation-for-protection</a:t>
+            </a:r>
+          </a:p>
+          <a:p xmlns:a="http://schemas.openxmlformats.org/drawingml/2006/main">
+            <a:r>
+              <a:t>- https://docs.cloud.google.com/apigee/docs/hybrid/v1.16/what-is-hybrid</a:t>
+            </a:r>
+          </a:p>
+          <a:p xmlns:a="http://schemas.openxmlformats.org/drawingml/2006/main">
+            <a:r>
               <a:t>- https://docs.mulesoft.com/gateway/latest/</a:t>
             </a:r>
           </a:p>
           <a:p xmlns:a="http://schemas.openxmlformats.org/drawingml/2006/main">
             <a:r>
-              <a:t>- https://docs.cloud.google.com/apigee/docs/hybrid/v1.16/what-is-hybrid</a:t>
+              <a:t>- https://learn.microsoft.com/en-us/azure/api-management/self-hosted-gateway-overview</a:t>
             </a:r>
           </a:p>
         </p:txBody>
@@ -2921,7 +3076,7 @@
           </a:p>
           <a:p xmlns:a="http://schemas.openxmlformats.org/drawingml/2006/main">
             <a:r>
-              <a:t>Expose the economic and exit claims as proof obligations rather than conclusions.</a:t>
+              <a:t>Expose pricing, operating-duty, adjunct-cost, lock-in, and exit claims as separate proof obligations rather than conclusions.</a:t>
             </a:r>
           </a:p>
           <a:p xmlns:a="http://schemas.openxmlformats.org/drawingml/2006/main">
@@ -2936,7 +3091,7 @@
           </a:p>
           <a:p xmlns:a="http://schemas.openxmlformats.org/drawingml/2006/main">
             <a:r>
-              <a:t>Cost and lock-in cannot be inferred from topology. They require quotes, platform labor, HA/DR, support, observability, portal/product tooling, network and egress, migration effort, and an exit rehearsal.</a:t>
+              <a:t>Public price pages define meters or quote boundaries, not a comparable price rank. Fully allocated TCO requires exact options and quotes plus infrastructure, PostgreSQL, PKI, platform/SRE/on-call labor, HA/DR, telemetry, portal/product tooling, network/egress, plugins and security adjuncts, support, migration, dual run, incident exposure, custody switch, and clean exit. Lock-in requires an observed representative non-source rebuild and a ledger of configuration/policy, identity/product state, data/analytics, plugin, procedure, support, and commercial dependencies.</a:t>
             </a:r>
           </a:p>
           <a:p xmlns:a="http://schemas.openxmlformats.org/drawingml/2006/main">
@@ -2951,7 +3106,7 @@
           </a:p>
           <a:p xmlns:a="http://schemas.openxmlformats.org/drawingml/2006/main">
             <a:r>
-              <a:t>Assign owners and artifacts for TCO, custody and exit evidence.</a:t>
+              <a:t>Assign public FinOps, sourcing, platform/SRE, security-adjunct, migration, and independent-review roles for the normalized low/base/high model, rebuild, custody switch, and clean-exit evidence.</a:t>
             </a:r>
           </a:p>
           <a:p xmlns:a="http://schemas.openxmlformats.org/drawingml/2006/main">
@@ -2981,7 +3136,7 @@
           </a:p>
           <a:p xmlns:a="http://schemas.openxmlformats.org/drawingml/2006/main">
             <a:r>
-              <a:t>Commercial terms and estate leverage are organization- and date-specific.</a:t>
+              <a:t>Commercial terms and estate leverage are organization- and date-specific. Do not publish restricted quotes. The public record should expose meter/quote boundaries, assumptions, role ownership, evidence state, and disposition only. Operating accountability is not a legal-liability verdict.</a:t>
             </a:r>
           </a:p>
           <a:p xmlns:a="http://schemas.openxmlformats.org/drawingml/2006/main">
@@ -2996,7 +3151,42 @@
           </a:p>
           <a:p xmlns:a="http://schemas.openxmlformats.org/drawingml/2006/main">
             <a:r>
-              <a:t>- docs/48-kong-guided-evaluation.md#supplied-comparison-input-economics-and-evidence-ceiling</a:t>
+              <a:t>- 48-kong-guided-evaluation.md#supplied-comparison-input-economics-and-evidence-ceiling</a:t>
+            </a:r>
+          </a:p>
+          <a:p xmlns:a="http://schemas.openxmlformats.org/drawingml/2006/main">
+            <a:r>
+              <a:t>- 48-kong-guided-evaluation.md#proposed-governed-re-score</a:t>
+            </a:r>
+          </a:p>
+          <a:p xmlns:a="http://schemas.openxmlformats.org/drawingml/2006/main">
+            <a:r>
+              <a:t>- https://konghq.com/pricing</a:t>
+            </a:r>
+          </a:p>
+          <a:p xmlns:a="http://schemas.openxmlformats.org/drawingml/2006/main">
+            <a:r>
+              <a:t>- https://cloud.google.com/apigee/pricing</a:t>
+            </a:r>
+          </a:p>
+          <a:p xmlns:a="http://schemas.openxmlformats.org/drawingml/2006/main">
+            <a:r>
+              <a:t>- https://www.mulesoft.com/anypoint-pricing</a:t>
+            </a:r>
+          </a:p>
+          <a:p xmlns:a="http://schemas.openxmlformats.org/drawingml/2006/main">
+            <a:r>
+              <a:t>- https://developer.konghq.com/gateway/deployment-topologies/</a:t>
+            </a:r>
+          </a:p>
+          <a:p xmlns:a="http://schemas.openxmlformats.org/drawingml/2006/main">
+            <a:r>
+              <a:t>- https://docs.cloud.google.com/apigee/docs/hybrid/v1.16/what-is-hybrid</a:t>
+            </a:r>
+          </a:p>
+          <a:p xmlns:a="http://schemas.openxmlformats.org/drawingml/2006/main">
+            <a:r>
+              <a:t>- https://docs.traceable.ai/docs/kong</a:t>
             </a:r>
           </a:p>
         </p:txBody>
@@ -3071,7 +3261,7 @@
           </a:p>
           <a:p xmlns:a="http://schemas.openxmlformats.org/drawingml/2006/main">
             <a:r>
-              <a:t>Provide an auditable record of the source scorecard without elevating it above its evidence level.</a:t>
+              <a:t>Provide an auditable record of the source scorecard while making the unfinished governed recalculation visible.</a:t>
             </a:r>
           </a:p>
           <a:p xmlns:a="http://schemas.openxmlformats.org/drawingml/2006/main">
@@ -3086,7 +3276,7 @@
           </a:p>
           <a:p xmlns:a="http://schemas.openxmlformats.org/drawingml/2006/main">
             <a:r>
-              <a:t>The inputs are copied from the supplied document. Recalculating weight times rating yields 93 for Kong, 85.5 for Apigee and 77 for MuleSoft. This appendix preserves transparency and makes the evidence backlog explicit.</a:t>
+              <a:t>The inputs are preserved from the sanitized supplied evaluation. Recalculating weight times rating yields 93 for Kong, 85.5 for Apigee, and 77 for MuleSoft. Those values remain historical stakeholder input. `GRS-01`–`GRS-06` adds multicloud, scalability/robustness, security/IAM/traceability, reversibility/vendor dependency, fully allocated TCO, and control-plane operating responsibility to a future governed specification; every added weight and rating remains `TBD`.</a:t>
             </a:r>
           </a:p>
           <a:p xmlns:a="http://schemas.openxmlformats.org/drawingml/2006/main">
@@ -3101,7 +3291,7 @@
           </a:p>
           <a:p xmlns:a="http://schemas.openxmlformats.org/drawingml/2006/main">
             <a:r>
-              <a:t>If the scorecard remains a governance artifact, add confidence, sensitivity and accountable sign-off.</a:t>
+              <a:t>If the scorecard remains a governance artifact, approve exact options, mandatory gates, the scoring rubric, score-capable common evidence, dimensions and weights/ranges, confidence/unknown treatment, role-based scorers and approvers, sensitivity, lower/upper bounds, maximum regret, dissent, and independent sign-off. Do not calculate a new total in the room.</a:t>
             </a:r>
           </a:p>
           <a:p xmlns:a="http://schemas.openxmlformats.org/drawingml/2006/main">
@@ -3131,7 +3321,7 @@
           </a:p>
           <a:p xmlns:a="http://schemas.openxmlformats.org/drawingml/2006/main">
             <a:r>
-              <a:t>Scores are illustrative author inputs, not an independent benchmark or production outcome.</a:t>
+              <a:t>Scores are illustrative stakeholder inputs, not an independent benchmark or production outcome. The pending re-score cannot be tuned to preserve a preferred order, and unknown evidence cannot silently become zero or earn points.</a:t>
             </a:r>
           </a:p>
           <a:p xmlns:a="http://schemas.openxmlformats.org/drawingml/2006/main">
@@ -3146,7 +3336,42 @@
           </a:p>
           <a:p xmlns:a="http://schemas.openxmlformats.org/drawingml/2006/main">
             <a:r>
-              <a:t>- docs/48-kong-guided-evaluation.md#supplied-scoring-audit</a:t>
+              <a:t>- 48-kong-guided-evaluation.md#supplied-scoring-audit</a:t>
+            </a:r>
+          </a:p>
+          <a:p xmlns:a="http://schemas.openxmlformats.org/drawingml/2006/main">
+            <a:r>
+              <a:t>- 48-kong-guided-evaluation.md#proposed-governed-re-score</a:t>
+            </a:r>
+          </a:p>
+          <a:p xmlns:a="http://schemas.openxmlformats.org/drawingml/2006/main">
+            <a:r>
+              <a:t>- ../decision-matrix/scoring-guide.md</a:t>
+            </a:r>
+          </a:p>
+          <a:p xmlns:a="http://schemas.openxmlformats.org/drawingml/2006/main">
+            <a:r>
+              <a:t>- https://developer.konghq.com/gateway/deployment-topologies/</a:t>
+            </a:r>
+          </a:p>
+          <a:p xmlns:a="http://schemas.openxmlformats.org/drawingml/2006/main">
+            <a:r>
+              <a:t>- https://developer.konghq.com/ai-gateway/</a:t>
+            </a:r>
+          </a:p>
+          <a:p xmlns:a="http://schemas.openxmlformats.org/drawingml/2006/main">
+            <a:r>
+              <a:t>- https://docs.cloud.google.com/apigee/docs/hybrid/v1.16/what-is-hybrid</a:t>
+            </a:r>
+          </a:p>
+          <a:p xmlns:a="http://schemas.openxmlformats.org/drawingml/2006/main">
+            <a:r>
+              <a:t>- https://docs.mulesoft.com/gateway/latest/</a:t>
+            </a:r>
+          </a:p>
+          <a:p xmlns:a="http://schemas.openxmlformats.org/drawingml/2006/main">
+            <a:r>
+              <a:t>- https://learn.microsoft.com/en-us/azure/api-management/self-hosted-gateway-overview</a:t>
             </a:r>
           </a:p>
         </p:txBody>
@@ -3221,7 +3446,7 @@
           </a:p>
           <a:p xmlns:a="http://schemas.openxmlformats.org/drawingml/2006/main">
             <a:r>
-              <a:t>Make the decision model transparent before showing a result.</a:t>
+              <a:t>Make the historical weighting model transparent and expose the dimensions required for a governed re-score.</a:t>
             </a:r>
           </a:p>
           <a:p xmlns:a="http://schemas.openxmlformats.org/drawingml/2006/main">
@@ -3236,7 +3461,7 @@
           </a:p>
           <a:p xmlns:a="http://schemas.openxmlformats.org/drawingml/2006/main">
             <a:r>
-              <a:t>Eight weighted categories sum to 100%. Developer experience and multicloud appear in the narrative but not as distinct weights. Migration effort and operating labor are also absent, so the score is a directional preference model, not a full business case.</a:t>
+              <a:t>Eight supplied categories sum to 100%, and Kubernetes plus GitOps carry 35%. Multicloud, robustness, reversibility/vendor dependency, fully allocated TCO, and control-plane operating responsibility are absent or compressed in that simplified model, but they are already present in the canonical 120-criterion matrix. The proposed `GRS-01`–`GRS-06` specification exposes them without duplicating the taxonomy. Its weights and ratings remain `TBD`.</a:t>
             </a:r>
           </a:p>
           <a:p xmlns:a="http://schemas.openxmlformats.org/drawingml/2006/main">
@@ -3251,7 +3476,7 @@
           </a:p>
           <a:p xmlns:a="http://schemas.openxmlformats.org/drawingml/2006/main">
             <a:r>
-              <a:t>Confirm the weights and add sensitivity ranges before using them as an approval mechanism.</a:t>
+              <a:t>Approve the re-score dimensions, exact-option boundary, mandatory gates, evidence floor, role-based scorer and approver panel, weight ranges, confidence treatment, sensitivity method, dissent rule, and permitted decision use. Do not assign ratings in this meeting.</a:t>
             </a:r>
           </a:p>
           <a:p xmlns:a="http://schemas.openxmlformats.org/drawingml/2006/main">
@@ -3281,7 +3506,7 @@
           </a:p>
           <a:p xmlns:a="http://schemas.openxmlformats.org/drawingml/2006/main">
             <a:r>
-              <a:t>Ratings lack a documented rubric, named scorers, evidence confidence, product edition and sensitivity analysis.</a:t>
+              <a:t>The proposed re-score is pending, not a revised ranking. Ratings still lack an approved rubric, score-capable evidence, exact options, scorer panel, confidence, common-evidence treatment, bounds, maximum-regret analysis, and sensitivity approval.</a:t>
             </a:r>
           </a:p>
           <a:p xmlns:a="http://schemas.openxmlformats.org/drawingml/2006/main">
@@ -3296,7 +3521,32 @@
           </a:p>
           <a:p xmlns:a="http://schemas.openxmlformats.org/drawingml/2006/main">
             <a:r>
-              <a:t>- docs/48-kong-guided-evaluation.md#supplied-weighting-model</a:t>
+              <a:t>- 48-kong-guided-evaluation.md#supplied-weighting-model</a:t>
+            </a:r>
+          </a:p>
+          <a:p xmlns:a="http://schemas.openxmlformats.org/drawingml/2006/main">
+            <a:r>
+              <a:t>- 48-kong-guided-evaluation.md#meeting-feedback-assurance-crosswalk</a:t>
+            </a:r>
+          </a:p>
+          <a:p xmlns:a="http://schemas.openxmlformats.org/drawingml/2006/main">
+            <a:r>
+              <a:t>- 48-kong-guided-evaluation.md#proposed-governed-re-score</a:t>
+            </a:r>
+          </a:p>
+          <a:p xmlns:a="http://schemas.openxmlformats.org/drawingml/2006/main">
+            <a:r>
+              <a:t>- ../decision-matrix/scoring-guide.md</a:t>
+            </a:r>
+          </a:p>
+          <a:p xmlns:a="http://schemas.openxmlformats.org/drawingml/2006/main">
+            <a:r>
+              <a:t>- https://developer.konghq.com/gateway/deployment-topologies/</a:t>
+            </a:r>
+          </a:p>
+          <a:p xmlns:a="http://schemas.openxmlformats.org/drawingml/2006/main">
+            <a:r>
+              <a:t>- https://developer.konghq.com/gateway/hybrid-mode/</a:t>
             </a:r>
           </a:p>
         </p:txBody>
@@ -3556,7 +3806,7 @@
           </a:p>
           <a:p xmlns:a="http://schemas.openxmlformats.org/drawingml/2006/main">
             <a:r>
-              <a:t>The Kong total is 93. The same formula yields 85.5 for Apigee and 77 for MuleSoft, rather than 87 and 78 in the source results table. The ordering is unchanged, but the arithmetic and evidence limits matter.</a:t>
+              <a:t>The historical inputs recalculate to 93 for Kong, 85.5 for Apigee, and 77 for MuleSoft rather than 87 and 78 in the source results table. Preserve those inputs and the correction for audit. Do not publish an expanded total until `GRS-01`–`GRS-06`, exact options, mandatory gates, rubric, score-capable evidence, weights, confidence, scorer panel, sensitivity, bounds, regret treatment, and dissent are approved.</a:t>
             </a:r>
           </a:p>
           <a:p xmlns:a="http://schemas.openxmlformats.org/drawingml/2006/main">
@@ -3571,7 +3821,7 @@
           </a:p>
           <a:p xmlns:a="http://schemas.openxmlformats.org/drawingml/2006/main">
             <a:r>
-              <a:t>Treat the result as a directional preference to test, not a selection proof.</a:t>
+              <a:t>Confirm that the historical score remains directional preference input only, then assign role ownership for a governed recalculation that is allowed to change—not preserve—the order.</a:t>
             </a:r>
           </a:p>
           <a:p xmlns:a="http://schemas.openxmlformats.org/drawingml/2006/main">
@@ -3601,7 +3851,7 @@
           </a:p>
           <a:p xmlns:a="http://schemas.openxmlformats.org/drawingml/2006/main">
             <a:r>
-              <a:t>No sensitivity analysis or confidence adjustment has been applied. Exact scores should stay out of external claims.</a:t>
+              <a:t>No governed recalculation has been run. The added dimensions still have `TBD` weights and ratings, and the historical scores should not be presented as an independent benchmark, confidence percentage, or production-fit result.</a:t>
             </a:r>
           </a:p>
           <a:p xmlns:a="http://schemas.openxmlformats.org/drawingml/2006/main">
@@ -3616,7 +3866,37 @@
           </a:p>
           <a:p xmlns:a="http://schemas.openxmlformats.org/drawingml/2006/main">
             <a:r>
-              <a:t>- docs/48-kong-guided-evaluation.md#supplied-scoring-audit</a:t>
+              <a:t>- 48-kong-guided-evaluation.md#supplied-scoring-audit</a:t>
+            </a:r>
+          </a:p>
+          <a:p xmlns:a="http://schemas.openxmlformats.org/drawingml/2006/main">
+            <a:r>
+              <a:t>- 48-kong-guided-evaluation.md#proposed-governed-re-score</a:t>
+            </a:r>
+          </a:p>
+          <a:p xmlns:a="http://schemas.openxmlformats.org/drawingml/2006/main">
+            <a:r>
+              <a:t>- ../decision-matrix/scoring-guide.md</a:t>
+            </a:r>
+          </a:p>
+          <a:p xmlns:a="http://schemas.openxmlformats.org/drawingml/2006/main">
+            <a:r>
+              <a:t>- https://developer.konghq.com/gateway/deployment-topologies/</a:t>
+            </a:r>
+          </a:p>
+          <a:p xmlns:a="http://schemas.openxmlformats.org/drawingml/2006/main">
+            <a:r>
+              <a:t>- https://docs.cloud.google.com/apigee/docs/hybrid/v1.16/what-is-hybrid</a:t>
+            </a:r>
+          </a:p>
+          <a:p xmlns:a="http://schemas.openxmlformats.org/drawingml/2006/main">
+            <a:r>
+              <a:t>- https://docs.mulesoft.com/gateway/latest/</a:t>
+            </a:r>
+          </a:p>
+          <a:p xmlns:a="http://schemas.openxmlformats.org/drawingml/2006/main">
+            <a:r>
+              <a:t>- https://learn.microsoft.com/en-us/azure/api-management/self-hosted-gateway-overview</a:t>
             </a:r>
           </a:p>
         </p:txBody>
@@ -3996,7 +4276,7 @@
           </a:p>
           <a:p xmlns:a="http://schemas.openxmlformats.org/drawingml/2006/main">
             <a:r>
-              <a:t>Make the cost side of the target operating boundary visible.</a:t>
+              <a:t>Make the accountability, risk, and fully allocated cost side of the target operating boundary visible without making an unsupported legal conclusion.</a:t>
             </a:r>
           </a:p>
           <a:p xmlns:a="http://schemas.openxmlformats.org/drawingml/2006/main">
@@ -4011,7 +4291,7 @@
           </a:p>
           <a:p xmlns:a="http://schemas.openxmlformats.org/drawingml/2006/main">
             <a:r>
-              <a:t>The same custody that makes self-managed Kong attractive also creates permanent CP, database, PKI, upgrade, restore and 24×7 obligations. Those duties must have named owners and funded capacity.</a:t>
+              <a:t>The same custody that makes self-managed Kong attractive transfers permanent CP, PostgreSQL, PKI, Admin API, plugin/license, audit, upgrade, restore, support, and 24×7 service duties to enterprise roles. Cached data-plane service narrows one failure consequence; it does not remove control-plane recovery, urgent mutation/revocation, clean-node scale, reconciliation, or service accountability.</a:t>
             </a:r>
           </a:p>
           <a:p xmlns:a="http://schemas.openxmlformats.org/drawingml/2006/main">
@@ -4026,7 +4306,7 @@
           </a:p>
           <a:p xmlns:a="http://schemas.openxmlformats.org/drawingml/2006/main">
             <a:r>
-              <a:t>Confirm whether these duties belong inside the enterprise platform operating model.</a:t>
+              <a:t>Confirm whether platform product, database/SRE, PKI/security, release engineering, service management, sourcing/FinOps, and support roles accept the duty, capacity, objectives, evidence, and escalation path.</a:t>
             </a:r>
           </a:p>
           <a:p xmlns:a="http://schemas.openxmlformats.org/drawingml/2006/main">
@@ -4056,7 +4336,7 @@
           </a:p>
           <a:p xmlns:a="http://schemas.openxmlformats.org/drawingml/2006/main">
             <a:r>
-              <a:t>Control-plane outage continuity does not imply mutation, revocation or recovery guarantees; those are separate tests.</a:t>
+              <a:t>This is an operating-accountability and risk-exposure statement. Contractual allocation depends on exact support and commercial evidence; legal liability requires counsel in the approved restricted process. Control-plane continuity does not imply mutation, revocation, clean-node admission, or recovery guarantees.</a:t>
             </a:r>
           </a:p>
           <a:p xmlns:a="http://schemas.openxmlformats.org/drawingml/2006/main">
@@ -4071,12 +4351,27 @@
           </a:p>
           <a:p xmlns:a="http://schemas.openxmlformats.org/drawingml/2006/main">
             <a:r>
+              <a:t>- 47-kong-enterprise-platform-strategy.md</a:t>
+            </a:r>
+          </a:p>
+          <a:p xmlns:a="http://schemas.openxmlformats.org/drawingml/2006/main">
+            <a:r>
+              <a:t>- 48-kong-guided-evaluation.md</a:t>
+            </a:r>
+          </a:p>
+          <a:p xmlns:a="http://schemas.openxmlformats.org/drawingml/2006/main">
+            <a:r>
+              <a:t>- ../research/glossary.md#kong-terminology-crosswalk</a:t>
+            </a:r>
+          </a:p>
+          <a:p xmlns:a="http://schemas.openxmlformats.org/drawingml/2006/main">
+            <a:r>
               <a:t>- https://developer.konghq.com/gateway/hybrid-mode/</a:t>
             </a:r>
           </a:p>
           <a:p xmlns:a="http://schemas.openxmlformats.org/drawingml/2006/main">
             <a:r>
-              <a:t>- docs/47-kong-enterprise-platform-strategy.md</a:t>
+              <a:t>- https://developer.konghq.com/gateway/version-support-policy/</a:t>
             </a:r>
           </a:p>
         </p:txBody>
@@ -4299,7 +4594,7 @@
   </p:cSld>
   <p:clrMap bg1="lt1" tx1="dk1" bg2="lt2" tx2="dk2" accent1="accent1" accent2="accent2" accent3="accent3" accent4="accent4" accent5="accent5" accent6="accent6" hlink="hlink" folHlink="folHlink"/>
   <p:sldLayoutIdLst>
-    <p:sldLayoutId xmlns:r="http://schemas.openxmlformats.org/officeDocument/2006/relationships" id="2147483649" r:id="R67ba9097afc64f3f"/>
+    <p:sldLayoutId xmlns:r="http://schemas.openxmlformats.org/officeDocument/2006/relationships" id="2147483649" r:id="R919bba39c6d941da"/>
   </p:sldLayoutIdLst>
   <p:txStyles>
     <p:titleStyle>
@@ -5601,7 +5896,7 @@
                 <a:solidFill>
                   <a:srgbClr val="666762"/>
                 </a:solidFill>
-                <a:hlinkClick xmlns:r="http://schemas.openxmlformats.org/officeDocument/2006/relationships" r:id="Rbbf0e434237d45b8"/>
+                <a:hlinkClick xmlns:r="http://schemas.openxmlformats.org/officeDocument/2006/relationships" r:id="R063df1eeff244169"/>
               </a:rPr>
               <a:t>Repo reference</a:t>
             </a:r>
@@ -5618,7 +5913,7 @@
                 <a:solidFill>
                   <a:srgbClr val="666762"/>
                 </a:solidFill>
-                <a:hlinkClick xmlns:r="http://schemas.openxmlformats.org/officeDocument/2006/relationships" r:id="Rfe537a1e1a0844bf"/>
+                <a:hlinkClick xmlns:r="http://schemas.openxmlformats.org/officeDocument/2006/relationships" r:id="Rabfc1b3f59d745bf"/>
               </a:rPr>
               <a:t>Official docs</a:t>
             </a:r>
@@ -5979,7 +6274,7 @@
                 <a:solidFill>
                   <a:srgbClr val="666762"/>
                 </a:solidFill>
-                <a:hlinkClick xmlns:r="http://schemas.openxmlformats.org/officeDocument/2006/relationships" r:id="R0a801d7f63804d41"/>
+                <a:hlinkClick xmlns:r="http://schemas.openxmlformats.org/officeDocument/2006/relationships" r:id="Rf1f8380c03b349e3"/>
               </a:rPr>
               <a:t>Repo reference</a:t>
             </a:r>
@@ -5996,7 +6291,7 @@
                 <a:solidFill>
                   <a:srgbClr val="666762"/>
                 </a:solidFill>
-                <a:hlinkClick xmlns:r="http://schemas.openxmlformats.org/officeDocument/2006/relationships" r:id="R1d3dcd7ae7b94e35"/>
+                <a:hlinkClick xmlns:r="http://schemas.openxmlformats.org/officeDocument/2006/relationships" r:id="R6ce6f9e3429549b3"/>
               </a:rPr>
               <a:t>Official docs</a:t>
             </a:r>
@@ -7285,7 +7580,7 @@
                 <a:solidFill>
                   <a:srgbClr val="666762"/>
                 </a:solidFill>
-                <a:hlinkClick xmlns:r="http://schemas.openxmlformats.org/officeDocument/2006/relationships" r:id="Rced0b2ba97b540b7"/>
+                <a:hlinkClick xmlns:r="http://schemas.openxmlformats.org/officeDocument/2006/relationships" r:id="Rafbb0ef3c20f4602"/>
               </a:rPr>
               <a:t>Repo reference</a:t>
             </a:r>
@@ -7302,7 +7597,7 @@
                 <a:solidFill>
                   <a:srgbClr val="666762"/>
                 </a:solidFill>
-                <a:hlinkClick xmlns:r="http://schemas.openxmlformats.org/officeDocument/2006/relationships" r:id="R52c80b63c6294c51"/>
+                <a:hlinkClick xmlns:r="http://schemas.openxmlformats.org/officeDocument/2006/relationships" r:id="R43d221ddfb2240a0"/>
               </a:rPr>
               <a:t>Official docs</a:t>
             </a:r>
@@ -8078,7 +8373,7 @@
       </p:sp>
       <p:cxnSp>
         <p:nvCxnSpPr>
-          <p:cNvPr id="194" name=""/>
+          <p:cNvPr id="263" name=""/>
           <p:cNvCxnSpPr>
             <a:stCxn xmlns:a="http://schemas.openxmlformats.org/drawingml/2006/main" id="9" idx="3"/>
             <a:endCxn xmlns:a="http://schemas.openxmlformats.org/drawingml/2006/main" id="12" idx="1"/>
@@ -8104,7 +8399,7 @@
       </p:cxnSp>
       <p:cxnSp>
         <p:nvCxnSpPr>
-          <p:cNvPr id="195" name=""/>
+          <p:cNvPr id="264" name=""/>
           <p:cNvCxnSpPr>
             <a:stCxn xmlns:a="http://schemas.openxmlformats.org/drawingml/2006/main" id="12" idx="3"/>
             <a:endCxn xmlns:a="http://schemas.openxmlformats.org/drawingml/2006/main" id="15" idx="1"/>
@@ -8130,7 +8425,7 @@
       </p:cxnSp>
       <p:cxnSp>
         <p:nvCxnSpPr>
-          <p:cNvPr id="196" name=""/>
+          <p:cNvPr id="265" name=""/>
           <p:cNvCxnSpPr>
             <a:stCxn xmlns:a="http://schemas.openxmlformats.org/drawingml/2006/main" id="15" idx="3"/>
             <a:endCxn xmlns:a="http://schemas.openxmlformats.org/drawingml/2006/main" id="18" idx="1"/>
@@ -9112,7 +9407,7 @@
                 <a:solidFill>
                   <a:srgbClr val="666762"/>
                 </a:solidFill>
-                <a:hlinkClick xmlns:r="http://schemas.openxmlformats.org/officeDocument/2006/relationships" r:id="R523210e31ed74dd5"/>
+                <a:hlinkClick xmlns:r="http://schemas.openxmlformats.org/officeDocument/2006/relationships" r:id="Rd2d3cea478524721"/>
               </a:rPr>
               <a:t>Repo reference</a:t>
             </a:r>
@@ -9129,7 +9424,7 @@
                 <a:solidFill>
                   <a:srgbClr val="666762"/>
                 </a:solidFill>
-                <a:hlinkClick xmlns:r="http://schemas.openxmlformats.org/officeDocument/2006/relationships" r:id="R51ee73d822b94c21"/>
+                <a:hlinkClick xmlns:r="http://schemas.openxmlformats.org/officeDocument/2006/relationships" r:id="R539c58432d4744c9"/>
               </a:rPr>
               <a:t>Official docs</a:t>
             </a:r>
@@ -10764,7 +11059,7 @@
                 <a:solidFill>
                   <a:srgbClr val="666762"/>
                 </a:solidFill>
-                <a:hlinkClick xmlns:r="http://schemas.openxmlformats.org/officeDocument/2006/relationships" r:id="Re66eedb839c54273"/>
+                <a:hlinkClick xmlns:r="http://schemas.openxmlformats.org/officeDocument/2006/relationships" r:id="Ra2b5e1c4e28a46a7"/>
               </a:rPr>
               <a:t>Repo reference</a:t>
             </a:r>
@@ -10781,7 +11076,7 @@
                 <a:solidFill>
                   <a:srgbClr val="666762"/>
                 </a:solidFill>
-                <a:hlinkClick xmlns:r="http://schemas.openxmlformats.org/officeDocument/2006/relationships" r:id="R00a9e463814e48f4"/>
+                <a:hlinkClick xmlns:r="http://schemas.openxmlformats.org/officeDocument/2006/relationships" r:id="Rf70857b4e97e4c7d"/>
               </a:rPr>
               <a:t>Official docs</a:t>
             </a:r>
@@ -13008,7 +13303,7 @@
                 <a:solidFill>
                   <a:srgbClr val="666762"/>
                 </a:solidFill>
-                <a:hlinkClick xmlns:r="http://schemas.openxmlformats.org/officeDocument/2006/relationships" r:id="R7aa7d65826ad432c"/>
+                <a:hlinkClick xmlns:r="http://schemas.openxmlformats.org/officeDocument/2006/relationships" r:id="Rf626b329861a487b"/>
               </a:rPr>
               <a:t>Repo reference</a:t>
             </a:r>
@@ -13025,7 +13320,7 @@
                 <a:solidFill>
                   <a:srgbClr val="666762"/>
                 </a:solidFill>
-                <a:hlinkClick xmlns:r="http://schemas.openxmlformats.org/officeDocument/2006/relationships" r:id="R1e11eac9486c4b0b"/>
+                <a:hlinkClick xmlns:r="http://schemas.openxmlformats.org/officeDocument/2006/relationships" r:id="R712569a5a4d54fb7"/>
               </a:rPr>
               <a:t>Official docs</a:t>
             </a:r>
@@ -14971,7 +15266,7 @@
                 <a:solidFill>
                   <a:srgbClr val="666762"/>
                 </a:solidFill>
-                <a:hlinkClick xmlns:r="http://schemas.openxmlformats.org/officeDocument/2006/relationships" r:id="R2da00fdd75884681"/>
+                <a:hlinkClick xmlns:r="http://schemas.openxmlformats.org/officeDocument/2006/relationships" r:id="R1263daf97d134853"/>
               </a:rPr>
               <a:t>Repo reference</a:t>
             </a:r>
@@ -14988,7 +15283,7 @@
                 <a:solidFill>
                   <a:srgbClr val="666762"/>
                 </a:solidFill>
-                <a:hlinkClick xmlns:r="http://schemas.openxmlformats.org/officeDocument/2006/relationships" r:id="Rc4928489af994148"/>
+                <a:hlinkClick xmlns:r="http://schemas.openxmlformats.org/officeDocument/2006/relationships" r:id="R4bbe7096d3104c54"/>
               </a:rPr>
               <a:t>Official docs</a:t>
             </a:r>
@@ -15845,7 +16140,7 @@
       </p:sp>
       <p:cxnSp>
         <p:nvCxnSpPr>
-          <p:cNvPr id="223" name=""/>
+          <p:cNvPr id="307" name=""/>
           <p:cNvCxnSpPr>
             <a:stCxn xmlns:a="http://schemas.openxmlformats.org/drawingml/2006/main" id="9" idx="3"/>
             <a:endCxn xmlns:a="http://schemas.openxmlformats.org/drawingml/2006/main" id="12" idx="1"/>
@@ -15871,7 +16166,7 @@
       </p:cxnSp>
       <p:cxnSp>
         <p:nvCxnSpPr>
-          <p:cNvPr id="224" name=""/>
+          <p:cNvPr id="308" name=""/>
           <p:cNvCxnSpPr>
             <a:stCxn xmlns:a="http://schemas.openxmlformats.org/drawingml/2006/main" id="12" idx="3"/>
             <a:endCxn xmlns:a="http://schemas.openxmlformats.org/drawingml/2006/main" id="15" idx="1"/>
@@ -15899,7 +16194,7 @@
       </p:cxnSp>
       <p:cxnSp>
         <p:nvCxnSpPr>
-          <p:cNvPr id="225" name=""/>
+          <p:cNvPr id="309" name=""/>
           <p:cNvCxnSpPr>
             <a:stCxn xmlns:a="http://schemas.openxmlformats.org/drawingml/2006/main" id="12" idx="3"/>
             <a:endCxn xmlns:a="http://schemas.openxmlformats.org/drawingml/2006/main" id="18" idx="1"/>
@@ -15927,7 +16222,7 @@
       </p:cxnSp>
       <p:cxnSp>
         <p:nvCxnSpPr>
-          <p:cNvPr id="226" name=""/>
+          <p:cNvPr id="310" name=""/>
           <p:cNvCxnSpPr>
             <a:stCxn xmlns:a="http://schemas.openxmlformats.org/drawingml/2006/main" id="15" idx="3"/>
             <a:endCxn xmlns:a="http://schemas.openxmlformats.org/drawingml/2006/main" id="21" idx="1"/>
@@ -15955,7 +16250,7 @@
       </p:cxnSp>
       <p:cxnSp>
         <p:nvCxnSpPr>
-          <p:cNvPr id="227" name=""/>
+          <p:cNvPr id="311" name=""/>
           <p:cNvCxnSpPr>
             <a:stCxn xmlns:a="http://schemas.openxmlformats.org/drawingml/2006/main" id="18" idx="3"/>
             <a:endCxn xmlns:a="http://schemas.openxmlformats.org/drawingml/2006/main" id="21" idx="1"/>
@@ -16336,7 +16631,7 @@
                 <a:ea typeface="Arial"/>
                 <a:cs typeface="Arial"/>
               </a:rPr>
-              <a:t>Migration advances on evidence—not time</a:t>
+              <a:t>Mule and Apigee migration advance on evidence—not time</a:t>
             </a:r>
           </a:p>
         </p:txBody>
@@ -16395,7 +16690,30 @@
                 <a:ea typeface="Arial"/>
                 <a:cs typeface="Arial"/>
               </a:rPr>
-              <a:t>A scenario planning sequence—not current programme status.</a:t>
+              <a:t>Mule M0–M5 and </a:t>
+            </a:r>
+            <a:r>
+              <a:rPr sz="1575" b="0" i="0">
+                <a:solidFill>
+                  <a:srgbClr val="686A66"/>
+                </a:solidFill>
+                <a:latin typeface="Arial"/>
+                <a:ea typeface="Arial"/>
+                <a:cs typeface="Arial"/>
+                <a:hlinkClick xmlns:r="http://schemas.openxmlformats.org/officeDocument/2006/relationships" r:id="R62e375ce0497439d"/>
+              </a:rPr>
+              <a:t>Apigee A0–A6</a:t>
+            </a:r>
+            <a:r>
+              <a:rPr sz="1575" b="0" i="0">
+                <a:solidFill>
+                  <a:srgbClr val="686A66"/>
+                </a:solidFill>
+                <a:latin typeface="Arial"/>
+                <a:ea typeface="Arial"/>
+                <a:cs typeface="Arial"/>
+              </a:rPr>
+              <a:t> share stable-edge, coexistence, route-back and dependency-zero gates.</a:t>
             </a:r>
           </a:p>
         </p:txBody>
@@ -16486,7 +16804,7 @@
                 <a:solidFill>
                   <a:srgbClr val="666762"/>
                 </a:solidFill>
-                <a:hlinkClick xmlns:r="http://schemas.openxmlformats.org/officeDocument/2006/relationships" r:id="R1022742dc6a645c1"/>
+                <a:hlinkClick xmlns:r="http://schemas.openxmlformats.org/officeDocument/2006/relationships" r:id="R1c28582fbaff48e4"/>
               </a:rPr>
               <a:t>Repo reference</a:t>
             </a:r>
@@ -16503,7 +16821,7 @@
                 <a:solidFill>
                   <a:srgbClr val="666762"/>
                 </a:solidFill>
-                <a:hlinkClick xmlns:r="http://schemas.openxmlformats.org/officeDocument/2006/relationships" r:id="R97cd161f45374955"/>
+                <a:hlinkClick xmlns:r="http://schemas.openxmlformats.org/officeDocument/2006/relationships" r:id="R7f21fb6e85534687"/>
               </a:rPr>
               <a:t>Official docs</a:t>
             </a:r>
@@ -16623,7 +16941,7 @@
                 <a:ea typeface="Consolas"/>
                 <a:cs typeface="Consolas"/>
               </a:rPr>
-              <a:t>M0</a:t>
+              <a:t>M0/A0</a:t>
             </a:r>
           </a:p>
         </p:txBody>
@@ -16682,7 +17000,7 @@
                 <a:ea typeface="Georgia"/>
                 <a:cs typeface="Georgia"/>
               </a:rPr>
-              <a:t>Inventory + safety</a:t>
+              <a:t>Inventory + freeze</a:t>
             </a:r>
           </a:p>
         </p:txBody>
@@ -16831,7 +17149,31 @@
                 <a:ea typeface="Arial"/>
                 <a:cs typeface="Arial"/>
               </a:rPr>
-              <a:t>owners + runtime access</a:t>
+              <a:t>Mule duty + state</a:t>
+            </a:r>
+          </a:p>
+          <a:p xmlns:a="http://schemas.openxmlformats.org/drawingml/2006/main">
+            <a:pPr algn="l">
+              <a:buNone/>
+              <a:defRPr sz="1200" b="0" i="0">
+                <a:solidFill>
+                  <a:srgbClr val="111111"/>
+                </a:solidFill>
+                <a:latin typeface="Arial"/>
+                <a:ea typeface="Arial"/>
+                <a:cs typeface="Arial"/>
+              </a:defRPr>
+            </a:pPr>
+            <a:r>
+              <a:rPr sz="1200" b="0" i="0">
+                <a:solidFill>
+                  <a:srgbClr val="111111"/>
+                </a:solidFill>
+                <a:latin typeface="Arial"/>
+                <a:ea typeface="Arial"/>
+                <a:cs typeface="Arial"/>
+              </a:rPr>
+              <a:t>Apigee object graph</a:t>
             </a:r>
           </a:p>
         </p:txBody>
@@ -16949,7 +17291,7 @@
                 <a:ea typeface="Arial"/>
                 <a:cs typeface="Arial"/>
               </a:rPr>
-              <a:t>traffic / state / schedule reconciled</a:t>
+              <a:t>reconciled denominator</a:t>
             </a:r>
           </a:p>
         </p:txBody>
@@ -17039,7 +17381,7 @@
                 <a:ea typeface="Consolas"/>
                 <a:cs typeface="Consolas"/>
               </a:rPr>
-              <a:t>M1</a:t>
+              <a:t>M1/A1</a:t>
             </a:r>
           </a:p>
         </p:txBody>
@@ -17098,7 +17440,7 @@
                 <a:ea typeface="Georgia"/>
                 <a:cs typeface="Georgia"/>
               </a:rPr>
-              <a:t>Gateway-</a:t>
+              <a:t>Classify</a:t>
             </a:r>
           </a:p>
           <a:p xmlns:a="http://schemas.openxmlformats.org/drawingml/2006/main">
@@ -17122,7 +17464,7 @@
                 <a:ea typeface="Georgia"/>
                 <a:cs typeface="Georgia"/>
               </a:rPr>
-              <a:t>dominant</a:t>
+              <a:t>semantics</a:t>
             </a:r>
           </a:p>
         </p:txBody>
@@ -17271,7 +17613,7 @@
                 <a:ea typeface="Arial"/>
                 <a:cs typeface="Arial"/>
               </a:rPr>
-              <a:t>pattern + active digest</a:t>
+              <a:t>policy + behavior map</a:t>
             </a:r>
           </a:p>
         </p:txBody>
@@ -17389,7 +17731,7 @@
                 <a:ea typeface="Arial"/>
                 <a:cs typeface="Arial"/>
               </a:rPr>
-              <a:t>parity + restart + rollback</a:t>
+              <a:t>owner + destination</a:t>
             </a:r>
           </a:p>
         </p:txBody>
@@ -17479,7 +17821,7 @@
                 <a:ea typeface="Consolas"/>
                 <a:cs typeface="Consolas"/>
               </a:rPr>
-              <a:t>M2</a:t>
+              <a:t>M2/A2</a:t>
             </a:r>
           </a:p>
         </p:txBody>
@@ -17538,7 +17880,7 @@
                 <a:ea typeface="Georgia"/>
                 <a:cs typeface="Georgia"/>
               </a:rPr>
-              <a:t>Representative</a:t>
+              <a:t>Reversible</a:t>
             </a:r>
           </a:p>
           <a:p xmlns:a="http://schemas.openxmlformats.org/drawingml/2006/main">
@@ -17562,7 +17904,7 @@
                 <a:ea typeface="Georgia"/>
                 <a:cs typeface="Georgia"/>
               </a:rPr>
-              <a:t>integrations</a:t>
+              <a:t>foundation</a:t>
             </a:r>
           </a:p>
         </p:txBody>
@@ -17711,7 +18053,7 @@
                 <a:ea typeface="Arial"/>
                 <a:cs typeface="Arial"/>
               </a:rPr>
-              <a:t>idempotency + target runtime</a:t>
+              <a:t>BOM + APIOps + IAM</a:t>
             </a:r>
           </a:p>
         </p:txBody>
@@ -17829,7 +18171,7 @@
                 <a:ea typeface="Arial"/>
                 <a:cs typeface="Arial"/>
               </a:rPr>
-              <a:t>semantics + recovery accepted</a:t>
+              <a:t>restore + route-back</a:t>
             </a:r>
           </a:p>
         </p:txBody>
@@ -17919,7 +18261,7 @@
                 <a:ea typeface="Consolas"/>
                 <a:cs typeface="Consolas"/>
               </a:rPr>
-              <a:t>M3</a:t>
+              <a:t>M3/A3</a:t>
             </a:r>
           </a:p>
         </p:txBody>
@@ -17978,7 +18320,31 @@
                 <a:ea typeface="Georgia"/>
                 <a:cs typeface="Georgia"/>
               </a:rPr>
-              <a:t>Domain factory</a:t>
+              <a:t>Representative</a:t>
+            </a:r>
+          </a:p>
+          <a:p xmlns:a="http://schemas.openxmlformats.org/drawingml/2006/main">
+            <a:pPr algn="l">
+              <a:buNone/>
+              <a:defRPr sz="1725" b="0" i="0">
+                <a:solidFill>
+                  <a:srgbClr val="111111"/>
+                </a:solidFill>
+                <a:latin typeface="Georgia"/>
+                <a:ea typeface="Georgia"/>
+                <a:cs typeface="Georgia"/>
+              </a:defRPr>
+            </a:pPr>
+            <a:r>
+              <a:rPr sz="1725" b="0" i="0">
+                <a:solidFill>
+                  <a:srgbClr val="111111"/>
+                </a:solidFill>
+                <a:latin typeface="Georgia"/>
+                <a:ea typeface="Georgia"/>
+                <a:cs typeface="Georgia"/>
+              </a:rPr>
+              <a:t>parity</a:t>
             </a:r>
           </a:p>
         </p:txBody>
@@ -18127,7 +18493,7 @@
                 <a:ea typeface="Arial"/>
                 <a:cs typeface="Arial"/>
               </a:rPr>
-              <a:t>funded owners + automation</a:t>
+              <a:t>hard slice + corpus</a:t>
             </a:r>
           </a:p>
         </p:txBody>
@@ -18245,7 +18611,7 @@
                 <a:ea typeface="Arial"/>
                 <a:cs typeface="Arial"/>
               </a:rPr>
-              <a:t>ownership transferred</a:t>
+              <a:t>security + state + SLO</a:t>
             </a:r>
           </a:p>
         </p:txBody>
@@ -18335,7 +18701,7 @@
                 <a:ea typeface="Consolas"/>
                 <a:cs typeface="Consolas"/>
               </a:rPr>
-              <a:t>M4</a:t>
+              <a:t>M4/A4</a:t>
             </a:r>
           </a:p>
         </p:txBody>
@@ -18394,7 +18760,7 @@
                 <a:ea typeface="Georgia"/>
                 <a:cs typeface="Georgia"/>
               </a:rPr>
-              <a:t>Connector +</a:t>
+              <a:t>Bounded</a:t>
             </a:r>
           </a:p>
           <a:p xmlns:a="http://schemas.openxmlformats.org/drawingml/2006/main">
@@ -18418,7 +18784,7 @@
                 <a:ea typeface="Georgia"/>
                 <a:cs typeface="Georgia"/>
               </a:rPr>
-              <a:t>batch tail</a:t>
+              <a:t>coexistence</a:t>
             </a:r>
           </a:p>
         </p:txBody>
@@ -18567,7 +18933,7 @@
                 <a:ea typeface="Arial"/>
                 <a:cs typeface="Arial"/>
               </a:rPr>
-              <a:t>replace / retain decision</a:t>
+              <a:t>cohort + identity/state</a:t>
             </a:r>
           </a:p>
         </p:txBody>
@@ -18685,7 +19051,7 @@
                 <a:ea typeface="Arial"/>
                 <a:cs typeface="Arial"/>
               </a:rPr>
-              <a:t>exception bounded or removed</a:t>
+              <a:t>reconcile + timed rollback</a:t>
             </a:r>
           </a:p>
         </p:txBody>
@@ -18751,7 +19117,7 @@
         </p:spPr>
         <p:txBody>
           <a:bodyPr xmlns:a="http://schemas.openxmlformats.org/drawingml/2006/main" wrap="square" lIns="0" tIns="0" rIns="0" bIns="0" anchor="t">
-            <a:normAutofit fontScale="100000"/>
+            <a:normAutofit fontScale="96144"/>
           </a:bodyPr>
           <a:lstStyle xmlns:a="http://schemas.openxmlformats.org/drawingml/2006/main"/>
           <a:p xmlns:a="http://schemas.openxmlformats.org/drawingml/2006/main">
@@ -18775,7 +19141,7 @@
                 <a:ea typeface="Consolas"/>
                 <a:cs typeface="Consolas"/>
               </a:rPr>
-              <a:t>M5</a:t>
+              <a:t>M5/A5+</a:t>
             </a:r>
           </a:p>
         </p:txBody>
@@ -18810,7 +19176,7 @@
         </p:spPr>
         <p:txBody>
           <a:bodyPr xmlns:a="http://schemas.openxmlformats.org/drawingml/2006/main" wrap="square" lIns="0" tIns="0" rIns="0" bIns="0" anchor="t">
-            <a:normAutofit fontScale="100000"/>
+            <a:normAutofit fontScale="97472"/>
           </a:bodyPr>
           <a:lstStyle xmlns:a="http://schemas.openxmlformats.org/drawingml/2006/main"/>
           <a:p xmlns:a="http://schemas.openxmlformats.org/drawingml/2006/main">
@@ -18834,7 +19200,7 @@
                 <a:ea typeface="Georgia"/>
                 <a:cs typeface="Georgia"/>
               </a:rPr>
-              <a:t>Retire shared</a:t>
+              <a:t>Canary → A6</a:t>
             </a:r>
           </a:p>
           <a:p xmlns:a="http://schemas.openxmlformats.org/drawingml/2006/main">
@@ -18858,7 +19224,7 @@
                 <a:ea typeface="Georgia"/>
                 <a:cs typeface="Georgia"/>
               </a:rPr>
-              <a:t>runtime</a:t>
+              <a:t>dependency zero</a:t>
             </a:r>
           </a:p>
         </p:txBody>
@@ -19007,7 +19373,7 @@
                 <a:ea typeface="Arial"/>
                 <a:cs typeface="Arial"/>
               </a:rPr>
-              <a:t>traffic zero + archives</a:t>
+              <a:t>representative operating evidence</a:t>
             </a:r>
           </a:p>
         </p:txBody>
@@ -19125,7 +19491,7 @@
                 <a:ea typeface="Arial"/>
                 <a:cs typeface="Arial"/>
               </a:rPr>
-              <a:t>dependency zero</a:t>
+              <a:t>all source duties closed</a:t>
             </a:r>
           </a:p>
         </p:txBody>
@@ -19160,7 +19526,7 @@
         </p:spPr>
         <p:txBody>
           <a:bodyPr xmlns:a="http://schemas.openxmlformats.org/drawingml/2006/main" wrap="square" lIns="0" tIns="0" rIns="0" bIns="0" anchor="t">
-            <a:normAutofit fontScale="100000"/>
+            <a:normAutofit fontScale="90246"/>
           </a:bodyPr>
           <a:lstStyle xmlns:a="http://schemas.openxmlformats.org/drawingml/2006/main"/>
           <a:p xmlns:a="http://schemas.openxmlformats.org/drawingml/2006/main">
@@ -19184,7 +19550,7 @@
                 <a:ea typeface="Georgia"/>
                 <a:cs typeface="Georgia"/>
               </a:rPr>
-              <a:t>No wave advances because the calendar moved.</a:t>
+              <a:t>No path advances because the calendar moved—or a proxy bundle exported.</a:t>
             </a:r>
           </a:p>
         </p:txBody>
@@ -19543,7 +19909,7 @@
                 <a:solidFill>
                   <a:srgbClr val="666762"/>
                 </a:solidFill>
-                <a:hlinkClick xmlns:r="http://schemas.openxmlformats.org/officeDocument/2006/relationships" r:id="Re9a24bf5ed534727"/>
+                <a:hlinkClick xmlns:r="http://schemas.openxmlformats.org/officeDocument/2006/relationships" r:id="Rd0140178fd474b49"/>
               </a:rPr>
               <a:t>Repo reference</a:t>
             </a:r>
@@ -19560,7 +19926,7 @@
                 <a:solidFill>
                   <a:srgbClr val="666762"/>
                 </a:solidFill>
-                <a:hlinkClick xmlns:r="http://schemas.openxmlformats.org/officeDocument/2006/relationships" r:id="Rce6543ac207849c1"/>
+                <a:hlinkClick xmlns:r="http://schemas.openxmlformats.org/officeDocument/2006/relationships" r:id="Re4a0a24c3f964747"/>
               </a:rPr>
               <a:t>Official docs</a:t>
             </a:r>
@@ -20751,7 +21117,7 @@
                 <a:ea typeface="Arial"/>
                 <a:cs typeface="Arial"/>
               </a:rPr>
-              <a:t>Six workstreams convert a functional baseline into decision-grade evidence.</a:t>
+              <a:t>Seven workstreams convert the local baseline into decision-grade target evidence.</a:t>
             </a:r>
           </a:p>
         </p:txBody>
@@ -20842,7 +21208,7 @@
                 <a:solidFill>
                   <a:srgbClr val="666762"/>
                 </a:solidFill>
-                <a:hlinkClick xmlns:r="http://schemas.openxmlformats.org/officeDocument/2006/relationships" r:id="R4209fdf0f1a6407e"/>
+                <a:hlinkClick xmlns:r="http://schemas.openxmlformats.org/officeDocument/2006/relationships" r:id="R18ea84ca327940c5"/>
               </a:rPr>
               <a:t>Repo reference</a:t>
             </a:r>
@@ -20859,7 +21225,7 @@
                 <a:solidFill>
                   <a:srgbClr val="666762"/>
                 </a:solidFill>
-                <a:hlinkClick xmlns:r="http://schemas.openxmlformats.org/officeDocument/2006/relationships" r:id="R6ff692ef042d4ad1"/>
+                <a:hlinkClick xmlns:r="http://schemas.openxmlformats.org/officeDocument/2006/relationships" r:id="R221a2808b8c54ac9"/>
               </a:rPr>
               <a:t>Official docs</a:t>
             </a:r>
@@ -21929,7 +22295,7 @@
                 <a:ea typeface="Consolas"/>
                 <a:cs typeface="Consolas"/>
               </a:rPr>
-              <a:t>AGENTIC + DECISION</a:t>
+              <a:t>AGENTIC + SECURITY + DECISION</a:t>
             </a:r>
           </a:p>
         </p:txBody>
@@ -22203,7 +22569,7 @@
         </p:spPr>
         <p:txBody>
           <a:bodyPr xmlns:a="http://schemas.openxmlformats.org/drawingml/2006/main" wrap="square" lIns="0" tIns="0" rIns="0" bIns="0" anchor="t">
-            <a:normAutofit fontScale="100000"/>
+            <a:normAutofit fontScale="95441"/>
           </a:bodyPr>
           <a:lstStyle xmlns:a="http://schemas.openxmlformats.org/drawingml/2006/main"/>
           <a:p xmlns:a="http://schemas.openxmlformats.org/drawingml/2006/main">
@@ -22227,7 +22593,7 @@
                 <a:ea typeface="Consolas"/>
                 <a:cs typeface="Consolas"/>
               </a:rPr>
-              <a:t>06</a:t>
+              <a:t>06 / 07</a:t>
             </a:r>
           </a:p>
         </p:txBody>
@@ -22286,7 +22652,7 @@
                 <a:ea typeface="Georgia"/>
                 <a:cs typeface="Georgia"/>
               </a:rPr>
-              <a:t>Evidence-gated recommendation</a:t>
+              <a:t>Decision gate + security adjunct</a:t>
             </a:r>
           </a:p>
         </p:txBody>
@@ -22345,7 +22711,7 @@
                 <a:ea typeface="Arial"/>
                 <a:cs typeface="Arial"/>
               </a:rPr>
-              <a:t>Base production scope on executed results and reviewable artifacts—not documented capability.</a:t>
+              <a:t>GEP-06 binds scope to executed evidence. GEP-07 proves Kong + Traceable behavior, overhead, privacy, support and safe uninstall.</a:t>
             </a:r>
           </a:p>
         </p:txBody>
@@ -22435,7 +22801,7 @@
                 <a:ea typeface="Arial"/>
                 <a:cs typeface="Arial"/>
               </a:rPr>
-              <a:t>Documented capability creates a hypothesis; executed evidence changes the decision.</a:t>
+              <a:t>Traceable documents a plugin/agent path; only execution can establish production fit.</a:t>
             </a:r>
           </a:p>
         </p:txBody>
@@ -22794,7 +23160,7 @@
                 <a:solidFill>
                   <a:srgbClr val="666762"/>
                 </a:solidFill>
-                <a:hlinkClick xmlns:r="http://schemas.openxmlformats.org/officeDocument/2006/relationships" r:id="R21bf07e7b8524a3a"/>
+                <a:hlinkClick xmlns:r="http://schemas.openxmlformats.org/officeDocument/2006/relationships" r:id="Rd5102ee8f65a423c"/>
               </a:rPr>
               <a:t>Repo reference</a:t>
             </a:r>
@@ -22811,7 +23177,7 @@
                 <a:solidFill>
                   <a:srgbClr val="666762"/>
                 </a:solidFill>
-                <a:hlinkClick xmlns:r="http://schemas.openxmlformats.org/officeDocument/2006/relationships" r:id="Re3b90cdc619542e5"/>
+                <a:hlinkClick xmlns:r="http://schemas.openxmlformats.org/officeDocument/2006/relationships" r:id="Rb4a02421c0ce42e8"/>
               </a:rPr>
               <a:t>Official docs</a:t>
             </a:r>
@@ -25166,7 +25532,7 @@
                 <a:solidFill>
                   <a:srgbClr val="666762"/>
                 </a:solidFill>
-                <a:hlinkClick xmlns:r="http://schemas.openxmlformats.org/officeDocument/2006/relationships" r:id="R9a847bc6e3494304"/>
+                <a:hlinkClick xmlns:r="http://schemas.openxmlformats.org/officeDocument/2006/relationships" r:id="R1adb478676e24d4f"/>
               </a:rPr>
               <a:t>Repo reference</a:t>
             </a:r>
@@ -25183,7 +25549,7 @@
                 <a:solidFill>
                   <a:srgbClr val="666762"/>
                 </a:solidFill>
-                <a:hlinkClick xmlns:r="http://schemas.openxmlformats.org/officeDocument/2006/relationships" r:id="R9cbef054e21c4756"/>
+                <a:hlinkClick xmlns:r="http://schemas.openxmlformats.org/officeDocument/2006/relationships" r:id="Ra49e7b2f39b04741"/>
               </a:rPr>
               <a:t>Official docs</a:t>
             </a:r>
@@ -26718,7 +27084,7 @@
                 <a:ea typeface="Arial"/>
                 <a:cs typeface="Arial"/>
               </a:rPr>
-              <a:t>A technically healthy gateway can still fail the enterprise outcome gate.</a:t>
+              <a:t>Capacity, security traceability, adoption, toil, exit and estate truth all gate scale.</a:t>
             </a:r>
           </a:p>
         </p:txBody>
@@ -26809,7 +27175,7 @@
                 <a:solidFill>
                   <a:srgbClr val="666762"/>
                 </a:solidFill>
-                <a:hlinkClick xmlns:r="http://schemas.openxmlformats.org/officeDocument/2006/relationships" r:id="R067ace37372f4444"/>
+                <a:hlinkClick xmlns:r="http://schemas.openxmlformats.org/officeDocument/2006/relationships" r:id="R3bf9810ed14d46cb"/>
               </a:rPr>
               <a:t>Repo reference</a:t>
             </a:r>
@@ -26826,7 +27192,7 @@
                 <a:solidFill>
                   <a:srgbClr val="666762"/>
                 </a:solidFill>
-                <a:hlinkClick xmlns:r="http://schemas.openxmlformats.org/officeDocument/2006/relationships" r:id="Rab5bb13600e0468a"/>
+                <a:hlinkClick xmlns:r="http://schemas.openxmlformats.org/officeDocument/2006/relationships" r:id="R7bc13b7db82d40b0"/>
               </a:rPr>
               <a:t>Official docs</a:t>
             </a:r>
@@ -27279,7 +27645,7 @@
                 <a:ea typeface="Georgia"/>
                 <a:cs typeface="Georgia"/>
               </a:rPr>
-              <a:t>Evidence safety</a:t>
+              <a:t>Security traceability</a:t>
             </a:r>
           </a:p>
         </p:txBody>
@@ -27369,7 +27735,7 @@
                 <a:ea typeface="Arial"/>
                 <a:cs typeface="Arial"/>
               </a:rPr>
-              <a:t>off-path telemetry · quantified gaps · no prohibited fields</a:t>
+              <a:t>config + request + security correlation · quantified gaps · no prohibited fields</a:t>
             </a:r>
           </a:p>
         </p:txBody>
@@ -28751,7 +29117,7 @@
                 <a:solidFill>
                   <a:srgbClr val="666762"/>
                 </a:solidFill>
-                <a:hlinkClick xmlns:r="http://schemas.openxmlformats.org/officeDocument/2006/relationships" r:id="R68631eaad1bf4d4a"/>
+                <a:hlinkClick xmlns:r="http://schemas.openxmlformats.org/officeDocument/2006/relationships" r:id="R9d6a043af80d4a02"/>
               </a:rPr>
               <a:t>Repo reference</a:t>
             </a:r>
@@ -28768,7 +29134,7 @@
                 <a:solidFill>
                   <a:srgbClr val="666762"/>
                 </a:solidFill>
-                <a:hlinkClick xmlns:r="http://schemas.openxmlformats.org/officeDocument/2006/relationships" r:id="Rb799a19b5ac44ed8"/>
+                <a:hlinkClick xmlns:r="http://schemas.openxmlformats.org/officeDocument/2006/relationships" r:id="R3840573ea64c4e76"/>
               </a:rPr>
               <a:t>Official docs</a:t>
             </a:r>
@@ -29190,7 +29556,7 @@
       </p:sp>
       <p:cxnSp>
         <p:nvCxnSpPr>
-          <p:cNvPr id="205" name=""/>
+          <p:cNvPr id="286" name=""/>
           <p:cNvCxnSpPr>
             <a:stCxn xmlns:a="http://schemas.openxmlformats.org/drawingml/2006/main" id="9" idx="1"/>
             <a:endCxn xmlns:a="http://schemas.openxmlformats.org/drawingml/2006/main" id="12" idx="3"/>
@@ -29395,7 +29761,7 @@
       </p:sp>
       <p:cxnSp>
         <p:nvCxnSpPr>
-          <p:cNvPr id="209" name=""/>
+          <p:cNvPr id="290" name=""/>
           <p:cNvCxnSpPr>
             <a:stCxn xmlns:a="http://schemas.openxmlformats.org/drawingml/2006/main" id="9" idx="1"/>
             <a:endCxn xmlns:a="http://schemas.openxmlformats.org/drawingml/2006/main" id="16" idx="3"/>
@@ -29600,7 +29966,7 @@
       </p:sp>
       <p:cxnSp>
         <p:nvCxnSpPr>
-          <p:cNvPr id="213" name=""/>
+          <p:cNvPr id="294" name=""/>
           <p:cNvCxnSpPr>
             <a:stCxn xmlns:a="http://schemas.openxmlformats.org/drawingml/2006/main" id="9" idx="3"/>
             <a:endCxn xmlns:a="http://schemas.openxmlformats.org/drawingml/2006/main" id="20" idx="1"/>
@@ -29805,7 +30171,7 @@
       </p:sp>
       <p:cxnSp>
         <p:nvCxnSpPr>
-          <p:cNvPr id="217" name=""/>
+          <p:cNvPr id="298" name=""/>
           <p:cNvCxnSpPr>
             <a:stCxn xmlns:a="http://schemas.openxmlformats.org/drawingml/2006/main" id="9" idx="3"/>
             <a:endCxn xmlns:a="http://schemas.openxmlformats.org/drawingml/2006/main" id="24" idx="1"/>
@@ -30094,7 +30460,7 @@
                 <a:ea typeface="Arial"/>
                 <a:cs typeface="Arial"/>
               </a:rPr>
-              <a:t>Comparison input — architecture and delivery</a:t>
+              <a:t>Comparison input — architecture, multicloud and robustness</a:t>
             </a:r>
           </a:p>
         </p:txBody>
@@ -30153,7 +30519,7 @@
                 <a:ea typeface="Arial"/>
                 <a:cs typeface="Arial"/>
               </a:rPr>
-              <a:t>Condensed from the supplied document; validate qualitative labels against versions and evidence.</a:t>
+              <a:t>Supplied labels stay visible; scalability and recovery remain unscored until equivalent execution.</a:t>
             </a:r>
           </a:p>
         </p:txBody>
@@ -30244,7 +30610,7 @@
                 <a:solidFill>
                   <a:srgbClr val="666762"/>
                 </a:solidFill>
-                <a:hlinkClick xmlns:r="http://schemas.openxmlformats.org/officeDocument/2006/relationships" r:id="Rd3188f8e04384b28"/>
+                <a:hlinkClick xmlns:r="http://schemas.openxmlformats.org/officeDocument/2006/relationships" r:id="Rb24633c9f3f440e9"/>
               </a:rPr>
               <a:t>Repo reference</a:t>
             </a:r>
@@ -30261,7 +30627,7 @@
                 <a:solidFill>
                   <a:srgbClr val="666762"/>
                 </a:solidFill>
-                <a:hlinkClick xmlns:r="http://schemas.openxmlformats.org/officeDocument/2006/relationships" r:id="Rd3bcecb3cb084b48"/>
+                <a:hlinkClick xmlns:r="http://schemas.openxmlformats.org/officeDocument/2006/relationships" r:id="R0cd94291b15244a6"/>
               </a:rPr>
               <a:t>Official docs</a:t>
             </a:r>
@@ -30541,7 +30907,7 @@
                     <a:lstStyle/>
                     <a:p>
                       <a:r>
-                        <a:t>Kubernetes</a:t>
+                        <a:t>Kubernetes / GitOps</a:t>
                       </a:r>
                     </a:p>
                   </a:txBody>
@@ -30565,7 +30931,7 @@
                     <a:lstStyle/>
                     <a:p>
                       <a:r>
-                        <a:t>Supplied: Very Good</a:t>
+                        <a:t>Hybrid runtime / tools</a:t>
                       </a:r>
                     </a:p>
                   </a:txBody>
@@ -30577,7 +30943,7 @@
                     <a:lstStyle/>
                     <a:p>
                       <a:r>
-                        <a:t>Supplied: Good</a:t>
+                        <a:t>Supplied: Good / Moderate</a:t>
                       </a:r>
                     </a:p>
                   </a:txBody>
@@ -30589,69 +30955,7 @@
                     <a:lstStyle/>
                     <a:p>
                       <a:r>
-                        <a:t>Run representative proof</a:t>
-                      </a:r>
-                    </a:p>
-                  </a:txBody>
-                  <a:tcPr marL="91440" marR="91440" marT="45720" marB="45720"/>
-                </a:tc>
-              </a:tr>
-              <a:tr h="538843">
-                <a:tc>
-                  <a:txBody>
-                    <a:bodyPr/>
-                    <a:lstStyle/>
-                    <a:p>
-                      <a:r>
-                        <a:t>GitOps</a:t>
-                      </a:r>
-                    </a:p>
-                  </a:txBody>
-                  <a:tcPr marL="91440" marR="91440" marT="45720" marB="45720"/>
-                </a:tc>
-                <a:tc>
-                  <a:txBody>
-                    <a:bodyPr/>
-                    <a:lstStyle/>
-                    <a:p>
-                      <a:r>
-                        <a:t>Supplied: Excellent</a:t>
-                      </a:r>
-                    </a:p>
-                  </a:txBody>
-                  <a:tcPr marL="91440" marR="91440" marT="45720" marB="45720"/>
-                </a:tc>
-                <a:tc>
-                  <a:txBody>
-                    <a:bodyPr/>
-                    <a:lstStyle/>
-                    <a:p>
-                      <a:r>
-                        <a:t>Supplied: Moderate</a:t>
-                      </a:r>
-                    </a:p>
-                  </a:txBody>
-                  <a:tcPr marL="91440" marR="91440" marT="45720" marB="45720"/>
-                </a:tc>
-                <a:tc>
-                  <a:txBody>
-                    <a:bodyPr/>
-                    <a:lstStyle/>
-                    <a:p>
-                      <a:r>
-                        <a:t>Supplied: Moderate</a:t>
-                      </a:r>
-                    </a:p>
-                  </a:txBody>
-                  <a:tcPr marL="91440" marR="91440" marT="45720" marB="45720"/>
-                </a:tc>
-                <a:tc>
-                  <a:txBody>
-                    <a:bodyPr/>
-                    <a:lstStyle/>
-                    <a:p>
-                      <a:r>
-                        <a:t>Measure repeatability</a:t>
+                        <a:t>Versioned delivery proof</a:t>
                       </a:r>
                     </a:p>
                   </a:txBody>
@@ -30677,7 +30981,7 @@
                     <a:lstStyle/>
                     <a:p>
                       <a:r>
-                        <a:t>OTel / Prometheus ecosystem</a:t>
+                        <a:t>OTel / Prometheus</a:t>
                       </a:r>
                     </a:p>
                   </a:txBody>
@@ -30782,6 +31086,68 @@
                   <a:tcPr marL="91440" marR="91440" marT="45720" marB="45720"/>
                 </a:tc>
               </a:tr>
+              <a:tr h="538843">
+                <a:tc>
+                  <a:txBody>
+                    <a:bodyPr/>
+                    <a:lstStyle/>
+                    <a:p>
+                      <a:r>
+                        <a:t>Scalability / robustness</a:t>
+                      </a:r>
+                    </a:p>
+                  </a:txBody>
+                  <a:tcPr marL="91440" marR="91440" marT="45720" marB="45720"/>
+                </a:tc>
+                <a:tc>
+                  <a:txBody>
+                    <a:bodyPr/>
+                    <a:lstStyle/>
+                    <a:p>
+                      <a:r>
+                        <a:t>Not supplied</a:t>
+                      </a:r>
+                    </a:p>
+                  </a:txBody>
+                  <a:tcPr marL="91440" marR="91440" marT="45720" marB="45720"/>
+                </a:tc>
+                <a:tc>
+                  <a:txBody>
+                    <a:bodyPr/>
+                    <a:lstStyle/>
+                    <a:p>
+                      <a:r>
+                        <a:t>Not supplied</a:t>
+                      </a:r>
+                    </a:p>
+                  </a:txBody>
+                  <a:tcPr marL="91440" marR="91440" marT="45720" marB="45720"/>
+                </a:tc>
+                <a:tc>
+                  <a:txBody>
+                    <a:bodyPr/>
+                    <a:lstStyle/>
+                    <a:p>
+                      <a:r>
+                        <a:t>Not supplied</a:t>
+                      </a:r>
+                    </a:p>
+                  </a:txBody>
+                  <a:tcPr marL="91440" marR="91440" marT="45720" marB="45720"/>
+                </a:tc>
+                <a:tc>
+                  <a:txBody>
+                    <a:bodyPr/>
+                    <a:lstStyle/>
+                    <a:p>
+                      <a:r>
+                        <a:t>Load + failure + recovery</a:t>
+                      </a:r>
+                    </a:p>
+                  </a:txBody>
+                  <a:tcPr marL="91440" marR="91440" marT="45720" marB="45720"/>
+                </a:tc>
+              </a:tr>
             </a:tbl>
           </a:graphicData>
         </a:graphic>
@@ -30990,7 +31356,7 @@
                 <a:ea typeface="Arial"/>
                 <a:cs typeface="Arial"/>
               </a:rPr>
-              <a:t>Comparison input — management, experience and AI</a:t>
+              <a:t>Comparison input — management, AI and security traceability</a:t>
             </a:r>
           </a:p>
         </p:txBody>
@@ -31049,7 +31415,7 @@
                 <a:ea typeface="Arial"/>
                 <a:cs typeface="Arial"/>
               </a:rPr>
-              <a:t>Use these claims as hypotheses; capabilities are edition- and date-dependent.</a:t>
+              <a:t>Traceable is a documented third-party path—not proven Kong 3.14 production fit.</a:t>
             </a:r>
           </a:p>
         </p:txBody>
@@ -31140,7 +31506,7 @@
                 <a:solidFill>
                   <a:srgbClr val="666762"/>
                 </a:solidFill>
-                <a:hlinkClick xmlns:r="http://schemas.openxmlformats.org/officeDocument/2006/relationships" r:id="R165806dea2734863"/>
+                <a:hlinkClick xmlns:r="http://schemas.openxmlformats.org/officeDocument/2006/relationships" r:id="R8bf1a861925543f5"/>
               </a:rPr>
               <a:t>Repo reference</a:t>
             </a:r>
@@ -31157,7 +31523,7 @@
                 <a:solidFill>
                   <a:srgbClr val="666762"/>
                 </a:solidFill>
-                <a:hlinkClick xmlns:r="http://schemas.openxmlformats.org/officeDocument/2006/relationships" r:id="R2bed165f4db24f06"/>
+                <a:hlinkClick xmlns:r="http://schemas.openxmlformats.org/officeDocument/2006/relationships" r:id="R6cfd9859a60b4194"/>
               </a:rPr>
               <a:t>Official docs</a:t>
             </a:r>
@@ -31623,7 +31989,7 @@
                     <a:lstStyle/>
                     <a:p>
                       <a:r>
-                        <a:t>Best fit</a:t>
+                        <a:t>Traceable adjunct</a:t>
                       </a:r>
                     </a:p>
                   </a:txBody>
@@ -31635,7 +32001,7 @@
                     <a:lstStyle/>
                     <a:p>
                       <a:r>
-                        <a:t>Platform engineering</a:t>
+                        <a:t>Plugin → Platform Agent</a:t>
                       </a:r>
                     </a:p>
                   </a:txBody>
@@ -31647,7 +32013,7 @@
                     <a:lstStyle/>
                     <a:p>
                       <a:r>
-                        <a:t>Enterprise API programs</a:t>
+                        <a:t>Not assessed</a:t>
                       </a:r>
                     </a:p>
                   </a:txBody>
@@ -31659,7 +32025,7 @@
                     <a:lstStyle/>
                     <a:p>
                       <a:r>
-                        <a:t>Integration-centric organizations</a:t>
+                        <a:t>Custom-policy baseline</a:t>
                       </a:r>
                     </a:p>
                   </a:txBody>
@@ -31671,7 +32037,7 @@
                     <a:lstStyle/>
                     <a:p>
                       <a:r>
-                        <a:t>Conditional archetype; not a universal rank</a:t>
+                        <a:t>Run GEP-07; do not score</a:t>
                       </a:r>
                     </a:p>
                   </a:txBody>
@@ -31886,7 +32252,7 @@
                 <a:ea typeface="Arial"/>
                 <a:cs typeface="Arial"/>
               </a:rPr>
-              <a:t>Comparison input — economics and evidence ceiling</a:t>
+              <a:t>Comparison input — pricing, lock-in and operating duty</a:t>
             </a:r>
           </a:p>
         </p:txBody>
@@ -31945,7 +32311,7 @@
                 <a:ea typeface="Arial"/>
                 <a:cs typeface="Arial"/>
               </a:rPr>
-              <a:t>Cost and lock-in require commercial, operating and exit evidence—not adjectives.</a:t>
+              <a:t>Normalize exact meters, full operating cost, reversibility and control duty—do not rank from public pages.</a:t>
             </a:r>
           </a:p>
         </p:txBody>
@@ -32036,7 +32402,7 @@
                 <a:solidFill>
                   <a:srgbClr val="666762"/>
                 </a:solidFill>
-                <a:hlinkClick xmlns:r="http://schemas.openxmlformats.org/officeDocument/2006/relationships" r:id="R0b2606423ff642c7"/>
+                <a:hlinkClick xmlns:r="http://schemas.openxmlformats.org/officeDocument/2006/relationships" r:id="R7cfe6bd9200c49bf"/>
               </a:rPr>
               <a:t>Repo reference</a:t>
             </a:r>
@@ -32053,7 +32419,7 @@
                 <a:solidFill>
                   <a:srgbClr val="666762"/>
                 </a:solidFill>
-                <a:hlinkClick xmlns:r="http://schemas.openxmlformats.org/officeDocument/2006/relationships" r:id="R9b961b9138084f2d"/>
+                <a:hlinkClick xmlns:r="http://schemas.openxmlformats.org/officeDocument/2006/relationships" r:id="Re896958e520744f3"/>
               </a:rPr>
               <a:t>Official docs</a:t>
             </a:r>
@@ -32234,7 +32600,7 @@
                     <a:lstStyle/>
                     <a:p>
                       <a:r>
-                        <a:t>Vendor lock-in</a:t>
+                        <a:t>Reversibility / lock-in</a:t>
                       </a:r>
                     </a:p>
                   </a:txBody>
@@ -32282,7 +32648,7 @@
                     <a:lstStyle/>
                     <a:p>
                       <a:r>
-                        <a:t>Unverified; prove rebuild + switching</a:t>
+                        <a:t>Timed rebuild + route-back</a:t>
                       </a:r>
                     </a:p>
                   </a:txBody>
@@ -32296,7 +32662,7 @@
                     <a:lstStyle/>
                     <a:p>
                       <a:r>
-                        <a:t>Cost</a:t>
+                        <a:t>Full TCO / pricing</a:t>
                       </a:r>
                     </a:p>
                   </a:txBody>
@@ -32308,7 +32674,7 @@
                     <a:lstStyle/>
                     <a:p>
                       <a:r>
-                        <a:t>Supplied: Low</a:t>
+                        <a:t>Custom quote</a:t>
                       </a:r>
                     </a:p>
                   </a:txBody>
@@ -32320,7 +32686,7 @@
                     <a:lstStyle/>
                     <a:p>
                       <a:r>
-                        <a:t>Supplied: Medium-high</a:t>
+                        <a:t>Managed PAYG ≠ Hybrid</a:t>
                       </a:r>
                     </a:p>
                   </a:txBody>
@@ -32332,7 +32698,7 @@
                     <a:lstStyle/>
                     <a:p>
                       <a:r>
-                        <a:t>Supplied: High</a:t>
+                        <a:t>Contact sales</a:t>
                       </a:r>
                     </a:p>
                   </a:txBody>
@@ -32344,7 +32710,7 @@
                     <a:lstStyle/>
                     <a:p>
                       <a:r>
-                        <a:t>Unverified; quote + labor + HA/DR + telemetry + migration + support + exit</a:t>
+                        <a:t>Quote + labor + infra + HA/DR + adjunct + exit</a:t>
                       </a:r>
                     </a:p>
                   </a:txBody>
@@ -32358,7 +32724,7 @@
                     <a:lstStyle/>
                     <a:p>
                       <a:r>
-                        <a:t>Overall recommendation</a:t>
+                        <a:t>Control-plane duty</a:t>
                       </a:r>
                     </a:p>
                   </a:txBody>
@@ -32370,7 +32736,7 @@
                     <a:lstStyle/>
                     <a:p>
                       <a:r>
-                        <a:t>Preferred</a:t>
+                        <a:t>Enterprise CP + Postgres</a:t>
                       </a:r>
                     </a:p>
                   </a:txBody>
@@ -32382,7 +32748,7 @@
                     <a:lstStyle/>
                     <a:p>
                       <a:r>
-                        <a:t>Second</a:t>
+                        <a:t>Google mgmt + own runtime</a:t>
                       </a:r>
                     </a:p>
                   </a:txBody>
@@ -32394,7 +32760,7 @@
                     <a:lstStyle/>
                     <a:p>
                       <a:r>
-                        <a:t>Third</a:t>
+                        <a:t>Boundary-dependent</a:t>
                       </a:r>
                     </a:p>
                   </a:txBody>
@@ -32406,7 +32772,7 @@
                     <a:lstStyle/>
                     <a:p>
                       <a:r>
-                        <a:t>Stakeholder direction only; no production or comparative proof</a:t>
+                        <a:t>Funded RACI + support + recovery + on-call</a:t>
                       </a:r>
                     </a:p>
                   </a:txBody>
@@ -32502,7 +32868,7 @@
                 <a:ea typeface="Arial"/>
                 <a:cs typeface="Arial"/>
               </a:rPr>
-              <a:t>No commercial or exit claim is decision-grade until equivalent evidence exists.</a:t>
+              <a:t>No price, lock-in or control-duty claim is decision-grade until equivalent evidence exists.</a:t>
             </a:r>
           </a:p>
         </p:txBody>
@@ -32711,7 +33077,7 @@
                 <a:ea typeface="Arial"/>
                 <a:cs typeface="Arial"/>
               </a:rPr>
-              <a:t>Raw scoring inputs — retain for audit, not as production proof</a:t>
+              <a:t>Historical score audit; governed re-score pending</a:t>
             </a:r>
           </a:p>
         </p:txBody>
@@ -32770,7 +33136,7 @@
                 <a:ea typeface="Arial"/>
                 <a:cs typeface="Arial"/>
               </a:rPr>
-              <a:t>Corrected weighted totals are 93 / 85.5 / 77; ratings remain illustrative author inputs.</a:t>
+              <a:t>The original eight rows remain historical input; six added dimensions still have TBD weights and ratings.</a:t>
             </a:r>
           </a:p>
         </p:txBody>
@@ -32861,7 +33227,7 @@
                 <a:solidFill>
                   <a:srgbClr val="666762"/>
                 </a:solidFill>
-                <a:hlinkClick xmlns:r="http://schemas.openxmlformats.org/officeDocument/2006/relationships" r:id="R5abc87e876e44eab"/>
+                <a:hlinkClick xmlns:r="http://schemas.openxmlformats.org/officeDocument/2006/relationships" r:id="Rdf4bda4da7a046c4"/>
               </a:rPr>
               <a:t>Repo reference</a:t>
             </a:r>
@@ -32878,7 +33244,7 @@
                 <a:solidFill>
                   <a:srgbClr val="666762"/>
                 </a:solidFill>
-                <a:hlinkClick xmlns:r="http://schemas.openxmlformats.org/officeDocument/2006/relationships" r:id="R19dc5454ee814d7e"/>
+                <a:hlinkClick xmlns:r="http://schemas.openxmlformats.org/officeDocument/2006/relationships" r:id="R159d120a3db64d42"/>
               </a:rPr>
               <a:t>Official docs</a:t>
             </a:r>
@@ -33841,7 +34207,7 @@
                 <a:ea typeface="Georgia"/>
                 <a:cs typeface="Georgia"/>
               </a:rPr>
-              <a:t>Ordering is unchanged</a:t>
+              <a:t>Historical ordering unchanged</a:t>
             </a:r>
           </a:p>
         </p:txBody>
@@ -33900,7 +34266,7 @@
                 <a:ea typeface="Arial"/>
                 <a:cs typeface="Arial"/>
               </a:rPr>
-              <a:t>Source result: 93 / 87 / 78</a:t>
+              <a:t>Source: 93 / 87 / 78</a:t>
             </a:r>
           </a:p>
           <a:p xmlns:a="http://schemas.openxmlformats.org/drawingml/2006/main">
@@ -33924,7 +34290,7 @@
                 <a:ea typeface="Arial"/>
                 <a:cs typeface="Arial"/>
               </a:rPr>
-              <a:t>Recalculated: 93 / 85.5 / 77</a:t>
+              <a:t>Corrected: 93 / 85.5 / 77</a:t>
             </a:r>
           </a:p>
         </p:txBody>
@@ -34047,7 +34413,7 @@
                 <a:ea typeface="Consolas"/>
                 <a:cs typeface="Consolas"/>
               </a:rPr>
-              <a:t>BEFORE APPROVAL</a:t>
+              <a:t>GOVERNED RE-SCORE</a:t>
             </a:r>
           </a:p>
         </p:txBody>
@@ -34106,7 +34472,7 @@
                 <a:ea typeface="Georgia"/>
                 <a:cs typeface="Georgia"/>
               </a:rPr>
-              <a:t>Add evidence confidence</a:t>
+              <a:t>Six dimensions remain TBD</a:t>
             </a:r>
           </a:p>
         </p:txBody>
@@ -34165,7 +34531,31 @@
                 <a:ea typeface="Arial"/>
                 <a:cs typeface="Arial"/>
               </a:rPr>
-              <a:t>Rubric · scorers · editions · sources · sensitivity · commercial basis · platform labor · migration cost</a:t>
+              <a:t>Multicloud · scale/recovery · security/trace · reversibility · full TCO · CP duty</a:t>
+            </a:r>
+          </a:p>
+          <a:p xmlns:a="http://schemas.openxmlformats.org/drawingml/2006/main">
+            <a:pPr algn="l">
+              <a:buNone/>
+              <a:defRPr sz="1350" b="0" i="0">
+                <a:solidFill>
+                  <a:srgbClr val="686A66"/>
+                </a:solidFill>
+                <a:latin typeface="Arial"/>
+                <a:ea typeface="Arial"/>
+                <a:cs typeface="Arial"/>
+              </a:defRPr>
+            </a:pPr>
+            <a:r>
+              <a:rPr sz="1350" b="0" i="0">
+                <a:solidFill>
+                  <a:srgbClr val="686A66"/>
+                </a:solidFill>
+                <a:latin typeface="Arial"/>
+                <a:ea typeface="Arial"/>
+                <a:cs typeface="Arial"/>
+              </a:rPr>
+              <a:t>No new total before approval</a:t>
             </a:r>
           </a:p>
         </p:txBody>
@@ -34433,7 +34823,7 @@
                 <a:ea typeface="Arial"/>
                 <a:cs typeface="Arial"/>
               </a:rPr>
-              <a:t>Kubernetes and GitOps carry 35%; weights are stakeholder choices, not market facts.</a:t>
+              <a:t>Kubernetes and GitOps carry 35%; the historical eight weights remain unchanged.</a:t>
             </a:r>
           </a:p>
         </p:txBody>
@@ -34524,7 +34914,7 @@
                 <a:solidFill>
                   <a:srgbClr val="666762"/>
                 </a:solidFill>
-                <a:hlinkClick xmlns:r="http://schemas.openxmlformats.org/officeDocument/2006/relationships" r:id="Rb06e53d022ed41e2"/>
+                <a:hlinkClick xmlns:r="http://schemas.openxmlformats.org/officeDocument/2006/relationships" r:id="R9a7e86023198430c"/>
               </a:rPr>
               <a:t>Repo reference</a:t>
             </a:r>
@@ -34541,7 +34931,7 @@
                 <a:solidFill>
                   <a:srgbClr val="666762"/>
                 </a:solidFill>
-                <a:hlinkClick xmlns:r="http://schemas.openxmlformats.org/officeDocument/2006/relationships" r:id="R7245e5aab3a5435a"/>
+                <a:hlinkClick xmlns:r="http://schemas.openxmlformats.org/officeDocument/2006/relationships" r:id="R0fd72cf9e355403c"/>
               </a:rPr>
               <a:t>Official docs</a:t>
             </a:r>
@@ -36165,7 +36555,7 @@
                 <a:ea typeface="Consolas"/>
                 <a:cs typeface="Consolas"/>
               </a:rPr>
-              <a:t>NOT SEPARATELY WEIGHTED</a:t>
+              <a:t>GOVERNED RE-SCORE</a:t>
             </a:r>
           </a:p>
         </p:txBody>
@@ -36224,7 +36614,7 @@
                 <a:ea typeface="Georgia"/>
                 <a:cs typeface="Georgia"/>
               </a:rPr>
-              <a:t>Four decisions remain hidden</a:t>
+              <a:t>Six dimensions stay pending</a:t>
             </a:r>
           </a:p>
         </p:txBody>
@@ -36283,7 +36673,7 @@
                 <a:ea typeface="Arial"/>
                 <a:cs typeface="Arial"/>
               </a:rPr>
-              <a:t>• Developer experience / self-service</a:t>
+              <a:t>• Multicloud / sovereignty</a:t>
             </a:r>
           </a:p>
           <a:p xmlns:a="http://schemas.openxmlformats.org/drawingml/2006/main">
@@ -36307,7 +36697,7 @@
                 <a:ea typeface="Arial"/>
                 <a:cs typeface="Arial"/>
               </a:rPr>
-              <a:t>• Multicloud placement and sovereignty</a:t>
+              <a:t>• Scalability / robustness</a:t>
             </a:r>
           </a:p>
           <a:p xmlns:a="http://schemas.openxmlformats.org/drawingml/2006/main">
@@ -36331,7 +36721,7 @@
                 <a:ea typeface="Arial"/>
                 <a:cs typeface="Arial"/>
               </a:rPr>
-              <a:t>• Migration effort and coexistence</a:t>
+              <a:t>• Security, IAM / traceability</a:t>
             </a:r>
           </a:p>
           <a:p xmlns:a="http://schemas.openxmlformats.org/drawingml/2006/main">
@@ -36355,7 +36745,55 @@
                 <a:ea typeface="Arial"/>
                 <a:cs typeface="Arial"/>
               </a:rPr>
-              <a:t>• Platform labor, HA/DR and commercial TCO</a:t>
+              <a:t>• Reversibility / vendor dependency</a:t>
+            </a:r>
+          </a:p>
+          <a:p xmlns:a="http://schemas.openxmlformats.org/drawingml/2006/main">
+            <a:pPr algn="l">
+              <a:buNone/>
+              <a:defRPr sz="1425" b="0" i="0">
+                <a:solidFill>
+                  <a:srgbClr val="686A66"/>
+                </a:solidFill>
+                <a:latin typeface="Arial"/>
+                <a:ea typeface="Arial"/>
+                <a:cs typeface="Arial"/>
+              </a:defRPr>
+            </a:pPr>
+            <a:r>
+              <a:rPr sz="1425" b="0" i="0">
+                <a:solidFill>
+                  <a:srgbClr val="686A66"/>
+                </a:solidFill>
+                <a:latin typeface="Arial"/>
+                <a:ea typeface="Arial"/>
+                <a:cs typeface="Arial"/>
+              </a:rPr>
+              <a:t>• Fully allocated TCO</a:t>
+            </a:r>
+          </a:p>
+          <a:p xmlns:a="http://schemas.openxmlformats.org/drawingml/2006/main">
+            <a:pPr algn="l">
+              <a:buNone/>
+              <a:defRPr sz="1425" b="0" i="0">
+                <a:solidFill>
+                  <a:srgbClr val="686A66"/>
+                </a:solidFill>
+                <a:latin typeface="Arial"/>
+                <a:ea typeface="Arial"/>
+                <a:cs typeface="Arial"/>
+              </a:defRPr>
+            </a:pPr>
+            <a:r>
+              <a:rPr sz="1425" b="0" i="0">
+                <a:solidFill>
+                  <a:srgbClr val="686A66"/>
+                </a:solidFill>
+                <a:latin typeface="Arial"/>
+                <a:ea typeface="Arial"/>
+                <a:cs typeface="Arial"/>
+              </a:rPr>
+              <a:t>• Control-plane operating duty</a:t>
             </a:r>
           </a:p>
         </p:txBody>
@@ -36414,7 +36852,7 @@
                 <a:ea typeface="Consolas"/>
                 <a:cs typeface="Consolas"/>
               </a:rPr>
-              <a:t>Implication</a:t>
+              <a:t>Rule</a:t>
             </a:r>
           </a:p>
         </p:txBody>
@@ -36449,7 +36887,7 @@
         </p:spPr>
         <p:txBody>
           <a:bodyPr xmlns:a="http://schemas.openxmlformats.org/drawingml/2006/main" wrap="square" lIns="0" tIns="0" rIns="0" bIns="0" anchor="t">
-            <a:normAutofit fontScale="92702"/>
+            <a:normAutofit fontScale="85379"/>
           </a:bodyPr>
           <a:lstStyle xmlns:a="http://schemas.openxmlformats.org/drawingml/2006/main"/>
           <a:p xmlns:a="http://schemas.openxmlformats.org/drawingml/2006/main">
@@ -36473,7 +36911,7 @@
                 <a:ea typeface="Georgia"/>
                 <a:cs typeface="Georgia"/>
               </a:rPr>
-              <a:t>Re-score after the proof programme supplies evidence and sensitivity ranges.</a:t>
+              <a:t>Approve weights, rubric, evidence floor, scorers and sensitivity before any new total.</a:t>
             </a:r>
           </a:p>
         </p:txBody>
@@ -36832,7 +37270,7 @@
                 <a:solidFill>
                   <a:srgbClr val="666762"/>
                 </a:solidFill>
-                <a:hlinkClick xmlns:r="http://schemas.openxmlformats.org/officeDocument/2006/relationships" r:id="Rf75a9349b5be48b1"/>
+                <a:hlinkClick xmlns:r="http://schemas.openxmlformats.org/officeDocument/2006/relationships" r:id="R43e07d92e3c149ef"/>
               </a:rPr>
               <a:t>Repo reference</a:t>
             </a:r>
@@ -36849,7 +37287,7 @@
                 <a:solidFill>
                   <a:srgbClr val="666762"/>
                 </a:solidFill>
-                <a:hlinkClick xmlns:r="http://schemas.openxmlformats.org/officeDocument/2006/relationships" r:id="R18155f8c7edc4c37"/>
+                <a:hlinkClick xmlns:r="http://schemas.openxmlformats.org/officeDocument/2006/relationships" r:id="Ra095d4038fdf44ea"/>
               </a:rPr>
               <a:t>Official docs</a:t>
             </a:r>
@@ -38555,7 +38993,7 @@
                 <a:ea typeface="Arial"/>
                 <a:cs typeface="Arial"/>
               </a:rPr>
-              <a:t>The supplied model puts Kong first—before evidence confidence is applied</a:t>
+              <a:t>Preserve the historical score; govern the re-score</a:t>
             </a:r>
           </a:p>
         </p:txBody>
@@ -38614,7 +39052,7 @@
                 <a:ea typeface="Arial"/>
                 <a:cs typeface="Arial"/>
               </a:rPr>
-              <a:t>Recalculated from the stated weights and ratings; illustrative author scoring only.</a:t>
+              <a:t>Corrected totals remain 93 / 85.5 / 77; added dimensions are pending approval.</a:t>
             </a:r>
           </a:p>
         </p:txBody>
@@ -38705,7 +39143,7 @@
                 <a:solidFill>
                   <a:srgbClr val="666762"/>
                 </a:solidFill>
-                <a:hlinkClick xmlns:r="http://schemas.openxmlformats.org/officeDocument/2006/relationships" r:id="R88879672033d4e82"/>
+                <a:hlinkClick xmlns:r="http://schemas.openxmlformats.org/officeDocument/2006/relationships" r:id="R1499fc48bf18445c"/>
               </a:rPr>
               <a:t>Repo reference</a:t>
             </a:r>
@@ -38722,7 +39160,7 @@
                 <a:solidFill>
                   <a:srgbClr val="666762"/>
                 </a:solidFill>
-                <a:hlinkClick xmlns:r="http://schemas.openxmlformats.org/officeDocument/2006/relationships" r:id="R8122a350462a4292"/>
+                <a:hlinkClick xmlns:r="http://schemas.openxmlformats.org/officeDocument/2006/relationships" r:id="R8dbd86b6b0274c09"/>
               </a:rPr>
               <a:t>Official docs</a:t>
             </a:r>
@@ -39721,7 +40159,7 @@
         </p:spPr>
         <p:txBody>
           <a:bodyPr xmlns:a="http://schemas.openxmlformats.org/drawingml/2006/main" wrap="square" lIns="0" tIns="0" rIns="0" bIns="0" anchor="t">
-            <a:normAutofit fontScale="87150"/>
+            <a:normAutofit fontScale="100000"/>
           </a:bodyPr>
           <a:lstStyle xmlns:a="http://schemas.openxmlformats.org/drawingml/2006/main"/>
           <a:p xmlns:a="http://schemas.openxmlformats.org/drawingml/2006/main">
@@ -39745,7 +40183,7 @@
                 <a:ea typeface="Georgia"/>
                 <a:cs typeface="Georgia"/>
               </a:rPr>
-              <a:t>Do not approve production from this score</a:t>
+              <a:t>Governed re-score pending</a:t>
             </a:r>
           </a:p>
         </p:txBody>
@@ -39804,7 +40242,7 @@
                 <a:ea typeface="Arial"/>
                 <a:cs typeface="Arial"/>
               </a:rPr>
-              <a:t>Missing: scoring rubric · named scorers · evidence map · confidence · sensitivity · editions · commercial basis</a:t>
+              <a:t>No new total until exact options · six dimensions · weights/ranges · rubric · evidence floor · scorers · sensitivity · dissent · approval</a:t>
             </a:r>
           </a:p>
         </p:txBody>
@@ -40163,7 +40601,7 @@
                 <a:solidFill>
                   <a:srgbClr val="666762"/>
                 </a:solidFill>
-                <a:hlinkClick xmlns:r="http://schemas.openxmlformats.org/officeDocument/2006/relationships" r:id="R7846045e644648b2"/>
+                <a:hlinkClick xmlns:r="http://schemas.openxmlformats.org/officeDocument/2006/relationships" r:id="Rf60ec131aa3e47e2"/>
               </a:rPr>
               <a:t>Repo reference</a:t>
             </a:r>
@@ -40180,7 +40618,7 @@
                 <a:solidFill>
                   <a:srgbClr val="666762"/>
                 </a:solidFill>
-                <a:hlinkClick xmlns:r="http://schemas.openxmlformats.org/officeDocument/2006/relationships" r:id="R855dabcda0f84546"/>
+                <a:hlinkClick xmlns:r="http://schemas.openxmlformats.org/officeDocument/2006/relationships" r:id="R1147370ba3824598"/>
               </a:rPr>
               <a:t>Official docs</a:t>
             </a:r>
@@ -41285,7 +41723,7 @@
                 <a:solidFill>
                   <a:srgbClr val="666762"/>
                 </a:solidFill>
-                <a:hlinkClick xmlns:r="http://schemas.openxmlformats.org/officeDocument/2006/relationships" r:id="R40b18f316e974fdb"/>
+                <a:hlinkClick xmlns:r="http://schemas.openxmlformats.org/officeDocument/2006/relationships" r:id="Rf25d17a953474647"/>
               </a:rPr>
               <a:t>Repo reference</a:t>
             </a:r>
@@ -41302,7 +41740,7 @@
                 <a:solidFill>
                   <a:srgbClr val="666762"/>
                 </a:solidFill>
-                <a:hlinkClick xmlns:r="http://schemas.openxmlformats.org/officeDocument/2006/relationships" r:id="R8c4120106ef94e9f"/>
+                <a:hlinkClick xmlns:r="http://schemas.openxmlformats.org/officeDocument/2006/relationships" r:id="Rbdc628a493f24ada"/>
               </a:rPr>
               <a:t>Official docs</a:t>
             </a:r>
@@ -42387,7 +42825,7 @@
                 <a:ea typeface="Arial"/>
                 <a:cs typeface="Arial"/>
               </a:rPr>
-              <a:t>Self-managed control works only if the enterprise funds the duty</a:t>
+              <a:t>Control-plane custody transfers operating accountability</a:t>
             </a:r>
           </a:p>
         </p:txBody>
@@ -42446,7 +42884,7 @@
                 <a:ea typeface="Arial"/>
                 <a:cs typeface="Arial"/>
               </a:rPr>
-              <a:t>Control-plane custody is an operating model—not a free architecture property.</a:t>
+              <a:t>Control advantage must be weighed against permanent CP, database, trust, plugin, support and on-call duty.</a:t>
             </a:r>
           </a:p>
         </p:txBody>
@@ -42537,7 +42975,7 @@
                 <a:solidFill>
                   <a:srgbClr val="666762"/>
                 </a:solidFill>
-                <a:hlinkClick xmlns:r="http://schemas.openxmlformats.org/officeDocument/2006/relationships" r:id="R7788c1b87a914549"/>
+                <a:hlinkClick xmlns:r="http://schemas.openxmlformats.org/officeDocument/2006/relationships" r:id="Rb6ee57469edd4a85"/>
               </a:rPr>
               <a:t>Repo reference</a:t>
             </a:r>
@@ -42554,7 +42992,7 @@
                 <a:solidFill>
                   <a:srgbClr val="666762"/>
                 </a:solidFill>
-                <a:hlinkClick xmlns:r="http://schemas.openxmlformats.org/officeDocument/2006/relationships" r:id="R6bb072e5547e46c8"/>
+                <a:hlinkClick xmlns:r="http://schemas.openxmlformats.org/officeDocument/2006/relationships" r:id="R4164bce6d9c8461f"/>
               </a:rPr>
               <a:t>Official docs</a:t>
             </a:r>
@@ -43124,7 +43562,7 @@
                 <a:ea typeface="Consolas"/>
                 <a:cs typeface="Consolas"/>
               </a:rPr>
-              <a:t>PERMANENT DUTY</a:t>
+              <a:t>OPERATING ACCOUNTABILITY</a:t>
             </a:r>
           </a:p>
         </p:txBody>
@@ -43214,7 +43652,7 @@
                 <a:ea typeface="Arial"/>
                 <a:cs typeface="Arial"/>
               </a:rPr>
-              <a:t>Control-plane service and PostgreSQL HA</a:t>
+              <a:t>Scalability, regional robustness and recovery</a:t>
             </a:r>
           </a:p>
         </p:txBody>
@@ -43304,7 +43742,7 @@
                 <a:ea typeface="Arial"/>
                 <a:cs typeface="Arial"/>
               </a:rPr>
-              <a:t>PKI, certificates and trust admission</a:t>
+              <a:t>Security, IAM, PKI and access lifecycle</a:t>
             </a:r>
           </a:p>
         </p:txBody>
@@ -43394,7 +43832,7 @@
                 <a:ea typeface="Arial"/>
                 <a:cs typeface="Arial"/>
               </a:rPr>
-              <a:t>Backup, restore, upgrade and rollback boundaries</a:t>
+              <a:t>Traceability, evidence custody and privacy</a:t>
             </a:r>
           </a:p>
         </p:txBody>
@@ -43484,7 +43922,7 @@
                 <a:ea typeface="Arial"/>
                 <a:cs typeface="Arial"/>
               </a:rPr>
-              <a:t>24×7 ownership, observability and capacity</a:t>
+              <a:t>Licensing, support and fully allocated TCO</a:t>
             </a:r>
           </a:p>
         </p:txBody>
@@ -43519,7 +43957,7 @@
         </p:spPr>
         <p:txBody>
           <a:bodyPr xmlns:a="http://schemas.openxmlformats.org/drawingml/2006/main" wrap="square" lIns="0" tIns="0" rIns="0" bIns="0" anchor="t">
-            <a:normAutofit fontScale="98159"/>
+            <a:normAutofit fontScale="100000"/>
           </a:bodyPr>
           <a:lstStyle xmlns:a="http://schemas.openxmlformats.org/drawingml/2006/main"/>
           <a:p xmlns:a="http://schemas.openxmlformats.org/drawingml/2006/main">
@@ -43543,7 +43981,7 @@
                 <a:ea typeface="Georgia"/>
                 <a:cs typeface="Georgia"/>
               </a:rPr>
-              <a:t>Answer changes when custody is only a preference—or the enterprise will not fund this duty.</a:t>
+              <a:t>Operating responsibility exposure—not a legal-liability determination.</a:t>
             </a:r>
           </a:p>
         </p:txBody>
@@ -43902,7 +44340,7 @@
                 <a:solidFill>
                   <a:srgbClr val="666762"/>
                 </a:solidFill>
-                <a:hlinkClick xmlns:r="http://schemas.openxmlformats.org/officeDocument/2006/relationships" r:id="R5ae7d99a0a57461a"/>
+                <a:hlinkClick xmlns:r="http://schemas.openxmlformats.org/officeDocument/2006/relationships" r:id="R6018f5851e4b41c1"/>
               </a:rPr>
               <a:t>Repo reference</a:t>
             </a:r>
@@ -43919,7 +44357,7 @@
                 <a:solidFill>
                   <a:srgbClr val="666762"/>
                 </a:solidFill>
-                <a:hlinkClick xmlns:r="http://schemas.openxmlformats.org/officeDocument/2006/relationships" r:id="R20627e867ec94bc7"/>
+                <a:hlinkClick xmlns:r="http://schemas.openxmlformats.org/officeDocument/2006/relationships" r:id="Rb56598cfbfc2479c"/>
               </a:rPr>
               <a:t>Official docs</a:t>
             </a:r>
@@ -44446,7 +44884,7 @@
       </p:sp>
       <p:cxnSp>
         <p:nvCxnSpPr>
-          <p:cNvPr id="345" name=""/>
+          <p:cNvPr id="480" name=""/>
           <p:cNvCxnSpPr>
             <a:stCxn xmlns:a="http://schemas.openxmlformats.org/drawingml/2006/main" id="16" idx="0"/>
             <a:endCxn xmlns:a="http://schemas.openxmlformats.org/drawingml/2006/main" id="10" idx="2"/>
@@ -44472,7 +44910,7 @@
       </p:cxnSp>
       <p:cxnSp>
         <p:nvCxnSpPr>
-          <p:cNvPr id="346" name=""/>
+          <p:cNvPr id="481" name=""/>
           <p:cNvCxnSpPr>
             <a:stCxn xmlns:a="http://schemas.openxmlformats.org/drawingml/2006/main" id="10" idx="2"/>
             <a:endCxn xmlns:a="http://schemas.openxmlformats.org/drawingml/2006/main" id="13" idx="0"/>
@@ -45016,7 +45454,7 @@
       </p:sp>
       <p:cxnSp>
         <p:nvCxnSpPr>
-          <p:cNvPr id="357" name=""/>
+          <p:cNvPr id="492" name=""/>
           <p:cNvCxnSpPr>
             <a:stCxn xmlns:a="http://schemas.openxmlformats.org/drawingml/2006/main" id="10" idx="3"/>
             <a:endCxn xmlns:a="http://schemas.openxmlformats.org/drawingml/2006/main" id="21" idx="1"/>
@@ -45044,7 +45482,7 @@
       </p:cxnSp>
       <p:cxnSp>
         <p:nvCxnSpPr>
-          <p:cNvPr id="358" name=""/>
+          <p:cNvPr id="493" name=""/>
           <p:cNvCxnSpPr>
             <a:stCxn xmlns:a="http://schemas.openxmlformats.org/drawingml/2006/main" id="10" idx="3"/>
             <a:endCxn xmlns:a="http://schemas.openxmlformats.org/drawingml/2006/main" id="24" idx="1"/>
@@ -45072,7 +45510,7 @@
       </p:cxnSp>
       <p:cxnSp>
         <p:nvCxnSpPr>
-          <p:cNvPr id="359" name=""/>
+          <p:cNvPr id="494" name=""/>
           <p:cNvCxnSpPr>
             <a:stCxn xmlns:a="http://schemas.openxmlformats.org/drawingml/2006/main" id="10" idx="3"/>
             <a:endCxn xmlns:a="http://schemas.openxmlformats.org/drawingml/2006/main" id="27" idx="1"/>
@@ -45618,7 +46056,7 @@
       </p:sp>
       <p:cxnSp>
         <p:nvCxnSpPr>
-          <p:cNvPr id="370" name=""/>
+          <p:cNvPr id="505" name=""/>
           <p:cNvCxnSpPr>
             <a:stCxn xmlns:a="http://schemas.openxmlformats.org/drawingml/2006/main" id="21" idx="3"/>
             <a:endCxn xmlns:a="http://schemas.openxmlformats.org/drawingml/2006/main" id="34" idx="1"/>
@@ -45644,7 +46082,7 @@
       </p:cxnSp>
       <p:cxnSp>
         <p:nvCxnSpPr>
-          <p:cNvPr id="371" name=""/>
+          <p:cNvPr id="506" name=""/>
           <p:cNvCxnSpPr>
             <a:stCxn xmlns:a="http://schemas.openxmlformats.org/drawingml/2006/main" id="24" idx="3"/>
             <a:endCxn xmlns:a="http://schemas.openxmlformats.org/drawingml/2006/main" id="37" idx="1"/>
@@ -45670,7 +46108,7 @@
       </p:cxnSp>
       <p:cxnSp>
         <p:nvCxnSpPr>
-          <p:cNvPr id="372" name=""/>
+          <p:cNvPr id="507" name=""/>
           <p:cNvCxnSpPr>
             <a:stCxn xmlns:a="http://schemas.openxmlformats.org/drawingml/2006/main" id="27" idx="3"/>
             <a:endCxn xmlns:a="http://schemas.openxmlformats.org/drawingml/2006/main" id="40" idx="1"/>

--- a/presentations/kong-platform-journey-guided.pptx
+++ b/presentations/kong-platform-journey-guided.pptx
@@ -2,37 +2,37 @@
 <file path=ppt/presentation.xml><?xml version="1.0" encoding="utf-8"?>
 <p:presentation xmlns:p="http://schemas.openxmlformats.org/presentationml/2006/main">
   <p:sldMasterIdLst>
-    <p:sldMasterId xmlns:r="http://schemas.openxmlformats.org/officeDocument/2006/relationships" id="2147483648" r:id="R60c804bd99cd4a7a"/>
+    <p:sldMasterId xmlns:r="http://schemas.openxmlformats.org/officeDocument/2006/relationships" id="2147483648" r:id="R975861b5c8804d56"/>
   </p:sldMasterIdLst>
   <p:notesMasterIdLst>
-    <p:notesMasterId xmlns:r="http://schemas.openxmlformats.org/officeDocument/2006/relationships" r:id="R8ea8645e99654ead"/>
+    <p:notesMasterId xmlns:r="http://schemas.openxmlformats.org/officeDocument/2006/relationships" r:id="R922eed57b6a641ad"/>
   </p:notesMasterIdLst>
   <p:sldIdLst>
-    <p:sldId xmlns:r="http://schemas.openxmlformats.org/officeDocument/2006/relationships" id="256" r:id="R60417037ab624d4e"/>
-    <p:sldId xmlns:r="http://schemas.openxmlformats.org/officeDocument/2006/relationships" id="257" r:id="R2c199ce8f9684364"/>
-    <p:sldId xmlns:r="http://schemas.openxmlformats.org/officeDocument/2006/relationships" id="258" r:id="R48ce7bd25dec4235"/>
-    <p:sldId xmlns:r="http://schemas.openxmlformats.org/officeDocument/2006/relationships" id="259" r:id="Re4762e8e39b04711"/>
-    <p:sldId xmlns:r="http://schemas.openxmlformats.org/officeDocument/2006/relationships" id="260" r:id="R16fd0fd65f784461"/>
-    <p:sldId xmlns:r="http://schemas.openxmlformats.org/officeDocument/2006/relationships" id="261" r:id="Re445c32833474ff5"/>
-    <p:sldId xmlns:r="http://schemas.openxmlformats.org/officeDocument/2006/relationships" id="262" r:id="R08461cd261c94f1e"/>
-    <p:sldId xmlns:r="http://schemas.openxmlformats.org/officeDocument/2006/relationships" id="263" r:id="Rffb9be0cbc5f4415"/>
-    <p:sldId xmlns:r="http://schemas.openxmlformats.org/officeDocument/2006/relationships" id="264" r:id="Rf781b49f08324795"/>
-    <p:sldId xmlns:r="http://schemas.openxmlformats.org/officeDocument/2006/relationships" id="265" r:id="R5bb1afb818294251"/>
-    <p:sldId xmlns:r="http://schemas.openxmlformats.org/officeDocument/2006/relationships" id="266" r:id="R6790b2e26b3a419a"/>
-    <p:sldId xmlns:r="http://schemas.openxmlformats.org/officeDocument/2006/relationships" id="267" r:id="R9804fcbc98614d06"/>
-    <p:sldId xmlns:r="http://schemas.openxmlformats.org/officeDocument/2006/relationships" id="268" r:id="R10e24505592b4505"/>
-    <p:sldId xmlns:r="http://schemas.openxmlformats.org/officeDocument/2006/relationships" id="269" r:id="Rcd5635638bcd45b5"/>
-    <p:sldId xmlns:r="http://schemas.openxmlformats.org/officeDocument/2006/relationships" id="270" r:id="Rd58c9f084f0b46b5"/>
-    <p:sldId xmlns:r="http://schemas.openxmlformats.org/officeDocument/2006/relationships" id="271" r:id="Rec23cc3e4a1e43dc"/>
-    <p:sldId xmlns:r="http://schemas.openxmlformats.org/officeDocument/2006/relationships" id="272" r:id="Rb5ae40211be346ad"/>
-    <p:sldId xmlns:r="http://schemas.openxmlformats.org/officeDocument/2006/relationships" id="273" r:id="R803f531d739240e5"/>
-    <p:sldId xmlns:r="http://schemas.openxmlformats.org/officeDocument/2006/relationships" id="274" r:id="R9ad9ab9f0b6a4e70"/>
-    <p:sldId xmlns:r="http://schemas.openxmlformats.org/officeDocument/2006/relationships" id="275" r:id="Rf59d9b1dddb24942"/>
-    <p:sldId xmlns:r="http://schemas.openxmlformats.org/officeDocument/2006/relationships" id="276" r:id="Rb14b10d23ac14a3a"/>
-    <p:sldId xmlns:r="http://schemas.openxmlformats.org/officeDocument/2006/relationships" id="277" r:id="R30310c1fae894f85"/>
-    <p:sldId xmlns:r="http://schemas.openxmlformats.org/officeDocument/2006/relationships" id="278" r:id="R4dc361fa1cda4753"/>
-    <p:sldId xmlns:r="http://schemas.openxmlformats.org/officeDocument/2006/relationships" id="279" r:id="R6eefa3814d5a4a13"/>
-    <p:sldId xmlns:r="http://schemas.openxmlformats.org/officeDocument/2006/relationships" id="280" r:id="Re9286a7dffdd4137"/>
+    <p:sldId xmlns:r="http://schemas.openxmlformats.org/officeDocument/2006/relationships" id="256" r:id="R9e70a360828e44f9"/>
+    <p:sldId xmlns:r="http://schemas.openxmlformats.org/officeDocument/2006/relationships" id="257" r:id="R083f11c5772744ec"/>
+    <p:sldId xmlns:r="http://schemas.openxmlformats.org/officeDocument/2006/relationships" id="258" r:id="Rbe22d6f50c4d4d42"/>
+    <p:sldId xmlns:r="http://schemas.openxmlformats.org/officeDocument/2006/relationships" id="259" r:id="R3519d4f3ff3544b8"/>
+    <p:sldId xmlns:r="http://schemas.openxmlformats.org/officeDocument/2006/relationships" id="260" r:id="R9eb020fddcc444f0"/>
+    <p:sldId xmlns:r="http://schemas.openxmlformats.org/officeDocument/2006/relationships" id="261" r:id="R94485daa3e0e4c8f"/>
+    <p:sldId xmlns:r="http://schemas.openxmlformats.org/officeDocument/2006/relationships" id="262" r:id="Rb6751758b970431b"/>
+    <p:sldId xmlns:r="http://schemas.openxmlformats.org/officeDocument/2006/relationships" id="263" r:id="R92935a1cd7a14976"/>
+    <p:sldId xmlns:r="http://schemas.openxmlformats.org/officeDocument/2006/relationships" id="264" r:id="R3dadd38e036245ec"/>
+    <p:sldId xmlns:r="http://schemas.openxmlformats.org/officeDocument/2006/relationships" id="265" r:id="R3205d701fde4405f"/>
+    <p:sldId xmlns:r="http://schemas.openxmlformats.org/officeDocument/2006/relationships" id="266" r:id="R39985952344b4606"/>
+    <p:sldId xmlns:r="http://schemas.openxmlformats.org/officeDocument/2006/relationships" id="267" r:id="Rf448f58b70694253"/>
+    <p:sldId xmlns:r="http://schemas.openxmlformats.org/officeDocument/2006/relationships" id="268" r:id="R090135c77e294254"/>
+    <p:sldId xmlns:r="http://schemas.openxmlformats.org/officeDocument/2006/relationships" id="269" r:id="R6622dfbad56c4f0c"/>
+    <p:sldId xmlns:r="http://schemas.openxmlformats.org/officeDocument/2006/relationships" id="270" r:id="R0b2befc46e6d4c88"/>
+    <p:sldId xmlns:r="http://schemas.openxmlformats.org/officeDocument/2006/relationships" id="271" r:id="Rb206314e6fd541a8"/>
+    <p:sldId xmlns:r="http://schemas.openxmlformats.org/officeDocument/2006/relationships" id="272" r:id="Rda0673765add44a5"/>
+    <p:sldId xmlns:r="http://schemas.openxmlformats.org/officeDocument/2006/relationships" id="273" r:id="R85b5241bdda74030"/>
+    <p:sldId xmlns:r="http://schemas.openxmlformats.org/officeDocument/2006/relationships" id="274" r:id="Rbfbb077bfdbf44ea"/>
+    <p:sldId xmlns:r="http://schemas.openxmlformats.org/officeDocument/2006/relationships" id="275" r:id="Rfe6e5236d69b4b5a"/>
+    <p:sldId xmlns:r="http://schemas.openxmlformats.org/officeDocument/2006/relationships" id="276" r:id="R2926369e4c2343b8"/>
+    <p:sldId xmlns:r="http://schemas.openxmlformats.org/officeDocument/2006/relationships" id="277" r:id="R625759e43a16404a"/>
+    <p:sldId xmlns:r="http://schemas.openxmlformats.org/officeDocument/2006/relationships" id="278" r:id="R1b919f9b039d4020"/>
+    <p:sldId xmlns:r="http://schemas.openxmlformats.org/officeDocument/2006/relationships" id="279" r:id="R87edbf3ab0884e57"/>
+    <p:sldId xmlns:r="http://schemas.openxmlformats.org/officeDocument/2006/relationships" id="280" r:id="R3ce78a58660746ea"/>
   </p:sldIdLst>
   <p:sldSz cx="12192000" cy="6858000"/>
   <p:notesSz cx="6858000" cy="9144000"/>
@@ -4594,7 +4594,7 @@
   </p:cSld>
   <p:clrMap bg1="lt1" tx1="dk1" bg2="lt2" tx2="dk2" accent1="accent1" accent2="accent2" accent3="accent3" accent4="accent4" accent5="accent5" accent6="accent6" hlink="hlink" folHlink="folHlink"/>
   <p:sldLayoutIdLst>
-    <p:sldLayoutId xmlns:r="http://schemas.openxmlformats.org/officeDocument/2006/relationships" id="2147483649" r:id="R919bba39c6d941da"/>
+    <p:sldLayoutId xmlns:r="http://schemas.openxmlformats.org/officeDocument/2006/relationships" id="2147483649" r:id="Rdc7a175706444340"/>
   </p:sldLayoutIdLst>
   <p:txStyles>
     <p:titleStyle>
@@ -5896,7 +5896,7 @@
                 <a:solidFill>
                   <a:srgbClr val="666762"/>
                 </a:solidFill>
-                <a:hlinkClick xmlns:r="http://schemas.openxmlformats.org/officeDocument/2006/relationships" r:id="R063df1eeff244169"/>
+                <a:hlinkClick xmlns:r="http://schemas.openxmlformats.org/officeDocument/2006/relationships" r:id="R18b3931df0674cbd"/>
               </a:rPr>
               <a:t>Repo reference</a:t>
             </a:r>
@@ -5913,7 +5913,7 @@
                 <a:solidFill>
                   <a:srgbClr val="666762"/>
                 </a:solidFill>
-                <a:hlinkClick xmlns:r="http://schemas.openxmlformats.org/officeDocument/2006/relationships" r:id="Rabfc1b3f59d745bf"/>
+                <a:hlinkClick xmlns:r="http://schemas.openxmlformats.org/officeDocument/2006/relationships" r:id="R6f2cc002186e4538"/>
               </a:rPr>
               <a:t>Official docs</a:t>
             </a:r>
@@ -6274,7 +6274,7 @@
                 <a:solidFill>
                   <a:srgbClr val="666762"/>
                 </a:solidFill>
-                <a:hlinkClick xmlns:r="http://schemas.openxmlformats.org/officeDocument/2006/relationships" r:id="Rf1f8380c03b349e3"/>
+                <a:hlinkClick xmlns:r="http://schemas.openxmlformats.org/officeDocument/2006/relationships" r:id="R486679cd395d4f4b"/>
               </a:rPr>
               <a:t>Repo reference</a:t>
             </a:r>
@@ -6291,7 +6291,7 @@
                 <a:solidFill>
                   <a:srgbClr val="666762"/>
                 </a:solidFill>
-                <a:hlinkClick xmlns:r="http://schemas.openxmlformats.org/officeDocument/2006/relationships" r:id="R6ce6f9e3429549b3"/>
+                <a:hlinkClick xmlns:r="http://schemas.openxmlformats.org/officeDocument/2006/relationships" r:id="R882b0e3b9ba8486c"/>
               </a:rPr>
               <a:t>Official docs</a:t>
             </a:r>
@@ -7580,7 +7580,7 @@
                 <a:solidFill>
                   <a:srgbClr val="666762"/>
                 </a:solidFill>
-                <a:hlinkClick xmlns:r="http://schemas.openxmlformats.org/officeDocument/2006/relationships" r:id="Rafbb0ef3c20f4602"/>
+                <a:hlinkClick xmlns:r="http://schemas.openxmlformats.org/officeDocument/2006/relationships" r:id="Rbc372a36e6814a61"/>
               </a:rPr>
               <a:t>Repo reference</a:t>
             </a:r>
@@ -7597,7 +7597,7 @@
                 <a:solidFill>
                   <a:srgbClr val="666762"/>
                 </a:solidFill>
-                <a:hlinkClick xmlns:r="http://schemas.openxmlformats.org/officeDocument/2006/relationships" r:id="R43d221ddfb2240a0"/>
+                <a:hlinkClick xmlns:r="http://schemas.openxmlformats.org/officeDocument/2006/relationships" r:id="R1f842da340dc4db5"/>
               </a:rPr>
               <a:t>Official docs</a:t>
             </a:r>
@@ -8373,7 +8373,7 @@
       </p:sp>
       <p:cxnSp>
         <p:nvCxnSpPr>
-          <p:cNvPr id="263" name=""/>
+          <p:cNvPr id="309" name=""/>
           <p:cNvCxnSpPr>
             <a:stCxn xmlns:a="http://schemas.openxmlformats.org/drawingml/2006/main" id="9" idx="3"/>
             <a:endCxn xmlns:a="http://schemas.openxmlformats.org/drawingml/2006/main" id="12" idx="1"/>
@@ -8399,7 +8399,7 @@
       </p:cxnSp>
       <p:cxnSp>
         <p:nvCxnSpPr>
-          <p:cNvPr id="264" name=""/>
+          <p:cNvPr id="310" name=""/>
           <p:cNvCxnSpPr>
             <a:stCxn xmlns:a="http://schemas.openxmlformats.org/drawingml/2006/main" id="12" idx="3"/>
             <a:endCxn xmlns:a="http://schemas.openxmlformats.org/drawingml/2006/main" id="15" idx="1"/>
@@ -8425,7 +8425,7 @@
       </p:cxnSp>
       <p:cxnSp>
         <p:nvCxnSpPr>
-          <p:cNvPr id="265" name=""/>
+          <p:cNvPr id="311" name=""/>
           <p:cNvCxnSpPr>
             <a:stCxn xmlns:a="http://schemas.openxmlformats.org/drawingml/2006/main" id="15" idx="3"/>
             <a:endCxn xmlns:a="http://schemas.openxmlformats.org/drawingml/2006/main" id="18" idx="1"/>
@@ -9407,7 +9407,7 @@
                 <a:solidFill>
                   <a:srgbClr val="666762"/>
                 </a:solidFill>
-                <a:hlinkClick xmlns:r="http://schemas.openxmlformats.org/officeDocument/2006/relationships" r:id="Rd2d3cea478524721"/>
+                <a:hlinkClick xmlns:r="http://schemas.openxmlformats.org/officeDocument/2006/relationships" r:id="R986a96f400774a58"/>
               </a:rPr>
               <a:t>Repo reference</a:t>
             </a:r>
@@ -9424,7 +9424,7 @@
                 <a:solidFill>
                   <a:srgbClr val="666762"/>
                 </a:solidFill>
-                <a:hlinkClick xmlns:r="http://schemas.openxmlformats.org/officeDocument/2006/relationships" r:id="R539c58432d4744c9"/>
+                <a:hlinkClick xmlns:r="http://schemas.openxmlformats.org/officeDocument/2006/relationships" r:id="R26160a55e6e247e6"/>
               </a:rPr>
               <a:t>Official docs</a:t>
             </a:r>
@@ -11059,7 +11059,7 @@
                 <a:solidFill>
                   <a:srgbClr val="666762"/>
                 </a:solidFill>
-                <a:hlinkClick xmlns:r="http://schemas.openxmlformats.org/officeDocument/2006/relationships" r:id="Ra2b5e1c4e28a46a7"/>
+                <a:hlinkClick xmlns:r="http://schemas.openxmlformats.org/officeDocument/2006/relationships" r:id="R064ac837132c4098"/>
               </a:rPr>
               <a:t>Repo reference</a:t>
             </a:r>
@@ -11076,7 +11076,7 @@
                 <a:solidFill>
                   <a:srgbClr val="666762"/>
                 </a:solidFill>
-                <a:hlinkClick xmlns:r="http://schemas.openxmlformats.org/officeDocument/2006/relationships" r:id="Rf70857b4e97e4c7d"/>
+                <a:hlinkClick xmlns:r="http://schemas.openxmlformats.org/officeDocument/2006/relationships" r:id="R15942daaa3cf4b43"/>
               </a:rPr>
               <a:t>Official docs</a:t>
             </a:r>
@@ -13303,7 +13303,7 @@
                 <a:solidFill>
                   <a:srgbClr val="666762"/>
                 </a:solidFill>
-                <a:hlinkClick xmlns:r="http://schemas.openxmlformats.org/officeDocument/2006/relationships" r:id="Rf626b329861a487b"/>
+                <a:hlinkClick xmlns:r="http://schemas.openxmlformats.org/officeDocument/2006/relationships" r:id="Rdc1d9af182974e34"/>
               </a:rPr>
               <a:t>Repo reference</a:t>
             </a:r>
@@ -13320,7 +13320,7 @@
                 <a:solidFill>
                   <a:srgbClr val="666762"/>
                 </a:solidFill>
-                <a:hlinkClick xmlns:r="http://schemas.openxmlformats.org/officeDocument/2006/relationships" r:id="R712569a5a4d54fb7"/>
+                <a:hlinkClick xmlns:r="http://schemas.openxmlformats.org/officeDocument/2006/relationships" r:id="R15f6e7610c514a41"/>
               </a:rPr>
               <a:t>Official docs</a:t>
             </a:r>
@@ -15266,7 +15266,7 @@
                 <a:solidFill>
                   <a:srgbClr val="666762"/>
                 </a:solidFill>
-                <a:hlinkClick xmlns:r="http://schemas.openxmlformats.org/officeDocument/2006/relationships" r:id="R1263daf97d134853"/>
+                <a:hlinkClick xmlns:r="http://schemas.openxmlformats.org/officeDocument/2006/relationships" r:id="R09d9dda4f9024890"/>
               </a:rPr>
               <a:t>Repo reference</a:t>
             </a:r>
@@ -15283,7 +15283,7 @@
                 <a:solidFill>
                   <a:srgbClr val="666762"/>
                 </a:solidFill>
-                <a:hlinkClick xmlns:r="http://schemas.openxmlformats.org/officeDocument/2006/relationships" r:id="R4bbe7096d3104c54"/>
+                <a:hlinkClick xmlns:r="http://schemas.openxmlformats.org/officeDocument/2006/relationships" r:id="R4f6e0cf26e9042b3"/>
               </a:rPr>
               <a:t>Official docs</a:t>
             </a:r>
@@ -16140,7 +16140,7 @@
       </p:sp>
       <p:cxnSp>
         <p:nvCxnSpPr>
-          <p:cNvPr id="307" name=""/>
+          <p:cNvPr id="363" name=""/>
           <p:cNvCxnSpPr>
             <a:stCxn xmlns:a="http://schemas.openxmlformats.org/drawingml/2006/main" id="9" idx="3"/>
             <a:endCxn xmlns:a="http://schemas.openxmlformats.org/drawingml/2006/main" id="12" idx="1"/>
@@ -16166,7 +16166,7 @@
       </p:cxnSp>
       <p:cxnSp>
         <p:nvCxnSpPr>
-          <p:cNvPr id="308" name=""/>
+          <p:cNvPr id="364" name=""/>
           <p:cNvCxnSpPr>
             <a:stCxn xmlns:a="http://schemas.openxmlformats.org/drawingml/2006/main" id="12" idx="3"/>
             <a:endCxn xmlns:a="http://schemas.openxmlformats.org/drawingml/2006/main" id="15" idx="1"/>
@@ -16194,7 +16194,7 @@
       </p:cxnSp>
       <p:cxnSp>
         <p:nvCxnSpPr>
-          <p:cNvPr id="309" name=""/>
+          <p:cNvPr id="365" name=""/>
           <p:cNvCxnSpPr>
             <a:stCxn xmlns:a="http://schemas.openxmlformats.org/drawingml/2006/main" id="12" idx="3"/>
             <a:endCxn xmlns:a="http://schemas.openxmlformats.org/drawingml/2006/main" id="18" idx="1"/>
@@ -16222,7 +16222,7 @@
       </p:cxnSp>
       <p:cxnSp>
         <p:nvCxnSpPr>
-          <p:cNvPr id="310" name=""/>
+          <p:cNvPr id="366" name=""/>
           <p:cNvCxnSpPr>
             <a:stCxn xmlns:a="http://schemas.openxmlformats.org/drawingml/2006/main" id="15" idx="3"/>
             <a:endCxn xmlns:a="http://schemas.openxmlformats.org/drawingml/2006/main" id="21" idx="1"/>
@@ -16250,7 +16250,7 @@
       </p:cxnSp>
       <p:cxnSp>
         <p:nvCxnSpPr>
-          <p:cNvPr id="311" name=""/>
+          <p:cNvPr id="367" name=""/>
           <p:cNvCxnSpPr>
             <a:stCxn xmlns:a="http://schemas.openxmlformats.org/drawingml/2006/main" id="18" idx="3"/>
             <a:endCxn xmlns:a="http://schemas.openxmlformats.org/drawingml/2006/main" id="21" idx="1"/>
@@ -16700,7 +16700,7 @@
                 <a:latin typeface="Arial"/>
                 <a:ea typeface="Arial"/>
                 <a:cs typeface="Arial"/>
-                <a:hlinkClick xmlns:r="http://schemas.openxmlformats.org/officeDocument/2006/relationships" r:id="R62e375ce0497439d"/>
+                <a:hlinkClick xmlns:r="http://schemas.openxmlformats.org/officeDocument/2006/relationships" r:id="R911fb143ee444a90"/>
               </a:rPr>
               <a:t>Apigee A0–A6</a:t>
             </a:r>
@@ -16804,7 +16804,7 @@
                 <a:solidFill>
                   <a:srgbClr val="666762"/>
                 </a:solidFill>
-                <a:hlinkClick xmlns:r="http://schemas.openxmlformats.org/officeDocument/2006/relationships" r:id="R1c28582fbaff48e4"/>
+                <a:hlinkClick xmlns:r="http://schemas.openxmlformats.org/officeDocument/2006/relationships" r:id="Rac7c1ddceb70471f"/>
               </a:rPr>
               <a:t>Repo reference</a:t>
             </a:r>
@@ -16821,7 +16821,7 @@
                 <a:solidFill>
                   <a:srgbClr val="666762"/>
                 </a:solidFill>
-                <a:hlinkClick xmlns:r="http://schemas.openxmlformats.org/officeDocument/2006/relationships" r:id="R7f21fb6e85534687"/>
+                <a:hlinkClick xmlns:r="http://schemas.openxmlformats.org/officeDocument/2006/relationships" r:id="R9e76e9e80ab14a5c"/>
               </a:rPr>
               <a:t>Official docs</a:t>
             </a:r>
@@ -19909,7 +19909,7 @@
                 <a:solidFill>
                   <a:srgbClr val="666762"/>
                 </a:solidFill>
-                <a:hlinkClick xmlns:r="http://schemas.openxmlformats.org/officeDocument/2006/relationships" r:id="Rd0140178fd474b49"/>
+                <a:hlinkClick xmlns:r="http://schemas.openxmlformats.org/officeDocument/2006/relationships" r:id="R7b24b5b1d5ec44bd"/>
               </a:rPr>
               <a:t>Repo reference</a:t>
             </a:r>
@@ -19926,7 +19926,7 @@
                 <a:solidFill>
                   <a:srgbClr val="666762"/>
                 </a:solidFill>
-                <a:hlinkClick xmlns:r="http://schemas.openxmlformats.org/officeDocument/2006/relationships" r:id="Re4a0a24c3f964747"/>
+                <a:hlinkClick xmlns:r="http://schemas.openxmlformats.org/officeDocument/2006/relationships" r:id="R6058eb4ba4084118"/>
               </a:rPr>
               <a:t>Official docs</a:t>
             </a:r>
@@ -21208,7 +21208,7 @@
                 <a:solidFill>
                   <a:srgbClr val="666762"/>
                 </a:solidFill>
-                <a:hlinkClick xmlns:r="http://schemas.openxmlformats.org/officeDocument/2006/relationships" r:id="R18ea84ca327940c5"/>
+                <a:hlinkClick xmlns:r="http://schemas.openxmlformats.org/officeDocument/2006/relationships" r:id="R1cca879826c049e8"/>
               </a:rPr>
               <a:t>Repo reference</a:t>
             </a:r>
@@ -21225,7 +21225,7 @@
                 <a:solidFill>
                   <a:srgbClr val="666762"/>
                 </a:solidFill>
-                <a:hlinkClick xmlns:r="http://schemas.openxmlformats.org/officeDocument/2006/relationships" r:id="R221a2808b8c54ac9"/>
+                <a:hlinkClick xmlns:r="http://schemas.openxmlformats.org/officeDocument/2006/relationships" r:id="R8eb50f367df945fb"/>
               </a:rPr>
               <a:t>Official docs</a:t>
             </a:r>
@@ -23160,7 +23160,7 @@
                 <a:solidFill>
                   <a:srgbClr val="666762"/>
                 </a:solidFill>
-                <a:hlinkClick xmlns:r="http://schemas.openxmlformats.org/officeDocument/2006/relationships" r:id="Rd5102ee8f65a423c"/>
+                <a:hlinkClick xmlns:r="http://schemas.openxmlformats.org/officeDocument/2006/relationships" r:id="R274505ff38eb4d77"/>
               </a:rPr>
               <a:t>Repo reference</a:t>
             </a:r>
@@ -23177,7 +23177,7 @@
                 <a:solidFill>
                   <a:srgbClr val="666762"/>
                 </a:solidFill>
-                <a:hlinkClick xmlns:r="http://schemas.openxmlformats.org/officeDocument/2006/relationships" r:id="Rb4a02421c0ce42e8"/>
+                <a:hlinkClick xmlns:r="http://schemas.openxmlformats.org/officeDocument/2006/relationships" r:id="Rfdb9c78545bf484f"/>
               </a:rPr>
               <a:t>Official docs</a:t>
             </a:r>
@@ -25532,7 +25532,7 @@
                 <a:solidFill>
                   <a:srgbClr val="666762"/>
                 </a:solidFill>
-                <a:hlinkClick xmlns:r="http://schemas.openxmlformats.org/officeDocument/2006/relationships" r:id="R1adb478676e24d4f"/>
+                <a:hlinkClick xmlns:r="http://schemas.openxmlformats.org/officeDocument/2006/relationships" r:id="R192e07b295744540"/>
               </a:rPr>
               <a:t>Repo reference</a:t>
             </a:r>
@@ -25549,7 +25549,7 @@
                 <a:solidFill>
                   <a:srgbClr val="666762"/>
                 </a:solidFill>
-                <a:hlinkClick xmlns:r="http://schemas.openxmlformats.org/officeDocument/2006/relationships" r:id="Ra49e7b2f39b04741"/>
+                <a:hlinkClick xmlns:r="http://schemas.openxmlformats.org/officeDocument/2006/relationships" r:id="R499af43ac8924fbe"/>
               </a:rPr>
               <a:t>Official docs</a:t>
             </a:r>
@@ -27175,7 +27175,7 @@
                 <a:solidFill>
                   <a:srgbClr val="666762"/>
                 </a:solidFill>
-                <a:hlinkClick xmlns:r="http://schemas.openxmlformats.org/officeDocument/2006/relationships" r:id="R3bf9810ed14d46cb"/>
+                <a:hlinkClick xmlns:r="http://schemas.openxmlformats.org/officeDocument/2006/relationships" r:id="R6228357ccc72424a"/>
               </a:rPr>
               <a:t>Repo reference</a:t>
             </a:r>
@@ -27192,7 +27192,7 @@
                 <a:solidFill>
                   <a:srgbClr val="666762"/>
                 </a:solidFill>
-                <a:hlinkClick xmlns:r="http://schemas.openxmlformats.org/officeDocument/2006/relationships" r:id="R7bc13b7db82d40b0"/>
+                <a:hlinkClick xmlns:r="http://schemas.openxmlformats.org/officeDocument/2006/relationships" r:id="Rddff6a529e0044d1"/>
               </a:rPr>
               <a:t>Official docs</a:t>
             </a:r>
@@ -29117,7 +29117,7 @@
                 <a:solidFill>
                   <a:srgbClr val="666762"/>
                 </a:solidFill>
-                <a:hlinkClick xmlns:r="http://schemas.openxmlformats.org/officeDocument/2006/relationships" r:id="R9d6a043af80d4a02"/>
+                <a:hlinkClick xmlns:r="http://schemas.openxmlformats.org/officeDocument/2006/relationships" r:id="Ra0871fde61a842ae"/>
               </a:rPr>
               <a:t>Repo reference</a:t>
             </a:r>
@@ -29134,7 +29134,7 @@
                 <a:solidFill>
                   <a:srgbClr val="666762"/>
                 </a:solidFill>
-                <a:hlinkClick xmlns:r="http://schemas.openxmlformats.org/officeDocument/2006/relationships" r:id="R3840573ea64c4e76"/>
+                <a:hlinkClick xmlns:r="http://schemas.openxmlformats.org/officeDocument/2006/relationships" r:id="R1d5e1775c2ef4f4d"/>
               </a:rPr>
               <a:t>Official docs</a:t>
             </a:r>
@@ -29556,7 +29556,7 @@
       </p:sp>
       <p:cxnSp>
         <p:nvCxnSpPr>
-          <p:cNvPr id="286" name=""/>
+          <p:cNvPr id="340" name=""/>
           <p:cNvCxnSpPr>
             <a:stCxn xmlns:a="http://schemas.openxmlformats.org/drawingml/2006/main" id="9" idx="1"/>
             <a:endCxn xmlns:a="http://schemas.openxmlformats.org/drawingml/2006/main" id="12" idx="3"/>
@@ -29761,7 +29761,7 @@
       </p:sp>
       <p:cxnSp>
         <p:nvCxnSpPr>
-          <p:cNvPr id="290" name=""/>
+          <p:cNvPr id="344" name=""/>
           <p:cNvCxnSpPr>
             <a:stCxn xmlns:a="http://schemas.openxmlformats.org/drawingml/2006/main" id="9" idx="1"/>
             <a:endCxn xmlns:a="http://schemas.openxmlformats.org/drawingml/2006/main" id="16" idx="3"/>
@@ -29966,7 +29966,7 @@
       </p:sp>
       <p:cxnSp>
         <p:nvCxnSpPr>
-          <p:cNvPr id="294" name=""/>
+          <p:cNvPr id="348" name=""/>
           <p:cNvCxnSpPr>
             <a:stCxn xmlns:a="http://schemas.openxmlformats.org/drawingml/2006/main" id="9" idx="3"/>
             <a:endCxn xmlns:a="http://schemas.openxmlformats.org/drawingml/2006/main" id="20" idx="1"/>
@@ -30171,7 +30171,7 @@
       </p:sp>
       <p:cxnSp>
         <p:nvCxnSpPr>
-          <p:cNvPr id="298" name=""/>
+          <p:cNvPr id="352" name=""/>
           <p:cNvCxnSpPr>
             <a:stCxn xmlns:a="http://schemas.openxmlformats.org/drawingml/2006/main" id="9" idx="3"/>
             <a:endCxn xmlns:a="http://schemas.openxmlformats.org/drawingml/2006/main" id="24" idx="1"/>
@@ -30610,7 +30610,7 @@
                 <a:solidFill>
                   <a:srgbClr val="666762"/>
                 </a:solidFill>
-                <a:hlinkClick xmlns:r="http://schemas.openxmlformats.org/officeDocument/2006/relationships" r:id="Rb24633c9f3f440e9"/>
+                <a:hlinkClick xmlns:r="http://schemas.openxmlformats.org/officeDocument/2006/relationships" r:id="Rbfdb6c0cc3c34b29"/>
               </a:rPr>
               <a:t>Repo reference</a:t>
             </a:r>
@@ -30627,7 +30627,7 @@
                 <a:solidFill>
                   <a:srgbClr val="666762"/>
                 </a:solidFill>
-                <a:hlinkClick xmlns:r="http://schemas.openxmlformats.org/officeDocument/2006/relationships" r:id="R0cd94291b15244a6"/>
+                <a:hlinkClick xmlns:r="http://schemas.openxmlformats.org/officeDocument/2006/relationships" r:id="Racb5107a8469471b"/>
               </a:rPr>
               <a:t>Official docs</a:t>
             </a:r>
@@ -31506,7 +31506,7 @@
                 <a:solidFill>
                   <a:srgbClr val="666762"/>
                 </a:solidFill>
-                <a:hlinkClick xmlns:r="http://schemas.openxmlformats.org/officeDocument/2006/relationships" r:id="R8bf1a861925543f5"/>
+                <a:hlinkClick xmlns:r="http://schemas.openxmlformats.org/officeDocument/2006/relationships" r:id="Rb42ccb04d4174c75"/>
               </a:rPr>
               <a:t>Repo reference</a:t>
             </a:r>
@@ -31523,7 +31523,7 @@
                 <a:solidFill>
                   <a:srgbClr val="666762"/>
                 </a:solidFill>
-                <a:hlinkClick xmlns:r="http://schemas.openxmlformats.org/officeDocument/2006/relationships" r:id="R6cfd9859a60b4194"/>
+                <a:hlinkClick xmlns:r="http://schemas.openxmlformats.org/officeDocument/2006/relationships" r:id="R5bf9243421164134"/>
               </a:rPr>
               <a:t>Official docs</a:t>
             </a:r>
@@ -32402,7 +32402,7 @@
                 <a:solidFill>
                   <a:srgbClr val="666762"/>
                 </a:solidFill>
-                <a:hlinkClick xmlns:r="http://schemas.openxmlformats.org/officeDocument/2006/relationships" r:id="R7cfe6bd9200c49bf"/>
+                <a:hlinkClick xmlns:r="http://schemas.openxmlformats.org/officeDocument/2006/relationships" r:id="R698e43ea352f4cec"/>
               </a:rPr>
               <a:t>Repo reference</a:t>
             </a:r>
@@ -32419,7 +32419,7 @@
                 <a:solidFill>
                   <a:srgbClr val="666762"/>
                 </a:solidFill>
-                <a:hlinkClick xmlns:r="http://schemas.openxmlformats.org/officeDocument/2006/relationships" r:id="Re896958e520744f3"/>
+                <a:hlinkClick xmlns:r="http://schemas.openxmlformats.org/officeDocument/2006/relationships" r:id="Rd64158f14a5a48af"/>
               </a:rPr>
               <a:t>Official docs</a:t>
             </a:r>
@@ -33227,7 +33227,7 @@
                 <a:solidFill>
                   <a:srgbClr val="666762"/>
                 </a:solidFill>
-                <a:hlinkClick xmlns:r="http://schemas.openxmlformats.org/officeDocument/2006/relationships" r:id="Rdf4bda4da7a046c4"/>
+                <a:hlinkClick xmlns:r="http://schemas.openxmlformats.org/officeDocument/2006/relationships" r:id="Rf7d71e730c90463c"/>
               </a:rPr>
               <a:t>Repo reference</a:t>
             </a:r>
@@ -33244,7 +33244,7 @@
                 <a:solidFill>
                   <a:srgbClr val="666762"/>
                 </a:solidFill>
-                <a:hlinkClick xmlns:r="http://schemas.openxmlformats.org/officeDocument/2006/relationships" r:id="R159d120a3db64d42"/>
+                <a:hlinkClick xmlns:r="http://schemas.openxmlformats.org/officeDocument/2006/relationships" r:id="R97ddcb1bf39042cd"/>
               </a:rPr>
               <a:t>Official docs</a:t>
             </a:r>
@@ -34914,7 +34914,7 @@
                 <a:solidFill>
                   <a:srgbClr val="666762"/>
                 </a:solidFill>
-                <a:hlinkClick xmlns:r="http://schemas.openxmlformats.org/officeDocument/2006/relationships" r:id="R9a7e86023198430c"/>
+                <a:hlinkClick xmlns:r="http://schemas.openxmlformats.org/officeDocument/2006/relationships" r:id="Rb3fc4f30f3cb47d9"/>
               </a:rPr>
               <a:t>Repo reference</a:t>
             </a:r>
@@ -34931,7 +34931,7 @@
                 <a:solidFill>
                   <a:srgbClr val="666762"/>
                 </a:solidFill>
-                <a:hlinkClick xmlns:r="http://schemas.openxmlformats.org/officeDocument/2006/relationships" r:id="R0fd72cf9e355403c"/>
+                <a:hlinkClick xmlns:r="http://schemas.openxmlformats.org/officeDocument/2006/relationships" r:id="Rcf6e412bb60f4d85"/>
               </a:rPr>
               <a:t>Official docs</a:t>
             </a:r>
@@ -37270,7 +37270,7 @@
                 <a:solidFill>
                   <a:srgbClr val="666762"/>
                 </a:solidFill>
-                <a:hlinkClick xmlns:r="http://schemas.openxmlformats.org/officeDocument/2006/relationships" r:id="R43e07d92e3c149ef"/>
+                <a:hlinkClick xmlns:r="http://schemas.openxmlformats.org/officeDocument/2006/relationships" r:id="R1bbf74f275ce4491"/>
               </a:rPr>
               <a:t>Repo reference</a:t>
             </a:r>
@@ -37287,7 +37287,7 @@
                 <a:solidFill>
                   <a:srgbClr val="666762"/>
                 </a:solidFill>
-                <a:hlinkClick xmlns:r="http://schemas.openxmlformats.org/officeDocument/2006/relationships" r:id="Ra095d4038fdf44ea"/>
+                <a:hlinkClick xmlns:r="http://schemas.openxmlformats.org/officeDocument/2006/relationships" r:id="R79b752accd5a476d"/>
               </a:rPr>
               <a:t>Official docs</a:t>
             </a:r>
@@ -39143,7 +39143,7 @@
                 <a:solidFill>
                   <a:srgbClr val="666762"/>
                 </a:solidFill>
-                <a:hlinkClick xmlns:r="http://schemas.openxmlformats.org/officeDocument/2006/relationships" r:id="R1499fc48bf18445c"/>
+                <a:hlinkClick xmlns:r="http://schemas.openxmlformats.org/officeDocument/2006/relationships" r:id="R169ecf520e9a4de8"/>
               </a:rPr>
               <a:t>Repo reference</a:t>
             </a:r>
@@ -39160,7 +39160,7 @@
                 <a:solidFill>
                   <a:srgbClr val="666762"/>
                 </a:solidFill>
-                <a:hlinkClick xmlns:r="http://schemas.openxmlformats.org/officeDocument/2006/relationships" r:id="R8dbd86b6b0274c09"/>
+                <a:hlinkClick xmlns:r="http://schemas.openxmlformats.org/officeDocument/2006/relationships" r:id="Rec3f0979ab254c34"/>
               </a:rPr>
               <a:t>Official docs</a:t>
             </a:r>
@@ -40601,7 +40601,7 @@
                 <a:solidFill>
                   <a:srgbClr val="666762"/>
                 </a:solidFill>
-                <a:hlinkClick xmlns:r="http://schemas.openxmlformats.org/officeDocument/2006/relationships" r:id="Rf60ec131aa3e47e2"/>
+                <a:hlinkClick xmlns:r="http://schemas.openxmlformats.org/officeDocument/2006/relationships" r:id="R48c49c48f20c4a3a"/>
               </a:rPr>
               <a:t>Repo reference</a:t>
             </a:r>
@@ -40618,7 +40618,7 @@
                 <a:solidFill>
                   <a:srgbClr val="666762"/>
                 </a:solidFill>
-                <a:hlinkClick xmlns:r="http://schemas.openxmlformats.org/officeDocument/2006/relationships" r:id="R1147370ba3824598"/>
+                <a:hlinkClick xmlns:r="http://schemas.openxmlformats.org/officeDocument/2006/relationships" r:id="R478c41f9df1e4257"/>
               </a:rPr>
               <a:t>Official docs</a:t>
             </a:r>
@@ -41723,7 +41723,7 @@
                 <a:solidFill>
                   <a:srgbClr val="666762"/>
                 </a:solidFill>
-                <a:hlinkClick xmlns:r="http://schemas.openxmlformats.org/officeDocument/2006/relationships" r:id="Rf25d17a953474647"/>
+                <a:hlinkClick xmlns:r="http://schemas.openxmlformats.org/officeDocument/2006/relationships" r:id="Rfa7856dc91e14807"/>
               </a:rPr>
               <a:t>Repo reference</a:t>
             </a:r>
@@ -41740,7 +41740,7 @@
                 <a:solidFill>
                   <a:srgbClr val="666762"/>
                 </a:solidFill>
-                <a:hlinkClick xmlns:r="http://schemas.openxmlformats.org/officeDocument/2006/relationships" r:id="Rbdc628a493f24ada"/>
+                <a:hlinkClick xmlns:r="http://schemas.openxmlformats.org/officeDocument/2006/relationships" r:id="Ra2f840fc46fd473b"/>
               </a:rPr>
               <a:t>Official docs</a:t>
             </a:r>
@@ -42975,7 +42975,7 @@
                 <a:solidFill>
                   <a:srgbClr val="666762"/>
                 </a:solidFill>
-                <a:hlinkClick xmlns:r="http://schemas.openxmlformats.org/officeDocument/2006/relationships" r:id="Rb6ee57469edd4a85"/>
+                <a:hlinkClick xmlns:r="http://schemas.openxmlformats.org/officeDocument/2006/relationships" r:id="R4e67341ed29f4aae"/>
               </a:rPr>
               <a:t>Repo reference</a:t>
             </a:r>
@@ -42992,7 +42992,7 @@
                 <a:solidFill>
                   <a:srgbClr val="666762"/>
                 </a:solidFill>
-                <a:hlinkClick xmlns:r="http://schemas.openxmlformats.org/officeDocument/2006/relationships" r:id="R4164bce6d9c8461f"/>
+                <a:hlinkClick xmlns:r="http://schemas.openxmlformats.org/officeDocument/2006/relationships" r:id="R3c0d23fb5fb546f2"/>
               </a:rPr>
               <a:t>Official docs</a:t>
             </a:r>
@@ -44340,7 +44340,7 @@
                 <a:solidFill>
                   <a:srgbClr val="666762"/>
                 </a:solidFill>
-                <a:hlinkClick xmlns:r="http://schemas.openxmlformats.org/officeDocument/2006/relationships" r:id="R6018f5851e4b41c1"/>
+                <a:hlinkClick xmlns:r="http://schemas.openxmlformats.org/officeDocument/2006/relationships" r:id="R265fee4e8fb44b2e"/>
               </a:rPr>
               <a:t>Repo reference</a:t>
             </a:r>
@@ -44357,7 +44357,7 @@
                 <a:solidFill>
                   <a:srgbClr val="666762"/>
                 </a:solidFill>
-                <a:hlinkClick xmlns:r="http://schemas.openxmlformats.org/officeDocument/2006/relationships" r:id="Rb56598cfbfc2479c"/>
+                <a:hlinkClick xmlns:r="http://schemas.openxmlformats.org/officeDocument/2006/relationships" r:id="R7a167986bee34b7d"/>
               </a:rPr>
               <a:t>Official docs</a:t>
             </a:r>
@@ -44884,17 +44884,17 @@
       </p:sp>
       <p:cxnSp>
         <p:nvCxnSpPr>
-          <p:cNvPr id="480" name=""/>
+          <p:cNvPr id="570" name=""/>
           <p:cNvCxnSpPr>
-            <a:stCxn xmlns:a="http://schemas.openxmlformats.org/drawingml/2006/main" id="16" idx="0"/>
-            <a:endCxn xmlns:a="http://schemas.openxmlformats.org/drawingml/2006/main" id="10" idx="2"/>
+            <a:stCxn xmlns:a="http://schemas.openxmlformats.org/drawingml/2006/main" id="16" idx="1"/>
+            <a:endCxn xmlns:a="http://schemas.openxmlformats.org/drawingml/2006/main" id="10" idx="1"/>
           </p:cNvCxnSpPr>
           <p:nvPr/>
         </p:nvCxnSpPr>
         <p:spPr>
           <a:xfrm xmlns:a="http://schemas.openxmlformats.org/drawingml/2006/main" flipV="1">
-            <a:off x="1876425" y="3476625"/>
-            <a:ext cx="1304925" cy="1590675"/>
+            <a:off x="457200" y="2990850"/>
+            <a:ext cx="228600" cy="2419350"/>
           </a:xfrm>
           <a:prstGeom xmlns:a="http://schemas.openxmlformats.org/drawingml/2006/main" prst="bentConnector4">
             <a:avLst/>
@@ -44910,7 +44910,7 @@
       </p:cxnSp>
       <p:cxnSp>
         <p:nvCxnSpPr>
-          <p:cNvPr id="481" name=""/>
+          <p:cNvPr id="571" name=""/>
           <p:cNvCxnSpPr>
             <a:stCxn xmlns:a="http://schemas.openxmlformats.org/drawingml/2006/main" id="10" idx="2"/>
             <a:endCxn xmlns:a="http://schemas.openxmlformats.org/drawingml/2006/main" id="13" idx="0"/>
@@ -45454,7 +45454,7 @@
       </p:sp>
       <p:cxnSp>
         <p:nvCxnSpPr>
-          <p:cNvPr id="492" name=""/>
+          <p:cNvPr id="582" name=""/>
           <p:cNvCxnSpPr>
             <a:stCxn xmlns:a="http://schemas.openxmlformats.org/drawingml/2006/main" id="10" idx="3"/>
             <a:endCxn xmlns:a="http://schemas.openxmlformats.org/drawingml/2006/main" id="21" idx="1"/>
@@ -45482,7 +45482,7 @@
       </p:cxnSp>
       <p:cxnSp>
         <p:nvCxnSpPr>
-          <p:cNvPr id="493" name=""/>
+          <p:cNvPr id="583" name=""/>
           <p:cNvCxnSpPr>
             <a:stCxn xmlns:a="http://schemas.openxmlformats.org/drawingml/2006/main" id="10" idx="3"/>
             <a:endCxn xmlns:a="http://schemas.openxmlformats.org/drawingml/2006/main" id="24" idx="1"/>
@@ -45510,7 +45510,7 @@
       </p:cxnSp>
       <p:cxnSp>
         <p:nvCxnSpPr>
-          <p:cNvPr id="494" name=""/>
+          <p:cNvPr id="584" name=""/>
           <p:cNvCxnSpPr>
             <a:stCxn xmlns:a="http://schemas.openxmlformats.org/drawingml/2006/main" id="10" idx="3"/>
             <a:endCxn xmlns:a="http://schemas.openxmlformats.org/drawingml/2006/main" id="27" idx="1"/>
@@ -46056,7 +46056,7 @@
       </p:sp>
       <p:cxnSp>
         <p:nvCxnSpPr>
-          <p:cNvPr id="505" name=""/>
+          <p:cNvPr id="595" name=""/>
           <p:cNvCxnSpPr>
             <a:stCxn xmlns:a="http://schemas.openxmlformats.org/drawingml/2006/main" id="21" idx="3"/>
             <a:endCxn xmlns:a="http://schemas.openxmlformats.org/drawingml/2006/main" id="34" idx="1"/>
@@ -46082,7 +46082,7 @@
       </p:cxnSp>
       <p:cxnSp>
         <p:nvCxnSpPr>
-          <p:cNvPr id="506" name=""/>
+          <p:cNvPr id="596" name=""/>
           <p:cNvCxnSpPr>
             <a:stCxn xmlns:a="http://schemas.openxmlformats.org/drawingml/2006/main" id="24" idx="3"/>
             <a:endCxn xmlns:a="http://schemas.openxmlformats.org/drawingml/2006/main" id="37" idx="1"/>
@@ -46108,7 +46108,7 @@
       </p:cxnSp>
       <p:cxnSp>
         <p:nvCxnSpPr>
-          <p:cNvPr id="507" name=""/>
+          <p:cNvPr id="597" name=""/>
           <p:cNvCxnSpPr>
             <a:stCxn xmlns:a="http://schemas.openxmlformats.org/drawingml/2006/main" id="27" idx="3"/>
             <a:endCxn xmlns:a="http://schemas.openxmlformats.org/drawingml/2006/main" id="40" idx="1"/>

--- a/presentations/kong-platform-journey-guided.pptx
+++ b/presentations/kong-platform-journey-guided.pptx
@@ -2,37 +2,37 @@
 <file path=ppt/presentation.xml><?xml version="1.0" encoding="utf-8"?>
 <p:presentation xmlns:p="http://schemas.openxmlformats.org/presentationml/2006/main">
   <p:sldMasterIdLst>
-    <p:sldMasterId xmlns:r="http://schemas.openxmlformats.org/officeDocument/2006/relationships" id="2147483648" r:id="R975861b5c8804d56"/>
+    <p:sldMasterId xmlns:r="http://schemas.openxmlformats.org/officeDocument/2006/relationships" id="2147483648" r:id="R84bd8bfb80ce41c6"/>
   </p:sldMasterIdLst>
   <p:notesMasterIdLst>
-    <p:notesMasterId xmlns:r="http://schemas.openxmlformats.org/officeDocument/2006/relationships" r:id="R922eed57b6a641ad"/>
+    <p:notesMasterId xmlns:r="http://schemas.openxmlformats.org/officeDocument/2006/relationships" r:id="R60283102e2d047ee"/>
   </p:notesMasterIdLst>
   <p:sldIdLst>
-    <p:sldId xmlns:r="http://schemas.openxmlformats.org/officeDocument/2006/relationships" id="256" r:id="R9e70a360828e44f9"/>
-    <p:sldId xmlns:r="http://schemas.openxmlformats.org/officeDocument/2006/relationships" id="257" r:id="R083f11c5772744ec"/>
-    <p:sldId xmlns:r="http://schemas.openxmlformats.org/officeDocument/2006/relationships" id="258" r:id="Rbe22d6f50c4d4d42"/>
-    <p:sldId xmlns:r="http://schemas.openxmlformats.org/officeDocument/2006/relationships" id="259" r:id="R3519d4f3ff3544b8"/>
-    <p:sldId xmlns:r="http://schemas.openxmlformats.org/officeDocument/2006/relationships" id="260" r:id="R9eb020fddcc444f0"/>
-    <p:sldId xmlns:r="http://schemas.openxmlformats.org/officeDocument/2006/relationships" id="261" r:id="R94485daa3e0e4c8f"/>
-    <p:sldId xmlns:r="http://schemas.openxmlformats.org/officeDocument/2006/relationships" id="262" r:id="Rb6751758b970431b"/>
-    <p:sldId xmlns:r="http://schemas.openxmlformats.org/officeDocument/2006/relationships" id="263" r:id="R92935a1cd7a14976"/>
-    <p:sldId xmlns:r="http://schemas.openxmlformats.org/officeDocument/2006/relationships" id="264" r:id="R3dadd38e036245ec"/>
-    <p:sldId xmlns:r="http://schemas.openxmlformats.org/officeDocument/2006/relationships" id="265" r:id="R3205d701fde4405f"/>
-    <p:sldId xmlns:r="http://schemas.openxmlformats.org/officeDocument/2006/relationships" id="266" r:id="R39985952344b4606"/>
-    <p:sldId xmlns:r="http://schemas.openxmlformats.org/officeDocument/2006/relationships" id="267" r:id="Rf448f58b70694253"/>
-    <p:sldId xmlns:r="http://schemas.openxmlformats.org/officeDocument/2006/relationships" id="268" r:id="R090135c77e294254"/>
-    <p:sldId xmlns:r="http://schemas.openxmlformats.org/officeDocument/2006/relationships" id="269" r:id="R6622dfbad56c4f0c"/>
-    <p:sldId xmlns:r="http://schemas.openxmlformats.org/officeDocument/2006/relationships" id="270" r:id="R0b2befc46e6d4c88"/>
-    <p:sldId xmlns:r="http://schemas.openxmlformats.org/officeDocument/2006/relationships" id="271" r:id="Rb206314e6fd541a8"/>
-    <p:sldId xmlns:r="http://schemas.openxmlformats.org/officeDocument/2006/relationships" id="272" r:id="Rda0673765add44a5"/>
-    <p:sldId xmlns:r="http://schemas.openxmlformats.org/officeDocument/2006/relationships" id="273" r:id="R85b5241bdda74030"/>
-    <p:sldId xmlns:r="http://schemas.openxmlformats.org/officeDocument/2006/relationships" id="274" r:id="Rbfbb077bfdbf44ea"/>
-    <p:sldId xmlns:r="http://schemas.openxmlformats.org/officeDocument/2006/relationships" id="275" r:id="Rfe6e5236d69b4b5a"/>
-    <p:sldId xmlns:r="http://schemas.openxmlformats.org/officeDocument/2006/relationships" id="276" r:id="R2926369e4c2343b8"/>
-    <p:sldId xmlns:r="http://schemas.openxmlformats.org/officeDocument/2006/relationships" id="277" r:id="R625759e43a16404a"/>
-    <p:sldId xmlns:r="http://schemas.openxmlformats.org/officeDocument/2006/relationships" id="278" r:id="R1b919f9b039d4020"/>
-    <p:sldId xmlns:r="http://schemas.openxmlformats.org/officeDocument/2006/relationships" id="279" r:id="R87edbf3ab0884e57"/>
-    <p:sldId xmlns:r="http://schemas.openxmlformats.org/officeDocument/2006/relationships" id="280" r:id="R3ce78a58660746ea"/>
+    <p:sldId xmlns:r="http://schemas.openxmlformats.org/officeDocument/2006/relationships" id="256" r:id="Rd42a571b14424c72"/>
+    <p:sldId xmlns:r="http://schemas.openxmlformats.org/officeDocument/2006/relationships" id="257" r:id="R19a300a9fbe24b86"/>
+    <p:sldId xmlns:r="http://schemas.openxmlformats.org/officeDocument/2006/relationships" id="258" r:id="Rabde214444b54797"/>
+    <p:sldId xmlns:r="http://schemas.openxmlformats.org/officeDocument/2006/relationships" id="259" r:id="R57a26c9028fa448a"/>
+    <p:sldId xmlns:r="http://schemas.openxmlformats.org/officeDocument/2006/relationships" id="260" r:id="R1317879f208a4b3b"/>
+    <p:sldId xmlns:r="http://schemas.openxmlformats.org/officeDocument/2006/relationships" id="261" r:id="R79138c3e38bc422a"/>
+    <p:sldId xmlns:r="http://schemas.openxmlformats.org/officeDocument/2006/relationships" id="262" r:id="R41593cd6e3d04e84"/>
+    <p:sldId xmlns:r="http://schemas.openxmlformats.org/officeDocument/2006/relationships" id="263" r:id="R81a6333097514565"/>
+    <p:sldId xmlns:r="http://schemas.openxmlformats.org/officeDocument/2006/relationships" id="264" r:id="R6f8dcffa866d4f22"/>
+    <p:sldId xmlns:r="http://schemas.openxmlformats.org/officeDocument/2006/relationships" id="265" r:id="R8eec536ec0904513"/>
+    <p:sldId xmlns:r="http://schemas.openxmlformats.org/officeDocument/2006/relationships" id="266" r:id="R6f48f3af41e34de5"/>
+    <p:sldId xmlns:r="http://schemas.openxmlformats.org/officeDocument/2006/relationships" id="267" r:id="R40dff38b55b54ad7"/>
+    <p:sldId xmlns:r="http://schemas.openxmlformats.org/officeDocument/2006/relationships" id="268" r:id="Ra77da39db7c84a62"/>
+    <p:sldId xmlns:r="http://schemas.openxmlformats.org/officeDocument/2006/relationships" id="269" r:id="R501cb0042d51415e"/>
+    <p:sldId xmlns:r="http://schemas.openxmlformats.org/officeDocument/2006/relationships" id="270" r:id="R8fbde56390094b37"/>
+    <p:sldId xmlns:r="http://schemas.openxmlformats.org/officeDocument/2006/relationships" id="271" r:id="R472b424db84a4225"/>
+    <p:sldId xmlns:r="http://schemas.openxmlformats.org/officeDocument/2006/relationships" id="272" r:id="Rfd44aacfc6fb4e0a"/>
+    <p:sldId xmlns:r="http://schemas.openxmlformats.org/officeDocument/2006/relationships" id="273" r:id="Rf6d6cd6f4eef4be7"/>
+    <p:sldId xmlns:r="http://schemas.openxmlformats.org/officeDocument/2006/relationships" id="274" r:id="R28d6cd492bb04341"/>
+    <p:sldId xmlns:r="http://schemas.openxmlformats.org/officeDocument/2006/relationships" id="275" r:id="R24987c21544b4bf3"/>
+    <p:sldId xmlns:r="http://schemas.openxmlformats.org/officeDocument/2006/relationships" id="276" r:id="R2a587f8db21643cc"/>
+    <p:sldId xmlns:r="http://schemas.openxmlformats.org/officeDocument/2006/relationships" id="277" r:id="R59b61c420c2d472f"/>
+    <p:sldId xmlns:r="http://schemas.openxmlformats.org/officeDocument/2006/relationships" id="278" r:id="R3883b960fe1b4c3a"/>
+    <p:sldId xmlns:r="http://schemas.openxmlformats.org/officeDocument/2006/relationships" id="279" r:id="R2c2455e77e5040c9"/>
+    <p:sldId xmlns:r="http://schemas.openxmlformats.org/officeDocument/2006/relationships" id="280" r:id="R55a8954c0d234313"/>
   </p:sldIdLst>
   <p:sldSz cx="12192000" cy="6858000"/>
   <p:notesSz cx="6858000" cy="9144000"/>
@@ -1551,7 +1551,7 @@
           </a:p>
           <a:p xmlns:a="http://schemas.openxmlformats.org/drawingml/2006/main">
             <a:r>
-              <a:t>For Mule, M0 establishes inventory and safety; M1 handles gateway-dominant work; M2 proves representative hard integrations; M3 establishes the domain factory; M4 resolves the connector and batch tail; and M5 retires the shared runtime only after dependency zero. For Apigee, A0 inventories the complete object/state graph; A1 classifies semantic disposition; A2 builds a reversible target; A3 proves a hard representative slice; A4 runs bounded coexistence; A5 collects production-canary evidence; and A6 closes technical, operating, recovery, data, support, and commercial dependency zero.</a:t>
+              <a:t>For Apigee, A0 inventories the complete object/state graph; A1 classifies semantic disposition; A2 builds a reversible target; A3 proves a hard representative slice; A4 runs bounded coexistence; A5 collects production-canary evidence; and A6 closes technical, operating, recovery, data, support, and commercial dependency zero. Mule uses a different M0–M5 responsibility/state rail. Both share reconciled source truth, semantic proof, a stable edge, business verification, timed route-back, state reconciliation and dependency-zero authority.</a:t>
             </a:r>
           </a:p>
           <a:p xmlns:a="http://schemas.openxmlformats.org/drawingml/2006/main">
@@ -1611,16 +1611,16 @@
           </a:p>
           <a:p xmlns:a="http://schemas.openxmlformats.org/drawingml/2006/main">
             <a:r>
+              <a:t>- 50-apigee-migration-strategy.md#proposed-a0a6-migration-roadmap</a:t>
+            </a:r>
+          </a:p>
+          <a:p xmlns:a="http://schemas.openxmlformats.org/drawingml/2006/main">
+            <a:r>
               <a:t>- 35-mule-migration-strategy.md</a:t>
             </a:r>
           </a:p>
           <a:p xmlns:a="http://schemas.openxmlformats.org/drawingml/2006/main">
             <a:r>
-              <a:t>- 50-apigee-migration-strategy.md#proposed-a0a6-migration-roadmap</a:t>
-            </a:r>
-          </a:p>
-          <a:p xmlns:a="http://schemas.openxmlformats.org/drawingml/2006/main">
-            <a:r>
               <a:t>- 48-kong-guided-evaluation.md</a:t>
             </a:r>
           </a:p>
@@ -1642,6 +1642,16 @@
           <a:p xmlns:a="http://schemas.openxmlformats.org/drawingml/2006/main">
             <a:r>
               <a:t>- https://docs.cloud.google.com/apigee/docs/api-platform/reference/api-proxy-configuration-reference</a:t>
+            </a:r>
+          </a:p>
+          <a:p xmlns:a="http://schemas.openxmlformats.org/drawingml/2006/main">
+            <a:r>
+              <a:t>- https://developer.konghq.com/gateway/entities/</a:t>
+            </a:r>
+          </a:p>
+          <a:p xmlns:a="http://schemas.openxmlformats.org/drawingml/2006/main">
+            <a:r>
+              <a:t>- https://developer.konghq.com/gateway/entities/plugin/</a:t>
             </a:r>
           </a:p>
           <a:p xmlns:a="http://schemas.openxmlformats.org/drawingml/2006/main">
@@ -3261,7 +3271,7 @@
           </a:p>
           <a:p xmlns:a="http://schemas.openxmlformats.org/drawingml/2006/main">
             <a:r>
-              <a:t>Provide an auditable record of the source scorecard while making the unfinished governed recalculation visible.</a:t>
+              <a:t>Provide an auditable record of the source scorecard while showing what the newly requested dimensions can do to the ranking when their ratings are honestly left unknown.</a:t>
             </a:r>
           </a:p>
           <a:p xmlns:a="http://schemas.openxmlformats.org/drawingml/2006/main">
@@ -3276,7 +3286,7 @@
           </a:p>
           <a:p xmlns:a="http://schemas.openxmlformats.org/drawingml/2006/main">
             <a:r>
-              <a:t>The inputs are preserved from the sanitized supplied evaluation. Recalculating weight times rating yields 93 for Kong, 85.5 for Apigee, and 77 for MuleSoft. Those values remain historical stakeholder input. `GRS-01`–`GRS-06` adds multicloud, scalability/robustness, security/IAM/traceability, reversibility/vendor dependency, fully allocated TCO, and control-plane operating responsibility to a future governed specification; every added weight and rating remains `TBD`.</a:t>
+              <a:t>The sanitized inputs still recalculate to 93 for Kong, 85.5 for Apigee, and 77 for MuleSoft. The provisional scenario rebases those historical ratings to 60% and assigns 40% to `GRS-01`–`GRS-06`: multicloud, scalability/robustness, enterprise IAM and traceability, reversibility/vendor dependency, fully allocated TCO, and control-plane operating responsibility. Every new product rating remains `Unknown [0,10]`. That produces mechanical envelopes of 55.8–95.8 for Kong, 51.3–91.3 for Apigee, and 46.2–86.2 for MuleSoft. The ranges overlap completely enough that every option can still rank first. A midpoint of 5 is only a neutral drawing aid, not an assigned score.</a:t>
             </a:r>
           </a:p>
           <a:p xmlns:a="http://schemas.openxmlformats.org/drawingml/2006/main">
@@ -3291,7 +3301,7 @@
           </a:p>
           <a:p xmlns:a="http://schemas.openxmlformats.org/drawingml/2006/main">
             <a:r>
-              <a:t>If the scorecard remains a governance artifact, approve exact options, mandatory gates, the scoring rubric, score-capable common evidence, dimensions and weights/ranges, confidence/unknown treatment, role-based scorers and approvers, sensitivity, lower/upper bounds, maximum regret, dissent, and independent sign-off. Do not calculate a new total in the room.</a:t>
+              <a:t>Review or amend the provisional weight split and double-counting rules, then assign accountable approval for exact options, mandatory gates, rubric, common evidence, ratings, confidence, scorers, sensitivity, bounds, regret, dissent and sign-off. Do not call the neutral midpoint or either range endpoint a product score.</a:t>
             </a:r>
           </a:p>
           <a:p xmlns:a="http://schemas.openxmlformats.org/drawingml/2006/main">
@@ -3321,7 +3331,7 @@
           </a:p>
           <a:p xmlns:a="http://schemas.openxmlformats.org/drawingml/2006/main">
             <a:r>
-              <a:t>Scores are illustrative stakeholder inputs, not an independent benchmark or production outcome. The pending re-score cannot be tuned to preserve a preferred order, and unknown evidence cannot silently become zero or earn points.</a:t>
+              <a:t>The 0–10 bounds are uncertainty limits, not performance estimates or probabilities. Numerical-input coverage is 60%, common score-capable evidence coverage is 0%, and 30 mandatory gates remain unknown. Traceable earns no native Kong points. Control-plane responsibility is an operating-risk and cost input, not a legal-liability conclusion.</a:t>
             </a:r>
           </a:p>
           <a:p xmlns:a="http://schemas.openxmlformats.org/drawingml/2006/main">
@@ -3341,6 +3351,11 @@
           </a:p>
           <a:p xmlns:a="http://schemas.openxmlformats.org/drawingml/2006/main">
             <a:r>
+              <a:t>- 48-kong-guided-evaluation.md#provisional-weighting-and-uncertainty-scenario</a:t>
+            </a:r>
+          </a:p>
+          <a:p xmlns:a="http://schemas.openxmlformats.org/drawingml/2006/main">
+            <a:r>
               <a:t>- 48-kong-guided-evaluation.md#proposed-governed-re-score</a:t>
             </a:r>
           </a:p>
@@ -3361,12 +3376,27 @@
           </a:p>
           <a:p xmlns:a="http://schemas.openxmlformats.org/drawingml/2006/main">
             <a:r>
+              <a:t>- https://konghq.com/pricing</a:t>
+            </a:r>
+          </a:p>
+          <a:p xmlns:a="http://schemas.openxmlformats.org/drawingml/2006/main">
+            <a:r>
               <a:t>- https://docs.cloud.google.com/apigee/docs/hybrid/v1.16/what-is-hybrid</a:t>
             </a:r>
           </a:p>
           <a:p xmlns:a="http://schemas.openxmlformats.org/drawingml/2006/main">
             <a:r>
+              <a:t>- https://cloud.google.com/apigee/pricing</a:t>
+            </a:r>
+          </a:p>
+          <a:p xmlns:a="http://schemas.openxmlformats.org/drawingml/2006/main">
+            <a:r>
               <a:t>- https://docs.mulesoft.com/gateway/latest/</a:t>
+            </a:r>
+          </a:p>
+          <a:p xmlns:a="http://schemas.openxmlformats.org/drawingml/2006/main">
+            <a:r>
+              <a:t>- https://www.mulesoft.com/anypoint-pricing</a:t>
             </a:r>
           </a:p>
           <a:p xmlns:a="http://schemas.openxmlformats.org/drawingml/2006/main">
@@ -3461,7 +3491,7 @@
           </a:p>
           <a:p xmlns:a="http://schemas.openxmlformats.org/drawingml/2006/main">
             <a:r>
-              <a:t>Eight supplied categories sum to 100%, and Kubernetes plus GitOps carry 35%. Multicloud, robustness, reversibility/vendor dependency, fully allocated TCO, and control-plane operating responsibility are absent or compressed in that simplified model, but they are already present in the canonical 120-criterion matrix. The proposed `GRS-01`–`GRS-06` specification exposes them without duplicating the taxonomy. Its weights and ratings remain `TBD`.</a:t>
+              <a:t>Eight supplied categories sum to 100%, and Kubernetes plus GitOps carry 35%. The provisional planning scenario rebases those historical categories to 60% and allocates 40% across multicloud, scalability/robustness, enterprise IAM and traceability, reversibility/vendor dependency, fully allocated TCO, and control-plane operating responsibility. This makes the meeting feedback visible without changing the historical ratings. The 40% split is an assumption to approve or amend; every new product rating remains unknown.</a:t>
             </a:r>
           </a:p>
           <a:p xmlns:a="http://schemas.openxmlformats.org/drawingml/2006/main">
@@ -3476,7 +3506,7 @@
           </a:p>
           <a:p xmlns:a="http://schemas.openxmlformats.org/drawingml/2006/main">
             <a:r>
-              <a:t>Approve the re-score dimensions, exact-option boundary, mandatory gates, evidence floor, role-based scorer and approver panel, weight ranges, confidence treatment, sensitivity method, dissent rule, and permitted decision use. Do not assign ratings in this meeting.</a:t>
+              <a:t>Approve, amend, or reject the provisional weights and double-counting rules, then assign the exact-option boundary, mandatory gates, evidence floor, scorer and approver panel, rating authority, confidence treatment, sensitivity method, dissent rule, and permitted decision use.</a:t>
             </a:r>
           </a:p>
           <a:p xmlns:a="http://schemas.openxmlformats.org/drawingml/2006/main">
@@ -3506,7 +3536,7 @@
           </a:p>
           <a:p xmlns:a="http://schemas.openxmlformats.org/drawingml/2006/main">
             <a:r>
-              <a:t>The proposed re-score is pending, not a revised ranking. Ratings still lack an approved rubric, score-capable evidence, exact options, scorer panel, confidence, common-evidence treatment, bounds, maximum-regret analysis, and sensitivity approval.</a:t>
+              <a:t>The provisional weights are a scenario, not an approved model or revised ranking. The new ratings remain unknown, 30 mandatory gates remain unknown, and common score-capable evidence coverage is 0%.</a:t>
             </a:r>
           </a:p>
           <a:p xmlns:a="http://schemas.openxmlformats.org/drawingml/2006/main">
@@ -3527,6 +3557,11 @@
           <a:p xmlns:a="http://schemas.openxmlformats.org/drawingml/2006/main">
             <a:r>
               <a:t>- 48-kong-guided-evaluation.md#meeting-feedback-assurance-crosswalk</a:t>
+            </a:r>
+          </a:p>
+          <a:p xmlns:a="http://schemas.openxmlformats.org/drawingml/2006/main">
+            <a:r>
+              <a:t>- 48-kong-guided-evaluation.md#provisional-weighting-and-uncertainty-scenario</a:t>
             </a:r>
           </a:p>
           <a:p xmlns:a="http://schemas.openxmlformats.org/drawingml/2006/main">
@@ -3806,7 +3841,7 @@
           </a:p>
           <a:p xmlns:a="http://schemas.openxmlformats.org/drawingml/2006/main">
             <a:r>
-              <a:t>The historical inputs recalculate to 93 for Kong, 85.5 for Apigee, and 77 for MuleSoft rather than 87 and 78 in the source results table. Preserve those inputs and the correction for audit. Do not publish an expanded total until `GRS-01`–`GRS-06`, exact options, mandatory gates, rubric, score-capable evidence, weights, confidence, scorer panel, sensitivity, bounds, regret treatment, and dissent are approved.</a:t>
+              <a:t>The historical inputs recalculate to 93 for Kong, 85.5 for Apigee, and 77 for MuleSoft. Under the provisional 60/40 weighting, their historical-input contributions are 55.8, 51.3, and 46.2. Leaving the added 40% honestly unknown produces ranges of 55.8–95.8, 51.3–91.3, and 46.2–86.2. The overlap is the finding: a modest advantage on the missing dimensions can reverse the historical order, so the deck does not publish a new decision score.</a:t>
             </a:r>
           </a:p>
           <a:p xmlns:a="http://schemas.openxmlformats.org/drawingml/2006/main">
@@ -3821,7 +3856,7 @@
           </a:p>
           <a:p xmlns:a="http://schemas.openxmlformats.org/drawingml/2006/main">
             <a:r>
-              <a:t>Confirm that the historical score remains directional preference input only, then assign role ownership for a governed recalculation that is allowed to change—not preserve—the order.</a:t>
+              <a:t>Confirm that the historical score remains directional input only, review the scenario assumptions, and assign the evidence and scorer roles that can narrow the ranges without protecting a preferred order.</a:t>
             </a:r>
           </a:p>
           <a:p xmlns:a="http://schemas.openxmlformats.org/drawingml/2006/main">
@@ -3851,7 +3886,7 @@
           </a:p>
           <a:p xmlns:a="http://schemas.openxmlformats.org/drawingml/2006/main">
             <a:r>
-              <a:t>No governed recalculation has been run. The added dimensions still have `TBD` weights and ratings, and the historical scores should not be presented as an independent benchmark, confidence percentage, or production-fit result.</a:t>
+              <a:t>The arithmetic scenario has been run; the governed product comparison has not. The midpoint is not a score, the endpoints are not forecasts, and the historical values remain unverified `E0` input rather than an independent benchmark or production-fit result.</a:t>
             </a:r>
           </a:p>
           <a:p xmlns:a="http://schemas.openxmlformats.org/drawingml/2006/main">
@@ -3867,6 +3902,11 @@
           <a:p xmlns:a="http://schemas.openxmlformats.org/drawingml/2006/main">
             <a:r>
               <a:t>- 48-kong-guided-evaluation.md#supplied-scoring-audit</a:t>
+            </a:r>
+          </a:p>
+          <a:p xmlns:a="http://schemas.openxmlformats.org/drawingml/2006/main">
+            <a:r>
+              <a:t>- 48-kong-guided-evaluation.md#provisional-weighting-and-uncertainty-scenario</a:t>
             </a:r>
           </a:p>
           <a:p xmlns:a="http://schemas.openxmlformats.org/drawingml/2006/main">
@@ -4594,7 +4634,7 @@
   </p:cSld>
   <p:clrMap bg1="lt1" tx1="dk1" bg2="lt2" tx2="dk2" accent1="accent1" accent2="accent2" accent3="accent3" accent4="accent4" accent5="accent5" accent6="accent6" hlink="hlink" folHlink="folHlink"/>
   <p:sldLayoutIdLst>
-    <p:sldLayoutId xmlns:r="http://schemas.openxmlformats.org/officeDocument/2006/relationships" id="2147483649" r:id="Rdc7a175706444340"/>
+    <p:sldLayoutId xmlns:r="http://schemas.openxmlformats.org/officeDocument/2006/relationships" id="2147483649" r:id="Rdce3bcdb06f84998"/>
   </p:sldLayoutIdLst>
   <p:txStyles>
     <p:titleStyle>
@@ -5896,7 +5936,7 @@
                 <a:solidFill>
                   <a:srgbClr val="666762"/>
                 </a:solidFill>
-                <a:hlinkClick xmlns:r="http://schemas.openxmlformats.org/officeDocument/2006/relationships" r:id="R18b3931df0674cbd"/>
+                <a:hlinkClick xmlns:r="http://schemas.openxmlformats.org/officeDocument/2006/relationships" r:id="R1505224329d44489"/>
               </a:rPr>
               <a:t>Repo reference</a:t>
             </a:r>
@@ -5913,7 +5953,7 @@
                 <a:solidFill>
                   <a:srgbClr val="666762"/>
                 </a:solidFill>
-                <a:hlinkClick xmlns:r="http://schemas.openxmlformats.org/officeDocument/2006/relationships" r:id="R6f2cc002186e4538"/>
+                <a:hlinkClick xmlns:r="http://schemas.openxmlformats.org/officeDocument/2006/relationships" r:id="R983e45434f464467"/>
               </a:rPr>
               <a:t>Official docs</a:t>
             </a:r>
@@ -6274,7 +6314,7 @@
                 <a:solidFill>
                   <a:srgbClr val="666762"/>
                 </a:solidFill>
-                <a:hlinkClick xmlns:r="http://schemas.openxmlformats.org/officeDocument/2006/relationships" r:id="R486679cd395d4f4b"/>
+                <a:hlinkClick xmlns:r="http://schemas.openxmlformats.org/officeDocument/2006/relationships" r:id="R3bd9c3cbb4c14d7d"/>
               </a:rPr>
               <a:t>Repo reference</a:t>
             </a:r>
@@ -6291,7 +6331,7 @@
                 <a:solidFill>
                   <a:srgbClr val="666762"/>
                 </a:solidFill>
-                <a:hlinkClick xmlns:r="http://schemas.openxmlformats.org/officeDocument/2006/relationships" r:id="R882b0e3b9ba8486c"/>
+                <a:hlinkClick xmlns:r="http://schemas.openxmlformats.org/officeDocument/2006/relationships" r:id="Rd41355a7e97743f6"/>
               </a:rPr>
               <a:t>Official docs</a:t>
             </a:r>
@@ -7580,7 +7620,7 @@
                 <a:solidFill>
                   <a:srgbClr val="666762"/>
                 </a:solidFill>
-                <a:hlinkClick xmlns:r="http://schemas.openxmlformats.org/officeDocument/2006/relationships" r:id="Rbc372a36e6814a61"/>
+                <a:hlinkClick xmlns:r="http://schemas.openxmlformats.org/officeDocument/2006/relationships" r:id="R82b76bf3ce4c4f4d"/>
               </a:rPr>
               <a:t>Repo reference</a:t>
             </a:r>
@@ -7597,7 +7637,7 @@
                 <a:solidFill>
                   <a:srgbClr val="666762"/>
                 </a:solidFill>
-                <a:hlinkClick xmlns:r="http://schemas.openxmlformats.org/officeDocument/2006/relationships" r:id="R1f842da340dc4db5"/>
+                <a:hlinkClick xmlns:r="http://schemas.openxmlformats.org/officeDocument/2006/relationships" r:id="R478b188305f641f5"/>
               </a:rPr>
               <a:t>Official docs</a:t>
             </a:r>
@@ -8373,7 +8413,7 @@
       </p:sp>
       <p:cxnSp>
         <p:nvCxnSpPr>
-          <p:cNvPr id="309" name=""/>
+          <p:cNvPr id="355" name=""/>
           <p:cNvCxnSpPr>
             <a:stCxn xmlns:a="http://schemas.openxmlformats.org/drawingml/2006/main" id="9" idx="3"/>
             <a:endCxn xmlns:a="http://schemas.openxmlformats.org/drawingml/2006/main" id="12" idx="1"/>
@@ -8399,7 +8439,7 @@
       </p:cxnSp>
       <p:cxnSp>
         <p:nvCxnSpPr>
-          <p:cNvPr id="310" name=""/>
+          <p:cNvPr id="356" name=""/>
           <p:cNvCxnSpPr>
             <a:stCxn xmlns:a="http://schemas.openxmlformats.org/drawingml/2006/main" id="12" idx="3"/>
             <a:endCxn xmlns:a="http://schemas.openxmlformats.org/drawingml/2006/main" id="15" idx="1"/>
@@ -8425,7 +8465,7 @@
       </p:cxnSp>
       <p:cxnSp>
         <p:nvCxnSpPr>
-          <p:cNvPr id="311" name=""/>
+          <p:cNvPr id="357" name=""/>
           <p:cNvCxnSpPr>
             <a:stCxn xmlns:a="http://schemas.openxmlformats.org/drawingml/2006/main" id="15" idx="3"/>
             <a:endCxn xmlns:a="http://schemas.openxmlformats.org/drawingml/2006/main" id="18" idx="1"/>
@@ -9407,7 +9447,7 @@
                 <a:solidFill>
                   <a:srgbClr val="666762"/>
                 </a:solidFill>
-                <a:hlinkClick xmlns:r="http://schemas.openxmlformats.org/officeDocument/2006/relationships" r:id="R986a96f400774a58"/>
+                <a:hlinkClick xmlns:r="http://schemas.openxmlformats.org/officeDocument/2006/relationships" r:id="R74a53018a5fb4905"/>
               </a:rPr>
               <a:t>Repo reference</a:t>
             </a:r>
@@ -9424,7 +9464,7 @@
                 <a:solidFill>
                   <a:srgbClr val="666762"/>
                 </a:solidFill>
-                <a:hlinkClick xmlns:r="http://schemas.openxmlformats.org/officeDocument/2006/relationships" r:id="R26160a55e6e247e6"/>
+                <a:hlinkClick xmlns:r="http://schemas.openxmlformats.org/officeDocument/2006/relationships" r:id="R5421aa73b30040a5"/>
               </a:rPr>
               <a:t>Official docs</a:t>
             </a:r>
@@ -11059,7 +11099,7 @@
                 <a:solidFill>
                   <a:srgbClr val="666762"/>
                 </a:solidFill>
-                <a:hlinkClick xmlns:r="http://schemas.openxmlformats.org/officeDocument/2006/relationships" r:id="R064ac837132c4098"/>
+                <a:hlinkClick xmlns:r="http://schemas.openxmlformats.org/officeDocument/2006/relationships" r:id="Rb94bd70ef6534262"/>
               </a:rPr>
               <a:t>Repo reference</a:t>
             </a:r>
@@ -11076,7 +11116,7 @@
                 <a:solidFill>
                   <a:srgbClr val="666762"/>
                 </a:solidFill>
-                <a:hlinkClick xmlns:r="http://schemas.openxmlformats.org/officeDocument/2006/relationships" r:id="R15942daaa3cf4b43"/>
+                <a:hlinkClick xmlns:r="http://schemas.openxmlformats.org/officeDocument/2006/relationships" r:id="Rad2efaac483a46f9"/>
               </a:rPr>
               <a:t>Official docs</a:t>
             </a:r>
@@ -13303,7 +13343,7 @@
                 <a:solidFill>
                   <a:srgbClr val="666762"/>
                 </a:solidFill>
-                <a:hlinkClick xmlns:r="http://schemas.openxmlformats.org/officeDocument/2006/relationships" r:id="Rdc1d9af182974e34"/>
+                <a:hlinkClick xmlns:r="http://schemas.openxmlformats.org/officeDocument/2006/relationships" r:id="Refbd7fb23e4440b2"/>
               </a:rPr>
               <a:t>Repo reference</a:t>
             </a:r>
@@ -13320,7 +13360,7 @@
                 <a:solidFill>
                   <a:srgbClr val="666762"/>
                 </a:solidFill>
-                <a:hlinkClick xmlns:r="http://schemas.openxmlformats.org/officeDocument/2006/relationships" r:id="R15f6e7610c514a41"/>
+                <a:hlinkClick xmlns:r="http://schemas.openxmlformats.org/officeDocument/2006/relationships" r:id="R4aa618a6dfd94da0"/>
               </a:rPr>
               <a:t>Official docs</a:t>
             </a:r>
@@ -15266,7 +15306,7 @@
                 <a:solidFill>
                   <a:srgbClr val="666762"/>
                 </a:solidFill>
-                <a:hlinkClick xmlns:r="http://schemas.openxmlformats.org/officeDocument/2006/relationships" r:id="R09d9dda4f9024890"/>
+                <a:hlinkClick xmlns:r="http://schemas.openxmlformats.org/officeDocument/2006/relationships" r:id="Rfe5cc34ae0d8435a"/>
               </a:rPr>
               <a:t>Repo reference</a:t>
             </a:r>
@@ -15283,7 +15323,7 @@
                 <a:solidFill>
                   <a:srgbClr val="666762"/>
                 </a:solidFill>
-                <a:hlinkClick xmlns:r="http://schemas.openxmlformats.org/officeDocument/2006/relationships" r:id="R4f6e0cf26e9042b3"/>
+                <a:hlinkClick xmlns:r="http://schemas.openxmlformats.org/officeDocument/2006/relationships" r:id="Rfbde975b56814747"/>
               </a:rPr>
               <a:t>Official docs</a:t>
             </a:r>
@@ -16140,7 +16180,7 @@
       </p:sp>
       <p:cxnSp>
         <p:nvCxnSpPr>
-          <p:cNvPr id="363" name=""/>
+          <p:cNvPr id="419" name=""/>
           <p:cNvCxnSpPr>
             <a:stCxn xmlns:a="http://schemas.openxmlformats.org/drawingml/2006/main" id="9" idx="3"/>
             <a:endCxn xmlns:a="http://schemas.openxmlformats.org/drawingml/2006/main" id="12" idx="1"/>
@@ -16166,7 +16206,7 @@
       </p:cxnSp>
       <p:cxnSp>
         <p:nvCxnSpPr>
-          <p:cNvPr id="364" name=""/>
+          <p:cNvPr id="420" name=""/>
           <p:cNvCxnSpPr>
             <a:stCxn xmlns:a="http://schemas.openxmlformats.org/drawingml/2006/main" id="12" idx="3"/>
             <a:endCxn xmlns:a="http://schemas.openxmlformats.org/drawingml/2006/main" id="15" idx="1"/>
@@ -16194,7 +16234,7 @@
       </p:cxnSp>
       <p:cxnSp>
         <p:nvCxnSpPr>
-          <p:cNvPr id="365" name=""/>
+          <p:cNvPr id="421" name=""/>
           <p:cNvCxnSpPr>
             <a:stCxn xmlns:a="http://schemas.openxmlformats.org/drawingml/2006/main" id="12" idx="3"/>
             <a:endCxn xmlns:a="http://schemas.openxmlformats.org/drawingml/2006/main" id="18" idx="1"/>
@@ -16222,7 +16262,7 @@
       </p:cxnSp>
       <p:cxnSp>
         <p:nvCxnSpPr>
-          <p:cNvPr id="366" name=""/>
+          <p:cNvPr id="422" name=""/>
           <p:cNvCxnSpPr>
             <a:stCxn xmlns:a="http://schemas.openxmlformats.org/drawingml/2006/main" id="15" idx="3"/>
             <a:endCxn xmlns:a="http://schemas.openxmlformats.org/drawingml/2006/main" id="21" idx="1"/>
@@ -16250,7 +16290,7 @@
       </p:cxnSp>
       <p:cxnSp>
         <p:nvCxnSpPr>
-          <p:cNvPr id="367" name=""/>
+          <p:cNvPr id="423" name=""/>
           <p:cNvCxnSpPr>
             <a:stCxn xmlns:a="http://schemas.openxmlformats.org/drawingml/2006/main" id="18" idx="3"/>
             <a:endCxn xmlns:a="http://schemas.openxmlformats.org/drawingml/2006/main" id="21" idx="1"/>
@@ -16631,7 +16671,7 @@
                 <a:ea typeface="Arial"/>
                 <a:cs typeface="Arial"/>
               </a:rPr>
-              <a:t>Mule and Apigee migration advance on evidence—not time</a:t>
+              <a:t>Apigee A0–A6 moves the full object and state graph</a:t>
             </a:r>
           </a:p>
         </p:txBody>
@@ -16665,14 +16705,17 @@
           </a:ln>
         </p:spPr>
         <p:txBody>
-          <a:bodyPr xmlns:a="http://schemas.openxmlformats.org/drawingml/2006/main" wrap="square" lIns="0" tIns="0" rIns="0" bIns="0" anchor="t">
-            <a:noAutofit/>
+          <a:bodyPr xmlns:a="http://schemas.openxmlformats.org/drawingml/2006/main" wrap="square" lIns="19050" tIns="9525" rIns="19050" bIns="9525" anchor="ctr">
+            <a:normAutofit fontScale="100000"/>
           </a:bodyPr>
           <a:lstStyle xmlns:a="http://schemas.openxmlformats.org/drawingml/2006/main"/>
           <a:p xmlns:a="http://schemas.openxmlformats.org/drawingml/2006/main">
             <a:pPr algn="l">
-              <a:buNone/>
-              <a:defRPr sz="1575" b="0" i="0">
+              <a:lnSpc>
+                <a:spcPct val="100000"/>
+              </a:lnSpc>
+              <a:buNone/>
+              <a:defRPr sz="1500" b="0" i="0">
                 <a:solidFill>
                   <a:srgbClr val="686A66"/>
                 </a:solidFill>
@@ -16682,7 +16725,7 @@
               </a:defRPr>
             </a:pPr>
             <a:r>
-              <a:rPr sz="1575" b="0" i="0">
+              <a:rPr sz="1500" b="0" i="0">
                 <a:solidFill>
                   <a:srgbClr val="686A66"/>
                 </a:solidFill>
@@ -16690,30 +16733,7 @@
                 <a:ea typeface="Arial"/>
                 <a:cs typeface="Arial"/>
               </a:rPr>
-              <a:t>Mule M0–M5 and </a:t>
-            </a:r>
-            <a:r>
-              <a:rPr sz="1575" b="0" i="0">
-                <a:solidFill>
-                  <a:srgbClr val="686A66"/>
-                </a:solidFill>
-                <a:latin typeface="Arial"/>
-                <a:ea typeface="Arial"/>
-                <a:cs typeface="Arial"/>
-                <a:hlinkClick xmlns:r="http://schemas.openxmlformats.org/officeDocument/2006/relationships" r:id="R911fb143ee444a90"/>
-              </a:rPr>
-              <a:t>Apigee A0–A6</a:t>
-            </a:r>
-            <a:r>
-              <a:rPr sz="1575" b="0" i="0">
-                <a:solidFill>
-                  <a:srgbClr val="686A66"/>
-                </a:solidFill>
-                <a:latin typeface="Arial"/>
-                <a:ea typeface="Arial"/>
-                <a:cs typeface="Arial"/>
-              </a:rPr>
-              <a:t> share stable-edge, coexistence, route-back and dependency-zero gates.</a:t>
+              <a:t>Seven evidence gates—not proxy-bundle conversion. Mule M0–M5 remains the responsibility/state counterpart.</a:t>
             </a:r>
           </a:p>
         </p:txBody>
@@ -16804,7 +16824,7 @@
                 <a:solidFill>
                   <a:srgbClr val="666762"/>
                 </a:solidFill>
-                <a:hlinkClick xmlns:r="http://schemas.openxmlformats.org/officeDocument/2006/relationships" r:id="Rac7c1ddceb70471f"/>
+                <a:hlinkClick xmlns:r="http://schemas.openxmlformats.org/officeDocument/2006/relationships" r:id="R89172a4789e242c0"/>
               </a:rPr>
               <a:t>Repo reference</a:t>
             </a:r>
@@ -16821,7 +16841,7 @@
                 <a:solidFill>
                   <a:srgbClr val="666762"/>
                 </a:solidFill>
-                <a:hlinkClick xmlns:r="http://schemas.openxmlformats.org/officeDocument/2006/relationships" r:id="R9e76e9e80ab14a5c"/>
+                <a:hlinkClick xmlns:r="http://schemas.openxmlformats.org/officeDocument/2006/relationships" r:id="R4720e7f299c54dea"/>
               </a:rPr>
               <a:t>Official docs</a:t>
             </a:r>
@@ -16889,43 +16909,81 @@
       </p:sp>
       <p:sp>
         <p:nvSpPr>
-          <p:cNvPr id="9" name="">
-            <a:extLst xmlns:a="http://schemas.openxmlformats.org/drawingml/2006/main">
-              <a:ext uri="{FF2B5EF4-FFF2-40B4-BE49-F238E27FC236}">
-                <a16:creationId xmlns:a16="http://schemas.microsoft.com/office/drawing/2014/main" id="{7C7030CF-92F8-4726-9303-35532485640C}"/>
-              </a:ext>
-            </a:extLst>
-          </p:cNvPr>
-          <p:cNvSpPr>
-            <a:spLocks xmlns:a="http://schemas.openxmlformats.org/drawingml/2006/main" noGrp="1"/>
-          </p:cNvSpPr>
-          <p:nvPr/>
-        </p:nvSpPr>
-        <p:spPr>
-          <a:xfrm xmlns:a="http://schemas.openxmlformats.org/drawingml/2006/main">
-            <a:off x="685800" y="2266950"/>
-            <a:ext cx="571500" cy="266700"/>
-          </a:xfrm>
-          <a:prstGeom xmlns:a="http://schemas.openxmlformats.org/drawingml/2006/main" prst="rect">
-            <a:avLst/>
-          </a:prstGeom>
-          <a:noFill xmlns:a="http://schemas.openxmlformats.org/drawingml/2006/main"/>
-          <a:ln xmlns:a="http://schemas.openxmlformats.org/drawingml/2006/main" w="0">
-            <a:noFill/>
-            <a:prstDash val="solid"/>
-          </a:ln>
-        </p:spPr>
-        <p:txBody>
-          <a:bodyPr xmlns:a="http://schemas.openxmlformats.org/drawingml/2006/main" wrap="square" lIns="0" tIns="0" rIns="0" bIns="0" anchor="t">
+          <p:cNvPr id="58" name="apigee-roadmap-banner">
+            <a:extLst xmlns:a="http://schemas.openxmlformats.org/drawingml/2006/main">
+              <a:ext uri="{FF2B5EF4-FFF2-40B4-BE49-F238E27FC236}">
+                <a16:creationId xmlns:a16="http://schemas.microsoft.com/office/drawing/2014/main" id="{8BA9969C-E283-4C80-8496-F237A14FC258}"/>
+              </a:ext>
+            </a:extLst>
+          </p:cNvPr>
+          <p:cNvSpPr>
+            <a:spLocks xmlns:a="http://schemas.openxmlformats.org/drawingml/2006/main" noGrp="1"/>
+          </p:cNvSpPr>
+          <p:nvPr/>
+        </p:nvSpPr>
+        <p:spPr>
+          <a:xfrm xmlns:a="http://schemas.openxmlformats.org/drawingml/2006/main">
+            <a:off x="609600" y="2095500"/>
+            <a:ext cx="10972800" cy="361950"/>
+          </a:xfrm>
+          <a:prstGeom xmlns:a="http://schemas.openxmlformats.org/drawingml/2006/main" prst="rect">
+            <a:avLst/>
+          </a:prstGeom>
+          <a:solidFill xmlns:a="http://schemas.openxmlformats.org/drawingml/2006/main">
+            <a:srgbClr val="5537D6"/>
+          </a:solidFill>
+          <a:ln xmlns:a="http://schemas.openxmlformats.org/drawingml/2006/main" w="9525">
+            <a:solidFill>
+              <a:srgbClr val="5537D6"/>
+            </a:solidFill>
+            <a:prstDash val="solid"/>
+          </a:ln>
+        </p:spPr>
+      </p:sp>
+      <p:sp>
+        <p:nvSpPr>
+          <p:cNvPr id="59" name="apigee-roadmap-banner-text">
+            <a:extLst xmlns:a="http://schemas.openxmlformats.org/drawingml/2006/main">
+              <a:ext uri="{FF2B5EF4-FFF2-40B4-BE49-F238E27FC236}">
+                <a16:creationId xmlns:a16="http://schemas.microsoft.com/office/drawing/2014/main" id="{A9589A5F-63F9-4F3C-A1A1-62779F1A8065}"/>
+              </a:ext>
+            </a:extLst>
+          </p:cNvPr>
+          <p:cNvSpPr>
+            <a:spLocks xmlns:a="http://schemas.openxmlformats.org/drawingml/2006/main" noGrp="1"/>
+          </p:cNvSpPr>
+          <p:nvPr/>
+        </p:nvSpPr>
+        <p:spPr>
+          <a:xfrm xmlns:a="http://schemas.openxmlformats.org/drawingml/2006/main">
+            <a:off x="742950" y="2114550"/>
+            <a:ext cx="10706100" cy="323850"/>
+          </a:xfrm>
+          <a:prstGeom xmlns:a="http://schemas.openxmlformats.org/drawingml/2006/main" prst="rect">
+            <a:avLst/>
+          </a:prstGeom>
+          <a:noFill xmlns:a="http://schemas.openxmlformats.org/drawingml/2006/main"/>
+          <a:ln xmlns:a="http://schemas.openxmlformats.org/drawingml/2006/main" w="0">
+            <a:solidFill>
+              <a:srgbClr val="FFFCF5"/>
+            </a:solidFill>
+            <a:prstDash val="solid"/>
+          </a:ln>
+        </p:spPr>
+        <p:txBody>
+          <a:bodyPr xmlns:a="http://schemas.openxmlformats.org/drawingml/2006/main" lIns="28575" tIns="19050" rIns="28575" bIns="19050" anchor="ctr">
             <a:normAutofit fontScale="100000"/>
           </a:bodyPr>
           <a:lstStyle xmlns:a="http://schemas.openxmlformats.org/drawingml/2006/main"/>
           <a:p xmlns:a="http://schemas.openxmlformats.org/drawingml/2006/main">
             <a:pPr algn="l">
-              <a:buNone/>
-              <a:defRPr sz="1275" b="1" i="0">
-                <a:solidFill>
-                  <a:srgbClr val="5537D6"/>
+              <a:lnSpc>
+                <a:spcPct val="100000"/>
+              </a:lnSpc>
+              <a:buNone/>
+              <a:defRPr sz="1350" b="1">
+                <a:solidFill>
+                  <a:srgbClr val="FFFFFF"/>
                 </a:solidFill>
                 <a:latin typeface="Consolas"/>
                 <a:ea typeface="Consolas"/>
@@ -16933,56 +16991,370 @@
               </a:defRPr>
             </a:pPr>
             <a:r>
-              <a:rPr sz="1275" b="1" i="0">
-                <a:solidFill>
-                  <a:srgbClr val="5537D6"/>
+              <a:rPr sz="1350" b="1">
+                <a:solidFill>
+                  <a:srgbClr val="FFFFFF"/>
                 </a:solidFill>
                 <a:latin typeface="Consolas"/>
                 <a:ea typeface="Consolas"/>
                 <a:cs typeface="Consolas"/>
-              </a:rPr>
-              <a:t>M0/A0</a:t>
-            </a:r>
-          </a:p>
-        </p:txBody>
-      </p:sp>
-      <p:sp>
-        <p:nvSpPr>
-          <p:cNvPr id="10" name="">
-            <a:extLst xmlns:a="http://schemas.openxmlformats.org/drawingml/2006/main">
-              <a:ext uri="{FF2B5EF4-FFF2-40B4-BE49-F238E27FC236}">
-                <a16:creationId xmlns:a16="http://schemas.microsoft.com/office/drawing/2014/main" id="{9FEF44A0-0359-475B-BD6B-092B1D3AE2E1}"/>
-              </a:ext>
-            </a:extLst>
-          </p:cNvPr>
-          <p:cNvSpPr>
-            <a:spLocks xmlns:a="http://schemas.openxmlformats.org/drawingml/2006/main" noGrp="1"/>
-          </p:cNvSpPr>
-          <p:nvPr/>
-        </p:nvSpPr>
-        <p:spPr>
-          <a:xfrm xmlns:a="http://schemas.openxmlformats.org/drawingml/2006/main">
-            <a:off x="685800" y="2619375"/>
-            <a:ext cx="1581150" cy="609600"/>
-          </a:xfrm>
-          <a:prstGeom xmlns:a="http://schemas.openxmlformats.org/drawingml/2006/main" prst="rect">
-            <a:avLst/>
-          </a:prstGeom>
-          <a:noFill xmlns:a="http://schemas.openxmlformats.org/drawingml/2006/main"/>
-          <a:ln xmlns:a="http://schemas.openxmlformats.org/drawingml/2006/main" w="0">
-            <a:noFill/>
-            <a:prstDash val="solid"/>
-          </a:ln>
-        </p:spPr>
-        <p:txBody>
-          <a:bodyPr xmlns:a="http://schemas.openxmlformats.org/drawingml/2006/main" wrap="square" lIns="0" tIns="0" rIns="0" bIns="0" anchor="t">
-            <a:normAutofit fontScale="100000"/>
+                <a:hlinkClick xmlns:r="http://schemas.openxmlformats.org/officeDocument/2006/relationships" r:id="R524e515f6ea34930"/>
+              </a:rPr>
+              <a:t>Apigee A0–A6</a:t>
+            </a:r>
+            <a:r>
+              <a:rPr sz="1350" b="1">
+                <a:solidFill>
+                  <a:srgbClr val="FFFFFF"/>
+                </a:solidFill>
+                <a:latin typeface="Consolas"/>
+                <a:ea typeface="Consolas"/>
+                <a:cs typeface="Consolas"/>
+              </a:rPr>
+              <a:t> · PROPOSED · NOT RUN     Move the full object/state graph—not only proxy bundles</a:t>
+            </a:r>
+          </a:p>
+        </p:txBody>
+      </p:sp>
+      <p:sp>
+        <p:nvSpPr>
+          <p:cNvPr id="60" name="apigee-roadmap-arrow-1">
+            <a:extLst xmlns:a="http://schemas.openxmlformats.org/drawingml/2006/main">
+              <a:ext uri="{FF2B5EF4-FFF2-40B4-BE49-F238E27FC236}">
+                <a16:creationId xmlns:a16="http://schemas.microsoft.com/office/drawing/2014/main" id="{B3973590-E2CB-401C-B706-120E13D2115A}"/>
+              </a:ext>
+            </a:extLst>
+          </p:cNvPr>
+          <p:cNvSpPr>
+            <a:spLocks xmlns:a="http://schemas.openxmlformats.org/drawingml/2006/main" noGrp="1"/>
+          </p:cNvSpPr>
+          <p:nvPr/>
+        </p:nvSpPr>
+        <p:spPr>
+          <a:xfrm xmlns:a="http://schemas.openxmlformats.org/drawingml/2006/main">
+            <a:off x="2095500" y="3638550"/>
+            <a:ext cx="95250" cy="171450"/>
+          </a:xfrm>
+          <a:prstGeom xmlns:a="http://schemas.openxmlformats.org/drawingml/2006/main" prst="rightArrow">
+            <a:avLst/>
+          </a:prstGeom>
+          <a:solidFill xmlns:a="http://schemas.openxmlformats.org/drawingml/2006/main">
+            <a:srgbClr val="FFC72C"/>
+          </a:solidFill>
+          <a:ln xmlns:a="http://schemas.openxmlformats.org/drawingml/2006/main" w="0">
+            <a:solidFill>
+              <a:srgbClr val="FFC72C"/>
+            </a:solidFill>
+            <a:prstDash val="solid"/>
+          </a:ln>
+        </p:spPr>
+      </p:sp>
+      <p:sp>
+        <p:nvSpPr>
+          <p:cNvPr id="61" name="apigee-roadmap-arrow-2">
+            <a:extLst xmlns:a="http://schemas.openxmlformats.org/drawingml/2006/main">
+              <a:ext uri="{FF2B5EF4-FFF2-40B4-BE49-F238E27FC236}">
+                <a16:creationId xmlns:a16="http://schemas.microsoft.com/office/drawing/2014/main" id="{6896B777-CCA0-4A49-9C26-8B343442EAAA}"/>
+              </a:ext>
+            </a:extLst>
+          </p:cNvPr>
+          <p:cNvSpPr>
+            <a:spLocks xmlns:a="http://schemas.openxmlformats.org/drawingml/2006/main" noGrp="1"/>
+          </p:cNvSpPr>
+          <p:nvPr/>
+        </p:nvSpPr>
+        <p:spPr>
+          <a:xfrm xmlns:a="http://schemas.openxmlformats.org/drawingml/2006/main">
+            <a:off x="3676650" y="3638550"/>
+            <a:ext cx="95250" cy="171450"/>
+          </a:xfrm>
+          <a:prstGeom xmlns:a="http://schemas.openxmlformats.org/drawingml/2006/main" prst="rightArrow">
+            <a:avLst/>
+          </a:prstGeom>
+          <a:solidFill xmlns:a="http://schemas.openxmlformats.org/drawingml/2006/main">
+            <a:srgbClr val="FFC72C"/>
+          </a:solidFill>
+          <a:ln xmlns:a="http://schemas.openxmlformats.org/drawingml/2006/main" w="0">
+            <a:solidFill>
+              <a:srgbClr val="FFC72C"/>
+            </a:solidFill>
+            <a:prstDash val="solid"/>
+          </a:ln>
+        </p:spPr>
+      </p:sp>
+      <p:sp>
+        <p:nvSpPr>
+          <p:cNvPr id="62" name="apigee-roadmap-arrow-3">
+            <a:extLst xmlns:a="http://schemas.openxmlformats.org/drawingml/2006/main">
+              <a:ext uri="{FF2B5EF4-FFF2-40B4-BE49-F238E27FC236}">
+                <a16:creationId xmlns:a16="http://schemas.microsoft.com/office/drawing/2014/main" id="{77BC8F74-C181-46C5-84E4-82C68E670B6E}"/>
+              </a:ext>
+            </a:extLst>
+          </p:cNvPr>
+          <p:cNvSpPr>
+            <a:spLocks xmlns:a="http://schemas.openxmlformats.org/drawingml/2006/main" noGrp="1"/>
+          </p:cNvSpPr>
+          <p:nvPr/>
+        </p:nvSpPr>
+        <p:spPr>
+          <a:xfrm xmlns:a="http://schemas.openxmlformats.org/drawingml/2006/main">
+            <a:off x="5257800" y="3638550"/>
+            <a:ext cx="95250" cy="171450"/>
+          </a:xfrm>
+          <a:prstGeom xmlns:a="http://schemas.openxmlformats.org/drawingml/2006/main" prst="rightArrow">
+            <a:avLst/>
+          </a:prstGeom>
+          <a:solidFill xmlns:a="http://schemas.openxmlformats.org/drawingml/2006/main">
+            <a:srgbClr val="FFC72C"/>
+          </a:solidFill>
+          <a:ln xmlns:a="http://schemas.openxmlformats.org/drawingml/2006/main" w="0">
+            <a:solidFill>
+              <a:srgbClr val="FFC72C"/>
+            </a:solidFill>
+            <a:prstDash val="solid"/>
+          </a:ln>
+        </p:spPr>
+      </p:sp>
+      <p:sp>
+        <p:nvSpPr>
+          <p:cNvPr id="63" name="apigee-roadmap-arrow-4">
+            <a:extLst xmlns:a="http://schemas.openxmlformats.org/drawingml/2006/main">
+              <a:ext uri="{FF2B5EF4-FFF2-40B4-BE49-F238E27FC236}">
+                <a16:creationId xmlns:a16="http://schemas.microsoft.com/office/drawing/2014/main" id="{6EAF42C7-DDE5-4FCA-A214-59AB4F3AE3BF}"/>
+              </a:ext>
+            </a:extLst>
+          </p:cNvPr>
+          <p:cNvSpPr>
+            <a:spLocks xmlns:a="http://schemas.openxmlformats.org/drawingml/2006/main" noGrp="1"/>
+          </p:cNvSpPr>
+          <p:nvPr/>
+        </p:nvSpPr>
+        <p:spPr>
+          <a:xfrm xmlns:a="http://schemas.openxmlformats.org/drawingml/2006/main">
+            <a:off x="6838950" y="3638550"/>
+            <a:ext cx="95250" cy="171450"/>
+          </a:xfrm>
+          <a:prstGeom xmlns:a="http://schemas.openxmlformats.org/drawingml/2006/main" prst="rightArrow">
+            <a:avLst/>
+          </a:prstGeom>
+          <a:solidFill xmlns:a="http://schemas.openxmlformats.org/drawingml/2006/main">
+            <a:srgbClr val="FFC72C"/>
+          </a:solidFill>
+          <a:ln xmlns:a="http://schemas.openxmlformats.org/drawingml/2006/main" w="0">
+            <a:solidFill>
+              <a:srgbClr val="FFC72C"/>
+            </a:solidFill>
+            <a:prstDash val="solid"/>
+          </a:ln>
+        </p:spPr>
+      </p:sp>
+      <p:sp>
+        <p:nvSpPr>
+          <p:cNvPr id="64" name="apigee-roadmap-arrow-5">
+            <a:extLst xmlns:a="http://schemas.openxmlformats.org/drawingml/2006/main">
+              <a:ext uri="{FF2B5EF4-FFF2-40B4-BE49-F238E27FC236}">
+                <a16:creationId xmlns:a16="http://schemas.microsoft.com/office/drawing/2014/main" id="{70755A01-663E-44B7-A21A-DC1C3C91219D}"/>
+              </a:ext>
+            </a:extLst>
+          </p:cNvPr>
+          <p:cNvSpPr>
+            <a:spLocks xmlns:a="http://schemas.openxmlformats.org/drawingml/2006/main" noGrp="1"/>
+          </p:cNvSpPr>
+          <p:nvPr/>
+        </p:nvSpPr>
+        <p:spPr>
+          <a:xfrm xmlns:a="http://schemas.openxmlformats.org/drawingml/2006/main">
+            <a:off x="8420100" y="3638550"/>
+            <a:ext cx="95250" cy="171450"/>
+          </a:xfrm>
+          <a:prstGeom xmlns:a="http://schemas.openxmlformats.org/drawingml/2006/main" prst="rightArrow">
+            <a:avLst/>
+          </a:prstGeom>
+          <a:solidFill xmlns:a="http://schemas.openxmlformats.org/drawingml/2006/main">
+            <a:srgbClr val="FFC72C"/>
+          </a:solidFill>
+          <a:ln xmlns:a="http://schemas.openxmlformats.org/drawingml/2006/main" w="0">
+            <a:solidFill>
+              <a:srgbClr val="FFC72C"/>
+            </a:solidFill>
+            <a:prstDash val="solid"/>
+          </a:ln>
+        </p:spPr>
+      </p:sp>
+      <p:sp>
+        <p:nvSpPr>
+          <p:cNvPr id="65" name="apigee-roadmap-arrow-6">
+            <a:extLst xmlns:a="http://schemas.openxmlformats.org/drawingml/2006/main">
+              <a:ext uri="{FF2B5EF4-FFF2-40B4-BE49-F238E27FC236}">
+                <a16:creationId xmlns:a16="http://schemas.microsoft.com/office/drawing/2014/main" id="{A792491B-C092-4F12-A11A-07DFA300210E}"/>
+              </a:ext>
+            </a:extLst>
+          </p:cNvPr>
+          <p:cNvSpPr>
+            <a:spLocks xmlns:a="http://schemas.openxmlformats.org/drawingml/2006/main" noGrp="1"/>
+          </p:cNvSpPr>
+          <p:nvPr/>
+        </p:nvSpPr>
+        <p:spPr>
+          <a:xfrm xmlns:a="http://schemas.openxmlformats.org/drawingml/2006/main">
+            <a:off x="10001250" y="3638550"/>
+            <a:ext cx="95250" cy="171450"/>
+          </a:xfrm>
+          <a:prstGeom xmlns:a="http://schemas.openxmlformats.org/drawingml/2006/main" prst="rightArrow">
+            <a:avLst/>
+          </a:prstGeom>
+          <a:solidFill xmlns:a="http://schemas.openxmlformats.org/drawingml/2006/main">
+            <a:srgbClr val="FFC72C"/>
+          </a:solidFill>
+          <a:ln xmlns:a="http://schemas.openxmlformats.org/drawingml/2006/main" w="0">
+            <a:solidFill>
+              <a:srgbClr val="FFC72C"/>
+            </a:solidFill>
+            <a:prstDash val="solid"/>
+          </a:ln>
+        </p:spPr>
+      </p:sp>
+      <p:sp>
+        <p:nvSpPr>
+          <p:cNvPr id="66" name="apigee-phase-A0">
+            <a:extLst xmlns:a="http://schemas.openxmlformats.org/drawingml/2006/main">
+              <a:ext uri="{FF2B5EF4-FFF2-40B4-BE49-F238E27FC236}">
+                <a16:creationId xmlns:a16="http://schemas.microsoft.com/office/drawing/2014/main" id="{16A77128-D551-4CCE-8D17-A5800BE7EF46}"/>
+              </a:ext>
+            </a:extLst>
+          </p:cNvPr>
+          <p:cNvSpPr>
+            <a:spLocks xmlns:a="http://schemas.openxmlformats.org/drawingml/2006/main" noGrp="1"/>
+          </p:cNvSpPr>
+          <p:nvPr/>
+        </p:nvSpPr>
+        <p:spPr>
+          <a:xfrm xmlns:a="http://schemas.openxmlformats.org/drawingml/2006/main">
+            <a:off x="609600" y="2609850"/>
+            <a:ext cx="1485900" cy="2381250"/>
+          </a:xfrm>
+          <a:prstGeom xmlns:a="http://schemas.openxmlformats.org/drawingml/2006/main" prst="roundRect">
+            <a:avLst>
+              <a:gd name="adj" fmla="val 5128"/>
+            </a:avLst>
+          </a:prstGeom>
+          <a:solidFill xmlns:a="http://schemas.openxmlformats.org/drawingml/2006/main">
+            <a:srgbClr val="FFFFFF"/>
+          </a:solidFill>
+          <a:ln xmlns:a="http://schemas.openxmlformats.org/drawingml/2006/main" w="14288">
+            <a:solidFill>
+              <a:srgbClr val="18765A"/>
+            </a:solidFill>
+            <a:prstDash val="solid"/>
+          </a:ln>
+        </p:spPr>
+      </p:sp>
+      <p:sp>
+        <p:nvSpPr>
+          <p:cNvPr id="67" name="apigee-phase-code-A0">
+            <a:extLst xmlns:a="http://schemas.openxmlformats.org/drawingml/2006/main">
+              <a:ext uri="{FF2B5EF4-FFF2-40B4-BE49-F238E27FC236}">
+                <a16:creationId xmlns:a16="http://schemas.microsoft.com/office/drawing/2014/main" id="{03F2A802-266F-4F8B-949A-BCADE1412283}"/>
+              </a:ext>
+            </a:extLst>
+          </p:cNvPr>
+          <p:cNvSpPr>
+            <a:spLocks xmlns:a="http://schemas.openxmlformats.org/drawingml/2006/main" noGrp="1"/>
+          </p:cNvSpPr>
+          <p:nvPr/>
+        </p:nvSpPr>
+        <p:spPr>
+          <a:xfrm xmlns:a="http://schemas.openxmlformats.org/drawingml/2006/main">
+            <a:off x="704850" y="2705100"/>
+            <a:ext cx="495300" cy="228600"/>
+          </a:xfrm>
+          <a:prstGeom xmlns:a="http://schemas.openxmlformats.org/drawingml/2006/main" prst="rect">
+            <a:avLst/>
+          </a:prstGeom>
+          <a:noFill xmlns:a="http://schemas.openxmlformats.org/drawingml/2006/main"/>
+          <a:ln xmlns:a="http://schemas.openxmlformats.org/drawingml/2006/main" w="0">
+            <a:solidFill>
+              <a:srgbClr val="FFFCF5"/>
+            </a:solidFill>
+            <a:prstDash val="solid"/>
+          </a:ln>
+        </p:spPr>
+        <p:txBody>
+          <a:bodyPr xmlns:a="http://schemas.openxmlformats.org/drawingml/2006/main" lIns="28575" tIns="19050" rIns="28575" bIns="19050" anchor="ctr">
+            <a:normAutofit fontScale="92593"/>
           </a:bodyPr>
           <a:lstStyle xmlns:a="http://schemas.openxmlformats.org/drawingml/2006/main"/>
           <a:p xmlns:a="http://schemas.openxmlformats.org/drawingml/2006/main">
             <a:pPr algn="l">
-              <a:buNone/>
-              <a:defRPr sz="1725" b="0" i="0">
+              <a:lnSpc>
+                <a:spcPct val="100000"/>
+              </a:lnSpc>
+              <a:buNone/>
+              <a:defRPr sz="1350" b="1">
+                <a:solidFill>
+                  <a:srgbClr val="5537D6"/>
+                </a:solidFill>
+                <a:latin typeface="Consolas"/>
+                <a:ea typeface="Consolas"/>
+                <a:cs typeface="Consolas"/>
+              </a:defRPr>
+            </a:pPr>
+            <a:r>
+              <a:rPr sz="1350" b="1">
+                <a:solidFill>
+                  <a:srgbClr val="5537D6"/>
+                </a:solidFill>
+                <a:latin typeface="Consolas"/>
+                <a:ea typeface="Consolas"/>
+                <a:cs typeface="Consolas"/>
+              </a:rPr>
+              <a:t>A0</a:t>
+            </a:r>
+          </a:p>
+        </p:txBody>
+      </p:sp>
+      <p:sp>
+        <p:nvSpPr>
+          <p:cNvPr id="68" name="apigee-phase-label-A0">
+            <a:extLst xmlns:a="http://schemas.openxmlformats.org/drawingml/2006/main">
+              <a:ext uri="{FF2B5EF4-FFF2-40B4-BE49-F238E27FC236}">
+                <a16:creationId xmlns:a16="http://schemas.microsoft.com/office/drawing/2014/main" id="{292FB90A-EDD6-4200-9BEB-AC2D07F174E7}"/>
+              </a:ext>
+            </a:extLst>
+          </p:cNvPr>
+          <p:cNvSpPr>
+            <a:spLocks xmlns:a="http://schemas.openxmlformats.org/drawingml/2006/main" noGrp="1"/>
+          </p:cNvSpPr>
+          <p:nvPr/>
+        </p:nvSpPr>
+        <p:spPr>
+          <a:xfrm xmlns:a="http://schemas.openxmlformats.org/drawingml/2006/main">
+            <a:off x="704850" y="2952750"/>
+            <a:ext cx="1295400" cy="457200"/>
+          </a:xfrm>
+          <a:prstGeom xmlns:a="http://schemas.openxmlformats.org/drawingml/2006/main" prst="rect">
+            <a:avLst/>
+          </a:prstGeom>
+          <a:noFill xmlns:a="http://schemas.openxmlformats.org/drawingml/2006/main"/>
+          <a:ln xmlns:a="http://schemas.openxmlformats.org/drawingml/2006/main" w="0">
+            <a:solidFill>
+              <a:srgbClr val="FFFCF5"/>
+            </a:solidFill>
+            <a:prstDash val="solid"/>
+          </a:ln>
+        </p:spPr>
+        <p:txBody>
+          <a:bodyPr xmlns:a="http://schemas.openxmlformats.org/drawingml/2006/main" lIns="28575" tIns="19050" rIns="28575" bIns="19050" anchor="t">
+            <a:normAutofit fontScale="95174"/>
+          </a:bodyPr>
+          <a:lstStyle xmlns:a="http://schemas.openxmlformats.org/drawingml/2006/main"/>
+          <a:p xmlns:a="http://schemas.openxmlformats.org/drawingml/2006/main">
+            <a:pPr algn="l">
+              <a:lnSpc>
+                <a:spcPct val="100000"/>
+              </a:lnSpc>
+              <a:buNone/>
+              <a:defRPr sz="1575" b="1">
                 <a:solidFill>
                   <a:srgbClr val="111111"/>
                 </a:solidFill>
@@ -16992,7 +17364,7 @@
               </a:defRPr>
             </a:pPr>
             <a:r>
-              <a:rPr sz="1725" b="0" i="0">
+              <a:rPr sz="1575" b="1">
                 <a:solidFill>
                   <a:srgbClr val="111111"/>
                 </a:solidFill>
@@ -17000,81 +17372,86 @@
                 <a:ea typeface="Georgia"/>
                 <a:cs typeface="Georgia"/>
               </a:rPr>
-              <a:t>Inventory + freeze</a:t>
-            </a:r>
-          </a:p>
-        </p:txBody>
-      </p:sp>
-      <p:sp>
-        <p:nvSpPr>
-          <p:cNvPr id="11" name="">
-            <a:extLst xmlns:a="http://schemas.openxmlformats.org/drawingml/2006/main">
-              <a:ext uri="{FF2B5EF4-FFF2-40B4-BE49-F238E27FC236}">
-                <a16:creationId xmlns:a16="http://schemas.microsoft.com/office/drawing/2014/main" id="{93550F47-D3F4-4A23-A1B8-AF76C83288CA}"/>
-              </a:ext>
-            </a:extLst>
-          </p:cNvPr>
-          <p:cNvSpPr>
-            <a:spLocks xmlns:a="http://schemas.openxmlformats.org/drawingml/2006/main" noGrp="1"/>
-          </p:cNvSpPr>
-          <p:nvPr/>
-        </p:nvSpPr>
-        <p:spPr>
-          <a:xfrm xmlns:a="http://schemas.openxmlformats.org/drawingml/2006/main">
-            <a:off x="685800" y="3324225"/>
-            <a:ext cx="1562100" cy="19050"/>
-          </a:xfrm>
-          <a:prstGeom xmlns:a="http://schemas.openxmlformats.org/drawingml/2006/main" prst="rect">
-            <a:avLst/>
-          </a:prstGeom>
-          <a:solidFill xmlns:a="http://schemas.openxmlformats.org/drawingml/2006/main">
-            <a:srgbClr val="8A8B86"/>
-          </a:solidFill>
-          <a:ln xmlns:a="http://schemas.openxmlformats.org/drawingml/2006/main" w="0">
-            <a:noFill/>
-            <a:prstDash val="solid"/>
-          </a:ln>
-        </p:spPr>
-      </p:sp>
-      <p:sp>
-        <p:nvSpPr>
-          <p:cNvPr id="12" name="">
-            <a:extLst xmlns:a="http://schemas.openxmlformats.org/drawingml/2006/main">
-              <a:ext uri="{FF2B5EF4-FFF2-40B4-BE49-F238E27FC236}">
-                <a16:creationId xmlns:a16="http://schemas.microsoft.com/office/drawing/2014/main" id="{D2DADEFF-6B46-4C85-B77B-B0EC852719C2}"/>
-              </a:ext>
-            </a:extLst>
-          </p:cNvPr>
-          <p:cNvSpPr>
-            <a:spLocks xmlns:a="http://schemas.openxmlformats.org/drawingml/2006/main" noGrp="1"/>
-          </p:cNvSpPr>
-          <p:nvPr/>
-        </p:nvSpPr>
-        <p:spPr>
-          <a:xfrm xmlns:a="http://schemas.openxmlformats.org/drawingml/2006/main">
-            <a:off x="685800" y="3533775"/>
-            <a:ext cx="1562100" cy="171450"/>
-          </a:xfrm>
-          <a:prstGeom xmlns:a="http://schemas.openxmlformats.org/drawingml/2006/main" prst="rect">
-            <a:avLst/>
-          </a:prstGeom>
-          <a:noFill xmlns:a="http://schemas.openxmlformats.org/drawingml/2006/main"/>
-          <a:ln xmlns:a="http://schemas.openxmlformats.org/drawingml/2006/main" w="0">
-            <a:noFill/>
-            <a:prstDash val="solid"/>
-          </a:ln>
-        </p:spPr>
-        <p:txBody>
-          <a:bodyPr xmlns:a="http://schemas.openxmlformats.org/drawingml/2006/main" wrap="square" lIns="0" tIns="0" rIns="0" bIns="0" anchor="t">
-            <a:normAutofit fontScale="100000"/>
+              <a:t>Source truth</a:t>
+            </a:r>
+          </a:p>
+        </p:txBody>
+      </p:sp>
+      <p:sp>
+        <p:nvSpPr>
+          <p:cNvPr id="69" name="apigee-phase-rule-A0">
+            <a:extLst xmlns:a="http://schemas.openxmlformats.org/drawingml/2006/main">
+              <a:ext uri="{FF2B5EF4-FFF2-40B4-BE49-F238E27FC236}">
+                <a16:creationId xmlns:a16="http://schemas.microsoft.com/office/drawing/2014/main" id="{608E46C0-825C-43FA-9255-53A3AC1784C4}"/>
+              </a:ext>
+            </a:extLst>
+          </p:cNvPr>
+          <p:cNvSpPr>
+            <a:spLocks xmlns:a="http://schemas.openxmlformats.org/drawingml/2006/main" noGrp="1"/>
+          </p:cNvSpPr>
+          <p:nvPr/>
+        </p:nvSpPr>
+        <p:spPr>
+          <a:xfrm xmlns:a="http://schemas.openxmlformats.org/drawingml/2006/main">
+            <a:off x="704850" y="3486150"/>
+            <a:ext cx="1295400" cy="0"/>
+          </a:xfrm>
+          <a:prstGeom xmlns:a="http://schemas.openxmlformats.org/drawingml/2006/main" prst="line">
+            <a:avLst/>
+          </a:prstGeom>
+          <a:noFill xmlns:a="http://schemas.openxmlformats.org/drawingml/2006/main"/>
+          <a:ln xmlns:a="http://schemas.openxmlformats.org/drawingml/2006/main" w="9525">
+            <a:solidFill>
+              <a:srgbClr val="C9C6BD"/>
+            </a:solidFill>
+            <a:prstDash val="solid"/>
+          </a:ln>
+        </p:spPr>
+      </p:sp>
+      <p:sp>
+        <p:nvSpPr>
+          <p:cNvPr id="70" name="apigee-phase-exit-label-A0">
+            <a:extLst xmlns:a="http://schemas.openxmlformats.org/drawingml/2006/main">
+              <a:ext uri="{FF2B5EF4-FFF2-40B4-BE49-F238E27FC236}">
+                <a16:creationId xmlns:a16="http://schemas.microsoft.com/office/drawing/2014/main" id="{3897F23A-C4F7-4577-B813-8AA6B869FEA4}"/>
+              </a:ext>
+            </a:extLst>
+          </p:cNvPr>
+          <p:cNvSpPr>
+            <a:spLocks xmlns:a="http://schemas.openxmlformats.org/drawingml/2006/main" noGrp="1"/>
+          </p:cNvSpPr>
+          <p:nvPr/>
+        </p:nvSpPr>
+        <p:spPr>
+          <a:xfrm xmlns:a="http://schemas.openxmlformats.org/drawingml/2006/main">
+            <a:off x="704850" y="3581400"/>
+            <a:ext cx="1295400" cy="171450"/>
+          </a:xfrm>
+          <a:prstGeom xmlns:a="http://schemas.openxmlformats.org/drawingml/2006/main" prst="rect">
+            <a:avLst/>
+          </a:prstGeom>
+          <a:noFill xmlns:a="http://schemas.openxmlformats.org/drawingml/2006/main"/>
+          <a:ln xmlns:a="http://schemas.openxmlformats.org/drawingml/2006/main" w="0">
+            <a:solidFill>
+              <a:srgbClr val="FFFCF5"/>
+            </a:solidFill>
+            <a:prstDash val="solid"/>
+          </a:ln>
+        </p:spPr>
+        <p:txBody>
+          <a:bodyPr xmlns:a="http://schemas.openxmlformats.org/drawingml/2006/main" lIns="28575" tIns="19050" rIns="28575" bIns="19050" anchor="ctr">
+            <a:normAutofit fontScale="89744"/>
           </a:bodyPr>
           <a:lstStyle xmlns:a="http://schemas.openxmlformats.org/drawingml/2006/main"/>
           <a:p xmlns:a="http://schemas.openxmlformats.org/drawingml/2006/main">
             <a:pPr algn="l">
-              <a:buNone/>
-              <a:defRPr sz="900" b="1" i="0">
-                <a:solidFill>
-                  <a:srgbClr val="686A66"/>
+              <a:lnSpc>
+                <a:spcPct val="100000"/>
+              </a:lnSpc>
+              <a:buNone/>
+              <a:defRPr sz="975" b="1">
+                <a:solidFill>
+                  <a:srgbClr val="5537D6"/>
                 </a:solidFill>
                 <a:latin typeface="Consolas"/>
                 <a:ea typeface="Consolas"/>
@@ -17082,139 +17459,160 @@
               </a:defRPr>
             </a:pPr>
             <a:r>
-              <a:rPr sz="900" b="1" i="0">
-                <a:solidFill>
-                  <a:srgbClr val="686A66"/>
+              <a:rPr sz="975" b="1">
+                <a:solidFill>
+                  <a:srgbClr val="5537D6"/>
                 </a:solidFill>
                 <a:latin typeface="Consolas"/>
                 <a:ea typeface="Consolas"/>
                 <a:cs typeface="Consolas"/>
               </a:rPr>
-              <a:t>ENTRY</a:t>
-            </a:r>
-          </a:p>
-        </p:txBody>
-      </p:sp>
-      <p:sp>
-        <p:nvSpPr>
-          <p:cNvPr id="13" name="">
-            <a:extLst xmlns:a="http://schemas.openxmlformats.org/drawingml/2006/main">
-              <a:ext uri="{FF2B5EF4-FFF2-40B4-BE49-F238E27FC236}">
-                <a16:creationId xmlns:a16="http://schemas.microsoft.com/office/drawing/2014/main" id="{DC5B545C-64F6-4A84-A318-2A214245DE4F}"/>
-              </a:ext>
-            </a:extLst>
-          </p:cNvPr>
-          <p:cNvSpPr>
-            <a:spLocks xmlns:a="http://schemas.openxmlformats.org/drawingml/2006/main" noGrp="1"/>
-          </p:cNvSpPr>
-          <p:nvPr/>
-        </p:nvSpPr>
-        <p:spPr>
-          <a:xfrm xmlns:a="http://schemas.openxmlformats.org/drawingml/2006/main">
-            <a:off x="685800" y="3781425"/>
-            <a:ext cx="1562100" cy="628650"/>
-          </a:xfrm>
-          <a:prstGeom xmlns:a="http://schemas.openxmlformats.org/drawingml/2006/main" prst="rect">
-            <a:avLst/>
-          </a:prstGeom>
-          <a:noFill xmlns:a="http://schemas.openxmlformats.org/drawingml/2006/main"/>
-          <a:ln xmlns:a="http://schemas.openxmlformats.org/drawingml/2006/main" w="0">
-            <a:noFill/>
-            <a:prstDash val="solid"/>
-          </a:ln>
-        </p:spPr>
-        <p:txBody>
-          <a:bodyPr xmlns:a="http://schemas.openxmlformats.org/drawingml/2006/main" wrap="square" lIns="0" tIns="0" rIns="0" bIns="0" anchor="t">
+              <a:t>EXIT EVIDENCE</a:t>
+            </a:r>
+          </a:p>
+        </p:txBody>
+      </p:sp>
+      <p:sp>
+        <p:nvSpPr>
+          <p:cNvPr id="71" name="apigee-phase-exit-A0">
+            <a:extLst xmlns:a="http://schemas.openxmlformats.org/drawingml/2006/main">
+              <a:ext uri="{FF2B5EF4-FFF2-40B4-BE49-F238E27FC236}">
+                <a16:creationId xmlns:a16="http://schemas.microsoft.com/office/drawing/2014/main" id="{693C6485-B69F-454B-AC61-F1EE21763E04}"/>
+              </a:ext>
+            </a:extLst>
+          </p:cNvPr>
+          <p:cNvSpPr>
+            <a:spLocks xmlns:a="http://schemas.openxmlformats.org/drawingml/2006/main" noGrp="1"/>
+          </p:cNvSpPr>
+          <p:nvPr/>
+        </p:nvSpPr>
+        <p:spPr>
+          <a:xfrm xmlns:a="http://schemas.openxmlformats.org/drawingml/2006/main">
+            <a:off x="704850" y="3810000"/>
+            <a:ext cx="1295400" cy="990600"/>
+          </a:xfrm>
+          <a:prstGeom xmlns:a="http://schemas.openxmlformats.org/drawingml/2006/main" prst="rect">
+            <a:avLst/>
+          </a:prstGeom>
+          <a:noFill xmlns:a="http://schemas.openxmlformats.org/drawingml/2006/main"/>
+          <a:ln xmlns:a="http://schemas.openxmlformats.org/drawingml/2006/main" w="0">
+            <a:solidFill>
+              <a:srgbClr val="FFFCF5"/>
+            </a:solidFill>
+            <a:prstDash val="solid"/>
+          </a:ln>
+        </p:spPr>
+        <p:txBody>
+          <a:bodyPr xmlns:a="http://schemas.openxmlformats.org/drawingml/2006/main" lIns="28575" tIns="19050" rIns="28575" bIns="19050" anchor="t">
             <a:normAutofit fontScale="100000"/>
           </a:bodyPr>
           <a:lstStyle xmlns:a="http://schemas.openxmlformats.org/drawingml/2006/main"/>
           <a:p xmlns:a="http://schemas.openxmlformats.org/drawingml/2006/main">
             <a:pPr algn="l">
-              <a:buNone/>
-              <a:defRPr sz="1200" b="0" i="0">
-                <a:solidFill>
-                  <a:srgbClr val="111111"/>
-                </a:solidFill>
-                <a:latin typeface="Arial"/>
-                <a:ea typeface="Arial"/>
-                <a:cs typeface="Arial"/>
-              </a:defRPr>
-            </a:pPr>
-            <a:r>
-              <a:rPr sz="1200" b="0" i="0">
-                <a:solidFill>
-                  <a:srgbClr val="111111"/>
-                </a:solidFill>
-                <a:latin typeface="Arial"/>
-                <a:ea typeface="Arial"/>
-                <a:cs typeface="Arial"/>
-              </a:rPr>
-              <a:t>Mule duty + state</a:t>
-            </a:r>
-          </a:p>
+              <a:lnSpc>
+                <a:spcPct val="100000"/>
+              </a:lnSpc>
+              <a:buNone/>
+              <a:defRPr sz="1200" b="0">
+                <a:solidFill>
+                  <a:srgbClr val="686A66"/>
+                </a:solidFill>
+                <a:latin typeface="Arial"/>
+                <a:ea typeface="Arial"/>
+                <a:cs typeface="Arial"/>
+              </a:defRPr>
+            </a:pPr>
+            <a:r>
+              <a:rPr sz="1200" b="0">
+                <a:solidFill>
+                  <a:srgbClr val="686A66"/>
+                </a:solidFill>
+                <a:latin typeface="Arial"/>
+                <a:ea typeface="Arial"/>
+                <a:cs typeface="Arial"/>
+              </a:rPr>
+              <a:t>Reconciled object, state, traffic and owner denominator</a:t>
+            </a:r>
+          </a:p>
+        </p:txBody>
+      </p:sp>
+      <p:sp>
+        <p:nvSpPr>
+          <p:cNvPr id="72" name="apigee-phase-A1">
+            <a:extLst xmlns:a="http://schemas.openxmlformats.org/drawingml/2006/main">
+              <a:ext uri="{FF2B5EF4-FFF2-40B4-BE49-F238E27FC236}">
+                <a16:creationId xmlns:a16="http://schemas.microsoft.com/office/drawing/2014/main" id="{E17886CB-6162-4951-92E6-348725F32D30}"/>
+              </a:ext>
+            </a:extLst>
+          </p:cNvPr>
+          <p:cNvSpPr>
+            <a:spLocks xmlns:a="http://schemas.openxmlformats.org/drawingml/2006/main" noGrp="1"/>
+          </p:cNvSpPr>
+          <p:nvPr/>
+        </p:nvSpPr>
+        <p:spPr>
+          <a:xfrm xmlns:a="http://schemas.openxmlformats.org/drawingml/2006/main">
+            <a:off x="2190750" y="2609850"/>
+            <a:ext cx="1485900" cy="2381250"/>
+          </a:xfrm>
+          <a:prstGeom xmlns:a="http://schemas.openxmlformats.org/drawingml/2006/main" prst="roundRect">
+            <a:avLst>
+              <a:gd name="adj" fmla="val 5128"/>
+            </a:avLst>
+          </a:prstGeom>
+          <a:solidFill xmlns:a="http://schemas.openxmlformats.org/drawingml/2006/main">
+            <a:srgbClr val="FFFFFF"/>
+          </a:solidFill>
+          <a:ln xmlns:a="http://schemas.openxmlformats.org/drawingml/2006/main" w="14288">
+            <a:solidFill>
+              <a:srgbClr val="18765A"/>
+            </a:solidFill>
+            <a:prstDash val="solid"/>
+          </a:ln>
+        </p:spPr>
+      </p:sp>
+      <p:sp>
+        <p:nvSpPr>
+          <p:cNvPr id="73" name="apigee-phase-code-A1">
+            <a:extLst xmlns:a="http://schemas.openxmlformats.org/drawingml/2006/main">
+              <a:ext uri="{FF2B5EF4-FFF2-40B4-BE49-F238E27FC236}">
+                <a16:creationId xmlns:a16="http://schemas.microsoft.com/office/drawing/2014/main" id="{1907725C-C876-4481-8524-2E6B7D32A698}"/>
+              </a:ext>
+            </a:extLst>
+          </p:cNvPr>
+          <p:cNvSpPr>
+            <a:spLocks xmlns:a="http://schemas.openxmlformats.org/drawingml/2006/main" noGrp="1"/>
+          </p:cNvSpPr>
+          <p:nvPr/>
+        </p:nvSpPr>
+        <p:spPr>
+          <a:xfrm xmlns:a="http://schemas.openxmlformats.org/drawingml/2006/main">
+            <a:off x="2286000" y="2705100"/>
+            <a:ext cx="495300" cy="228600"/>
+          </a:xfrm>
+          <a:prstGeom xmlns:a="http://schemas.openxmlformats.org/drawingml/2006/main" prst="rect">
+            <a:avLst/>
+          </a:prstGeom>
+          <a:noFill xmlns:a="http://schemas.openxmlformats.org/drawingml/2006/main"/>
+          <a:ln xmlns:a="http://schemas.openxmlformats.org/drawingml/2006/main" w="0">
+            <a:solidFill>
+              <a:srgbClr val="FFFCF5"/>
+            </a:solidFill>
+            <a:prstDash val="solid"/>
+          </a:ln>
+        </p:spPr>
+        <p:txBody>
+          <a:bodyPr xmlns:a="http://schemas.openxmlformats.org/drawingml/2006/main" lIns="28575" tIns="19050" rIns="28575" bIns="19050" anchor="ctr">
+            <a:normAutofit fontScale="92593"/>
+          </a:bodyPr>
+          <a:lstStyle xmlns:a="http://schemas.openxmlformats.org/drawingml/2006/main"/>
           <a:p xmlns:a="http://schemas.openxmlformats.org/drawingml/2006/main">
             <a:pPr algn="l">
-              <a:buNone/>
-              <a:defRPr sz="1200" b="0" i="0">
-                <a:solidFill>
-                  <a:srgbClr val="111111"/>
-                </a:solidFill>
-                <a:latin typeface="Arial"/>
-                <a:ea typeface="Arial"/>
-                <a:cs typeface="Arial"/>
-              </a:defRPr>
-            </a:pPr>
-            <a:r>
-              <a:rPr sz="1200" b="0" i="0">
-                <a:solidFill>
-                  <a:srgbClr val="111111"/>
-                </a:solidFill>
-                <a:latin typeface="Arial"/>
-                <a:ea typeface="Arial"/>
-                <a:cs typeface="Arial"/>
-              </a:rPr>
-              <a:t>Apigee object graph</a:t>
-            </a:r>
-          </a:p>
-        </p:txBody>
-      </p:sp>
-      <p:sp>
-        <p:nvSpPr>
-          <p:cNvPr id="14" name="">
-            <a:extLst xmlns:a="http://schemas.openxmlformats.org/drawingml/2006/main">
-              <a:ext uri="{FF2B5EF4-FFF2-40B4-BE49-F238E27FC236}">
-                <a16:creationId xmlns:a16="http://schemas.microsoft.com/office/drawing/2014/main" id="{8B267964-5B93-44DE-9F13-E2B1377FDE58}"/>
-              </a:ext>
-            </a:extLst>
-          </p:cNvPr>
-          <p:cNvSpPr>
-            <a:spLocks xmlns:a="http://schemas.openxmlformats.org/drawingml/2006/main" noGrp="1"/>
-          </p:cNvSpPr>
-          <p:nvPr/>
-        </p:nvSpPr>
-        <p:spPr>
-          <a:xfrm xmlns:a="http://schemas.openxmlformats.org/drawingml/2006/main">
-            <a:off x="685800" y="4591050"/>
-            <a:ext cx="1562100" cy="171450"/>
-          </a:xfrm>
-          <a:prstGeom xmlns:a="http://schemas.openxmlformats.org/drawingml/2006/main" prst="rect">
-            <a:avLst/>
-          </a:prstGeom>
-          <a:noFill xmlns:a="http://schemas.openxmlformats.org/drawingml/2006/main"/>
-          <a:ln xmlns:a="http://schemas.openxmlformats.org/drawingml/2006/main" w="0">
-            <a:noFill/>
-            <a:prstDash val="solid"/>
-          </a:ln>
-        </p:spPr>
-        <p:txBody>
-          <a:bodyPr xmlns:a="http://schemas.openxmlformats.org/drawingml/2006/main" wrap="square" lIns="0" tIns="0" rIns="0" bIns="0" anchor="t">
-            <a:normAutofit fontScale="100000"/>
-          </a:bodyPr>
-          <a:lstStyle xmlns:a="http://schemas.openxmlformats.org/drawingml/2006/main"/>
-          <a:p xmlns:a="http://schemas.openxmlformats.org/drawingml/2006/main">
-            <a:pPr algn="l">
-              <a:buNone/>
-              <a:defRPr sz="900" b="1" i="0">
+              <a:lnSpc>
+                <a:spcPct val="100000"/>
+              </a:lnSpc>
+              <a:buNone/>
+              <a:defRPr sz="1350" b="1">
                 <a:solidFill>
                   <a:srgbClr val="5537D6"/>
                 </a:solidFill>
@@ -17224,7 +17622,7 @@
               </a:defRPr>
             </a:pPr>
             <a:r>
-              <a:rPr sz="900" b="1" i="0">
+              <a:rPr sz="1350" b="1">
                 <a:solidFill>
                   <a:srgbClr val="5537D6"/>
                 </a:solidFill>
@@ -17232,138 +17630,148 @@
                 <a:ea typeface="Consolas"/>
                 <a:cs typeface="Consolas"/>
               </a:rPr>
-              <a:t>EXIT</a:t>
-            </a:r>
-          </a:p>
-        </p:txBody>
-      </p:sp>
-      <p:sp>
-        <p:nvSpPr>
-          <p:cNvPr id="15" name="">
-            <a:extLst xmlns:a="http://schemas.openxmlformats.org/drawingml/2006/main">
-              <a:ext uri="{FF2B5EF4-FFF2-40B4-BE49-F238E27FC236}">
-                <a16:creationId xmlns:a16="http://schemas.microsoft.com/office/drawing/2014/main" id="{F84F5F51-A14D-44A2-A675-1571A920D968}"/>
-              </a:ext>
-            </a:extLst>
-          </p:cNvPr>
-          <p:cNvSpPr>
-            <a:spLocks xmlns:a="http://schemas.openxmlformats.org/drawingml/2006/main" noGrp="1"/>
-          </p:cNvSpPr>
-          <p:nvPr/>
-        </p:nvSpPr>
-        <p:spPr>
-          <a:xfrm xmlns:a="http://schemas.openxmlformats.org/drawingml/2006/main">
-            <a:off x="685800" y="4838700"/>
-            <a:ext cx="1562100" cy="628650"/>
-          </a:xfrm>
-          <a:prstGeom xmlns:a="http://schemas.openxmlformats.org/drawingml/2006/main" prst="rect">
-            <a:avLst/>
-          </a:prstGeom>
-          <a:noFill xmlns:a="http://schemas.openxmlformats.org/drawingml/2006/main"/>
-          <a:ln xmlns:a="http://schemas.openxmlformats.org/drawingml/2006/main" w="0">
-            <a:noFill/>
-            <a:prstDash val="solid"/>
-          </a:ln>
-        </p:spPr>
-        <p:txBody>
-          <a:bodyPr xmlns:a="http://schemas.openxmlformats.org/drawingml/2006/main" wrap="square" lIns="0" tIns="0" rIns="0" bIns="0" anchor="t">
-            <a:normAutofit fontScale="100000"/>
+              <a:t>A1</a:t>
+            </a:r>
+          </a:p>
+        </p:txBody>
+      </p:sp>
+      <p:sp>
+        <p:nvSpPr>
+          <p:cNvPr id="74" name="apigee-phase-label-A1">
+            <a:extLst xmlns:a="http://schemas.openxmlformats.org/drawingml/2006/main">
+              <a:ext uri="{FF2B5EF4-FFF2-40B4-BE49-F238E27FC236}">
+                <a16:creationId xmlns:a16="http://schemas.microsoft.com/office/drawing/2014/main" id="{2452B356-061B-483C-95EA-59331B0A5E36}"/>
+              </a:ext>
+            </a:extLst>
+          </p:cNvPr>
+          <p:cNvSpPr>
+            <a:spLocks xmlns:a="http://schemas.openxmlformats.org/drawingml/2006/main" noGrp="1"/>
+          </p:cNvSpPr>
+          <p:nvPr/>
+        </p:nvSpPr>
+        <p:spPr>
+          <a:xfrm xmlns:a="http://schemas.openxmlformats.org/drawingml/2006/main">
+            <a:off x="2286000" y="2952750"/>
+            <a:ext cx="1295400" cy="457200"/>
+          </a:xfrm>
+          <a:prstGeom xmlns:a="http://schemas.openxmlformats.org/drawingml/2006/main" prst="rect">
+            <a:avLst/>
+          </a:prstGeom>
+          <a:noFill xmlns:a="http://schemas.openxmlformats.org/drawingml/2006/main"/>
+          <a:ln xmlns:a="http://schemas.openxmlformats.org/drawingml/2006/main" w="0">
+            <a:solidFill>
+              <a:srgbClr val="FFFCF5"/>
+            </a:solidFill>
+            <a:prstDash val="solid"/>
+          </a:ln>
+        </p:spPr>
+        <p:txBody>
+          <a:bodyPr xmlns:a="http://schemas.openxmlformats.org/drawingml/2006/main" lIns="28575" tIns="19050" rIns="28575" bIns="19050" anchor="t">
+            <a:normAutofit fontScale="87302"/>
           </a:bodyPr>
           <a:lstStyle xmlns:a="http://schemas.openxmlformats.org/drawingml/2006/main"/>
           <a:p xmlns:a="http://schemas.openxmlformats.org/drawingml/2006/main">
             <a:pPr algn="l">
-              <a:buNone/>
-              <a:defRPr sz="1200" b="0" i="0">
+              <a:lnSpc>
+                <a:spcPct val="100000"/>
+              </a:lnSpc>
+              <a:buNone/>
+              <a:defRPr sz="1575" b="1">
                 <a:solidFill>
                   <a:srgbClr val="111111"/>
                 </a:solidFill>
-                <a:latin typeface="Arial"/>
-                <a:ea typeface="Arial"/>
-                <a:cs typeface="Arial"/>
-              </a:defRPr>
-            </a:pPr>
-            <a:r>
-              <a:rPr sz="1200" b="0" i="0">
+                <a:latin typeface="Georgia"/>
+                <a:ea typeface="Georgia"/>
+                <a:cs typeface="Georgia"/>
+              </a:defRPr>
+            </a:pPr>
+            <a:r>
+              <a:rPr sz="1575" b="1">
                 <a:solidFill>
                   <a:srgbClr val="111111"/>
                 </a:solidFill>
-                <a:latin typeface="Arial"/>
-                <a:ea typeface="Arial"/>
-                <a:cs typeface="Arial"/>
-              </a:rPr>
-              <a:t>reconciled denominator</a:t>
-            </a:r>
-          </a:p>
-        </p:txBody>
-      </p:sp>
-      <p:sp>
-        <p:nvSpPr>
-          <p:cNvPr id="16" name="">
-            <a:extLst xmlns:a="http://schemas.openxmlformats.org/drawingml/2006/main">
-              <a:ext uri="{FF2B5EF4-FFF2-40B4-BE49-F238E27FC236}">
-                <a16:creationId xmlns:a16="http://schemas.microsoft.com/office/drawing/2014/main" id="{9FD5CF0D-3C89-4822-B53A-5AACB7166782}"/>
-              </a:ext>
-            </a:extLst>
-          </p:cNvPr>
-          <p:cNvSpPr>
-            <a:spLocks xmlns:a="http://schemas.openxmlformats.org/drawingml/2006/main" noGrp="1"/>
-          </p:cNvSpPr>
-          <p:nvPr/>
-        </p:nvSpPr>
-        <p:spPr>
-          <a:xfrm xmlns:a="http://schemas.openxmlformats.org/drawingml/2006/main">
-            <a:off x="2247900" y="3257550"/>
-            <a:ext cx="247650" cy="266700"/>
-          </a:xfrm>
-          <a:prstGeom xmlns:a="http://schemas.openxmlformats.org/drawingml/2006/main" prst="chevron">
-            <a:avLst/>
-          </a:prstGeom>
-          <a:solidFill xmlns:a="http://schemas.openxmlformats.org/drawingml/2006/main">
-            <a:srgbClr val="FFC72C"/>
-          </a:solidFill>
-          <a:ln xmlns:a="http://schemas.openxmlformats.org/drawingml/2006/main" w="0">
-            <a:noFill/>
-            <a:prstDash val="solid"/>
-          </a:ln>
-        </p:spPr>
-      </p:sp>
-      <p:sp>
-        <p:nvSpPr>
-          <p:cNvPr id="17" name="">
-            <a:extLst xmlns:a="http://schemas.openxmlformats.org/drawingml/2006/main">
-              <a:ext uri="{FF2B5EF4-FFF2-40B4-BE49-F238E27FC236}">
-                <a16:creationId xmlns:a16="http://schemas.microsoft.com/office/drawing/2014/main" id="{6C73B855-2CA6-4463-AF70-CE776796DC4E}"/>
-              </a:ext>
-            </a:extLst>
-          </p:cNvPr>
-          <p:cNvSpPr>
-            <a:spLocks xmlns:a="http://schemas.openxmlformats.org/drawingml/2006/main" noGrp="1"/>
-          </p:cNvSpPr>
-          <p:nvPr/>
-        </p:nvSpPr>
-        <p:spPr>
-          <a:xfrm xmlns:a="http://schemas.openxmlformats.org/drawingml/2006/main">
-            <a:off x="2495550" y="2266950"/>
-            <a:ext cx="571500" cy="266700"/>
-          </a:xfrm>
-          <a:prstGeom xmlns:a="http://schemas.openxmlformats.org/drawingml/2006/main" prst="rect">
-            <a:avLst/>
-          </a:prstGeom>
-          <a:noFill xmlns:a="http://schemas.openxmlformats.org/drawingml/2006/main"/>
-          <a:ln xmlns:a="http://schemas.openxmlformats.org/drawingml/2006/main" w="0">
-            <a:noFill/>
-            <a:prstDash val="solid"/>
-          </a:ln>
-        </p:spPr>
-        <p:txBody>
-          <a:bodyPr xmlns:a="http://schemas.openxmlformats.org/drawingml/2006/main" wrap="square" lIns="0" tIns="0" rIns="0" bIns="0" anchor="t">
-            <a:normAutofit fontScale="100000"/>
+                <a:latin typeface="Georgia"/>
+                <a:ea typeface="Georgia"/>
+                <a:cs typeface="Georgia"/>
+              </a:rPr>
+              <a:t>Semantic map</a:t>
+            </a:r>
+          </a:p>
+        </p:txBody>
+      </p:sp>
+      <p:sp>
+        <p:nvSpPr>
+          <p:cNvPr id="75" name="apigee-phase-rule-A1">
+            <a:extLst xmlns:a="http://schemas.openxmlformats.org/drawingml/2006/main">
+              <a:ext uri="{FF2B5EF4-FFF2-40B4-BE49-F238E27FC236}">
+                <a16:creationId xmlns:a16="http://schemas.microsoft.com/office/drawing/2014/main" id="{2F3332AC-247B-439B-BB95-7C31D12BFE09}"/>
+              </a:ext>
+            </a:extLst>
+          </p:cNvPr>
+          <p:cNvSpPr>
+            <a:spLocks xmlns:a="http://schemas.openxmlformats.org/drawingml/2006/main" noGrp="1"/>
+          </p:cNvSpPr>
+          <p:nvPr/>
+        </p:nvSpPr>
+        <p:spPr>
+          <a:xfrm xmlns:a="http://schemas.openxmlformats.org/drawingml/2006/main">
+            <a:off x="2286000" y="3486150"/>
+            <a:ext cx="1295400" cy="0"/>
+          </a:xfrm>
+          <a:prstGeom xmlns:a="http://schemas.openxmlformats.org/drawingml/2006/main" prst="line">
+            <a:avLst/>
+          </a:prstGeom>
+          <a:noFill xmlns:a="http://schemas.openxmlformats.org/drawingml/2006/main"/>
+          <a:ln xmlns:a="http://schemas.openxmlformats.org/drawingml/2006/main" w="9525">
+            <a:solidFill>
+              <a:srgbClr val="C9C6BD"/>
+            </a:solidFill>
+            <a:prstDash val="solid"/>
+          </a:ln>
+        </p:spPr>
+      </p:sp>
+      <p:sp>
+        <p:nvSpPr>
+          <p:cNvPr id="76" name="apigee-phase-exit-label-A1">
+            <a:extLst xmlns:a="http://schemas.openxmlformats.org/drawingml/2006/main">
+              <a:ext uri="{FF2B5EF4-FFF2-40B4-BE49-F238E27FC236}">
+                <a16:creationId xmlns:a16="http://schemas.microsoft.com/office/drawing/2014/main" id="{36AF2F0E-13F6-49C0-B5F2-4F53A5060147}"/>
+              </a:ext>
+            </a:extLst>
+          </p:cNvPr>
+          <p:cNvSpPr>
+            <a:spLocks xmlns:a="http://schemas.openxmlformats.org/drawingml/2006/main" noGrp="1"/>
+          </p:cNvSpPr>
+          <p:nvPr/>
+        </p:nvSpPr>
+        <p:spPr>
+          <a:xfrm xmlns:a="http://schemas.openxmlformats.org/drawingml/2006/main">
+            <a:off x="2286000" y="3581400"/>
+            <a:ext cx="1295400" cy="171450"/>
+          </a:xfrm>
+          <a:prstGeom xmlns:a="http://schemas.openxmlformats.org/drawingml/2006/main" prst="rect">
+            <a:avLst/>
+          </a:prstGeom>
+          <a:noFill xmlns:a="http://schemas.openxmlformats.org/drawingml/2006/main"/>
+          <a:ln xmlns:a="http://schemas.openxmlformats.org/drawingml/2006/main" w="0">
+            <a:solidFill>
+              <a:srgbClr val="FFFCF5"/>
+            </a:solidFill>
+            <a:prstDash val="solid"/>
+          </a:ln>
+        </p:spPr>
+        <p:txBody>
+          <a:bodyPr xmlns:a="http://schemas.openxmlformats.org/drawingml/2006/main" lIns="28575" tIns="19050" rIns="28575" bIns="19050" anchor="ctr">
+            <a:normAutofit fontScale="89744"/>
           </a:bodyPr>
           <a:lstStyle xmlns:a="http://schemas.openxmlformats.org/drawingml/2006/main"/>
           <a:p xmlns:a="http://schemas.openxmlformats.org/drawingml/2006/main">
             <a:pPr algn="l">
-              <a:buNone/>
-              <a:defRPr sz="1275" b="1" i="0">
+              <a:lnSpc>
+                <a:spcPct val="100000"/>
+              </a:lnSpc>
+              <a:buNone/>
+              <a:defRPr sz="975" b="1">
                 <a:solidFill>
                   <a:srgbClr val="5537D6"/>
                 </a:solidFill>
@@ -17373,7 +17781,7 @@
               </a:defRPr>
             </a:pPr>
             <a:r>
-              <a:rPr sz="1275" b="1" i="0">
+              <a:rPr sz="975" b="1">
                 <a:solidFill>
                   <a:srgbClr val="5537D6"/>
                 </a:solidFill>
@@ -17381,48 +17789,216 @@
                 <a:ea typeface="Consolas"/>
                 <a:cs typeface="Consolas"/>
               </a:rPr>
-              <a:t>M1/A1</a:t>
-            </a:r>
-          </a:p>
-        </p:txBody>
-      </p:sp>
-      <p:sp>
-        <p:nvSpPr>
-          <p:cNvPr id="18" name="">
-            <a:extLst xmlns:a="http://schemas.openxmlformats.org/drawingml/2006/main">
-              <a:ext uri="{FF2B5EF4-FFF2-40B4-BE49-F238E27FC236}">
-                <a16:creationId xmlns:a16="http://schemas.microsoft.com/office/drawing/2014/main" id="{D5956EBA-61A4-4182-A5EE-5E698A8CB84C}"/>
-              </a:ext>
-            </a:extLst>
-          </p:cNvPr>
-          <p:cNvSpPr>
-            <a:spLocks xmlns:a="http://schemas.openxmlformats.org/drawingml/2006/main" noGrp="1"/>
-          </p:cNvSpPr>
-          <p:nvPr/>
-        </p:nvSpPr>
-        <p:spPr>
-          <a:xfrm xmlns:a="http://schemas.openxmlformats.org/drawingml/2006/main">
-            <a:off x="2495550" y="2619375"/>
-            <a:ext cx="1581150" cy="609600"/>
-          </a:xfrm>
-          <a:prstGeom xmlns:a="http://schemas.openxmlformats.org/drawingml/2006/main" prst="rect">
-            <a:avLst/>
-          </a:prstGeom>
-          <a:noFill xmlns:a="http://schemas.openxmlformats.org/drawingml/2006/main"/>
-          <a:ln xmlns:a="http://schemas.openxmlformats.org/drawingml/2006/main" w="0">
-            <a:noFill/>
-            <a:prstDash val="solid"/>
-          </a:ln>
-        </p:spPr>
-        <p:txBody>
-          <a:bodyPr xmlns:a="http://schemas.openxmlformats.org/drawingml/2006/main" wrap="square" lIns="0" tIns="0" rIns="0" bIns="0" anchor="t">
+              <a:t>EXIT EVIDENCE</a:t>
+            </a:r>
+          </a:p>
+        </p:txBody>
+      </p:sp>
+      <p:sp>
+        <p:nvSpPr>
+          <p:cNvPr id="77" name="apigee-phase-exit-A1">
+            <a:extLst xmlns:a="http://schemas.openxmlformats.org/drawingml/2006/main">
+              <a:ext uri="{FF2B5EF4-FFF2-40B4-BE49-F238E27FC236}">
+                <a16:creationId xmlns:a16="http://schemas.microsoft.com/office/drawing/2014/main" id="{04116DC8-BF33-4A52-8B66-789775BB4AB4}"/>
+              </a:ext>
+            </a:extLst>
+          </p:cNvPr>
+          <p:cNvSpPr>
+            <a:spLocks xmlns:a="http://schemas.openxmlformats.org/drawingml/2006/main" noGrp="1"/>
+          </p:cNvSpPr>
+          <p:nvPr/>
+        </p:nvSpPr>
+        <p:spPr>
+          <a:xfrm xmlns:a="http://schemas.openxmlformats.org/drawingml/2006/main">
+            <a:off x="2286000" y="3810000"/>
+            <a:ext cx="1295400" cy="990600"/>
+          </a:xfrm>
+          <a:prstGeom xmlns:a="http://schemas.openxmlformats.org/drawingml/2006/main" prst="rect">
+            <a:avLst/>
+          </a:prstGeom>
+          <a:noFill xmlns:a="http://schemas.openxmlformats.org/drawingml/2006/main"/>
+          <a:ln xmlns:a="http://schemas.openxmlformats.org/drawingml/2006/main" w="0">
+            <a:solidFill>
+              <a:srgbClr val="FFFCF5"/>
+            </a:solidFill>
+            <a:prstDash val="solid"/>
+          </a:ln>
+        </p:spPr>
+        <p:txBody>
+          <a:bodyPr xmlns:a="http://schemas.openxmlformats.org/drawingml/2006/main" lIns="28575" tIns="19050" rIns="28575" bIns="19050" anchor="t">
             <a:normAutofit fontScale="100000"/>
           </a:bodyPr>
           <a:lstStyle xmlns:a="http://schemas.openxmlformats.org/drawingml/2006/main"/>
           <a:p xmlns:a="http://schemas.openxmlformats.org/drawingml/2006/main">
             <a:pPr algn="l">
-              <a:buNone/>
-              <a:defRPr sz="1725" b="0" i="0">
+              <a:lnSpc>
+                <a:spcPct val="100000"/>
+              </a:lnSpc>
+              <a:buNone/>
+              <a:defRPr sz="1200" b="0">
+                <a:solidFill>
+                  <a:srgbClr val="686A66"/>
+                </a:solidFill>
+                <a:latin typeface="Arial"/>
+                <a:ea typeface="Arial"/>
+                <a:cs typeface="Arial"/>
+              </a:defRPr>
+            </a:pPr>
+            <a:r>
+              <a:rPr sz="1200" b="0">
+                <a:solidFill>
+                  <a:srgbClr val="686A66"/>
+                </a:solidFill>
+                <a:latin typeface="Arial"/>
+                <a:ea typeface="Arial"/>
+                <a:cs typeface="Arial"/>
+              </a:rPr>
+              <a:t>Approved disposition, precedence and state authority</a:t>
+            </a:r>
+          </a:p>
+        </p:txBody>
+      </p:sp>
+      <p:sp>
+        <p:nvSpPr>
+          <p:cNvPr id="78" name="apigee-phase-A2">
+            <a:extLst xmlns:a="http://schemas.openxmlformats.org/drawingml/2006/main">
+              <a:ext uri="{FF2B5EF4-FFF2-40B4-BE49-F238E27FC236}">
+                <a16:creationId xmlns:a16="http://schemas.microsoft.com/office/drawing/2014/main" id="{A6B40ED8-9590-4917-86DE-7973BC14106B}"/>
+              </a:ext>
+            </a:extLst>
+          </p:cNvPr>
+          <p:cNvSpPr>
+            <a:spLocks xmlns:a="http://schemas.openxmlformats.org/drawingml/2006/main" noGrp="1"/>
+          </p:cNvSpPr>
+          <p:nvPr/>
+        </p:nvSpPr>
+        <p:spPr>
+          <a:xfrm xmlns:a="http://schemas.openxmlformats.org/drawingml/2006/main">
+            <a:off x="3771900" y="2609850"/>
+            <a:ext cx="1485900" cy="2381250"/>
+          </a:xfrm>
+          <a:prstGeom xmlns:a="http://schemas.openxmlformats.org/drawingml/2006/main" prst="roundRect">
+            <a:avLst>
+              <a:gd name="adj" fmla="val 5128"/>
+            </a:avLst>
+          </a:prstGeom>
+          <a:solidFill xmlns:a="http://schemas.openxmlformats.org/drawingml/2006/main">
+            <a:srgbClr val="FFFFFF"/>
+          </a:solidFill>
+          <a:ln xmlns:a="http://schemas.openxmlformats.org/drawingml/2006/main" w="14288">
+            <a:solidFill>
+              <a:srgbClr val="18765A"/>
+            </a:solidFill>
+            <a:prstDash val="solid"/>
+          </a:ln>
+        </p:spPr>
+      </p:sp>
+      <p:sp>
+        <p:nvSpPr>
+          <p:cNvPr id="79" name="apigee-phase-code-A2">
+            <a:extLst xmlns:a="http://schemas.openxmlformats.org/drawingml/2006/main">
+              <a:ext uri="{FF2B5EF4-FFF2-40B4-BE49-F238E27FC236}">
+                <a16:creationId xmlns:a16="http://schemas.microsoft.com/office/drawing/2014/main" id="{FA3A13AE-BF99-4E3F-9A24-3E9F51AAA38B}"/>
+              </a:ext>
+            </a:extLst>
+          </p:cNvPr>
+          <p:cNvSpPr>
+            <a:spLocks xmlns:a="http://schemas.openxmlformats.org/drawingml/2006/main" noGrp="1"/>
+          </p:cNvSpPr>
+          <p:nvPr/>
+        </p:nvSpPr>
+        <p:spPr>
+          <a:xfrm xmlns:a="http://schemas.openxmlformats.org/drawingml/2006/main">
+            <a:off x="3867150" y="2705100"/>
+            <a:ext cx="495300" cy="228600"/>
+          </a:xfrm>
+          <a:prstGeom xmlns:a="http://schemas.openxmlformats.org/drawingml/2006/main" prst="rect">
+            <a:avLst/>
+          </a:prstGeom>
+          <a:noFill xmlns:a="http://schemas.openxmlformats.org/drawingml/2006/main"/>
+          <a:ln xmlns:a="http://schemas.openxmlformats.org/drawingml/2006/main" w="0">
+            <a:solidFill>
+              <a:srgbClr val="FFFCF5"/>
+            </a:solidFill>
+            <a:prstDash val="solid"/>
+          </a:ln>
+        </p:spPr>
+        <p:txBody>
+          <a:bodyPr xmlns:a="http://schemas.openxmlformats.org/drawingml/2006/main" lIns="28575" tIns="19050" rIns="28575" bIns="19050" anchor="ctr">
+            <a:normAutofit fontScale="92593"/>
+          </a:bodyPr>
+          <a:lstStyle xmlns:a="http://schemas.openxmlformats.org/drawingml/2006/main"/>
+          <a:p xmlns:a="http://schemas.openxmlformats.org/drawingml/2006/main">
+            <a:pPr algn="l">
+              <a:lnSpc>
+                <a:spcPct val="100000"/>
+              </a:lnSpc>
+              <a:buNone/>
+              <a:defRPr sz="1350" b="1">
+                <a:solidFill>
+                  <a:srgbClr val="5537D6"/>
+                </a:solidFill>
+                <a:latin typeface="Consolas"/>
+                <a:ea typeface="Consolas"/>
+                <a:cs typeface="Consolas"/>
+              </a:defRPr>
+            </a:pPr>
+            <a:r>
+              <a:rPr sz="1350" b="1">
+                <a:solidFill>
+                  <a:srgbClr val="5537D6"/>
+                </a:solidFill>
+                <a:latin typeface="Consolas"/>
+                <a:ea typeface="Consolas"/>
+                <a:cs typeface="Consolas"/>
+              </a:rPr>
+              <a:t>A2</a:t>
+            </a:r>
+          </a:p>
+        </p:txBody>
+      </p:sp>
+      <p:sp>
+        <p:nvSpPr>
+          <p:cNvPr id="80" name="apigee-phase-label-A2">
+            <a:extLst xmlns:a="http://schemas.openxmlformats.org/drawingml/2006/main">
+              <a:ext uri="{FF2B5EF4-FFF2-40B4-BE49-F238E27FC236}">
+                <a16:creationId xmlns:a16="http://schemas.microsoft.com/office/drawing/2014/main" id="{081AB4C2-CB0C-4FE3-96C1-BEDD8589AF34}"/>
+              </a:ext>
+            </a:extLst>
+          </p:cNvPr>
+          <p:cNvSpPr>
+            <a:spLocks xmlns:a="http://schemas.openxmlformats.org/drawingml/2006/main" noGrp="1"/>
+          </p:cNvSpPr>
+          <p:nvPr/>
+        </p:nvSpPr>
+        <p:spPr>
+          <a:xfrm xmlns:a="http://schemas.openxmlformats.org/drawingml/2006/main">
+            <a:off x="3867150" y="2952750"/>
+            <a:ext cx="1295400" cy="457200"/>
+          </a:xfrm>
+          <a:prstGeom xmlns:a="http://schemas.openxmlformats.org/drawingml/2006/main" prst="rect">
+            <a:avLst/>
+          </a:prstGeom>
+          <a:noFill xmlns:a="http://schemas.openxmlformats.org/drawingml/2006/main"/>
+          <a:ln xmlns:a="http://schemas.openxmlformats.org/drawingml/2006/main" w="0">
+            <a:solidFill>
+              <a:srgbClr val="FFFCF5"/>
+            </a:solidFill>
+            <a:prstDash val="solid"/>
+          </a:ln>
+        </p:spPr>
+        <p:txBody>
+          <a:bodyPr xmlns:a="http://schemas.openxmlformats.org/drawingml/2006/main" lIns="28575" tIns="19050" rIns="28575" bIns="19050" anchor="t">
+            <a:normAutofit fontScale="87302"/>
+          </a:bodyPr>
+          <a:lstStyle xmlns:a="http://schemas.openxmlformats.org/drawingml/2006/main"/>
+          <a:p xmlns:a="http://schemas.openxmlformats.org/drawingml/2006/main">
+            <a:pPr algn="l">
+              <a:lnSpc>
+                <a:spcPct val="100000"/>
+              </a:lnSpc>
+              <a:buNone/>
+              <a:defRPr sz="1575" b="1">
                 <a:solidFill>
                   <a:srgbClr val="111111"/>
                 </a:solidFill>
@@ -17432,7 +18008,7 @@
               </a:defRPr>
             </a:pPr>
             <a:r>
-              <a:rPr sz="1725" b="0" i="0">
+              <a:rPr sz="1575" b="1">
                 <a:solidFill>
                   <a:srgbClr val="111111"/>
                 </a:solidFill>
@@ -17440,13 +18016,311 @@
                 <a:ea typeface="Georgia"/>
                 <a:cs typeface="Georgia"/>
               </a:rPr>
-              <a:t>Classify</a:t>
-            </a:r>
-          </a:p>
+              <a:t>Reversible target</a:t>
+            </a:r>
+          </a:p>
+        </p:txBody>
+      </p:sp>
+      <p:sp>
+        <p:nvSpPr>
+          <p:cNvPr id="81" name="apigee-phase-rule-A2">
+            <a:extLst xmlns:a="http://schemas.openxmlformats.org/drawingml/2006/main">
+              <a:ext uri="{FF2B5EF4-FFF2-40B4-BE49-F238E27FC236}">
+                <a16:creationId xmlns:a16="http://schemas.microsoft.com/office/drawing/2014/main" id="{DA59D1DF-32E6-49A1-AB24-ADFDEC3E896E}"/>
+              </a:ext>
+            </a:extLst>
+          </p:cNvPr>
+          <p:cNvSpPr>
+            <a:spLocks xmlns:a="http://schemas.openxmlformats.org/drawingml/2006/main" noGrp="1"/>
+          </p:cNvSpPr>
+          <p:nvPr/>
+        </p:nvSpPr>
+        <p:spPr>
+          <a:xfrm xmlns:a="http://schemas.openxmlformats.org/drawingml/2006/main">
+            <a:off x="3867150" y="3486150"/>
+            <a:ext cx="1295400" cy="0"/>
+          </a:xfrm>
+          <a:prstGeom xmlns:a="http://schemas.openxmlformats.org/drawingml/2006/main" prst="line">
+            <a:avLst/>
+          </a:prstGeom>
+          <a:noFill xmlns:a="http://schemas.openxmlformats.org/drawingml/2006/main"/>
+          <a:ln xmlns:a="http://schemas.openxmlformats.org/drawingml/2006/main" w="9525">
+            <a:solidFill>
+              <a:srgbClr val="C9C6BD"/>
+            </a:solidFill>
+            <a:prstDash val="solid"/>
+          </a:ln>
+        </p:spPr>
+      </p:sp>
+      <p:sp>
+        <p:nvSpPr>
+          <p:cNvPr id="82" name="apigee-phase-exit-label-A2">
+            <a:extLst xmlns:a="http://schemas.openxmlformats.org/drawingml/2006/main">
+              <a:ext uri="{FF2B5EF4-FFF2-40B4-BE49-F238E27FC236}">
+                <a16:creationId xmlns:a16="http://schemas.microsoft.com/office/drawing/2014/main" id="{0584597A-5A55-4920-A3DF-90DB1CFBC632}"/>
+              </a:ext>
+            </a:extLst>
+          </p:cNvPr>
+          <p:cNvSpPr>
+            <a:spLocks xmlns:a="http://schemas.openxmlformats.org/drawingml/2006/main" noGrp="1"/>
+          </p:cNvSpPr>
+          <p:nvPr/>
+        </p:nvSpPr>
+        <p:spPr>
+          <a:xfrm xmlns:a="http://schemas.openxmlformats.org/drawingml/2006/main">
+            <a:off x="3867150" y="3581400"/>
+            <a:ext cx="1295400" cy="171450"/>
+          </a:xfrm>
+          <a:prstGeom xmlns:a="http://schemas.openxmlformats.org/drawingml/2006/main" prst="rect">
+            <a:avLst/>
+          </a:prstGeom>
+          <a:noFill xmlns:a="http://schemas.openxmlformats.org/drawingml/2006/main"/>
+          <a:ln xmlns:a="http://schemas.openxmlformats.org/drawingml/2006/main" w="0">
+            <a:solidFill>
+              <a:srgbClr val="FFFCF5"/>
+            </a:solidFill>
+            <a:prstDash val="solid"/>
+          </a:ln>
+        </p:spPr>
+        <p:txBody>
+          <a:bodyPr xmlns:a="http://schemas.openxmlformats.org/drawingml/2006/main" lIns="28575" tIns="19050" rIns="28575" bIns="19050" anchor="ctr">
+            <a:normAutofit fontScale="89744"/>
+          </a:bodyPr>
+          <a:lstStyle xmlns:a="http://schemas.openxmlformats.org/drawingml/2006/main"/>
           <a:p xmlns:a="http://schemas.openxmlformats.org/drawingml/2006/main">
             <a:pPr algn="l">
-              <a:buNone/>
-              <a:defRPr sz="1725" b="0" i="0">
+              <a:lnSpc>
+                <a:spcPct val="100000"/>
+              </a:lnSpc>
+              <a:buNone/>
+              <a:defRPr sz="975" b="1">
+                <a:solidFill>
+                  <a:srgbClr val="5537D6"/>
+                </a:solidFill>
+                <a:latin typeface="Consolas"/>
+                <a:ea typeface="Consolas"/>
+                <a:cs typeface="Consolas"/>
+              </a:defRPr>
+            </a:pPr>
+            <a:r>
+              <a:rPr sz="975" b="1">
+                <a:solidFill>
+                  <a:srgbClr val="5537D6"/>
+                </a:solidFill>
+                <a:latin typeface="Consolas"/>
+                <a:ea typeface="Consolas"/>
+                <a:cs typeface="Consolas"/>
+              </a:rPr>
+              <a:t>EXIT EVIDENCE</a:t>
+            </a:r>
+          </a:p>
+        </p:txBody>
+      </p:sp>
+      <p:sp>
+        <p:nvSpPr>
+          <p:cNvPr id="83" name="apigee-phase-exit-A2">
+            <a:extLst xmlns:a="http://schemas.openxmlformats.org/drawingml/2006/main">
+              <a:ext uri="{FF2B5EF4-FFF2-40B4-BE49-F238E27FC236}">
+                <a16:creationId xmlns:a16="http://schemas.microsoft.com/office/drawing/2014/main" id="{C33121B9-5258-4BDB-AC83-72B584B74A12}"/>
+              </a:ext>
+            </a:extLst>
+          </p:cNvPr>
+          <p:cNvSpPr>
+            <a:spLocks xmlns:a="http://schemas.openxmlformats.org/drawingml/2006/main" noGrp="1"/>
+          </p:cNvSpPr>
+          <p:nvPr/>
+        </p:nvSpPr>
+        <p:spPr>
+          <a:xfrm xmlns:a="http://schemas.openxmlformats.org/drawingml/2006/main">
+            <a:off x="3867150" y="3810000"/>
+            <a:ext cx="1295400" cy="990600"/>
+          </a:xfrm>
+          <a:prstGeom xmlns:a="http://schemas.openxmlformats.org/drawingml/2006/main" prst="rect">
+            <a:avLst/>
+          </a:prstGeom>
+          <a:noFill xmlns:a="http://schemas.openxmlformats.org/drawingml/2006/main"/>
+          <a:ln xmlns:a="http://schemas.openxmlformats.org/drawingml/2006/main" w="0">
+            <a:solidFill>
+              <a:srgbClr val="FFFCF5"/>
+            </a:solidFill>
+            <a:prstDash val="solid"/>
+          </a:ln>
+        </p:spPr>
+        <p:txBody>
+          <a:bodyPr xmlns:a="http://schemas.openxmlformats.org/drawingml/2006/main" lIns="28575" tIns="19050" rIns="28575" bIns="19050" anchor="t">
+            <a:normAutofit fontScale="100000"/>
+          </a:bodyPr>
+          <a:lstStyle xmlns:a="http://schemas.openxmlformats.org/drawingml/2006/main"/>
+          <a:p xmlns:a="http://schemas.openxmlformats.org/drawingml/2006/main">
+            <a:pPr algn="l">
+              <a:lnSpc>
+                <a:spcPct val="100000"/>
+              </a:lnSpc>
+              <a:buNone/>
+              <a:defRPr sz="1200" b="0">
+                <a:solidFill>
+                  <a:srgbClr val="686A66"/>
+                </a:solidFill>
+                <a:latin typeface="Arial"/>
+                <a:ea typeface="Arial"/>
+                <a:cs typeface="Arial"/>
+              </a:defRPr>
+            </a:pPr>
+            <a:r>
+              <a:rPr sz="1200" b="0">
+                <a:solidFill>
+                  <a:srgbClr val="686A66"/>
+                </a:solidFill>
+                <a:latin typeface="Arial"/>
+                <a:ea typeface="Arial"/>
+                <a:cs typeface="Arial"/>
+              </a:rPr>
+              <a:t>Terraform + decK, restore result and route-back design</a:t>
+            </a:r>
+          </a:p>
+        </p:txBody>
+      </p:sp>
+      <p:sp>
+        <p:nvSpPr>
+          <p:cNvPr id="84" name="apigee-phase-A3">
+            <a:extLst xmlns:a="http://schemas.openxmlformats.org/drawingml/2006/main">
+              <a:ext uri="{FF2B5EF4-FFF2-40B4-BE49-F238E27FC236}">
+                <a16:creationId xmlns:a16="http://schemas.microsoft.com/office/drawing/2014/main" id="{F0F17690-DD39-4DB6-941A-42ED1D4406FD}"/>
+              </a:ext>
+            </a:extLst>
+          </p:cNvPr>
+          <p:cNvSpPr>
+            <a:spLocks xmlns:a="http://schemas.openxmlformats.org/drawingml/2006/main" noGrp="1"/>
+          </p:cNvSpPr>
+          <p:nvPr/>
+        </p:nvSpPr>
+        <p:spPr>
+          <a:xfrm xmlns:a="http://schemas.openxmlformats.org/drawingml/2006/main">
+            <a:off x="5353050" y="2609850"/>
+            <a:ext cx="1485900" cy="2381250"/>
+          </a:xfrm>
+          <a:prstGeom xmlns:a="http://schemas.openxmlformats.org/drawingml/2006/main" prst="roundRect">
+            <a:avLst>
+              <a:gd name="adj" fmla="val 5128"/>
+            </a:avLst>
+          </a:prstGeom>
+          <a:solidFill xmlns:a="http://schemas.openxmlformats.org/drawingml/2006/main">
+            <a:srgbClr val="FFFFFF"/>
+          </a:solidFill>
+          <a:ln xmlns:a="http://schemas.openxmlformats.org/drawingml/2006/main" w="14288">
+            <a:solidFill>
+              <a:srgbClr val="18765A"/>
+            </a:solidFill>
+            <a:prstDash val="solid"/>
+          </a:ln>
+        </p:spPr>
+      </p:sp>
+      <p:sp>
+        <p:nvSpPr>
+          <p:cNvPr id="85" name="apigee-phase-code-A3">
+            <a:extLst xmlns:a="http://schemas.openxmlformats.org/drawingml/2006/main">
+              <a:ext uri="{FF2B5EF4-FFF2-40B4-BE49-F238E27FC236}">
+                <a16:creationId xmlns:a16="http://schemas.microsoft.com/office/drawing/2014/main" id="{41205086-12AD-4556-ABCA-5434EC2CCADF}"/>
+              </a:ext>
+            </a:extLst>
+          </p:cNvPr>
+          <p:cNvSpPr>
+            <a:spLocks xmlns:a="http://schemas.openxmlformats.org/drawingml/2006/main" noGrp="1"/>
+          </p:cNvSpPr>
+          <p:nvPr/>
+        </p:nvSpPr>
+        <p:spPr>
+          <a:xfrm xmlns:a="http://schemas.openxmlformats.org/drawingml/2006/main">
+            <a:off x="5448300" y="2705100"/>
+            <a:ext cx="495300" cy="228600"/>
+          </a:xfrm>
+          <a:prstGeom xmlns:a="http://schemas.openxmlformats.org/drawingml/2006/main" prst="rect">
+            <a:avLst/>
+          </a:prstGeom>
+          <a:noFill xmlns:a="http://schemas.openxmlformats.org/drawingml/2006/main"/>
+          <a:ln xmlns:a="http://schemas.openxmlformats.org/drawingml/2006/main" w="0">
+            <a:solidFill>
+              <a:srgbClr val="FFFCF5"/>
+            </a:solidFill>
+            <a:prstDash val="solid"/>
+          </a:ln>
+        </p:spPr>
+        <p:txBody>
+          <a:bodyPr xmlns:a="http://schemas.openxmlformats.org/drawingml/2006/main" lIns="28575" tIns="19050" rIns="28575" bIns="19050" anchor="ctr">
+            <a:normAutofit fontScale="92593"/>
+          </a:bodyPr>
+          <a:lstStyle xmlns:a="http://schemas.openxmlformats.org/drawingml/2006/main"/>
+          <a:p xmlns:a="http://schemas.openxmlformats.org/drawingml/2006/main">
+            <a:pPr algn="l">
+              <a:lnSpc>
+                <a:spcPct val="100000"/>
+              </a:lnSpc>
+              <a:buNone/>
+              <a:defRPr sz="1350" b="1">
+                <a:solidFill>
+                  <a:srgbClr val="5537D6"/>
+                </a:solidFill>
+                <a:latin typeface="Consolas"/>
+                <a:ea typeface="Consolas"/>
+                <a:cs typeface="Consolas"/>
+              </a:defRPr>
+            </a:pPr>
+            <a:r>
+              <a:rPr sz="1350" b="1">
+                <a:solidFill>
+                  <a:srgbClr val="5537D6"/>
+                </a:solidFill>
+                <a:latin typeface="Consolas"/>
+                <a:ea typeface="Consolas"/>
+                <a:cs typeface="Consolas"/>
+              </a:rPr>
+              <a:t>A3</a:t>
+            </a:r>
+          </a:p>
+        </p:txBody>
+      </p:sp>
+      <p:sp>
+        <p:nvSpPr>
+          <p:cNvPr id="86" name="apigee-phase-label-A3">
+            <a:extLst xmlns:a="http://schemas.openxmlformats.org/drawingml/2006/main">
+              <a:ext uri="{FF2B5EF4-FFF2-40B4-BE49-F238E27FC236}">
+                <a16:creationId xmlns:a16="http://schemas.microsoft.com/office/drawing/2014/main" id="{61306933-1AA5-4F56-AF6D-D29BD6B262B7}"/>
+              </a:ext>
+            </a:extLst>
+          </p:cNvPr>
+          <p:cNvSpPr>
+            <a:spLocks xmlns:a="http://schemas.openxmlformats.org/drawingml/2006/main" noGrp="1"/>
+          </p:cNvSpPr>
+          <p:nvPr/>
+        </p:nvSpPr>
+        <p:spPr>
+          <a:xfrm xmlns:a="http://schemas.openxmlformats.org/drawingml/2006/main">
+            <a:off x="5448300" y="2952750"/>
+            <a:ext cx="1295400" cy="457200"/>
+          </a:xfrm>
+          <a:prstGeom xmlns:a="http://schemas.openxmlformats.org/drawingml/2006/main" prst="rect">
+            <a:avLst/>
+          </a:prstGeom>
+          <a:noFill xmlns:a="http://schemas.openxmlformats.org/drawingml/2006/main"/>
+          <a:ln xmlns:a="http://schemas.openxmlformats.org/drawingml/2006/main" w="0">
+            <a:solidFill>
+              <a:srgbClr val="FFFCF5"/>
+            </a:solidFill>
+            <a:prstDash val="solid"/>
+          </a:ln>
+        </p:spPr>
+        <p:txBody>
+          <a:bodyPr xmlns:a="http://schemas.openxmlformats.org/drawingml/2006/main" lIns="28575" tIns="19050" rIns="28575" bIns="19050" anchor="t">
+            <a:normAutofit fontScale="87302"/>
+          </a:bodyPr>
+          <a:lstStyle xmlns:a="http://schemas.openxmlformats.org/drawingml/2006/main"/>
+          <a:p xmlns:a="http://schemas.openxmlformats.org/drawingml/2006/main">
+            <a:pPr algn="l">
+              <a:lnSpc>
+                <a:spcPct val="100000"/>
+              </a:lnSpc>
+              <a:buNone/>
+              <a:defRPr sz="1575" b="1">
                 <a:solidFill>
                   <a:srgbClr val="111111"/>
                 </a:solidFill>
@@ -17456,7 +18330,7 @@
               </a:defRPr>
             </a:pPr>
             <a:r>
-              <a:rPr sz="1725" b="0" i="0">
+              <a:rPr sz="1575" b="1">
                 <a:solidFill>
                   <a:srgbClr val="111111"/>
                 </a:solidFill>
@@ -17464,81 +18338,86 @@
                 <a:ea typeface="Georgia"/>
                 <a:cs typeface="Georgia"/>
               </a:rPr>
-              <a:t>semantics</a:t>
-            </a:r>
-          </a:p>
-        </p:txBody>
-      </p:sp>
-      <p:sp>
-        <p:nvSpPr>
-          <p:cNvPr id="19" name="">
-            <a:extLst xmlns:a="http://schemas.openxmlformats.org/drawingml/2006/main">
-              <a:ext uri="{FF2B5EF4-FFF2-40B4-BE49-F238E27FC236}">
-                <a16:creationId xmlns:a16="http://schemas.microsoft.com/office/drawing/2014/main" id="{49F522DA-2438-4BCC-B5C1-497E911B5893}"/>
-              </a:ext>
-            </a:extLst>
-          </p:cNvPr>
-          <p:cNvSpPr>
-            <a:spLocks xmlns:a="http://schemas.openxmlformats.org/drawingml/2006/main" noGrp="1"/>
-          </p:cNvSpPr>
-          <p:nvPr/>
-        </p:nvSpPr>
-        <p:spPr>
-          <a:xfrm xmlns:a="http://schemas.openxmlformats.org/drawingml/2006/main">
-            <a:off x="2495550" y="3324225"/>
-            <a:ext cx="1562100" cy="19050"/>
-          </a:xfrm>
-          <a:prstGeom xmlns:a="http://schemas.openxmlformats.org/drawingml/2006/main" prst="rect">
-            <a:avLst/>
-          </a:prstGeom>
-          <a:solidFill xmlns:a="http://schemas.openxmlformats.org/drawingml/2006/main">
-            <a:srgbClr val="8A8B86"/>
-          </a:solidFill>
-          <a:ln xmlns:a="http://schemas.openxmlformats.org/drawingml/2006/main" w="0">
-            <a:noFill/>
-            <a:prstDash val="solid"/>
-          </a:ln>
-        </p:spPr>
-      </p:sp>
-      <p:sp>
-        <p:nvSpPr>
-          <p:cNvPr id="20" name="">
-            <a:extLst xmlns:a="http://schemas.openxmlformats.org/drawingml/2006/main">
-              <a:ext uri="{FF2B5EF4-FFF2-40B4-BE49-F238E27FC236}">
-                <a16:creationId xmlns:a16="http://schemas.microsoft.com/office/drawing/2014/main" id="{5A04C397-9092-48FD-AD6F-9535C3EFE6C9}"/>
-              </a:ext>
-            </a:extLst>
-          </p:cNvPr>
-          <p:cNvSpPr>
-            <a:spLocks xmlns:a="http://schemas.openxmlformats.org/drawingml/2006/main" noGrp="1"/>
-          </p:cNvSpPr>
-          <p:nvPr/>
-        </p:nvSpPr>
-        <p:spPr>
-          <a:xfrm xmlns:a="http://schemas.openxmlformats.org/drawingml/2006/main">
-            <a:off x="2495550" y="3533775"/>
-            <a:ext cx="1562100" cy="171450"/>
-          </a:xfrm>
-          <a:prstGeom xmlns:a="http://schemas.openxmlformats.org/drawingml/2006/main" prst="rect">
-            <a:avLst/>
-          </a:prstGeom>
-          <a:noFill xmlns:a="http://schemas.openxmlformats.org/drawingml/2006/main"/>
-          <a:ln xmlns:a="http://schemas.openxmlformats.org/drawingml/2006/main" w="0">
-            <a:noFill/>
-            <a:prstDash val="solid"/>
-          </a:ln>
-        </p:spPr>
-        <p:txBody>
-          <a:bodyPr xmlns:a="http://schemas.openxmlformats.org/drawingml/2006/main" wrap="square" lIns="0" tIns="0" rIns="0" bIns="0" anchor="t">
-            <a:normAutofit fontScale="100000"/>
+              <a:t>Hard-slice parity</a:t>
+            </a:r>
+          </a:p>
+        </p:txBody>
+      </p:sp>
+      <p:sp>
+        <p:nvSpPr>
+          <p:cNvPr id="87" name="apigee-phase-rule-A3">
+            <a:extLst xmlns:a="http://schemas.openxmlformats.org/drawingml/2006/main">
+              <a:ext uri="{FF2B5EF4-FFF2-40B4-BE49-F238E27FC236}">
+                <a16:creationId xmlns:a16="http://schemas.microsoft.com/office/drawing/2014/main" id="{BF6090D7-045B-40AE-80CC-43446AA0101F}"/>
+              </a:ext>
+            </a:extLst>
+          </p:cNvPr>
+          <p:cNvSpPr>
+            <a:spLocks xmlns:a="http://schemas.openxmlformats.org/drawingml/2006/main" noGrp="1"/>
+          </p:cNvSpPr>
+          <p:nvPr/>
+        </p:nvSpPr>
+        <p:spPr>
+          <a:xfrm xmlns:a="http://schemas.openxmlformats.org/drawingml/2006/main">
+            <a:off x="5448300" y="3486150"/>
+            <a:ext cx="1295400" cy="0"/>
+          </a:xfrm>
+          <a:prstGeom xmlns:a="http://schemas.openxmlformats.org/drawingml/2006/main" prst="line">
+            <a:avLst/>
+          </a:prstGeom>
+          <a:noFill xmlns:a="http://schemas.openxmlformats.org/drawingml/2006/main"/>
+          <a:ln xmlns:a="http://schemas.openxmlformats.org/drawingml/2006/main" w="9525">
+            <a:solidFill>
+              <a:srgbClr val="C9C6BD"/>
+            </a:solidFill>
+            <a:prstDash val="solid"/>
+          </a:ln>
+        </p:spPr>
+      </p:sp>
+      <p:sp>
+        <p:nvSpPr>
+          <p:cNvPr id="88" name="apigee-phase-exit-label-A3">
+            <a:extLst xmlns:a="http://schemas.openxmlformats.org/drawingml/2006/main">
+              <a:ext uri="{FF2B5EF4-FFF2-40B4-BE49-F238E27FC236}">
+                <a16:creationId xmlns:a16="http://schemas.microsoft.com/office/drawing/2014/main" id="{9781371F-A8F6-42AB-A61F-A2523C292127}"/>
+              </a:ext>
+            </a:extLst>
+          </p:cNvPr>
+          <p:cNvSpPr>
+            <a:spLocks xmlns:a="http://schemas.openxmlformats.org/drawingml/2006/main" noGrp="1"/>
+          </p:cNvSpPr>
+          <p:nvPr/>
+        </p:nvSpPr>
+        <p:spPr>
+          <a:xfrm xmlns:a="http://schemas.openxmlformats.org/drawingml/2006/main">
+            <a:off x="5448300" y="3581400"/>
+            <a:ext cx="1295400" cy="171450"/>
+          </a:xfrm>
+          <a:prstGeom xmlns:a="http://schemas.openxmlformats.org/drawingml/2006/main" prst="rect">
+            <a:avLst/>
+          </a:prstGeom>
+          <a:noFill xmlns:a="http://schemas.openxmlformats.org/drawingml/2006/main"/>
+          <a:ln xmlns:a="http://schemas.openxmlformats.org/drawingml/2006/main" w="0">
+            <a:solidFill>
+              <a:srgbClr val="FFFCF5"/>
+            </a:solidFill>
+            <a:prstDash val="solid"/>
+          </a:ln>
+        </p:spPr>
+        <p:txBody>
+          <a:bodyPr xmlns:a="http://schemas.openxmlformats.org/drawingml/2006/main" lIns="28575" tIns="19050" rIns="28575" bIns="19050" anchor="ctr">
+            <a:normAutofit fontScale="89744"/>
           </a:bodyPr>
           <a:lstStyle xmlns:a="http://schemas.openxmlformats.org/drawingml/2006/main"/>
           <a:p xmlns:a="http://schemas.openxmlformats.org/drawingml/2006/main">
             <a:pPr algn="l">
-              <a:buNone/>
-              <a:defRPr sz="900" b="1" i="0">
-                <a:solidFill>
-                  <a:srgbClr val="686A66"/>
+              <a:lnSpc>
+                <a:spcPct val="100000"/>
+              </a:lnSpc>
+              <a:buNone/>
+              <a:defRPr sz="975" b="1">
+                <a:solidFill>
+                  <a:srgbClr val="5537D6"/>
                 </a:solidFill>
                 <a:latin typeface="Consolas"/>
                 <a:ea typeface="Consolas"/>
@@ -17546,115 +18425,160 @@
               </a:defRPr>
             </a:pPr>
             <a:r>
-              <a:rPr sz="900" b="1" i="0">
-                <a:solidFill>
-                  <a:srgbClr val="686A66"/>
+              <a:rPr sz="975" b="1">
+                <a:solidFill>
+                  <a:srgbClr val="5537D6"/>
                 </a:solidFill>
                 <a:latin typeface="Consolas"/>
                 <a:ea typeface="Consolas"/>
                 <a:cs typeface="Consolas"/>
               </a:rPr>
-              <a:t>ENTRY</a:t>
-            </a:r>
-          </a:p>
-        </p:txBody>
-      </p:sp>
-      <p:sp>
-        <p:nvSpPr>
-          <p:cNvPr id="21" name="">
-            <a:extLst xmlns:a="http://schemas.openxmlformats.org/drawingml/2006/main">
-              <a:ext uri="{FF2B5EF4-FFF2-40B4-BE49-F238E27FC236}">
-                <a16:creationId xmlns:a16="http://schemas.microsoft.com/office/drawing/2014/main" id="{56B9179B-763C-45D0-96AF-4002D8DB4C4E}"/>
-              </a:ext>
-            </a:extLst>
-          </p:cNvPr>
-          <p:cNvSpPr>
-            <a:spLocks xmlns:a="http://schemas.openxmlformats.org/drawingml/2006/main" noGrp="1"/>
-          </p:cNvSpPr>
-          <p:nvPr/>
-        </p:nvSpPr>
-        <p:spPr>
-          <a:xfrm xmlns:a="http://schemas.openxmlformats.org/drawingml/2006/main">
-            <a:off x="2495550" y="3781425"/>
-            <a:ext cx="1562100" cy="628650"/>
-          </a:xfrm>
-          <a:prstGeom xmlns:a="http://schemas.openxmlformats.org/drawingml/2006/main" prst="rect">
-            <a:avLst/>
-          </a:prstGeom>
-          <a:noFill xmlns:a="http://schemas.openxmlformats.org/drawingml/2006/main"/>
-          <a:ln xmlns:a="http://schemas.openxmlformats.org/drawingml/2006/main" w="0">
-            <a:noFill/>
-            <a:prstDash val="solid"/>
-          </a:ln>
-        </p:spPr>
-        <p:txBody>
-          <a:bodyPr xmlns:a="http://schemas.openxmlformats.org/drawingml/2006/main" wrap="square" lIns="0" tIns="0" rIns="0" bIns="0" anchor="t">
-            <a:normAutofit fontScale="100000"/>
+              <a:t>EXIT EVIDENCE</a:t>
+            </a:r>
+          </a:p>
+        </p:txBody>
+      </p:sp>
+      <p:sp>
+        <p:nvSpPr>
+          <p:cNvPr id="89" name="apigee-phase-exit-A3">
+            <a:extLst xmlns:a="http://schemas.openxmlformats.org/drawingml/2006/main">
+              <a:ext uri="{FF2B5EF4-FFF2-40B4-BE49-F238E27FC236}">
+                <a16:creationId xmlns:a16="http://schemas.microsoft.com/office/drawing/2014/main" id="{924A96E0-98F8-4D20-AA2C-9EDB45CC6186}"/>
+              </a:ext>
+            </a:extLst>
+          </p:cNvPr>
+          <p:cNvSpPr>
+            <a:spLocks xmlns:a="http://schemas.openxmlformats.org/drawingml/2006/main" noGrp="1"/>
+          </p:cNvSpPr>
+          <p:nvPr/>
+        </p:nvSpPr>
+        <p:spPr>
+          <a:xfrm xmlns:a="http://schemas.openxmlformats.org/drawingml/2006/main">
+            <a:off x="5448300" y="3810000"/>
+            <a:ext cx="1295400" cy="990600"/>
+          </a:xfrm>
+          <a:prstGeom xmlns:a="http://schemas.openxmlformats.org/drawingml/2006/main" prst="rect">
+            <a:avLst/>
+          </a:prstGeom>
+          <a:noFill xmlns:a="http://schemas.openxmlformats.org/drawingml/2006/main"/>
+          <a:ln xmlns:a="http://schemas.openxmlformats.org/drawingml/2006/main" w="0">
+            <a:solidFill>
+              <a:srgbClr val="FFFCF5"/>
+            </a:solidFill>
+            <a:prstDash val="solid"/>
+          </a:ln>
+        </p:spPr>
+        <p:txBody>
+          <a:bodyPr xmlns:a="http://schemas.openxmlformats.org/drawingml/2006/main" lIns="28575" tIns="19050" rIns="28575" bIns="19050" anchor="t">
+            <a:normAutofit fontScale="92703"/>
           </a:bodyPr>
           <a:lstStyle xmlns:a="http://schemas.openxmlformats.org/drawingml/2006/main"/>
           <a:p xmlns:a="http://schemas.openxmlformats.org/drawingml/2006/main">
             <a:pPr algn="l">
-              <a:buNone/>
-              <a:defRPr sz="1200" b="0" i="0">
-                <a:solidFill>
-                  <a:srgbClr val="111111"/>
-                </a:solidFill>
-                <a:latin typeface="Arial"/>
-                <a:ea typeface="Arial"/>
-                <a:cs typeface="Arial"/>
-              </a:defRPr>
-            </a:pPr>
-            <a:r>
-              <a:rPr sz="1200" b="0" i="0">
-                <a:solidFill>
-                  <a:srgbClr val="111111"/>
-                </a:solidFill>
-                <a:latin typeface="Arial"/>
-                <a:ea typeface="Arial"/>
-                <a:cs typeface="Arial"/>
-              </a:rPr>
-              <a:t>policy + behavior map</a:t>
-            </a:r>
-          </a:p>
-        </p:txBody>
-      </p:sp>
-      <p:sp>
-        <p:nvSpPr>
-          <p:cNvPr id="22" name="">
-            <a:extLst xmlns:a="http://schemas.openxmlformats.org/drawingml/2006/main">
-              <a:ext uri="{FF2B5EF4-FFF2-40B4-BE49-F238E27FC236}">
-                <a16:creationId xmlns:a16="http://schemas.microsoft.com/office/drawing/2014/main" id="{4DF97B96-6411-4AAC-A906-410D2AB690F1}"/>
-              </a:ext>
-            </a:extLst>
-          </p:cNvPr>
-          <p:cNvSpPr>
-            <a:spLocks xmlns:a="http://schemas.openxmlformats.org/drawingml/2006/main" noGrp="1"/>
-          </p:cNvSpPr>
-          <p:nvPr/>
-        </p:nvSpPr>
-        <p:spPr>
-          <a:xfrm xmlns:a="http://schemas.openxmlformats.org/drawingml/2006/main">
-            <a:off x="2495550" y="4591050"/>
-            <a:ext cx="1562100" cy="171450"/>
-          </a:xfrm>
-          <a:prstGeom xmlns:a="http://schemas.openxmlformats.org/drawingml/2006/main" prst="rect">
-            <a:avLst/>
-          </a:prstGeom>
-          <a:noFill xmlns:a="http://schemas.openxmlformats.org/drawingml/2006/main"/>
-          <a:ln xmlns:a="http://schemas.openxmlformats.org/drawingml/2006/main" w="0">
-            <a:noFill/>
-            <a:prstDash val="solid"/>
-          </a:ln>
-        </p:spPr>
-        <p:txBody>
-          <a:bodyPr xmlns:a="http://schemas.openxmlformats.org/drawingml/2006/main" wrap="square" lIns="0" tIns="0" rIns="0" bIns="0" anchor="t">
-            <a:normAutofit fontScale="100000"/>
+              <a:lnSpc>
+                <a:spcPct val="100000"/>
+              </a:lnSpc>
+              <a:buNone/>
+              <a:defRPr sz="1200" b="0">
+                <a:solidFill>
+                  <a:srgbClr val="686A66"/>
+                </a:solidFill>
+                <a:latin typeface="Arial"/>
+                <a:ea typeface="Arial"/>
+                <a:cs typeface="Arial"/>
+              </a:defRPr>
+            </a:pPr>
+            <a:r>
+              <a:rPr sz="1200" b="0">
+                <a:solidFill>
+                  <a:srgbClr val="686A66"/>
+                </a:solidFill>
+                <a:latin typeface="Arial"/>
+                <a:ea typeface="Arial"/>
+                <a:cs typeface="Arial"/>
+              </a:rPr>
+              <a:t>No critical variance, unauthorized success or unexplained state gap</a:t>
+            </a:r>
+          </a:p>
+        </p:txBody>
+      </p:sp>
+      <p:sp>
+        <p:nvSpPr>
+          <p:cNvPr id="90" name="apigee-phase-A4">
+            <a:extLst xmlns:a="http://schemas.openxmlformats.org/drawingml/2006/main">
+              <a:ext uri="{FF2B5EF4-FFF2-40B4-BE49-F238E27FC236}">
+                <a16:creationId xmlns:a16="http://schemas.microsoft.com/office/drawing/2014/main" id="{89BAEA33-4F8E-4EC5-B64E-4299863213F4}"/>
+              </a:ext>
+            </a:extLst>
+          </p:cNvPr>
+          <p:cNvSpPr>
+            <a:spLocks xmlns:a="http://schemas.openxmlformats.org/drawingml/2006/main" noGrp="1"/>
+          </p:cNvSpPr>
+          <p:nvPr/>
+        </p:nvSpPr>
+        <p:spPr>
+          <a:xfrm xmlns:a="http://schemas.openxmlformats.org/drawingml/2006/main">
+            <a:off x="6934200" y="2609850"/>
+            <a:ext cx="1485900" cy="2381250"/>
+          </a:xfrm>
+          <a:prstGeom xmlns:a="http://schemas.openxmlformats.org/drawingml/2006/main" prst="roundRect">
+            <a:avLst>
+              <a:gd name="adj" fmla="val 5128"/>
+            </a:avLst>
+          </a:prstGeom>
+          <a:solidFill xmlns:a="http://schemas.openxmlformats.org/drawingml/2006/main">
+            <a:srgbClr val="FFFFFF"/>
+          </a:solidFill>
+          <a:ln xmlns:a="http://schemas.openxmlformats.org/drawingml/2006/main" w="14288">
+            <a:solidFill>
+              <a:srgbClr val="18765A"/>
+            </a:solidFill>
+            <a:prstDash val="solid"/>
+          </a:ln>
+        </p:spPr>
+      </p:sp>
+      <p:sp>
+        <p:nvSpPr>
+          <p:cNvPr id="91" name="apigee-phase-code-A4">
+            <a:extLst xmlns:a="http://schemas.openxmlformats.org/drawingml/2006/main">
+              <a:ext uri="{FF2B5EF4-FFF2-40B4-BE49-F238E27FC236}">
+                <a16:creationId xmlns:a16="http://schemas.microsoft.com/office/drawing/2014/main" id="{9B002AEB-F3B7-400F-9DB9-8E3FA5797BD9}"/>
+              </a:ext>
+            </a:extLst>
+          </p:cNvPr>
+          <p:cNvSpPr>
+            <a:spLocks xmlns:a="http://schemas.openxmlformats.org/drawingml/2006/main" noGrp="1"/>
+          </p:cNvSpPr>
+          <p:nvPr/>
+        </p:nvSpPr>
+        <p:spPr>
+          <a:xfrm xmlns:a="http://schemas.openxmlformats.org/drawingml/2006/main">
+            <a:off x="7029450" y="2705100"/>
+            <a:ext cx="495300" cy="228600"/>
+          </a:xfrm>
+          <a:prstGeom xmlns:a="http://schemas.openxmlformats.org/drawingml/2006/main" prst="rect">
+            <a:avLst/>
+          </a:prstGeom>
+          <a:noFill xmlns:a="http://schemas.openxmlformats.org/drawingml/2006/main"/>
+          <a:ln xmlns:a="http://schemas.openxmlformats.org/drawingml/2006/main" w="0">
+            <a:solidFill>
+              <a:srgbClr val="FFFCF5"/>
+            </a:solidFill>
+            <a:prstDash val="solid"/>
+          </a:ln>
+        </p:spPr>
+        <p:txBody>
+          <a:bodyPr xmlns:a="http://schemas.openxmlformats.org/drawingml/2006/main" lIns="28575" tIns="19050" rIns="28575" bIns="19050" anchor="ctr">
+            <a:normAutofit fontScale="92593"/>
           </a:bodyPr>
           <a:lstStyle xmlns:a="http://schemas.openxmlformats.org/drawingml/2006/main"/>
           <a:p xmlns:a="http://schemas.openxmlformats.org/drawingml/2006/main">
             <a:pPr algn="l">
-              <a:buNone/>
-              <a:defRPr sz="900" b="1" i="0">
+              <a:lnSpc>
+                <a:spcPct val="100000"/>
+              </a:lnSpc>
+              <a:buNone/>
+              <a:defRPr sz="1350" b="1">
                 <a:solidFill>
                   <a:srgbClr val="5537D6"/>
                 </a:solidFill>
@@ -17664,7 +18588,7 @@
               </a:defRPr>
             </a:pPr>
             <a:r>
-              <a:rPr sz="900" b="1" i="0">
+              <a:rPr sz="1350" b="1">
                 <a:solidFill>
                   <a:srgbClr val="5537D6"/>
                 </a:solidFill>
@@ -17672,138 +18596,148 @@
                 <a:ea typeface="Consolas"/>
                 <a:cs typeface="Consolas"/>
               </a:rPr>
-              <a:t>EXIT</a:t>
-            </a:r>
-          </a:p>
-        </p:txBody>
-      </p:sp>
-      <p:sp>
-        <p:nvSpPr>
-          <p:cNvPr id="23" name="">
-            <a:extLst xmlns:a="http://schemas.openxmlformats.org/drawingml/2006/main">
-              <a:ext uri="{FF2B5EF4-FFF2-40B4-BE49-F238E27FC236}">
-                <a16:creationId xmlns:a16="http://schemas.microsoft.com/office/drawing/2014/main" id="{BB1E299A-AB20-49DA-9203-9687E0431ECF}"/>
-              </a:ext>
-            </a:extLst>
-          </p:cNvPr>
-          <p:cNvSpPr>
-            <a:spLocks xmlns:a="http://schemas.openxmlformats.org/drawingml/2006/main" noGrp="1"/>
-          </p:cNvSpPr>
-          <p:nvPr/>
-        </p:nvSpPr>
-        <p:spPr>
-          <a:xfrm xmlns:a="http://schemas.openxmlformats.org/drawingml/2006/main">
-            <a:off x="2495550" y="4838700"/>
-            <a:ext cx="1562100" cy="628650"/>
-          </a:xfrm>
-          <a:prstGeom xmlns:a="http://schemas.openxmlformats.org/drawingml/2006/main" prst="rect">
-            <a:avLst/>
-          </a:prstGeom>
-          <a:noFill xmlns:a="http://schemas.openxmlformats.org/drawingml/2006/main"/>
-          <a:ln xmlns:a="http://schemas.openxmlformats.org/drawingml/2006/main" w="0">
-            <a:noFill/>
-            <a:prstDash val="solid"/>
-          </a:ln>
-        </p:spPr>
-        <p:txBody>
-          <a:bodyPr xmlns:a="http://schemas.openxmlformats.org/drawingml/2006/main" wrap="square" lIns="0" tIns="0" rIns="0" bIns="0" anchor="t">
-            <a:normAutofit fontScale="100000"/>
+              <a:t>A4</a:t>
+            </a:r>
+          </a:p>
+        </p:txBody>
+      </p:sp>
+      <p:sp>
+        <p:nvSpPr>
+          <p:cNvPr id="92" name="apigee-phase-label-A4">
+            <a:extLst xmlns:a="http://schemas.openxmlformats.org/drawingml/2006/main">
+              <a:ext uri="{FF2B5EF4-FFF2-40B4-BE49-F238E27FC236}">
+                <a16:creationId xmlns:a16="http://schemas.microsoft.com/office/drawing/2014/main" id="{C039C570-5329-461E-AA7A-D17481022E18}"/>
+              </a:ext>
+            </a:extLst>
+          </p:cNvPr>
+          <p:cNvSpPr>
+            <a:spLocks xmlns:a="http://schemas.openxmlformats.org/drawingml/2006/main" noGrp="1"/>
+          </p:cNvSpPr>
+          <p:nvPr/>
+        </p:nvSpPr>
+        <p:spPr>
+          <a:xfrm xmlns:a="http://schemas.openxmlformats.org/drawingml/2006/main">
+            <a:off x="7029450" y="2952750"/>
+            <a:ext cx="1295400" cy="457200"/>
+          </a:xfrm>
+          <a:prstGeom xmlns:a="http://schemas.openxmlformats.org/drawingml/2006/main" prst="rect">
+            <a:avLst/>
+          </a:prstGeom>
+          <a:noFill xmlns:a="http://schemas.openxmlformats.org/drawingml/2006/main"/>
+          <a:ln xmlns:a="http://schemas.openxmlformats.org/drawingml/2006/main" w="0">
+            <a:solidFill>
+              <a:srgbClr val="FFFCF5"/>
+            </a:solidFill>
+            <a:prstDash val="solid"/>
+          </a:ln>
+        </p:spPr>
+        <p:txBody>
+          <a:bodyPr xmlns:a="http://schemas.openxmlformats.org/drawingml/2006/main" lIns="28575" tIns="19050" rIns="28575" bIns="19050" anchor="t">
+            <a:normAutofit fontScale="87302"/>
           </a:bodyPr>
           <a:lstStyle xmlns:a="http://schemas.openxmlformats.org/drawingml/2006/main"/>
           <a:p xmlns:a="http://schemas.openxmlformats.org/drawingml/2006/main">
             <a:pPr algn="l">
-              <a:buNone/>
-              <a:defRPr sz="1200" b="0" i="0">
+              <a:lnSpc>
+                <a:spcPct val="100000"/>
+              </a:lnSpc>
+              <a:buNone/>
+              <a:defRPr sz="1575" b="1">
                 <a:solidFill>
                   <a:srgbClr val="111111"/>
                 </a:solidFill>
-                <a:latin typeface="Arial"/>
-                <a:ea typeface="Arial"/>
-                <a:cs typeface="Arial"/>
-              </a:defRPr>
-            </a:pPr>
-            <a:r>
-              <a:rPr sz="1200" b="0" i="0">
+                <a:latin typeface="Georgia"/>
+                <a:ea typeface="Georgia"/>
+                <a:cs typeface="Georgia"/>
+              </a:defRPr>
+            </a:pPr>
+            <a:r>
+              <a:rPr sz="1575" b="1">
                 <a:solidFill>
                   <a:srgbClr val="111111"/>
                 </a:solidFill>
-                <a:latin typeface="Arial"/>
-                <a:ea typeface="Arial"/>
-                <a:cs typeface="Arial"/>
-              </a:rPr>
-              <a:t>owner + destination</a:t>
-            </a:r>
-          </a:p>
-        </p:txBody>
-      </p:sp>
-      <p:sp>
-        <p:nvSpPr>
-          <p:cNvPr id="24" name="">
-            <a:extLst xmlns:a="http://schemas.openxmlformats.org/drawingml/2006/main">
-              <a:ext uri="{FF2B5EF4-FFF2-40B4-BE49-F238E27FC236}">
-                <a16:creationId xmlns:a16="http://schemas.microsoft.com/office/drawing/2014/main" id="{0DA8885F-A2E3-4E0D-BD62-B0CE2E7D9912}"/>
-              </a:ext>
-            </a:extLst>
-          </p:cNvPr>
-          <p:cNvSpPr>
-            <a:spLocks xmlns:a="http://schemas.openxmlformats.org/drawingml/2006/main" noGrp="1"/>
-          </p:cNvSpPr>
-          <p:nvPr/>
-        </p:nvSpPr>
-        <p:spPr>
-          <a:xfrm xmlns:a="http://schemas.openxmlformats.org/drawingml/2006/main">
-            <a:off x="4057650" y="3257550"/>
-            <a:ext cx="247650" cy="266700"/>
-          </a:xfrm>
-          <a:prstGeom xmlns:a="http://schemas.openxmlformats.org/drawingml/2006/main" prst="chevron">
-            <a:avLst/>
-          </a:prstGeom>
-          <a:solidFill xmlns:a="http://schemas.openxmlformats.org/drawingml/2006/main">
-            <a:srgbClr val="FFC72C"/>
-          </a:solidFill>
-          <a:ln xmlns:a="http://schemas.openxmlformats.org/drawingml/2006/main" w="0">
-            <a:noFill/>
-            <a:prstDash val="solid"/>
-          </a:ln>
-        </p:spPr>
-      </p:sp>
-      <p:sp>
-        <p:nvSpPr>
-          <p:cNvPr id="25" name="">
-            <a:extLst xmlns:a="http://schemas.openxmlformats.org/drawingml/2006/main">
-              <a:ext uri="{FF2B5EF4-FFF2-40B4-BE49-F238E27FC236}">
-                <a16:creationId xmlns:a16="http://schemas.microsoft.com/office/drawing/2014/main" id="{F866B856-36F0-4678-8670-AF83B21772BD}"/>
-              </a:ext>
-            </a:extLst>
-          </p:cNvPr>
-          <p:cNvSpPr>
-            <a:spLocks xmlns:a="http://schemas.openxmlformats.org/drawingml/2006/main" noGrp="1"/>
-          </p:cNvSpPr>
-          <p:nvPr/>
-        </p:nvSpPr>
-        <p:spPr>
-          <a:xfrm xmlns:a="http://schemas.openxmlformats.org/drawingml/2006/main">
-            <a:off x="4305300" y="2266950"/>
-            <a:ext cx="571500" cy="266700"/>
-          </a:xfrm>
-          <a:prstGeom xmlns:a="http://schemas.openxmlformats.org/drawingml/2006/main" prst="rect">
-            <a:avLst/>
-          </a:prstGeom>
-          <a:noFill xmlns:a="http://schemas.openxmlformats.org/drawingml/2006/main"/>
-          <a:ln xmlns:a="http://schemas.openxmlformats.org/drawingml/2006/main" w="0">
-            <a:noFill/>
-            <a:prstDash val="solid"/>
-          </a:ln>
-        </p:spPr>
-        <p:txBody>
-          <a:bodyPr xmlns:a="http://schemas.openxmlformats.org/drawingml/2006/main" wrap="square" lIns="0" tIns="0" rIns="0" bIns="0" anchor="t">
-            <a:normAutofit fontScale="100000"/>
+                <a:latin typeface="Georgia"/>
+                <a:ea typeface="Georgia"/>
+                <a:cs typeface="Georgia"/>
+              </a:rPr>
+              <a:t>Bounded coexistence</a:t>
+            </a:r>
+          </a:p>
+        </p:txBody>
+      </p:sp>
+      <p:sp>
+        <p:nvSpPr>
+          <p:cNvPr id="93" name="apigee-phase-rule-A4">
+            <a:extLst xmlns:a="http://schemas.openxmlformats.org/drawingml/2006/main">
+              <a:ext uri="{FF2B5EF4-FFF2-40B4-BE49-F238E27FC236}">
+                <a16:creationId xmlns:a16="http://schemas.microsoft.com/office/drawing/2014/main" id="{6BC4CA65-BA88-443A-8FA0-B732A6ECBC46}"/>
+              </a:ext>
+            </a:extLst>
+          </p:cNvPr>
+          <p:cNvSpPr>
+            <a:spLocks xmlns:a="http://schemas.openxmlformats.org/drawingml/2006/main" noGrp="1"/>
+          </p:cNvSpPr>
+          <p:nvPr/>
+        </p:nvSpPr>
+        <p:spPr>
+          <a:xfrm xmlns:a="http://schemas.openxmlformats.org/drawingml/2006/main">
+            <a:off x="7029450" y="3486150"/>
+            <a:ext cx="1295400" cy="0"/>
+          </a:xfrm>
+          <a:prstGeom xmlns:a="http://schemas.openxmlformats.org/drawingml/2006/main" prst="line">
+            <a:avLst/>
+          </a:prstGeom>
+          <a:noFill xmlns:a="http://schemas.openxmlformats.org/drawingml/2006/main"/>
+          <a:ln xmlns:a="http://schemas.openxmlformats.org/drawingml/2006/main" w="9525">
+            <a:solidFill>
+              <a:srgbClr val="C9C6BD"/>
+            </a:solidFill>
+            <a:prstDash val="solid"/>
+          </a:ln>
+        </p:spPr>
+      </p:sp>
+      <p:sp>
+        <p:nvSpPr>
+          <p:cNvPr id="94" name="apigee-phase-exit-label-A4">
+            <a:extLst xmlns:a="http://schemas.openxmlformats.org/drawingml/2006/main">
+              <a:ext uri="{FF2B5EF4-FFF2-40B4-BE49-F238E27FC236}">
+                <a16:creationId xmlns:a16="http://schemas.microsoft.com/office/drawing/2014/main" id="{D3F955BB-0AE6-452B-B312-5DCFF297BB37}"/>
+              </a:ext>
+            </a:extLst>
+          </p:cNvPr>
+          <p:cNvSpPr>
+            <a:spLocks xmlns:a="http://schemas.openxmlformats.org/drawingml/2006/main" noGrp="1"/>
+          </p:cNvSpPr>
+          <p:nvPr/>
+        </p:nvSpPr>
+        <p:spPr>
+          <a:xfrm xmlns:a="http://schemas.openxmlformats.org/drawingml/2006/main">
+            <a:off x="7029450" y="3581400"/>
+            <a:ext cx="1295400" cy="171450"/>
+          </a:xfrm>
+          <a:prstGeom xmlns:a="http://schemas.openxmlformats.org/drawingml/2006/main" prst="rect">
+            <a:avLst/>
+          </a:prstGeom>
+          <a:noFill xmlns:a="http://schemas.openxmlformats.org/drawingml/2006/main"/>
+          <a:ln xmlns:a="http://schemas.openxmlformats.org/drawingml/2006/main" w="0">
+            <a:solidFill>
+              <a:srgbClr val="FFFCF5"/>
+            </a:solidFill>
+            <a:prstDash val="solid"/>
+          </a:ln>
+        </p:spPr>
+        <p:txBody>
+          <a:bodyPr xmlns:a="http://schemas.openxmlformats.org/drawingml/2006/main" lIns="28575" tIns="19050" rIns="28575" bIns="19050" anchor="ctr">
+            <a:normAutofit fontScale="89744"/>
           </a:bodyPr>
           <a:lstStyle xmlns:a="http://schemas.openxmlformats.org/drawingml/2006/main"/>
           <a:p xmlns:a="http://schemas.openxmlformats.org/drawingml/2006/main">
             <a:pPr algn="l">
-              <a:buNone/>
-              <a:defRPr sz="1275" b="1" i="0">
+              <a:lnSpc>
+                <a:spcPct val="100000"/>
+              </a:lnSpc>
+              <a:buNone/>
+              <a:defRPr sz="975" b="1">
                 <a:solidFill>
                   <a:srgbClr val="5537D6"/>
                 </a:solidFill>
@@ -17813,7 +18747,7 @@
               </a:defRPr>
             </a:pPr>
             <a:r>
-              <a:rPr sz="1275" b="1" i="0">
+              <a:rPr sz="975" b="1">
                 <a:solidFill>
                   <a:srgbClr val="5537D6"/>
                 </a:solidFill>
@@ -17821,48 +18755,216 @@
                 <a:ea typeface="Consolas"/>
                 <a:cs typeface="Consolas"/>
               </a:rPr>
-              <a:t>M2/A2</a:t>
-            </a:r>
-          </a:p>
-        </p:txBody>
-      </p:sp>
-      <p:sp>
-        <p:nvSpPr>
-          <p:cNvPr id="26" name="">
-            <a:extLst xmlns:a="http://schemas.openxmlformats.org/drawingml/2006/main">
-              <a:ext uri="{FF2B5EF4-FFF2-40B4-BE49-F238E27FC236}">
-                <a16:creationId xmlns:a16="http://schemas.microsoft.com/office/drawing/2014/main" id="{2D6424AD-FEA4-43A7-A1EE-8407E2EB8830}"/>
-              </a:ext>
-            </a:extLst>
-          </p:cNvPr>
-          <p:cNvSpPr>
-            <a:spLocks xmlns:a="http://schemas.openxmlformats.org/drawingml/2006/main" noGrp="1"/>
-          </p:cNvSpPr>
-          <p:nvPr/>
-        </p:nvSpPr>
-        <p:spPr>
-          <a:xfrm xmlns:a="http://schemas.openxmlformats.org/drawingml/2006/main">
-            <a:off x="4305300" y="2619375"/>
-            <a:ext cx="1581150" cy="609600"/>
-          </a:xfrm>
-          <a:prstGeom xmlns:a="http://schemas.openxmlformats.org/drawingml/2006/main" prst="rect">
-            <a:avLst/>
-          </a:prstGeom>
-          <a:noFill xmlns:a="http://schemas.openxmlformats.org/drawingml/2006/main"/>
-          <a:ln xmlns:a="http://schemas.openxmlformats.org/drawingml/2006/main" w="0">
-            <a:noFill/>
-            <a:prstDash val="solid"/>
-          </a:ln>
-        </p:spPr>
-        <p:txBody>
-          <a:bodyPr xmlns:a="http://schemas.openxmlformats.org/drawingml/2006/main" wrap="square" lIns="0" tIns="0" rIns="0" bIns="0" anchor="t">
+              <a:t>EXIT EVIDENCE</a:t>
+            </a:r>
+          </a:p>
+        </p:txBody>
+      </p:sp>
+      <p:sp>
+        <p:nvSpPr>
+          <p:cNvPr id="95" name="apigee-phase-exit-A4">
+            <a:extLst xmlns:a="http://schemas.openxmlformats.org/drawingml/2006/main">
+              <a:ext uri="{FF2B5EF4-FFF2-40B4-BE49-F238E27FC236}">
+                <a16:creationId xmlns:a16="http://schemas.microsoft.com/office/drawing/2014/main" id="{C22C5550-1182-44E0-A049-A0256DDBDA81}"/>
+              </a:ext>
+            </a:extLst>
+          </p:cNvPr>
+          <p:cNvSpPr>
+            <a:spLocks xmlns:a="http://schemas.openxmlformats.org/drawingml/2006/main" noGrp="1"/>
+          </p:cNvSpPr>
+          <p:nvPr/>
+        </p:nvSpPr>
+        <p:spPr>
+          <a:xfrm xmlns:a="http://schemas.openxmlformats.org/drawingml/2006/main">
+            <a:off x="7029450" y="3810000"/>
+            <a:ext cx="1295400" cy="990600"/>
+          </a:xfrm>
+          <a:prstGeom xmlns:a="http://schemas.openxmlformats.org/drawingml/2006/main" prst="rect">
+            <a:avLst/>
+          </a:prstGeom>
+          <a:noFill xmlns:a="http://schemas.openxmlformats.org/drawingml/2006/main"/>
+          <a:ln xmlns:a="http://schemas.openxmlformats.org/drawingml/2006/main" w="0">
+            <a:solidFill>
+              <a:srgbClr val="FFFCF5"/>
+            </a:solidFill>
+            <a:prstDash val="solid"/>
+          </a:ln>
+        </p:spPr>
+        <p:txBody>
+          <a:bodyPr xmlns:a="http://schemas.openxmlformats.org/drawingml/2006/main" lIns="28575" tIns="19050" rIns="28575" bIns="19050" anchor="t">
             <a:normAutofit fontScale="100000"/>
           </a:bodyPr>
           <a:lstStyle xmlns:a="http://schemas.openxmlformats.org/drawingml/2006/main"/>
           <a:p xmlns:a="http://schemas.openxmlformats.org/drawingml/2006/main">
             <a:pPr algn="l">
-              <a:buNone/>
-              <a:defRPr sz="1725" b="0" i="0">
+              <a:lnSpc>
+                <a:spcPct val="100000"/>
+              </a:lnSpc>
+              <a:buNone/>
+              <a:defRPr sz="1200" b="0">
+                <a:solidFill>
+                  <a:srgbClr val="686A66"/>
+                </a:solidFill>
+                <a:latin typeface="Arial"/>
+                <a:ea typeface="Arial"/>
+                <a:cs typeface="Arial"/>
+              </a:defRPr>
+            </a:pPr>
+            <a:r>
+              <a:rPr sz="1200" b="0">
+                <a:solidFill>
+                  <a:srgbClr val="686A66"/>
+                </a:solidFill>
+                <a:latin typeface="Arial"/>
+                <a:ea typeface="Arial"/>
+                <a:cs typeface="Arial"/>
+              </a:rPr>
+              <a:t>Cohort ledger, reconciliation and timed route-back</a:t>
+            </a:r>
+          </a:p>
+        </p:txBody>
+      </p:sp>
+      <p:sp>
+        <p:nvSpPr>
+          <p:cNvPr id="96" name="apigee-phase-A5">
+            <a:extLst xmlns:a="http://schemas.openxmlformats.org/drawingml/2006/main">
+              <a:ext uri="{FF2B5EF4-FFF2-40B4-BE49-F238E27FC236}">
+                <a16:creationId xmlns:a16="http://schemas.microsoft.com/office/drawing/2014/main" id="{2472695A-7894-43C5-A53C-A580F03AB00B}"/>
+              </a:ext>
+            </a:extLst>
+          </p:cNvPr>
+          <p:cNvSpPr>
+            <a:spLocks xmlns:a="http://schemas.openxmlformats.org/drawingml/2006/main" noGrp="1"/>
+          </p:cNvSpPr>
+          <p:nvPr/>
+        </p:nvSpPr>
+        <p:spPr>
+          <a:xfrm xmlns:a="http://schemas.openxmlformats.org/drawingml/2006/main">
+            <a:off x="8515350" y="2609850"/>
+            <a:ext cx="1485900" cy="2381250"/>
+          </a:xfrm>
+          <a:prstGeom xmlns:a="http://schemas.openxmlformats.org/drawingml/2006/main" prst="roundRect">
+            <a:avLst>
+              <a:gd name="adj" fmla="val 5128"/>
+            </a:avLst>
+          </a:prstGeom>
+          <a:solidFill xmlns:a="http://schemas.openxmlformats.org/drawingml/2006/main">
+            <a:srgbClr val="FFFFFF"/>
+          </a:solidFill>
+          <a:ln xmlns:a="http://schemas.openxmlformats.org/drawingml/2006/main" w="14288">
+            <a:solidFill>
+              <a:srgbClr val="18765A"/>
+            </a:solidFill>
+            <a:prstDash val="solid"/>
+          </a:ln>
+        </p:spPr>
+      </p:sp>
+      <p:sp>
+        <p:nvSpPr>
+          <p:cNvPr id="97" name="apigee-phase-code-A5">
+            <a:extLst xmlns:a="http://schemas.openxmlformats.org/drawingml/2006/main">
+              <a:ext uri="{FF2B5EF4-FFF2-40B4-BE49-F238E27FC236}">
+                <a16:creationId xmlns:a16="http://schemas.microsoft.com/office/drawing/2014/main" id="{CB405991-A5DD-4A23-BB82-391E65999657}"/>
+              </a:ext>
+            </a:extLst>
+          </p:cNvPr>
+          <p:cNvSpPr>
+            <a:spLocks xmlns:a="http://schemas.openxmlformats.org/drawingml/2006/main" noGrp="1"/>
+          </p:cNvSpPr>
+          <p:nvPr/>
+        </p:nvSpPr>
+        <p:spPr>
+          <a:xfrm xmlns:a="http://schemas.openxmlformats.org/drawingml/2006/main">
+            <a:off x="8610600" y="2705100"/>
+            <a:ext cx="495300" cy="228600"/>
+          </a:xfrm>
+          <a:prstGeom xmlns:a="http://schemas.openxmlformats.org/drawingml/2006/main" prst="rect">
+            <a:avLst/>
+          </a:prstGeom>
+          <a:noFill xmlns:a="http://schemas.openxmlformats.org/drawingml/2006/main"/>
+          <a:ln xmlns:a="http://schemas.openxmlformats.org/drawingml/2006/main" w="0">
+            <a:solidFill>
+              <a:srgbClr val="FFFCF5"/>
+            </a:solidFill>
+            <a:prstDash val="solid"/>
+          </a:ln>
+        </p:spPr>
+        <p:txBody>
+          <a:bodyPr xmlns:a="http://schemas.openxmlformats.org/drawingml/2006/main" lIns="28575" tIns="19050" rIns="28575" bIns="19050" anchor="ctr">
+            <a:normAutofit fontScale="92593"/>
+          </a:bodyPr>
+          <a:lstStyle xmlns:a="http://schemas.openxmlformats.org/drawingml/2006/main"/>
+          <a:p xmlns:a="http://schemas.openxmlformats.org/drawingml/2006/main">
+            <a:pPr algn="l">
+              <a:lnSpc>
+                <a:spcPct val="100000"/>
+              </a:lnSpc>
+              <a:buNone/>
+              <a:defRPr sz="1350" b="1">
+                <a:solidFill>
+                  <a:srgbClr val="5537D6"/>
+                </a:solidFill>
+                <a:latin typeface="Consolas"/>
+                <a:ea typeface="Consolas"/>
+                <a:cs typeface="Consolas"/>
+              </a:defRPr>
+            </a:pPr>
+            <a:r>
+              <a:rPr sz="1350" b="1">
+                <a:solidFill>
+                  <a:srgbClr val="5537D6"/>
+                </a:solidFill>
+                <a:latin typeface="Consolas"/>
+                <a:ea typeface="Consolas"/>
+                <a:cs typeface="Consolas"/>
+              </a:rPr>
+              <a:t>A5</a:t>
+            </a:r>
+          </a:p>
+        </p:txBody>
+      </p:sp>
+      <p:sp>
+        <p:nvSpPr>
+          <p:cNvPr id="98" name="apigee-phase-label-A5">
+            <a:extLst xmlns:a="http://schemas.openxmlformats.org/drawingml/2006/main">
+              <a:ext uri="{FF2B5EF4-FFF2-40B4-BE49-F238E27FC236}">
+                <a16:creationId xmlns:a16="http://schemas.microsoft.com/office/drawing/2014/main" id="{04C912B4-B22A-4A44-9EE4-F416F7FF38F3}"/>
+              </a:ext>
+            </a:extLst>
+          </p:cNvPr>
+          <p:cNvSpPr>
+            <a:spLocks xmlns:a="http://schemas.openxmlformats.org/drawingml/2006/main" noGrp="1"/>
+          </p:cNvSpPr>
+          <p:nvPr/>
+        </p:nvSpPr>
+        <p:spPr>
+          <a:xfrm xmlns:a="http://schemas.openxmlformats.org/drawingml/2006/main">
+            <a:off x="8610600" y="2952750"/>
+            <a:ext cx="1295400" cy="457200"/>
+          </a:xfrm>
+          <a:prstGeom xmlns:a="http://schemas.openxmlformats.org/drawingml/2006/main" prst="rect">
+            <a:avLst/>
+          </a:prstGeom>
+          <a:noFill xmlns:a="http://schemas.openxmlformats.org/drawingml/2006/main"/>
+          <a:ln xmlns:a="http://schemas.openxmlformats.org/drawingml/2006/main" w="0">
+            <a:solidFill>
+              <a:srgbClr val="FFFCF5"/>
+            </a:solidFill>
+            <a:prstDash val="solid"/>
+          </a:ln>
+        </p:spPr>
+        <p:txBody>
+          <a:bodyPr xmlns:a="http://schemas.openxmlformats.org/drawingml/2006/main" lIns="28575" tIns="19050" rIns="28575" bIns="19050" anchor="t">
+            <a:normAutofit fontScale="87302"/>
+          </a:bodyPr>
+          <a:lstStyle xmlns:a="http://schemas.openxmlformats.org/drawingml/2006/main"/>
+          <a:p xmlns:a="http://schemas.openxmlformats.org/drawingml/2006/main">
+            <a:pPr algn="l">
+              <a:lnSpc>
+                <a:spcPct val="100000"/>
+              </a:lnSpc>
+              <a:buNone/>
+              <a:defRPr sz="1575" b="1">
                 <a:solidFill>
                   <a:srgbClr val="111111"/>
                 </a:solidFill>
@@ -17872,7 +18974,7 @@
               </a:defRPr>
             </a:pPr>
             <a:r>
-              <a:rPr sz="1725" b="0" i="0">
+              <a:rPr sz="1575" b="1">
                 <a:solidFill>
                   <a:srgbClr val="111111"/>
                 </a:solidFill>
@@ -17880,13 +18982,311 @@
                 <a:ea typeface="Georgia"/>
                 <a:cs typeface="Georgia"/>
               </a:rPr>
-              <a:t>Reversible</a:t>
-            </a:r>
-          </a:p>
+              <a:t>Production canary</a:t>
+            </a:r>
+          </a:p>
+        </p:txBody>
+      </p:sp>
+      <p:sp>
+        <p:nvSpPr>
+          <p:cNvPr id="99" name="apigee-phase-rule-A5">
+            <a:extLst xmlns:a="http://schemas.openxmlformats.org/drawingml/2006/main">
+              <a:ext uri="{FF2B5EF4-FFF2-40B4-BE49-F238E27FC236}">
+                <a16:creationId xmlns:a16="http://schemas.microsoft.com/office/drawing/2014/main" id="{7B80DF47-C46F-4E89-B5BC-A1B15F233C94}"/>
+              </a:ext>
+            </a:extLst>
+          </p:cNvPr>
+          <p:cNvSpPr>
+            <a:spLocks xmlns:a="http://schemas.openxmlformats.org/drawingml/2006/main" noGrp="1"/>
+          </p:cNvSpPr>
+          <p:nvPr/>
+        </p:nvSpPr>
+        <p:spPr>
+          <a:xfrm xmlns:a="http://schemas.openxmlformats.org/drawingml/2006/main">
+            <a:off x="8610600" y="3486150"/>
+            <a:ext cx="1295400" cy="0"/>
+          </a:xfrm>
+          <a:prstGeom xmlns:a="http://schemas.openxmlformats.org/drawingml/2006/main" prst="line">
+            <a:avLst/>
+          </a:prstGeom>
+          <a:noFill xmlns:a="http://schemas.openxmlformats.org/drawingml/2006/main"/>
+          <a:ln xmlns:a="http://schemas.openxmlformats.org/drawingml/2006/main" w="9525">
+            <a:solidFill>
+              <a:srgbClr val="C9C6BD"/>
+            </a:solidFill>
+            <a:prstDash val="solid"/>
+          </a:ln>
+        </p:spPr>
+      </p:sp>
+      <p:sp>
+        <p:nvSpPr>
+          <p:cNvPr id="100" name="apigee-phase-exit-label-A5">
+            <a:extLst xmlns:a="http://schemas.openxmlformats.org/drawingml/2006/main">
+              <a:ext uri="{FF2B5EF4-FFF2-40B4-BE49-F238E27FC236}">
+                <a16:creationId xmlns:a16="http://schemas.microsoft.com/office/drawing/2014/main" id="{9815D87C-C6D8-4AD2-97B2-05C7B7408659}"/>
+              </a:ext>
+            </a:extLst>
+          </p:cNvPr>
+          <p:cNvSpPr>
+            <a:spLocks xmlns:a="http://schemas.openxmlformats.org/drawingml/2006/main" noGrp="1"/>
+          </p:cNvSpPr>
+          <p:nvPr/>
+        </p:nvSpPr>
+        <p:spPr>
+          <a:xfrm xmlns:a="http://schemas.openxmlformats.org/drawingml/2006/main">
+            <a:off x="8610600" y="3581400"/>
+            <a:ext cx="1295400" cy="171450"/>
+          </a:xfrm>
+          <a:prstGeom xmlns:a="http://schemas.openxmlformats.org/drawingml/2006/main" prst="rect">
+            <a:avLst/>
+          </a:prstGeom>
+          <a:noFill xmlns:a="http://schemas.openxmlformats.org/drawingml/2006/main"/>
+          <a:ln xmlns:a="http://schemas.openxmlformats.org/drawingml/2006/main" w="0">
+            <a:solidFill>
+              <a:srgbClr val="FFFCF5"/>
+            </a:solidFill>
+            <a:prstDash val="solid"/>
+          </a:ln>
+        </p:spPr>
+        <p:txBody>
+          <a:bodyPr xmlns:a="http://schemas.openxmlformats.org/drawingml/2006/main" lIns="28575" tIns="19050" rIns="28575" bIns="19050" anchor="ctr">
+            <a:normAutofit fontScale="89744"/>
+          </a:bodyPr>
+          <a:lstStyle xmlns:a="http://schemas.openxmlformats.org/drawingml/2006/main"/>
           <a:p xmlns:a="http://schemas.openxmlformats.org/drawingml/2006/main">
             <a:pPr algn="l">
-              <a:buNone/>
-              <a:defRPr sz="1725" b="0" i="0">
+              <a:lnSpc>
+                <a:spcPct val="100000"/>
+              </a:lnSpc>
+              <a:buNone/>
+              <a:defRPr sz="975" b="1">
+                <a:solidFill>
+                  <a:srgbClr val="5537D6"/>
+                </a:solidFill>
+                <a:latin typeface="Consolas"/>
+                <a:ea typeface="Consolas"/>
+                <a:cs typeface="Consolas"/>
+              </a:defRPr>
+            </a:pPr>
+            <a:r>
+              <a:rPr sz="975" b="1">
+                <a:solidFill>
+                  <a:srgbClr val="5537D6"/>
+                </a:solidFill>
+                <a:latin typeface="Consolas"/>
+                <a:ea typeface="Consolas"/>
+                <a:cs typeface="Consolas"/>
+              </a:rPr>
+              <a:t>EXIT EVIDENCE</a:t>
+            </a:r>
+          </a:p>
+        </p:txBody>
+      </p:sp>
+      <p:sp>
+        <p:nvSpPr>
+          <p:cNvPr id="101" name="apigee-phase-exit-A5">
+            <a:extLst xmlns:a="http://schemas.openxmlformats.org/drawingml/2006/main">
+              <a:ext uri="{FF2B5EF4-FFF2-40B4-BE49-F238E27FC236}">
+                <a16:creationId xmlns:a16="http://schemas.microsoft.com/office/drawing/2014/main" id="{0513DFA7-EA68-42FA-8184-C317DB9BB3F6}"/>
+              </a:ext>
+            </a:extLst>
+          </p:cNvPr>
+          <p:cNvSpPr>
+            <a:spLocks xmlns:a="http://schemas.openxmlformats.org/drawingml/2006/main" noGrp="1"/>
+          </p:cNvSpPr>
+          <p:nvPr/>
+        </p:nvSpPr>
+        <p:spPr>
+          <a:xfrm xmlns:a="http://schemas.openxmlformats.org/drawingml/2006/main">
+            <a:off x="8610600" y="3810000"/>
+            <a:ext cx="1295400" cy="990600"/>
+          </a:xfrm>
+          <a:prstGeom xmlns:a="http://schemas.openxmlformats.org/drawingml/2006/main" prst="rect">
+            <a:avLst/>
+          </a:prstGeom>
+          <a:noFill xmlns:a="http://schemas.openxmlformats.org/drawingml/2006/main"/>
+          <a:ln xmlns:a="http://schemas.openxmlformats.org/drawingml/2006/main" w="0">
+            <a:solidFill>
+              <a:srgbClr val="FFFCF5"/>
+            </a:solidFill>
+            <a:prstDash val="solid"/>
+          </a:ln>
+        </p:spPr>
+        <p:txBody>
+          <a:bodyPr xmlns:a="http://schemas.openxmlformats.org/drawingml/2006/main" lIns="28575" tIns="19050" rIns="28575" bIns="19050" anchor="t">
+            <a:normAutofit fontScale="100000"/>
+          </a:bodyPr>
+          <a:lstStyle xmlns:a="http://schemas.openxmlformats.org/drawingml/2006/main"/>
+          <a:p xmlns:a="http://schemas.openxmlformats.org/drawingml/2006/main">
+            <a:pPr algn="l">
+              <a:lnSpc>
+                <a:spcPct val="100000"/>
+              </a:lnSpc>
+              <a:buNone/>
+              <a:defRPr sz="1200" b="0">
+                <a:solidFill>
+                  <a:srgbClr val="686A66"/>
+                </a:solidFill>
+                <a:latin typeface="Arial"/>
+                <a:ea typeface="Arial"/>
+                <a:cs typeface="Arial"/>
+              </a:defRPr>
+            </a:pPr>
+            <a:r>
+              <a:rPr sz="1200" b="0">
+                <a:solidFill>
+                  <a:srgbClr val="686A66"/>
+                </a:solidFill>
+                <a:latin typeface="Arial"/>
+                <a:ea typeface="Arial"/>
+                <a:cs typeface="Arial"/>
+              </a:rPr>
+              <a:t>Reviewed E4 service, security, recovery, support and cost evidence</a:t>
+            </a:r>
+          </a:p>
+        </p:txBody>
+      </p:sp>
+      <p:sp>
+        <p:nvSpPr>
+          <p:cNvPr id="102" name="apigee-phase-A6">
+            <a:extLst xmlns:a="http://schemas.openxmlformats.org/drawingml/2006/main">
+              <a:ext uri="{FF2B5EF4-FFF2-40B4-BE49-F238E27FC236}">
+                <a16:creationId xmlns:a16="http://schemas.microsoft.com/office/drawing/2014/main" id="{A15DF9C9-C863-42F8-B33F-F311030D93C1}"/>
+              </a:ext>
+            </a:extLst>
+          </p:cNvPr>
+          <p:cNvSpPr>
+            <a:spLocks xmlns:a="http://schemas.openxmlformats.org/drawingml/2006/main" noGrp="1"/>
+          </p:cNvSpPr>
+          <p:nvPr/>
+        </p:nvSpPr>
+        <p:spPr>
+          <a:xfrm xmlns:a="http://schemas.openxmlformats.org/drawingml/2006/main">
+            <a:off x="10096500" y="2609850"/>
+            <a:ext cx="1485900" cy="2381250"/>
+          </a:xfrm>
+          <a:prstGeom xmlns:a="http://schemas.openxmlformats.org/drawingml/2006/main" prst="roundRect">
+            <a:avLst>
+              <a:gd name="adj" fmla="val 5128"/>
+            </a:avLst>
+          </a:prstGeom>
+          <a:solidFill xmlns:a="http://schemas.openxmlformats.org/drawingml/2006/main">
+            <a:srgbClr val="FFFFFF"/>
+          </a:solidFill>
+          <a:ln xmlns:a="http://schemas.openxmlformats.org/drawingml/2006/main" w="19050">
+            <a:solidFill>
+              <a:srgbClr val="5537D6"/>
+            </a:solidFill>
+            <a:prstDash val="solid"/>
+          </a:ln>
+        </p:spPr>
+      </p:sp>
+      <p:sp>
+        <p:nvSpPr>
+          <p:cNvPr id="103" name="apigee-phase-code-A6">
+            <a:extLst xmlns:a="http://schemas.openxmlformats.org/drawingml/2006/main">
+              <a:ext uri="{FF2B5EF4-FFF2-40B4-BE49-F238E27FC236}">
+                <a16:creationId xmlns:a16="http://schemas.microsoft.com/office/drawing/2014/main" id="{8787DB7E-C57B-44CC-8F54-B36BDF9E7970}"/>
+              </a:ext>
+            </a:extLst>
+          </p:cNvPr>
+          <p:cNvSpPr>
+            <a:spLocks xmlns:a="http://schemas.openxmlformats.org/drawingml/2006/main" noGrp="1"/>
+          </p:cNvSpPr>
+          <p:nvPr/>
+        </p:nvSpPr>
+        <p:spPr>
+          <a:xfrm xmlns:a="http://schemas.openxmlformats.org/drawingml/2006/main">
+            <a:off x="10191750" y="2705100"/>
+            <a:ext cx="495300" cy="228600"/>
+          </a:xfrm>
+          <a:prstGeom xmlns:a="http://schemas.openxmlformats.org/drawingml/2006/main" prst="rect">
+            <a:avLst/>
+          </a:prstGeom>
+          <a:noFill xmlns:a="http://schemas.openxmlformats.org/drawingml/2006/main"/>
+          <a:ln xmlns:a="http://schemas.openxmlformats.org/drawingml/2006/main" w="0">
+            <a:solidFill>
+              <a:srgbClr val="FFFCF5"/>
+            </a:solidFill>
+            <a:prstDash val="solid"/>
+          </a:ln>
+        </p:spPr>
+        <p:txBody>
+          <a:bodyPr xmlns:a="http://schemas.openxmlformats.org/drawingml/2006/main" lIns="28575" tIns="19050" rIns="28575" bIns="19050" anchor="ctr">
+            <a:normAutofit fontScale="92593"/>
+          </a:bodyPr>
+          <a:lstStyle xmlns:a="http://schemas.openxmlformats.org/drawingml/2006/main"/>
+          <a:p xmlns:a="http://schemas.openxmlformats.org/drawingml/2006/main">
+            <a:pPr algn="l">
+              <a:lnSpc>
+                <a:spcPct val="100000"/>
+              </a:lnSpc>
+              <a:buNone/>
+              <a:defRPr sz="1350" b="1">
+                <a:solidFill>
+                  <a:srgbClr val="5537D6"/>
+                </a:solidFill>
+                <a:latin typeface="Consolas"/>
+                <a:ea typeface="Consolas"/>
+                <a:cs typeface="Consolas"/>
+              </a:defRPr>
+            </a:pPr>
+            <a:r>
+              <a:rPr sz="1350" b="1">
+                <a:solidFill>
+                  <a:srgbClr val="5537D6"/>
+                </a:solidFill>
+                <a:latin typeface="Consolas"/>
+                <a:ea typeface="Consolas"/>
+                <a:cs typeface="Consolas"/>
+              </a:rPr>
+              <a:t>A6</a:t>
+            </a:r>
+          </a:p>
+        </p:txBody>
+      </p:sp>
+      <p:sp>
+        <p:nvSpPr>
+          <p:cNvPr id="104" name="apigee-phase-label-A6">
+            <a:extLst xmlns:a="http://schemas.openxmlformats.org/drawingml/2006/main">
+              <a:ext uri="{FF2B5EF4-FFF2-40B4-BE49-F238E27FC236}">
+                <a16:creationId xmlns:a16="http://schemas.microsoft.com/office/drawing/2014/main" id="{957D5D87-F5A3-472C-A1FD-40A782CEE236}"/>
+              </a:ext>
+            </a:extLst>
+          </p:cNvPr>
+          <p:cNvSpPr>
+            <a:spLocks xmlns:a="http://schemas.openxmlformats.org/drawingml/2006/main" noGrp="1"/>
+          </p:cNvSpPr>
+          <p:nvPr/>
+        </p:nvSpPr>
+        <p:spPr>
+          <a:xfrm xmlns:a="http://schemas.openxmlformats.org/drawingml/2006/main">
+            <a:off x="10191750" y="2952750"/>
+            <a:ext cx="1295400" cy="457200"/>
+          </a:xfrm>
+          <a:prstGeom xmlns:a="http://schemas.openxmlformats.org/drawingml/2006/main" prst="rect">
+            <a:avLst/>
+          </a:prstGeom>
+          <a:noFill xmlns:a="http://schemas.openxmlformats.org/drawingml/2006/main"/>
+          <a:ln xmlns:a="http://schemas.openxmlformats.org/drawingml/2006/main" w="0">
+            <a:solidFill>
+              <a:srgbClr val="FFFCF5"/>
+            </a:solidFill>
+            <a:prstDash val="solid"/>
+          </a:ln>
+        </p:spPr>
+        <p:txBody>
+          <a:bodyPr xmlns:a="http://schemas.openxmlformats.org/drawingml/2006/main" lIns="28575" tIns="19050" rIns="28575" bIns="19050" anchor="t">
+            <a:normAutofit fontScale="87302"/>
+          </a:bodyPr>
+          <a:lstStyle xmlns:a="http://schemas.openxmlformats.org/drawingml/2006/main"/>
+          <a:p xmlns:a="http://schemas.openxmlformats.org/drawingml/2006/main">
+            <a:pPr algn="l">
+              <a:lnSpc>
+                <a:spcPct val="100000"/>
+              </a:lnSpc>
+              <a:buNone/>
+              <a:defRPr sz="1575" b="1">
                 <a:solidFill>
                   <a:srgbClr val="111111"/>
                 </a:solidFill>
@@ -17896,7 +19296,7 @@
               </a:defRPr>
             </a:pPr>
             <a:r>
-              <a:rPr sz="1725" b="0" i="0">
+              <a:rPr sz="1575" b="1">
                 <a:solidFill>
                   <a:srgbClr val="111111"/>
                 </a:solidFill>
@@ -17904,81 +19304,86 @@
                 <a:ea typeface="Georgia"/>
                 <a:cs typeface="Georgia"/>
               </a:rPr>
-              <a:t>foundation</a:t>
-            </a:r>
-          </a:p>
-        </p:txBody>
-      </p:sp>
-      <p:sp>
-        <p:nvSpPr>
-          <p:cNvPr id="27" name="">
-            <a:extLst xmlns:a="http://schemas.openxmlformats.org/drawingml/2006/main">
-              <a:ext uri="{FF2B5EF4-FFF2-40B4-BE49-F238E27FC236}">
-                <a16:creationId xmlns:a16="http://schemas.microsoft.com/office/drawing/2014/main" id="{2E74DF1F-0C3C-44EA-9CE7-371590CC95A5}"/>
-              </a:ext>
-            </a:extLst>
-          </p:cNvPr>
-          <p:cNvSpPr>
-            <a:spLocks xmlns:a="http://schemas.openxmlformats.org/drawingml/2006/main" noGrp="1"/>
-          </p:cNvSpPr>
-          <p:nvPr/>
-        </p:nvSpPr>
-        <p:spPr>
-          <a:xfrm xmlns:a="http://schemas.openxmlformats.org/drawingml/2006/main">
-            <a:off x="4305300" y="3324225"/>
-            <a:ext cx="1562100" cy="19050"/>
-          </a:xfrm>
-          <a:prstGeom xmlns:a="http://schemas.openxmlformats.org/drawingml/2006/main" prst="rect">
-            <a:avLst/>
-          </a:prstGeom>
-          <a:solidFill xmlns:a="http://schemas.openxmlformats.org/drawingml/2006/main">
-            <a:srgbClr val="8A8B86"/>
-          </a:solidFill>
-          <a:ln xmlns:a="http://schemas.openxmlformats.org/drawingml/2006/main" w="0">
-            <a:noFill/>
-            <a:prstDash val="solid"/>
-          </a:ln>
-        </p:spPr>
-      </p:sp>
-      <p:sp>
-        <p:nvSpPr>
-          <p:cNvPr id="28" name="">
-            <a:extLst xmlns:a="http://schemas.openxmlformats.org/drawingml/2006/main">
-              <a:ext uri="{FF2B5EF4-FFF2-40B4-BE49-F238E27FC236}">
-                <a16:creationId xmlns:a16="http://schemas.microsoft.com/office/drawing/2014/main" id="{938353B0-5B0E-4799-A26D-BF0E70C24CE9}"/>
-              </a:ext>
-            </a:extLst>
-          </p:cNvPr>
-          <p:cNvSpPr>
-            <a:spLocks xmlns:a="http://schemas.openxmlformats.org/drawingml/2006/main" noGrp="1"/>
-          </p:cNvSpPr>
-          <p:nvPr/>
-        </p:nvSpPr>
-        <p:spPr>
-          <a:xfrm xmlns:a="http://schemas.openxmlformats.org/drawingml/2006/main">
-            <a:off x="4305300" y="3533775"/>
-            <a:ext cx="1562100" cy="171450"/>
-          </a:xfrm>
-          <a:prstGeom xmlns:a="http://schemas.openxmlformats.org/drawingml/2006/main" prst="rect">
-            <a:avLst/>
-          </a:prstGeom>
-          <a:noFill xmlns:a="http://schemas.openxmlformats.org/drawingml/2006/main"/>
-          <a:ln xmlns:a="http://schemas.openxmlformats.org/drawingml/2006/main" w="0">
-            <a:noFill/>
-            <a:prstDash val="solid"/>
-          </a:ln>
-        </p:spPr>
-        <p:txBody>
-          <a:bodyPr xmlns:a="http://schemas.openxmlformats.org/drawingml/2006/main" wrap="square" lIns="0" tIns="0" rIns="0" bIns="0" anchor="t">
-            <a:normAutofit fontScale="100000"/>
+              <a:t>Dependency zero</a:t>
+            </a:r>
+          </a:p>
+        </p:txBody>
+      </p:sp>
+      <p:sp>
+        <p:nvSpPr>
+          <p:cNvPr id="105" name="apigee-phase-rule-A6">
+            <a:extLst xmlns:a="http://schemas.openxmlformats.org/drawingml/2006/main">
+              <a:ext uri="{FF2B5EF4-FFF2-40B4-BE49-F238E27FC236}">
+                <a16:creationId xmlns:a16="http://schemas.microsoft.com/office/drawing/2014/main" id="{3E48B7B6-8206-41D4-AE8E-7F4B9EBFAA6D}"/>
+              </a:ext>
+            </a:extLst>
+          </p:cNvPr>
+          <p:cNvSpPr>
+            <a:spLocks xmlns:a="http://schemas.openxmlformats.org/drawingml/2006/main" noGrp="1"/>
+          </p:cNvSpPr>
+          <p:nvPr/>
+        </p:nvSpPr>
+        <p:spPr>
+          <a:xfrm xmlns:a="http://schemas.openxmlformats.org/drawingml/2006/main">
+            <a:off x="10191750" y="3486150"/>
+            <a:ext cx="1295400" cy="0"/>
+          </a:xfrm>
+          <a:prstGeom xmlns:a="http://schemas.openxmlformats.org/drawingml/2006/main" prst="line">
+            <a:avLst/>
+          </a:prstGeom>
+          <a:noFill xmlns:a="http://schemas.openxmlformats.org/drawingml/2006/main"/>
+          <a:ln xmlns:a="http://schemas.openxmlformats.org/drawingml/2006/main" w="9525">
+            <a:solidFill>
+              <a:srgbClr val="C9C6BD"/>
+            </a:solidFill>
+            <a:prstDash val="solid"/>
+          </a:ln>
+        </p:spPr>
+      </p:sp>
+      <p:sp>
+        <p:nvSpPr>
+          <p:cNvPr id="106" name="apigee-phase-exit-label-A6">
+            <a:extLst xmlns:a="http://schemas.openxmlformats.org/drawingml/2006/main">
+              <a:ext uri="{FF2B5EF4-FFF2-40B4-BE49-F238E27FC236}">
+                <a16:creationId xmlns:a16="http://schemas.microsoft.com/office/drawing/2014/main" id="{BEF704A2-FCFB-40A7-B8E6-350D7D36D39D}"/>
+              </a:ext>
+            </a:extLst>
+          </p:cNvPr>
+          <p:cNvSpPr>
+            <a:spLocks xmlns:a="http://schemas.openxmlformats.org/drawingml/2006/main" noGrp="1"/>
+          </p:cNvSpPr>
+          <p:nvPr/>
+        </p:nvSpPr>
+        <p:spPr>
+          <a:xfrm xmlns:a="http://schemas.openxmlformats.org/drawingml/2006/main">
+            <a:off x="10191750" y="3581400"/>
+            <a:ext cx="1295400" cy="171450"/>
+          </a:xfrm>
+          <a:prstGeom xmlns:a="http://schemas.openxmlformats.org/drawingml/2006/main" prst="rect">
+            <a:avLst/>
+          </a:prstGeom>
+          <a:noFill xmlns:a="http://schemas.openxmlformats.org/drawingml/2006/main"/>
+          <a:ln xmlns:a="http://schemas.openxmlformats.org/drawingml/2006/main" w="0">
+            <a:solidFill>
+              <a:srgbClr val="FFFCF5"/>
+            </a:solidFill>
+            <a:prstDash val="solid"/>
+          </a:ln>
+        </p:spPr>
+        <p:txBody>
+          <a:bodyPr xmlns:a="http://schemas.openxmlformats.org/drawingml/2006/main" lIns="28575" tIns="19050" rIns="28575" bIns="19050" anchor="ctr">
+            <a:normAutofit fontScale="89744"/>
           </a:bodyPr>
           <a:lstStyle xmlns:a="http://schemas.openxmlformats.org/drawingml/2006/main"/>
           <a:p xmlns:a="http://schemas.openxmlformats.org/drawingml/2006/main">
             <a:pPr algn="l">
-              <a:buNone/>
-              <a:defRPr sz="900" b="1" i="0">
-                <a:solidFill>
-                  <a:srgbClr val="686A66"/>
+              <a:lnSpc>
+                <a:spcPct val="100000"/>
+              </a:lnSpc>
+              <a:buNone/>
+              <a:defRPr sz="975" b="1">
+                <a:solidFill>
+                  <a:srgbClr val="5537D6"/>
                 </a:solidFill>
                 <a:latin typeface="Consolas"/>
                 <a:ea typeface="Consolas"/>
@@ -17986,1571 +19391,356 @@
               </a:defRPr>
             </a:pPr>
             <a:r>
-              <a:rPr sz="900" b="1" i="0">
-                <a:solidFill>
-                  <a:srgbClr val="686A66"/>
+              <a:rPr sz="975" b="1">
+                <a:solidFill>
+                  <a:srgbClr val="5537D6"/>
                 </a:solidFill>
                 <a:latin typeface="Consolas"/>
                 <a:ea typeface="Consolas"/>
                 <a:cs typeface="Consolas"/>
               </a:rPr>
-              <a:t>ENTRY</a:t>
-            </a:r>
-          </a:p>
-        </p:txBody>
-      </p:sp>
-      <p:sp>
-        <p:nvSpPr>
-          <p:cNvPr id="29" name="">
-            <a:extLst xmlns:a="http://schemas.openxmlformats.org/drawingml/2006/main">
-              <a:ext uri="{FF2B5EF4-FFF2-40B4-BE49-F238E27FC236}">
-                <a16:creationId xmlns:a16="http://schemas.microsoft.com/office/drawing/2014/main" id="{ECCF3C5A-0831-4DDB-B2A5-0E639127C7B9}"/>
-              </a:ext>
-            </a:extLst>
-          </p:cNvPr>
-          <p:cNvSpPr>
-            <a:spLocks xmlns:a="http://schemas.openxmlformats.org/drawingml/2006/main" noGrp="1"/>
-          </p:cNvSpPr>
-          <p:nvPr/>
-        </p:nvSpPr>
-        <p:spPr>
-          <a:xfrm xmlns:a="http://schemas.openxmlformats.org/drawingml/2006/main">
-            <a:off x="4305300" y="3781425"/>
-            <a:ext cx="1562100" cy="628650"/>
-          </a:xfrm>
-          <a:prstGeom xmlns:a="http://schemas.openxmlformats.org/drawingml/2006/main" prst="rect">
-            <a:avLst/>
-          </a:prstGeom>
-          <a:noFill xmlns:a="http://schemas.openxmlformats.org/drawingml/2006/main"/>
-          <a:ln xmlns:a="http://schemas.openxmlformats.org/drawingml/2006/main" w="0">
-            <a:noFill/>
-            <a:prstDash val="solid"/>
-          </a:ln>
-        </p:spPr>
-        <p:txBody>
-          <a:bodyPr xmlns:a="http://schemas.openxmlformats.org/drawingml/2006/main" wrap="square" lIns="0" tIns="0" rIns="0" bIns="0" anchor="t">
+              <a:t>EXIT EVIDENCE</a:t>
+            </a:r>
+          </a:p>
+        </p:txBody>
+      </p:sp>
+      <p:sp>
+        <p:nvSpPr>
+          <p:cNvPr id="107" name="apigee-phase-exit-A6">
+            <a:extLst xmlns:a="http://schemas.openxmlformats.org/drawingml/2006/main">
+              <a:ext uri="{FF2B5EF4-FFF2-40B4-BE49-F238E27FC236}">
+                <a16:creationId xmlns:a16="http://schemas.microsoft.com/office/drawing/2014/main" id="{A8D09B74-8112-497F-9353-4B65A96D32A8}"/>
+              </a:ext>
+            </a:extLst>
+          </p:cNvPr>
+          <p:cNvSpPr>
+            <a:spLocks xmlns:a="http://schemas.openxmlformats.org/drawingml/2006/main" noGrp="1"/>
+          </p:cNvSpPr>
+          <p:nvPr/>
+        </p:nvSpPr>
+        <p:spPr>
+          <a:xfrm xmlns:a="http://schemas.openxmlformats.org/drawingml/2006/main">
+            <a:off x="10191750" y="3810000"/>
+            <a:ext cx="1295400" cy="990600"/>
+          </a:xfrm>
+          <a:prstGeom xmlns:a="http://schemas.openxmlformats.org/drawingml/2006/main" prst="rect">
+            <a:avLst/>
+          </a:prstGeom>
+          <a:noFill xmlns:a="http://schemas.openxmlformats.org/drawingml/2006/main"/>
+          <a:ln xmlns:a="http://schemas.openxmlformats.org/drawingml/2006/main" w="0">
+            <a:solidFill>
+              <a:srgbClr val="FFFCF5"/>
+            </a:solidFill>
+            <a:prstDash val="solid"/>
+          </a:ln>
+        </p:spPr>
+        <p:txBody>
+          <a:bodyPr xmlns:a="http://schemas.openxmlformats.org/drawingml/2006/main" lIns="28575" tIns="19050" rIns="28575" bIns="19050" anchor="t">
             <a:normAutofit fontScale="100000"/>
           </a:bodyPr>
           <a:lstStyle xmlns:a="http://schemas.openxmlformats.org/drawingml/2006/main"/>
           <a:p xmlns:a="http://schemas.openxmlformats.org/drawingml/2006/main">
             <a:pPr algn="l">
-              <a:buNone/>
-              <a:defRPr sz="1200" b="0" i="0">
-                <a:solidFill>
-                  <a:srgbClr val="111111"/>
-                </a:solidFill>
-                <a:latin typeface="Arial"/>
-                <a:ea typeface="Arial"/>
-                <a:cs typeface="Arial"/>
-              </a:defRPr>
-            </a:pPr>
-            <a:r>
-              <a:rPr sz="1200" b="0" i="0">
-                <a:solidFill>
-                  <a:srgbClr val="111111"/>
-                </a:solidFill>
-                <a:latin typeface="Arial"/>
-                <a:ea typeface="Arial"/>
-                <a:cs typeface="Arial"/>
-              </a:rPr>
-              <a:t>BOM + APIOps + IAM</a:t>
-            </a:r>
-          </a:p>
-        </p:txBody>
-      </p:sp>
-      <p:sp>
-        <p:nvSpPr>
-          <p:cNvPr id="30" name="">
-            <a:extLst xmlns:a="http://schemas.openxmlformats.org/drawingml/2006/main">
-              <a:ext uri="{FF2B5EF4-FFF2-40B4-BE49-F238E27FC236}">
-                <a16:creationId xmlns:a16="http://schemas.microsoft.com/office/drawing/2014/main" id="{CBD5E62D-4AC1-432C-B37B-9D6C44DE450B}"/>
-              </a:ext>
-            </a:extLst>
-          </p:cNvPr>
-          <p:cNvSpPr>
-            <a:spLocks xmlns:a="http://schemas.openxmlformats.org/drawingml/2006/main" noGrp="1"/>
-          </p:cNvSpPr>
-          <p:nvPr/>
-        </p:nvSpPr>
-        <p:spPr>
-          <a:xfrm xmlns:a="http://schemas.openxmlformats.org/drawingml/2006/main">
-            <a:off x="4305300" y="4591050"/>
-            <a:ext cx="1562100" cy="171450"/>
-          </a:xfrm>
-          <a:prstGeom xmlns:a="http://schemas.openxmlformats.org/drawingml/2006/main" prst="rect">
-            <a:avLst/>
-          </a:prstGeom>
-          <a:noFill xmlns:a="http://schemas.openxmlformats.org/drawingml/2006/main"/>
-          <a:ln xmlns:a="http://schemas.openxmlformats.org/drawingml/2006/main" w="0">
-            <a:noFill/>
-            <a:prstDash val="solid"/>
-          </a:ln>
-        </p:spPr>
-        <p:txBody>
-          <a:bodyPr xmlns:a="http://schemas.openxmlformats.org/drawingml/2006/main" wrap="square" lIns="0" tIns="0" rIns="0" bIns="0" anchor="t">
+              <a:lnSpc>
+                <a:spcPct val="100000"/>
+              </a:lnSpc>
+              <a:buNone/>
+              <a:defRPr sz="1200" b="0">
+                <a:solidFill>
+                  <a:srgbClr val="686A66"/>
+                </a:solidFill>
+                <a:latin typeface="Arial"/>
+                <a:ea typeface="Arial"/>
+                <a:cs typeface="Arial"/>
+              </a:defRPr>
+            </a:pPr>
+            <a:r>
+              <a:rPr sz="1200" b="0">
+                <a:solidFill>
+                  <a:srgbClr val="686A66"/>
+                </a:solidFill>
+                <a:latin typeface="Arial"/>
+                <a:ea typeface="Arial"/>
+                <a:cs typeface="Arial"/>
+              </a:rPr>
+              <a:t>No live technical, data, recovery, support or commercial dependency</a:t>
+            </a:r>
+          </a:p>
+        </p:txBody>
+      </p:sp>
+      <p:sp>
+        <p:nvSpPr>
+          <p:cNvPr id="108" name="mule-counterpart-card">
+            <a:extLst xmlns:a="http://schemas.openxmlformats.org/drawingml/2006/main">
+              <a:ext uri="{FF2B5EF4-FFF2-40B4-BE49-F238E27FC236}">
+                <a16:creationId xmlns:a16="http://schemas.microsoft.com/office/drawing/2014/main" id="{517E94BD-19D5-4A4C-B4BE-55AD69521624}"/>
+              </a:ext>
+            </a:extLst>
+          </p:cNvPr>
+          <p:cNvSpPr>
+            <a:spLocks xmlns:a="http://schemas.openxmlformats.org/drawingml/2006/main" noGrp="1"/>
+          </p:cNvSpPr>
+          <p:nvPr/>
+        </p:nvSpPr>
+        <p:spPr>
+          <a:xfrm xmlns:a="http://schemas.openxmlformats.org/drawingml/2006/main">
+            <a:off x="609600" y="5162550"/>
+            <a:ext cx="4476750" cy="1009650"/>
+          </a:xfrm>
+          <a:prstGeom xmlns:a="http://schemas.openxmlformats.org/drawingml/2006/main" prst="rect">
+            <a:avLst/>
+          </a:prstGeom>
+          <a:solidFill xmlns:a="http://schemas.openxmlformats.org/drawingml/2006/main">
+            <a:srgbClr val="FFFCF5"/>
+          </a:solidFill>
+          <a:ln xmlns:a="http://schemas.openxmlformats.org/drawingml/2006/main" w="9525">
+            <a:solidFill>
+              <a:srgbClr val="C9C6BD"/>
+            </a:solidFill>
+            <a:prstDash val="solid"/>
+          </a:ln>
+        </p:spPr>
+      </p:sp>
+      <p:sp>
+        <p:nvSpPr>
+          <p:cNvPr id="109" name="mule-counterpart-text">
+            <a:extLst xmlns:a="http://schemas.openxmlformats.org/drawingml/2006/main">
+              <a:ext uri="{FF2B5EF4-FFF2-40B4-BE49-F238E27FC236}">
+                <a16:creationId xmlns:a16="http://schemas.microsoft.com/office/drawing/2014/main" id="{85CB112C-C24E-4F5D-81B8-573BA662CF6F}"/>
+              </a:ext>
+            </a:extLst>
+          </p:cNvPr>
+          <p:cNvSpPr>
+            <a:spLocks xmlns:a="http://schemas.openxmlformats.org/drawingml/2006/main" noGrp="1"/>
+          </p:cNvSpPr>
+          <p:nvPr/>
+        </p:nvSpPr>
+        <p:spPr>
+          <a:xfrm xmlns:a="http://schemas.openxmlformats.org/drawingml/2006/main">
+            <a:off x="742950" y="5238750"/>
+            <a:ext cx="4210050" cy="838200"/>
+          </a:xfrm>
+          <a:prstGeom xmlns:a="http://schemas.openxmlformats.org/drawingml/2006/main" prst="rect">
+            <a:avLst/>
+          </a:prstGeom>
+          <a:noFill xmlns:a="http://schemas.openxmlformats.org/drawingml/2006/main"/>
+          <a:ln xmlns:a="http://schemas.openxmlformats.org/drawingml/2006/main" w="0">
+            <a:solidFill>
+              <a:srgbClr val="FFFCF5"/>
+            </a:solidFill>
+            <a:prstDash val="solid"/>
+          </a:ln>
+        </p:spPr>
+        <p:txBody>
+          <a:bodyPr xmlns:a="http://schemas.openxmlformats.org/drawingml/2006/main" lIns="28575" tIns="19050" rIns="28575" bIns="19050" anchor="t">
             <a:normAutofit fontScale="100000"/>
           </a:bodyPr>
           <a:lstStyle xmlns:a="http://schemas.openxmlformats.org/drawingml/2006/main"/>
           <a:p xmlns:a="http://schemas.openxmlformats.org/drawingml/2006/main">
             <a:pPr algn="l">
-              <a:buNone/>
-              <a:defRPr sz="900" b="1" i="0">
+              <a:lnSpc>
+                <a:spcPct val="100000"/>
+              </a:lnSpc>
+              <a:buNone/>
+              <a:defRPr sz="1200" b="0">
+                <a:solidFill>
+                  <a:srgbClr val="686A66"/>
+                </a:solidFill>
+                <a:latin typeface="Arial"/>
+                <a:ea typeface="Arial"/>
+                <a:cs typeface="Arial"/>
+              </a:defRPr>
+            </a:pPr>
+            <a:r>
+              <a:rPr sz="1200" b="1">
                 <a:solidFill>
                   <a:srgbClr val="5537D6"/>
                 </a:solidFill>
-                <a:latin typeface="Consolas"/>
-                <a:ea typeface="Consolas"/>
-                <a:cs typeface="Consolas"/>
-              </a:defRPr>
-            </a:pPr>
-            <a:r>
-              <a:rPr sz="900" b="1" i="0">
+                <a:latin typeface="Arial"/>
+                <a:ea typeface="Arial"/>
+                <a:cs typeface="Arial"/>
+                <a:hlinkClick xmlns:r="http://schemas.openxmlformats.org/officeDocument/2006/relationships" r:id="R2eb00c20980b4eb8"/>
+              </a:rPr>
+              <a:t>MULE COUNTERPART · M0–M5</a:t>
+            </a:r>
+          </a:p>
+          <a:p xmlns:a="http://schemas.openxmlformats.org/drawingml/2006/main">
+            <a:pPr algn="l">
+              <a:lnSpc>
+                <a:spcPct val="100000"/>
+              </a:lnSpc>
+              <a:buNone/>
+              <a:defRPr sz="1200" b="0">
+                <a:solidFill>
+                  <a:srgbClr val="686A66"/>
+                </a:solidFill>
+                <a:latin typeface="Arial"/>
+                <a:ea typeface="Arial"/>
+                <a:cs typeface="Arial"/>
+              </a:defRPr>
+            </a:pPr>
+            <a:r>
+              <a:rPr sz="1200" b="0">
+                <a:solidFill>
+                  <a:srgbClr val="686A66"/>
+                </a:solidFill>
+                <a:latin typeface="Arial"/>
+                <a:ea typeface="Arial"/>
+                <a:cs typeface="Arial"/>
+              </a:rPr>
+              <a:t>Inventory → gateway-dominant → hard integrations → domain factory → connector/batch tail → dependency zero</a:t>
+            </a:r>
+          </a:p>
+        </p:txBody>
+      </p:sp>
+      <p:sp>
+        <p:nvSpPr>
+          <p:cNvPr id="110" name="common-gates-card">
+            <a:extLst xmlns:a="http://schemas.openxmlformats.org/drawingml/2006/main">
+              <a:ext uri="{FF2B5EF4-FFF2-40B4-BE49-F238E27FC236}">
+                <a16:creationId xmlns:a16="http://schemas.microsoft.com/office/drawing/2014/main" id="{DC77CD76-20DB-4EBC-83D0-ACBDF1986C42}"/>
+              </a:ext>
+            </a:extLst>
+          </p:cNvPr>
+          <p:cNvSpPr>
+            <a:spLocks xmlns:a="http://schemas.openxmlformats.org/drawingml/2006/main" noGrp="1"/>
+          </p:cNvSpPr>
+          <p:nvPr/>
+        </p:nvSpPr>
+        <p:spPr>
+          <a:xfrm xmlns:a="http://schemas.openxmlformats.org/drawingml/2006/main">
+            <a:off x="5219700" y="5162550"/>
+            <a:ext cx="6362700" cy="1009650"/>
+          </a:xfrm>
+          <a:prstGeom xmlns:a="http://schemas.openxmlformats.org/drawingml/2006/main" prst="rect">
+            <a:avLst/>
+          </a:prstGeom>
+          <a:solidFill xmlns:a="http://schemas.openxmlformats.org/drawingml/2006/main">
+            <a:srgbClr val="FFFCF5"/>
+          </a:solidFill>
+          <a:ln xmlns:a="http://schemas.openxmlformats.org/drawingml/2006/main" w="9525">
+            <a:solidFill>
+              <a:srgbClr val="C9C6BD"/>
+            </a:solidFill>
+            <a:prstDash val="solid"/>
+          </a:ln>
+        </p:spPr>
+      </p:sp>
+      <p:sp>
+        <p:nvSpPr>
+          <p:cNvPr id="111" name="common-gates-text">
+            <a:extLst xmlns:a="http://schemas.openxmlformats.org/drawingml/2006/main">
+              <a:ext uri="{FF2B5EF4-FFF2-40B4-BE49-F238E27FC236}">
+                <a16:creationId xmlns:a16="http://schemas.microsoft.com/office/drawing/2014/main" id="{0DB49931-05A0-4255-9329-EC894CDA13BE}"/>
+              </a:ext>
+            </a:extLst>
+          </p:cNvPr>
+          <p:cNvSpPr>
+            <a:spLocks xmlns:a="http://schemas.openxmlformats.org/drawingml/2006/main" noGrp="1"/>
+          </p:cNvSpPr>
+          <p:nvPr/>
+        </p:nvSpPr>
+        <p:spPr>
+          <a:xfrm xmlns:a="http://schemas.openxmlformats.org/drawingml/2006/main">
+            <a:off x="5353050" y="5238750"/>
+            <a:ext cx="6096000" cy="857250"/>
+          </a:xfrm>
+          <a:prstGeom xmlns:a="http://schemas.openxmlformats.org/drawingml/2006/main" prst="rect">
+            <a:avLst/>
+          </a:prstGeom>
+          <a:noFill xmlns:a="http://schemas.openxmlformats.org/drawingml/2006/main"/>
+          <a:ln xmlns:a="http://schemas.openxmlformats.org/drawingml/2006/main" w="0">
+            <a:solidFill>
+              <a:srgbClr val="FFFCF5"/>
+            </a:solidFill>
+            <a:prstDash val="solid"/>
+          </a:ln>
+        </p:spPr>
+        <p:txBody>
+          <a:bodyPr xmlns:a="http://schemas.openxmlformats.org/drawingml/2006/main" lIns="28575" tIns="19050" rIns="28575" bIns="19050" anchor="t">
+            <a:normAutofit fontScale="100000"/>
+          </a:bodyPr>
+          <a:lstStyle xmlns:a="http://schemas.openxmlformats.org/drawingml/2006/main"/>
+          <a:p xmlns:a="http://schemas.openxmlformats.org/drawingml/2006/main">
+            <a:pPr algn="l">
+              <a:lnSpc>
+                <a:spcPct val="100000"/>
+              </a:lnSpc>
+              <a:buNone/>
+              <a:defRPr sz="1200" b="0">
+                <a:solidFill>
+                  <a:srgbClr val="686A66"/>
+                </a:solidFill>
+                <a:latin typeface="Arial"/>
+                <a:ea typeface="Arial"/>
+                <a:cs typeface="Arial"/>
+              </a:defRPr>
+            </a:pPr>
+            <a:r>
+              <a:rPr sz="1200" b="1">
                 <a:solidFill>
                   <a:srgbClr val="5537D6"/>
                 </a:solidFill>
-                <a:latin typeface="Consolas"/>
-                <a:ea typeface="Consolas"/>
-                <a:cs typeface="Consolas"/>
-              </a:rPr>
-              <a:t>EXIT</a:t>
-            </a:r>
-          </a:p>
-        </p:txBody>
-      </p:sp>
-      <p:sp>
-        <p:nvSpPr>
-          <p:cNvPr id="31" name="">
-            <a:extLst xmlns:a="http://schemas.openxmlformats.org/drawingml/2006/main">
-              <a:ext uri="{FF2B5EF4-FFF2-40B4-BE49-F238E27FC236}">
-                <a16:creationId xmlns:a16="http://schemas.microsoft.com/office/drawing/2014/main" id="{DCF0E3E2-46D4-46FD-8097-C8FA0C5AF200}"/>
-              </a:ext>
-            </a:extLst>
-          </p:cNvPr>
-          <p:cNvSpPr>
-            <a:spLocks xmlns:a="http://schemas.openxmlformats.org/drawingml/2006/main" noGrp="1"/>
-          </p:cNvSpPr>
-          <p:nvPr/>
-        </p:nvSpPr>
-        <p:spPr>
-          <a:xfrm xmlns:a="http://schemas.openxmlformats.org/drawingml/2006/main">
-            <a:off x="4305300" y="4838700"/>
-            <a:ext cx="1562100" cy="628650"/>
-          </a:xfrm>
-          <a:prstGeom xmlns:a="http://schemas.openxmlformats.org/drawingml/2006/main" prst="rect">
-            <a:avLst/>
-          </a:prstGeom>
-          <a:noFill xmlns:a="http://schemas.openxmlformats.org/drawingml/2006/main"/>
-          <a:ln xmlns:a="http://schemas.openxmlformats.org/drawingml/2006/main" w="0">
-            <a:noFill/>
-            <a:prstDash val="solid"/>
-          </a:ln>
-        </p:spPr>
-        <p:txBody>
-          <a:bodyPr xmlns:a="http://schemas.openxmlformats.org/drawingml/2006/main" wrap="square" lIns="0" tIns="0" rIns="0" bIns="0" anchor="t">
-            <a:normAutofit fontScale="100000"/>
-          </a:bodyPr>
-          <a:lstStyle xmlns:a="http://schemas.openxmlformats.org/drawingml/2006/main"/>
+                <a:latin typeface="Arial"/>
+                <a:ea typeface="Arial"/>
+                <a:cs typeface="Arial"/>
+              </a:rPr>
+              <a:t>COMMON GATES</a:t>
+            </a:r>
+          </a:p>
           <a:p xmlns:a="http://schemas.openxmlformats.org/drawingml/2006/main">
             <a:pPr algn="l">
-              <a:buNone/>
-              <a:defRPr sz="1200" b="0" i="0">
-                <a:solidFill>
-                  <a:srgbClr val="111111"/>
-                </a:solidFill>
-                <a:latin typeface="Arial"/>
-                <a:ea typeface="Arial"/>
-                <a:cs typeface="Arial"/>
-              </a:defRPr>
-            </a:pPr>
-            <a:r>
-              <a:rPr sz="1200" b="0" i="0">
-                <a:solidFill>
-                  <a:srgbClr val="111111"/>
-                </a:solidFill>
-                <a:latin typeface="Arial"/>
-                <a:ea typeface="Arial"/>
-                <a:cs typeface="Arial"/>
-              </a:rPr>
-              <a:t>restore + route-back</a:t>
-            </a:r>
-          </a:p>
-        </p:txBody>
-      </p:sp>
-      <p:sp>
-        <p:nvSpPr>
-          <p:cNvPr id="32" name="">
-            <a:extLst xmlns:a="http://schemas.openxmlformats.org/drawingml/2006/main">
-              <a:ext uri="{FF2B5EF4-FFF2-40B4-BE49-F238E27FC236}">
-                <a16:creationId xmlns:a16="http://schemas.microsoft.com/office/drawing/2014/main" id="{6C449830-8C32-42D2-A77C-9FC908B314C7}"/>
-              </a:ext>
-            </a:extLst>
-          </p:cNvPr>
-          <p:cNvSpPr>
-            <a:spLocks xmlns:a="http://schemas.openxmlformats.org/drawingml/2006/main" noGrp="1"/>
-          </p:cNvSpPr>
-          <p:nvPr/>
-        </p:nvSpPr>
-        <p:spPr>
-          <a:xfrm xmlns:a="http://schemas.openxmlformats.org/drawingml/2006/main">
-            <a:off x="5867400" y="3257550"/>
-            <a:ext cx="247650" cy="266700"/>
-          </a:xfrm>
-          <a:prstGeom xmlns:a="http://schemas.openxmlformats.org/drawingml/2006/main" prst="chevron">
-            <a:avLst/>
-          </a:prstGeom>
-          <a:solidFill xmlns:a="http://schemas.openxmlformats.org/drawingml/2006/main">
-            <a:srgbClr val="FFC72C"/>
-          </a:solidFill>
-          <a:ln xmlns:a="http://schemas.openxmlformats.org/drawingml/2006/main" w="0">
-            <a:noFill/>
-            <a:prstDash val="solid"/>
-          </a:ln>
-        </p:spPr>
-      </p:sp>
-      <p:sp>
-        <p:nvSpPr>
-          <p:cNvPr id="33" name="">
-            <a:extLst xmlns:a="http://schemas.openxmlformats.org/drawingml/2006/main">
-              <a:ext uri="{FF2B5EF4-FFF2-40B4-BE49-F238E27FC236}">
-                <a16:creationId xmlns:a16="http://schemas.microsoft.com/office/drawing/2014/main" id="{948FFFE3-FBDE-41A0-B09A-28B219EA9029}"/>
-              </a:ext>
-            </a:extLst>
-          </p:cNvPr>
-          <p:cNvSpPr>
-            <a:spLocks xmlns:a="http://schemas.openxmlformats.org/drawingml/2006/main" noGrp="1"/>
-          </p:cNvSpPr>
-          <p:nvPr/>
-        </p:nvSpPr>
-        <p:spPr>
-          <a:xfrm xmlns:a="http://schemas.openxmlformats.org/drawingml/2006/main">
-            <a:off x="6115050" y="2266950"/>
-            <a:ext cx="571500" cy="266700"/>
-          </a:xfrm>
-          <a:prstGeom xmlns:a="http://schemas.openxmlformats.org/drawingml/2006/main" prst="rect">
-            <a:avLst/>
-          </a:prstGeom>
-          <a:noFill xmlns:a="http://schemas.openxmlformats.org/drawingml/2006/main"/>
-          <a:ln xmlns:a="http://schemas.openxmlformats.org/drawingml/2006/main" w="0">
-            <a:noFill/>
-            <a:prstDash val="solid"/>
-          </a:ln>
-        </p:spPr>
-        <p:txBody>
-          <a:bodyPr xmlns:a="http://schemas.openxmlformats.org/drawingml/2006/main" wrap="square" lIns="0" tIns="0" rIns="0" bIns="0" anchor="t">
-            <a:normAutofit fontScale="100000"/>
-          </a:bodyPr>
-          <a:lstStyle xmlns:a="http://schemas.openxmlformats.org/drawingml/2006/main"/>
+              <a:lnSpc>
+                <a:spcPct val="100000"/>
+              </a:lnSpc>
+              <a:buNone/>
+              <a:defRPr sz="1200" b="0">
+                <a:solidFill>
+                  <a:srgbClr val="686A66"/>
+                </a:solidFill>
+                <a:latin typeface="Arial"/>
+                <a:ea typeface="Arial"/>
+                <a:cs typeface="Arial"/>
+              </a:defRPr>
+            </a:pPr>
+            <a:r>
+              <a:rPr sz="1200" b="0">
+                <a:solidFill>
+                  <a:srgbClr val="686A66"/>
+                </a:solidFill>
+                <a:latin typeface="Arial"/>
+                <a:ea typeface="Arial"/>
+                <a:cs typeface="Arial"/>
+              </a:rPr>
+              <a:t>Source truth → semantics → reversible foundation → parity → route-back → production evidence → dependency zero</a:t>
+            </a:r>
+          </a:p>
           <a:p xmlns:a="http://schemas.openxmlformats.org/drawingml/2006/main">
             <a:pPr algn="l">
-              <a:buNone/>
-              <a:defRPr sz="1275" b="1" i="0">
-                <a:solidFill>
-                  <a:srgbClr val="5537D6"/>
-                </a:solidFill>
-                <a:latin typeface="Consolas"/>
-                <a:ea typeface="Consolas"/>
-                <a:cs typeface="Consolas"/>
-              </a:defRPr>
-            </a:pPr>
-            <a:r>
-              <a:rPr sz="1275" b="1" i="0">
-                <a:solidFill>
-                  <a:srgbClr val="5537D6"/>
-                </a:solidFill>
-                <a:latin typeface="Consolas"/>
-                <a:ea typeface="Consolas"/>
-                <a:cs typeface="Consolas"/>
-              </a:rPr>
-              <a:t>M3/A3</a:t>
-            </a:r>
-          </a:p>
-        </p:txBody>
-      </p:sp>
-      <p:sp>
-        <p:nvSpPr>
-          <p:cNvPr id="34" name="">
-            <a:extLst xmlns:a="http://schemas.openxmlformats.org/drawingml/2006/main">
-              <a:ext uri="{FF2B5EF4-FFF2-40B4-BE49-F238E27FC236}">
-                <a16:creationId xmlns:a16="http://schemas.microsoft.com/office/drawing/2014/main" id="{7839A2E5-8C3F-492D-B203-872CFF333311}"/>
-              </a:ext>
-            </a:extLst>
-          </p:cNvPr>
-          <p:cNvSpPr>
-            <a:spLocks xmlns:a="http://schemas.openxmlformats.org/drawingml/2006/main" noGrp="1"/>
-          </p:cNvSpPr>
-          <p:nvPr/>
-        </p:nvSpPr>
-        <p:spPr>
-          <a:xfrm xmlns:a="http://schemas.openxmlformats.org/drawingml/2006/main">
-            <a:off x="6115050" y="2619375"/>
-            <a:ext cx="1581150" cy="609600"/>
-          </a:xfrm>
-          <a:prstGeom xmlns:a="http://schemas.openxmlformats.org/drawingml/2006/main" prst="rect">
-            <a:avLst/>
-          </a:prstGeom>
-          <a:noFill xmlns:a="http://schemas.openxmlformats.org/drawingml/2006/main"/>
-          <a:ln xmlns:a="http://schemas.openxmlformats.org/drawingml/2006/main" w="0">
-            <a:noFill/>
-            <a:prstDash val="solid"/>
-          </a:ln>
-        </p:spPr>
-        <p:txBody>
-          <a:bodyPr xmlns:a="http://schemas.openxmlformats.org/drawingml/2006/main" wrap="square" lIns="0" tIns="0" rIns="0" bIns="0" anchor="t">
-            <a:normAutofit fontScale="100000"/>
-          </a:bodyPr>
-          <a:lstStyle xmlns:a="http://schemas.openxmlformats.org/drawingml/2006/main"/>
-          <a:p xmlns:a="http://schemas.openxmlformats.org/drawingml/2006/main">
-            <a:pPr algn="l">
-              <a:buNone/>
-              <a:defRPr sz="1725" b="0" i="0">
-                <a:solidFill>
-                  <a:srgbClr val="111111"/>
-                </a:solidFill>
-                <a:latin typeface="Georgia"/>
-                <a:ea typeface="Georgia"/>
-                <a:cs typeface="Georgia"/>
-              </a:defRPr>
-            </a:pPr>
-            <a:r>
-              <a:rPr sz="1725" b="0" i="0">
-                <a:solidFill>
-                  <a:srgbClr val="111111"/>
-                </a:solidFill>
-                <a:latin typeface="Georgia"/>
-                <a:ea typeface="Georgia"/>
-                <a:cs typeface="Georgia"/>
-              </a:rPr>
-              <a:t>Representative</a:t>
-            </a:r>
-          </a:p>
-          <a:p xmlns:a="http://schemas.openxmlformats.org/drawingml/2006/main">
-            <a:pPr algn="l">
-              <a:buNone/>
-              <a:defRPr sz="1725" b="0" i="0">
-                <a:solidFill>
-                  <a:srgbClr val="111111"/>
-                </a:solidFill>
-                <a:latin typeface="Georgia"/>
-                <a:ea typeface="Georgia"/>
-                <a:cs typeface="Georgia"/>
-              </a:defRPr>
-            </a:pPr>
-            <a:r>
-              <a:rPr sz="1725" b="0" i="0">
-                <a:solidFill>
-                  <a:srgbClr val="111111"/>
-                </a:solidFill>
-                <a:latin typeface="Georgia"/>
-                <a:ea typeface="Georgia"/>
-                <a:cs typeface="Georgia"/>
-              </a:rPr>
-              <a:t>parity</a:t>
-            </a:r>
-          </a:p>
-        </p:txBody>
-      </p:sp>
-      <p:sp>
-        <p:nvSpPr>
-          <p:cNvPr id="35" name="">
-            <a:extLst xmlns:a="http://schemas.openxmlformats.org/drawingml/2006/main">
-              <a:ext uri="{FF2B5EF4-FFF2-40B4-BE49-F238E27FC236}">
-                <a16:creationId xmlns:a16="http://schemas.microsoft.com/office/drawing/2014/main" id="{47F8EBF8-DB8E-4A31-88D7-00073ED9F2BF}"/>
-              </a:ext>
-            </a:extLst>
-          </p:cNvPr>
-          <p:cNvSpPr>
-            <a:spLocks xmlns:a="http://schemas.openxmlformats.org/drawingml/2006/main" noGrp="1"/>
-          </p:cNvSpPr>
-          <p:nvPr/>
-        </p:nvSpPr>
-        <p:spPr>
-          <a:xfrm xmlns:a="http://schemas.openxmlformats.org/drawingml/2006/main">
-            <a:off x="6115050" y="3324225"/>
-            <a:ext cx="1562100" cy="19050"/>
-          </a:xfrm>
-          <a:prstGeom xmlns:a="http://schemas.openxmlformats.org/drawingml/2006/main" prst="rect">
-            <a:avLst/>
-          </a:prstGeom>
-          <a:solidFill xmlns:a="http://schemas.openxmlformats.org/drawingml/2006/main">
-            <a:srgbClr val="8A8B86"/>
-          </a:solidFill>
-          <a:ln xmlns:a="http://schemas.openxmlformats.org/drawingml/2006/main" w="0">
-            <a:noFill/>
-            <a:prstDash val="solid"/>
-          </a:ln>
-        </p:spPr>
-      </p:sp>
-      <p:sp>
-        <p:nvSpPr>
-          <p:cNvPr id="36" name="">
-            <a:extLst xmlns:a="http://schemas.openxmlformats.org/drawingml/2006/main">
-              <a:ext uri="{FF2B5EF4-FFF2-40B4-BE49-F238E27FC236}">
-                <a16:creationId xmlns:a16="http://schemas.microsoft.com/office/drawing/2014/main" id="{EFCD4FB7-B737-4578-8EA5-1AE289E183DA}"/>
-              </a:ext>
-            </a:extLst>
-          </p:cNvPr>
-          <p:cNvSpPr>
-            <a:spLocks xmlns:a="http://schemas.openxmlformats.org/drawingml/2006/main" noGrp="1"/>
-          </p:cNvSpPr>
-          <p:nvPr/>
-        </p:nvSpPr>
-        <p:spPr>
-          <a:xfrm xmlns:a="http://schemas.openxmlformats.org/drawingml/2006/main">
-            <a:off x="6115050" y="3533775"/>
-            <a:ext cx="1562100" cy="171450"/>
-          </a:xfrm>
-          <a:prstGeom xmlns:a="http://schemas.openxmlformats.org/drawingml/2006/main" prst="rect">
-            <a:avLst/>
-          </a:prstGeom>
-          <a:noFill xmlns:a="http://schemas.openxmlformats.org/drawingml/2006/main"/>
-          <a:ln xmlns:a="http://schemas.openxmlformats.org/drawingml/2006/main" w="0">
-            <a:noFill/>
-            <a:prstDash val="solid"/>
-          </a:ln>
-        </p:spPr>
-        <p:txBody>
-          <a:bodyPr xmlns:a="http://schemas.openxmlformats.org/drawingml/2006/main" wrap="square" lIns="0" tIns="0" rIns="0" bIns="0" anchor="t">
-            <a:normAutofit fontScale="100000"/>
-          </a:bodyPr>
-          <a:lstStyle xmlns:a="http://schemas.openxmlformats.org/drawingml/2006/main"/>
-          <a:p xmlns:a="http://schemas.openxmlformats.org/drawingml/2006/main">
-            <a:pPr algn="l">
-              <a:buNone/>
-              <a:defRPr sz="900" b="1" i="0">
+              <a:lnSpc>
+                <a:spcPct val="100000"/>
+              </a:lnSpc>
+              <a:buNone/>
+              <a:defRPr sz="1200" b="0">
                 <a:solidFill>
                   <a:srgbClr val="686A66"/>
                 </a:solidFill>
-                <a:latin typeface="Consolas"/>
-                <a:ea typeface="Consolas"/>
-                <a:cs typeface="Consolas"/>
-              </a:defRPr>
-            </a:pPr>
-            <a:r>
-              <a:rPr sz="900" b="1" i="0">
+                <a:latin typeface="Arial"/>
+                <a:ea typeface="Arial"/>
+                <a:cs typeface="Arial"/>
+              </a:defRPr>
+            </a:pPr>
+            <a:r>
+              <a:rPr sz="1200" b="0">
                 <a:solidFill>
                   <a:srgbClr val="686A66"/>
                 </a:solidFill>
-                <a:latin typeface="Consolas"/>
-                <a:ea typeface="Consolas"/>
-                <a:cs typeface="Consolas"/>
-              </a:rPr>
-              <a:t>ENTRY</a:t>
-            </a:r>
-          </a:p>
-        </p:txBody>
-      </p:sp>
-      <p:sp>
-        <p:nvSpPr>
-          <p:cNvPr id="37" name="">
-            <a:extLst xmlns:a="http://schemas.openxmlformats.org/drawingml/2006/main">
-              <a:ext uri="{FF2B5EF4-FFF2-40B4-BE49-F238E27FC236}">
-                <a16:creationId xmlns:a16="http://schemas.microsoft.com/office/drawing/2014/main" id="{2DAD44DF-5785-4702-8980-98B134781902}"/>
-              </a:ext>
-            </a:extLst>
-          </p:cNvPr>
-          <p:cNvSpPr>
-            <a:spLocks xmlns:a="http://schemas.openxmlformats.org/drawingml/2006/main" noGrp="1"/>
-          </p:cNvSpPr>
-          <p:nvPr/>
-        </p:nvSpPr>
-        <p:spPr>
-          <a:xfrm xmlns:a="http://schemas.openxmlformats.org/drawingml/2006/main">
-            <a:off x="6115050" y="3781425"/>
-            <a:ext cx="1562100" cy="628650"/>
-          </a:xfrm>
-          <a:prstGeom xmlns:a="http://schemas.openxmlformats.org/drawingml/2006/main" prst="rect">
-            <a:avLst/>
-          </a:prstGeom>
-          <a:noFill xmlns:a="http://schemas.openxmlformats.org/drawingml/2006/main"/>
-          <a:ln xmlns:a="http://schemas.openxmlformats.org/drawingml/2006/main" w="0">
-            <a:noFill/>
-            <a:prstDash val="solid"/>
-          </a:ln>
-        </p:spPr>
-        <p:txBody>
-          <a:bodyPr xmlns:a="http://schemas.openxmlformats.org/drawingml/2006/main" wrap="square" lIns="0" tIns="0" rIns="0" bIns="0" anchor="t">
-            <a:normAutofit fontScale="100000"/>
-          </a:bodyPr>
-          <a:lstStyle xmlns:a="http://schemas.openxmlformats.org/drawingml/2006/main"/>
-          <a:p xmlns:a="http://schemas.openxmlformats.org/drawingml/2006/main">
-            <a:pPr algn="l">
-              <a:buNone/>
-              <a:defRPr sz="1200" b="0" i="0">
-                <a:solidFill>
-                  <a:srgbClr val="111111"/>
-                </a:solidFill>
-                <a:latin typeface="Arial"/>
-                <a:ea typeface="Arial"/>
-                <a:cs typeface="Arial"/>
-              </a:defRPr>
-            </a:pPr>
-            <a:r>
-              <a:rPr sz="1200" b="0" i="0">
-                <a:solidFill>
-                  <a:srgbClr val="111111"/>
-                </a:solidFill>
-                <a:latin typeface="Arial"/>
-                <a:ea typeface="Arial"/>
-                <a:cs typeface="Arial"/>
-              </a:rPr>
-              <a:t>hard slice + corpus</a:t>
-            </a:r>
-          </a:p>
-        </p:txBody>
-      </p:sp>
-      <p:sp>
-        <p:nvSpPr>
-          <p:cNvPr id="38" name="">
-            <a:extLst xmlns:a="http://schemas.openxmlformats.org/drawingml/2006/main">
-              <a:ext uri="{FF2B5EF4-FFF2-40B4-BE49-F238E27FC236}">
-                <a16:creationId xmlns:a16="http://schemas.microsoft.com/office/drawing/2014/main" id="{A1A78462-D3AA-4CE7-A09A-6C82CA757FD6}"/>
-              </a:ext>
-            </a:extLst>
-          </p:cNvPr>
-          <p:cNvSpPr>
-            <a:spLocks xmlns:a="http://schemas.openxmlformats.org/drawingml/2006/main" noGrp="1"/>
-          </p:cNvSpPr>
-          <p:nvPr/>
-        </p:nvSpPr>
-        <p:spPr>
-          <a:xfrm xmlns:a="http://schemas.openxmlformats.org/drawingml/2006/main">
-            <a:off x="6115050" y="4591050"/>
-            <a:ext cx="1562100" cy="171450"/>
-          </a:xfrm>
-          <a:prstGeom xmlns:a="http://schemas.openxmlformats.org/drawingml/2006/main" prst="rect">
-            <a:avLst/>
-          </a:prstGeom>
-          <a:noFill xmlns:a="http://schemas.openxmlformats.org/drawingml/2006/main"/>
-          <a:ln xmlns:a="http://schemas.openxmlformats.org/drawingml/2006/main" w="0">
-            <a:noFill/>
-            <a:prstDash val="solid"/>
-          </a:ln>
-        </p:spPr>
-        <p:txBody>
-          <a:bodyPr xmlns:a="http://schemas.openxmlformats.org/drawingml/2006/main" wrap="square" lIns="0" tIns="0" rIns="0" bIns="0" anchor="t">
-            <a:normAutofit fontScale="100000"/>
-          </a:bodyPr>
-          <a:lstStyle xmlns:a="http://schemas.openxmlformats.org/drawingml/2006/main"/>
-          <a:p xmlns:a="http://schemas.openxmlformats.org/drawingml/2006/main">
-            <a:pPr algn="l">
-              <a:buNone/>
-              <a:defRPr sz="900" b="1" i="0">
-                <a:solidFill>
-                  <a:srgbClr val="5537D6"/>
-                </a:solidFill>
-                <a:latin typeface="Consolas"/>
-                <a:ea typeface="Consolas"/>
-                <a:cs typeface="Consolas"/>
-              </a:defRPr>
-            </a:pPr>
-            <a:r>
-              <a:rPr sz="900" b="1" i="0">
-                <a:solidFill>
-                  <a:srgbClr val="5537D6"/>
-                </a:solidFill>
-                <a:latin typeface="Consolas"/>
-                <a:ea typeface="Consolas"/>
-                <a:cs typeface="Consolas"/>
-              </a:rPr>
-              <a:t>EXIT</a:t>
-            </a:r>
-          </a:p>
-        </p:txBody>
-      </p:sp>
-      <p:sp>
-        <p:nvSpPr>
-          <p:cNvPr id="39" name="">
-            <a:extLst xmlns:a="http://schemas.openxmlformats.org/drawingml/2006/main">
-              <a:ext uri="{FF2B5EF4-FFF2-40B4-BE49-F238E27FC236}">
-                <a16:creationId xmlns:a16="http://schemas.microsoft.com/office/drawing/2014/main" id="{C49A9F85-AB3B-4372-B362-186EF2AA90C8}"/>
-              </a:ext>
-            </a:extLst>
-          </p:cNvPr>
-          <p:cNvSpPr>
-            <a:spLocks xmlns:a="http://schemas.openxmlformats.org/drawingml/2006/main" noGrp="1"/>
-          </p:cNvSpPr>
-          <p:nvPr/>
-        </p:nvSpPr>
-        <p:spPr>
-          <a:xfrm xmlns:a="http://schemas.openxmlformats.org/drawingml/2006/main">
-            <a:off x="6115050" y="4838700"/>
-            <a:ext cx="1562100" cy="628650"/>
-          </a:xfrm>
-          <a:prstGeom xmlns:a="http://schemas.openxmlformats.org/drawingml/2006/main" prst="rect">
-            <a:avLst/>
-          </a:prstGeom>
-          <a:noFill xmlns:a="http://schemas.openxmlformats.org/drawingml/2006/main"/>
-          <a:ln xmlns:a="http://schemas.openxmlformats.org/drawingml/2006/main" w="0">
-            <a:noFill/>
-            <a:prstDash val="solid"/>
-          </a:ln>
-        </p:spPr>
-        <p:txBody>
-          <a:bodyPr xmlns:a="http://schemas.openxmlformats.org/drawingml/2006/main" wrap="square" lIns="0" tIns="0" rIns="0" bIns="0" anchor="t">
-            <a:normAutofit fontScale="100000"/>
-          </a:bodyPr>
-          <a:lstStyle xmlns:a="http://schemas.openxmlformats.org/drawingml/2006/main"/>
-          <a:p xmlns:a="http://schemas.openxmlformats.org/drawingml/2006/main">
-            <a:pPr algn="l">
-              <a:buNone/>
-              <a:defRPr sz="1200" b="0" i="0">
-                <a:solidFill>
-                  <a:srgbClr val="111111"/>
-                </a:solidFill>
-                <a:latin typeface="Arial"/>
-                <a:ea typeface="Arial"/>
-                <a:cs typeface="Arial"/>
-              </a:defRPr>
-            </a:pPr>
-            <a:r>
-              <a:rPr sz="1200" b="0" i="0">
-                <a:solidFill>
-                  <a:srgbClr val="111111"/>
-                </a:solidFill>
-                <a:latin typeface="Arial"/>
-                <a:ea typeface="Arial"/>
-                <a:cs typeface="Arial"/>
-              </a:rPr>
-              <a:t>security + state + SLO</a:t>
-            </a:r>
-          </a:p>
-        </p:txBody>
-      </p:sp>
-      <p:sp>
-        <p:nvSpPr>
-          <p:cNvPr id="40" name="">
-            <a:extLst xmlns:a="http://schemas.openxmlformats.org/drawingml/2006/main">
-              <a:ext uri="{FF2B5EF4-FFF2-40B4-BE49-F238E27FC236}">
-                <a16:creationId xmlns:a16="http://schemas.microsoft.com/office/drawing/2014/main" id="{99E9F76F-4F19-49CB-B5E9-664B09D4F913}"/>
-              </a:ext>
-            </a:extLst>
-          </p:cNvPr>
-          <p:cNvSpPr>
-            <a:spLocks xmlns:a="http://schemas.openxmlformats.org/drawingml/2006/main" noGrp="1"/>
-          </p:cNvSpPr>
-          <p:nvPr/>
-        </p:nvSpPr>
-        <p:spPr>
-          <a:xfrm xmlns:a="http://schemas.openxmlformats.org/drawingml/2006/main">
-            <a:off x="7677150" y="3257550"/>
-            <a:ext cx="247650" cy="266700"/>
-          </a:xfrm>
-          <a:prstGeom xmlns:a="http://schemas.openxmlformats.org/drawingml/2006/main" prst="chevron">
-            <a:avLst/>
-          </a:prstGeom>
-          <a:solidFill xmlns:a="http://schemas.openxmlformats.org/drawingml/2006/main">
-            <a:srgbClr val="FFC72C"/>
-          </a:solidFill>
-          <a:ln xmlns:a="http://schemas.openxmlformats.org/drawingml/2006/main" w="0">
-            <a:noFill/>
-            <a:prstDash val="solid"/>
-          </a:ln>
-        </p:spPr>
-      </p:sp>
-      <p:sp>
-        <p:nvSpPr>
-          <p:cNvPr id="41" name="">
-            <a:extLst xmlns:a="http://schemas.openxmlformats.org/drawingml/2006/main">
-              <a:ext uri="{FF2B5EF4-FFF2-40B4-BE49-F238E27FC236}">
-                <a16:creationId xmlns:a16="http://schemas.microsoft.com/office/drawing/2014/main" id="{2CC33005-25BC-457E-8411-0C4B8DC47B8D}"/>
-              </a:ext>
-            </a:extLst>
-          </p:cNvPr>
-          <p:cNvSpPr>
-            <a:spLocks xmlns:a="http://schemas.openxmlformats.org/drawingml/2006/main" noGrp="1"/>
-          </p:cNvSpPr>
-          <p:nvPr/>
-        </p:nvSpPr>
-        <p:spPr>
-          <a:xfrm xmlns:a="http://schemas.openxmlformats.org/drawingml/2006/main">
-            <a:off x="7924800" y="2266950"/>
-            <a:ext cx="571500" cy="266700"/>
-          </a:xfrm>
-          <a:prstGeom xmlns:a="http://schemas.openxmlformats.org/drawingml/2006/main" prst="rect">
-            <a:avLst/>
-          </a:prstGeom>
-          <a:noFill xmlns:a="http://schemas.openxmlformats.org/drawingml/2006/main"/>
-          <a:ln xmlns:a="http://schemas.openxmlformats.org/drawingml/2006/main" w="0">
-            <a:noFill/>
-            <a:prstDash val="solid"/>
-          </a:ln>
-        </p:spPr>
-        <p:txBody>
-          <a:bodyPr xmlns:a="http://schemas.openxmlformats.org/drawingml/2006/main" wrap="square" lIns="0" tIns="0" rIns="0" bIns="0" anchor="t">
-            <a:normAutofit fontScale="100000"/>
-          </a:bodyPr>
-          <a:lstStyle xmlns:a="http://schemas.openxmlformats.org/drawingml/2006/main"/>
-          <a:p xmlns:a="http://schemas.openxmlformats.org/drawingml/2006/main">
-            <a:pPr algn="l">
-              <a:buNone/>
-              <a:defRPr sz="1275" b="1" i="0">
-                <a:solidFill>
-                  <a:srgbClr val="5537D6"/>
-                </a:solidFill>
-                <a:latin typeface="Consolas"/>
-                <a:ea typeface="Consolas"/>
-                <a:cs typeface="Consolas"/>
-              </a:defRPr>
-            </a:pPr>
-            <a:r>
-              <a:rPr sz="1275" b="1" i="0">
-                <a:solidFill>
-                  <a:srgbClr val="5537D6"/>
-                </a:solidFill>
-                <a:latin typeface="Consolas"/>
-                <a:ea typeface="Consolas"/>
-                <a:cs typeface="Consolas"/>
-              </a:rPr>
-              <a:t>M4/A4</a:t>
-            </a:r>
-          </a:p>
-        </p:txBody>
-      </p:sp>
-      <p:sp>
-        <p:nvSpPr>
-          <p:cNvPr id="42" name="">
-            <a:extLst xmlns:a="http://schemas.openxmlformats.org/drawingml/2006/main">
-              <a:ext uri="{FF2B5EF4-FFF2-40B4-BE49-F238E27FC236}">
-                <a16:creationId xmlns:a16="http://schemas.microsoft.com/office/drawing/2014/main" id="{F4AE7126-CAF1-410E-8D16-8A652AEAE2CF}"/>
-              </a:ext>
-            </a:extLst>
-          </p:cNvPr>
-          <p:cNvSpPr>
-            <a:spLocks xmlns:a="http://schemas.openxmlformats.org/drawingml/2006/main" noGrp="1"/>
-          </p:cNvSpPr>
-          <p:nvPr/>
-        </p:nvSpPr>
-        <p:spPr>
-          <a:xfrm xmlns:a="http://schemas.openxmlformats.org/drawingml/2006/main">
-            <a:off x="7924800" y="2619375"/>
-            <a:ext cx="1581150" cy="609600"/>
-          </a:xfrm>
-          <a:prstGeom xmlns:a="http://schemas.openxmlformats.org/drawingml/2006/main" prst="rect">
-            <a:avLst/>
-          </a:prstGeom>
-          <a:noFill xmlns:a="http://schemas.openxmlformats.org/drawingml/2006/main"/>
-          <a:ln xmlns:a="http://schemas.openxmlformats.org/drawingml/2006/main" w="0">
-            <a:noFill/>
-            <a:prstDash val="solid"/>
-          </a:ln>
-        </p:spPr>
-        <p:txBody>
-          <a:bodyPr xmlns:a="http://schemas.openxmlformats.org/drawingml/2006/main" wrap="square" lIns="0" tIns="0" rIns="0" bIns="0" anchor="t">
-            <a:normAutofit fontScale="100000"/>
-          </a:bodyPr>
-          <a:lstStyle xmlns:a="http://schemas.openxmlformats.org/drawingml/2006/main"/>
-          <a:p xmlns:a="http://schemas.openxmlformats.org/drawingml/2006/main">
-            <a:pPr algn="l">
-              <a:buNone/>
-              <a:defRPr sz="1725" b="0" i="0">
-                <a:solidFill>
-                  <a:srgbClr val="111111"/>
-                </a:solidFill>
-                <a:latin typeface="Georgia"/>
-                <a:ea typeface="Georgia"/>
-                <a:cs typeface="Georgia"/>
-              </a:defRPr>
-            </a:pPr>
-            <a:r>
-              <a:rPr sz="1725" b="0" i="0">
-                <a:solidFill>
-                  <a:srgbClr val="111111"/>
-                </a:solidFill>
-                <a:latin typeface="Georgia"/>
-                <a:ea typeface="Georgia"/>
-                <a:cs typeface="Georgia"/>
-              </a:rPr>
-              <a:t>Bounded</a:t>
-            </a:r>
-          </a:p>
-          <a:p xmlns:a="http://schemas.openxmlformats.org/drawingml/2006/main">
-            <a:pPr algn="l">
-              <a:buNone/>
-              <a:defRPr sz="1725" b="0" i="0">
-                <a:solidFill>
-                  <a:srgbClr val="111111"/>
-                </a:solidFill>
-                <a:latin typeface="Georgia"/>
-                <a:ea typeface="Georgia"/>
-                <a:cs typeface="Georgia"/>
-              </a:defRPr>
-            </a:pPr>
-            <a:r>
-              <a:rPr sz="1725" b="0" i="0">
-                <a:solidFill>
-                  <a:srgbClr val="111111"/>
-                </a:solidFill>
-                <a:latin typeface="Georgia"/>
-                <a:ea typeface="Georgia"/>
-                <a:cs typeface="Georgia"/>
-              </a:rPr>
-              <a:t>coexistence</a:t>
-            </a:r>
-          </a:p>
-        </p:txBody>
-      </p:sp>
-      <p:sp>
-        <p:nvSpPr>
-          <p:cNvPr id="43" name="">
-            <a:extLst xmlns:a="http://schemas.openxmlformats.org/drawingml/2006/main">
-              <a:ext uri="{FF2B5EF4-FFF2-40B4-BE49-F238E27FC236}">
-                <a16:creationId xmlns:a16="http://schemas.microsoft.com/office/drawing/2014/main" id="{F31B0EFA-6B24-4A93-8A11-D41E1D42AFD5}"/>
-              </a:ext>
-            </a:extLst>
-          </p:cNvPr>
-          <p:cNvSpPr>
-            <a:spLocks xmlns:a="http://schemas.openxmlformats.org/drawingml/2006/main" noGrp="1"/>
-          </p:cNvSpPr>
-          <p:nvPr/>
-        </p:nvSpPr>
-        <p:spPr>
-          <a:xfrm xmlns:a="http://schemas.openxmlformats.org/drawingml/2006/main">
-            <a:off x="7924800" y="3324225"/>
-            <a:ext cx="1562100" cy="19050"/>
-          </a:xfrm>
-          <a:prstGeom xmlns:a="http://schemas.openxmlformats.org/drawingml/2006/main" prst="rect">
-            <a:avLst/>
-          </a:prstGeom>
-          <a:solidFill xmlns:a="http://schemas.openxmlformats.org/drawingml/2006/main">
-            <a:srgbClr val="8A8B86"/>
-          </a:solidFill>
-          <a:ln xmlns:a="http://schemas.openxmlformats.org/drawingml/2006/main" w="0">
-            <a:noFill/>
-            <a:prstDash val="solid"/>
-          </a:ln>
-        </p:spPr>
-      </p:sp>
-      <p:sp>
-        <p:nvSpPr>
-          <p:cNvPr id="44" name="">
-            <a:extLst xmlns:a="http://schemas.openxmlformats.org/drawingml/2006/main">
-              <a:ext uri="{FF2B5EF4-FFF2-40B4-BE49-F238E27FC236}">
-                <a16:creationId xmlns:a16="http://schemas.microsoft.com/office/drawing/2014/main" id="{6C95529F-3A65-4A75-862E-C23384A485BC}"/>
-              </a:ext>
-            </a:extLst>
-          </p:cNvPr>
-          <p:cNvSpPr>
-            <a:spLocks xmlns:a="http://schemas.openxmlformats.org/drawingml/2006/main" noGrp="1"/>
-          </p:cNvSpPr>
-          <p:nvPr/>
-        </p:nvSpPr>
-        <p:spPr>
-          <a:xfrm xmlns:a="http://schemas.openxmlformats.org/drawingml/2006/main">
-            <a:off x="7924800" y="3533775"/>
-            <a:ext cx="1562100" cy="171450"/>
-          </a:xfrm>
-          <a:prstGeom xmlns:a="http://schemas.openxmlformats.org/drawingml/2006/main" prst="rect">
-            <a:avLst/>
-          </a:prstGeom>
-          <a:noFill xmlns:a="http://schemas.openxmlformats.org/drawingml/2006/main"/>
-          <a:ln xmlns:a="http://schemas.openxmlformats.org/drawingml/2006/main" w="0">
-            <a:noFill/>
-            <a:prstDash val="solid"/>
-          </a:ln>
-        </p:spPr>
-        <p:txBody>
-          <a:bodyPr xmlns:a="http://schemas.openxmlformats.org/drawingml/2006/main" wrap="square" lIns="0" tIns="0" rIns="0" bIns="0" anchor="t">
-            <a:normAutofit fontScale="100000"/>
-          </a:bodyPr>
-          <a:lstStyle xmlns:a="http://schemas.openxmlformats.org/drawingml/2006/main"/>
-          <a:p xmlns:a="http://schemas.openxmlformats.org/drawingml/2006/main">
-            <a:pPr algn="l">
-              <a:buNone/>
-              <a:defRPr sz="900" b="1" i="0">
-                <a:solidFill>
-                  <a:srgbClr val="686A66"/>
-                </a:solidFill>
-                <a:latin typeface="Consolas"/>
-                <a:ea typeface="Consolas"/>
-                <a:cs typeface="Consolas"/>
-              </a:defRPr>
-            </a:pPr>
-            <a:r>
-              <a:rPr sz="900" b="1" i="0">
-                <a:solidFill>
-                  <a:srgbClr val="686A66"/>
-                </a:solidFill>
-                <a:latin typeface="Consolas"/>
-                <a:ea typeface="Consolas"/>
-                <a:cs typeface="Consolas"/>
-              </a:rPr>
-              <a:t>ENTRY</a:t>
-            </a:r>
-          </a:p>
-        </p:txBody>
-      </p:sp>
-      <p:sp>
-        <p:nvSpPr>
-          <p:cNvPr id="45" name="">
-            <a:extLst xmlns:a="http://schemas.openxmlformats.org/drawingml/2006/main">
-              <a:ext uri="{FF2B5EF4-FFF2-40B4-BE49-F238E27FC236}">
-                <a16:creationId xmlns:a16="http://schemas.microsoft.com/office/drawing/2014/main" id="{65675DF1-8F2C-41EE-8ECD-AFD791DE279C}"/>
-              </a:ext>
-            </a:extLst>
-          </p:cNvPr>
-          <p:cNvSpPr>
-            <a:spLocks xmlns:a="http://schemas.openxmlformats.org/drawingml/2006/main" noGrp="1"/>
-          </p:cNvSpPr>
-          <p:nvPr/>
-        </p:nvSpPr>
-        <p:spPr>
-          <a:xfrm xmlns:a="http://schemas.openxmlformats.org/drawingml/2006/main">
-            <a:off x="7924800" y="3781425"/>
-            <a:ext cx="1562100" cy="628650"/>
-          </a:xfrm>
-          <a:prstGeom xmlns:a="http://schemas.openxmlformats.org/drawingml/2006/main" prst="rect">
-            <a:avLst/>
-          </a:prstGeom>
-          <a:noFill xmlns:a="http://schemas.openxmlformats.org/drawingml/2006/main"/>
-          <a:ln xmlns:a="http://schemas.openxmlformats.org/drawingml/2006/main" w="0">
-            <a:noFill/>
-            <a:prstDash val="solid"/>
-          </a:ln>
-        </p:spPr>
-        <p:txBody>
-          <a:bodyPr xmlns:a="http://schemas.openxmlformats.org/drawingml/2006/main" wrap="square" lIns="0" tIns="0" rIns="0" bIns="0" anchor="t">
-            <a:normAutofit fontScale="100000"/>
-          </a:bodyPr>
-          <a:lstStyle xmlns:a="http://schemas.openxmlformats.org/drawingml/2006/main"/>
-          <a:p xmlns:a="http://schemas.openxmlformats.org/drawingml/2006/main">
-            <a:pPr algn="l">
-              <a:buNone/>
-              <a:defRPr sz="1200" b="0" i="0">
-                <a:solidFill>
-                  <a:srgbClr val="111111"/>
-                </a:solidFill>
-                <a:latin typeface="Arial"/>
-                <a:ea typeface="Arial"/>
-                <a:cs typeface="Arial"/>
-              </a:defRPr>
-            </a:pPr>
-            <a:r>
-              <a:rPr sz="1200" b="0" i="0">
-                <a:solidFill>
-                  <a:srgbClr val="111111"/>
-                </a:solidFill>
-                <a:latin typeface="Arial"/>
-                <a:ea typeface="Arial"/>
-                <a:cs typeface="Arial"/>
-              </a:rPr>
-              <a:t>cohort + identity/state</a:t>
-            </a:r>
-          </a:p>
-        </p:txBody>
-      </p:sp>
-      <p:sp>
-        <p:nvSpPr>
-          <p:cNvPr id="46" name="">
-            <a:extLst xmlns:a="http://schemas.openxmlformats.org/drawingml/2006/main">
-              <a:ext uri="{FF2B5EF4-FFF2-40B4-BE49-F238E27FC236}">
-                <a16:creationId xmlns:a16="http://schemas.microsoft.com/office/drawing/2014/main" id="{D7E9FE4C-BD9B-44C0-B3C0-8A92A5246CF8}"/>
-              </a:ext>
-            </a:extLst>
-          </p:cNvPr>
-          <p:cNvSpPr>
-            <a:spLocks xmlns:a="http://schemas.openxmlformats.org/drawingml/2006/main" noGrp="1"/>
-          </p:cNvSpPr>
-          <p:nvPr/>
-        </p:nvSpPr>
-        <p:spPr>
-          <a:xfrm xmlns:a="http://schemas.openxmlformats.org/drawingml/2006/main">
-            <a:off x="7924800" y="4591050"/>
-            <a:ext cx="1562100" cy="171450"/>
-          </a:xfrm>
-          <a:prstGeom xmlns:a="http://schemas.openxmlformats.org/drawingml/2006/main" prst="rect">
-            <a:avLst/>
-          </a:prstGeom>
-          <a:noFill xmlns:a="http://schemas.openxmlformats.org/drawingml/2006/main"/>
-          <a:ln xmlns:a="http://schemas.openxmlformats.org/drawingml/2006/main" w="0">
-            <a:noFill/>
-            <a:prstDash val="solid"/>
-          </a:ln>
-        </p:spPr>
-        <p:txBody>
-          <a:bodyPr xmlns:a="http://schemas.openxmlformats.org/drawingml/2006/main" wrap="square" lIns="0" tIns="0" rIns="0" bIns="0" anchor="t">
-            <a:normAutofit fontScale="100000"/>
-          </a:bodyPr>
-          <a:lstStyle xmlns:a="http://schemas.openxmlformats.org/drawingml/2006/main"/>
-          <a:p xmlns:a="http://schemas.openxmlformats.org/drawingml/2006/main">
-            <a:pPr algn="l">
-              <a:buNone/>
-              <a:defRPr sz="900" b="1" i="0">
-                <a:solidFill>
-                  <a:srgbClr val="5537D6"/>
-                </a:solidFill>
-                <a:latin typeface="Consolas"/>
-                <a:ea typeface="Consolas"/>
-                <a:cs typeface="Consolas"/>
-              </a:defRPr>
-            </a:pPr>
-            <a:r>
-              <a:rPr sz="900" b="1" i="0">
-                <a:solidFill>
-                  <a:srgbClr val="5537D6"/>
-                </a:solidFill>
-                <a:latin typeface="Consolas"/>
-                <a:ea typeface="Consolas"/>
-                <a:cs typeface="Consolas"/>
-              </a:rPr>
-              <a:t>EXIT</a:t>
-            </a:r>
-          </a:p>
-        </p:txBody>
-      </p:sp>
-      <p:sp>
-        <p:nvSpPr>
-          <p:cNvPr id="47" name="">
-            <a:extLst xmlns:a="http://schemas.openxmlformats.org/drawingml/2006/main">
-              <a:ext uri="{FF2B5EF4-FFF2-40B4-BE49-F238E27FC236}">
-                <a16:creationId xmlns:a16="http://schemas.microsoft.com/office/drawing/2014/main" id="{38A80BA4-0DA1-4EBA-A43B-ECF123DC8013}"/>
-              </a:ext>
-            </a:extLst>
-          </p:cNvPr>
-          <p:cNvSpPr>
-            <a:spLocks xmlns:a="http://schemas.openxmlformats.org/drawingml/2006/main" noGrp="1"/>
-          </p:cNvSpPr>
-          <p:nvPr/>
-        </p:nvSpPr>
-        <p:spPr>
-          <a:xfrm xmlns:a="http://schemas.openxmlformats.org/drawingml/2006/main">
-            <a:off x="7924800" y="4838700"/>
-            <a:ext cx="1562100" cy="628650"/>
-          </a:xfrm>
-          <a:prstGeom xmlns:a="http://schemas.openxmlformats.org/drawingml/2006/main" prst="rect">
-            <a:avLst/>
-          </a:prstGeom>
-          <a:noFill xmlns:a="http://schemas.openxmlformats.org/drawingml/2006/main"/>
-          <a:ln xmlns:a="http://schemas.openxmlformats.org/drawingml/2006/main" w="0">
-            <a:noFill/>
-            <a:prstDash val="solid"/>
-          </a:ln>
-        </p:spPr>
-        <p:txBody>
-          <a:bodyPr xmlns:a="http://schemas.openxmlformats.org/drawingml/2006/main" wrap="square" lIns="0" tIns="0" rIns="0" bIns="0" anchor="t">
-            <a:normAutofit fontScale="100000"/>
-          </a:bodyPr>
-          <a:lstStyle xmlns:a="http://schemas.openxmlformats.org/drawingml/2006/main"/>
-          <a:p xmlns:a="http://schemas.openxmlformats.org/drawingml/2006/main">
-            <a:pPr algn="l">
-              <a:buNone/>
-              <a:defRPr sz="1200" b="0" i="0">
-                <a:solidFill>
-                  <a:srgbClr val="111111"/>
-                </a:solidFill>
-                <a:latin typeface="Arial"/>
-                <a:ea typeface="Arial"/>
-                <a:cs typeface="Arial"/>
-              </a:defRPr>
-            </a:pPr>
-            <a:r>
-              <a:rPr sz="1200" b="0" i="0">
-                <a:solidFill>
-                  <a:srgbClr val="111111"/>
-                </a:solidFill>
-                <a:latin typeface="Arial"/>
-                <a:ea typeface="Arial"/>
-                <a:cs typeface="Arial"/>
-              </a:rPr>
-              <a:t>reconcile + timed rollback</a:t>
-            </a:r>
-          </a:p>
-        </p:txBody>
-      </p:sp>
-      <p:sp>
-        <p:nvSpPr>
-          <p:cNvPr id="48" name="">
-            <a:extLst xmlns:a="http://schemas.openxmlformats.org/drawingml/2006/main">
-              <a:ext uri="{FF2B5EF4-FFF2-40B4-BE49-F238E27FC236}">
-                <a16:creationId xmlns:a16="http://schemas.microsoft.com/office/drawing/2014/main" id="{840BC124-2A13-4893-8530-29638D56D135}"/>
-              </a:ext>
-            </a:extLst>
-          </p:cNvPr>
-          <p:cNvSpPr>
-            <a:spLocks xmlns:a="http://schemas.openxmlformats.org/drawingml/2006/main" noGrp="1"/>
-          </p:cNvSpPr>
-          <p:nvPr/>
-        </p:nvSpPr>
-        <p:spPr>
-          <a:xfrm xmlns:a="http://schemas.openxmlformats.org/drawingml/2006/main">
-            <a:off x="9486900" y="3257550"/>
-            <a:ext cx="247650" cy="266700"/>
-          </a:xfrm>
-          <a:prstGeom xmlns:a="http://schemas.openxmlformats.org/drawingml/2006/main" prst="chevron">
-            <a:avLst/>
-          </a:prstGeom>
-          <a:solidFill xmlns:a="http://schemas.openxmlformats.org/drawingml/2006/main">
-            <a:srgbClr val="FFC72C"/>
-          </a:solidFill>
-          <a:ln xmlns:a="http://schemas.openxmlformats.org/drawingml/2006/main" w="0">
-            <a:noFill/>
-            <a:prstDash val="solid"/>
-          </a:ln>
-        </p:spPr>
-      </p:sp>
-      <p:sp>
-        <p:nvSpPr>
-          <p:cNvPr id="49" name="">
-            <a:extLst xmlns:a="http://schemas.openxmlformats.org/drawingml/2006/main">
-              <a:ext uri="{FF2B5EF4-FFF2-40B4-BE49-F238E27FC236}">
-                <a16:creationId xmlns:a16="http://schemas.microsoft.com/office/drawing/2014/main" id="{F68DE761-FFF3-4D1B-9A81-0745F89AFC54}"/>
-              </a:ext>
-            </a:extLst>
-          </p:cNvPr>
-          <p:cNvSpPr>
-            <a:spLocks xmlns:a="http://schemas.openxmlformats.org/drawingml/2006/main" noGrp="1"/>
-          </p:cNvSpPr>
-          <p:nvPr/>
-        </p:nvSpPr>
-        <p:spPr>
-          <a:xfrm xmlns:a="http://schemas.openxmlformats.org/drawingml/2006/main">
-            <a:off x="9734550" y="2266950"/>
-            <a:ext cx="571500" cy="266700"/>
-          </a:xfrm>
-          <a:prstGeom xmlns:a="http://schemas.openxmlformats.org/drawingml/2006/main" prst="rect">
-            <a:avLst/>
-          </a:prstGeom>
-          <a:noFill xmlns:a="http://schemas.openxmlformats.org/drawingml/2006/main"/>
-          <a:ln xmlns:a="http://schemas.openxmlformats.org/drawingml/2006/main" w="0">
-            <a:noFill/>
-            <a:prstDash val="solid"/>
-          </a:ln>
-        </p:spPr>
-        <p:txBody>
-          <a:bodyPr xmlns:a="http://schemas.openxmlformats.org/drawingml/2006/main" wrap="square" lIns="0" tIns="0" rIns="0" bIns="0" anchor="t">
-            <a:normAutofit fontScale="96144"/>
-          </a:bodyPr>
-          <a:lstStyle xmlns:a="http://schemas.openxmlformats.org/drawingml/2006/main"/>
-          <a:p xmlns:a="http://schemas.openxmlformats.org/drawingml/2006/main">
-            <a:pPr algn="l">
-              <a:buNone/>
-              <a:defRPr sz="1275" b="1" i="0">
-                <a:solidFill>
-                  <a:srgbClr val="5537D6"/>
-                </a:solidFill>
-                <a:latin typeface="Consolas"/>
-                <a:ea typeface="Consolas"/>
-                <a:cs typeface="Consolas"/>
-              </a:defRPr>
-            </a:pPr>
-            <a:r>
-              <a:rPr sz="1275" b="1" i="0">
-                <a:solidFill>
-                  <a:srgbClr val="5537D6"/>
-                </a:solidFill>
-                <a:latin typeface="Consolas"/>
-                <a:ea typeface="Consolas"/>
-                <a:cs typeface="Consolas"/>
-              </a:rPr>
-              <a:t>M5/A5+</a:t>
-            </a:r>
-          </a:p>
-        </p:txBody>
-      </p:sp>
-      <p:sp>
-        <p:nvSpPr>
-          <p:cNvPr id="50" name="">
-            <a:extLst xmlns:a="http://schemas.openxmlformats.org/drawingml/2006/main">
-              <a:ext uri="{FF2B5EF4-FFF2-40B4-BE49-F238E27FC236}">
-                <a16:creationId xmlns:a16="http://schemas.microsoft.com/office/drawing/2014/main" id="{A0C21E87-BA06-4215-8D9F-B6D7E47F3F65}"/>
-              </a:ext>
-            </a:extLst>
-          </p:cNvPr>
-          <p:cNvSpPr>
-            <a:spLocks xmlns:a="http://schemas.openxmlformats.org/drawingml/2006/main" noGrp="1"/>
-          </p:cNvSpPr>
-          <p:nvPr/>
-        </p:nvSpPr>
-        <p:spPr>
-          <a:xfrm xmlns:a="http://schemas.openxmlformats.org/drawingml/2006/main">
-            <a:off x="9734550" y="2619375"/>
-            <a:ext cx="1581150" cy="609600"/>
-          </a:xfrm>
-          <a:prstGeom xmlns:a="http://schemas.openxmlformats.org/drawingml/2006/main" prst="rect">
-            <a:avLst/>
-          </a:prstGeom>
-          <a:noFill xmlns:a="http://schemas.openxmlformats.org/drawingml/2006/main"/>
-          <a:ln xmlns:a="http://schemas.openxmlformats.org/drawingml/2006/main" w="0">
-            <a:noFill/>
-            <a:prstDash val="solid"/>
-          </a:ln>
-        </p:spPr>
-        <p:txBody>
-          <a:bodyPr xmlns:a="http://schemas.openxmlformats.org/drawingml/2006/main" wrap="square" lIns="0" tIns="0" rIns="0" bIns="0" anchor="t">
-            <a:normAutofit fontScale="97472"/>
-          </a:bodyPr>
-          <a:lstStyle xmlns:a="http://schemas.openxmlformats.org/drawingml/2006/main"/>
-          <a:p xmlns:a="http://schemas.openxmlformats.org/drawingml/2006/main">
-            <a:pPr algn="l">
-              <a:buNone/>
-              <a:defRPr sz="1725" b="0" i="0">
-                <a:solidFill>
-                  <a:srgbClr val="111111"/>
-                </a:solidFill>
-                <a:latin typeface="Georgia"/>
-                <a:ea typeface="Georgia"/>
-                <a:cs typeface="Georgia"/>
-              </a:defRPr>
-            </a:pPr>
-            <a:r>
-              <a:rPr sz="1725" b="0" i="0">
-                <a:solidFill>
-                  <a:srgbClr val="111111"/>
-                </a:solidFill>
-                <a:latin typeface="Georgia"/>
-                <a:ea typeface="Georgia"/>
-                <a:cs typeface="Georgia"/>
-              </a:rPr>
-              <a:t>Canary → A6</a:t>
-            </a:r>
-          </a:p>
-          <a:p xmlns:a="http://schemas.openxmlformats.org/drawingml/2006/main">
-            <a:pPr algn="l">
-              <a:buNone/>
-              <a:defRPr sz="1725" b="0" i="0">
-                <a:solidFill>
-                  <a:srgbClr val="111111"/>
-                </a:solidFill>
-                <a:latin typeface="Georgia"/>
-                <a:ea typeface="Georgia"/>
-                <a:cs typeface="Georgia"/>
-              </a:defRPr>
-            </a:pPr>
-            <a:r>
-              <a:rPr sz="1725" b="0" i="0">
-                <a:solidFill>
-                  <a:srgbClr val="111111"/>
-                </a:solidFill>
-                <a:latin typeface="Georgia"/>
-                <a:ea typeface="Georgia"/>
-                <a:cs typeface="Georgia"/>
-              </a:rPr>
-              <a:t>dependency zero</a:t>
-            </a:r>
-          </a:p>
-        </p:txBody>
-      </p:sp>
-      <p:sp>
-        <p:nvSpPr>
-          <p:cNvPr id="51" name="">
-            <a:extLst xmlns:a="http://schemas.openxmlformats.org/drawingml/2006/main">
-              <a:ext uri="{FF2B5EF4-FFF2-40B4-BE49-F238E27FC236}">
-                <a16:creationId xmlns:a16="http://schemas.microsoft.com/office/drawing/2014/main" id="{ED46B277-92F4-4474-8A05-8D873E5F1D97}"/>
-              </a:ext>
-            </a:extLst>
-          </p:cNvPr>
-          <p:cNvSpPr>
-            <a:spLocks xmlns:a="http://schemas.openxmlformats.org/drawingml/2006/main" noGrp="1"/>
-          </p:cNvSpPr>
-          <p:nvPr/>
-        </p:nvSpPr>
-        <p:spPr>
-          <a:xfrm xmlns:a="http://schemas.openxmlformats.org/drawingml/2006/main">
-            <a:off x="9734550" y="3324225"/>
-            <a:ext cx="1562100" cy="19050"/>
-          </a:xfrm>
-          <a:prstGeom xmlns:a="http://schemas.openxmlformats.org/drawingml/2006/main" prst="rect">
-            <a:avLst/>
-          </a:prstGeom>
-          <a:solidFill xmlns:a="http://schemas.openxmlformats.org/drawingml/2006/main">
-            <a:srgbClr val="8A8B86"/>
-          </a:solidFill>
-          <a:ln xmlns:a="http://schemas.openxmlformats.org/drawingml/2006/main" w="0">
-            <a:noFill/>
-            <a:prstDash val="solid"/>
-          </a:ln>
-        </p:spPr>
-      </p:sp>
-      <p:sp>
-        <p:nvSpPr>
-          <p:cNvPr id="52" name="">
-            <a:extLst xmlns:a="http://schemas.openxmlformats.org/drawingml/2006/main">
-              <a:ext uri="{FF2B5EF4-FFF2-40B4-BE49-F238E27FC236}">
-                <a16:creationId xmlns:a16="http://schemas.microsoft.com/office/drawing/2014/main" id="{0DF1FAD6-63D2-482C-9FEB-DD7157217B4E}"/>
-              </a:ext>
-            </a:extLst>
-          </p:cNvPr>
-          <p:cNvSpPr>
-            <a:spLocks xmlns:a="http://schemas.openxmlformats.org/drawingml/2006/main" noGrp="1"/>
-          </p:cNvSpPr>
-          <p:nvPr/>
-        </p:nvSpPr>
-        <p:spPr>
-          <a:xfrm xmlns:a="http://schemas.openxmlformats.org/drawingml/2006/main">
-            <a:off x="9734550" y="3533775"/>
-            <a:ext cx="1562100" cy="171450"/>
-          </a:xfrm>
-          <a:prstGeom xmlns:a="http://schemas.openxmlformats.org/drawingml/2006/main" prst="rect">
-            <a:avLst/>
-          </a:prstGeom>
-          <a:noFill xmlns:a="http://schemas.openxmlformats.org/drawingml/2006/main"/>
-          <a:ln xmlns:a="http://schemas.openxmlformats.org/drawingml/2006/main" w="0">
-            <a:noFill/>
-            <a:prstDash val="solid"/>
-          </a:ln>
-        </p:spPr>
-        <p:txBody>
-          <a:bodyPr xmlns:a="http://schemas.openxmlformats.org/drawingml/2006/main" wrap="square" lIns="0" tIns="0" rIns="0" bIns="0" anchor="t">
-            <a:normAutofit fontScale="100000"/>
-          </a:bodyPr>
-          <a:lstStyle xmlns:a="http://schemas.openxmlformats.org/drawingml/2006/main"/>
-          <a:p xmlns:a="http://schemas.openxmlformats.org/drawingml/2006/main">
-            <a:pPr algn="l">
-              <a:buNone/>
-              <a:defRPr sz="900" b="1" i="0">
-                <a:solidFill>
-                  <a:srgbClr val="686A66"/>
-                </a:solidFill>
-                <a:latin typeface="Consolas"/>
-                <a:ea typeface="Consolas"/>
-                <a:cs typeface="Consolas"/>
-              </a:defRPr>
-            </a:pPr>
-            <a:r>
-              <a:rPr sz="900" b="1" i="0">
-                <a:solidFill>
-                  <a:srgbClr val="686A66"/>
-                </a:solidFill>
-                <a:latin typeface="Consolas"/>
-                <a:ea typeface="Consolas"/>
-                <a:cs typeface="Consolas"/>
-              </a:rPr>
-              <a:t>ENTRY</a:t>
-            </a:r>
-          </a:p>
-        </p:txBody>
-      </p:sp>
-      <p:sp>
-        <p:nvSpPr>
-          <p:cNvPr id="53" name="">
-            <a:extLst xmlns:a="http://schemas.openxmlformats.org/drawingml/2006/main">
-              <a:ext uri="{FF2B5EF4-FFF2-40B4-BE49-F238E27FC236}">
-                <a16:creationId xmlns:a16="http://schemas.microsoft.com/office/drawing/2014/main" id="{C46EEBEB-416C-40A8-8AB5-855F32E83C2B}"/>
-              </a:ext>
-            </a:extLst>
-          </p:cNvPr>
-          <p:cNvSpPr>
-            <a:spLocks xmlns:a="http://schemas.openxmlformats.org/drawingml/2006/main" noGrp="1"/>
-          </p:cNvSpPr>
-          <p:nvPr/>
-        </p:nvSpPr>
-        <p:spPr>
-          <a:xfrm xmlns:a="http://schemas.openxmlformats.org/drawingml/2006/main">
-            <a:off x="9734550" y="3781425"/>
-            <a:ext cx="1562100" cy="628650"/>
-          </a:xfrm>
-          <a:prstGeom xmlns:a="http://schemas.openxmlformats.org/drawingml/2006/main" prst="rect">
-            <a:avLst/>
-          </a:prstGeom>
-          <a:noFill xmlns:a="http://schemas.openxmlformats.org/drawingml/2006/main"/>
-          <a:ln xmlns:a="http://schemas.openxmlformats.org/drawingml/2006/main" w="0">
-            <a:noFill/>
-            <a:prstDash val="solid"/>
-          </a:ln>
-        </p:spPr>
-        <p:txBody>
-          <a:bodyPr xmlns:a="http://schemas.openxmlformats.org/drawingml/2006/main" wrap="square" lIns="0" tIns="0" rIns="0" bIns="0" anchor="t">
-            <a:normAutofit fontScale="100000"/>
-          </a:bodyPr>
-          <a:lstStyle xmlns:a="http://schemas.openxmlformats.org/drawingml/2006/main"/>
-          <a:p xmlns:a="http://schemas.openxmlformats.org/drawingml/2006/main">
-            <a:pPr algn="l">
-              <a:buNone/>
-              <a:defRPr sz="1200" b="0" i="0">
-                <a:solidFill>
-                  <a:srgbClr val="111111"/>
-                </a:solidFill>
-                <a:latin typeface="Arial"/>
-                <a:ea typeface="Arial"/>
-                <a:cs typeface="Arial"/>
-              </a:defRPr>
-            </a:pPr>
-            <a:r>
-              <a:rPr sz="1200" b="0" i="0">
-                <a:solidFill>
-                  <a:srgbClr val="111111"/>
-                </a:solidFill>
-                <a:latin typeface="Arial"/>
-                <a:ea typeface="Arial"/>
-                <a:cs typeface="Arial"/>
-              </a:rPr>
-              <a:t>representative operating evidence</a:t>
-            </a:r>
-          </a:p>
-        </p:txBody>
-      </p:sp>
-      <p:sp>
-        <p:nvSpPr>
-          <p:cNvPr id="54" name="">
-            <a:extLst xmlns:a="http://schemas.openxmlformats.org/drawingml/2006/main">
-              <a:ext uri="{FF2B5EF4-FFF2-40B4-BE49-F238E27FC236}">
-                <a16:creationId xmlns:a16="http://schemas.microsoft.com/office/drawing/2014/main" id="{89C9A6A5-C6EF-42A9-9F54-085A3B3857A7}"/>
-              </a:ext>
-            </a:extLst>
-          </p:cNvPr>
-          <p:cNvSpPr>
-            <a:spLocks xmlns:a="http://schemas.openxmlformats.org/drawingml/2006/main" noGrp="1"/>
-          </p:cNvSpPr>
-          <p:nvPr/>
-        </p:nvSpPr>
-        <p:spPr>
-          <a:xfrm xmlns:a="http://schemas.openxmlformats.org/drawingml/2006/main">
-            <a:off x="9734550" y="4591050"/>
-            <a:ext cx="1562100" cy="171450"/>
-          </a:xfrm>
-          <a:prstGeom xmlns:a="http://schemas.openxmlformats.org/drawingml/2006/main" prst="rect">
-            <a:avLst/>
-          </a:prstGeom>
-          <a:noFill xmlns:a="http://schemas.openxmlformats.org/drawingml/2006/main"/>
-          <a:ln xmlns:a="http://schemas.openxmlformats.org/drawingml/2006/main" w="0">
-            <a:noFill/>
-            <a:prstDash val="solid"/>
-          </a:ln>
-        </p:spPr>
-        <p:txBody>
-          <a:bodyPr xmlns:a="http://schemas.openxmlformats.org/drawingml/2006/main" wrap="square" lIns="0" tIns="0" rIns="0" bIns="0" anchor="t">
-            <a:normAutofit fontScale="100000"/>
-          </a:bodyPr>
-          <a:lstStyle xmlns:a="http://schemas.openxmlformats.org/drawingml/2006/main"/>
-          <a:p xmlns:a="http://schemas.openxmlformats.org/drawingml/2006/main">
-            <a:pPr algn="l">
-              <a:buNone/>
-              <a:defRPr sz="900" b="1" i="0">
-                <a:solidFill>
-                  <a:srgbClr val="5537D6"/>
-                </a:solidFill>
-                <a:latin typeface="Consolas"/>
-                <a:ea typeface="Consolas"/>
-                <a:cs typeface="Consolas"/>
-              </a:defRPr>
-            </a:pPr>
-            <a:r>
-              <a:rPr sz="900" b="1" i="0">
-                <a:solidFill>
-                  <a:srgbClr val="5537D6"/>
-                </a:solidFill>
-                <a:latin typeface="Consolas"/>
-                <a:ea typeface="Consolas"/>
-                <a:cs typeface="Consolas"/>
-              </a:rPr>
-              <a:t>EXIT</a:t>
-            </a:r>
-          </a:p>
-        </p:txBody>
-      </p:sp>
-      <p:sp>
-        <p:nvSpPr>
-          <p:cNvPr id="55" name="">
-            <a:extLst xmlns:a="http://schemas.openxmlformats.org/drawingml/2006/main">
-              <a:ext uri="{FF2B5EF4-FFF2-40B4-BE49-F238E27FC236}">
-                <a16:creationId xmlns:a16="http://schemas.microsoft.com/office/drawing/2014/main" id="{BBD2FC65-9134-490C-A3F3-257C232BD2FA}"/>
-              </a:ext>
-            </a:extLst>
-          </p:cNvPr>
-          <p:cNvSpPr>
-            <a:spLocks xmlns:a="http://schemas.openxmlformats.org/drawingml/2006/main" noGrp="1"/>
-          </p:cNvSpPr>
-          <p:nvPr/>
-        </p:nvSpPr>
-        <p:spPr>
-          <a:xfrm xmlns:a="http://schemas.openxmlformats.org/drawingml/2006/main">
-            <a:off x="9734550" y="4838700"/>
-            <a:ext cx="1562100" cy="628650"/>
-          </a:xfrm>
-          <a:prstGeom xmlns:a="http://schemas.openxmlformats.org/drawingml/2006/main" prst="rect">
-            <a:avLst/>
-          </a:prstGeom>
-          <a:noFill xmlns:a="http://schemas.openxmlformats.org/drawingml/2006/main"/>
-          <a:ln xmlns:a="http://schemas.openxmlformats.org/drawingml/2006/main" w="0">
-            <a:noFill/>
-            <a:prstDash val="solid"/>
-          </a:ln>
-        </p:spPr>
-        <p:txBody>
-          <a:bodyPr xmlns:a="http://schemas.openxmlformats.org/drawingml/2006/main" wrap="square" lIns="0" tIns="0" rIns="0" bIns="0" anchor="t">
-            <a:normAutofit fontScale="100000"/>
-          </a:bodyPr>
-          <a:lstStyle xmlns:a="http://schemas.openxmlformats.org/drawingml/2006/main"/>
-          <a:p xmlns:a="http://schemas.openxmlformats.org/drawingml/2006/main">
-            <a:pPr algn="l">
-              <a:buNone/>
-              <a:defRPr sz="1200" b="0" i="0">
-                <a:solidFill>
-                  <a:srgbClr val="111111"/>
-                </a:solidFill>
-                <a:latin typeface="Arial"/>
-                <a:ea typeface="Arial"/>
-                <a:cs typeface="Arial"/>
-              </a:defRPr>
-            </a:pPr>
-            <a:r>
-              <a:rPr sz="1200" b="0" i="0">
-                <a:solidFill>
-                  <a:srgbClr val="111111"/>
-                </a:solidFill>
-                <a:latin typeface="Arial"/>
-                <a:ea typeface="Arial"/>
-                <a:cs typeface="Arial"/>
-              </a:rPr>
-              <a:t>all source duties closed</a:t>
-            </a:r>
-          </a:p>
-        </p:txBody>
-      </p:sp>
-      <p:sp>
-        <p:nvSpPr>
-          <p:cNvPr id="56" name="">
-            <a:extLst xmlns:a="http://schemas.openxmlformats.org/drawingml/2006/main">
-              <a:ext uri="{FF2B5EF4-FFF2-40B4-BE49-F238E27FC236}">
-                <a16:creationId xmlns:a16="http://schemas.microsoft.com/office/drawing/2014/main" id="{00CF3370-3F58-4387-9118-41B92AC08C03}"/>
-              </a:ext>
-            </a:extLst>
-          </p:cNvPr>
-          <p:cNvSpPr>
-            <a:spLocks xmlns:a="http://schemas.openxmlformats.org/drawingml/2006/main" noGrp="1"/>
-          </p:cNvSpPr>
-          <p:nvPr/>
-        </p:nvSpPr>
-        <p:spPr>
-          <a:xfrm xmlns:a="http://schemas.openxmlformats.org/drawingml/2006/main">
-            <a:off x="2495550" y="5857875"/>
-            <a:ext cx="7200900" cy="323850"/>
-          </a:xfrm>
-          <a:prstGeom xmlns:a="http://schemas.openxmlformats.org/drawingml/2006/main" prst="rect">
-            <a:avLst/>
-          </a:prstGeom>
-          <a:noFill xmlns:a="http://schemas.openxmlformats.org/drawingml/2006/main"/>
-          <a:ln xmlns:a="http://schemas.openxmlformats.org/drawingml/2006/main" w="0">
-            <a:noFill/>
-            <a:prstDash val="solid"/>
-          </a:ln>
-        </p:spPr>
-        <p:txBody>
-          <a:bodyPr xmlns:a="http://schemas.openxmlformats.org/drawingml/2006/main" wrap="square" lIns="0" tIns="0" rIns="0" bIns="0" anchor="t">
-            <a:normAutofit fontScale="90246"/>
-          </a:bodyPr>
-          <a:lstStyle xmlns:a="http://schemas.openxmlformats.org/drawingml/2006/main"/>
-          <a:p xmlns:a="http://schemas.openxmlformats.org/drawingml/2006/main">
-            <a:pPr algn="ctr">
-              <a:buNone/>
-              <a:defRPr sz="1875" b="0" i="0">
-                <a:solidFill>
-                  <a:srgbClr val="111111"/>
-                </a:solidFill>
-                <a:latin typeface="Georgia"/>
-                <a:ea typeface="Georgia"/>
-                <a:cs typeface="Georgia"/>
-              </a:defRPr>
-            </a:pPr>
-            <a:r>
-              <a:rPr sz="1875" b="0" i="0">
-                <a:solidFill>
-                  <a:srgbClr val="111111"/>
-                </a:solidFill>
-                <a:latin typeface="Georgia"/>
-                <a:ea typeface="Georgia"/>
-                <a:cs typeface="Georgia"/>
-              </a:rPr>
-              <a:t>No path advances because the calendar moved—or a proxy bundle exported.</a:t>
+                <a:latin typeface="Arial"/>
+                <a:ea typeface="Arial"/>
+                <a:cs typeface="Arial"/>
+                <a:hlinkClick xmlns:r="http://schemas.openxmlformats.org/officeDocument/2006/relationships" r:id="R5971096796954770"/>
+              </a:rPr>
+              <a:t>Terminology crosswalk</a:t>
             </a:r>
           </a:p>
         </p:txBody>
@@ -19909,7 +20099,7 @@
                 <a:solidFill>
                   <a:srgbClr val="666762"/>
                 </a:solidFill>
-                <a:hlinkClick xmlns:r="http://schemas.openxmlformats.org/officeDocument/2006/relationships" r:id="R7b24b5b1d5ec44bd"/>
+                <a:hlinkClick xmlns:r="http://schemas.openxmlformats.org/officeDocument/2006/relationships" r:id="Re7d5c667f4ea4583"/>
               </a:rPr>
               <a:t>Repo reference</a:t>
             </a:r>
@@ -19926,7 +20116,7 @@
                 <a:solidFill>
                   <a:srgbClr val="666762"/>
                 </a:solidFill>
-                <a:hlinkClick xmlns:r="http://schemas.openxmlformats.org/officeDocument/2006/relationships" r:id="R6058eb4ba4084118"/>
+                <a:hlinkClick xmlns:r="http://schemas.openxmlformats.org/officeDocument/2006/relationships" r:id="Rf0bf18d712894daf"/>
               </a:rPr>
               <a:t>Official docs</a:t>
             </a:r>
@@ -21208,7 +21398,7 @@
                 <a:solidFill>
                   <a:srgbClr val="666762"/>
                 </a:solidFill>
-                <a:hlinkClick xmlns:r="http://schemas.openxmlformats.org/officeDocument/2006/relationships" r:id="R1cca879826c049e8"/>
+                <a:hlinkClick xmlns:r="http://schemas.openxmlformats.org/officeDocument/2006/relationships" r:id="R93290581b3384990"/>
               </a:rPr>
               <a:t>Repo reference</a:t>
             </a:r>
@@ -21225,7 +21415,7 @@
                 <a:solidFill>
                   <a:srgbClr val="666762"/>
                 </a:solidFill>
-                <a:hlinkClick xmlns:r="http://schemas.openxmlformats.org/officeDocument/2006/relationships" r:id="R8eb50f367df945fb"/>
+                <a:hlinkClick xmlns:r="http://schemas.openxmlformats.org/officeDocument/2006/relationships" r:id="R00b06a147ce444ce"/>
               </a:rPr>
               <a:t>Official docs</a:t>
             </a:r>
@@ -23160,7 +23350,7 @@
                 <a:solidFill>
                   <a:srgbClr val="666762"/>
                 </a:solidFill>
-                <a:hlinkClick xmlns:r="http://schemas.openxmlformats.org/officeDocument/2006/relationships" r:id="R274505ff38eb4d77"/>
+                <a:hlinkClick xmlns:r="http://schemas.openxmlformats.org/officeDocument/2006/relationships" r:id="R40fb33b9ac954795"/>
               </a:rPr>
               <a:t>Repo reference</a:t>
             </a:r>
@@ -23177,7 +23367,7 @@
                 <a:solidFill>
                   <a:srgbClr val="666762"/>
                 </a:solidFill>
-                <a:hlinkClick xmlns:r="http://schemas.openxmlformats.org/officeDocument/2006/relationships" r:id="Rfdb9c78545bf484f"/>
+                <a:hlinkClick xmlns:r="http://schemas.openxmlformats.org/officeDocument/2006/relationships" r:id="R4476ac92f55542dd"/>
               </a:rPr>
               <a:t>Official docs</a:t>
             </a:r>
@@ -25532,7 +25722,7 @@
                 <a:solidFill>
                   <a:srgbClr val="666762"/>
                 </a:solidFill>
-                <a:hlinkClick xmlns:r="http://schemas.openxmlformats.org/officeDocument/2006/relationships" r:id="R192e07b295744540"/>
+                <a:hlinkClick xmlns:r="http://schemas.openxmlformats.org/officeDocument/2006/relationships" r:id="R50c2722509184a1c"/>
               </a:rPr>
               <a:t>Repo reference</a:t>
             </a:r>
@@ -25549,7 +25739,7 @@
                 <a:solidFill>
                   <a:srgbClr val="666762"/>
                 </a:solidFill>
-                <a:hlinkClick xmlns:r="http://schemas.openxmlformats.org/officeDocument/2006/relationships" r:id="R499af43ac8924fbe"/>
+                <a:hlinkClick xmlns:r="http://schemas.openxmlformats.org/officeDocument/2006/relationships" r:id="R6a105b206a1b4d4d"/>
               </a:rPr>
               <a:t>Official docs</a:t>
             </a:r>
@@ -27175,7 +27365,7 @@
                 <a:solidFill>
                   <a:srgbClr val="666762"/>
                 </a:solidFill>
-                <a:hlinkClick xmlns:r="http://schemas.openxmlformats.org/officeDocument/2006/relationships" r:id="R6228357ccc72424a"/>
+                <a:hlinkClick xmlns:r="http://schemas.openxmlformats.org/officeDocument/2006/relationships" r:id="R5f3c5b0cabde4412"/>
               </a:rPr>
               <a:t>Repo reference</a:t>
             </a:r>
@@ -27192,7 +27382,7 @@
                 <a:solidFill>
                   <a:srgbClr val="666762"/>
                 </a:solidFill>
-                <a:hlinkClick xmlns:r="http://schemas.openxmlformats.org/officeDocument/2006/relationships" r:id="Rddff6a529e0044d1"/>
+                <a:hlinkClick xmlns:r="http://schemas.openxmlformats.org/officeDocument/2006/relationships" r:id="R7557731dbf7946a6"/>
               </a:rPr>
               <a:t>Official docs</a:t>
             </a:r>
@@ -29117,7 +29307,7 @@
                 <a:solidFill>
                   <a:srgbClr val="666762"/>
                 </a:solidFill>
-                <a:hlinkClick xmlns:r="http://schemas.openxmlformats.org/officeDocument/2006/relationships" r:id="Ra0871fde61a842ae"/>
+                <a:hlinkClick xmlns:r="http://schemas.openxmlformats.org/officeDocument/2006/relationships" r:id="R6ccea5cb38f549fe"/>
               </a:rPr>
               <a:t>Repo reference</a:t>
             </a:r>
@@ -29134,7 +29324,7 @@
                 <a:solidFill>
                   <a:srgbClr val="666762"/>
                 </a:solidFill>
-                <a:hlinkClick xmlns:r="http://schemas.openxmlformats.org/officeDocument/2006/relationships" r:id="R1d5e1775c2ef4f4d"/>
+                <a:hlinkClick xmlns:r="http://schemas.openxmlformats.org/officeDocument/2006/relationships" r:id="R73e19e9f344f492d"/>
               </a:rPr>
               <a:t>Official docs</a:t>
             </a:r>
@@ -29556,7 +29746,7 @@
       </p:sp>
       <p:cxnSp>
         <p:nvCxnSpPr>
-          <p:cNvPr id="340" name=""/>
+          <p:cNvPr id="394" name=""/>
           <p:cNvCxnSpPr>
             <a:stCxn xmlns:a="http://schemas.openxmlformats.org/drawingml/2006/main" id="9" idx="1"/>
             <a:endCxn xmlns:a="http://schemas.openxmlformats.org/drawingml/2006/main" id="12" idx="3"/>
@@ -29761,7 +29951,7 @@
       </p:sp>
       <p:cxnSp>
         <p:nvCxnSpPr>
-          <p:cNvPr id="344" name=""/>
+          <p:cNvPr id="398" name=""/>
           <p:cNvCxnSpPr>
             <a:stCxn xmlns:a="http://schemas.openxmlformats.org/drawingml/2006/main" id="9" idx="1"/>
             <a:endCxn xmlns:a="http://schemas.openxmlformats.org/drawingml/2006/main" id="16" idx="3"/>
@@ -29966,7 +30156,7 @@
       </p:sp>
       <p:cxnSp>
         <p:nvCxnSpPr>
-          <p:cNvPr id="348" name=""/>
+          <p:cNvPr id="402" name=""/>
           <p:cNvCxnSpPr>
             <a:stCxn xmlns:a="http://schemas.openxmlformats.org/drawingml/2006/main" id="9" idx="3"/>
             <a:endCxn xmlns:a="http://schemas.openxmlformats.org/drawingml/2006/main" id="20" idx="1"/>
@@ -30171,7 +30361,7 @@
       </p:sp>
       <p:cxnSp>
         <p:nvCxnSpPr>
-          <p:cNvPr id="352" name=""/>
+          <p:cNvPr id="406" name=""/>
           <p:cNvCxnSpPr>
             <a:stCxn xmlns:a="http://schemas.openxmlformats.org/drawingml/2006/main" id="9" idx="3"/>
             <a:endCxn xmlns:a="http://schemas.openxmlformats.org/drawingml/2006/main" id="24" idx="1"/>
@@ -30610,7 +30800,7 @@
                 <a:solidFill>
                   <a:srgbClr val="666762"/>
                 </a:solidFill>
-                <a:hlinkClick xmlns:r="http://schemas.openxmlformats.org/officeDocument/2006/relationships" r:id="Rbfdb6c0cc3c34b29"/>
+                <a:hlinkClick xmlns:r="http://schemas.openxmlformats.org/officeDocument/2006/relationships" r:id="R5e845ab4861c4574"/>
               </a:rPr>
               <a:t>Repo reference</a:t>
             </a:r>
@@ -30627,7 +30817,7 @@
                 <a:solidFill>
                   <a:srgbClr val="666762"/>
                 </a:solidFill>
-                <a:hlinkClick xmlns:r="http://schemas.openxmlformats.org/officeDocument/2006/relationships" r:id="Racb5107a8469471b"/>
+                <a:hlinkClick xmlns:r="http://schemas.openxmlformats.org/officeDocument/2006/relationships" r:id="R4df67573af3c4f6d"/>
               </a:rPr>
               <a:t>Official docs</a:t>
             </a:r>
@@ -31506,7 +31696,7 @@
                 <a:solidFill>
                   <a:srgbClr val="666762"/>
                 </a:solidFill>
-                <a:hlinkClick xmlns:r="http://schemas.openxmlformats.org/officeDocument/2006/relationships" r:id="Rb42ccb04d4174c75"/>
+                <a:hlinkClick xmlns:r="http://schemas.openxmlformats.org/officeDocument/2006/relationships" r:id="R8dec884f30624955"/>
               </a:rPr>
               <a:t>Repo reference</a:t>
             </a:r>
@@ -31523,7 +31713,7 @@
                 <a:solidFill>
                   <a:srgbClr val="666762"/>
                 </a:solidFill>
-                <a:hlinkClick xmlns:r="http://schemas.openxmlformats.org/officeDocument/2006/relationships" r:id="R5bf9243421164134"/>
+                <a:hlinkClick xmlns:r="http://schemas.openxmlformats.org/officeDocument/2006/relationships" r:id="R336cdc99b169402b"/>
               </a:rPr>
               <a:t>Official docs</a:t>
             </a:r>
@@ -32402,7 +32592,7 @@
                 <a:solidFill>
                   <a:srgbClr val="666762"/>
                 </a:solidFill>
-                <a:hlinkClick xmlns:r="http://schemas.openxmlformats.org/officeDocument/2006/relationships" r:id="R698e43ea352f4cec"/>
+                <a:hlinkClick xmlns:r="http://schemas.openxmlformats.org/officeDocument/2006/relationships" r:id="R21ebff295ce7429d"/>
               </a:rPr>
               <a:t>Repo reference</a:t>
             </a:r>
@@ -32419,7 +32609,7 @@
                 <a:solidFill>
                   <a:srgbClr val="666762"/>
                 </a:solidFill>
-                <a:hlinkClick xmlns:r="http://schemas.openxmlformats.org/officeDocument/2006/relationships" r:id="Rd64158f14a5a48af"/>
+                <a:hlinkClick xmlns:r="http://schemas.openxmlformats.org/officeDocument/2006/relationships" r:id="Reb083c12c36545ec"/>
               </a:rPr>
               <a:t>Official docs</a:t>
             </a:r>
@@ -33077,7 +33267,7 @@
                 <a:ea typeface="Arial"/>
                 <a:cs typeface="Arial"/>
               </a:rPr>
-              <a:t>Historical score audit; governed re-score pending</a:t>
+              <a:t>Historical audit; provisional uncertainty envelope</a:t>
             </a:r>
           </a:p>
         </p:txBody>
@@ -33136,7 +33326,7 @@
                 <a:ea typeface="Arial"/>
                 <a:cs typeface="Arial"/>
               </a:rPr>
-              <a:t>The original eight rows remain historical input; six added dimensions still have TBD weights and ratings.</a:t>
+              <a:t>Historical ratings remain E0 input; the added 40% stays Unknown [0,10], so the overlapping ranges force HOLD.</a:t>
             </a:r>
           </a:p>
         </p:txBody>
@@ -33223,16 +33413,16 @@
               <a:t>REFERENCES  </a:t>
             </a:r>
             <a:r>
-              <a:rPr sz="825" u="sng">
+              <a:rPr sz="825" b="1">
                 <a:solidFill>
                   <a:srgbClr val="666762"/>
                 </a:solidFill>
-                <a:hlinkClick xmlns:r="http://schemas.openxmlformats.org/officeDocument/2006/relationships" r:id="Rf7d71e730c90463c"/>
+                <a:hlinkClick xmlns:r="http://schemas.openxmlformats.org/officeDocument/2006/relationships" r:id="Rdd27e409df1b4c7d"/>
               </a:rPr>
               <a:t>Repo reference</a:t>
             </a:r>
             <a:r>
-              <a:rPr sz="825">
+              <a:rPr sz="825" b="1">
                 <a:solidFill>
                   <a:srgbClr val="666762"/>
                 </a:solidFill>
@@ -33240,11 +33430,11 @@
               <a:t>  ·  </a:t>
             </a:r>
             <a:r>
-              <a:rPr sz="825" u="sng">
+              <a:rPr sz="825" b="1">
                 <a:solidFill>
                   <a:srgbClr val="666762"/>
                 </a:solidFill>
-                <a:hlinkClick xmlns:r="http://schemas.openxmlformats.org/officeDocument/2006/relationships" r:id="R97ddcb1bf39042cd"/>
+                <a:hlinkClick xmlns:r="http://schemas.openxmlformats.org/officeDocument/2006/relationships" r:id="R6b76b5d950df4de2"/>
               </a:rPr>
               <a:t>Official docs</a:t>
             </a:r>
@@ -33312,7 +33502,7 @@
       </p:sp>
       <p:graphicFrame>
         <p:nvGraphicFramePr>
-          <p:cNvPr id="30" name=""/>
+          <p:cNvPr id="66" name=""/>
           <p:cNvGraphicFramePr/>
           <p:nvPr/>
         </p:nvGraphicFramePr>
@@ -34032,10 +34222,10 @@
       </p:graphicFrame>
       <p:sp>
         <p:nvSpPr>
-          <p:cNvPr id="10" name="">
-            <a:extLst xmlns:a="http://schemas.openxmlformats.org/drawingml/2006/main">
-              <a:ext uri="{FF2B5EF4-FFF2-40B4-BE49-F238E27FC236}">
-                <a16:creationId xmlns:a16="http://schemas.microsoft.com/office/drawing/2014/main" id="{38012114-7D98-4B81-97D5-A922871818EE}"/>
+          <p:cNvPr id="22" name="scenario-audit-panel">
+            <a:extLst xmlns:a="http://schemas.openxmlformats.org/drawingml/2006/main">
+              <a:ext uri="{FF2B5EF4-FFF2-40B4-BE49-F238E27FC236}">
+                <a16:creationId xmlns:a16="http://schemas.microsoft.com/office/drawing/2014/main" id="{90C9E701-AEB8-4410-AB80-4D09B9755F52}"/>
               </a:ext>
             </a:extLst>
           </p:cNvPr>
@@ -34047,7 +34237,7 @@
         <p:spPr>
           <a:xfrm xmlns:a="http://schemas.openxmlformats.org/drawingml/2006/main">
             <a:off x="7848600" y="2076450"/>
-            <a:ext cx="3733800" cy="1866900"/>
+            <a:ext cx="3733800" cy="4095750"/>
           </a:xfrm>
           <a:prstGeom xmlns:a="http://schemas.openxmlformats.org/drawingml/2006/main" prst="rect">
             <a:avLst/>
@@ -34057,7 +34247,7 @@
           </a:solidFill>
           <a:ln xmlns:a="http://schemas.openxmlformats.org/drawingml/2006/main" w="9525">
             <a:solidFill>
-              <a:srgbClr val="8A8B86"/>
+              <a:srgbClr val="111111"/>
             </a:solidFill>
             <a:prstDash val="solid"/>
           </a:ln>
@@ -34065,10 +34255,10 @@
       </p:sp>
       <p:sp>
         <p:nvSpPr>
-          <p:cNvPr id="11" name="">
-            <a:extLst xmlns:a="http://schemas.openxmlformats.org/drawingml/2006/main">
-              <a:ext uri="{FF2B5EF4-FFF2-40B4-BE49-F238E27FC236}">
-                <a16:creationId xmlns:a16="http://schemas.microsoft.com/office/drawing/2014/main" id="{DA77C274-D781-4EC7-9FFB-674C20AB66C5}"/>
+          <p:cNvPr id="23" name="scenario-audit-header">
+            <a:extLst xmlns:a="http://schemas.openxmlformats.org/drawingml/2006/main">
+              <a:ext uri="{FF2B5EF4-FFF2-40B4-BE49-F238E27FC236}">
+                <a16:creationId xmlns:a16="http://schemas.microsoft.com/office/drawing/2014/main" id="{1ECCEB7D-D65E-482A-B92F-CFFC281C73AC}"/>
               </a:ext>
             </a:extLst>
           </p:cNvPr>
@@ -34080,7 +34270,2012 @@
         <p:spPr>
           <a:xfrm xmlns:a="http://schemas.openxmlformats.org/drawingml/2006/main">
             <a:off x="7848600" y="2076450"/>
-            <a:ext cx="66675" cy="1866900"/>
+            <a:ext cx="3733800" cy="476250"/>
+          </a:xfrm>
+          <a:prstGeom xmlns:a="http://schemas.openxmlformats.org/drawingml/2006/main" prst="rect">
+            <a:avLst/>
+          </a:prstGeom>
+          <a:solidFill xmlns:a="http://schemas.openxmlformats.org/drawingml/2006/main">
+            <a:srgbClr val="5537D6"/>
+          </a:solidFill>
+          <a:ln xmlns:a="http://schemas.openxmlformats.org/drawingml/2006/main" w="9525">
+            <a:solidFill>
+              <a:srgbClr val="5537D6"/>
+            </a:solidFill>
+            <a:prstDash val="solid"/>
+          </a:ln>
+        </p:spPr>
+      </p:sp>
+      <p:sp>
+        <p:nvSpPr>
+          <p:cNvPr id="24" name="scenario-audit-header-text">
+            <a:extLst xmlns:a="http://schemas.openxmlformats.org/drawingml/2006/main">
+              <a:ext uri="{FF2B5EF4-FFF2-40B4-BE49-F238E27FC236}">
+                <a16:creationId xmlns:a16="http://schemas.microsoft.com/office/drawing/2014/main" id="{1CE06F0C-F2CD-45DD-B0D5-0039DF0C0454}"/>
+              </a:ext>
+            </a:extLst>
+          </p:cNvPr>
+          <p:cNvSpPr>
+            <a:spLocks xmlns:a="http://schemas.openxmlformats.org/drawingml/2006/main" noGrp="1"/>
+          </p:cNvSpPr>
+          <p:nvPr/>
+        </p:nvSpPr>
+        <p:spPr>
+          <a:xfrm xmlns:a="http://schemas.openxmlformats.org/drawingml/2006/main">
+            <a:off x="7981950" y="2114550"/>
+            <a:ext cx="3467100" cy="400050"/>
+          </a:xfrm>
+          <a:prstGeom xmlns:a="http://schemas.openxmlformats.org/drawingml/2006/main" prst="rect">
+            <a:avLst/>
+          </a:prstGeom>
+          <a:noFill xmlns:a="http://schemas.openxmlformats.org/drawingml/2006/main"/>
+          <a:ln xmlns:a="http://schemas.openxmlformats.org/drawingml/2006/main" w="0">
+            <a:solidFill>
+              <a:srgbClr val="FFFCF5"/>
+            </a:solidFill>
+            <a:prstDash val="solid"/>
+          </a:ln>
+        </p:spPr>
+        <p:txBody>
+          <a:bodyPr xmlns:a="http://schemas.openxmlformats.org/drawingml/2006/main" lIns="28575" tIns="19050" rIns="28575" bIns="19050" anchor="ctr">
+            <a:normAutofit fontScale="93137"/>
+          </a:bodyPr>
+          <a:lstStyle xmlns:a="http://schemas.openxmlformats.org/drawingml/2006/main"/>
+          <a:p xmlns:a="http://schemas.openxmlformats.org/drawingml/2006/main">
+            <a:pPr algn="l">
+              <a:lnSpc>
+                <a:spcPct val="100000"/>
+              </a:lnSpc>
+              <a:buNone/>
+              <a:defRPr sz="1275" b="1">
+                <a:solidFill>
+                  <a:srgbClr val="FFFFFF"/>
+                </a:solidFill>
+                <a:latin typeface="Consolas"/>
+                <a:ea typeface="Consolas"/>
+                <a:cs typeface="Consolas"/>
+              </a:defRPr>
+            </a:pPr>
+            <a:r>
+              <a:rPr sz="1275" b="1">
+                <a:solidFill>
+                  <a:srgbClr val="FFFFFF"/>
+                </a:solidFill>
+                <a:latin typeface="Consolas"/>
+                <a:ea typeface="Consolas"/>
+                <a:cs typeface="Consolas"/>
+              </a:rPr>
+              <a:t>PROVISIONAL 60/40 SCENARIO</a:t>
+            </a:r>
+          </a:p>
+          <a:p xmlns:a="http://schemas.openxmlformats.org/drawingml/2006/main">
+            <a:pPr algn="l">
+              <a:lnSpc>
+                <a:spcPct val="100000"/>
+              </a:lnSpc>
+              <a:buNone/>
+              <a:defRPr sz="1275" b="1">
+                <a:solidFill>
+                  <a:srgbClr val="FFFFFF"/>
+                </a:solidFill>
+                <a:latin typeface="Consolas"/>
+                <a:ea typeface="Consolas"/>
+                <a:cs typeface="Consolas"/>
+              </a:defRPr>
+            </a:pPr>
+            <a:r>
+              <a:rPr sz="1275" b="1">
+                <a:solidFill>
+                  <a:srgbClr val="FFFFFF"/>
+                </a:solidFill>
+                <a:latin typeface="Consolas"/>
+                <a:ea typeface="Consolas"/>
+                <a:cs typeface="Consolas"/>
+              </a:rPr>
+              <a:t>NOT DECISION EVIDENCE</a:t>
+            </a:r>
+          </a:p>
+        </p:txBody>
+      </p:sp>
+      <p:sp>
+        <p:nvSpPr>
+          <p:cNvPr id="25" name="scenario-row-code-0">
+            <a:extLst xmlns:a="http://schemas.openxmlformats.org/drawingml/2006/main">
+              <a:ext uri="{FF2B5EF4-FFF2-40B4-BE49-F238E27FC236}">
+                <a16:creationId xmlns:a16="http://schemas.microsoft.com/office/drawing/2014/main" id="{81B31317-B2AB-4FB3-86A2-030F671E990F}"/>
+              </a:ext>
+            </a:extLst>
+          </p:cNvPr>
+          <p:cNvSpPr>
+            <a:spLocks xmlns:a="http://schemas.openxmlformats.org/drawingml/2006/main" noGrp="1"/>
+          </p:cNvSpPr>
+          <p:nvPr/>
+        </p:nvSpPr>
+        <p:spPr>
+          <a:xfrm xmlns:a="http://schemas.openxmlformats.org/drawingml/2006/main">
+            <a:off x="7962900" y="2609850"/>
+            <a:ext cx="647700" cy="266700"/>
+          </a:xfrm>
+          <a:prstGeom xmlns:a="http://schemas.openxmlformats.org/drawingml/2006/main" prst="rect">
+            <a:avLst/>
+          </a:prstGeom>
+          <a:noFill xmlns:a="http://schemas.openxmlformats.org/drawingml/2006/main"/>
+          <a:ln xmlns:a="http://schemas.openxmlformats.org/drawingml/2006/main" w="0">
+            <a:solidFill>
+              <a:srgbClr val="FFFCF5"/>
+            </a:solidFill>
+            <a:prstDash val="solid"/>
+          </a:ln>
+        </p:spPr>
+        <p:txBody>
+          <a:bodyPr xmlns:a="http://schemas.openxmlformats.org/drawingml/2006/main" lIns="28575" tIns="19050" rIns="28575" bIns="19050" anchor="ctr">
+            <a:normAutofit fontScale="100000"/>
+          </a:bodyPr>
+          <a:lstStyle xmlns:a="http://schemas.openxmlformats.org/drawingml/2006/main"/>
+          <a:p xmlns:a="http://schemas.openxmlformats.org/drawingml/2006/main">
+            <a:pPr algn="l">
+              <a:lnSpc>
+                <a:spcPct val="100000"/>
+              </a:lnSpc>
+              <a:buNone/>
+              <a:defRPr sz="1050" b="1">
+                <a:solidFill>
+                  <a:srgbClr val="5537D6"/>
+                </a:solidFill>
+                <a:latin typeface="Consolas"/>
+                <a:ea typeface="Consolas"/>
+                <a:cs typeface="Consolas"/>
+              </a:defRPr>
+            </a:pPr>
+            <a:r>
+              <a:rPr sz="1050" b="1">
+                <a:solidFill>
+                  <a:srgbClr val="5537D6"/>
+                </a:solidFill>
+                <a:latin typeface="Consolas"/>
+                <a:ea typeface="Consolas"/>
+                <a:cs typeface="Consolas"/>
+              </a:rPr>
+              <a:t>GRS-01</a:t>
+            </a:r>
+          </a:p>
+        </p:txBody>
+      </p:sp>
+      <p:sp>
+        <p:nvSpPr>
+          <p:cNvPr id="26" name="scenario-row-label-0">
+            <a:extLst xmlns:a="http://schemas.openxmlformats.org/drawingml/2006/main">
+              <a:ext uri="{FF2B5EF4-FFF2-40B4-BE49-F238E27FC236}">
+                <a16:creationId xmlns:a16="http://schemas.microsoft.com/office/drawing/2014/main" id="{E8C04EEA-AD8A-42C7-88AD-07521EC593F5}"/>
+              </a:ext>
+            </a:extLst>
+          </p:cNvPr>
+          <p:cNvSpPr>
+            <a:spLocks xmlns:a="http://schemas.openxmlformats.org/drawingml/2006/main" noGrp="1"/>
+          </p:cNvSpPr>
+          <p:nvPr/>
+        </p:nvSpPr>
+        <p:spPr>
+          <a:xfrm xmlns:a="http://schemas.openxmlformats.org/drawingml/2006/main">
+            <a:off x="8629650" y="2609850"/>
+            <a:ext cx="1771650" cy="266700"/>
+          </a:xfrm>
+          <a:prstGeom xmlns:a="http://schemas.openxmlformats.org/drawingml/2006/main" prst="rect">
+            <a:avLst/>
+          </a:prstGeom>
+          <a:noFill xmlns:a="http://schemas.openxmlformats.org/drawingml/2006/main"/>
+          <a:ln xmlns:a="http://schemas.openxmlformats.org/drawingml/2006/main" w="0">
+            <a:solidFill>
+              <a:srgbClr val="FFFCF5"/>
+            </a:solidFill>
+            <a:prstDash val="solid"/>
+          </a:ln>
+        </p:spPr>
+        <p:txBody>
+          <a:bodyPr xmlns:a="http://schemas.openxmlformats.org/drawingml/2006/main" lIns="28575" tIns="19050" rIns="28575" bIns="19050" anchor="ctr">
+            <a:normAutofit fontScale="100000"/>
+          </a:bodyPr>
+          <a:lstStyle xmlns:a="http://schemas.openxmlformats.org/drawingml/2006/main"/>
+          <a:p xmlns:a="http://schemas.openxmlformats.org/drawingml/2006/main">
+            <a:pPr algn="l">
+              <a:lnSpc>
+                <a:spcPct val="100000"/>
+              </a:lnSpc>
+              <a:buNone/>
+              <a:defRPr sz="1200" b="0">
+                <a:solidFill>
+                  <a:srgbClr val="111111"/>
+                </a:solidFill>
+                <a:latin typeface="Arial"/>
+                <a:ea typeface="Arial"/>
+                <a:cs typeface="Arial"/>
+              </a:defRPr>
+            </a:pPr>
+            <a:r>
+              <a:rPr sz="1200" b="0">
+                <a:solidFill>
+                  <a:srgbClr val="111111"/>
+                </a:solidFill>
+                <a:latin typeface="Arial"/>
+                <a:ea typeface="Arial"/>
+                <a:cs typeface="Arial"/>
+              </a:rPr>
+              <a:t>Multicloud</a:t>
+            </a:r>
+          </a:p>
+        </p:txBody>
+      </p:sp>
+      <p:sp>
+        <p:nvSpPr>
+          <p:cNvPr id="27" name="scenario-row-weight-0">
+            <a:extLst xmlns:a="http://schemas.openxmlformats.org/drawingml/2006/main">
+              <a:ext uri="{FF2B5EF4-FFF2-40B4-BE49-F238E27FC236}">
+                <a16:creationId xmlns:a16="http://schemas.microsoft.com/office/drawing/2014/main" id="{A739B5D5-602B-4E61-9069-163ED998D858}"/>
+              </a:ext>
+            </a:extLst>
+          </p:cNvPr>
+          <p:cNvSpPr>
+            <a:spLocks xmlns:a="http://schemas.openxmlformats.org/drawingml/2006/main" noGrp="1"/>
+          </p:cNvSpPr>
+          <p:nvPr/>
+        </p:nvSpPr>
+        <p:spPr>
+          <a:xfrm xmlns:a="http://schemas.openxmlformats.org/drawingml/2006/main">
+            <a:off x="10420350" y="2609850"/>
+            <a:ext cx="419100" cy="266700"/>
+          </a:xfrm>
+          <a:prstGeom xmlns:a="http://schemas.openxmlformats.org/drawingml/2006/main" prst="rect">
+            <a:avLst/>
+          </a:prstGeom>
+          <a:noFill xmlns:a="http://schemas.openxmlformats.org/drawingml/2006/main"/>
+          <a:ln xmlns:a="http://schemas.openxmlformats.org/drawingml/2006/main" w="0">
+            <a:solidFill>
+              <a:srgbClr val="FFFCF5"/>
+            </a:solidFill>
+            <a:prstDash val="solid"/>
+          </a:ln>
+        </p:spPr>
+        <p:txBody>
+          <a:bodyPr xmlns:a="http://schemas.openxmlformats.org/drawingml/2006/main" lIns="28575" tIns="19050" rIns="28575" bIns="19050" anchor="ctr">
+            <a:normAutofit fontScale="100000"/>
+          </a:bodyPr>
+          <a:lstStyle xmlns:a="http://schemas.openxmlformats.org/drawingml/2006/main"/>
+          <a:p xmlns:a="http://schemas.openxmlformats.org/drawingml/2006/main">
+            <a:pPr algn="r">
+              <a:lnSpc>
+                <a:spcPct val="100000"/>
+              </a:lnSpc>
+              <a:buNone/>
+              <a:defRPr sz="1200" b="1">
+                <a:solidFill>
+                  <a:srgbClr val="111111"/>
+                </a:solidFill>
+                <a:latin typeface="Arial"/>
+                <a:ea typeface="Arial"/>
+                <a:cs typeface="Arial"/>
+              </a:defRPr>
+            </a:pPr>
+            <a:r>
+              <a:rPr sz="1200" b="1">
+                <a:solidFill>
+                  <a:srgbClr val="111111"/>
+                </a:solidFill>
+                <a:latin typeface="Arial"/>
+                <a:ea typeface="Arial"/>
+                <a:cs typeface="Arial"/>
+              </a:rPr>
+              <a:t>8%</a:t>
+            </a:r>
+          </a:p>
+        </p:txBody>
+      </p:sp>
+      <p:sp>
+        <p:nvSpPr>
+          <p:cNvPr id="28" name="scenario-row-state-0">
+            <a:extLst xmlns:a="http://schemas.openxmlformats.org/drawingml/2006/main">
+              <a:ext uri="{FF2B5EF4-FFF2-40B4-BE49-F238E27FC236}">
+                <a16:creationId xmlns:a16="http://schemas.microsoft.com/office/drawing/2014/main" id="{5125E0F7-3548-4076-A464-F88A45052A09}"/>
+              </a:ext>
+            </a:extLst>
+          </p:cNvPr>
+          <p:cNvSpPr>
+            <a:spLocks xmlns:a="http://schemas.openxmlformats.org/drawingml/2006/main" noGrp="1"/>
+          </p:cNvSpPr>
+          <p:nvPr/>
+        </p:nvSpPr>
+        <p:spPr>
+          <a:xfrm xmlns:a="http://schemas.openxmlformats.org/drawingml/2006/main">
+            <a:off x="10858500" y="2609850"/>
+            <a:ext cx="609600" cy="266700"/>
+          </a:xfrm>
+          <a:prstGeom xmlns:a="http://schemas.openxmlformats.org/drawingml/2006/main" prst="rect">
+            <a:avLst/>
+          </a:prstGeom>
+          <a:noFill xmlns:a="http://schemas.openxmlformats.org/drawingml/2006/main"/>
+          <a:ln xmlns:a="http://schemas.openxmlformats.org/drawingml/2006/main" w="0">
+            <a:solidFill>
+              <a:srgbClr val="FFFCF5"/>
+            </a:solidFill>
+            <a:prstDash val="solid"/>
+          </a:ln>
+        </p:spPr>
+        <p:txBody>
+          <a:bodyPr xmlns:a="http://schemas.openxmlformats.org/drawingml/2006/main" lIns="0" tIns="0" rIns="0" bIns="0" anchor="ctr">
+            <a:normAutofit fontScale="100000"/>
+          </a:bodyPr>
+          <a:lstStyle xmlns:a="http://schemas.openxmlformats.org/drawingml/2006/main"/>
+          <a:p xmlns:a="http://schemas.openxmlformats.org/drawingml/2006/main">
+            <a:pPr algn="r">
+              <a:lnSpc>
+                <a:spcPct val="100000"/>
+              </a:lnSpc>
+              <a:buNone/>
+              <a:defRPr sz="675" b="1">
+                <a:solidFill>
+                  <a:srgbClr val="686A66"/>
+                </a:solidFill>
+                <a:latin typeface="Consolas"/>
+                <a:ea typeface="Consolas"/>
+                <a:cs typeface="Consolas"/>
+              </a:defRPr>
+            </a:pPr>
+            <a:r>
+              <a:rPr sz="675" b="1">
+                <a:solidFill>
+                  <a:srgbClr val="686A66"/>
+                </a:solidFill>
+                <a:latin typeface="Consolas"/>
+                <a:ea typeface="Consolas"/>
+                <a:cs typeface="Consolas"/>
+              </a:rPr>
+              <a:t>UNKNOWN</a:t>
+            </a:r>
+          </a:p>
+        </p:txBody>
+      </p:sp>
+      <p:sp>
+        <p:nvSpPr>
+          <p:cNvPr id="29" name="scenario-row-fill-1">
+            <a:extLst xmlns:a="http://schemas.openxmlformats.org/drawingml/2006/main">
+              <a:ext uri="{FF2B5EF4-FFF2-40B4-BE49-F238E27FC236}">
+                <a16:creationId xmlns:a16="http://schemas.microsoft.com/office/drawing/2014/main" id="{4FB6DAD2-93BC-4E07-8971-9D049A60D1EA}"/>
+              </a:ext>
+            </a:extLst>
+          </p:cNvPr>
+          <p:cNvSpPr>
+            <a:spLocks xmlns:a="http://schemas.openxmlformats.org/drawingml/2006/main" noGrp="1"/>
+          </p:cNvSpPr>
+          <p:nvPr/>
+        </p:nvSpPr>
+        <p:spPr>
+          <a:xfrm xmlns:a="http://schemas.openxmlformats.org/drawingml/2006/main">
+            <a:off x="7858125" y="2895600"/>
+            <a:ext cx="3714750" cy="304800"/>
+          </a:xfrm>
+          <a:prstGeom xmlns:a="http://schemas.openxmlformats.org/drawingml/2006/main" prst="rect">
+            <a:avLst/>
+          </a:prstGeom>
+          <a:solidFill xmlns:a="http://schemas.openxmlformats.org/drawingml/2006/main">
+            <a:srgbClr val="F3F0E8"/>
+          </a:solidFill>
+          <a:ln xmlns:a="http://schemas.openxmlformats.org/drawingml/2006/main" w="0">
+            <a:solidFill>
+              <a:srgbClr val="F3F0E8"/>
+            </a:solidFill>
+            <a:prstDash val="solid"/>
+          </a:ln>
+        </p:spPr>
+      </p:sp>
+      <p:sp>
+        <p:nvSpPr>
+          <p:cNvPr id="30" name="scenario-row-code-1">
+            <a:extLst xmlns:a="http://schemas.openxmlformats.org/drawingml/2006/main">
+              <a:ext uri="{FF2B5EF4-FFF2-40B4-BE49-F238E27FC236}">
+                <a16:creationId xmlns:a16="http://schemas.microsoft.com/office/drawing/2014/main" id="{48ED1F32-0350-4F69-A5A6-B6B7EB853E5E}"/>
+              </a:ext>
+            </a:extLst>
+          </p:cNvPr>
+          <p:cNvSpPr>
+            <a:spLocks xmlns:a="http://schemas.openxmlformats.org/drawingml/2006/main" noGrp="1"/>
+          </p:cNvSpPr>
+          <p:nvPr/>
+        </p:nvSpPr>
+        <p:spPr>
+          <a:xfrm xmlns:a="http://schemas.openxmlformats.org/drawingml/2006/main">
+            <a:off x="7962900" y="2914650"/>
+            <a:ext cx="647700" cy="266700"/>
+          </a:xfrm>
+          <a:prstGeom xmlns:a="http://schemas.openxmlformats.org/drawingml/2006/main" prst="rect">
+            <a:avLst/>
+          </a:prstGeom>
+          <a:noFill xmlns:a="http://schemas.openxmlformats.org/drawingml/2006/main"/>
+          <a:ln xmlns:a="http://schemas.openxmlformats.org/drawingml/2006/main" w="0">
+            <a:solidFill>
+              <a:srgbClr val="FFFCF5"/>
+            </a:solidFill>
+            <a:prstDash val="solid"/>
+          </a:ln>
+        </p:spPr>
+        <p:txBody>
+          <a:bodyPr xmlns:a="http://schemas.openxmlformats.org/drawingml/2006/main" lIns="28575" tIns="19050" rIns="28575" bIns="19050" anchor="ctr">
+            <a:normAutofit fontScale="100000"/>
+          </a:bodyPr>
+          <a:lstStyle xmlns:a="http://schemas.openxmlformats.org/drawingml/2006/main"/>
+          <a:p xmlns:a="http://schemas.openxmlformats.org/drawingml/2006/main">
+            <a:pPr algn="l">
+              <a:lnSpc>
+                <a:spcPct val="100000"/>
+              </a:lnSpc>
+              <a:buNone/>
+              <a:defRPr sz="1050" b="1">
+                <a:solidFill>
+                  <a:srgbClr val="5537D6"/>
+                </a:solidFill>
+                <a:latin typeface="Consolas"/>
+                <a:ea typeface="Consolas"/>
+                <a:cs typeface="Consolas"/>
+              </a:defRPr>
+            </a:pPr>
+            <a:r>
+              <a:rPr sz="1050" b="1">
+                <a:solidFill>
+                  <a:srgbClr val="5537D6"/>
+                </a:solidFill>
+                <a:latin typeface="Consolas"/>
+                <a:ea typeface="Consolas"/>
+                <a:cs typeface="Consolas"/>
+              </a:rPr>
+              <a:t>GRS-02</a:t>
+            </a:r>
+          </a:p>
+        </p:txBody>
+      </p:sp>
+      <p:sp>
+        <p:nvSpPr>
+          <p:cNvPr id="31" name="scenario-row-label-1">
+            <a:extLst xmlns:a="http://schemas.openxmlformats.org/drawingml/2006/main">
+              <a:ext uri="{FF2B5EF4-FFF2-40B4-BE49-F238E27FC236}">
+                <a16:creationId xmlns:a16="http://schemas.microsoft.com/office/drawing/2014/main" id="{DCE7D38A-7B99-458A-A952-842298D1D5EE}"/>
+              </a:ext>
+            </a:extLst>
+          </p:cNvPr>
+          <p:cNvSpPr>
+            <a:spLocks xmlns:a="http://schemas.openxmlformats.org/drawingml/2006/main" noGrp="1"/>
+          </p:cNvSpPr>
+          <p:nvPr/>
+        </p:nvSpPr>
+        <p:spPr>
+          <a:xfrm xmlns:a="http://schemas.openxmlformats.org/drawingml/2006/main">
+            <a:off x="8629650" y="2914650"/>
+            <a:ext cx="1771650" cy="266700"/>
+          </a:xfrm>
+          <a:prstGeom xmlns:a="http://schemas.openxmlformats.org/drawingml/2006/main" prst="rect">
+            <a:avLst/>
+          </a:prstGeom>
+          <a:noFill xmlns:a="http://schemas.openxmlformats.org/drawingml/2006/main"/>
+          <a:ln xmlns:a="http://schemas.openxmlformats.org/drawingml/2006/main" w="0">
+            <a:solidFill>
+              <a:srgbClr val="FFFCF5"/>
+            </a:solidFill>
+            <a:prstDash val="solid"/>
+          </a:ln>
+        </p:spPr>
+        <p:txBody>
+          <a:bodyPr xmlns:a="http://schemas.openxmlformats.org/drawingml/2006/main" lIns="28575" tIns="19050" rIns="28575" bIns="19050" anchor="ctr">
+            <a:normAutofit fontScale="100000"/>
+          </a:bodyPr>
+          <a:lstStyle xmlns:a="http://schemas.openxmlformats.org/drawingml/2006/main"/>
+          <a:p xmlns:a="http://schemas.openxmlformats.org/drawingml/2006/main">
+            <a:pPr algn="l">
+              <a:lnSpc>
+                <a:spcPct val="100000"/>
+              </a:lnSpc>
+              <a:buNone/>
+              <a:defRPr sz="1200" b="0">
+                <a:solidFill>
+                  <a:srgbClr val="111111"/>
+                </a:solidFill>
+                <a:latin typeface="Arial"/>
+                <a:ea typeface="Arial"/>
+                <a:cs typeface="Arial"/>
+              </a:defRPr>
+            </a:pPr>
+            <a:r>
+              <a:rPr sz="1200" b="0">
+                <a:solidFill>
+                  <a:srgbClr val="111111"/>
+                </a:solidFill>
+                <a:latin typeface="Arial"/>
+                <a:ea typeface="Arial"/>
+                <a:cs typeface="Arial"/>
+              </a:rPr>
+              <a:t>Scale / recovery</a:t>
+            </a:r>
+          </a:p>
+        </p:txBody>
+      </p:sp>
+      <p:sp>
+        <p:nvSpPr>
+          <p:cNvPr id="32" name="scenario-row-weight-1">
+            <a:extLst xmlns:a="http://schemas.openxmlformats.org/drawingml/2006/main">
+              <a:ext uri="{FF2B5EF4-FFF2-40B4-BE49-F238E27FC236}">
+                <a16:creationId xmlns:a16="http://schemas.microsoft.com/office/drawing/2014/main" id="{49CB506D-45AA-49FA-939F-E5F47BD50375}"/>
+              </a:ext>
+            </a:extLst>
+          </p:cNvPr>
+          <p:cNvSpPr>
+            <a:spLocks xmlns:a="http://schemas.openxmlformats.org/drawingml/2006/main" noGrp="1"/>
+          </p:cNvSpPr>
+          <p:nvPr/>
+        </p:nvSpPr>
+        <p:spPr>
+          <a:xfrm xmlns:a="http://schemas.openxmlformats.org/drawingml/2006/main">
+            <a:off x="10420350" y="2914650"/>
+            <a:ext cx="419100" cy="266700"/>
+          </a:xfrm>
+          <a:prstGeom xmlns:a="http://schemas.openxmlformats.org/drawingml/2006/main" prst="rect">
+            <a:avLst/>
+          </a:prstGeom>
+          <a:noFill xmlns:a="http://schemas.openxmlformats.org/drawingml/2006/main"/>
+          <a:ln xmlns:a="http://schemas.openxmlformats.org/drawingml/2006/main" w="0">
+            <a:solidFill>
+              <a:srgbClr val="FFFCF5"/>
+            </a:solidFill>
+            <a:prstDash val="solid"/>
+          </a:ln>
+        </p:spPr>
+        <p:txBody>
+          <a:bodyPr xmlns:a="http://schemas.openxmlformats.org/drawingml/2006/main" lIns="28575" tIns="19050" rIns="28575" bIns="19050" anchor="ctr">
+            <a:normAutofit fontScale="100000"/>
+          </a:bodyPr>
+          <a:lstStyle xmlns:a="http://schemas.openxmlformats.org/drawingml/2006/main"/>
+          <a:p xmlns:a="http://schemas.openxmlformats.org/drawingml/2006/main">
+            <a:pPr algn="r">
+              <a:lnSpc>
+                <a:spcPct val="100000"/>
+              </a:lnSpc>
+              <a:buNone/>
+              <a:defRPr sz="1200" b="1">
+                <a:solidFill>
+                  <a:srgbClr val="111111"/>
+                </a:solidFill>
+                <a:latin typeface="Arial"/>
+                <a:ea typeface="Arial"/>
+                <a:cs typeface="Arial"/>
+              </a:defRPr>
+            </a:pPr>
+            <a:r>
+              <a:rPr sz="1200" b="1">
+                <a:solidFill>
+                  <a:srgbClr val="111111"/>
+                </a:solidFill>
+                <a:latin typeface="Arial"/>
+                <a:ea typeface="Arial"/>
+                <a:cs typeface="Arial"/>
+              </a:rPr>
+              <a:t>8%</a:t>
+            </a:r>
+          </a:p>
+        </p:txBody>
+      </p:sp>
+      <p:sp>
+        <p:nvSpPr>
+          <p:cNvPr id="33" name="scenario-row-state-1">
+            <a:extLst xmlns:a="http://schemas.openxmlformats.org/drawingml/2006/main">
+              <a:ext uri="{FF2B5EF4-FFF2-40B4-BE49-F238E27FC236}">
+                <a16:creationId xmlns:a16="http://schemas.microsoft.com/office/drawing/2014/main" id="{FF7D7F95-FA48-4377-9E9A-EF5BCDDEADBE}"/>
+              </a:ext>
+            </a:extLst>
+          </p:cNvPr>
+          <p:cNvSpPr>
+            <a:spLocks xmlns:a="http://schemas.openxmlformats.org/drawingml/2006/main" noGrp="1"/>
+          </p:cNvSpPr>
+          <p:nvPr/>
+        </p:nvSpPr>
+        <p:spPr>
+          <a:xfrm xmlns:a="http://schemas.openxmlformats.org/drawingml/2006/main">
+            <a:off x="10858500" y="2914650"/>
+            <a:ext cx="609600" cy="266700"/>
+          </a:xfrm>
+          <a:prstGeom xmlns:a="http://schemas.openxmlformats.org/drawingml/2006/main" prst="rect">
+            <a:avLst/>
+          </a:prstGeom>
+          <a:noFill xmlns:a="http://schemas.openxmlformats.org/drawingml/2006/main"/>
+          <a:ln xmlns:a="http://schemas.openxmlformats.org/drawingml/2006/main" w="0">
+            <a:solidFill>
+              <a:srgbClr val="FFFCF5"/>
+            </a:solidFill>
+            <a:prstDash val="solid"/>
+          </a:ln>
+        </p:spPr>
+        <p:txBody>
+          <a:bodyPr xmlns:a="http://schemas.openxmlformats.org/drawingml/2006/main" lIns="0" tIns="0" rIns="0" bIns="0" anchor="ctr">
+            <a:normAutofit fontScale="100000"/>
+          </a:bodyPr>
+          <a:lstStyle xmlns:a="http://schemas.openxmlformats.org/drawingml/2006/main"/>
+          <a:p xmlns:a="http://schemas.openxmlformats.org/drawingml/2006/main">
+            <a:pPr algn="r">
+              <a:lnSpc>
+                <a:spcPct val="100000"/>
+              </a:lnSpc>
+              <a:buNone/>
+              <a:defRPr sz="675" b="1">
+                <a:solidFill>
+                  <a:srgbClr val="686A66"/>
+                </a:solidFill>
+                <a:latin typeface="Consolas"/>
+                <a:ea typeface="Consolas"/>
+                <a:cs typeface="Consolas"/>
+              </a:defRPr>
+            </a:pPr>
+            <a:r>
+              <a:rPr sz="675" b="1">
+                <a:solidFill>
+                  <a:srgbClr val="686A66"/>
+                </a:solidFill>
+                <a:latin typeface="Consolas"/>
+                <a:ea typeface="Consolas"/>
+                <a:cs typeface="Consolas"/>
+              </a:rPr>
+              <a:t>UNKNOWN</a:t>
+            </a:r>
+          </a:p>
+        </p:txBody>
+      </p:sp>
+      <p:sp>
+        <p:nvSpPr>
+          <p:cNvPr id="34" name="scenario-row-code-2">
+            <a:extLst xmlns:a="http://schemas.openxmlformats.org/drawingml/2006/main">
+              <a:ext uri="{FF2B5EF4-FFF2-40B4-BE49-F238E27FC236}">
+                <a16:creationId xmlns:a16="http://schemas.microsoft.com/office/drawing/2014/main" id="{9A2AECEE-3EAE-46AA-B204-8D1EAB04136B}"/>
+              </a:ext>
+            </a:extLst>
+          </p:cNvPr>
+          <p:cNvSpPr>
+            <a:spLocks xmlns:a="http://schemas.openxmlformats.org/drawingml/2006/main" noGrp="1"/>
+          </p:cNvSpPr>
+          <p:nvPr/>
+        </p:nvSpPr>
+        <p:spPr>
+          <a:xfrm xmlns:a="http://schemas.openxmlformats.org/drawingml/2006/main">
+            <a:off x="7962900" y="3219450"/>
+            <a:ext cx="647700" cy="266700"/>
+          </a:xfrm>
+          <a:prstGeom xmlns:a="http://schemas.openxmlformats.org/drawingml/2006/main" prst="rect">
+            <a:avLst/>
+          </a:prstGeom>
+          <a:noFill xmlns:a="http://schemas.openxmlformats.org/drawingml/2006/main"/>
+          <a:ln xmlns:a="http://schemas.openxmlformats.org/drawingml/2006/main" w="0">
+            <a:solidFill>
+              <a:srgbClr val="FFFCF5"/>
+            </a:solidFill>
+            <a:prstDash val="solid"/>
+          </a:ln>
+        </p:spPr>
+        <p:txBody>
+          <a:bodyPr xmlns:a="http://schemas.openxmlformats.org/drawingml/2006/main" lIns="28575" tIns="19050" rIns="28575" bIns="19050" anchor="ctr">
+            <a:normAutofit fontScale="100000"/>
+          </a:bodyPr>
+          <a:lstStyle xmlns:a="http://schemas.openxmlformats.org/drawingml/2006/main"/>
+          <a:p xmlns:a="http://schemas.openxmlformats.org/drawingml/2006/main">
+            <a:pPr algn="l">
+              <a:lnSpc>
+                <a:spcPct val="100000"/>
+              </a:lnSpc>
+              <a:buNone/>
+              <a:defRPr sz="1050" b="1">
+                <a:solidFill>
+                  <a:srgbClr val="5537D6"/>
+                </a:solidFill>
+                <a:latin typeface="Consolas"/>
+                <a:ea typeface="Consolas"/>
+                <a:cs typeface="Consolas"/>
+              </a:defRPr>
+            </a:pPr>
+            <a:r>
+              <a:rPr sz="1050" b="1">
+                <a:solidFill>
+                  <a:srgbClr val="5537D6"/>
+                </a:solidFill>
+                <a:latin typeface="Consolas"/>
+                <a:ea typeface="Consolas"/>
+                <a:cs typeface="Consolas"/>
+              </a:rPr>
+              <a:t>GRS-03</a:t>
+            </a:r>
+          </a:p>
+        </p:txBody>
+      </p:sp>
+      <p:sp>
+        <p:nvSpPr>
+          <p:cNvPr id="35" name="scenario-row-label-2">
+            <a:extLst xmlns:a="http://schemas.openxmlformats.org/drawingml/2006/main">
+              <a:ext uri="{FF2B5EF4-FFF2-40B4-BE49-F238E27FC236}">
+                <a16:creationId xmlns:a16="http://schemas.microsoft.com/office/drawing/2014/main" id="{A5A4049B-5521-473D-BA2F-06BA865FD1A1}"/>
+              </a:ext>
+            </a:extLst>
+          </p:cNvPr>
+          <p:cNvSpPr>
+            <a:spLocks xmlns:a="http://schemas.openxmlformats.org/drawingml/2006/main" noGrp="1"/>
+          </p:cNvSpPr>
+          <p:nvPr/>
+        </p:nvSpPr>
+        <p:spPr>
+          <a:xfrm xmlns:a="http://schemas.openxmlformats.org/drawingml/2006/main">
+            <a:off x="8629650" y="3219450"/>
+            <a:ext cx="1771650" cy="266700"/>
+          </a:xfrm>
+          <a:prstGeom xmlns:a="http://schemas.openxmlformats.org/drawingml/2006/main" prst="rect">
+            <a:avLst/>
+          </a:prstGeom>
+          <a:noFill xmlns:a="http://schemas.openxmlformats.org/drawingml/2006/main"/>
+          <a:ln xmlns:a="http://schemas.openxmlformats.org/drawingml/2006/main" w="0">
+            <a:solidFill>
+              <a:srgbClr val="FFFCF5"/>
+            </a:solidFill>
+            <a:prstDash val="solid"/>
+          </a:ln>
+        </p:spPr>
+        <p:txBody>
+          <a:bodyPr xmlns:a="http://schemas.openxmlformats.org/drawingml/2006/main" lIns="28575" tIns="19050" rIns="28575" bIns="19050" anchor="ctr">
+            <a:normAutofit fontScale="100000"/>
+          </a:bodyPr>
+          <a:lstStyle xmlns:a="http://schemas.openxmlformats.org/drawingml/2006/main"/>
+          <a:p xmlns:a="http://schemas.openxmlformats.org/drawingml/2006/main">
+            <a:pPr algn="l">
+              <a:lnSpc>
+                <a:spcPct val="100000"/>
+              </a:lnSpc>
+              <a:buNone/>
+              <a:defRPr sz="1200" b="0">
+                <a:solidFill>
+                  <a:srgbClr val="111111"/>
+                </a:solidFill>
+                <a:latin typeface="Arial"/>
+                <a:ea typeface="Arial"/>
+                <a:cs typeface="Arial"/>
+              </a:defRPr>
+            </a:pPr>
+            <a:r>
+              <a:rPr sz="1200" b="0">
+                <a:solidFill>
+                  <a:srgbClr val="111111"/>
+                </a:solidFill>
+                <a:latin typeface="Arial"/>
+                <a:ea typeface="Arial"/>
+                <a:cs typeface="Arial"/>
+              </a:rPr>
+              <a:t>IAM / traceability</a:t>
+            </a:r>
+          </a:p>
+        </p:txBody>
+      </p:sp>
+      <p:sp>
+        <p:nvSpPr>
+          <p:cNvPr id="36" name="scenario-row-weight-2">
+            <a:extLst xmlns:a="http://schemas.openxmlformats.org/drawingml/2006/main">
+              <a:ext uri="{FF2B5EF4-FFF2-40B4-BE49-F238E27FC236}">
+                <a16:creationId xmlns:a16="http://schemas.microsoft.com/office/drawing/2014/main" id="{4593799E-1EB7-40C3-BD42-07C12630215F}"/>
+              </a:ext>
+            </a:extLst>
+          </p:cNvPr>
+          <p:cNvSpPr>
+            <a:spLocks xmlns:a="http://schemas.openxmlformats.org/drawingml/2006/main" noGrp="1"/>
+          </p:cNvSpPr>
+          <p:nvPr/>
+        </p:nvSpPr>
+        <p:spPr>
+          <a:xfrm xmlns:a="http://schemas.openxmlformats.org/drawingml/2006/main">
+            <a:off x="10420350" y="3219450"/>
+            <a:ext cx="419100" cy="266700"/>
+          </a:xfrm>
+          <a:prstGeom xmlns:a="http://schemas.openxmlformats.org/drawingml/2006/main" prst="rect">
+            <a:avLst/>
+          </a:prstGeom>
+          <a:noFill xmlns:a="http://schemas.openxmlformats.org/drawingml/2006/main"/>
+          <a:ln xmlns:a="http://schemas.openxmlformats.org/drawingml/2006/main" w="0">
+            <a:solidFill>
+              <a:srgbClr val="FFFCF5"/>
+            </a:solidFill>
+            <a:prstDash val="solid"/>
+          </a:ln>
+        </p:spPr>
+        <p:txBody>
+          <a:bodyPr xmlns:a="http://schemas.openxmlformats.org/drawingml/2006/main" lIns="28575" tIns="19050" rIns="28575" bIns="19050" anchor="ctr">
+            <a:normAutofit fontScale="100000"/>
+          </a:bodyPr>
+          <a:lstStyle xmlns:a="http://schemas.openxmlformats.org/drawingml/2006/main"/>
+          <a:p xmlns:a="http://schemas.openxmlformats.org/drawingml/2006/main">
+            <a:pPr algn="r">
+              <a:lnSpc>
+                <a:spcPct val="100000"/>
+              </a:lnSpc>
+              <a:buNone/>
+              <a:defRPr sz="1200" b="1">
+                <a:solidFill>
+                  <a:srgbClr val="111111"/>
+                </a:solidFill>
+                <a:latin typeface="Arial"/>
+                <a:ea typeface="Arial"/>
+                <a:cs typeface="Arial"/>
+              </a:defRPr>
+            </a:pPr>
+            <a:r>
+              <a:rPr sz="1200" b="1">
+                <a:solidFill>
+                  <a:srgbClr val="111111"/>
+                </a:solidFill>
+                <a:latin typeface="Arial"/>
+                <a:ea typeface="Arial"/>
+                <a:cs typeface="Arial"/>
+              </a:rPr>
+              <a:t>8%</a:t>
+            </a:r>
+          </a:p>
+        </p:txBody>
+      </p:sp>
+      <p:sp>
+        <p:nvSpPr>
+          <p:cNvPr id="37" name="scenario-row-state-2">
+            <a:extLst xmlns:a="http://schemas.openxmlformats.org/drawingml/2006/main">
+              <a:ext uri="{FF2B5EF4-FFF2-40B4-BE49-F238E27FC236}">
+                <a16:creationId xmlns:a16="http://schemas.microsoft.com/office/drawing/2014/main" id="{11348A6C-DBAD-403F-BF73-02CDD598CD68}"/>
+              </a:ext>
+            </a:extLst>
+          </p:cNvPr>
+          <p:cNvSpPr>
+            <a:spLocks xmlns:a="http://schemas.openxmlformats.org/drawingml/2006/main" noGrp="1"/>
+          </p:cNvSpPr>
+          <p:nvPr/>
+        </p:nvSpPr>
+        <p:spPr>
+          <a:xfrm xmlns:a="http://schemas.openxmlformats.org/drawingml/2006/main">
+            <a:off x="10858500" y="3219450"/>
+            <a:ext cx="609600" cy="266700"/>
+          </a:xfrm>
+          <a:prstGeom xmlns:a="http://schemas.openxmlformats.org/drawingml/2006/main" prst="rect">
+            <a:avLst/>
+          </a:prstGeom>
+          <a:noFill xmlns:a="http://schemas.openxmlformats.org/drawingml/2006/main"/>
+          <a:ln xmlns:a="http://schemas.openxmlformats.org/drawingml/2006/main" w="0">
+            <a:solidFill>
+              <a:srgbClr val="FFFCF5"/>
+            </a:solidFill>
+            <a:prstDash val="solid"/>
+          </a:ln>
+        </p:spPr>
+        <p:txBody>
+          <a:bodyPr xmlns:a="http://schemas.openxmlformats.org/drawingml/2006/main" lIns="0" tIns="0" rIns="0" bIns="0" anchor="ctr">
+            <a:normAutofit fontScale="100000"/>
+          </a:bodyPr>
+          <a:lstStyle xmlns:a="http://schemas.openxmlformats.org/drawingml/2006/main"/>
+          <a:p xmlns:a="http://schemas.openxmlformats.org/drawingml/2006/main">
+            <a:pPr algn="r">
+              <a:lnSpc>
+                <a:spcPct val="100000"/>
+              </a:lnSpc>
+              <a:buNone/>
+              <a:defRPr sz="675" b="1">
+                <a:solidFill>
+                  <a:srgbClr val="686A66"/>
+                </a:solidFill>
+                <a:latin typeface="Consolas"/>
+                <a:ea typeface="Consolas"/>
+                <a:cs typeface="Consolas"/>
+              </a:defRPr>
+            </a:pPr>
+            <a:r>
+              <a:rPr sz="675" b="1">
+                <a:solidFill>
+                  <a:srgbClr val="686A66"/>
+                </a:solidFill>
+                <a:latin typeface="Consolas"/>
+                <a:ea typeface="Consolas"/>
+                <a:cs typeface="Consolas"/>
+              </a:rPr>
+              <a:t>UNKNOWN</a:t>
+            </a:r>
+          </a:p>
+        </p:txBody>
+      </p:sp>
+      <p:sp>
+        <p:nvSpPr>
+          <p:cNvPr id="38" name="scenario-row-fill-3">
+            <a:extLst xmlns:a="http://schemas.openxmlformats.org/drawingml/2006/main">
+              <a:ext uri="{FF2B5EF4-FFF2-40B4-BE49-F238E27FC236}">
+                <a16:creationId xmlns:a16="http://schemas.microsoft.com/office/drawing/2014/main" id="{C8B269AB-ED2B-4EA6-83E2-E3568BF8B61D}"/>
+              </a:ext>
+            </a:extLst>
+          </p:cNvPr>
+          <p:cNvSpPr>
+            <a:spLocks xmlns:a="http://schemas.openxmlformats.org/drawingml/2006/main" noGrp="1"/>
+          </p:cNvSpPr>
+          <p:nvPr/>
+        </p:nvSpPr>
+        <p:spPr>
+          <a:xfrm xmlns:a="http://schemas.openxmlformats.org/drawingml/2006/main">
+            <a:off x="7858125" y="3505200"/>
+            <a:ext cx="3714750" cy="304800"/>
+          </a:xfrm>
+          <a:prstGeom xmlns:a="http://schemas.openxmlformats.org/drawingml/2006/main" prst="rect">
+            <a:avLst/>
+          </a:prstGeom>
+          <a:solidFill xmlns:a="http://schemas.openxmlformats.org/drawingml/2006/main">
+            <a:srgbClr val="F3F0E8"/>
+          </a:solidFill>
+          <a:ln xmlns:a="http://schemas.openxmlformats.org/drawingml/2006/main" w="0">
+            <a:solidFill>
+              <a:srgbClr val="F3F0E8"/>
+            </a:solidFill>
+            <a:prstDash val="solid"/>
+          </a:ln>
+        </p:spPr>
+      </p:sp>
+      <p:sp>
+        <p:nvSpPr>
+          <p:cNvPr id="39" name="scenario-row-code-3">
+            <a:extLst xmlns:a="http://schemas.openxmlformats.org/drawingml/2006/main">
+              <a:ext uri="{FF2B5EF4-FFF2-40B4-BE49-F238E27FC236}">
+                <a16:creationId xmlns:a16="http://schemas.microsoft.com/office/drawing/2014/main" id="{720FB59E-FDD5-4DE8-B719-FE1BB59031DF}"/>
+              </a:ext>
+            </a:extLst>
+          </p:cNvPr>
+          <p:cNvSpPr>
+            <a:spLocks xmlns:a="http://schemas.openxmlformats.org/drawingml/2006/main" noGrp="1"/>
+          </p:cNvSpPr>
+          <p:nvPr/>
+        </p:nvSpPr>
+        <p:spPr>
+          <a:xfrm xmlns:a="http://schemas.openxmlformats.org/drawingml/2006/main">
+            <a:off x="7962900" y="3524250"/>
+            <a:ext cx="647700" cy="266700"/>
+          </a:xfrm>
+          <a:prstGeom xmlns:a="http://schemas.openxmlformats.org/drawingml/2006/main" prst="rect">
+            <a:avLst/>
+          </a:prstGeom>
+          <a:noFill xmlns:a="http://schemas.openxmlformats.org/drawingml/2006/main"/>
+          <a:ln xmlns:a="http://schemas.openxmlformats.org/drawingml/2006/main" w="0">
+            <a:solidFill>
+              <a:srgbClr val="FFFCF5"/>
+            </a:solidFill>
+            <a:prstDash val="solid"/>
+          </a:ln>
+        </p:spPr>
+        <p:txBody>
+          <a:bodyPr xmlns:a="http://schemas.openxmlformats.org/drawingml/2006/main" lIns="28575" tIns="19050" rIns="28575" bIns="19050" anchor="ctr">
+            <a:normAutofit fontScale="100000"/>
+          </a:bodyPr>
+          <a:lstStyle xmlns:a="http://schemas.openxmlformats.org/drawingml/2006/main"/>
+          <a:p xmlns:a="http://schemas.openxmlformats.org/drawingml/2006/main">
+            <a:pPr algn="l">
+              <a:lnSpc>
+                <a:spcPct val="100000"/>
+              </a:lnSpc>
+              <a:buNone/>
+              <a:defRPr sz="1050" b="1">
+                <a:solidFill>
+                  <a:srgbClr val="5537D6"/>
+                </a:solidFill>
+                <a:latin typeface="Consolas"/>
+                <a:ea typeface="Consolas"/>
+                <a:cs typeface="Consolas"/>
+              </a:defRPr>
+            </a:pPr>
+            <a:r>
+              <a:rPr sz="1050" b="1">
+                <a:solidFill>
+                  <a:srgbClr val="5537D6"/>
+                </a:solidFill>
+                <a:latin typeface="Consolas"/>
+                <a:ea typeface="Consolas"/>
+                <a:cs typeface="Consolas"/>
+              </a:rPr>
+              <a:t>GRS-04</a:t>
+            </a:r>
+          </a:p>
+        </p:txBody>
+      </p:sp>
+      <p:sp>
+        <p:nvSpPr>
+          <p:cNvPr id="40" name="scenario-row-label-3">
+            <a:extLst xmlns:a="http://schemas.openxmlformats.org/drawingml/2006/main">
+              <a:ext uri="{FF2B5EF4-FFF2-40B4-BE49-F238E27FC236}">
+                <a16:creationId xmlns:a16="http://schemas.microsoft.com/office/drawing/2014/main" id="{0E2A0272-9F9A-4231-BC8B-6C909E6DAF5F}"/>
+              </a:ext>
+            </a:extLst>
+          </p:cNvPr>
+          <p:cNvSpPr>
+            <a:spLocks xmlns:a="http://schemas.openxmlformats.org/drawingml/2006/main" noGrp="1"/>
+          </p:cNvSpPr>
+          <p:nvPr/>
+        </p:nvSpPr>
+        <p:spPr>
+          <a:xfrm xmlns:a="http://schemas.openxmlformats.org/drawingml/2006/main">
+            <a:off x="8629650" y="3524250"/>
+            <a:ext cx="1771650" cy="266700"/>
+          </a:xfrm>
+          <a:prstGeom xmlns:a="http://schemas.openxmlformats.org/drawingml/2006/main" prst="rect">
+            <a:avLst/>
+          </a:prstGeom>
+          <a:noFill xmlns:a="http://schemas.openxmlformats.org/drawingml/2006/main"/>
+          <a:ln xmlns:a="http://schemas.openxmlformats.org/drawingml/2006/main" w="0">
+            <a:solidFill>
+              <a:srgbClr val="FFFCF5"/>
+            </a:solidFill>
+            <a:prstDash val="solid"/>
+          </a:ln>
+        </p:spPr>
+        <p:txBody>
+          <a:bodyPr xmlns:a="http://schemas.openxmlformats.org/drawingml/2006/main" lIns="28575" tIns="19050" rIns="28575" bIns="19050" anchor="ctr">
+            <a:normAutofit fontScale="100000"/>
+          </a:bodyPr>
+          <a:lstStyle xmlns:a="http://schemas.openxmlformats.org/drawingml/2006/main"/>
+          <a:p xmlns:a="http://schemas.openxmlformats.org/drawingml/2006/main">
+            <a:pPr algn="l">
+              <a:lnSpc>
+                <a:spcPct val="100000"/>
+              </a:lnSpc>
+              <a:buNone/>
+              <a:defRPr sz="1200" b="0">
+                <a:solidFill>
+                  <a:srgbClr val="111111"/>
+                </a:solidFill>
+                <a:latin typeface="Arial"/>
+                <a:ea typeface="Arial"/>
+                <a:cs typeface="Arial"/>
+              </a:defRPr>
+            </a:pPr>
+            <a:r>
+              <a:rPr sz="1200" b="0">
+                <a:solidFill>
+                  <a:srgbClr val="111111"/>
+                </a:solidFill>
+                <a:latin typeface="Arial"/>
+                <a:ea typeface="Arial"/>
+                <a:cs typeface="Arial"/>
+              </a:rPr>
+              <a:t>Reversibility</a:t>
+            </a:r>
+          </a:p>
+        </p:txBody>
+      </p:sp>
+      <p:sp>
+        <p:nvSpPr>
+          <p:cNvPr id="41" name="scenario-row-weight-3">
+            <a:extLst xmlns:a="http://schemas.openxmlformats.org/drawingml/2006/main">
+              <a:ext uri="{FF2B5EF4-FFF2-40B4-BE49-F238E27FC236}">
+                <a16:creationId xmlns:a16="http://schemas.microsoft.com/office/drawing/2014/main" id="{F17382D3-DFF8-4EE0-81DD-0B08466D218B}"/>
+              </a:ext>
+            </a:extLst>
+          </p:cNvPr>
+          <p:cNvSpPr>
+            <a:spLocks xmlns:a="http://schemas.openxmlformats.org/drawingml/2006/main" noGrp="1"/>
+          </p:cNvSpPr>
+          <p:nvPr/>
+        </p:nvSpPr>
+        <p:spPr>
+          <a:xfrm xmlns:a="http://schemas.openxmlformats.org/drawingml/2006/main">
+            <a:off x="10420350" y="3524250"/>
+            <a:ext cx="419100" cy="266700"/>
+          </a:xfrm>
+          <a:prstGeom xmlns:a="http://schemas.openxmlformats.org/drawingml/2006/main" prst="rect">
+            <a:avLst/>
+          </a:prstGeom>
+          <a:noFill xmlns:a="http://schemas.openxmlformats.org/drawingml/2006/main"/>
+          <a:ln xmlns:a="http://schemas.openxmlformats.org/drawingml/2006/main" w="0">
+            <a:solidFill>
+              <a:srgbClr val="FFFCF5"/>
+            </a:solidFill>
+            <a:prstDash val="solid"/>
+          </a:ln>
+        </p:spPr>
+        <p:txBody>
+          <a:bodyPr xmlns:a="http://schemas.openxmlformats.org/drawingml/2006/main" lIns="28575" tIns="19050" rIns="28575" bIns="19050" anchor="ctr">
+            <a:normAutofit fontScale="100000"/>
+          </a:bodyPr>
+          <a:lstStyle xmlns:a="http://schemas.openxmlformats.org/drawingml/2006/main"/>
+          <a:p xmlns:a="http://schemas.openxmlformats.org/drawingml/2006/main">
+            <a:pPr algn="r">
+              <a:lnSpc>
+                <a:spcPct val="100000"/>
+              </a:lnSpc>
+              <a:buNone/>
+              <a:defRPr sz="1200" b="1">
+                <a:solidFill>
+                  <a:srgbClr val="111111"/>
+                </a:solidFill>
+                <a:latin typeface="Arial"/>
+                <a:ea typeface="Arial"/>
+                <a:cs typeface="Arial"/>
+              </a:defRPr>
+            </a:pPr>
+            <a:r>
+              <a:rPr sz="1200" b="1">
+                <a:solidFill>
+                  <a:srgbClr val="111111"/>
+                </a:solidFill>
+                <a:latin typeface="Arial"/>
+                <a:ea typeface="Arial"/>
+                <a:cs typeface="Arial"/>
+              </a:rPr>
+              <a:t>6%</a:t>
+            </a:r>
+          </a:p>
+        </p:txBody>
+      </p:sp>
+      <p:sp>
+        <p:nvSpPr>
+          <p:cNvPr id="42" name="scenario-row-state-3">
+            <a:extLst xmlns:a="http://schemas.openxmlformats.org/drawingml/2006/main">
+              <a:ext uri="{FF2B5EF4-FFF2-40B4-BE49-F238E27FC236}">
+                <a16:creationId xmlns:a16="http://schemas.microsoft.com/office/drawing/2014/main" id="{15EFEA55-4782-4C0E-B84F-29C87BEF13D1}"/>
+              </a:ext>
+            </a:extLst>
+          </p:cNvPr>
+          <p:cNvSpPr>
+            <a:spLocks xmlns:a="http://schemas.openxmlformats.org/drawingml/2006/main" noGrp="1"/>
+          </p:cNvSpPr>
+          <p:nvPr/>
+        </p:nvSpPr>
+        <p:spPr>
+          <a:xfrm xmlns:a="http://schemas.openxmlformats.org/drawingml/2006/main">
+            <a:off x="10858500" y="3524250"/>
+            <a:ext cx="609600" cy="266700"/>
+          </a:xfrm>
+          <a:prstGeom xmlns:a="http://schemas.openxmlformats.org/drawingml/2006/main" prst="rect">
+            <a:avLst/>
+          </a:prstGeom>
+          <a:noFill xmlns:a="http://schemas.openxmlformats.org/drawingml/2006/main"/>
+          <a:ln xmlns:a="http://schemas.openxmlformats.org/drawingml/2006/main" w="0">
+            <a:solidFill>
+              <a:srgbClr val="FFFCF5"/>
+            </a:solidFill>
+            <a:prstDash val="solid"/>
+          </a:ln>
+        </p:spPr>
+        <p:txBody>
+          <a:bodyPr xmlns:a="http://schemas.openxmlformats.org/drawingml/2006/main" lIns="0" tIns="0" rIns="0" bIns="0" anchor="ctr">
+            <a:normAutofit fontScale="100000"/>
+          </a:bodyPr>
+          <a:lstStyle xmlns:a="http://schemas.openxmlformats.org/drawingml/2006/main"/>
+          <a:p xmlns:a="http://schemas.openxmlformats.org/drawingml/2006/main">
+            <a:pPr algn="r">
+              <a:lnSpc>
+                <a:spcPct val="100000"/>
+              </a:lnSpc>
+              <a:buNone/>
+              <a:defRPr sz="675" b="1">
+                <a:solidFill>
+                  <a:srgbClr val="686A66"/>
+                </a:solidFill>
+                <a:latin typeface="Consolas"/>
+                <a:ea typeface="Consolas"/>
+                <a:cs typeface="Consolas"/>
+              </a:defRPr>
+            </a:pPr>
+            <a:r>
+              <a:rPr sz="675" b="1">
+                <a:solidFill>
+                  <a:srgbClr val="686A66"/>
+                </a:solidFill>
+                <a:latin typeface="Consolas"/>
+                <a:ea typeface="Consolas"/>
+                <a:cs typeface="Consolas"/>
+              </a:rPr>
+              <a:t>UNKNOWN</a:t>
+            </a:r>
+          </a:p>
+        </p:txBody>
+      </p:sp>
+      <p:sp>
+        <p:nvSpPr>
+          <p:cNvPr id="43" name="scenario-row-code-4">
+            <a:extLst xmlns:a="http://schemas.openxmlformats.org/drawingml/2006/main">
+              <a:ext uri="{FF2B5EF4-FFF2-40B4-BE49-F238E27FC236}">
+                <a16:creationId xmlns:a16="http://schemas.microsoft.com/office/drawing/2014/main" id="{7736A9DD-5C71-4E42-9374-245D7690575D}"/>
+              </a:ext>
+            </a:extLst>
+          </p:cNvPr>
+          <p:cNvSpPr>
+            <a:spLocks xmlns:a="http://schemas.openxmlformats.org/drawingml/2006/main" noGrp="1"/>
+          </p:cNvSpPr>
+          <p:nvPr/>
+        </p:nvSpPr>
+        <p:spPr>
+          <a:xfrm xmlns:a="http://schemas.openxmlformats.org/drawingml/2006/main">
+            <a:off x="7962900" y="3829050"/>
+            <a:ext cx="647700" cy="266700"/>
+          </a:xfrm>
+          <a:prstGeom xmlns:a="http://schemas.openxmlformats.org/drawingml/2006/main" prst="rect">
+            <a:avLst/>
+          </a:prstGeom>
+          <a:noFill xmlns:a="http://schemas.openxmlformats.org/drawingml/2006/main"/>
+          <a:ln xmlns:a="http://schemas.openxmlformats.org/drawingml/2006/main" w="0">
+            <a:solidFill>
+              <a:srgbClr val="FFFCF5"/>
+            </a:solidFill>
+            <a:prstDash val="solid"/>
+          </a:ln>
+        </p:spPr>
+        <p:txBody>
+          <a:bodyPr xmlns:a="http://schemas.openxmlformats.org/drawingml/2006/main" lIns="28575" tIns="19050" rIns="28575" bIns="19050" anchor="ctr">
+            <a:normAutofit fontScale="100000"/>
+          </a:bodyPr>
+          <a:lstStyle xmlns:a="http://schemas.openxmlformats.org/drawingml/2006/main"/>
+          <a:p xmlns:a="http://schemas.openxmlformats.org/drawingml/2006/main">
+            <a:pPr algn="l">
+              <a:lnSpc>
+                <a:spcPct val="100000"/>
+              </a:lnSpc>
+              <a:buNone/>
+              <a:defRPr sz="1050" b="1">
+                <a:solidFill>
+                  <a:srgbClr val="5537D6"/>
+                </a:solidFill>
+                <a:latin typeface="Consolas"/>
+                <a:ea typeface="Consolas"/>
+                <a:cs typeface="Consolas"/>
+              </a:defRPr>
+            </a:pPr>
+            <a:r>
+              <a:rPr sz="1050" b="1">
+                <a:solidFill>
+                  <a:srgbClr val="5537D6"/>
+                </a:solidFill>
+                <a:latin typeface="Consolas"/>
+                <a:ea typeface="Consolas"/>
+                <a:cs typeface="Consolas"/>
+              </a:rPr>
+              <a:t>GRS-05</a:t>
+            </a:r>
+          </a:p>
+        </p:txBody>
+      </p:sp>
+      <p:sp>
+        <p:nvSpPr>
+          <p:cNvPr id="44" name="scenario-row-label-4">
+            <a:extLst xmlns:a="http://schemas.openxmlformats.org/drawingml/2006/main">
+              <a:ext uri="{FF2B5EF4-FFF2-40B4-BE49-F238E27FC236}">
+                <a16:creationId xmlns:a16="http://schemas.microsoft.com/office/drawing/2014/main" id="{4803509F-5C4C-45B5-8966-470C78E950D4}"/>
+              </a:ext>
+            </a:extLst>
+          </p:cNvPr>
+          <p:cNvSpPr>
+            <a:spLocks xmlns:a="http://schemas.openxmlformats.org/drawingml/2006/main" noGrp="1"/>
+          </p:cNvSpPr>
+          <p:nvPr/>
+        </p:nvSpPr>
+        <p:spPr>
+          <a:xfrm xmlns:a="http://schemas.openxmlformats.org/drawingml/2006/main">
+            <a:off x="8629650" y="3829050"/>
+            <a:ext cx="1771650" cy="266700"/>
+          </a:xfrm>
+          <a:prstGeom xmlns:a="http://schemas.openxmlformats.org/drawingml/2006/main" prst="rect">
+            <a:avLst/>
+          </a:prstGeom>
+          <a:noFill xmlns:a="http://schemas.openxmlformats.org/drawingml/2006/main"/>
+          <a:ln xmlns:a="http://schemas.openxmlformats.org/drawingml/2006/main" w="0">
+            <a:solidFill>
+              <a:srgbClr val="FFFCF5"/>
+            </a:solidFill>
+            <a:prstDash val="solid"/>
+          </a:ln>
+        </p:spPr>
+        <p:txBody>
+          <a:bodyPr xmlns:a="http://schemas.openxmlformats.org/drawingml/2006/main" lIns="28575" tIns="19050" rIns="28575" bIns="19050" anchor="ctr">
+            <a:normAutofit fontScale="100000"/>
+          </a:bodyPr>
+          <a:lstStyle xmlns:a="http://schemas.openxmlformats.org/drawingml/2006/main"/>
+          <a:p xmlns:a="http://schemas.openxmlformats.org/drawingml/2006/main">
+            <a:pPr algn="l">
+              <a:lnSpc>
+                <a:spcPct val="100000"/>
+              </a:lnSpc>
+              <a:buNone/>
+              <a:defRPr sz="1200" b="0">
+                <a:solidFill>
+                  <a:srgbClr val="111111"/>
+                </a:solidFill>
+                <a:latin typeface="Arial"/>
+                <a:ea typeface="Arial"/>
+                <a:cs typeface="Arial"/>
+              </a:defRPr>
+            </a:pPr>
+            <a:r>
+              <a:rPr sz="1200" b="0">
+                <a:solidFill>
+                  <a:srgbClr val="111111"/>
+                </a:solidFill>
+                <a:latin typeface="Arial"/>
+                <a:ea typeface="Arial"/>
+                <a:cs typeface="Arial"/>
+              </a:rPr>
+              <a:t>Fully allocated TCO</a:t>
+            </a:r>
+          </a:p>
+        </p:txBody>
+      </p:sp>
+      <p:sp>
+        <p:nvSpPr>
+          <p:cNvPr id="45" name="scenario-row-weight-4">
+            <a:extLst xmlns:a="http://schemas.openxmlformats.org/drawingml/2006/main">
+              <a:ext uri="{FF2B5EF4-FFF2-40B4-BE49-F238E27FC236}">
+                <a16:creationId xmlns:a16="http://schemas.microsoft.com/office/drawing/2014/main" id="{066AD66D-E803-44EE-9602-58B024F4BC9F}"/>
+              </a:ext>
+            </a:extLst>
+          </p:cNvPr>
+          <p:cNvSpPr>
+            <a:spLocks xmlns:a="http://schemas.openxmlformats.org/drawingml/2006/main" noGrp="1"/>
+          </p:cNvSpPr>
+          <p:nvPr/>
+        </p:nvSpPr>
+        <p:spPr>
+          <a:xfrm xmlns:a="http://schemas.openxmlformats.org/drawingml/2006/main">
+            <a:off x="10420350" y="3829050"/>
+            <a:ext cx="419100" cy="266700"/>
+          </a:xfrm>
+          <a:prstGeom xmlns:a="http://schemas.openxmlformats.org/drawingml/2006/main" prst="rect">
+            <a:avLst/>
+          </a:prstGeom>
+          <a:noFill xmlns:a="http://schemas.openxmlformats.org/drawingml/2006/main"/>
+          <a:ln xmlns:a="http://schemas.openxmlformats.org/drawingml/2006/main" w="0">
+            <a:solidFill>
+              <a:srgbClr val="FFFCF5"/>
+            </a:solidFill>
+            <a:prstDash val="solid"/>
+          </a:ln>
+        </p:spPr>
+        <p:txBody>
+          <a:bodyPr xmlns:a="http://schemas.openxmlformats.org/drawingml/2006/main" lIns="28575" tIns="19050" rIns="28575" bIns="19050" anchor="ctr">
+            <a:normAutofit fontScale="100000"/>
+          </a:bodyPr>
+          <a:lstStyle xmlns:a="http://schemas.openxmlformats.org/drawingml/2006/main"/>
+          <a:p xmlns:a="http://schemas.openxmlformats.org/drawingml/2006/main">
+            <a:pPr algn="r">
+              <a:lnSpc>
+                <a:spcPct val="100000"/>
+              </a:lnSpc>
+              <a:buNone/>
+              <a:defRPr sz="1200" b="1">
+                <a:solidFill>
+                  <a:srgbClr val="111111"/>
+                </a:solidFill>
+                <a:latin typeface="Arial"/>
+                <a:ea typeface="Arial"/>
+                <a:cs typeface="Arial"/>
+              </a:defRPr>
+            </a:pPr>
+            <a:r>
+              <a:rPr sz="1200" b="1">
+                <a:solidFill>
+                  <a:srgbClr val="111111"/>
+                </a:solidFill>
+                <a:latin typeface="Arial"/>
+                <a:ea typeface="Arial"/>
+                <a:cs typeface="Arial"/>
+              </a:rPr>
+              <a:t>6%</a:t>
+            </a:r>
+          </a:p>
+        </p:txBody>
+      </p:sp>
+      <p:sp>
+        <p:nvSpPr>
+          <p:cNvPr id="46" name="scenario-row-state-4">
+            <a:extLst xmlns:a="http://schemas.openxmlformats.org/drawingml/2006/main">
+              <a:ext uri="{FF2B5EF4-FFF2-40B4-BE49-F238E27FC236}">
+                <a16:creationId xmlns:a16="http://schemas.microsoft.com/office/drawing/2014/main" id="{0208D6F5-D235-4AB9-BFEC-3646E5FE0E18}"/>
+              </a:ext>
+            </a:extLst>
+          </p:cNvPr>
+          <p:cNvSpPr>
+            <a:spLocks xmlns:a="http://schemas.openxmlformats.org/drawingml/2006/main" noGrp="1"/>
+          </p:cNvSpPr>
+          <p:nvPr/>
+        </p:nvSpPr>
+        <p:spPr>
+          <a:xfrm xmlns:a="http://schemas.openxmlformats.org/drawingml/2006/main">
+            <a:off x="10858500" y="3829050"/>
+            <a:ext cx="609600" cy="266700"/>
+          </a:xfrm>
+          <a:prstGeom xmlns:a="http://schemas.openxmlformats.org/drawingml/2006/main" prst="rect">
+            <a:avLst/>
+          </a:prstGeom>
+          <a:noFill xmlns:a="http://schemas.openxmlformats.org/drawingml/2006/main"/>
+          <a:ln xmlns:a="http://schemas.openxmlformats.org/drawingml/2006/main" w="0">
+            <a:solidFill>
+              <a:srgbClr val="FFFCF5"/>
+            </a:solidFill>
+            <a:prstDash val="solid"/>
+          </a:ln>
+        </p:spPr>
+        <p:txBody>
+          <a:bodyPr xmlns:a="http://schemas.openxmlformats.org/drawingml/2006/main" lIns="0" tIns="0" rIns="0" bIns="0" anchor="ctr">
+            <a:normAutofit fontScale="100000"/>
+          </a:bodyPr>
+          <a:lstStyle xmlns:a="http://schemas.openxmlformats.org/drawingml/2006/main"/>
+          <a:p xmlns:a="http://schemas.openxmlformats.org/drawingml/2006/main">
+            <a:pPr algn="r">
+              <a:lnSpc>
+                <a:spcPct val="100000"/>
+              </a:lnSpc>
+              <a:buNone/>
+              <a:defRPr sz="675" b="1">
+                <a:solidFill>
+                  <a:srgbClr val="686A66"/>
+                </a:solidFill>
+                <a:latin typeface="Consolas"/>
+                <a:ea typeface="Consolas"/>
+                <a:cs typeface="Consolas"/>
+              </a:defRPr>
+            </a:pPr>
+            <a:r>
+              <a:rPr sz="675" b="1">
+                <a:solidFill>
+                  <a:srgbClr val="686A66"/>
+                </a:solidFill>
+                <a:latin typeface="Consolas"/>
+                <a:ea typeface="Consolas"/>
+                <a:cs typeface="Consolas"/>
+              </a:rPr>
+              <a:t>UNKNOWN</a:t>
+            </a:r>
+          </a:p>
+        </p:txBody>
+      </p:sp>
+      <p:sp>
+        <p:nvSpPr>
+          <p:cNvPr id="47" name="scenario-row-fill-5">
+            <a:extLst xmlns:a="http://schemas.openxmlformats.org/drawingml/2006/main">
+              <a:ext uri="{FF2B5EF4-FFF2-40B4-BE49-F238E27FC236}">
+                <a16:creationId xmlns:a16="http://schemas.microsoft.com/office/drawing/2014/main" id="{74234030-2D1D-457F-AEF6-DA67D0D50C85}"/>
+              </a:ext>
+            </a:extLst>
+          </p:cNvPr>
+          <p:cNvSpPr>
+            <a:spLocks xmlns:a="http://schemas.openxmlformats.org/drawingml/2006/main" noGrp="1"/>
+          </p:cNvSpPr>
+          <p:nvPr/>
+        </p:nvSpPr>
+        <p:spPr>
+          <a:xfrm xmlns:a="http://schemas.openxmlformats.org/drawingml/2006/main">
+            <a:off x="7858125" y="4114800"/>
+            <a:ext cx="3714750" cy="304800"/>
+          </a:xfrm>
+          <a:prstGeom xmlns:a="http://schemas.openxmlformats.org/drawingml/2006/main" prst="rect">
+            <a:avLst/>
+          </a:prstGeom>
+          <a:solidFill xmlns:a="http://schemas.openxmlformats.org/drawingml/2006/main">
+            <a:srgbClr val="F3F0E8"/>
+          </a:solidFill>
+          <a:ln xmlns:a="http://schemas.openxmlformats.org/drawingml/2006/main" w="0">
+            <a:solidFill>
+              <a:srgbClr val="F3F0E8"/>
+            </a:solidFill>
+            <a:prstDash val="solid"/>
+          </a:ln>
+        </p:spPr>
+      </p:sp>
+      <p:sp>
+        <p:nvSpPr>
+          <p:cNvPr id="48" name="scenario-row-code-5">
+            <a:extLst xmlns:a="http://schemas.openxmlformats.org/drawingml/2006/main">
+              <a:ext uri="{FF2B5EF4-FFF2-40B4-BE49-F238E27FC236}">
+                <a16:creationId xmlns:a16="http://schemas.microsoft.com/office/drawing/2014/main" id="{E1432C09-6AE2-43A0-8B9C-28FA84C89D58}"/>
+              </a:ext>
+            </a:extLst>
+          </p:cNvPr>
+          <p:cNvSpPr>
+            <a:spLocks xmlns:a="http://schemas.openxmlformats.org/drawingml/2006/main" noGrp="1"/>
+          </p:cNvSpPr>
+          <p:nvPr/>
+        </p:nvSpPr>
+        <p:spPr>
+          <a:xfrm xmlns:a="http://schemas.openxmlformats.org/drawingml/2006/main">
+            <a:off x="7962900" y="4133850"/>
+            <a:ext cx="647700" cy="266700"/>
+          </a:xfrm>
+          <a:prstGeom xmlns:a="http://schemas.openxmlformats.org/drawingml/2006/main" prst="rect">
+            <a:avLst/>
+          </a:prstGeom>
+          <a:noFill xmlns:a="http://schemas.openxmlformats.org/drawingml/2006/main"/>
+          <a:ln xmlns:a="http://schemas.openxmlformats.org/drawingml/2006/main" w="0">
+            <a:solidFill>
+              <a:srgbClr val="FFFCF5"/>
+            </a:solidFill>
+            <a:prstDash val="solid"/>
+          </a:ln>
+        </p:spPr>
+        <p:txBody>
+          <a:bodyPr xmlns:a="http://schemas.openxmlformats.org/drawingml/2006/main" lIns="28575" tIns="19050" rIns="28575" bIns="19050" anchor="ctr">
+            <a:normAutofit fontScale="100000"/>
+          </a:bodyPr>
+          <a:lstStyle xmlns:a="http://schemas.openxmlformats.org/drawingml/2006/main"/>
+          <a:p xmlns:a="http://schemas.openxmlformats.org/drawingml/2006/main">
+            <a:pPr algn="l">
+              <a:lnSpc>
+                <a:spcPct val="100000"/>
+              </a:lnSpc>
+              <a:buNone/>
+              <a:defRPr sz="1050" b="1">
+                <a:solidFill>
+                  <a:srgbClr val="5537D6"/>
+                </a:solidFill>
+                <a:latin typeface="Consolas"/>
+                <a:ea typeface="Consolas"/>
+                <a:cs typeface="Consolas"/>
+              </a:defRPr>
+            </a:pPr>
+            <a:r>
+              <a:rPr sz="1050" b="1">
+                <a:solidFill>
+                  <a:srgbClr val="5537D6"/>
+                </a:solidFill>
+                <a:latin typeface="Consolas"/>
+                <a:ea typeface="Consolas"/>
+                <a:cs typeface="Consolas"/>
+              </a:rPr>
+              <a:t>GRS-06</a:t>
+            </a:r>
+          </a:p>
+        </p:txBody>
+      </p:sp>
+      <p:sp>
+        <p:nvSpPr>
+          <p:cNvPr id="49" name="scenario-row-label-5">
+            <a:extLst xmlns:a="http://schemas.openxmlformats.org/drawingml/2006/main">
+              <a:ext uri="{FF2B5EF4-FFF2-40B4-BE49-F238E27FC236}">
+                <a16:creationId xmlns:a16="http://schemas.microsoft.com/office/drawing/2014/main" id="{9D640B39-167F-4759-B284-5F9FEF3B4520}"/>
+              </a:ext>
+            </a:extLst>
+          </p:cNvPr>
+          <p:cNvSpPr>
+            <a:spLocks xmlns:a="http://schemas.openxmlformats.org/drawingml/2006/main" noGrp="1"/>
+          </p:cNvSpPr>
+          <p:nvPr/>
+        </p:nvSpPr>
+        <p:spPr>
+          <a:xfrm xmlns:a="http://schemas.openxmlformats.org/drawingml/2006/main">
+            <a:off x="8629650" y="4133850"/>
+            <a:ext cx="1771650" cy="266700"/>
+          </a:xfrm>
+          <a:prstGeom xmlns:a="http://schemas.openxmlformats.org/drawingml/2006/main" prst="rect">
+            <a:avLst/>
+          </a:prstGeom>
+          <a:noFill xmlns:a="http://schemas.openxmlformats.org/drawingml/2006/main"/>
+          <a:ln xmlns:a="http://schemas.openxmlformats.org/drawingml/2006/main" w="0">
+            <a:solidFill>
+              <a:srgbClr val="FFFCF5"/>
+            </a:solidFill>
+            <a:prstDash val="solid"/>
+          </a:ln>
+        </p:spPr>
+        <p:txBody>
+          <a:bodyPr xmlns:a="http://schemas.openxmlformats.org/drawingml/2006/main" lIns="28575" tIns="19050" rIns="28575" bIns="19050" anchor="ctr">
+            <a:normAutofit fontScale="100000"/>
+          </a:bodyPr>
+          <a:lstStyle xmlns:a="http://schemas.openxmlformats.org/drawingml/2006/main"/>
+          <a:p xmlns:a="http://schemas.openxmlformats.org/drawingml/2006/main">
+            <a:pPr algn="l">
+              <a:lnSpc>
+                <a:spcPct val="100000"/>
+              </a:lnSpc>
+              <a:buNone/>
+              <a:defRPr sz="1200" b="0">
+                <a:solidFill>
+                  <a:srgbClr val="111111"/>
+                </a:solidFill>
+                <a:latin typeface="Arial"/>
+                <a:ea typeface="Arial"/>
+                <a:cs typeface="Arial"/>
+              </a:defRPr>
+            </a:pPr>
+            <a:r>
+              <a:rPr sz="1200" b="0">
+                <a:solidFill>
+                  <a:srgbClr val="111111"/>
+                </a:solidFill>
+                <a:latin typeface="Arial"/>
+                <a:ea typeface="Arial"/>
+                <a:cs typeface="Arial"/>
+              </a:rPr>
+              <a:t>CP operating duty</a:t>
+            </a:r>
+          </a:p>
+        </p:txBody>
+      </p:sp>
+      <p:sp>
+        <p:nvSpPr>
+          <p:cNvPr id="50" name="scenario-row-weight-5">
+            <a:extLst xmlns:a="http://schemas.openxmlformats.org/drawingml/2006/main">
+              <a:ext uri="{FF2B5EF4-FFF2-40B4-BE49-F238E27FC236}">
+                <a16:creationId xmlns:a16="http://schemas.microsoft.com/office/drawing/2014/main" id="{E40A3421-2F84-4D01-832C-B437F4C6CE5C}"/>
+              </a:ext>
+            </a:extLst>
+          </p:cNvPr>
+          <p:cNvSpPr>
+            <a:spLocks xmlns:a="http://schemas.openxmlformats.org/drawingml/2006/main" noGrp="1"/>
+          </p:cNvSpPr>
+          <p:nvPr/>
+        </p:nvSpPr>
+        <p:spPr>
+          <a:xfrm xmlns:a="http://schemas.openxmlformats.org/drawingml/2006/main">
+            <a:off x="10420350" y="4133850"/>
+            <a:ext cx="419100" cy="266700"/>
+          </a:xfrm>
+          <a:prstGeom xmlns:a="http://schemas.openxmlformats.org/drawingml/2006/main" prst="rect">
+            <a:avLst/>
+          </a:prstGeom>
+          <a:noFill xmlns:a="http://schemas.openxmlformats.org/drawingml/2006/main"/>
+          <a:ln xmlns:a="http://schemas.openxmlformats.org/drawingml/2006/main" w="0">
+            <a:solidFill>
+              <a:srgbClr val="FFFCF5"/>
+            </a:solidFill>
+            <a:prstDash val="solid"/>
+          </a:ln>
+        </p:spPr>
+        <p:txBody>
+          <a:bodyPr xmlns:a="http://schemas.openxmlformats.org/drawingml/2006/main" lIns="28575" tIns="19050" rIns="28575" bIns="19050" anchor="ctr">
+            <a:normAutofit fontScale="100000"/>
+          </a:bodyPr>
+          <a:lstStyle xmlns:a="http://schemas.openxmlformats.org/drawingml/2006/main"/>
+          <a:p xmlns:a="http://schemas.openxmlformats.org/drawingml/2006/main">
+            <a:pPr algn="r">
+              <a:lnSpc>
+                <a:spcPct val="100000"/>
+              </a:lnSpc>
+              <a:buNone/>
+              <a:defRPr sz="1200" b="1">
+                <a:solidFill>
+                  <a:srgbClr val="111111"/>
+                </a:solidFill>
+                <a:latin typeface="Arial"/>
+                <a:ea typeface="Arial"/>
+                <a:cs typeface="Arial"/>
+              </a:defRPr>
+            </a:pPr>
+            <a:r>
+              <a:rPr sz="1200" b="1">
+                <a:solidFill>
+                  <a:srgbClr val="111111"/>
+                </a:solidFill>
+                <a:latin typeface="Arial"/>
+                <a:ea typeface="Arial"/>
+                <a:cs typeface="Arial"/>
+              </a:rPr>
+              <a:t>4%</a:t>
+            </a:r>
+          </a:p>
+        </p:txBody>
+      </p:sp>
+      <p:sp>
+        <p:nvSpPr>
+          <p:cNvPr id="51" name="scenario-row-state-5">
+            <a:extLst xmlns:a="http://schemas.openxmlformats.org/drawingml/2006/main">
+              <a:ext uri="{FF2B5EF4-FFF2-40B4-BE49-F238E27FC236}">
+                <a16:creationId xmlns:a16="http://schemas.microsoft.com/office/drawing/2014/main" id="{1E20BC4F-0191-4F14-AB54-35EB09D035FD}"/>
+              </a:ext>
+            </a:extLst>
+          </p:cNvPr>
+          <p:cNvSpPr>
+            <a:spLocks xmlns:a="http://schemas.openxmlformats.org/drawingml/2006/main" noGrp="1"/>
+          </p:cNvSpPr>
+          <p:nvPr/>
+        </p:nvSpPr>
+        <p:spPr>
+          <a:xfrm xmlns:a="http://schemas.openxmlformats.org/drawingml/2006/main">
+            <a:off x="10858500" y="4133850"/>
+            <a:ext cx="609600" cy="266700"/>
+          </a:xfrm>
+          <a:prstGeom xmlns:a="http://schemas.openxmlformats.org/drawingml/2006/main" prst="rect">
+            <a:avLst/>
+          </a:prstGeom>
+          <a:noFill xmlns:a="http://schemas.openxmlformats.org/drawingml/2006/main"/>
+          <a:ln xmlns:a="http://schemas.openxmlformats.org/drawingml/2006/main" w="0">
+            <a:solidFill>
+              <a:srgbClr val="FFFCF5"/>
+            </a:solidFill>
+            <a:prstDash val="solid"/>
+          </a:ln>
+        </p:spPr>
+        <p:txBody>
+          <a:bodyPr xmlns:a="http://schemas.openxmlformats.org/drawingml/2006/main" lIns="0" tIns="0" rIns="0" bIns="0" anchor="ctr">
+            <a:normAutofit fontScale="100000"/>
+          </a:bodyPr>
+          <a:lstStyle xmlns:a="http://schemas.openxmlformats.org/drawingml/2006/main"/>
+          <a:p xmlns:a="http://schemas.openxmlformats.org/drawingml/2006/main">
+            <a:pPr algn="r">
+              <a:lnSpc>
+                <a:spcPct val="100000"/>
+              </a:lnSpc>
+              <a:buNone/>
+              <a:defRPr sz="675" b="1">
+                <a:solidFill>
+                  <a:srgbClr val="686A66"/>
+                </a:solidFill>
+                <a:latin typeface="Consolas"/>
+                <a:ea typeface="Consolas"/>
+                <a:cs typeface="Consolas"/>
+              </a:defRPr>
+            </a:pPr>
+            <a:r>
+              <a:rPr sz="675" b="1">
+                <a:solidFill>
+                  <a:srgbClr val="686A66"/>
+                </a:solidFill>
+                <a:latin typeface="Consolas"/>
+                <a:ea typeface="Consolas"/>
+                <a:cs typeface="Consolas"/>
+              </a:rPr>
+              <a:t>UNKNOWN</a:t>
+            </a:r>
+          </a:p>
+        </p:txBody>
+      </p:sp>
+      <p:sp>
+        <p:nvSpPr>
+          <p:cNvPr id="52" name="scenario-envelope-label">
+            <a:extLst xmlns:a="http://schemas.openxmlformats.org/drawingml/2006/main">
+              <a:ext uri="{FF2B5EF4-FFF2-40B4-BE49-F238E27FC236}">
+                <a16:creationId xmlns:a16="http://schemas.microsoft.com/office/drawing/2014/main" id="{8ADFE0DC-3DA0-4821-8280-D2CC6E93CBA7}"/>
+              </a:ext>
+            </a:extLst>
+          </p:cNvPr>
+          <p:cNvSpPr>
+            <a:spLocks xmlns:a="http://schemas.openxmlformats.org/drawingml/2006/main" noGrp="1"/>
+          </p:cNvSpPr>
+          <p:nvPr/>
+        </p:nvSpPr>
+        <p:spPr>
+          <a:xfrm xmlns:a="http://schemas.openxmlformats.org/drawingml/2006/main">
+            <a:off x="7981950" y="4495800"/>
+            <a:ext cx="3467100" cy="209550"/>
+          </a:xfrm>
+          <a:prstGeom xmlns:a="http://schemas.openxmlformats.org/drawingml/2006/main" prst="rect">
+            <a:avLst/>
+          </a:prstGeom>
+          <a:noFill xmlns:a="http://schemas.openxmlformats.org/drawingml/2006/main"/>
+          <a:ln xmlns:a="http://schemas.openxmlformats.org/drawingml/2006/main" w="0">
+            <a:solidFill>
+              <a:srgbClr val="FFFCF5"/>
+            </a:solidFill>
+            <a:prstDash val="solid"/>
+          </a:ln>
+        </p:spPr>
+        <p:txBody>
+          <a:bodyPr xmlns:a="http://schemas.openxmlformats.org/drawingml/2006/main" lIns="28575" tIns="19050" rIns="28575" bIns="19050" anchor="ctr">
+            <a:normAutofit fontScale="100000"/>
+          </a:bodyPr>
+          <a:lstStyle xmlns:a="http://schemas.openxmlformats.org/drawingml/2006/main"/>
+          <a:p xmlns:a="http://schemas.openxmlformats.org/drawingml/2006/main">
+            <a:pPr algn="l">
+              <a:lnSpc>
+                <a:spcPct val="100000"/>
+              </a:lnSpc>
+              <a:buNone/>
+              <a:defRPr sz="1050" b="1">
+                <a:solidFill>
+                  <a:srgbClr val="5537D6"/>
+                </a:solidFill>
+                <a:latin typeface="Consolas"/>
+                <a:ea typeface="Consolas"/>
+                <a:cs typeface="Consolas"/>
+              </a:defRPr>
+            </a:pPr>
+            <a:r>
+              <a:rPr sz="1050" b="1">
+                <a:solidFill>
+                  <a:srgbClr val="5537D6"/>
+                </a:solidFill>
+                <a:latin typeface="Consolas"/>
+                <a:ea typeface="Consolas"/>
+                <a:cs typeface="Consolas"/>
+              </a:rPr>
+              <a:t>MECHANICAL ENVELOPES</a:t>
+            </a:r>
+          </a:p>
+        </p:txBody>
+      </p:sp>
+      <p:sp>
+        <p:nvSpPr>
+          <p:cNvPr id="53" name="scenario-envelope-values">
+            <a:extLst xmlns:a="http://schemas.openxmlformats.org/drawingml/2006/main">
+              <a:ext uri="{FF2B5EF4-FFF2-40B4-BE49-F238E27FC236}">
+                <a16:creationId xmlns:a16="http://schemas.microsoft.com/office/drawing/2014/main" id="{4F762FFB-5812-4337-B844-7923F55B7703}"/>
+              </a:ext>
+            </a:extLst>
+          </p:cNvPr>
+          <p:cNvSpPr>
+            <a:spLocks xmlns:a="http://schemas.openxmlformats.org/drawingml/2006/main" noGrp="1"/>
+          </p:cNvSpPr>
+          <p:nvPr/>
+        </p:nvSpPr>
+        <p:spPr>
+          <a:xfrm xmlns:a="http://schemas.openxmlformats.org/drawingml/2006/main">
+            <a:off x="7981950" y="4724400"/>
+            <a:ext cx="3467100" cy="704850"/>
+          </a:xfrm>
+          <a:prstGeom xmlns:a="http://schemas.openxmlformats.org/drawingml/2006/main" prst="rect">
+            <a:avLst/>
+          </a:prstGeom>
+          <a:noFill xmlns:a="http://schemas.openxmlformats.org/drawingml/2006/main"/>
+          <a:ln xmlns:a="http://schemas.openxmlformats.org/drawingml/2006/main" w="0">
+            <a:solidFill>
+              <a:srgbClr val="FFFCF5"/>
+            </a:solidFill>
+            <a:prstDash val="solid"/>
+          </a:ln>
+        </p:spPr>
+        <p:txBody>
+          <a:bodyPr xmlns:a="http://schemas.openxmlformats.org/drawingml/2006/main" lIns="28575" tIns="19050" rIns="28575" bIns="19050" anchor="t">
+            <a:normAutofit fontScale="100000"/>
+          </a:bodyPr>
+          <a:lstStyle xmlns:a="http://schemas.openxmlformats.org/drawingml/2006/main"/>
+          <a:p xmlns:a="http://schemas.openxmlformats.org/drawingml/2006/main">
+            <a:pPr algn="l">
+              <a:lnSpc>
+                <a:spcPct val="100000"/>
+              </a:lnSpc>
+              <a:buNone/>
+              <a:defRPr sz="1425" b="1">
+                <a:solidFill>
+                  <a:srgbClr val="111111"/>
+                </a:solidFill>
+                <a:latin typeface="Consolas"/>
+                <a:ea typeface="Consolas"/>
+                <a:cs typeface="Consolas"/>
+              </a:defRPr>
+            </a:pPr>
+            <a:r>
+              <a:rPr sz="1425" b="1">
+                <a:solidFill>
+                  <a:srgbClr val="111111"/>
+                </a:solidFill>
+                <a:latin typeface="Consolas"/>
+                <a:ea typeface="Consolas"/>
+                <a:cs typeface="Consolas"/>
+              </a:rPr>
+              <a:t>Kong       55.8–95.8</a:t>
+            </a:r>
+          </a:p>
+          <a:p xmlns:a="http://schemas.openxmlformats.org/drawingml/2006/main">
+            <a:pPr algn="l">
+              <a:lnSpc>
+                <a:spcPct val="100000"/>
+              </a:lnSpc>
+              <a:buNone/>
+              <a:defRPr sz="1425" b="1">
+                <a:solidFill>
+                  <a:srgbClr val="111111"/>
+                </a:solidFill>
+                <a:latin typeface="Consolas"/>
+                <a:ea typeface="Consolas"/>
+                <a:cs typeface="Consolas"/>
+              </a:defRPr>
+            </a:pPr>
+            <a:r>
+              <a:rPr sz="1425" b="1">
+                <a:solidFill>
+                  <a:srgbClr val="111111"/>
+                </a:solidFill>
+                <a:latin typeface="Consolas"/>
+                <a:ea typeface="Consolas"/>
+                <a:cs typeface="Consolas"/>
+              </a:rPr>
+              <a:t>Apigee     51.3–91.3</a:t>
+            </a:r>
+          </a:p>
+          <a:p xmlns:a="http://schemas.openxmlformats.org/drawingml/2006/main">
+            <a:pPr algn="l">
+              <a:lnSpc>
+                <a:spcPct val="100000"/>
+              </a:lnSpc>
+              <a:buNone/>
+              <a:defRPr sz="1425" b="1">
+                <a:solidFill>
+                  <a:srgbClr val="111111"/>
+                </a:solidFill>
+                <a:latin typeface="Consolas"/>
+                <a:ea typeface="Consolas"/>
+                <a:cs typeface="Consolas"/>
+              </a:defRPr>
+            </a:pPr>
+            <a:r>
+              <a:rPr sz="1425" b="1">
+                <a:solidFill>
+                  <a:srgbClr val="111111"/>
+                </a:solidFill>
+                <a:latin typeface="Consolas"/>
+                <a:ea typeface="Consolas"/>
+                <a:cs typeface="Consolas"/>
+              </a:rPr>
+              <a:t>MuleSoft   46.2–86.2</a:t>
+            </a:r>
+          </a:p>
+        </p:txBody>
+      </p:sp>
+      <p:sp>
+        <p:nvSpPr>
+          <p:cNvPr id="54" name="scenario-sensitivity">
+            <a:extLst xmlns:a="http://schemas.openxmlformats.org/drawingml/2006/main">
+              <a:ext uri="{FF2B5EF4-FFF2-40B4-BE49-F238E27FC236}">
+                <a16:creationId xmlns:a16="http://schemas.microsoft.com/office/drawing/2014/main" id="{81DE062C-1E49-4221-8945-ED4152556423}"/>
+              </a:ext>
+            </a:extLst>
+          </p:cNvPr>
+          <p:cNvSpPr>
+            <a:spLocks xmlns:a="http://schemas.openxmlformats.org/drawingml/2006/main" noGrp="1"/>
+          </p:cNvSpPr>
+          <p:nvPr/>
+        </p:nvSpPr>
+        <p:spPr>
+          <a:xfrm xmlns:a="http://schemas.openxmlformats.org/drawingml/2006/main">
+            <a:off x="7981950" y="5467350"/>
+            <a:ext cx="3467100" cy="361950"/>
+          </a:xfrm>
+          <a:prstGeom xmlns:a="http://schemas.openxmlformats.org/drawingml/2006/main" prst="rect">
+            <a:avLst/>
+          </a:prstGeom>
+          <a:noFill xmlns:a="http://schemas.openxmlformats.org/drawingml/2006/main"/>
+          <a:ln xmlns:a="http://schemas.openxmlformats.org/drawingml/2006/main" w="0">
+            <a:solidFill>
+              <a:srgbClr val="FFFCF5"/>
+            </a:solidFill>
+            <a:prstDash val="solid"/>
+          </a:ln>
+        </p:spPr>
+        <p:txBody>
+          <a:bodyPr xmlns:a="http://schemas.openxmlformats.org/drawingml/2006/main" lIns="28575" tIns="19050" rIns="28575" bIns="19050" anchor="t">
+            <a:normAutofit fontScale="100000"/>
+          </a:bodyPr>
+          <a:lstStyle xmlns:a="http://schemas.openxmlformats.org/drawingml/2006/main"/>
+          <a:p xmlns:a="http://schemas.openxmlformats.org/drawingml/2006/main">
+            <a:pPr algn="l">
+              <a:lnSpc>
+                <a:spcPct val="100000"/>
+              </a:lnSpc>
+              <a:buNone/>
+              <a:defRPr sz="1050" b="0">
+                <a:solidFill>
+                  <a:srgbClr val="686A66"/>
+                </a:solidFill>
+                <a:latin typeface="Arial"/>
+                <a:ea typeface="Arial"/>
+                <a:cs typeface="Arial"/>
+              </a:defRPr>
+            </a:pPr>
+            <a:r>
+              <a:rPr sz="1050" b="0">
+                <a:solidFill>
+                  <a:srgbClr val="686A66"/>
+                </a:solidFill>
+                <a:latin typeface="Arial"/>
+                <a:ea typeface="Arial"/>
+                <a:cs typeface="Arial"/>
+              </a:rPr>
+              <a:t>Every option can rank first · Apigee reverses Kong at +1.125 average GRS</a:t>
+            </a:r>
+          </a:p>
+        </p:txBody>
+      </p:sp>
+      <p:sp>
+        <p:nvSpPr>
+          <p:cNvPr id="55" name="scenario-hold-band">
+            <a:extLst xmlns:a="http://schemas.openxmlformats.org/drawingml/2006/main">
+              <a:ext uri="{FF2B5EF4-FFF2-40B4-BE49-F238E27FC236}">
+                <a16:creationId xmlns:a16="http://schemas.microsoft.com/office/drawing/2014/main" id="{90BA302B-73C9-4B01-AD13-2B575B6BE167}"/>
+              </a:ext>
+            </a:extLst>
+          </p:cNvPr>
+          <p:cNvSpPr>
+            <a:spLocks xmlns:a="http://schemas.openxmlformats.org/drawingml/2006/main" noGrp="1"/>
+          </p:cNvSpPr>
+          <p:nvPr/>
+        </p:nvSpPr>
+        <p:spPr>
+          <a:xfrm xmlns:a="http://schemas.openxmlformats.org/drawingml/2006/main">
+            <a:off x="7848600" y="5867400"/>
+            <a:ext cx="3733800" cy="304800"/>
           </a:xfrm>
           <a:prstGeom xmlns:a="http://schemas.openxmlformats.org/drawingml/2006/main" prst="rect">
             <a:avLst/>
@@ -34089,48 +36284,55 @@
             <a:srgbClr val="FFC72C"/>
           </a:solidFill>
           <a:ln xmlns:a="http://schemas.openxmlformats.org/drawingml/2006/main" w="0">
-            <a:noFill/>
-            <a:prstDash val="solid"/>
-          </a:ln>
-        </p:spPr>
-      </p:sp>
-      <p:sp>
-        <p:nvSpPr>
-          <p:cNvPr id="12" name="">
-            <a:extLst xmlns:a="http://schemas.openxmlformats.org/drawingml/2006/main">
-              <a:ext uri="{FF2B5EF4-FFF2-40B4-BE49-F238E27FC236}">
-                <a16:creationId xmlns:a16="http://schemas.microsoft.com/office/drawing/2014/main" id="{7E7D81A9-ECF0-44CC-89EA-BDA3BE780049}"/>
-              </a:ext>
-            </a:extLst>
-          </p:cNvPr>
-          <p:cNvSpPr>
-            <a:spLocks xmlns:a="http://schemas.openxmlformats.org/drawingml/2006/main" noGrp="1"/>
-          </p:cNvSpPr>
-          <p:nvPr/>
-        </p:nvSpPr>
-        <p:spPr>
-          <a:xfrm xmlns:a="http://schemas.openxmlformats.org/drawingml/2006/main">
-            <a:off x="8058150" y="2247900"/>
-            <a:ext cx="3314700" cy="228600"/>
-          </a:xfrm>
-          <a:prstGeom xmlns:a="http://schemas.openxmlformats.org/drawingml/2006/main" prst="rect">
-            <a:avLst/>
-          </a:prstGeom>
-          <a:noFill xmlns:a="http://schemas.openxmlformats.org/drawingml/2006/main"/>
-          <a:ln xmlns:a="http://schemas.openxmlformats.org/drawingml/2006/main" w="0">
-            <a:noFill/>
-            <a:prstDash val="solid"/>
-          </a:ln>
-        </p:spPr>
-        <p:txBody>
-          <a:bodyPr xmlns:a="http://schemas.openxmlformats.org/drawingml/2006/main" wrap="square" lIns="0" tIns="0" rIns="0" bIns="0" anchor="t">
+            <a:solidFill>
+              <a:srgbClr val="FFC72C"/>
+            </a:solidFill>
+            <a:prstDash val="solid"/>
+          </a:ln>
+        </p:spPr>
+      </p:sp>
+      <p:sp>
+        <p:nvSpPr>
+          <p:cNvPr id="56" name="scenario-hold-text">
+            <a:extLst xmlns:a="http://schemas.openxmlformats.org/drawingml/2006/main">
+              <a:ext uri="{FF2B5EF4-FFF2-40B4-BE49-F238E27FC236}">
+                <a16:creationId xmlns:a16="http://schemas.microsoft.com/office/drawing/2014/main" id="{FAD07EBB-6809-424B-8A6D-86FB03981C17}"/>
+              </a:ext>
+            </a:extLst>
+          </p:cNvPr>
+          <p:cNvSpPr>
+            <a:spLocks xmlns:a="http://schemas.openxmlformats.org/drawingml/2006/main" noGrp="1"/>
+          </p:cNvSpPr>
+          <p:nvPr/>
+        </p:nvSpPr>
+        <p:spPr>
+          <a:xfrm xmlns:a="http://schemas.openxmlformats.org/drawingml/2006/main">
+            <a:off x="7943850" y="5886450"/>
+            <a:ext cx="3543300" cy="266700"/>
+          </a:xfrm>
+          <a:prstGeom xmlns:a="http://schemas.openxmlformats.org/drawingml/2006/main" prst="rect">
+            <a:avLst/>
+          </a:prstGeom>
+          <a:noFill xmlns:a="http://schemas.openxmlformats.org/drawingml/2006/main"/>
+          <a:ln xmlns:a="http://schemas.openxmlformats.org/drawingml/2006/main" w="0">
+            <a:solidFill>
+              <a:srgbClr val="FFFCF5"/>
+            </a:solidFill>
+            <a:prstDash val="solid"/>
+          </a:ln>
+        </p:spPr>
+        <p:txBody>
+          <a:bodyPr xmlns:a="http://schemas.openxmlformats.org/drawingml/2006/main" lIns="28575" tIns="19050" rIns="28575" bIns="19050" anchor="ctr">
             <a:normAutofit fontScale="100000"/>
           </a:bodyPr>
           <a:lstStyle xmlns:a="http://schemas.openxmlformats.org/drawingml/2006/main"/>
           <a:p xmlns:a="http://schemas.openxmlformats.org/drawingml/2006/main">
-            <a:pPr algn="l">
-              <a:buNone/>
-              <a:defRPr sz="1050" b="1" i="0">
+            <a:pPr algn="ctr">
+              <a:lnSpc>
+                <a:spcPct val="100000"/>
+              </a:lnSpc>
+              <a:buNone/>
+              <a:defRPr sz="1050" b="1">
                 <a:solidFill>
                   <a:srgbClr val="111111"/>
                 </a:solidFill>
@@ -34140,7 +36342,7 @@
               </a:defRPr>
             </a:pPr>
             <a:r>
-              <a:rPr sz="1050" b="1" i="0">
+              <a:rPr sz="1050" b="1">
                 <a:solidFill>
                   <a:srgbClr val="111111"/>
                 </a:solidFill>
@@ -34148,414 +36350,7 @@
                 <a:ea typeface="Consolas"/>
                 <a:cs typeface="Consolas"/>
               </a:rPr>
-              <a:t>ARITHMETIC</a:t>
-            </a:r>
-          </a:p>
-        </p:txBody>
-      </p:sp>
-      <p:sp>
-        <p:nvSpPr>
-          <p:cNvPr id="13" name="">
-            <a:extLst xmlns:a="http://schemas.openxmlformats.org/drawingml/2006/main">
-              <a:ext uri="{FF2B5EF4-FFF2-40B4-BE49-F238E27FC236}">
-                <a16:creationId xmlns:a16="http://schemas.microsoft.com/office/drawing/2014/main" id="{C8A3CA66-DCE0-41CB-8C93-706C9F05DEF4}"/>
-              </a:ext>
-            </a:extLst>
-          </p:cNvPr>
-          <p:cNvSpPr>
-            <a:spLocks xmlns:a="http://schemas.openxmlformats.org/drawingml/2006/main" noGrp="1"/>
-          </p:cNvSpPr>
-          <p:nvPr/>
-        </p:nvSpPr>
-        <p:spPr>
-          <a:xfrm xmlns:a="http://schemas.openxmlformats.org/drawingml/2006/main">
-            <a:off x="8058150" y="2552700"/>
-            <a:ext cx="3314700" cy="685800"/>
-          </a:xfrm>
-          <a:prstGeom xmlns:a="http://schemas.openxmlformats.org/drawingml/2006/main" prst="rect">
-            <a:avLst/>
-          </a:prstGeom>
-          <a:noFill xmlns:a="http://schemas.openxmlformats.org/drawingml/2006/main"/>
-          <a:ln xmlns:a="http://schemas.openxmlformats.org/drawingml/2006/main" w="0">
-            <a:noFill/>
-            <a:prstDash val="solid"/>
-          </a:ln>
-        </p:spPr>
-        <p:txBody>
-          <a:bodyPr xmlns:a="http://schemas.openxmlformats.org/drawingml/2006/main" wrap="square" lIns="0" tIns="0" rIns="0" bIns="0" anchor="t">
-            <a:normAutofit fontScale="100000"/>
-          </a:bodyPr>
-          <a:lstStyle xmlns:a="http://schemas.openxmlformats.org/drawingml/2006/main"/>
-          <a:p xmlns:a="http://schemas.openxmlformats.org/drawingml/2006/main">
-            <a:pPr algn="l">
-              <a:buNone/>
-              <a:defRPr sz="2175" b="0" i="0">
-                <a:solidFill>
-                  <a:srgbClr val="111111"/>
-                </a:solidFill>
-                <a:latin typeface="Georgia"/>
-                <a:ea typeface="Georgia"/>
-                <a:cs typeface="Georgia"/>
-              </a:defRPr>
-            </a:pPr>
-            <a:r>
-              <a:rPr sz="2175" b="0" i="0">
-                <a:solidFill>
-                  <a:srgbClr val="111111"/>
-                </a:solidFill>
-                <a:latin typeface="Georgia"/>
-                <a:ea typeface="Georgia"/>
-                <a:cs typeface="Georgia"/>
-              </a:rPr>
-              <a:t>Historical ordering unchanged</a:t>
-            </a:r>
-          </a:p>
-        </p:txBody>
-      </p:sp>
-      <p:sp>
-        <p:nvSpPr>
-          <p:cNvPr id="14" name="">
-            <a:extLst xmlns:a="http://schemas.openxmlformats.org/drawingml/2006/main">
-              <a:ext uri="{FF2B5EF4-FFF2-40B4-BE49-F238E27FC236}">
-                <a16:creationId xmlns:a16="http://schemas.microsoft.com/office/drawing/2014/main" id="{22AB11E7-683D-43DE-8053-16D551C16A94}"/>
-              </a:ext>
-            </a:extLst>
-          </p:cNvPr>
-          <p:cNvSpPr>
-            <a:spLocks xmlns:a="http://schemas.openxmlformats.org/drawingml/2006/main" noGrp="1"/>
-          </p:cNvSpPr>
-          <p:nvPr/>
-        </p:nvSpPr>
-        <p:spPr>
-          <a:xfrm xmlns:a="http://schemas.openxmlformats.org/drawingml/2006/main">
-            <a:off x="8058150" y="3257550"/>
-            <a:ext cx="3314700" cy="514350"/>
-          </a:xfrm>
-          <a:prstGeom xmlns:a="http://schemas.openxmlformats.org/drawingml/2006/main" prst="rect">
-            <a:avLst/>
-          </a:prstGeom>
-          <a:noFill xmlns:a="http://schemas.openxmlformats.org/drawingml/2006/main"/>
-          <a:ln xmlns:a="http://schemas.openxmlformats.org/drawingml/2006/main" w="0">
-            <a:noFill/>
-            <a:prstDash val="solid"/>
-          </a:ln>
-        </p:spPr>
-        <p:txBody>
-          <a:bodyPr xmlns:a="http://schemas.openxmlformats.org/drawingml/2006/main" wrap="square" lIns="0" tIns="0" rIns="0" bIns="0" anchor="t">
-            <a:normAutofit fontScale="100000"/>
-          </a:bodyPr>
-          <a:lstStyle xmlns:a="http://schemas.openxmlformats.org/drawingml/2006/main"/>
-          <a:p xmlns:a="http://schemas.openxmlformats.org/drawingml/2006/main">
-            <a:pPr algn="l">
-              <a:buNone/>
-              <a:defRPr sz="1575" b="0" i="0">
-                <a:solidFill>
-                  <a:srgbClr val="686A66"/>
-                </a:solidFill>
-                <a:latin typeface="Arial"/>
-                <a:ea typeface="Arial"/>
-                <a:cs typeface="Arial"/>
-              </a:defRPr>
-            </a:pPr>
-            <a:r>
-              <a:rPr sz="1575" b="0" i="0">
-                <a:solidFill>
-                  <a:srgbClr val="686A66"/>
-                </a:solidFill>
-                <a:latin typeface="Arial"/>
-                <a:ea typeface="Arial"/>
-                <a:cs typeface="Arial"/>
-              </a:rPr>
-              <a:t>Source: 93 / 87 / 78</a:t>
-            </a:r>
-          </a:p>
-          <a:p xmlns:a="http://schemas.openxmlformats.org/drawingml/2006/main">
-            <a:pPr algn="l">
-              <a:buNone/>
-              <a:defRPr sz="1575" b="0" i="0">
-                <a:solidFill>
-                  <a:srgbClr val="686A66"/>
-                </a:solidFill>
-                <a:latin typeface="Arial"/>
-                <a:ea typeface="Arial"/>
-                <a:cs typeface="Arial"/>
-              </a:defRPr>
-            </a:pPr>
-            <a:r>
-              <a:rPr sz="1575" b="0" i="0">
-                <a:solidFill>
-                  <a:srgbClr val="686A66"/>
-                </a:solidFill>
-                <a:latin typeface="Arial"/>
-                <a:ea typeface="Arial"/>
-                <a:cs typeface="Arial"/>
-              </a:rPr>
-              <a:t>Corrected: 93 / 85.5 / 77</a:t>
-            </a:r>
-          </a:p>
-        </p:txBody>
-      </p:sp>
-      <p:sp>
-        <p:nvSpPr>
-          <p:cNvPr id="15" name="">
-            <a:extLst xmlns:a="http://schemas.openxmlformats.org/drawingml/2006/main">
-              <a:ext uri="{FF2B5EF4-FFF2-40B4-BE49-F238E27FC236}">
-                <a16:creationId xmlns:a16="http://schemas.microsoft.com/office/drawing/2014/main" id="{56D4037E-1D0C-4534-94D6-1E9A05706959}"/>
-              </a:ext>
-            </a:extLst>
-          </p:cNvPr>
-          <p:cNvSpPr>
-            <a:spLocks xmlns:a="http://schemas.openxmlformats.org/drawingml/2006/main" noGrp="1"/>
-          </p:cNvSpPr>
-          <p:nvPr/>
-        </p:nvSpPr>
-        <p:spPr>
-          <a:xfrm xmlns:a="http://schemas.openxmlformats.org/drawingml/2006/main">
-            <a:off x="7848600" y="4191000"/>
-            <a:ext cx="3733800" cy="1981200"/>
-          </a:xfrm>
-          <a:prstGeom xmlns:a="http://schemas.openxmlformats.org/drawingml/2006/main" prst="rect">
-            <a:avLst/>
-          </a:prstGeom>
-          <a:solidFill xmlns:a="http://schemas.openxmlformats.org/drawingml/2006/main">
-            <a:srgbClr val="FFFFFF"/>
-          </a:solidFill>
-          <a:ln xmlns:a="http://schemas.openxmlformats.org/drawingml/2006/main" w="9525">
-            <a:solidFill>
-              <a:srgbClr val="8A8B86"/>
-            </a:solidFill>
-            <a:prstDash val="solid"/>
-          </a:ln>
-        </p:spPr>
-      </p:sp>
-      <p:sp>
-        <p:nvSpPr>
-          <p:cNvPr id="16" name="">
-            <a:extLst xmlns:a="http://schemas.openxmlformats.org/drawingml/2006/main">
-              <a:ext uri="{FF2B5EF4-FFF2-40B4-BE49-F238E27FC236}">
-                <a16:creationId xmlns:a16="http://schemas.microsoft.com/office/drawing/2014/main" id="{B58B6C9E-3E57-4D4D-9023-37F52AF26BEB}"/>
-              </a:ext>
-            </a:extLst>
-          </p:cNvPr>
-          <p:cNvSpPr>
-            <a:spLocks xmlns:a="http://schemas.openxmlformats.org/drawingml/2006/main" noGrp="1"/>
-          </p:cNvSpPr>
-          <p:nvPr/>
-        </p:nvSpPr>
-        <p:spPr>
-          <a:xfrm xmlns:a="http://schemas.openxmlformats.org/drawingml/2006/main">
-            <a:off x="7848600" y="4191000"/>
-            <a:ext cx="66675" cy="1981200"/>
-          </a:xfrm>
-          <a:prstGeom xmlns:a="http://schemas.openxmlformats.org/drawingml/2006/main" prst="rect">
-            <a:avLst/>
-          </a:prstGeom>
-          <a:solidFill xmlns:a="http://schemas.openxmlformats.org/drawingml/2006/main">
-            <a:srgbClr val="A96300"/>
-          </a:solidFill>
-          <a:ln xmlns:a="http://schemas.openxmlformats.org/drawingml/2006/main" w="0">
-            <a:noFill/>
-            <a:prstDash val="solid"/>
-          </a:ln>
-        </p:spPr>
-      </p:sp>
-      <p:sp>
-        <p:nvSpPr>
-          <p:cNvPr id="17" name="">
-            <a:extLst xmlns:a="http://schemas.openxmlformats.org/drawingml/2006/main">
-              <a:ext uri="{FF2B5EF4-FFF2-40B4-BE49-F238E27FC236}">
-                <a16:creationId xmlns:a16="http://schemas.microsoft.com/office/drawing/2014/main" id="{0CD1C31A-A644-4FCA-9660-A0A25699636E}"/>
-              </a:ext>
-            </a:extLst>
-          </p:cNvPr>
-          <p:cNvSpPr>
-            <a:spLocks xmlns:a="http://schemas.openxmlformats.org/drawingml/2006/main" noGrp="1"/>
-          </p:cNvSpPr>
-          <p:nvPr/>
-        </p:nvSpPr>
-        <p:spPr>
-          <a:xfrm xmlns:a="http://schemas.openxmlformats.org/drawingml/2006/main">
-            <a:off x="8058150" y="4362450"/>
-            <a:ext cx="3314700" cy="228600"/>
-          </a:xfrm>
-          <a:prstGeom xmlns:a="http://schemas.openxmlformats.org/drawingml/2006/main" prst="rect">
-            <a:avLst/>
-          </a:prstGeom>
-          <a:noFill xmlns:a="http://schemas.openxmlformats.org/drawingml/2006/main"/>
-          <a:ln xmlns:a="http://schemas.openxmlformats.org/drawingml/2006/main" w="0">
-            <a:noFill/>
-            <a:prstDash val="solid"/>
-          </a:ln>
-        </p:spPr>
-        <p:txBody>
-          <a:bodyPr xmlns:a="http://schemas.openxmlformats.org/drawingml/2006/main" wrap="square" lIns="0" tIns="0" rIns="0" bIns="0" anchor="t">
-            <a:normAutofit fontScale="100000"/>
-          </a:bodyPr>
-          <a:lstStyle xmlns:a="http://schemas.openxmlformats.org/drawingml/2006/main"/>
-          <a:p xmlns:a="http://schemas.openxmlformats.org/drawingml/2006/main">
-            <a:pPr algn="l">
-              <a:buNone/>
-              <a:defRPr sz="1050" b="1" i="0">
-                <a:solidFill>
-                  <a:srgbClr val="A96300"/>
-                </a:solidFill>
-                <a:latin typeface="Consolas"/>
-                <a:ea typeface="Consolas"/>
-                <a:cs typeface="Consolas"/>
-              </a:defRPr>
-            </a:pPr>
-            <a:r>
-              <a:rPr sz="1050" b="1" i="0">
-                <a:solidFill>
-                  <a:srgbClr val="A96300"/>
-                </a:solidFill>
-                <a:latin typeface="Consolas"/>
-                <a:ea typeface="Consolas"/>
-                <a:cs typeface="Consolas"/>
-              </a:rPr>
-              <a:t>GOVERNED RE-SCORE</a:t>
-            </a:r>
-          </a:p>
-        </p:txBody>
-      </p:sp>
-      <p:sp>
-        <p:nvSpPr>
-          <p:cNvPr id="18" name="">
-            <a:extLst xmlns:a="http://schemas.openxmlformats.org/drawingml/2006/main">
-              <a:ext uri="{FF2B5EF4-FFF2-40B4-BE49-F238E27FC236}">
-                <a16:creationId xmlns:a16="http://schemas.microsoft.com/office/drawing/2014/main" id="{257C87E5-937D-4901-B47B-29B76403FD26}"/>
-              </a:ext>
-            </a:extLst>
-          </p:cNvPr>
-          <p:cNvSpPr>
-            <a:spLocks xmlns:a="http://schemas.openxmlformats.org/drawingml/2006/main" noGrp="1"/>
-          </p:cNvSpPr>
-          <p:nvPr/>
-        </p:nvSpPr>
-        <p:spPr>
-          <a:xfrm xmlns:a="http://schemas.openxmlformats.org/drawingml/2006/main">
-            <a:off x="8058150" y="4667250"/>
-            <a:ext cx="3314700" cy="685800"/>
-          </a:xfrm>
-          <a:prstGeom xmlns:a="http://schemas.openxmlformats.org/drawingml/2006/main" prst="rect">
-            <a:avLst/>
-          </a:prstGeom>
-          <a:noFill xmlns:a="http://schemas.openxmlformats.org/drawingml/2006/main"/>
-          <a:ln xmlns:a="http://schemas.openxmlformats.org/drawingml/2006/main" w="0">
-            <a:noFill/>
-            <a:prstDash val="solid"/>
-          </a:ln>
-        </p:spPr>
-        <p:txBody>
-          <a:bodyPr xmlns:a="http://schemas.openxmlformats.org/drawingml/2006/main" wrap="square" lIns="0" tIns="0" rIns="0" bIns="0" anchor="t">
-            <a:normAutofit fontScale="100000"/>
-          </a:bodyPr>
-          <a:lstStyle xmlns:a="http://schemas.openxmlformats.org/drawingml/2006/main"/>
-          <a:p xmlns:a="http://schemas.openxmlformats.org/drawingml/2006/main">
-            <a:pPr algn="l">
-              <a:buNone/>
-              <a:defRPr sz="2025" b="0" i="0">
-                <a:solidFill>
-                  <a:srgbClr val="111111"/>
-                </a:solidFill>
-                <a:latin typeface="Georgia"/>
-                <a:ea typeface="Georgia"/>
-                <a:cs typeface="Georgia"/>
-              </a:defRPr>
-            </a:pPr>
-            <a:r>
-              <a:rPr sz="2025" b="0" i="0">
-                <a:solidFill>
-                  <a:srgbClr val="111111"/>
-                </a:solidFill>
-                <a:latin typeface="Georgia"/>
-                <a:ea typeface="Georgia"/>
-                <a:cs typeface="Georgia"/>
-              </a:rPr>
-              <a:t>Six dimensions remain TBD</a:t>
-            </a:r>
-          </a:p>
-        </p:txBody>
-      </p:sp>
-      <p:sp>
-        <p:nvSpPr>
-          <p:cNvPr id="19" name="">
-            <a:extLst xmlns:a="http://schemas.openxmlformats.org/drawingml/2006/main">
-              <a:ext uri="{FF2B5EF4-FFF2-40B4-BE49-F238E27FC236}">
-                <a16:creationId xmlns:a16="http://schemas.microsoft.com/office/drawing/2014/main" id="{02E70283-C2D3-4BDB-BFDE-9DEE51DD9EFF}"/>
-              </a:ext>
-            </a:extLst>
-          </p:cNvPr>
-          <p:cNvSpPr>
-            <a:spLocks xmlns:a="http://schemas.openxmlformats.org/drawingml/2006/main" noGrp="1"/>
-          </p:cNvSpPr>
-          <p:nvPr/>
-        </p:nvSpPr>
-        <p:spPr>
-          <a:xfrm xmlns:a="http://schemas.openxmlformats.org/drawingml/2006/main">
-            <a:off x="8058150" y="5372100"/>
-            <a:ext cx="3314700" cy="628650"/>
-          </a:xfrm>
-          <a:prstGeom xmlns:a="http://schemas.openxmlformats.org/drawingml/2006/main" prst="rect">
-            <a:avLst/>
-          </a:prstGeom>
-          <a:noFill xmlns:a="http://schemas.openxmlformats.org/drawingml/2006/main"/>
-          <a:ln xmlns:a="http://schemas.openxmlformats.org/drawingml/2006/main" w="0">
-            <a:noFill/>
-            <a:prstDash val="solid"/>
-          </a:ln>
-        </p:spPr>
-        <p:txBody>
-          <a:bodyPr xmlns:a="http://schemas.openxmlformats.org/drawingml/2006/main" wrap="square" lIns="0" tIns="0" rIns="0" bIns="0" anchor="t">
-            <a:normAutofit fontScale="100000"/>
-          </a:bodyPr>
-          <a:lstStyle xmlns:a="http://schemas.openxmlformats.org/drawingml/2006/main"/>
-          <a:p xmlns:a="http://schemas.openxmlformats.org/drawingml/2006/main">
-            <a:pPr algn="l">
-              <a:buNone/>
-              <a:defRPr sz="1350" b="0" i="0">
-                <a:solidFill>
-                  <a:srgbClr val="686A66"/>
-                </a:solidFill>
-                <a:latin typeface="Arial"/>
-                <a:ea typeface="Arial"/>
-                <a:cs typeface="Arial"/>
-              </a:defRPr>
-            </a:pPr>
-            <a:r>
-              <a:rPr sz="1350" b="0" i="0">
-                <a:solidFill>
-                  <a:srgbClr val="686A66"/>
-                </a:solidFill>
-                <a:latin typeface="Arial"/>
-                <a:ea typeface="Arial"/>
-                <a:cs typeface="Arial"/>
-              </a:rPr>
-              <a:t>Multicloud · scale/recovery · security/trace · reversibility · full TCO · CP duty</a:t>
-            </a:r>
-          </a:p>
-          <a:p xmlns:a="http://schemas.openxmlformats.org/drawingml/2006/main">
-            <a:pPr algn="l">
-              <a:buNone/>
-              <a:defRPr sz="1350" b="0" i="0">
-                <a:solidFill>
-                  <a:srgbClr val="686A66"/>
-                </a:solidFill>
-                <a:latin typeface="Arial"/>
-                <a:ea typeface="Arial"/>
-                <a:cs typeface="Arial"/>
-              </a:defRPr>
-            </a:pPr>
-            <a:r>
-              <a:rPr sz="1350" b="0" i="0">
-                <a:solidFill>
-                  <a:srgbClr val="686A66"/>
-                </a:solidFill>
-                <a:latin typeface="Arial"/>
-                <a:ea typeface="Arial"/>
-                <a:cs typeface="Arial"/>
-              </a:rPr>
-              <a:t>No new total before approval</a:t>
+              <a:t>0% COMMON SCORE-CAPABLE EVIDENCE · HOLD</a:t>
             </a:r>
           </a:p>
         </p:txBody>
@@ -34823,7 +36618,7 @@
                 <a:ea typeface="Arial"/>
                 <a:cs typeface="Arial"/>
               </a:rPr>
-              <a:t>Kubernetes and GitOps carry 35%; the historical eight weights remain unchanged.</a:t>
+              <a:t>Historical weights stay visible; the provisional model rebases them to 60% and adds a 40% unknown block.</a:t>
             </a:r>
           </a:p>
         </p:txBody>
@@ -34914,7 +36709,7 @@
                 <a:solidFill>
                   <a:srgbClr val="666762"/>
                 </a:solidFill>
-                <a:hlinkClick xmlns:r="http://schemas.openxmlformats.org/officeDocument/2006/relationships" r:id="Rb3fc4f30f3cb47d9"/>
+                <a:hlinkClick xmlns:r="http://schemas.openxmlformats.org/officeDocument/2006/relationships" r:id="R9dd0ae648db447dc"/>
               </a:rPr>
               <a:t>Repo reference</a:t>
             </a:r>
@@ -34931,7 +36726,7 @@
                 <a:solidFill>
                   <a:srgbClr val="666762"/>
                 </a:solidFill>
-                <a:hlinkClick xmlns:r="http://schemas.openxmlformats.org/officeDocument/2006/relationships" r:id="Rcf6e412bb60f4d85"/>
+                <a:hlinkClick xmlns:r="http://schemas.openxmlformats.org/officeDocument/2006/relationships" r:id="R71b476e2b678452b"/>
               </a:rPr>
               <a:t>Official docs</a:t>
             </a:r>
@@ -36555,7 +38350,7 @@
                 <a:ea typeface="Consolas"/>
                 <a:cs typeface="Consolas"/>
               </a:rPr>
-              <a:t>GOVERNED RE-SCORE</a:t>
+              <a:t>PROVISIONAL SCENARIO</a:t>
             </a:r>
           </a:p>
         </p:txBody>
@@ -36614,7 +38409,7 @@
                 <a:ea typeface="Georgia"/>
                 <a:cs typeface="Georgia"/>
               </a:rPr>
-              <a:t>Six dimensions stay pending</a:t>
+              <a:t>Six dimensions carry 40%</a:t>
             </a:r>
           </a:p>
         </p:txBody>
@@ -36648,12 +38443,15 @@
           </a:ln>
         </p:spPr>
         <p:txBody>
-          <a:bodyPr xmlns:a="http://schemas.openxmlformats.org/drawingml/2006/main" wrap="square" lIns="0" tIns="0" rIns="0" bIns="0" anchor="t">
+          <a:bodyPr xmlns:a="http://schemas.openxmlformats.org/drawingml/2006/main" wrap="square" lIns="19050" tIns="9525" rIns="19050" bIns="9525" anchor="t">
             <a:normAutofit fontScale="100000"/>
           </a:bodyPr>
           <a:lstStyle xmlns:a="http://schemas.openxmlformats.org/drawingml/2006/main"/>
           <a:p xmlns:a="http://schemas.openxmlformats.org/drawingml/2006/main">
             <a:pPr algn="l">
+              <a:lnSpc>
+                <a:spcPct val="100000"/>
+              </a:lnSpc>
               <a:buNone/>
               <a:defRPr sz="1425" b="0" i="0">
                 <a:solidFill>
@@ -36673,11 +38471,14 @@
                 <a:ea typeface="Arial"/>
                 <a:cs typeface="Arial"/>
               </a:rPr>
-              <a:t>• Multicloud / sovereignty</a:t>
+              <a:t>• Multicloud operating fit — 8%</a:t>
             </a:r>
           </a:p>
           <a:p xmlns:a="http://schemas.openxmlformats.org/drawingml/2006/main">
             <a:pPr algn="l">
+              <a:lnSpc>
+                <a:spcPct val="100000"/>
+              </a:lnSpc>
               <a:buNone/>
               <a:defRPr sz="1425" b="0" i="0">
                 <a:solidFill>
@@ -36697,11 +38498,14 @@
                 <a:ea typeface="Arial"/>
                 <a:cs typeface="Arial"/>
               </a:rPr>
-              <a:t>• Scalability / robustness</a:t>
+              <a:t>• Scale / recovery — 8%</a:t>
             </a:r>
           </a:p>
           <a:p xmlns:a="http://schemas.openxmlformats.org/drawingml/2006/main">
             <a:pPr algn="l">
+              <a:lnSpc>
+                <a:spcPct val="100000"/>
+              </a:lnSpc>
               <a:buNone/>
               <a:defRPr sz="1425" b="0" i="0">
                 <a:solidFill>
@@ -36721,11 +38525,14 @@
                 <a:ea typeface="Arial"/>
                 <a:cs typeface="Arial"/>
               </a:rPr>
-              <a:t>• Security, IAM / traceability</a:t>
+              <a:t>• Enterprise IAM / trace — 8%</a:t>
             </a:r>
           </a:p>
           <a:p xmlns:a="http://schemas.openxmlformats.org/drawingml/2006/main">
             <a:pPr algn="l">
+              <a:lnSpc>
+                <a:spcPct val="100000"/>
+              </a:lnSpc>
               <a:buNone/>
               <a:defRPr sz="1425" b="0" i="0">
                 <a:solidFill>
@@ -36745,11 +38552,14 @@
                 <a:ea typeface="Arial"/>
                 <a:cs typeface="Arial"/>
               </a:rPr>
-              <a:t>• Reversibility / vendor dependency</a:t>
+              <a:t>• Reversibility / lock-in — 6%</a:t>
             </a:r>
           </a:p>
           <a:p xmlns:a="http://schemas.openxmlformats.org/drawingml/2006/main">
             <a:pPr algn="l">
+              <a:lnSpc>
+                <a:spcPct val="100000"/>
+              </a:lnSpc>
               <a:buNone/>
               <a:defRPr sz="1425" b="0" i="0">
                 <a:solidFill>
@@ -36769,11 +38579,14 @@
                 <a:ea typeface="Arial"/>
                 <a:cs typeface="Arial"/>
               </a:rPr>
-              <a:t>• Fully allocated TCO</a:t>
+              <a:t>• Fully allocated TCO — 6%</a:t>
             </a:r>
           </a:p>
           <a:p xmlns:a="http://schemas.openxmlformats.org/drawingml/2006/main">
             <a:pPr algn="l">
+              <a:lnSpc>
+                <a:spcPct val="100000"/>
+              </a:lnSpc>
               <a:buNone/>
               <a:defRPr sz="1425" b="0" i="0">
                 <a:solidFill>
@@ -36793,7 +38606,7 @@
                 <a:ea typeface="Arial"/>
                 <a:cs typeface="Arial"/>
               </a:rPr>
-              <a:t>• Control-plane operating duty</a:t>
+              <a:t>• Control-plane duty — 4%</a:t>
             </a:r>
           </a:p>
         </p:txBody>
@@ -36852,7 +38665,7 @@
                 <a:ea typeface="Consolas"/>
                 <a:cs typeface="Consolas"/>
               </a:rPr>
-              <a:t>Rule</a:t>
+              <a:t>Evidence rule</a:t>
             </a:r>
           </a:p>
         </p:txBody>
@@ -36887,7 +38700,7 @@
         </p:spPr>
         <p:txBody>
           <a:bodyPr xmlns:a="http://schemas.openxmlformats.org/drawingml/2006/main" wrap="square" lIns="0" tIns="0" rIns="0" bIns="0" anchor="t">
-            <a:normAutofit fontScale="85379"/>
+            <a:normAutofit fontScale="91945"/>
           </a:bodyPr>
           <a:lstStyle xmlns:a="http://schemas.openxmlformats.org/drawingml/2006/main"/>
           <a:p xmlns:a="http://schemas.openxmlformats.org/drawingml/2006/main">
@@ -36911,7 +38724,7 @@
                 <a:ea typeface="Georgia"/>
                 <a:cs typeface="Georgia"/>
               </a:rPr>
-              <a:t>Approve weights, rubric, evidence floor, scorers and sensitivity before any new total.</a:t>
+              <a:t>Weights are assumptions; every GRS product rating remains Unknown [0,10].</a:t>
             </a:r>
           </a:p>
         </p:txBody>
@@ -37270,7 +39083,7 @@
                 <a:solidFill>
                   <a:srgbClr val="666762"/>
                 </a:solidFill>
-                <a:hlinkClick xmlns:r="http://schemas.openxmlformats.org/officeDocument/2006/relationships" r:id="R1bbf74f275ce4491"/>
+                <a:hlinkClick xmlns:r="http://schemas.openxmlformats.org/officeDocument/2006/relationships" r:id="Ra6a74b7c294940ca"/>
               </a:rPr>
               <a:t>Repo reference</a:t>
             </a:r>
@@ -37287,7 +39100,7 @@
                 <a:solidFill>
                   <a:srgbClr val="666762"/>
                 </a:solidFill>
-                <a:hlinkClick xmlns:r="http://schemas.openxmlformats.org/officeDocument/2006/relationships" r:id="R79b752accd5a476d"/>
+                <a:hlinkClick xmlns:r="http://schemas.openxmlformats.org/officeDocument/2006/relationships" r:id="R1fea18c30d134d6c"/>
               </a:rPr>
               <a:t>Official docs</a:t>
             </a:r>
@@ -38993,7 +40806,7 @@
                 <a:ea typeface="Arial"/>
                 <a:cs typeface="Arial"/>
               </a:rPr>
-              <a:t>Preserve the historical score; govern the re-score</a:t>
+              <a:t>Preserve the historical score; expose the uncertainty</a:t>
             </a:r>
           </a:p>
         </p:txBody>
@@ -39052,7 +40865,7 @@
                 <a:ea typeface="Arial"/>
                 <a:cs typeface="Arial"/>
               </a:rPr>
-              <a:t>Corrected totals remain 93 / 85.5 / 77; added dimensions are pending approval.</a:t>
+              <a:t>Historical 93 / 85.5 / 77; under the 60/40 scenario every option can still rank first.</a:t>
             </a:r>
           </a:p>
         </p:txBody>
@@ -39143,7 +40956,7 @@
                 <a:solidFill>
                   <a:srgbClr val="666762"/>
                 </a:solidFill>
-                <a:hlinkClick xmlns:r="http://schemas.openxmlformats.org/officeDocument/2006/relationships" r:id="R169ecf520e9a4de8"/>
+                <a:hlinkClick xmlns:r="http://schemas.openxmlformats.org/officeDocument/2006/relationships" r:id="R8c36ad9c07e14534"/>
               </a:rPr>
               <a:t>Repo reference</a:t>
             </a:r>
@@ -39160,7 +40973,7 @@
                 <a:solidFill>
                   <a:srgbClr val="666762"/>
                 </a:solidFill>
-                <a:hlinkClick xmlns:r="http://schemas.openxmlformats.org/officeDocument/2006/relationships" r:id="Rec3f0979ab254c34"/>
+                <a:hlinkClick xmlns:r="http://schemas.openxmlformats.org/officeDocument/2006/relationships" r:id="Rf7a64300c105432a"/>
               </a:rPr>
               <a:t>Official docs</a:t>
             </a:r>
@@ -39782,29 +41595,91 @@
         </p:nvSpPr>
         <p:spPr>
           <a:xfrm xmlns:a="http://schemas.openxmlformats.org/drawingml/2006/main">
-            <a:off x="9696450" y="2286000"/>
-            <a:ext cx="1428750" cy="209550"/>
-          </a:xfrm>
-          <a:prstGeom xmlns:a="http://schemas.openxmlformats.org/drawingml/2006/main" prst="rect">
-            <a:avLst/>
-          </a:prstGeom>
-          <a:noFill xmlns:a="http://schemas.openxmlformats.org/drawingml/2006/main"/>
-          <a:ln xmlns:a="http://schemas.openxmlformats.org/drawingml/2006/main" w="0">
-            <a:noFill/>
-            <a:prstDash val="solid"/>
-          </a:ln>
-        </p:spPr>
-        <p:txBody>
-          <a:bodyPr xmlns:a="http://schemas.openxmlformats.org/drawingml/2006/main" wrap="square" lIns="0" tIns="0" rIns="0" bIns="0" anchor="t">
+            <a:off x="9525000" y="2286000"/>
+            <a:ext cx="1257300" cy="209550"/>
+          </a:xfrm>
+          <a:prstGeom xmlns:a="http://schemas.openxmlformats.org/drawingml/2006/main" prst="rect">
+            <a:avLst/>
+          </a:prstGeom>
+          <a:noFill xmlns:a="http://schemas.openxmlformats.org/drawingml/2006/main"/>
+          <a:ln xmlns:a="http://schemas.openxmlformats.org/drawingml/2006/main" w="0">
+            <a:noFill/>
+            <a:prstDash val="solid"/>
+          </a:ln>
+        </p:spPr>
+        <p:txBody>
+          <a:bodyPr xmlns:a="http://schemas.openxmlformats.org/drawingml/2006/main" wrap="square" lIns="19050" tIns="9525" rIns="19050" bIns="9525" anchor="ctr">
             <a:normAutofit fontScale="100000"/>
           </a:bodyPr>
           <a:lstStyle xmlns:a="http://schemas.openxmlformats.org/drawingml/2006/main"/>
           <a:p xmlns:a="http://schemas.openxmlformats.org/drawingml/2006/main">
+            <a:pPr algn="ctr">
+              <a:lnSpc>
+                <a:spcPct val="100000"/>
+              </a:lnSpc>
+              <a:buNone/>
+              <a:defRPr sz="1050" b="1" i="0">
+                <a:solidFill>
+                  <a:srgbClr val="686A66"/>
+                </a:solidFill>
+                <a:latin typeface="Arial"/>
+                <a:ea typeface="Arial"/>
+                <a:cs typeface="Arial"/>
+              </a:defRPr>
+            </a:pPr>
+            <a:r>
+              <a:rPr sz="1050" b="1" i="0">
+                <a:solidFill>
+                  <a:srgbClr val="686A66"/>
+                </a:solidFill>
+                <a:latin typeface="Arial"/>
+                <a:ea typeface="Arial"/>
+                <a:cs typeface="Arial"/>
+              </a:rPr>
+              <a:t>Range</a:t>
+            </a:r>
+          </a:p>
+        </p:txBody>
+      </p:sp>
+      <p:sp>
+        <p:nvSpPr>
+          <p:cNvPr id="22" name="">
+            <a:extLst xmlns:a="http://schemas.openxmlformats.org/drawingml/2006/main">
+              <a:ext uri="{FF2B5EF4-FFF2-40B4-BE49-F238E27FC236}">
+                <a16:creationId xmlns:a16="http://schemas.microsoft.com/office/drawing/2014/main" id="{C9D148AD-B0EB-4101-B2E4-8962285509AE}"/>
+              </a:ext>
+            </a:extLst>
+          </p:cNvPr>
+          <p:cNvSpPr>
+            <a:spLocks xmlns:a="http://schemas.openxmlformats.org/drawingml/2006/main" noGrp="1"/>
+          </p:cNvSpPr>
+          <p:nvPr/>
+        </p:nvSpPr>
+        <p:spPr>
+          <a:xfrm xmlns:a="http://schemas.openxmlformats.org/drawingml/2006/main">
+            <a:off x="9525000" y="2609850"/>
+            <a:ext cx="1257300" cy="1752600"/>
+          </a:xfrm>
+          <a:prstGeom xmlns:a="http://schemas.openxmlformats.org/drawingml/2006/main" prst="rect">
+            <a:avLst/>
+          </a:prstGeom>
+          <a:noFill xmlns:a="http://schemas.openxmlformats.org/drawingml/2006/main"/>
+          <a:ln xmlns:a="http://schemas.openxmlformats.org/drawingml/2006/main" w="0">
+            <a:noFill/>
+            <a:prstDash val="solid"/>
+          </a:ln>
+        </p:spPr>
+        <p:txBody>
+          <a:bodyPr xmlns:a="http://schemas.openxmlformats.org/drawingml/2006/main" wrap="square" lIns="19050" tIns="9525" rIns="19050" bIns="9525" anchor="ctr">
+            <a:normAutofit/>
+          </a:bodyPr>
+          <a:lstStyle xmlns:a="http://schemas.openxmlformats.org/drawingml/2006/main"/>
+          <a:p xmlns:a="http://schemas.openxmlformats.org/drawingml/2006/main">
             <a:pPr algn="l">
               <a:buNone/>
-              <a:defRPr sz="975" b="1" i="0">
-                <a:solidFill>
-                  <a:srgbClr val="686A66"/>
+              <a:defRPr sz="2025" b="0" i="0">
+                <a:solidFill>
+                  <a:srgbClr val="8A8B86"/>
                 </a:solidFill>
                 <a:latin typeface="Consolas"/>
                 <a:ea typeface="Consolas"/>
@@ -39812,58 +41687,120 @@
               </a:defRPr>
             </a:pPr>
             <a:r>
-              <a:rPr sz="975" b="1" i="0">
-                <a:solidFill>
-                  <a:srgbClr val="686A66"/>
+              <a:rPr sz="2025" b="0" i="0">
+                <a:solidFill>
+                  <a:srgbClr val="8A8B86"/>
                 </a:solidFill>
                 <a:latin typeface="Consolas"/>
                 <a:ea typeface="Consolas"/>
                 <a:cs typeface="Consolas"/>
               </a:rPr>
-              <a:t>Source table</a:t>
-            </a:r>
-          </a:p>
-        </p:txBody>
-      </p:sp>
-      <p:sp>
-        <p:nvSpPr>
-          <p:cNvPr id="22" name="">
-            <a:extLst xmlns:a="http://schemas.openxmlformats.org/drawingml/2006/main">
-              <a:ext uri="{FF2B5EF4-FFF2-40B4-BE49-F238E27FC236}">
-                <a16:creationId xmlns:a16="http://schemas.microsoft.com/office/drawing/2014/main" id="{C9D148AD-B0EB-4101-B2E4-8962285509AE}"/>
-              </a:ext>
-            </a:extLst>
-          </p:cNvPr>
-          <p:cNvSpPr>
-            <a:spLocks xmlns:a="http://schemas.openxmlformats.org/drawingml/2006/main" noGrp="1"/>
-          </p:cNvSpPr>
-          <p:nvPr/>
-        </p:nvSpPr>
-        <p:spPr>
-          <a:xfrm xmlns:a="http://schemas.openxmlformats.org/drawingml/2006/main">
-            <a:off x="9715500" y="2609850"/>
-            <a:ext cx="762000" cy="1752600"/>
-          </a:xfrm>
-          <a:prstGeom xmlns:a="http://schemas.openxmlformats.org/drawingml/2006/main" prst="rect">
-            <a:avLst/>
-          </a:prstGeom>
-          <a:noFill xmlns:a="http://schemas.openxmlformats.org/drawingml/2006/main"/>
-          <a:ln xmlns:a="http://schemas.openxmlformats.org/drawingml/2006/main" w="0">
-            <a:noFill/>
-            <a:prstDash val="solid"/>
-          </a:ln>
-        </p:spPr>
-        <p:txBody>
-          <a:bodyPr xmlns:a="http://schemas.openxmlformats.org/drawingml/2006/main" wrap="square" lIns="0" tIns="0" rIns="0" bIns="0" anchor="t">
+              <a:t/>
+            </a:r>
+          </a:p>
+        </p:txBody>
+      </p:sp>
+      <p:sp>
+        <p:nvSpPr>
+          <p:cNvPr id="23" name="">
+            <a:extLst xmlns:a="http://schemas.openxmlformats.org/drawingml/2006/main">
+              <a:ext uri="{FF2B5EF4-FFF2-40B4-BE49-F238E27FC236}">
+                <a16:creationId xmlns:a16="http://schemas.microsoft.com/office/drawing/2014/main" id="{E65A7922-47DA-4DE7-8D6D-2CCAD7253E25}"/>
+              </a:ext>
+            </a:extLst>
+          </p:cNvPr>
+          <p:cNvSpPr>
+            <a:spLocks xmlns:a="http://schemas.openxmlformats.org/drawingml/2006/main" noGrp="1"/>
+          </p:cNvSpPr>
+          <p:nvPr/>
+        </p:nvSpPr>
+        <p:spPr>
+          <a:xfrm xmlns:a="http://schemas.openxmlformats.org/drawingml/2006/main">
+            <a:off x="10801350" y="2286000"/>
+            <a:ext cx="723900" cy="209550"/>
+          </a:xfrm>
+          <a:prstGeom xmlns:a="http://schemas.openxmlformats.org/drawingml/2006/main" prst="rect">
+            <a:avLst/>
+          </a:prstGeom>
+          <a:noFill xmlns:a="http://schemas.openxmlformats.org/drawingml/2006/main"/>
+          <a:ln xmlns:a="http://schemas.openxmlformats.org/drawingml/2006/main" w="0">
+            <a:noFill/>
+            <a:prstDash val="solid"/>
+          </a:ln>
+        </p:spPr>
+        <p:txBody>
+          <a:bodyPr xmlns:a="http://schemas.openxmlformats.org/drawingml/2006/main" wrap="square" lIns="19050" tIns="9525" rIns="19050" bIns="9525" anchor="ctr">
             <a:normAutofit fontScale="100000"/>
           </a:bodyPr>
           <a:lstStyle xmlns:a="http://schemas.openxmlformats.org/drawingml/2006/main"/>
           <a:p xmlns:a="http://schemas.openxmlformats.org/drawingml/2006/main">
-            <a:pPr algn="l">
+            <a:pPr algn="r">
+              <a:lnSpc>
+                <a:spcPct val="100000"/>
+              </a:lnSpc>
+              <a:buNone/>
+              <a:defRPr sz="1050" b="1" i="0">
+                <a:solidFill>
+                  <a:srgbClr val="5537D6"/>
+                </a:solidFill>
+                <a:latin typeface="Arial"/>
+                <a:ea typeface="Arial"/>
+                <a:cs typeface="Arial"/>
+              </a:defRPr>
+            </a:pPr>
+            <a:r>
+              <a:rPr sz="1050" b="1" i="0">
+                <a:solidFill>
+                  <a:srgbClr val="5537D6"/>
+                </a:solidFill>
+                <a:latin typeface="Arial"/>
+                <a:ea typeface="Arial"/>
+                <a:cs typeface="Arial"/>
+              </a:rPr>
+              <a:t>Midpoint*</a:t>
+            </a:r>
+          </a:p>
+        </p:txBody>
+      </p:sp>
+      <p:sp>
+        <p:nvSpPr>
+          <p:cNvPr id="24" name="">
+            <a:extLst xmlns:a="http://schemas.openxmlformats.org/drawingml/2006/main">
+              <a:ext uri="{FF2B5EF4-FFF2-40B4-BE49-F238E27FC236}">
+                <a16:creationId xmlns:a16="http://schemas.microsoft.com/office/drawing/2014/main" id="{E23E8704-F307-4161-B225-F82479DE3E7C}"/>
+              </a:ext>
+            </a:extLst>
+          </p:cNvPr>
+          <p:cNvSpPr>
+            <a:spLocks xmlns:a="http://schemas.openxmlformats.org/drawingml/2006/main" noGrp="1"/>
+          </p:cNvSpPr>
+          <p:nvPr/>
+        </p:nvSpPr>
+        <p:spPr>
+          <a:xfrm xmlns:a="http://schemas.openxmlformats.org/drawingml/2006/main">
+            <a:off x="10820400" y="2609850"/>
+            <a:ext cx="685800" cy="1752600"/>
+          </a:xfrm>
+          <a:prstGeom xmlns:a="http://schemas.openxmlformats.org/drawingml/2006/main" prst="rect">
+            <a:avLst/>
+          </a:prstGeom>
+          <a:noFill xmlns:a="http://schemas.openxmlformats.org/drawingml/2006/main"/>
+          <a:ln xmlns:a="http://schemas.openxmlformats.org/drawingml/2006/main" w="0">
+            <a:noFill/>
+            <a:prstDash val="solid"/>
+          </a:ln>
+        </p:spPr>
+        <p:txBody>
+          <a:bodyPr xmlns:a="http://schemas.openxmlformats.org/drawingml/2006/main" wrap="square" lIns="19050" tIns="9525" rIns="19050" bIns="9525" anchor="ctr">
+            <a:normAutofit/>
+          </a:bodyPr>
+          <a:lstStyle xmlns:a="http://schemas.openxmlformats.org/drawingml/2006/main"/>
+          <a:p xmlns:a="http://schemas.openxmlformats.org/drawingml/2006/main">
+            <a:pPr algn="r">
               <a:buNone/>
               <a:defRPr sz="2025" b="0" i="0">
                 <a:solidFill>
-                  <a:srgbClr val="8A8B86"/>
+                  <a:srgbClr val="5537D6"/>
                 </a:solidFill>
                 <a:latin typeface="Consolas"/>
                 <a:ea typeface="Consolas"/>
@@ -39873,227 +41810,13 @@
             <a:r>
               <a:rPr sz="2025" b="0" i="0">
                 <a:solidFill>
-                  <a:srgbClr val="8A8B86"/>
+                  <a:srgbClr val="5537D6"/>
                 </a:solidFill>
                 <a:latin typeface="Consolas"/>
                 <a:ea typeface="Consolas"/>
                 <a:cs typeface="Consolas"/>
               </a:rPr>
-              <a:t>93</a:t>
-            </a:r>
-          </a:p>
-          <a:p xmlns:a="http://schemas.openxmlformats.org/drawingml/2006/main">
-            <a:pPr algn="l">
-              <a:buNone/>
-              <a:defRPr sz="2025" b="0" i="0">
-                <a:solidFill>
-                  <a:srgbClr val="8A8B86"/>
-                </a:solidFill>
-                <a:latin typeface="Consolas"/>
-                <a:ea typeface="Consolas"/>
-                <a:cs typeface="Consolas"/>
-              </a:defRPr>
-            </a:pPr>
-            <a:r>
-              <a:rPr sz="2025" b="0" i="0">
-                <a:solidFill>
-                  <a:srgbClr val="8A8B86"/>
-                </a:solidFill>
-                <a:latin typeface="Consolas"/>
-                <a:ea typeface="Consolas"/>
-                <a:cs typeface="Consolas"/>
-              </a:rPr>
-              <a:t>87</a:t>
-            </a:r>
-          </a:p>
-          <a:p xmlns:a="http://schemas.openxmlformats.org/drawingml/2006/main">
-            <a:pPr algn="l">
-              <a:buNone/>
-              <a:defRPr sz="2025" b="0" i="0">
-                <a:solidFill>
-                  <a:srgbClr val="8A8B86"/>
-                </a:solidFill>
-                <a:latin typeface="Consolas"/>
-                <a:ea typeface="Consolas"/>
-                <a:cs typeface="Consolas"/>
-              </a:defRPr>
-            </a:pPr>
-            <a:r>
-              <a:rPr sz="2025" b="0" i="0">
-                <a:solidFill>
-                  <a:srgbClr val="8A8B86"/>
-                </a:solidFill>
-                <a:latin typeface="Consolas"/>
-                <a:ea typeface="Consolas"/>
-                <a:cs typeface="Consolas"/>
-              </a:rPr>
-              <a:t>78</a:t>
-            </a:r>
-          </a:p>
-        </p:txBody>
-      </p:sp>
-      <p:sp>
-        <p:nvSpPr>
-          <p:cNvPr id="23" name="">
-            <a:extLst xmlns:a="http://schemas.openxmlformats.org/drawingml/2006/main">
-              <a:ext uri="{FF2B5EF4-FFF2-40B4-BE49-F238E27FC236}">
-                <a16:creationId xmlns:a16="http://schemas.microsoft.com/office/drawing/2014/main" id="{E65A7922-47DA-4DE7-8D6D-2CCAD7253E25}"/>
-              </a:ext>
-            </a:extLst>
-          </p:cNvPr>
-          <p:cNvSpPr>
-            <a:spLocks xmlns:a="http://schemas.openxmlformats.org/drawingml/2006/main" noGrp="1"/>
-          </p:cNvSpPr>
-          <p:nvPr/>
-        </p:nvSpPr>
-        <p:spPr>
-          <a:xfrm xmlns:a="http://schemas.openxmlformats.org/drawingml/2006/main">
-            <a:off x="10477500" y="2286000"/>
-            <a:ext cx="990600" cy="209550"/>
-          </a:xfrm>
-          <a:prstGeom xmlns:a="http://schemas.openxmlformats.org/drawingml/2006/main" prst="rect">
-            <a:avLst/>
-          </a:prstGeom>
-          <a:noFill xmlns:a="http://schemas.openxmlformats.org/drawingml/2006/main"/>
-          <a:ln xmlns:a="http://schemas.openxmlformats.org/drawingml/2006/main" w="0">
-            <a:noFill/>
-            <a:prstDash val="solid"/>
-          </a:ln>
-        </p:spPr>
-        <p:txBody>
-          <a:bodyPr xmlns:a="http://schemas.openxmlformats.org/drawingml/2006/main" wrap="square" lIns="0" tIns="0" rIns="0" bIns="0" anchor="t">
-            <a:normAutofit fontScale="100000"/>
-          </a:bodyPr>
-          <a:lstStyle xmlns:a="http://schemas.openxmlformats.org/drawingml/2006/main"/>
-          <a:p xmlns:a="http://schemas.openxmlformats.org/drawingml/2006/main">
-            <a:pPr algn="l">
-              <a:buNone/>
-              <a:defRPr sz="975" b="1" i="0">
-                <a:solidFill>
-                  <a:srgbClr val="5537D6"/>
-                </a:solidFill>
-                <a:latin typeface="Consolas"/>
-                <a:ea typeface="Consolas"/>
-                <a:cs typeface="Consolas"/>
-              </a:defRPr>
-            </a:pPr>
-            <a:r>
-              <a:rPr sz="975" b="1" i="0">
-                <a:solidFill>
-                  <a:srgbClr val="5537D6"/>
-                </a:solidFill>
-                <a:latin typeface="Consolas"/>
-                <a:ea typeface="Consolas"/>
-                <a:cs typeface="Consolas"/>
-              </a:rPr>
-              <a:t>Recalculated</a:t>
-            </a:r>
-          </a:p>
-        </p:txBody>
-      </p:sp>
-      <p:sp>
-        <p:nvSpPr>
-          <p:cNvPr id="24" name="">
-            <a:extLst xmlns:a="http://schemas.openxmlformats.org/drawingml/2006/main">
-              <a:ext uri="{FF2B5EF4-FFF2-40B4-BE49-F238E27FC236}">
-                <a16:creationId xmlns:a16="http://schemas.microsoft.com/office/drawing/2014/main" id="{E23E8704-F307-4161-B225-F82479DE3E7C}"/>
-              </a:ext>
-            </a:extLst>
-          </p:cNvPr>
-          <p:cNvSpPr>
-            <a:spLocks xmlns:a="http://schemas.openxmlformats.org/drawingml/2006/main" noGrp="1"/>
-          </p:cNvSpPr>
-          <p:nvPr/>
-        </p:nvSpPr>
-        <p:spPr>
-          <a:xfrm xmlns:a="http://schemas.openxmlformats.org/drawingml/2006/main">
-            <a:off x="10477500" y="2609850"/>
-            <a:ext cx="990600" cy="1752600"/>
-          </a:xfrm>
-          <a:prstGeom xmlns:a="http://schemas.openxmlformats.org/drawingml/2006/main" prst="rect">
-            <a:avLst/>
-          </a:prstGeom>
-          <a:noFill xmlns:a="http://schemas.openxmlformats.org/drawingml/2006/main"/>
-          <a:ln xmlns:a="http://schemas.openxmlformats.org/drawingml/2006/main" w="0">
-            <a:noFill/>
-            <a:prstDash val="solid"/>
-          </a:ln>
-        </p:spPr>
-        <p:txBody>
-          <a:bodyPr xmlns:a="http://schemas.openxmlformats.org/drawingml/2006/main" wrap="square" lIns="0" tIns="0" rIns="0" bIns="0" anchor="t">
-            <a:normAutofit fontScale="100000"/>
-          </a:bodyPr>
-          <a:lstStyle xmlns:a="http://schemas.openxmlformats.org/drawingml/2006/main"/>
-          <a:p xmlns:a="http://schemas.openxmlformats.org/drawingml/2006/main">
-            <a:pPr algn="r">
-              <a:buNone/>
-              <a:defRPr sz="2025" b="0" i="0">
-                <a:solidFill>
-                  <a:srgbClr val="5537D6"/>
-                </a:solidFill>
-                <a:latin typeface="Consolas"/>
-                <a:ea typeface="Consolas"/>
-                <a:cs typeface="Consolas"/>
-              </a:defRPr>
-            </a:pPr>
-            <a:r>
-              <a:rPr sz="2025" b="0" i="0">
-                <a:solidFill>
-                  <a:srgbClr val="5537D6"/>
-                </a:solidFill>
-                <a:latin typeface="Consolas"/>
-                <a:ea typeface="Consolas"/>
-                <a:cs typeface="Consolas"/>
-              </a:rPr>
-              <a:t>93</a:t>
-            </a:r>
-          </a:p>
-          <a:p xmlns:a="http://schemas.openxmlformats.org/drawingml/2006/main">
-            <a:pPr algn="r">
-              <a:buNone/>
-              <a:defRPr sz="2025" b="0" i="0">
-                <a:solidFill>
-                  <a:srgbClr val="5537D6"/>
-                </a:solidFill>
-                <a:latin typeface="Consolas"/>
-                <a:ea typeface="Consolas"/>
-                <a:cs typeface="Consolas"/>
-              </a:defRPr>
-            </a:pPr>
-            <a:r>
-              <a:rPr sz="2025" b="0" i="0">
-                <a:solidFill>
-                  <a:srgbClr val="5537D6"/>
-                </a:solidFill>
-                <a:latin typeface="Consolas"/>
-                <a:ea typeface="Consolas"/>
-                <a:cs typeface="Consolas"/>
-              </a:rPr>
-              <a:t>85.5</a:t>
-            </a:r>
-          </a:p>
-          <a:p xmlns:a="http://schemas.openxmlformats.org/drawingml/2006/main">
-            <a:pPr algn="r">
-              <a:buNone/>
-              <a:defRPr sz="2025" b="0" i="0">
-                <a:solidFill>
-                  <a:srgbClr val="5537D6"/>
-                </a:solidFill>
-                <a:latin typeface="Consolas"/>
-                <a:ea typeface="Consolas"/>
-                <a:cs typeface="Consolas"/>
-              </a:defRPr>
-            </a:pPr>
-            <a:r>
-              <a:rPr sz="2025" b="0" i="0">
-                <a:solidFill>
-                  <a:srgbClr val="5537D6"/>
-                </a:solidFill>
-                <a:latin typeface="Consolas"/>
-                <a:ea typeface="Consolas"/>
-                <a:cs typeface="Consolas"/>
-              </a:rPr>
-              <a:t>77</a:t>
+              <a:t/>
             </a:r>
           </a:p>
         </p:txBody>
@@ -40159,7 +41882,7 @@
         </p:spPr>
         <p:txBody>
           <a:bodyPr xmlns:a="http://schemas.openxmlformats.org/drawingml/2006/main" wrap="square" lIns="0" tIns="0" rIns="0" bIns="0" anchor="t">
-            <a:normAutofit fontScale="100000"/>
+            <a:normAutofit fontScale="82306"/>
           </a:bodyPr>
           <a:lstStyle xmlns:a="http://schemas.openxmlformats.org/drawingml/2006/main"/>
           <a:p xmlns:a="http://schemas.openxmlformats.org/drawingml/2006/main">
@@ -40183,7 +41906,7 @@
                 <a:ea typeface="Georgia"/>
                 <a:cs typeface="Georgia"/>
               </a:rPr>
-              <a:t>Governed re-score pending</a:t>
+              <a:t>PROVISIONAL — NOT A DECISION SCORE</a:t>
             </a:r>
           </a:p>
         </p:txBody>
@@ -40242,7 +41965,367 @@
                 <a:ea typeface="Arial"/>
                 <a:cs typeface="Arial"/>
               </a:rPr>
-              <a:t>No new total until exact options · six dimensions · weights/ranges · rubric · evidence floor · scorers · sensitivity · dissent · approval</a:t>
+              <a:t>Ranges overlap · Apigee reverses Kong with +1.125 average GRS · 0% common evidence · HOLD</a:t>
+            </a:r>
+          </a:p>
+        </p:txBody>
+      </p:sp>
+      <p:sp>
+        <p:nvSpPr>
+          <p:cNvPr id="29" name="scenario-range-0">
+            <a:extLst xmlns:a="http://schemas.openxmlformats.org/drawingml/2006/main">
+              <a:ext uri="{FF2B5EF4-FFF2-40B4-BE49-F238E27FC236}">
+                <a16:creationId xmlns:a16="http://schemas.microsoft.com/office/drawing/2014/main" id="{88D2EC14-8E8C-4751-9FA8-F5207BD2FAE6}"/>
+              </a:ext>
+            </a:extLst>
+          </p:cNvPr>
+          <p:cNvSpPr>
+            <a:spLocks xmlns:a="http://schemas.openxmlformats.org/drawingml/2006/main" noGrp="1"/>
+          </p:cNvSpPr>
+          <p:nvPr/>
+        </p:nvSpPr>
+        <p:spPr>
+          <a:xfrm xmlns:a="http://schemas.openxmlformats.org/drawingml/2006/main">
+            <a:off x="9525000" y="2419350"/>
+            <a:ext cx="1257300" cy="457200"/>
+          </a:xfrm>
+          <a:prstGeom xmlns:a="http://schemas.openxmlformats.org/drawingml/2006/main" prst="rect">
+            <a:avLst/>
+          </a:prstGeom>
+          <a:noFill xmlns:a="http://schemas.openxmlformats.org/drawingml/2006/main"/>
+          <a:ln xmlns:a="http://schemas.openxmlformats.org/drawingml/2006/main" w="0">
+            <a:solidFill>
+              <a:srgbClr val="FFFCF5"/>
+            </a:solidFill>
+            <a:prstDash val="solid"/>
+          </a:ln>
+        </p:spPr>
+        <p:txBody>
+          <a:bodyPr xmlns:a="http://schemas.openxmlformats.org/drawingml/2006/main" lIns="0" tIns="0" rIns="0" bIns="0" anchor="ctr">
+            <a:normAutofit fontScale="100000"/>
+          </a:bodyPr>
+          <a:lstStyle xmlns:a="http://schemas.openxmlformats.org/drawingml/2006/main"/>
+          <a:p xmlns:a="http://schemas.openxmlformats.org/drawingml/2006/main">
+            <a:pPr algn="ctr">
+              <a:defRPr sz="1350">
+                <a:solidFill>
+                  <a:srgbClr val="93948F"/>
+                </a:solidFill>
+                <a:latin typeface="Arial"/>
+                <a:ea typeface="Arial"/>
+                <a:cs typeface="Arial"/>
+              </a:defRPr>
+            </a:pPr>
+            <a:r>
+              <a:rPr sz="1350">
+                <a:solidFill>
+                  <a:srgbClr val="93948F"/>
+                </a:solidFill>
+                <a:latin typeface="Arial"/>
+                <a:ea typeface="Arial"/>
+                <a:cs typeface="Arial"/>
+              </a:rPr>
+              <a:t>55.8–95.8</a:t>
+            </a:r>
+          </a:p>
+        </p:txBody>
+      </p:sp>
+      <p:sp>
+        <p:nvSpPr>
+          <p:cNvPr id="30" name="scenario-midpoint-0">
+            <a:extLst xmlns:a="http://schemas.openxmlformats.org/drawingml/2006/main">
+              <a:ext uri="{FF2B5EF4-FFF2-40B4-BE49-F238E27FC236}">
+                <a16:creationId xmlns:a16="http://schemas.microsoft.com/office/drawing/2014/main" id="{BE6CB745-921F-409F-98AE-B27050184E55}"/>
+              </a:ext>
+            </a:extLst>
+          </p:cNvPr>
+          <p:cNvSpPr>
+            <a:spLocks xmlns:a="http://schemas.openxmlformats.org/drawingml/2006/main" noGrp="1"/>
+          </p:cNvSpPr>
+          <p:nvPr/>
+        </p:nvSpPr>
+        <p:spPr>
+          <a:xfrm xmlns:a="http://schemas.openxmlformats.org/drawingml/2006/main">
+            <a:off x="10820400" y="2419350"/>
+            <a:ext cx="685800" cy="457200"/>
+          </a:xfrm>
+          <a:prstGeom xmlns:a="http://schemas.openxmlformats.org/drawingml/2006/main" prst="rect">
+            <a:avLst/>
+          </a:prstGeom>
+          <a:noFill xmlns:a="http://schemas.openxmlformats.org/drawingml/2006/main"/>
+          <a:ln xmlns:a="http://schemas.openxmlformats.org/drawingml/2006/main" w="0">
+            <a:solidFill>
+              <a:srgbClr val="FFFCF5"/>
+            </a:solidFill>
+            <a:prstDash val="solid"/>
+          </a:ln>
+        </p:spPr>
+        <p:txBody>
+          <a:bodyPr xmlns:a="http://schemas.openxmlformats.org/drawingml/2006/main" lIns="0" tIns="0" rIns="0" bIns="0" anchor="ctr">
+            <a:normAutofit fontScale="100000"/>
+          </a:bodyPr>
+          <a:lstStyle xmlns:a="http://schemas.openxmlformats.org/drawingml/2006/main"/>
+          <a:p xmlns:a="http://schemas.openxmlformats.org/drawingml/2006/main">
+            <a:pPr algn="r">
+              <a:defRPr sz="1800">
+                <a:solidFill>
+                  <a:srgbClr val="5537D6"/>
+                </a:solidFill>
+                <a:latin typeface="Arial"/>
+                <a:ea typeface="Arial"/>
+                <a:cs typeface="Arial"/>
+              </a:defRPr>
+            </a:pPr>
+            <a:r>
+              <a:rPr sz="1800">
+                <a:solidFill>
+                  <a:srgbClr val="5537D6"/>
+                </a:solidFill>
+                <a:latin typeface="Arial"/>
+                <a:ea typeface="Arial"/>
+                <a:cs typeface="Arial"/>
+              </a:rPr>
+              <a:t>75.8</a:t>
+            </a:r>
+          </a:p>
+        </p:txBody>
+      </p:sp>
+      <p:sp>
+        <p:nvSpPr>
+          <p:cNvPr id="31" name="scenario-range-1">
+            <a:extLst xmlns:a="http://schemas.openxmlformats.org/drawingml/2006/main">
+              <a:ext uri="{FF2B5EF4-FFF2-40B4-BE49-F238E27FC236}">
+                <a16:creationId xmlns:a16="http://schemas.microsoft.com/office/drawing/2014/main" id="{0BAD96F1-9E88-4126-BBF2-BA8B12883B75}"/>
+              </a:ext>
+            </a:extLst>
+          </p:cNvPr>
+          <p:cNvSpPr>
+            <a:spLocks xmlns:a="http://schemas.openxmlformats.org/drawingml/2006/main" noGrp="1"/>
+          </p:cNvSpPr>
+          <p:nvPr/>
+        </p:nvSpPr>
+        <p:spPr>
+          <a:xfrm xmlns:a="http://schemas.openxmlformats.org/drawingml/2006/main">
+            <a:off x="9525000" y="3419475"/>
+            <a:ext cx="1257300" cy="457200"/>
+          </a:xfrm>
+          <a:prstGeom xmlns:a="http://schemas.openxmlformats.org/drawingml/2006/main" prst="rect">
+            <a:avLst/>
+          </a:prstGeom>
+          <a:noFill xmlns:a="http://schemas.openxmlformats.org/drawingml/2006/main"/>
+          <a:ln xmlns:a="http://schemas.openxmlformats.org/drawingml/2006/main" w="0">
+            <a:solidFill>
+              <a:srgbClr val="FFFCF5"/>
+            </a:solidFill>
+            <a:prstDash val="solid"/>
+          </a:ln>
+        </p:spPr>
+        <p:txBody>
+          <a:bodyPr xmlns:a="http://schemas.openxmlformats.org/drawingml/2006/main" lIns="0" tIns="0" rIns="0" bIns="0" anchor="ctr">
+            <a:normAutofit fontScale="100000"/>
+          </a:bodyPr>
+          <a:lstStyle xmlns:a="http://schemas.openxmlformats.org/drawingml/2006/main"/>
+          <a:p xmlns:a="http://schemas.openxmlformats.org/drawingml/2006/main">
+            <a:pPr algn="ctr">
+              <a:defRPr sz="1350">
+                <a:solidFill>
+                  <a:srgbClr val="93948F"/>
+                </a:solidFill>
+                <a:latin typeface="Arial"/>
+                <a:ea typeface="Arial"/>
+                <a:cs typeface="Arial"/>
+              </a:defRPr>
+            </a:pPr>
+            <a:r>
+              <a:rPr sz="1350">
+                <a:solidFill>
+                  <a:srgbClr val="93948F"/>
+                </a:solidFill>
+                <a:latin typeface="Arial"/>
+                <a:ea typeface="Arial"/>
+                <a:cs typeface="Arial"/>
+              </a:rPr>
+              <a:t>51.3–91.3</a:t>
+            </a:r>
+          </a:p>
+        </p:txBody>
+      </p:sp>
+      <p:sp>
+        <p:nvSpPr>
+          <p:cNvPr id="32" name="scenario-midpoint-1">
+            <a:extLst xmlns:a="http://schemas.openxmlformats.org/drawingml/2006/main">
+              <a:ext uri="{FF2B5EF4-FFF2-40B4-BE49-F238E27FC236}">
+                <a16:creationId xmlns:a16="http://schemas.microsoft.com/office/drawing/2014/main" id="{DA786984-F74E-4414-AA0D-E5438B7E034F}"/>
+              </a:ext>
+            </a:extLst>
+          </p:cNvPr>
+          <p:cNvSpPr>
+            <a:spLocks xmlns:a="http://schemas.openxmlformats.org/drawingml/2006/main" noGrp="1"/>
+          </p:cNvSpPr>
+          <p:nvPr/>
+        </p:nvSpPr>
+        <p:spPr>
+          <a:xfrm xmlns:a="http://schemas.openxmlformats.org/drawingml/2006/main">
+            <a:off x="10820400" y="3419475"/>
+            <a:ext cx="685800" cy="457200"/>
+          </a:xfrm>
+          <a:prstGeom xmlns:a="http://schemas.openxmlformats.org/drawingml/2006/main" prst="rect">
+            <a:avLst/>
+          </a:prstGeom>
+          <a:noFill xmlns:a="http://schemas.openxmlformats.org/drawingml/2006/main"/>
+          <a:ln xmlns:a="http://schemas.openxmlformats.org/drawingml/2006/main" w="0">
+            <a:solidFill>
+              <a:srgbClr val="FFFCF5"/>
+            </a:solidFill>
+            <a:prstDash val="solid"/>
+          </a:ln>
+        </p:spPr>
+        <p:txBody>
+          <a:bodyPr xmlns:a="http://schemas.openxmlformats.org/drawingml/2006/main" lIns="0" tIns="0" rIns="0" bIns="0" anchor="ctr">
+            <a:normAutofit fontScale="100000"/>
+          </a:bodyPr>
+          <a:lstStyle xmlns:a="http://schemas.openxmlformats.org/drawingml/2006/main"/>
+          <a:p xmlns:a="http://schemas.openxmlformats.org/drawingml/2006/main">
+            <a:pPr algn="r">
+              <a:defRPr sz="1800">
+                <a:solidFill>
+                  <a:srgbClr val="5537D6"/>
+                </a:solidFill>
+                <a:latin typeface="Arial"/>
+                <a:ea typeface="Arial"/>
+                <a:cs typeface="Arial"/>
+              </a:defRPr>
+            </a:pPr>
+            <a:r>
+              <a:rPr sz="1800">
+                <a:solidFill>
+                  <a:srgbClr val="5537D6"/>
+                </a:solidFill>
+                <a:latin typeface="Arial"/>
+                <a:ea typeface="Arial"/>
+                <a:cs typeface="Arial"/>
+              </a:rPr>
+              <a:t>71.3</a:t>
+            </a:r>
+          </a:p>
+        </p:txBody>
+      </p:sp>
+      <p:sp>
+        <p:nvSpPr>
+          <p:cNvPr id="33" name="scenario-range-2">
+            <a:extLst xmlns:a="http://schemas.openxmlformats.org/drawingml/2006/main">
+              <a:ext uri="{FF2B5EF4-FFF2-40B4-BE49-F238E27FC236}">
+                <a16:creationId xmlns:a16="http://schemas.microsoft.com/office/drawing/2014/main" id="{C5F24B97-5C1F-4542-9381-71A1F0B14D5A}"/>
+              </a:ext>
+            </a:extLst>
+          </p:cNvPr>
+          <p:cNvSpPr>
+            <a:spLocks xmlns:a="http://schemas.openxmlformats.org/drawingml/2006/main" noGrp="1"/>
+          </p:cNvSpPr>
+          <p:nvPr/>
+        </p:nvSpPr>
+        <p:spPr>
+          <a:xfrm xmlns:a="http://schemas.openxmlformats.org/drawingml/2006/main">
+            <a:off x="9525000" y="4419600"/>
+            <a:ext cx="1257300" cy="457200"/>
+          </a:xfrm>
+          <a:prstGeom xmlns:a="http://schemas.openxmlformats.org/drawingml/2006/main" prst="rect">
+            <a:avLst/>
+          </a:prstGeom>
+          <a:noFill xmlns:a="http://schemas.openxmlformats.org/drawingml/2006/main"/>
+          <a:ln xmlns:a="http://schemas.openxmlformats.org/drawingml/2006/main" w="0">
+            <a:solidFill>
+              <a:srgbClr val="FFFCF5"/>
+            </a:solidFill>
+            <a:prstDash val="solid"/>
+          </a:ln>
+        </p:spPr>
+        <p:txBody>
+          <a:bodyPr xmlns:a="http://schemas.openxmlformats.org/drawingml/2006/main" lIns="0" tIns="0" rIns="0" bIns="0" anchor="ctr">
+            <a:normAutofit fontScale="100000"/>
+          </a:bodyPr>
+          <a:lstStyle xmlns:a="http://schemas.openxmlformats.org/drawingml/2006/main"/>
+          <a:p xmlns:a="http://schemas.openxmlformats.org/drawingml/2006/main">
+            <a:pPr algn="ctr">
+              <a:defRPr sz="1350">
+                <a:solidFill>
+                  <a:srgbClr val="93948F"/>
+                </a:solidFill>
+                <a:latin typeface="Arial"/>
+                <a:ea typeface="Arial"/>
+                <a:cs typeface="Arial"/>
+              </a:defRPr>
+            </a:pPr>
+            <a:r>
+              <a:rPr sz="1350">
+                <a:solidFill>
+                  <a:srgbClr val="93948F"/>
+                </a:solidFill>
+                <a:latin typeface="Arial"/>
+                <a:ea typeface="Arial"/>
+                <a:cs typeface="Arial"/>
+              </a:rPr>
+              <a:t>46.2–86.2</a:t>
+            </a:r>
+          </a:p>
+        </p:txBody>
+      </p:sp>
+      <p:sp>
+        <p:nvSpPr>
+          <p:cNvPr id="34" name="scenario-midpoint-2">
+            <a:extLst xmlns:a="http://schemas.openxmlformats.org/drawingml/2006/main">
+              <a:ext uri="{FF2B5EF4-FFF2-40B4-BE49-F238E27FC236}">
+                <a16:creationId xmlns:a16="http://schemas.microsoft.com/office/drawing/2014/main" id="{9136AE07-EE64-42D0-8DD3-8EAFC2A6A9C5}"/>
+              </a:ext>
+            </a:extLst>
+          </p:cNvPr>
+          <p:cNvSpPr>
+            <a:spLocks xmlns:a="http://schemas.openxmlformats.org/drawingml/2006/main" noGrp="1"/>
+          </p:cNvSpPr>
+          <p:nvPr/>
+        </p:nvSpPr>
+        <p:spPr>
+          <a:xfrm xmlns:a="http://schemas.openxmlformats.org/drawingml/2006/main">
+            <a:off x="10820400" y="4419600"/>
+            <a:ext cx="685800" cy="457200"/>
+          </a:xfrm>
+          <a:prstGeom xmlns:a="http://schemas.openxmlformats.org/drawingml/2006/main" prst="rect">
+            <a:avLst/>
+          </a:prstGeom>
+          <a:noFill xmlns:a="http://schemas.openxmlformats.org/drawingml/2006/main"/>
+          <a:ln xmlns:a="http://schemas.openxmlformats.org/drawingml/2006/main" w="0">
+            <a:solidFill>
+              <a:srgbClr val="FFFCF5"/>
+            </a:solidFill>
+            <a:prstDash val="solid"/>
+          </a:ln>
+        </p:spPr>
+        <p:txBody>
+          <a:bodyPr xmlns:a="http://schemas.openxmlformats.org/drawingml/2006/main" lIns="0" tIns="0" rIns="0" bIns="0" anchor="ctr">
+            <a:normAutofit fontScale="100000"/>
+          </a:bodyPr>
+          <a:lstStyle xmlns:a="http://schemas.openxmlformats.org/drawingml/2006/main"/>
+          <a:p xmlns:a="http://schemas.openxmlformats.org/drawingml/2006/main">
+            <a:pPr algn="r">
+              <a:defRPr sz="1800">
+                <a:solidFill>
+                  <a:srgbClr val="5537D6"/>
+                </a:solidFill>
+                <a:latin typeface="Arial"/>
+                <a:ea typeface="Arial"/>
+                <a:cs typeface="Arial"/>
+              </a:defRPr>
+            </a:pPr>
+            <a:r>
+              <a:rPr sz="1800">
+                <a:solidFill>
+                  <a:srgbClr val="5537D6"/>
+                </a:solidFill>
+                <a:latin typeface="Arial"/>
+                <a:ea typeface="Arial"/>
+                <a:cs typeface="Arial"/>
+              </a:rPr>
+              <a:t>66.2</a:t>
             </a:r>
           </a:p>
         </p:txBody>
@@ -40601,7 +42684,7 @@
                 <a:solidFill>
                   <a:srgbClr val="666762"/>
                 </a:solidFill>
-                <a:hlinkClick xmlns:r="http://schemas.openxmlformats.org/officeDocument/2006/relationships" r:id="R48c49c48f20c4a3a"/>
+                <a:hlinkClick xmlns:r="http://schemas.openxmlformats.org/officeDocument/2006/relationships" r:id="R08aba886a99c4ae0"/>
               </a:rPr>
               <a:t>Repo reference</a:t>
             </a:r>
@@ -40618,7 +42701,7 @@
                 <a:solidFill>
                   <a:srgbClr val="666762"/>
                 </a:solidFill>
-                <a:hlinkClick xmlns:r="http://schemas.openxmlformats.org/officeDocument/2006/relationships" r:id="R478c41f9df1e4257"/>
+                <a:hlinkClick xmlns:r="http://schemas.openxmlformats.org/officeDocument/2006/relationships" r:id="R9675c118e1234325"/>
               </a:rPr>
               <a:t>Official docs</a:t>
             </a:r>
@@ -41723,7 +43806,7 @@
                 <a:solidFill>
                   <a:srgbClr val="666762"/>
                 </a:solidFill>
-                <a:hlinkClick xmlns:r="http://schemas.openxmlformats.org/officeDocument/2006/relationships" r:id="Rfa7856dc91e14807"/>
+                <a:hlinkClick xmlns:r="http://schemas.openxmlformats.org/officeDocument/2006/relationships" r:id="Rff77b14c39de4286"/>
               </a:rPr>
               <a:t>Repo reference</a:t>
             </a:r>
@@ -41740,7 +43823,7 @@
                 <a:solidFill>
                   <a:srgbClr val="666762"/>
                 </a:solidFill>
-                <a:hlinkClick xmlns:r="http://schemas.openxmlformats.org/officeDocument/2006/relationships" r:id="Ra2f840fc46fd473b"/>
+                <a:hlinkClick xmlns:r="http://schemas.openxmlformats.org/officeDocument/2006/relationships" r:id="R6999cac732e947dd"/>
               </a:rPr>
               <a:t>Official docs</a:t>
             </a:r>
@@ -42975,7 +45058,7 @@
                 <a:solidFill>
                   <a:srgbClr val="666762"/>
                 </a:solidFill>
-                <a:hlinkClick xmlns:r="http://schemas.openxmlformats.org/officeDocument/2006/relationships" r:id="R4e67341ed29f4aae"/>
+                <a:hlinkClick xmlns:r="http://schemas.openxmlformats.org/officeDocument/2006/relationships" r:id="Ra6bb97bd5b5a4e05"/>
               </a:rPr>
               <a:t>Repo reference</a:t>
             </a:r>
@@ -42992,7 +45075,7 @@
                 <a:solidFill>
                   <a:srgbClr val="666762"/>
                 </a:solidFill>
-                <a:hlinkClick xmlns:r="http://schemas.openxmlformats.org/officeDocument/2006/relationships" r:id="R3c0d23fb5fb546f2"/>
+                <a:hlinkClick xmlns:r="http://schemas.openxmlformats.org/officeDocument/2006/relationships" r:id="R76cda340086e43c2"/>
               </a:rPr>
               <a:t>Official docs</a:t>
             </a:r>
@@ -44340,7 +46423,7 @@
                 <a:solidFill>
                   <a:srgbClr val="666762"/>
                 </a:solidFill>
-                <a:hlinkClick xmlns:r="http://schemas.openxmlformats.org/officeDocument/2006/relationships" r:id="R265fee4e8fb44b2e"/>
+                <a:hlinkClick xmlns:r="http://schemas.openxmlformats.org/officeDocument/2006/relationships" r:id="Rcf1ac1910d4d4bda"/>
               </a:rPr>
               <a:t>Repo reference</a:t>
             </a:r>
@@ -44357,7 +46440,7 @@
                 <a:solidFill>
                   <a:srgbClr val="666762"/>
                 </a:solidFill>
-                <a:hlinkClick xmlns:r="http://schemas.openxmlformats.org/officeDocument/2006/relationships" r:id="R7a167986bee34b7d"/>
+                <a:hlinkClick xmlns:r="http://schemas.openxmlformats.org/officeDocument/2006/relationships" r:id="Rf10bd3b7a4de426f"/>
               </a:rPr>
               <a:t>Official docs</a:t>
             </a:r>
@@ -44884,7 +46967,7 @@
       </p:sp>
       <p:cxnSp>
         <p:nvCxnSpPr>
-          <p:cNvPr id="570" name=""/>
+          <p:cNvPr id="660" name=""/>
           <p:cNvCxnSpPr>
             <a:stCxn xmlns:a="http://schemas.openxmlformats.org/drawingml/2006/main" id="16" idx="1"/>
             <a:endCxn xmlns:a="http://schemas.openxmlformats.org/drawingml/2006/main" id="10" idx="1"/>
@@ -44910,7 +46993,7 @@
       </p:cxnSp>
       <p:cxnSp>
         <p:nvCxnSpPr>
-          <p:cNvPr id="571" name=""/>
+          <p:cNvPr id="661" name=""/>
           <p:cNvCxnSpPr>
             <a:stCxn xmlns:a="http://schemas.openxmlformats.org/drawingml/2006/main" id="10" idx="2"/>
             <a:endCxn xmlns:a="http://schemas.openxmlformats.org/drawingml/2006/main" id="13" idx="0"/>
@@ -45454,7 +47537,7 @@
       </p:sp>
       <p:cxnSp>
         <p:nvCxnSpPr>
-          <p:cNvPr id="582" name=""/>
+          <p:cNvPr id="672" name=""/>
           <p:cNvCxnSpPr>
             <a:stCxn xmlns:a="http://schemas.openxmlformats.org/drawingml/2006/main" id="10" idx="3"/>
             <a:endCxn xmlns:a="http://schemas.openxmlformats.org/drawingml/2006/main" id="21" idx="1"/>
@@ -45482,7 +47565,7 @@
       </p:cxnSp>
       <p:cxnSp>
         <p:nvCxnSpPr>
-          <p:cNvPr id="583" name=""/>
+          <p:cNvPr id="673" name=""/>
           <p:cNvCxnSpPr>
             <a:stCxn xmlns:a="http://schemas.openxmlformats.org/drawingml/2006/main" id="10" idx="3"/>
             <a:endCxn xmlns:a="http://schemas.openxmlformats.org/drawingml/2006/main" id="24" idx="1"/>
@@ -45510,7 +47593,7 @@
       </p:cxnSp>
       <p:cxnSp>
         <p:nvCxnSpPr>
-          <p:cNvPr id="584" name=""/>
+          <p:cNvPr id="674" name=""/>
           <p:cNvCxnSpPr>
             <a:stCxn xmlns:a="http://schemas.openxmlformats.org/drawingml/2006/main" id="10" idx="3"/>
             <a:endCxn xmlns:a="http://schemas.openxmlformats.org/drawingml/2006/main" id="27" idx="1"/>
@@ -46056,7 +48139,7 @@
       </p:sp>
       <p:cxnSp>
         <p:nvCxnSpPr>
-          <p:cNvPr id="595" name=""/>
+          <p:cNvPr id="685" name=""/>
           <p:cNvCxnSpPr>
             <a:stCxn xmlns:a="http://schemas.openxmlformats.org/drawingml/2006/main" id="21" idx="3"/>
             <a:endCxn xmlns:a="http://schemas.openxmlformats.org/drawingml/2006/main" id="34" idx="1"/>
@@ -46082,7 +48165,7 @@
       </p:cxnSp>
       <p:cxnSp>
         <p:nvCxnSpPr>
-          <p:cNvPr id="596" name=""/>
+          <p:cNvPr id="686" name=""/>
           <p:cNvCxnSpPr>
             <a:stCxn xmlns:a="http://schemas.openxmlformats.org/drawingml/2006/main" id="24" idx="3"/>
             <a:endCxn xmlns:a="http://schemas.openxmlformats.org/drawingml/2006/main" id="37" idx="1"/>
@@ -46108,7 +48191,7 @@
       </p:cxnSp>
       <p:cxnSp>
         <p:nvCxnSpPr>
-          <p:cNvPr id="597" name=""/>
+          <p:cNvPr id="687" name=""/>
           <p:cNvCxnSpPr>
             <a:stCxn xmlns:a="http://schemas.openxmlformats.org/drawingml/2006/main" id="27" idx="3"/>
             <a:endCxn xmlns:a="http://schemas.openxmlformats.org/drawingml/2006/main" id="40" idx="1"/>

--- a/presentations/kong-platform-journey-guided.pptx
+++ b/presentations/kong-platform-journey-guided.pptx
@@ -2,37 +2,37 @@
 <file path=ppt/presentation.xml><?xml version="1.0" encoding="utf-8"?>
 <p:presentation xmlns:p="http://schemas.openxmlformats.org/presentationml/2006/main">
   <p:sldMasterIdLst>
-    <p:sldMasterId xmlns:r="http://schemas.openxmlformats.org/officeDocument/2006/relationships" id="2147483648" r:id="R84bd8bfb80ce41c6"/>
+    <p:sldMasterId xmlns:r="http://schemas.openxmlformats.org/officeDocument/2006/relationships" id="2147483648" r:id="R858e6dfbed724f2d"/>
   </p:sldMasterIdLst>
   <p:notesMasterIdLst>
-    <p:notesMasterId xmlns:r="http://schemas.openxmlformats.org/officeDocument/2006/relationships" r:id="R60283102e2d047ee"/>
+    <p:notesMasterId xmlns:r="http://schemas.openxmlformats.org/officeDocument/2006/relationships" r:id="R6ebd533a1bc84b62"/>
   </p:notesMasterIdLst>
   <p:sldIdLst>
-    <p:sldId xmlns:r="http://schemas.openxmlformats.org/officeDocument/2006/relationships" id="256" r:id="Rd42a571b14424c72"/>
-    <p:sldId xmlns:r="http://schemas.openxmlformats.org/officeDocument/2006/relationships" id="257" r:id="R19a300a9fbe24b86"/>
-    <p:sldId xmlns:r="http://schemas.openxmlformats.org/officeDocument/2006/relationships" id="258" r:id="Rabde214444b54797"/>
-    <p:sldId xmlns:r="http://schemas.openxmlformats.org/officeDocument/2006/relationships" id="259" r:id="R57a26c9028fa448a"/>
-    <p:sldId xmlns:r="http://schemas.openxmlformats.org/officeDocument/2006/relationships" id="260" r:id="R1317879f208a4b3b"/>
-    <p:sldId xmlns:r="http://schemas.openxmlformats.org/officeDocument/2006/relationships" id="261" r:id="R79138c3e38bc422a"/>
-    <p:sldId xmlns:r="http://schemas.openxmlformats.org/officeDocument/2006/relationships" id="262" r:id="R41593cd6e3d04e84"/>
-    <p:sldId xmlns:r="http://schemas.openxmlformats.org/officeDocument/2006/relationships" id="263" r:id="R81a6333097514565"/>
-    <p:sldId xmlns:r="http://schemas.openxmlformats.org/officeDocument/2006/relationships" id="264" r:id="R6f8dcffa866d4f22"/>
-    <p:sldId xmlns:r="http://schemas.openxmlformats.org/officeDocument/2006/relationships" id="265" r:id="R8eec536ec0904513"/>
-    <p:sldId xmlns:r="http://schemas.openxmlformats.org/officeDocument/2006/relationships" id="266" r:id="R6f48f3af41e34de5"/>
-    <p:sldId xmlns:r="http://schemas.openxmlformats.org/officeDocument/2006/relationships" id="267" r:id="R40dff38b55b54ad7"/>
-    <p:sldId xmlns:r="http://schemas.openxmlformats.org/officeDocument/2006/relationships" id="268" r:id="Ra77da39db7c84a62"/>
-    <p:sldId xmlns:r="http://schemas.openxmlformats.org/officeDocument/2006/relationships" id="269" r:id="R501cb0042d51415e"/>
-    <p:sldId xmlns:r="http://schemas.openxmlformats.org/officeDocument/2006/relationships" id="270" r:id="R8fbde56390094b37"/>
-    <p:sldId xmlns:r="http://schemas.openxmlformats.org/officeDocument/2006/relationships" id="271" r:id="R472b424db84a4225"/>
-    <p:sldId xmlns:r="http://schemas.openxmlformats.org/officeDocument/2006/relationships" id="272" r:id="Rfd44aacfc6fb4e0a"/>
-    <p:sldId xmlns:r="http://schemas.openxmlformats.org/officeDocument/2006/relationships" id="273" r:id="Rf6d6cd6f4eef4be7"/>
-    <p:sldId xmlns:r="http://schemas.openxmlformats.org/officeDocument/2006/relationships" id="274" r:id="R28d6cd492bb04341"/>
-    <p:sldId xmlns:r="http://schemas.openxmlformats.org/officeDocument/2006/relationships" id="275" r:id="R24987c21544b4bf3"/>
-    <p:sldId xmlns:r="http://schemas.openxmlformats.org/officeDocument/2006/relationships" id="276" r:id="R2a587f8db21643cc"/>
-    <p:sldId xmlns:r="http://schemas.openxmlformats.org/officeDocument/2006/relationships" id="277" r:id="R59b61c420c2d472f"/>
-    <p:sldId xmlns:r="http://schemas.openxmlformats.org/officeDocument/2006/relationships" id="278" r:id="R3883b960fe1b4c3a"/>
-    <p:sldId xmlns:r="http://schemas.openxmlformats.org/officeDocument/2006/relationships" id="279" r:id="R2c2455e77e5040c9"/>
-    <p:sldId xmlns:r="http://schemas.openxmlformats.org/officeDocument/2006/relationships" id="280" r:id="R55a8954c0d234313"/>
+    <p:sldId xmlns:r="http://schemas.openxmlformats.org/officeDocument/2006/relationships" id="256" r:id="Rb0eb92a06863413a"/>
+    <p:sldId xmlns:r="http://schemas.openxmlformats.org/officeDocument/2006/relationships" id="257" r:id="Rb77e59cf60fb4e8e"/>
+    <p:sldId xmlns:r="http://schemas.openxmlformats.org/officeDocument/2006/relationships" id="258" r:id="R1a8896d48690466d"/>
+    <p:sldId xmlns:r="http://schemas.openxmlformats.org/officeDocument/2006/relationships" id="259" r:id="Rf7b18928cdd34a4e"/>
+    <p:sldId xmlns:r="http://schemas.openxmlformats.org/officeDocument/2006/relationships" id="260" r:id="Rc3b1aed683b44c5f"/>
+    <p:sldId xmlns:r="http://schemas.openxmlformats.org/officeDocument/2006/relationships" id="261" r:id="Rade92c5fd39f49a6"/>
+    <p:sldId xmlns:r="http://schemas.openxmlformats.org/officeDocument/2006/relationships" id="262" r:id="R50e39946c8984dd8"/>
+    <p:sldId xmlns:r="http://schemas.openxmlformats.org/officeDocument/2006/relationships" id="263" r:id="Rfee8a6e1826a4f43"/>
+    <p:sldId xmlns:r="http://schemas.openxmlformats.org/officeDocument/2006/relationships" id="264" r:id="R95b9c7660ea34222"/>
+    <p:sldId xmlns:r="http://schemas.openxmlformats.org/officeDocument/2006/relationships" id="265" r:id="R57d9d1252a2d4202"/>
+    <p:sldId xmlns:r="http://schemas.openxmlformats.org/officeDocument/2006/relationships" id="266" r:id="R1c80494bf943417a"/>
+    <p:sldId xmlns:r="http://schemas.openxmlformats.org/officeDocument/2006/relationships" id="267" r:id="Rb5e52b2f91114aa7"/>
+    <p:sldId xmlns:r="http://schemas.openxmlformats.org/officeDocument/2006/relationships" id="268" r:id="R83f4d493a2ad4cc5"/>
+    <p:sldId xmlns:r="http://schemas.openxmlformats.org/officeDocument/2006/relationships" id="269" r:id="R9723c12797124bde"/>
+    <p:sldId xmlns:r="http://schemas.openxmlformats.org/officeDocument/2006/relationships" id="270" r:id="Rf07de05b1f544b20"/>
+    <p:sldId xmlns:r="http://schemas.openxmlformats.org/officeDocument/2006/relationships" id="271" r:id="R9b18ed3f1ebd4603"/>
+    <p:sldId xmlns:r="http://schemas.openxmlformats.org/officeDocument/2006/relationships" id="272" r:id="R9b33be129d6d4553"/>
+    <p:sldId xmlns:r="http://schemas.openxmlformats.org/officeDocument/2006/relationships" id="273" r:id="Rd6962affd3984adb"/>
+    <p:sldId xmlns:r="http://schemas.openxmlformats.org/officeDocument/2006/relationships" id="274" r:id="R6b82b7cf8bd24b94"/>
+    <p:sldId xmlns:r="http://schemas.openxmlformats.org/officeDocument/2006/relationships" id="275" r:id="Rb8316db721a64c19"/>
+    <p:sldId xmlns:r="http://schemas.openxmlformats.org/officeDocument/2006/relationships" id="276" r:id="R8a77bd9920754903"/>
+    <p:sldId xmlns:r="http://schemas.openxmlformats.org/officeDocument/2006/relationships" id="277" r:id="R5f6ecff89d814063"/>
+    <p:sldId xmlns:r="http://schemas.openxmlformats.org/officeDocument/2006/relationships" id="278" r:id="R8a70c5799b4b440b"/>
+    <p:sldId xmlns:r="http://schemas.openxmlformats.org/officeDocument/2006/relationships" id="279" r:id="R01b597cb402d4a84"/>
+    <p:sldId xmlns:r="http://schemas.openxmlformats.org/officeDocument/2006/relationships" id="280" r:id="R74d4b5b7e68144d2"/>
   </p:sldIdLst>
   <p:sldSz cx="12192000" cy="6858000"/>
   <p:notesSz cx="6858000" cy="9144000"/>
@@ -486,7 +486,7 @@
           </a:p>
           <a:p xmlns:a="http://schemas.openxmlformats.org/drawingml/2006/main">
             <a:r>
-              <a:t>We start from the stated target operating model, explain why Kong leads under that model, and then make the ownership, migration, evidence and exit gates explicit.</a:t>
+              <a:t>We start from the stated target operating model, disposition four early gates for multicloud, clean exit/vendor dependency, fully allocated TCO, and the optional Kong-plus-Traceable solution profile, and then make the ownership, migration, execution evidence and production gates explicit.</a:t>
             </a:r>
           </a:p>
           <a:p xmlns:a="http://schemas.openxmlformats.org/drawingml/2006/main">
@@ -501,7 +501,7 @@
           </a:p>
           <a:p xmlns:a="http://schemas.openxmlformats.org/drawingml/2006/main">
             <a:r>
-              <a:t>Align on the decision question: approve a bounded Kong direction and proof programme—not critical production scale.</a:t>
+              <a:t>Align on the decision question: disposition the early gates, then approve a bounded Kong direction and proof programme—not critical production scale.</a:t>
             </a:r>
           </a:p>
           <a:p xmlns:a="http://schemas.openxmlformats.org/drawingml/2006/main">
@@ -516,7 +516,7 @@
           </a:p>
           <a:p xmlns:a="http://schemas.openxmlformats.org/drawingml/2006/main">
             <a:r>
-              <a:t>First, make the target operating model visible because it drives the scoring and the platform fit.</a:t>
+              <a:t>First, make the target operating model and the four early assessment gates visible because they drive scope, evidence requests, scoring governance, and platform fit.</a:t>
             </a:r>
           </a:p>
           <a:p xmlns:a="http://schemas.openxmlformats.org/drawingml/2006/main">
@@ -531,7 +531,7 @@
           </a:p>
           <a:p xmlns:a="http://schemas.openxmlformats.org/drawingml/2006/main">
             <a:r>
-              <a:t>The supplied Word document is stakeholder input. Its ratings and recommendation are not independent comparative proof.</a:t>
+              <a:t>The sanitized supplied evaluation is stakeholder input. Its ratings and recommendation are not independent comparative proof.</a:t>
             </a:r>
           </a:p>
           <a:p xmlns:a="http://schemas.openxmlformats.org/drawingml/2006/main">
@@ -546,17 +546,47 @@
           </a:p>
           <a:p xmlns:a="http://schemas.openxmlformats.org/drawingml/2006/main">
             <a:r>
-              <a:t>- docs/48-kong-guided-evaluation.md</a:t>
-            </a:r>
-          </a:p>
-          <a:p xmlns:a="http://schemas.openxmlformats.org/drawingml/2006/main">
-            <a:r>
-              <a:t>- docs/47-kong-enterprise-platform-strategy.md</a:t>
-            </a:r>
-          </a:p>
-          <a:p xmlns:a="http://schemas.openxmlformats.org/drawingml/2006/main">
-            <a:r>
-              <a:t>- docs/35-mule-migration-strategy.md</a:t>
+              <a:t>- 48-kong-guided-evaluation.md</a:t>
+            </a:r>
+          </a:p>
+          <a:p xmlns:a="http://schemas.openxmlformats.org/drawingml/2006/main">
+            <a:r>
+              <a:t>- 48-kong-guided-evaluation.md#four-early-assessment-gates</a:t>
+            </a:r>
+          </a:p>
+          <a:p xmlns:a="http://schemas.openxmlformats.org/drawingml/2006/main">
+            <a:r>
+              <a:t>- 47-kong-enterprise-platform-strategy.md</a:t>
+            </a:r>
+          </a:p>
+          <a:p xmlns:a="http://schemas.openxmlformats.org/drawingml/2006/main">
+            <a:r>
+              <a:t>- 35-mule-migration-strategy.md</a:t>
+            </a:r>
+          </a:p>
+          <a:p xmlns:a="http://schemas.openxmlformats.org/drawingml/2006/main">
+            <a:r>
+              <a:t>- https://developer.konghq.com/gateway/deployment-topologies/</a:t>
+            </a:r>
+          </a:p>
+          <a:p xmlns:a="http://schemas.openxmlformats.org/drawingml/2006/main">
+            <a:r>
+              <a:t>- https://developer.konghq.com/gateway/hybrid-mode/</a:t>
+            </a:r>
+          </a:p>
+          <a:p xmlns:a="http://schemas.openxmlformats.org/drawingml/2006/main">
+            <a:r>
+              <a:t>- https://docs.traceable.ai/kong</a:t>
+            </a:r>
+          </a:p>
+          <a:p xmlns:a="http://schemas.openxmlformats.org/drawingml/2006/main">
+            <a:r>
+              <a:t>- https://developer.konghq.com/plugins/harness-waap/</a:t>
+            </a:r>
+          </a:p>
+          <a:p xmlns:a="http://schemas.openxmlformats.org/drawingml/2006/main">
+            <a:r>
+              <a:t>- https://konghq.com/pricing</a:t>
             </a:r>
           </a:p>
         </p:txBody>
@@ -706,12 +736,22 @@
           </a:p>
           <a:p xmlns:a="http://schemas.openxmlformats.org/drawingml/2006/main">
             <a:r>
+              <a:t>- 47-kong-enterprise-platform-strategy.md</a:t>
+            </a:r>
+          </a:p>
+          <a:p xmlns:a="http://schemas.openxmlformats.org/drawingml/2006/main">
+            <a:r>
+              <a:t>- 48-kong-guided-evaluation.md</a:t>
+            </a:r>
+          </a:p>
+          <a:p xmlns:a="http://schemas.openxmlformats.org/drawingml/2006/main">
+            <a:r>
               <a:t>- https://developer.konghq.com/gateway/hybrid-mode/</a:t>
             </a:r>
           </a:p>
           <a:p xmlns:a="http://schemas.openxmlformats.org/drawingml/2006/main">
             <a:r>
-              <a:t>- docs/47-kong-enterprise-platform-strategy.md</a:t>
+              <a:t>- https://developer.konghq.com/gateway/monitoring/</a:t>
             </a:r>
           </a:p>
         </p:txBody>
@@ -861,7 +901,22 @@
           </a:p>
           <a:p xmlns:a="http://schemas.openxmlformats.org/drawingml/2006/main">
             <a:r>
-              <a:t>- docs/47-kong-enterprise-platform-strategy.md</a:t>
+              <a:t>- 47-kong-enterprise-platform-strategy.md</a:t>
+            </a:r>
+          </a:p>
+          <a:p xmlns:a="http://schemas.openxmlformats.org/drawingml/2006/main">
+            <a:r>
+              <a:t>- 48-kong-guided-evaluation.md</a:t>
+            </a:r>
+          </a:p>
+          <a:p xmlns:a="http://schemas.openxmlformats.org/drawingml/2006/main">
+            <a:r>
+              <a:t>- https://developer.konghq.com/gateway/hybrid-mode/</a:t>
+            </a:r>
+          </a:p>
+          <a:p xmlns:a="http://schemas.openxmlformats.org/drawingml/2006/main">
+            <a:r>
+              <a:t>- https://developer.konghq.com/gateway/monitoring/</a:t>
             </a:r>
           </a:p>
         </p:txBody>
@@ -1011,7 +1066,22 @@
           </a:p>
           <a:p xmlns:a="http://schemas.openxmlformats.org/drawingml/2006/main">
             <a:r>
-              <a:t>- docs/47-kong-enterprise-platform-strategy.md</a:t>
+              <a:t>- 47-kong-enterprise-platform-strategy.md</a:t>
+            </a:r>
+          </a:p>
+          <a:p xmlns:a="http://schemas.openxmlformats.org/drawingml/2006/main">
+            <a:r>
+              <a:t>- 48-kong-guided-evaluation.md</a:t>
+            </a:r>
+          </a:p>
+          <a:p xmlns:a="http://schemas.openxmlformats.org/drawingml/2006/main">
+            <a:r>
+              <a:t>- https://developer.konghq.com/gateway/hybrid-mode/</a:t>
+            </a:r>
+          </a:p>
+          <a:p xmlns:a="http://schemas.openxmlformats.org/drawingml/2006/main">
+            <a:r>
+              <a:t>- https://developer.konghq.com/gateway/monitoring/</a:t>
             </a:r>
           </a:p>
         </p:txBody>
@@ -1161,7 +1231,22 @@
           </a:p>
           <a:p xmlns:a="http://schemas.openxmlformats.org/drawingml/2006/main">
             <a:r>
-              <a:t>- docs/47-kong-enterprise-platform-strategy.md</a:t>
+              <a:t>- 47-kong-enterprise-platform-strategy.md</a:t>
+            </a:r>
+          </a:p>
+          <a:p xmlns:a="http://schemas.openxmlformats.org/drawingml/2006/main">
+            <a:r>
+              <a:t>- 48-kong-guided-evaluation.md</a:t>
+            </a:r>
+          </a:p>
+          <a:p xmlns:a="http://schemas.openxmlformats.org/drawingml/2006/main">
+            <a:r>
+              <a:t>- https://developer.konghq.com/gateway/hybrid-mode/</a:t>
+            </a:r>
+          </a:p>
+          <a:p xmlns:a="http://schemas.openxmlformats.org/drawingml/2006/main">
+            <a:r>
+              <a:t>- https://developer.konghq.com/gateway/monitoring/</a:t>
             </a:r>
           </a:p>
         </p:txBody>
@@ -1311,7 +1396,47 @@
           </a:p>
           <a:p xmlns:a="http://schemas.openxmlformats.org/drawingml/2006/main">
             <a:r>
-              <a:t>- docs/35-mule-migration-strategy.md</a:t>
+              <a:t>- 35-mule-migration-strategy.md</a:t>
+            </a:r>
+          </a:p>
+          <a:p xmlns:a="http://schemas.openxmlformats.org/drawingml/2006/main">
+            <a:r>
+              <a:t>- ../research/glossary.md#kong-terminology-crosswalk</a:t>
+            </a:r>
+          </a:p>
+          <a:p xmlns:a="http://schemas.openxmlformats.org/drawingml/2006/main">
+            <a:r>
+              <a:t>- 48-kong-guided-evaluation.md</a:t>
+            </a:r>
+          </a:p>
+          <a:p xmlns:a="http://schemas.openxmlformats.org/drawingml/2006/main">
+            <a:r>
+              <a:t>- https://docs.mulesoft.com/gateway/latest/</a:t>
+            </a:r>
+          </a:p>
+          <a:p xmlns:a="http://schemas.openxmlformats.org/drawingml/2006/main">
+            <a:r>
+              <a:t>- https://developer.konghq.com/gateway/entities/</a:t>
+            </a:r>
+          </a:p>
+          <a:p xmlns:a="http://schemas.openxmlformats.org/drawingml/2006/main">
+            <a:r>
+              <a:t>- https://developer.konghq.com/gateway/entities/plugin/</a:t>
+            </a:r>
+          </a:p>
+          <a:p xmlns:a="http://schemas.openxmlformats.org/drawingml/2006/main">
+            <a:r>
+              <a:t>- https://developer.konghq.com/gateway/deployment-topologies/</a:t>
+            </a:r>
+          </a:p>
+          <a:p xmlns:a="http://schemas.openxmlformats.org/drawingml/2006/main">
+            <a:r>
+              <a:t>- https://docs.cloud.google.com/apigee/docs/api-platform/fundamentals/download-api-proxies</a:t>
+            </a:r>
+          </a:p>
+          <a:p xmlns:a="http://schemas.openxmlformats.org/drawingml/2006/main">
+            <a:r>
+              <a:t>- https://docs.cloud.google.com/apigee/docs/api-platform/reference/api-proxy-configuration-reference</a:t>
             </a:r>
           </a:p>
         </p:txBody>
@@ -1461,7 +1586,42 @@
           </a:p>
           <a:p xmlns:a="http://schemas.openxmlformats.org/drawingml/2006/main">
             <a:r>
-              <a:t>- docs/35-mule-migration-strategy.md</a:t>
+              <a:t>- 35-mule-migration-strategy.md</a:t>
+            </a:r>
+          </a:p>
+          <a:p xmlns:a="http://schemas.openxmlformats.org/drawingml/2006/main">
+            <a:r>
+              <a:t>- 48-kong-guided-evaluation.md</a:t>
+            </a:r>
+          </a:p>
+          <a:p xmlns:a="http://schemas.openxmlformats.org/drawingml/2006/main">
+            <a:r>
+              <a:t>- https://docs.mulesoft.com/gateway/latest/</a:t>
+            </a:r>
+          </a:p>
+          <a:p xmlns:a="http://schemas.openxmlformats.org/drawingml/2006/main">
+            <a:r>
+              <a:t>- https://developer.konghq.com/gateway/entities/</a:t>
+            </a:r>
+          </a:p>
+          <a:p xmlns:a="http://schemas.openxmlformats.org/drawingml/2006/main">
+            <a:r>
+              <a:t>- https://developer.konghq.com/gateway/entities/plugin/</a:t>
+            </a:r>
+          </a:p>
+          <a:p xmlns:a="http://schemas.openxmlformats.org/drawingml/2006/main">
+            <a:r>
+              <a:t>- https://developer.konghq.com/gateway/deployment-topologies/</a:t>
+            </a:r>
+          </a:p>
+          <a:p xmlns:a="http://schemas.openxmlformats.org/drawingml/2006/main">
+            <a:r>
+              <a:t>- https://docs.cloud.google.com/apigee/docs/api-platform/fundamentals/download-api-proxies</a:t>
+            </a:r>
+          </a:p>
+          <a:p xmlns:a="http://schemas.openxmlformats.org/drawingml/2006/main">
+            <a:r>
+              <a:t>- https://docs.cloud.google.com/apigee/docs/api-platform/reference/api-proxy-configuration-reference</a:t>
             </a:r>
           </a:p>
         </p:txBody>
@@ -1806,12 +1966,27 @@
           </a:p>
           <a:p xmlns:a="http://schemas.openxmlformats.org/drawingml/2006/main">
             <a:r>
-              <a:t>- poc/README.md</a:t>
-            </a:r>
-          </a:p>
-          <a:p xmlns:a="http://schemas.openxmlformats.org/drawingml/2006/main">
-            <a:r>
-              <a:t>- docs/47-kong-enterprise-platform-strategy.md</a:t>
+              <a:t>- ../poc/README.md</a:t>
+            </a:r>
+          </a:p>
+          <a:p xmlns:a="http://schemas.openxmlformats.org/drawingml/2006/main">
+            <a:r>
+              <a:t>- 48-kong-guided-evaluation.md</a:t>
+            </a:r>
+          </a:p>
+          <a:p xmlns:a="http://schemas.openxmlformats.org/drawingml/2006/main">
+            <a:r>
+              <a:t>- 47-kong-enterprise-platform-strategy.md</a:t>
+            </a:r>
+          </a:p>
+          <a:p xmlns:a="http://schemas.openxmlformats.org/drawingml/2006/main">
+            <a:r>
+              <a:t>- https://developer.konghq.com/gateway/hybrid-mode/</a:t>
+            </a:r>
+          </a:p>
+          <a:p xmlns:a="http://schemas.openxmlformats.org/drawingml/2006/main">
+            <a:r>
+              <a:t>- https://developer.konghq.com/gateway/monitoring/</a:t>
             </a:r>
           </a:p>
         </p:txBody>
@@ -1991,7 +2166,7 @@
           </a:p>
           <a:p xmlns:a="http://schemas.openxmlformats.org/drawingml/2006/main">
             <a:r>
-              <a:t>- https://docs.traceable.ai/docs/kong</a:t>
+              <a:t>- https://docs.traceable.ai/kong</a:t>
             </a:r>
           </a:p>
           <a:p xmlns:a="http://schemas.openxmlformats.org/drawingml/2006/main">
@@ -2146,7 +2321,27 @@
           </a:p>
           <a:p xmlns:a="http://schemas.openxmlformats.org/drawingml/2006/main">
             <a:r>
-              <a:t>- docs/47-kong-enterprise-platform-strategy.md</a:t>
+              <a:t>- 47-kong-enterprise-platform-strategy.md</a:t>
+            </a:r>
+          </a:p>
+          <a:p xmlns:a="http://schemas.openxmlformats.org/drawingml/2006/main">
+            <a:r>
+              <a:t>- 48-kong-guided-evaluation.md</a:t>
+            </a:r>
+          </a:p>
+          <a:p xmlns:a="http://schemas.openxmlformats.org/drawingml/2006/main">
+            <a:r>
+              <a:t>- https://developer.konghq.com/gateway/hybrid-mode/</a:t>
+            </a:r>
+          </a:p>
+          <a:p xmlns:a="http://schemas.openxmlformats.org/drawingml/2006/main">
+            <a:r>
+              <a:t>- https://developer.konghq.com/gateway/monitoring/</a:t>
+            </a:r>
+          </a:p>
+          <a:p xmlns:a="http://schemas.openxmlformats.org/drawingml/2006/main">
+            <a:r>
+              <a:t>- https://developer.konghq.com/ai-gateway/</a:t>
             </a:r>
           </a:p>
         </p:txBody>
@@ -2221,7 +2416,7 @@
           </a:p>
           <a:p xmlns:a="http://schemas.openxmlformats.org/drawingml/2006/main">
             <a:r>
-              <a:t>Explain why the same product can be a good or poor choice depending on the target operating model.</a:t>
+              <a:t>Explain why the same product can be a good or poor choice depending on the target operating model, and force four material concerns into the assessment before bounded authorization.</a:t>
             </a:r>
           </a:p>
           <a:p xmlns:a="http://schemas.openxmlformats.org/drawingml/2006/main">
@@ -2236,7 +2431,7 @@
           </a:p>
           <a:p xmlns:a="http://schemas.openxmlformats.org/drawingml/2006/main">
             <a:r>
-              <a:t>The supplied assessment favors Kubernetes, GitOps, platform engineering, self-service, observability and emerging AI traffic governance. Those priorities explain why Kong scores well. They should be confirmed with accountable owners.</a:t>
+              <a:t>The supplied assessment favors Kubernetes, GitOps, platform engineering, self-service, observability, multicloud placement and emerging AI traffic governance. Those priorities explain why Kong scores well, but they must be confirmed with accountable owners. Before the room interprets scores or funds a proof programme, it must also disposition four early gates: `EAG-01` multicloud operating fit, `EAG-02` reversibility and vendor dependency, `EAG-03` cost efficiency and fully allocated TCO, and `EAG-04` admission of the optional `KP-SMH1 + GSA-01` Kong-plus-Traceable solution profile.</a:t>
             </a:r>
           </a:p>
           <a:p xmlns:a="http://schemas.openxmlformats.org/drawingml/2006/main">
@@ -2251,7 +2446,7 @@
           </a:p>
           <a:p xmlns:a="http://schemas.openxmlformats.org/drawingml/2006/main">
             <a:r>
-              <a:t>Confirm or amend these target-state assumptions before using them as decision weights.</a:t>
+              <a:t>Confirm or amend the nine target-state inputs. Then confirm, amend, reject, or leave explicitly unknown each early gate, with a public role owner, evidence request, due gate, and hold condition.</a:t>
             </a:r>
           </a:p>
           <a:p xmlns:a="http://schemas.openxmlformats.org/drawingml/2006/main">
@@ -2266,7 +2461,7 @@
           </a:p>
           <a:p xmlns:a="http://schemas.openxmlformats.org/drawingml/2006/main">
             <a:r>
-              <a:t>The next slide shows how those priorities were encoded in the supplied scorecard.</a:t>
+              <a:t>The next slide shows how the priorities were encoded in the supplied scorecard, where the added dimensions remain unknown and Traceable stays outside the platform score.</a:t>
             </a:r>
           </a:p>
           <a:p xmlns:a="http://schemas.openxmlformats.org/drawingml/2006/main">
@@ -2281,7 +2476,7 @@
           </a:p>
           <a:p xmlns:a="http://schemas.openxmlformats.org/drawingml/2006/main">
             <a:r>
-              <a:t>These are stakeholder-stated objectives; the document does not provide a verified workload inventory or current-state baseline.</a:t>
+              <a:t>These are stakeholder-stated objectives and early scope dispositions; the document does not provide a verified workload inventory, multicloud outcome, clean exit, normalized TCO, or executed Kong-plus-Traceable result. Early disposition creates a proof obligation, not evidence that the gate passed.</a:t>
             </a:r>
           </a:p>
           <a:p xmlns:a="http://schemas.openxmlformats.org/drawingml/2006/main">
@@ -2296,7 +2491,37 @@
           </a:p>
           <a:p xmlns:a="http://schemas.openxmlformats.org/drawingml/2006/main">
             <a:r>
-              <a:t>- docs/48-kong-guided-evaluation.md#stated-target-operating-model</a:t>
+              <a:t>- 48-kong-guided-evaluation.md#stated-target-operating-model</a:t>
+            </a:r>
+          </a:p>
+          <a:p xmlns:a="http://schemas.openxmlformats.org/drawingml/2006/main">
+            <a:r>
+              <a:t>- 48-kong-guided-evaluation.md#four-early-assessment-gates</a:t>
+            </a:r>
+          </a:p>
+          <a:p xmlns:a="http://schemas.openxmlformats.org/drawingml/2006/main">
+            <a:r>
+              <a:t>- https://developer.konghq.com/gateway/deployment-topologies/</a:t>
+            </a:r>
+          </a:p>
+          <a:p xmlns:a="http://schemas.openxmlformats.org/drawingml/2006/main">
+            <a:r>
+              <a:t>- https://developer.konghq.com/gateway/hybrid-mode/</a:t>
+            </a:r>
+          </a:p>
+          <a:p xmlns:a="http://schemas.openxmlformats.org/drawingml/2006/main">
+            <a:r>
+              <a:t>- https://docs.traceable.ai/kong</a:t>
+            </a:r>
+          </a:p>
+          <a:p xmlns:a="http://schemas.openxmlformats.org/drawingml/2006/main">
+            <a:r>
+              <a:t>- https://developer.konghq.com/plugins/harness-waap/</a:t>
+            </a:r>
+          </a:p>
+          <a:p xmlns:a="http://schemas.openxmlformats.org/drawingml/2006/main">
+            <a:r>
+              <a:t>- https://konghq.com/pricing</a:t>
             </a:r>
           </a:p>
         </p:txBody>
@@ -2471,7 +2696,12 @@
           </a:p>
           <a:p xmlns:a="http://schemas.openxmlformats.org/drawingml/2006/main">
             <a:r>
-              <a:t>- https://docs.traceable.ai/docs/kong</a:t>
+              <a:t>- https://developer.konghq.com/ai-gateway/</a:t>
+            </a:r>
+          </a:p>
+          <a:p xmlns:a="http://schemas.openxmlformats.org/drawingml/2006/main">
+            <a:r>
+              <a:t>- https://docs.traceable.ai/kong</a:t>
             </a:r>
           </a:p>
           <a:p xmlns:a="http://schemas.openxmlformats.org/drawingml/2006/main">
@@ -2626,7 +2856,27 @@
           </a:p>
           <a:p xmlns:a="http://schemas.openxmlformats.org/drawingml/2006/main">
             <a:r>
-              <a:t>- docs/47-kong-enterprise-platform-strategy.md</a:t>
+              <a:t>- 47-kong-enterprise-platform-strategy.md</a:t>
+            </a:r>
+          </a:p>
+          <a:p xmlns:a="http://schemas.openxmlformats.org/drawingml/2006/main">
+            <a:r>
+              <a:t>- 48-kong-guided-evaluation.md</a:t>
+            </a:r>
+          </a:p>
+          <a:p xmlns:a="http://schemas.openxmlformats.org/drawingml/2006/main">
+            <a:r>
+              <a:t>- https://developer.konghq.com/gateway/hybrid-mode/</a:t>
+            </a:r>
+          </a:p>
+          <a:p xmlns:a="http://schemas.openxmlformats.org/drawingml/2006/main">
+            <a:r>
+              <a:t>- https://developer.konghq.com/gateway/monitoring/</a:t>
+            </a:r>
+          </a:p>
+          <a:p xmlns:a="http://schemas.openxmlformats.org/drawingml/2006/main">
+            <a:r>
+              <a:t>- https://developer.konghq.com/ai-gateway/</a:t>
             </a:r>
           </a:p>
         </p:txBody>
@@ -2986,7 +3236,7 @@
           </a:p>
           <a:p xmlns:a="http://schemas.openxmlformats.org/drawingml/2006/main">
             <a:r>
-              <a:t>- https://docs.traceable.ai/docs/kong</a:t>
+              <a:t>- https://docs.traceable.ai/kong</a:t>
             </a:r>
           </a:p>
           <a:p xmlns:a="http://schemas.openxmlformats.org/drawingml/2006/main">
@@ -3196,7 +3446,7 @@
           </a:p>
           <a:p xmlns:a="http://schemas.openxmlformats.org/drawingml/2006/main">
             <a:r>
-              <a:t>- https://docs.traceable.ai/docs/kong</a:t>
+              <a:t>- https://docs.traceable.ai/kong</a:t>
             </a:r>
           </a:p>
         </p:txBody>
@@ -3476,7 +3726,7 @@
           </a:p>
           <a:p xmlns:a="http://schemas.openxmlformats.org/drawingml/2006/main">
             <a:r>
-              <a:t>Make the historical weighting model transparent and expose the dimensions required for a governed re-score.</a:t>
+              <a:t>Make the historical weighting model transparent, expose the dimensions required for a governed re-score, and keep Traceable as a separate unscored solution-profile gate.</a:t>
             </a:r>
           </a:p>
           <a:p xmlns:a="http://schemas.openxmlformats.org/drawingml/2006/main">
@@ -3491,7 +3741,7 @@
           </a:p>
           <a:p xmlns:a="http://schemas.openxmlformats.org/drawingml/2006/main">
             <a:r>
-              <a:t>Eight supplied categories sum to 100%, and Kubernetes plus GitOps carry 35%. The provisional planning scenario rebases those historical categories to 60% and allocates 40% across multicloud, scalability/robustness, enterprise IAM and traceability, reversibility/vendor dependency, fully allocated TCO, and control-plane operating responsibility. This makes the meeting feedback visible without changing the historical ratings. The 40% split is an assumption to approve or amend; every new product rating remains unknown.</a:t>
+              <a:t>Eight supplied categories sum to 100%, and Kubernetes plus GitOps carry 35%. The provisional planning scenario rebases those historical categories to 60% and allocates 40% across multicloud, scalability/robustness, enterprise IAM and traceability, reversibility/vendor dependency, fully allocated TCO, and control-plane operating responsibility. This makes the meeting feedback visible without changing the historical ratings. The 40% split is an assumption to approve or amend; every new product rating remains unknown. `EAG-04` stays separate: admitting `KP-SMH1 + GSA-01` for GEP-07 study cannot add native Kong points.</a:t>
             </a:r>
           </a:p>
           <a:p xmlns:a="http://schemas.openxmlformats.org/drawingml/2006/main">
@@ -3506,7 +3756,7 @@
           </a:p>
           <a:p xmlns:a="http://schemas.openxmlformats.org/drawingml/2006/main">
             <a:r>
-              <a:t>Approve, amend, or reject the provisional weights and double-counting rules, then assign the exact-option boundary, mandatory gates, evidence floor, scorer and approver panel, rating authority, confidence treatment, sensitivity method, dissent rule, and permitted decision use.</a:t>
+              <a:t>Approve, amend, or reject the provisional weights and double-counting rules; confirm that `EAG-01`–`EAG-03` remain early gates as well as later evidence dimensions and that `EAG-04` remains unscored; then assign the exact-option boundary, mandatory gates, evidence floor, scorer and approver panel, rating authority, confidence treatment, sensitivity method, dissent rule, and permitted decision use.</a:t>
             </a:r>
           </a:p>
           <a:p xmlns:a="http://schemas.openxmlformats.org/drawingml/2006/main">
@@ -3521,7 +3771,7 @@
           </a:p>
           <a:p xmlns:a="http://schemas.openxmlformats.org/drawingml/2006/main">
             <a:r>
-              <a:t>Now compare operating-model fit rather than treating these products as interchangeable feature bundles.</a:t>
+              <a:t>Now compare operating-model fit rather than treating products or optional adjuncts as interchangeable feature bundles.</a:t>
             </a:r>
           </a:p>
           <a:p xmlns:a="http://schemas.openxmlformats.org/drawingml/2006/main">
@@ -3536,7 +3786,7 @@
           </a:p>
           <a:p xmlns:a="http://schemas.openxmlformats.org/drawingml/2006/main">
             <a:r>
-              <a:t>The provisional weights are a scenario, not an approved model or revised ranking. The new ratings remain unknown, 30 mandatory gates remain unknown, and common score-capable evidence coverage is 0%.</a:t>
+              <a:t>The provisional weights are a scenario, not an approved model or revised ranking. The new ratings remain unknown, 30 mandatory gates remain unknown, and common score-capable evidence coverage is 0%. An early-gate disposition is meeting governance input; it cannot narrow a rating range or close an `E2`–`E4` proof obligation.</a:t>
             </a:r>
           </a:p>
           <a:p xmlns:a="http://schemas.openxmlformats.org/drawingml/2006/main">
@@ -3571,6 +3821,16 @@
           </a:p>
           <a:p xmlns:a="http://schemas.openxmlformats.org/drawingml/2006/main">
             <a:r>
+              <a:t>- 48-kong-guided-evaluation.md#four-early-assessment-gates</a:t>
+            </a:r>
+          </a:p>
+          <a:p xmlns:a="http://schemas.openxmlformats.org/drawingml/2006/main">
+            <a:r>
+              <a:t>- 48-kong-guided-evaluation.md#traceable-by-harness-security-adjunct-feasibility</a:t>
+            </a:r>
+          </a:p>
+          <a:p xmlns:a="http://schemas.openxmlformats.org/drawingml/2006/main">
+            <a:r>
               <a:t>- ../decision-matrix/scoring-guide.md</a:t>
             </a:r>
           </a:p>
@@ -3582,6 +3842,21 @@
           <a:p xmlns:a="http://schemas.openxmlformats.org/drawingml/2006/main">
             <a:r>
               <a:t>- https://developer.konghq.com/gateway/hybrid-mode/</a:t>
+            </a:r>
+          </a:p>
+          <a:p xmlns:a="http://schemas.openxmlformats.org/drawingml/2006/main">
+            <a:r>
+              <a:t>- https://docs.traceable.ai/kong</a:t>
+            </a:r>
+          </a:p>
+          <a:p xmlns:a="http://schemas.openxmlformats.org/drawingml/2006/main">
+            <a:r>
+              <a:t>- https://developer.konghq.com/plugins/harness-waap/</a:t>
+            </a:r>
+          </a:p>
+          <a:p xmlns:a="http://schemas.openxmlformats.org/drawingml/2006/main">
+            <a:r>
+              <a:t>- https://konghq.com/pricing</a:t>
             </a:r>
           </a:p>
         </p:txBody>
@@ -3716,7 +3991,7 @@
           </a:p>
           <a:p xmlns:a="http://schemas.openxmlformats.org/drawingml/2006/main">
             <a:r>
-              <a:t>The source document's qualitative ratings and cost/lock-in labels are supplied assessments, not independently verified facts.</a:t>
+              <a:t>The qualitative ratings and cost/lock-in labels preserved in the sanitized supplied evaluation are stakeholder assessments, not independently verified facts.</a:t>
             </a:r>
           </a:p>
           <a:p xmlns:a="http://schemas.openxmlformats.org/drawingml/2006/main">
@@ -3731,7 +4006,7 @@
           </a:p>
           <a:p xmlns:a="http://schemas.openxmlformats.org/drawingml/2006/main">
             <a:r>
-              <a:t>- docs/48-kong-guided-evaluation.md#conditional-option-archetypes</a:t>
+              <a:t>- 48-kong-guided-evaluation.md#conditional-option-archetypes</a:t>
             </a:r>
           </a:p>
           <a:p xmlns:a="http://schemas.openxmlformats.org/drawingml/2006/main">
@@ -4086,7 +4361,17 @@
           </a:p>
           <a:p xmlns:a="http://schemas.openxmlformats.org/drawingml/2006/main">
             <a:r>
-              <a:t>- docs/48-kong-guided-evaluation.md#bounded-authorization</a:t>
+              <a:t>- 48-kong-guided-evaluation.md#bounded-authorization</a:t>
+            </a:r>
+          </a:p>
+          <a:p xmlns:a="http://schemas.openxmlformats.org/drawingml/2006/main">
+            <a:r>
+              <a:t>- https://developer.konghq.com/gateway/hybrid-mode/</a:t>
+            </a:r>
+          </a:p>
+          <a:p xmlns:a="http://schemas.openxmlformats.org/drawingml/2006/main">
+            <a:r>
+              <a:t>- https://developer.konghq.com/gateway/version-support-policy/</a:t>
             </a:r>
           </a:p>
         </p:txBody>
@@ -4236,12 +4521,27 @@
           </a:p>
           <a:p xmlns:a="http://schemas.openxmlformats.org/drawingml/2006/main">
             <a:r>
-              <a:t>- docs/44-kong-multicloud-study-roadmap.md</a:t>
-            </a:r>
-          </a:p>
-          <a:p xmlns:a="http://schemas.openxmlformats.org/drawingml/2006/main">
-            <a:r>
-              <a:t>- docs/47-kong-enterprise-platform-strategy.md</a:t>
+              <a:t>- 44-kong-multicloud-study-roadmap.md</a:t>
+            </a:r>
+          </a:p>
+          <a:p xmlns:a="http://schemas.openxmlformats.org/drawingml/2006/main">
+            <a:r>
+              <a:t>- 47-kong-enterprise-platform-strategy.md</a:t>
+            </a:r>
+          </a:p>
+          <a:p xmlns:a="http://schemas.openxmlformats.org/drawingml/2006/main">
+            <a:r>
+              <a:t>- 48-kong-guided-evaluation.md</a:t>
+            </a:r>
+          </a:p>
+          <a:p xmlns:a="http://schemas.openxmlformats.org/drawingml/2006/main">
+            <a:r>
+              <a:t>- https://developer.konghq.com/gateway/hybrid-mode/</a:t>
+            </a:r>
+          </a:p>
+          <a:p xmlns:a="http://schemas.openxmlformats.org/drawingml/2006/main">
+            <a:r>
+              <a:t>- https://developer.konghq.com/gateway/version-support-policy/</a:t>
             </a:r>
           </a:p>
         </p:txBody>
@@ -4561,12 +4861,22 @@
           </a:p>
           <a:p xmlns:a="http://schemas.openxmlformats.org/drawingml/2006/main">
             <a:r>
+              <a:t>- 47-kong-enterprise-platform-strategy.md</a:t>
+            </a:r>
+          </a:p>
+          <a:p xmlns:a="http://schemas.openxmlformats.org/drawingml/2006/main">
+            <a:r>
+              <a:t>- 48-kong-guided-evaluation.md</a:t>
+            </a:r>
+          </a:p>
+          <a:p xmlns:a="http://schemas.openxmlformats.org/drawingml/2006/main">
+            <a:r>
               <a:t>- https://developer.konghq.com/gateway/hybrid-mode/</a:t>
             </a:r>
           </a:p>
           <a:p xmlns:a="http://schemas.openxmlformats.org/drawingml/2006/main">
             <a:r>
-              <a:t>- docs/47-kong-enterprise-platform-strategy.md</a:t>
+              <a:t>- https://developer.konghq.com/gateway/monitoring/</a:t>
             </a:r>
           </a:p>
         </p:txBody>
@@ -4634,7 +4944,7 @@
   </p:cSld>
   <p:clrMap bg1="lt1" tx1="dk1" bg2="lt2" tx2="dk2" accent1="accent1" accent2="accent2" accent3="accent3" accent4="accent4" accent5="accent5" accent6="accent6" hlink="hlink" folHlink="folHlink"/>
   <p:sldLayoutIdLst>
-    <p:sldLayoutId xmlns:r="http://schemas.openxmlformats.org/officeDocument/2006/relationships" id="2147483649" r:id="Rdce3bcdb06f84998"/>
+    <p:sldLayoutId xmlns:r="http://schemas.openxmlformats.org/officeDocument/2006/relationships" id="2147483649" r:id="Rfaf378160e474549"/>
   </p:sldLayoutIdLst>
   <p:txStyles>
     <p:titleStyle>
@@ -5936,7 +6246,7 @@
                 <a:solidFill>
                   <a:srgbClr val="666762"/>
                 </a:solidFill>
-                <a:hlinkClick xmlns:r="http://schemas.openxmlformats.org/officeDocument/2006/relationships" r:id="R1505224329d44489"/>
+                <a:hlinkClick xmlns:r="http://schemas.openxmlformats.org/officeDocument/2006/relationships" r:id="R0de9632a71a04ee4"/>
               </a:rPr>
               <a:t>Repo reference</a:t>
             </a:r>
@@ -5953,7 +6263,7 @@
                 <a:solidFill>
                   <a:srgbClr val="666762"/>
                 </a:solidFill>
-                <a:hlinkClick xmlns:r="http://schemas.openxmlformats.org/officeDocument/2006/relationships" r:id="R983e45434f464467"/>
+                <a:hlinkClick xmlns:r="http://schemas.openxmlformats.org/officeDocument/2006/relationships" r:id="Rc268edc5ec7c49e3"/>
               </a:rPr>
               <a:t>Official docs</a:t>
             </a:r>
@@ -6314,7 +6624,7 @@
                 <a:solidFill>
                   <a:srgbClr val="666762"/>
                 </a:solidFill>
-                <a:hlinkClick xmlns:r="http://schemas.openxmlformats.org/officeDocument/2006/relationships" r:id="R3bd9c3cbb4c14d7d"/>
+                <a:hlinkClick xmlns:r="http://schemas.openxmlformats.org/officeDocument/2006/relationships" r:id="Rb126e8c959334963"/>
               </a:rPr>
               <a:t>Repo reference</a:t>
             </a:r>
@@ -6331,7 +6641,7 @@
                 <a:solidFill>
                   <a:srgbClr val="666762"/>
                 </a:solidFill>
-                <a:hlinkClick xmlns:r="http://schemas.openxmlformats.org/officeDocument/2006/relationships" r:id="Rd41355a7e97743f6"/>
+                <a:hlinkClick xmlns:r="http://schemas.openxmlformats.org/officeDocument/2006/relationships" r:id="Rf587c8b7276348c7"/>
               </a:rPr>
               <a:t>Official docs</a:t>
             </a:r>
@@ -7620,7 +7930,7 @@
                 <a:solidFill>
                   <a:srgbClr val="666762"/>
                 </a:solidFill>
-                <a:hlinkClick xmlns:r="http://schemas.openxmlformats.org/officeDocument/2006/relationships" r:id="R82b76bf3ce4c4f4d"/>
+                <a:hlinkClick xmlns:r="http://schemas.openxmlformats.org/officeDocument/2006/relationships" r:id="R227e6d7eaca446a1"/>
               </a:rPr>
               <a:t>Repo reference</a:t>
             </a:r>
@@ -7637,7 +7947,7 @@
                 <a:solidFill>
                   <a:srgbClr val="666762"/>
                 </a:solidFill>
-                <a:hlinkClick xmlns:r="http://schemas.openxmlformats.org/officeDocument/2006/relationships" r:id="R478b188305f641f5"/>
+                <a:hlinkClick xmlns:r="http://schemas.openxmlformats.org/officeDocument/2006/relationships" r:id="R62d1984686ef4de6"/>
               </a:rPr>
               <a:t>Official docs</a:t>
             </a:r>
@@ -8413,7 +8723,7 @@
       </p:sp>
       <p:cxnSp>
         <p:nvCxnSpPr>
-          <p:cNvPr id="355" name=""/>
+          <p:cNvPr id="378" name=""/>
           <p:cNvCxnSpPr>
             <a:stCxn xmlns:a="http://schemas.openxmlformats.org/drawingml/2006/main" id="9" idx="3"/>
             <a:endCxn xmlns:a="http://schemas.openxmlformats.org/drawingml/2006/main" id="12" idx="1"/>
@@ -8439,7 +8749,7 @@
       </p:cxnSp>
       <p:cxnSp>
         <p:nvCxnSpPr>
-          <p:cNvPr id="356" name=""/>
+          <p:cNvPr id="379" name=""/>
           <p:cNvCxnSpPr>
             <a:stCxn xmlns:a="http://schemas.openxmlformats.org/drawingml/2006/main" id="12" idx="3"/>
             <a:endCxn xmlns:a="http://schemas.openxmlformats.org/drawingml/2006/main" id="15" idx="1"/>
@@ -8465,7 +8775,7 @@
       </p:cxnSp>
       <p:cxnSp>
         <p:nvCxnSpPr>
-          <p:cNvPr id="357" name=""/>
+          <p:cNvPr id="380" name=""/>
           <p:cNvCxnSpPr>
             <a:stCxn xmlns:a="http://schemas.openxmlformats.org/drawingml/2006/main" id="15" idx="3"/>
             <a:endCxn xmlns:a="http://schemas.openxmlformats.org/drawingml/2006/main" id="18" idx="1"/>
@@ -9447,7 +9757,7 @@
                 <a:solidFill>
                   <a:srgbClr val="666762"/>
                 </a:solidFill>
-                <a:hlinkClick xmlns:r="http://schemas.openxmlformats.org/officeDocument/2006/relationships" r:id="R74a53018a5fb4905"/>
+                <a:hlinkClick xmlns:r="http://schemas.openxmlformats.org/officeDocument/2006/relationships" r:id="R4d9b5dd534b34b8f"/>
               </a:rPr>
               <a:t>Repo reference</a:t>
             </a:r>
@@ -9464,7 +9774,7 @@
                 <a:solidFill>
                   <a:srgbClr val="666762"/>
                 </a:solidFill>
-                <a:hlinkClick xmlns:r="http://schemas.openxmlformats.org/officeDocument/2006/relationships" r:id="R5421aa73b30040a5"/>
+                <a:hlinkClick xmlns:r="http://schemas.openxmlformats.org/officeDocument/2006/relationships" r:id="R9341435459974570"/>
               </a:rPr>
               <a:t>Official docs</a:t>
             </a:r>
@@ -11099,7 +11409,7 @@
                 <a:solidFill>
                   <a:srgbClr val="666762"/>
                 </a:solidFill>
-                <a:hlinkClick xmlns:r="http://schemas.openxmlformats.org/officeDocument/2006/relationships" r:id="Rb94bd70ef6534262"/>
+                <a:hlinkClick xmlns:r="http://schemas.openxmlformats.org/officeDocument/2006/relationships" r:id="R6f299d0d275547ef"/>
               </a:rPr>
               <a:t>Repo reference</a:t>
             </a:r>
@@ -11116,7 +11426,7 @@
                 <a:solidFill>
                   <a:srgbClr val="666762"/>
                 </a:solidFill>
-                <a:hlinkClick xmlns:r="http://schemas.openxmlformats.org/officeDocument/2006/relationships" r:id="Rad2efaac483a46f9"/>
+                <a:hlinkClick xmlns:r="http://schemas.openxmlformats.org/officeDocument/2006/relationships" r:id="R55bb20441405495c"/>
               </a:rPr>
               <a:t>Official docs</a:t>
             </a:r>
@@ -13343,7 +13653,7 @@
                 <a:solidFill>
                   <a:srgbClr val="666762"/>
                 </a:solidFill>
-                <a:hlinkClick xmlns:r="http://schemas.openxmlformats.org/officeDocument/2006/relationships" r:id="Refbd7fb23e4440b2"/>
+                <a:hlinkClick xmlns:r="http://schemas.openxmlformats.org/officeDocument/2006/relationships" r:id="Ref0e3753cfe8442d"/>
               </a:rPr>
               <a:t>Repo reference</a:t>
             </a:r>
@@ -13360,7 +13670,7 @@
                 <a:solidFill>
                   <a:srgbClr val="666762"/>
                 </a:solidFill>
-                <a:hlinkClick xmlns:r="http://schemas.openxmlformats.org/officeDocument/2006/relationships" r:id="R4aa618a6dfd94da0"/>
+                <a:hlinkClick xmlns:r="http://schemas.openxmlformats.org/officeDocument/2006/relationships" r:id="R6a9b5d0ff10740fb"/>
               </a:rPr>
               <a:t>Official docs</a:t>
             </a:r>
@@ -15306,7 +15616,7 @@
                 <a:solidFill>
                   <a:srgbClr val="666762"/>
                 </a:solidFill>
-                <a:hlinkClick xmlns:r="http://schemas.openxmlformats.org/officeDocument/2006/relationships" r:id="Rfe5cc34ae0d8435a"/>
+                <a:hlinkClick xmlns:r="http://schemas.openxmlformats.org/officeDocument/2006/relationships" r:id="R709d3827b98146d6"/>
               </a:rPr>
               <a:t>Repo reference</a:t>
             </a:r>
@@ -15323,7 +15633,7 @@
                 <a:solidFill>
                   <a:srgbClr val="666762"/>
                 </a:solidFill>
-                <a:hlinkClick xmlns:r="http://schemas.openxmlformats.org/officeDocument/2006/relationships" r:id="Rfbde975b56814747"/>
+                <a:hlinkClick xmlns:r="http://schemas.openxmlformats.org/officeDocument/2006/relationships" r:id="R962b119d8fdc4c19"/>
               </a:rPr>
               <a:t>Official docs</a:t>
             </a:r>
@@ -16180,7 +16490,7 @@
       </p:sp>
       <p:cxnSp>
         <p:nvCxnSpPr>
-          <p:cNvPr id="419" name=""/>
+          <p:cNvPr id="447" name=""/>
           <p:cNvCxnSpPr>
             <a:stCxn xmlns:a="http://schemas.openxmlformats.org/drawingml/2006/main" id="9" idx="3"/>
             <a:endCxn xmlns:a="http://schemas.openxmlformats.org/drawingml/2006/main" id="12" idx="1"/>
@@ -16206,7 +16516,7 @@
       </p:cxnSp>
       <p:cxnSp>
         <p:nvCxnSpPr>
-          <p:cNvPr id="420" name=""/>
+          <p:cNvPr id="448" name=""/>
           <p:cNvCxnSpPr>
             <a:stCxn xmlns:a="http://schemas.openxmlformats.org/drawingml/2006/main" id="12" idx="3"/>
             <a:endCxn xmlns:a="http://schemas.openxmlformats.org/drawingml/2006/main" id="15" idx="1"/>
@@ -16234,7 +16544,7 @@
       </p:cxnSp>
       <p:cxnSp>
         <p:nvCxnSpPr>
-          <p:cNvPr id="421" name=""/>
+          <p:cNvPr id="449" name=""/>
           <p:cNvCxnSpPr>
             <a:stCxn xmlns:a="http://schemas.openxmlformats.org/drawingml/2006/main" id="12" idx="3"/>
             <a:endCxn xmlns:a="http://schemas.openxmlformats.org/drawingml/2006/main" id="18" idx="1"/>
@@ -16262,7 +16572,7 @@
       </p:cxnSp>
       <p:cxnSp>
         <p:nvCxnSpPr>
-          <p:cNvPr id="422" name=""/>
+          <p:cNvPr id="450" name=""/>
           <p:cNvCxnSpPr>
             <a:stCxn xmlns:a="http://schemas.openxmlformats.org/drawingml/2006/main" id="15" idx="3"/>
             <a:endCxn xmlns:a="http://schemas.openxmlformats.org/drawingml/2006/main" id="21" idx="1"/>
@@ -16290,7 +16600,7 @@
       </p:cxnSp>
       <p:cxnSp>
         <p:nvCxnSpPr>
-          <p:cNvPr id="423" name=""/>
+          <p:cNvPr id="451" name=""/>
           <p:cNvCxnSpPr>
             <a:stCxn xmlns:a="http://schemas.openxmlformats.org/drawingml/2006/main" id="18" idx="3"/>
             <a:endCxn xmlns:a="http://schemas.openxmlformats.org/drawingml/2006/main" id="21" idx="1"/>
@@ -16824,7 +17134,7 @@
                 <a:solidFill>
                   <a:srgbClr val="666762"/>
                 </a:solidFill>
-                <a:hlinkClick xmlns:r="http://schemas.openxmlformats.org/officeDocument/2006/relationships" r:id="R89172a4789e242c0"/>
+                <a:hlinkClick xmlns:r="http://schemas.openxmlformats.org/officeDocument/2006/relationships" r:id="Ra95138df65a34bd0"/>
               </a:rPr>
               <a:t>Repo reference</a:t>
             </a:r>
@@ -16841,7 +17151,7 @@
                 <a:solidFill>
                   <a:srgbClr val="666762"/>
                 </a:solidFill>
-                <a:hlinkClick xmlns:r="http://schemas.openxmlformats.org/officeDocument/2006/relationships" r:id="R4720e7f299c54dea"/>
+                <a:hlinkClick xmlns:r="http://schemas.openxmlformats.org/officeDocument/2006/relationships" r:id="R3a7c2bd4c3294efb"/>
               </a:rPr>
               <a:t>Official docs</a:t>
             </a:r>
@@ -16998,7 +17308,7 @@
                 <a:latin typeface="Consolas"/>
                 <a:ea typeface="Consolas"/>
                 <a:cs typeface="Consolas"/>
-                <a:hlinkClick xmlns:r="http://schemas.openxmlformats.org/officeDocument/2006/relationships" r:id="R524e515f6ea34930"/>
+                <a:hlinkClick xmlns:r="http://schemas.openxmlformats.org/officeDocument/2006/relationships" r:id="Rcbe625bddb4b43ab"/>
               </a:rPr>
               <a:t>Apigee A0–A6</a:t>
             </a:r>
@@ -19559,7 +19869,7 @@
                 <a:latin typeface="Arial"/>
                 <a:ea typeface="Arial"/>
                 <a:cs typeface="Arial"/>
-                <a:hlinkClick xmlns:r="http://schemas.openxmlformats.org/officeDocument/2006/relationships" r:id="R2eb00c20980b4eb8"/>
+                <a:hlinkClick xmlns:r="http://schemas.openxmlformats.org/officeDocument/2006/relationships" r:id="R62a4047e0cac4615"/>
               </a:rPr>
               <a:t>MULE COUNTERPART · M0–M5</a:t>
             </a:r>
@@ -19738,7 +20048,7 @@
                 <a:latin typeface="Arial"/>
                 <a:ea typeface="Arial"/>
                 <a:cs typeface="Arial"/>
-                <a:hlinkClick xmlns:r="http://schemas.openxmlformats.org/officeDocument/2006/relationships" r:id="R5971096796954770"/>
+                <a:hlinkClick xmlns:r="http://schemas.openxmlformats.org/officeDocument/2006/relationships" r:id="R6360f749119845ed"/>
               </a:rPr>
               <a:t>Terminology crosswalk</a:t>
             </a:r>
@@ -20099,7 +20409,7 @@
                 <a:solidFill>
                   <a:srgbClr val="666762"/>
                 </a:solidFill>
-                <a:hlinkClick xmlns:r="http://schemas.openxmlformats.org/officeDocument/2006/relationships" r:id="Re7d5c667f4ea4583"/>
+                <a:hlinkClick xmlns:r="http://schemas.openxmlformats.org/officeDocument/2006/relationships" r:id="R186fc017997e493f"/>
               </a:rPr>
               <a:t>Repo reference</a:t>
             </a:r>
@@ -20116,7 +20426,7 @@
                 <a:solidFill>
                   <a:srgbClr val="666762"/>
                 </a:solidFill>
-                <a:hlinkClick xmlns:r="http://schemas.openxmlformats.org/officeDocument/2006/relationships" r:id="Rf0bf18d712894daf"/>
+                <a:hlinkClick xmlns:r="http://schemas.openxmlformats.org/officeDocument/2006/relationships" r:id="R9bc5b62e68ea48a3"/>
               </a:rPr>
               <a:t>Official docs</a:t>
             </a:r>
@@ -21398,7 +21708,7 @@
                 <a:solidFill>
                   <a:srgbClr val="666762"/>
                 </a:solidFill>
-                <a:hlinkClick xmlns:r="http://schemas.openxmlformats.org/officeDocument/2006/relationships" r:id="R93290581b3384990"/>
+                <a:hlinkClick xmlns:r="http://schemas.openxmlformats.org/officeDocument/2006/relationships" r:id="Rfab9575e17fb4f91"/>
               </a:rPr>
               <a:t>Repo reference</a:t>
             </a:r>
@@ -21415,7 +21725,7 @@
                 <a:solidFill>
                   <a:srgbClr val="666762"/>
                 </a:solidFill>
-                <a:hlinkClick xmlns:r="http://schemas.openxmlformats.org/officeDocument/2006/relationships" r:id="R00b06a147ce444ce"/>
+                <a:hlinkClick xmlns:r="http://schemas.openxmlformats.org/officeDocument/2006/relationships" r:id="R2198dc9f60154ae5"/>
               </a:rPr>
               <a:t>Official docs</a:t>
             </a:r>
@@ -23350,7 +23660,7 @@
                 <a:solidFill>
                   <a:srgbClr val="666762"/>
                 </a:solidFill>
-                <a:hlinkClick xmlns:r="http://schemas.openxmlformats.org/officeDocument/2006/relationships" r:id="R40fb33b9ac954795"/>
+                <a:hlinkClick xmlns:r="http://schemas.openxmlformats.org/officeDocument/2006/relationships" r:id="Re241d8192b8044fe"/>
               </a:rPr>
               <a:t>Repo reference</a:t>
             </a:r>
@@ -23367,7 +23677,7 @@
                 <a:solidFill>
                   <a:srgbClr val="666762"/>
                 </a:solidFill>
-                <a:hlinkClick xmlns:r="http://schemas.openxmlformats.org/officeDocument/2006/relationships" r:id="R4476ac92f55542dd"/>
+                <a:hlinkClick xmlns:r="http://schemas.openxmlformats.org/officeDocument/2006/relationships" r:id="Rfc214d2ff4914fd8"/>
               </a:rPr>
               <a:t>Official docs</a:t>
             </a:r>
@@ -25572,7 +25882,7 @@
                 <a:ea typeface="Arial"/>
                 <a:cs typeface="Arial"/>
               </a:rPr>
-              <a:t>The operating model—not the feature list—drives the decision</a:t>
+              <a:t>The operating model and four early gates drive the decision</a:t>
             </a:r>
           </a:p>
         </p:txBody>
@@ -25631,7 +25941,7 @@
                 <a:ea typeface="Arial"/>
                 <a:cs typeface="Arial"/>
               </a:rPr>
-              <a:t>Treat these as stated target inputs to confirm, not yet as observed current-state facts.</a:t>
+              <a:t>Confirm target inputs, then disposition multicloud, exit, TCO and the Traceable adjunct.</a:t>
             </a:r>
           </a:p>
         </p:txBody>
@@ -25722,7 +26032,7 @@
                 <a:solidFill>
                   <a:srgbClr val="666762"/>
                 </a:solidFill>
-                <a:hlinkClick xmlns:r="http://schemas.openxmlformats.org/officeDocument/2006/relationships" r:id="R50c2722509184a1c"/>
+                <a:hlinkClick xmlns:r="http://schemas.openxmlformats.org/officeDocument/2006/relationships" r:id="R8593854d8757457c"/>
               </a:rPr>
               <a:t>Repo reference</a:t>
             </a:r>
@@ -25739,7 +26049,7 @@
                 <a:solidFill>
                   <a:srgbClr val="666762"/>
                 </a:solidFill>
-                <a:hlinkClick xmlns:r="http://schemas.openxmlformats.org/officeDocument/2006/relationships" r:id="R6a105b206a1b4d4d"/>
+                <a:hlinkClick xmlns:r="http://schemas.openxmlformats.org/officeDocument/2006/relationships" r:id="Rf0ca63fd1ca34c9d"/>
               </a:rPr>
               <a:t>Official docs</a:t>
             </a:r>
@@ -26728,7 +27038,7 @@
                 <a:ea typeface="Georgia"/>
                 <a:cs typeface="Georgia"/>
               </a:rPr>
-              <a:t>Security + observability</a:t>
+              <a:t>Security + Traceable adjunct</a:t>
             </a:r>
           </a:p>
         </p:txBody>
@@ -27006,7 +27316,7 @@
                 <a:ea typeface="Arial"/>
                 <a:cs typeface="Arial"/>
               </a:rPr>
-              <a:t>Decision lens: which operating boundary best enables this model with acceptable permanent duty?</a:t>
+              <a:t>EARLY GATES: MULTICLOUD · CLEAN EXIT · FULL TCO · TRACEABLE / HARNESS</a:t>
             </a:r>
           </a:p>
         </p:txBody>
@@ -27365,7 +27675,7 @@
                 <a:solidFill>
                   <a:srgbClr val="666762"/>
                 </a:solidFill>
-                <a:hlinkClick xmlns:r="http://schemas.openxmlformats.org/officeDocument/2006/relationships" r:id="R5f3c5b0cabde4412"/>
+                <a:hlinkClick xmlns:r="http://schemas.openxmlformats.org/officeDocument/2006/relationships" r:id="Rcbdd7db680d94238"/>
               </a:rPr>
               <a:t>Repo reference</a:t>
             </a:r>
@@ -27382,7 +27692,7 @@
                 <a:solidFill>
                   <a:srgbClr val="666762"/>
                 </a:solidFill>
-                <a:hlinkClick xmlns:r="http://schemas.openxmlformats.org/officeDocument/2006/relationships" r:id="R7557731dbf7946a6"/>
+                <a:hlinkClick xmlns:r="http://schemas.openxmlformats.org/officeDocument/2006/relationships" r:id="R0bb57ba060a44f4d"/>
               </a:rPr>
               <a:t>Official docs</a:t>
             </a:r>
@@ -29307,7 +29617,7 @@
                 <a:solidFill>
                   <a:srgbClr val="666762"/>
                 </a:solidFill>
-                <a:hlinkClick xmlns:r="http://schemas.openxmlformats.org/officeDocument/2006/relationships" r:id="R6ccea5cb38f549fe"/>
+                <a:hlinkClick xmlns:r="http://schemas.openxmlformats.org/officeDocument/2006/relationships" r:id="R5bc171cb920e458c"/>
               </a:rPr>
               <a:t>Repo reference</a:t>
             </a:r>
@@ -29324,7 +29634,7 @@
                 <a:solidFill>
                   <a:srgbClr val="666762"/>
                 </a:solidFill>
-                <a:hlinkClick xmlns:r="http://schemas.openxmlformats.org/officeDocument/2006/relationships" r:id="R73e19e9f344f492d"/>
+                <a:hlinkClick xmlns:r="http://schemas.openxmlformats.org/officeDocument/2006/relationships" r:id="R2c67acfe63584f32"/>
               </a:rPr>
               <a:t>Official docs</a:t>
             </a:r>
@@ -29746,7 +30056,7 @@
       </p:sp>
       <p:cxnSp>
         <p:nvCxnSpPr>
-          <p:cNvPr id="394" name=""/>
+          <p:cNvPr id="421" name=""/>
           <p:cNvCxnSpPr>
             <a:stCxn xmlns:a="http://schemas.openxmlformats.org/drawingml/2006/main" id="9" idx="1"/>
             <a:endCxn xmlns:a="http://schemas.openxmlformats.org/drawingml/2006/main" id="12" idx="3"/>
@@ -29951,7 +30261,7 @@
       </p:sp>
       <p:cxnSp>
         <p:nvCxnSpPr>
-          <p:cNvPr id="398" name=""/>
+          <p:cNvPr id="425" name=""/>
           <p:cNvCxnSpPr>
             <a:stCxn xmlns:a="http://schemas.openxmlformats.org/drawingml/2006/main" id="9" idx="1"/>
             <a:endCxn xmlns:a="http://schemas.openxmlformats.org/drawingml/2006/main" id="16" idx="3"/>
@@ -30156,7 +30466,7 @@
       </p:sp>
       <p:cxnSp>
         <p:nvCxnSpPr>
-          <p:cNvPr id="402" name=""/>
+          <p:cNvPr id="429" name=""/>
           <p:cNvCxnSpPr>
             <a:stCxn xmlns:a="http://schemas.openxmlformats.org/drawingml/2006/main" id="9" idx="3"/>
             <a:endCxn xmlns:a="http://schemas.openxmlformats.org/drawingml/2006/main" id="20" idx="1"/>
@@ -30361,7 +30671,7 @@
       </p:sp>
       <p:cxnSp>
         <p:nvCxnSpPr>
-          <p:cNvPr id="406" name=""/>
+          <p:cNvPr id="433" name=""/>
           <p:cNvCxnSpPr>
             <a:stCxn xmlns:a="http://schemas.openxmlformats.org/drawingml/2006/main" id="9" idx="3"/>
             <a:endCxn xmlns:a="http://schemas.openxmlformats.org/drawingml/2006/main" id="24" idx="1"/>
@@ -30800,7 +31110,7 @@
                 <a:solidFill>
                   <a:srgbClr val="666762"/>
                 </a:solidFill>
-                <a:hlinkClick xmlns:r="http://schemas.openxmlformats.org/officeDocument/2006/relationships" r:id="R5e845ab4861c4574"/>
+                <a:hlinkClick xmlns:r="http://schemas.openxmlformats.org/officeDocument/2006/relationships" r:id="Rf8d994bc1b4c4233"/>
               </a:rPr>
               <a:t>Repo reference</a:t>
             </a:r>
@@ -30817,7 +31127,7 @@
                 <a:solidFill>
                   <a:srgbClr val="666762"/>
                 </a:solidFill>
-                <a:hlinkClick xmlns:r="http://schemas.openxmlformats.org/officeDocument/2006/relationships" r:id="R4df67573af3c4f6d"/>
+                <a:hlinkClick xmlns:r="http://schemas.openxmlformats.org/officeDocument/2006/relationships" r:id="R7f5f21f474d144b2"/>
               </a:rPr>
               <a:t>Official docs</a:t>
             </a:r>
@@ -31696,7 +32006,7 @@
                 <a:solidFill>
                   <a:srgbClr val="666762"/>
                 </a:solidFill>
-                <a:hlinkClick xmlns:r="http://schemas.openxmlformats.org/officeDocument/2006/relationships" r:id="R8dec884f30624955"/>
+                <a:hlinkClick xmlns:r="http://schemas.openxmlformats.org/officeDocument/2006/relationships" r:id="R71afb8b781cd41ac"/>
               </a:rPr>
               <a:t>Repo reference</a:t>
             </a:r>
@@ -31713,7 +32023,7 @@
                 <a:solidFill>
                   <a:srgbClr val="666762"/>
                 </a:solidFill>
-                <a:hlinkClick xmlns:r="http://schemas.openxmlformats.org/officeDocument/2006/relationships" r:id="R336cdc99b169402b"/>
+                <a:hlinkClick xmlns:r="http://schemas.openxmlformats.org/officeDocument/2006/relationships" r:id="R4cc48dfdfff6424b"/>
               </a:rPr>
               <a:t>Official docs</a:t>
             </a:r>
@@ -32592,7 +32902,7 @@
                 <a:solidFill>
                   <a:srgbClr val="666762"/>
                 </a:solidFill>
-                <a:hlinkClick xmlns:r="http://schemas.openxmlformats.org/officeDocument/2006/relationships" r:id="R21ebff295ce7429d"/>
+                <a:hlinkClick xmlns:r="http://schemas.openxmlformats.org/officeDocument/2006/relationships" r:id="R96fbd7b916884c3f"/>
               </a:rPr>
               <a:t>Repo reference</a:t>
             </a:r>
@@ -32609,7 +32919,7 @@
                 <a:solidFill>
                   <a:srgbClr val="666762"/>
                 </a:solidFill>
-                <a:hlinkClick xmlns:r="http://schemas.openxmlformats.org/officeDocument/2006/relationships" r:id="Reb083c12c36545ec"/>
+                <a:hlinkClick xmlns:r="http://schemas.openxmlformats.org/officeDocument/2006/relationships" r:id="R37b3062bb24e4515"/>
               </a:rPr>
               <a:t>Official docs</a:t>
             </a:r>
@@ -33417,7 +33727,7 @@
                 <a:solidFill>
                   <a:srgbClr val="666762"/>
                 </a:solidFill>
-                <a:hlinkClick xmlns:r="http://schemas.openxmlformats.org/officeDocument/2006/relationships" r:id="Rdd27e409df1b4c7d"/>
+                <a:hlinkClick xmlns:r="http://schemas.openxmlformats.org/officeDocument/2006/relationships" r:id="R9401e9b2253d4100"/>
               </a:rPr>
               <a:t>Repo reference</a:t>
             </a:r>
@@ -33434,7 +33744,7 @@
                 <a:solidFill>
                   <a:srgbClr val="666762"/>
                 </a:solidFill>
-                <a:hlinkClick xmlns:r="http://schemas.openxmlformats.org/officeDocument/2006/relationships" r:id="R6b76b5d950df4de2"/>
+                <a:hlinkClick xmlns:r="http://schemas.openxmlformats.org/officeDocument/2006/relationships" r:id="Rac401c109bb64823"/>
               </a:rPr>
               <a:t>Official docs</a:t>
             </a:r>
@@ -36618,7 +36928,7 @@
                 <a:ea typeface="Arial"/>
                 <a:cs typeface="Arial"/>
               </a:rPr>
-              <a:t>Historical weights stay visible; the provisional model rebases them to 60% and adds a 40% unknown block.</a:t>
+              <a:t>Historical weights stay visible; six added dimensions remain unknown, and Traceable stays an unscored gate.</a:t>
             </a:r>
           </a:p>
         </p:txBody>
@@ -36709,7 +37019,7 @@
                 <a:solidFill>
                   <a:srgbClr val="666762"/>
                 </a:solidFill>
-                <a:hlinkClick xmlns:r="http://schemas.openxmlformats.org/officeDocument/2006/relationships" r:id="R9dd0ae648db447dc"/>
+                <a:hlinkClick xmlns:r="http://schemas.openxmlformats.org/officeDocument/2006/relationships" r:id="R65266310be0e4a1b"/>
               </a:rPr>
               <a:t>Repo reference</a:t>
             </a:r>
@@ -36726,7 +37036,7 @@
                 <a:solidFill>
                   <a:srgbClr val="666762"/>
                 </a:solidFill>
-                <a:hlinkClick xmlns:r="http://schemas.openxmlformats.org/officeDocument/2006/relationships" r:id="R71b476e2b678452b"/>
+                <a:hlinkClick xmlns:r="http://schemas.openxmlformats.org/officeDocument/2006/relationships" r:id="Rd3f039e529c74117"/>
               </a:rPr>
               <a:t>Official docs</a:t>
             </a:r>
@@ -38700,7 +39010,7 @@
         </p:spPr>
         <p:txBody>
           <a:bodyPr xmlns:a="http://schemas.openxmlformats.org/drawingml/2006/main" wrap="square" lIns="0" tIns="0" rIns="0" bIns="0" anchor="t">
-            <a:normAutofit fontScale="91945"/>
+            <a:normAutofit fontScale="86193"/>
           </a:bodyPr>
           <a:lstStyle xmlns:a="http://schemas.openxmlformats.org/drawingml/2006/main"/>
           <a:p xmlns:a="http://schemas.openxmlformats.org/drawingml/2006/main">
@@ -38724,7 +39034,7 @@
                 <a:ea typeface="Georgia"/>
                 <a:cs typeface="Georgia"/>
               </a:rPr>
-              <a:t>Weights are assumptions; every GRS product rating remains Unknown [0,10].</a:t>
+              <a:t>Traceable / Harness is an unscored gate; every GRS rating remains Unknown [0,10].</a:t>
             </a:r>
           </a:p>
         </p:txBody>
@@ -39083,7 +39393,7 @@
                 <a:solidFill>
                   <a:srgbClr val="666762"/>
                 </a:solidFill>
-                <a:hlinkClick xmlns:r="http://schemas.openxmlformats.org/officeDocument/2006/relationships" r:id="Ra6a74b7c294940ca"/>
+                <a:hlinkClick xmlns:r="http://schemas.openxmlformats.org/officeDocument/2006/relationships" r:id="R6f29cd6d8e304a68"/>
               </a:rPr>
               <a:t>Repo reference</a:t>
             </a:r>
@@ -39100,7 +39410,7 @@
                 <a:solidFill>
                   <a:srgbClr val="666762"/>
                 </a:solidFill>
-                <a:hlinkClick xmlns:r="http://schemas.openxmlformats.org/officeDocument/2006/relationships" r:id="R1fea18c30d134d6c"/>
+                <a:hlinkClick xmlns:r="http://schemas.openxmlformats.org/officeDocument/2006/relationships" r:id="R6e9b573d621c4970"/>
               </a:rPr>
               <a:t>Official docs</a:t>
             </a:r>
@@ -40956,7 +41266,7 @@
                 <a:solidFill>
                   <a:srgbClr val="666762"/>
                 </a:solidFill>
-                <a:hlinkClick xmlns:r="http://schemas.openxmlformats.org/officeDocument/2006/relationships" r:id="R8c36ad9c07e14534"/>
+                <a:hlinkClick xmlns:r="http://schemas.openxmlformats.org/officeDocument/2006/relationships" r:id="R84f767f677b740a6"/>
               </a:rPr>
               <a:t>Repo reference</a:t>
             </a:r>
@@ -40973,7 +41283,7 @@
                 <a:solidFill>
                   <a:srgbClr val="666762"/>
                 </a:solidFill>
-                <a:hlinkClick xmlns:r="http://schemas.openxmlformats.org/officeDocument/2006/relationships" r:id="Rf7a64300c105432a"/>
+                <a:hlinkClick xmlns:r="http://schemas.openxmlformats.org/officeDocument/2006/relationships" r:id="Rd48c27f0363d4960"/>
               </a:rPr>
               <a:t>Official docs</a:t>
             </a:r>
@@ -42007,6 +42317,7 @@
           <a:lstStyle xmlns:a="http://schemas.openxmlformats.org/drawingml/2006/main"/>
           <a:p xmlns:a="http://schemas.openxmlformats.org/drawingml/2006/main">
             <a:pPr algn="ctr">
+              <a:buNone/>
               <a:defRPr sz="1350">
                 <a:solidFill>
                   <a:srgbClr val="93948F"/>
@@ -42067,6 +42378,7 @@
           <a:lstStyle xmlns:a="http://schemas.openxmlformats.org/drawingml/2006/main"/>
           <a:p xmlns:a="http://schemas.openxmlformats.org/drawingml/2006/main">
             <a:pPr algn="r">
+              <a:buNone/>
               <a:defRPr sz="1800">
                 <a:solidFill>
                   <a:srgbClr val="5537D6"/>
@@ -42127,6 +42439,7 @@
           <a:lstStyle xmlns:a="http://schemas.openxmlformats.org/drawingml/2006/main"/>
           <a:p xmlns:a="http://schemas.openxmlformats.org/drawingml/2006/main">
             <a:pPr algn="ctr">
+              <a:buNone/>
               <a:defRPr sz="1350">
                 <a:solidFill>
                   <a:srgbClr val="93948F"/>
@@ -42187,6 +42500,7 @@
           <a:lstStyle xmlns:a="http://schemas.openxmlformats.org/drawingml/2006/main"/>
           <a:p xmlns:a="http://schemas.openxmlformats.org/drawingml/2006/main">
             <a:pPr algn="r">
+              <a:buNone/>
               <a:defRPr sz="1800">
                 <a:solidFill>
                   <a:srgbClr val="5537D6"/>
@@ -42247,6 +42561,7 @@
           <a:lstStyle xmlns:a="http://schemas.openxmlformats.org/drawingml/2006/main"/>
           <a:p xmlns:a="http://schemas.openxmlformats.org/drawingml/2006/main">
             <a:pPr algn="ctr">
+              <a:buNone/>
               <a:defRPr sz="1350">
                 <a:solidFill>
                   <a:srgbClr val="93948F"/>
@@ -42307,6 +42622,7 @@
           <a:lstStyle xmlns:a="http://schemas.openxmlformats.org/drawingml/2006/main"/>
           <a:p xmlns:a="http://schemas.openxmlformats.org/drawingml/2006/main">
             <a:pPr algn="r">
+              <a:buNone/>
               <a:defRPr sz="1800">
                 <a:solidFill>
                   <a:srgbClr val="5537D6"/>
@@ -42684,7 +43000,7 @@
                 <a:solidFill>
                   <a:srgbClr val="666762"/>
                 </a:solidFill>
-                <a:hlinkClick xmlns:r="http://schemas.openxmlformats.org/officeDocument/2006/relationships" r:id="R08aba886a99c4ae0"/>
+                <a:hlinkClick xmlns:r="http://schemas.openxmlformats.org/officeDocument/2006/relationships" r:id="R9b7fe541cc314c74"/>
               </a:rPr>
               <a:t>Repo reference</a:t>
             </a:r>
@@ -42701,7 +43017,7 @@
                 <a:solidFill>
                   <a:srgbClr val="666762"/>
                 </a:solidFill>
-                <a:hlinkClick xmlns:r="http://schemas.openxmlformats.org/officeDocument/2006/relationships" r:id="R9675c118e1234325"/>
+                <a:hlinkClick xmlns:r="http://schemas.openxmlformats.org/officeDocument/2006/relationships" r:id="R0e682bc240d04521"/>
               </a:rPr>
               <a:t>Official docs</a:t>
             </a:r>
@@ -43806,7 +44122,7 @@
                 <a:solidFill>
                   <a:srgbClr val="666762"/>
                 </a:solidFill>
-                <a:hlinkClick xmlns:r="http://schemas.openxmlformats.org/officeDocument/2006/relationships" r:id="Rff77b14c39de4286"/>
+                <a:hlinkClick xmlns:r="http://schemas.openxmlformats.org/officeDocument/2006/relationships" r:id="R61cb1937c51a4f0b"/>
               </a:rPr>
               <a:t>Repo reference</a:t>
             </a:r>
@@ -43823,7 +44139,7 @@
                 <a:solidFill>
                   <a:srgbClr val="666762"/>
                 </a:solidFill>
-                <a:hlinkClick xmlns:r="http://schemas.openxmlformats.org/officeDocument/2006/relationships" r:id="R6999cac732e947dd"/>
+                <a:hlinkClick xmlns:r="http://schemas.openxmlformats.org/officeDocument/2006/relationships" r:id="R160ab15bd438459b"/>
               </a:rPr>
               <a:t>Official docs</a:t>
             </a:r>
@@ -45058,7 +45374,7 @@
                 <a:solidFill>
                   <a:srgbClr val="666762"/>
                 </a:solidFill>
-                <a:hlinkClick xmlns:r="http://schemas.openxmlformats.org/officeDocument/2006/relationships" r:id="Ra6bb97bd5b5a4e05"/>
+                <a:hlinkClick xmlns:r="http://schemas.openxmlformats.org/officeDocument/2006/relationships" r:id="R9884dffe971c4f65"/>
               </a:rPr>
               <a:t>Repo reference</a:t>
             </a:r>
@@ -45075,7 +45391,7 @@
                 <a:solidFill>
                   <a:srgbClr val="666762"/>
                 </a:solidFill>
-                <a:hlinkClick xmlns:r="http://schemas.openxmlformats.org/officeDocument/2006/relationships" r:id="R76cda340086e43c2"/>
+                <a:hlinkClick xmlns:r="http://schemas.openxmlformats.org/officeDocument/2006/relationships" r:id="R1ebbc4ef7079476a"/>
               </a:rPr>
               <a:t>Official docs</a:t>
             </a:r>
@@ -46423,7 +46739,7 @@
                 <a:solidFill>
                   <a:srgbClr val="666762"/>
                 </a:solidFill>
-                <a:hlinkClick xmlns:r="http://schemas.openxmlformats.org/officeDocument/2006/relationships" r:id="Rcf1ac1910d4d4bda"/>
+                <a:hlinkClick xmlns:r="http://schemas.openxmlformats.org/officeDocument/2006/relationships" r:id="R0dce02e35aa84728"/>
               </a:rPr>
               <a:t>Repo reference</a:t>
             </a:r>
@@ -46440,7 +46756,7 @@
                 <a:solidFill>
                   <a:srgbClr val="666762"/>
                 </a:solidFill>
-                <a:hlinkClick xmlns:r="http://schemas.openxmlformats.org/officeDocument/2006/relationships" r:id="Rf10bd3b7a4de426f"/>
+                <a:hlinkClick xmlns:r="http://schemas.openxmlformats.org/officeDocument/2006/relationships" r:id="R51357be61ea84d99"/>
               </a:rPr>
               <a:t>Official docs</a:t>
             </a:r>
@@ -46967,7 +47283,7 @@
       </p:sp>
       <p:cxnSp>
         <p:nvCxnSpPr>
-          <p:cNvPr id="660" name=""/>
+          <p:cNvPr id="705" name=""/>
           <p:cNvCxnSpPr>
             <a:stCxn xmlns:a="http://schemas.openxmlformats.org/drawingml/2006/main" id="16" idx="1"/>
             <a:endCxn xmlns:a="http://schemas.openxmlformats.org/drawingml/2006/main" id="10" idx="1"/>
@@ -46993,7 +47309,7 @@
       </p:cxnSp>
       <p:cxnSp>
         <p:nvCxnSpPr>
-          <p:cNvPr id="661" name=""/>
+          <p:cNvPr id="706" name=""/>
           <p:cNvCxnSpPr>
             <a:stCxn xmlns:a="http://schemas.openxmlformats.org/drawingml/2006/main" id="10" idx="2"/>
             <a:endCxn xmlns:a="http://schemas.openxmlformats.org/drawingml/2006/main" id="13" idx="0"/>
@@ -47537,7 +47853,7 @@
       </p:sp>
       <p:cxnSp>
         <p:nvCxnSpPr>
-          <p:cNvPr id="672" name=""/>
+          <p:cNvPr id="717" name=""/>
           <p:cNvCxnSpPr>
             <a:stCxn xmlns:a="http://schemas.openxmlformats.org/drawingml/2006/main" id="10" idx="3"/>
             <a:endCxn xmlns:a="http://schemas.openxmlformats.org/drawingml/2006/main" id="21" idx="1"/>
@@ -47565,7 +47881,7 @@
       </p:cxnSp>
       <p:cxnSp>
         <p:nvCxnSpPr>
-          <p:cNvPr id="673" name=""/>
+          <p:cNvPr id="718" name=""/>
           <p:cNvCxnSpPr>
             <a:stCxn xmlns:a="http://schemas.openxmlformats.org/drawingml/2006/main" id="10" idx="3"/>
             <a:endCxn xmlns:a="http://schemas.openxmlformats.org/drawingml/2006/main" id="24" idx="1"/>
@@ -47593,7 +47909,7 @@
       </p:cxnSp>
       <p:cxnSp>
         <p:nvCxnSpPr>
-          <p:cNvPr id="674" name=""/>
+          <p:cNvPr id="719" name=""/>
           <p:cNvCxnSpPr>
             <a:stCxn xmlns:a="http://schemas.openxmlformats.org/drawingml/2006/main" id="10" idx="3"/>
             <a:endCxn xmlns:a="http://schemas.openxmlformats.org/drawingml/2006/main" id="27" idx="1"/>
@@ -48139,7 +48455,7 @@
       </p:sp>
       <p:cxnSp>
         <p:nvCxnSpPr>
-          <p:cNvPr id="685" name=""/>
+          <p:cNvPr id="730" name=""/>
           <p:cNvCxnSpPr>
             <a:stCxn xmlns:a="http://schemas.openxmlformats.org/drawingml/2006/main" id="21" idx="3"/>
             <a:endCxn xmlns:a="http://schemas.openxmlformats.org/drawingml/2006/main" id="34" idx="1"/>
@@ -48165,7 +48481,7 @@
       </p:cxnSp>
       <p:cxnSp>
         <p:nvCxnSpPr>
-          <p:cNvPr id="686" name=""/>
+          <p:cNvPr id="731" name=""/>
           <p:cNvCxnSpPr>
             <a:stCxn xmlns:a="http://schemas.openxmlformats.org/drawingml/2006/main" id="24" idx="3"/>
             <a:endCxn xmlns:a="http://schemas.openxmlformats.org/drawingml/2006/main" id="37" idx="1"/>
@@ -48191,7 +48507,7 @@
       </p:cxnSp>
       <p:cxnSp>
         <p:nvCxnSpPr>
-          <p:cNvPr id="687" name=""/>
+          <p:cNvPr id="732" name=""/>
           <p:cNvCxnSpPr>
             <a:stCxn xmlns:a="http://schemas.openxmlformats.org/drawingml/2006/main" id="27" idx="3"/>
             <a:endCxn xmlns:a="http://schemas.openxmlformats.org/drawingml/2006/main" id="40" idx="1"/>

--- a/presentations/kong-platform-journey-guided.pptx
+++ b/presentations/kong-platform-journey-guided.pptx
@@ -1,6 +1,6 @@
 
 <file path=ppt/presentation.xml><?xml version="1.0" encoding="utf-8"?>
-<p:presentation xmlns:a="http://schemas.openxmlformats.org/drawingml/2006/main" xmlns:r="http://schemas.openxmlformats.org/officeDocument/2006/relationships" xmlns:p="http://schemas.openxmlformats.org/presentationml/2006/main">
+<p:presentation xmlns:a="http://schemas.openxmlformats.org/drawingml/2006/main" xmlns:r="http://schemas.openxmlformats.org/officeDocument/2006/relationships" xmlns:p="http://schemas.openxmlformats.org/presentationml/2006/main" saveSubsetFonts="1" autoCompressPictures="0">
   <p:sldMasterIdLst>
     <p:sldMasterId id="2147483648" r:id="rId1"/>
   </p:sldMasterIdLst>
@@ -158,7 +158,7 @@
       </p:grpSpPr>
       <p:sp>
         <p:nvSpPr>
-          <p:cNvPr id="2" name="Header Placeholder"/>
+          <p:cNvPr id="2" name="Header Placeholder 1"/>
           <p:cNvSpPr>
             <a:spLocks noGrp="1"/>
           </p:cNvSpPr>
@@ -167,44 +167,64 @@
           </p:nvPr>
         </p:nvSpPr>
         <p:spPr>
-          <a:prstGeom prst="rect">
-            <a:avLst/>
-          </a:prstGeom>
-        </p:spPr>
-        <p:txBody>
-          <a:bodyPr/>
-          <a:lstStyle/>
-          <a:p>
-            <a:endParaRPr/>
-          </a:p>
-        </p:txBody>
-      </p:sp>
-      <p:sp>
-        <p:nvSpPr>
-          <p:cNvPr id="3" name="Date Placeholder"/>
+          <a:xfrm>
+            <a:off x="0" y="0"/>
+            <a:ext cx="2971800" cy="458788"/>
+          </a:xfrm>
+          <a:prstGeom prst="rect">
+            <a:avLst/>
+          </a:prstGeom>
+        </p:spPr>
+        <p:txBody>
+          <a:bodyPr vert="horz" lIns="91440" tIns="45720" rIns="91440" bIns="45720" rtlCol="0"/>
+          <a:lstStyle>
+            <a:lvl1pPr algn="l">
+              <a:defRPr sz="1200"/>
+            </a:lvl1pPr>
+          </a:lstStyle>
+          <a:p>
+            <a:endParaRPr lang="en-US"/>
+          </a:p>
+        </p:txBody>
+      </p:sp>
+      <p:sp>
+        <p:nvSpPr>
+          <p:cNvPr id="3" name="Date Placeholder 2"/>
           <p:cNvSpPr>
             <a:spLocks noGrp="1"/>
           </p:cNvSpPr>
           <p:nvPr>
-            <p:ph type="dt" sz="quarter" idx="1"/>
+            <p:ph type="dt" idx="1"/>
           </p:nvPr>
         </p:nvSpPr>
         <p:spPr>
-          <a:prstGeom prst="rect">
-            <a:avLst/>
-          </a:prstGeom>
-        </p:spPr>
-        <p:txBody>
-          <a:bodyPr/>
-          <a:lstStyle/>
-          <a:p>
-            <a:endParaRPr/>
-          </a:p>
-        </p:txBody>
-      </p:sp>
-      <p:sp>
-        <p:nvSpPr>
-          <p:cNvPr id="4" name="Slide Image Placeholder"/>
+          <a:xfrm>
+            <a:off x="3884613" y="0"/>
+            <a:ext cx="2971800" cy="458788"/>
+          </a:xfrm>
+          <a:prstGeom prst="rect">
+            <a:avLst/>
+          </a:prstGeom>
+        </p:spPr>
+        <p:txBody>
+          <a:bodyPr vert="horz" lIns="91440" tIns="45720" rIns="91440" bIns="45720" rtlCol="0"/>
+          <a:lstStyle>
+            <a:lvl1pPr algn="r">
+              <a:defRPr sz="1200"/>
+            </a:lvl1pPr>
+          </a:lstStyle>
+          <a:p>
+            <a:fld id="{F77FCC5D-A321-7D41-BB05-02F281A57937}" type="datetimeFigureOut">
+              <a:rPr lang="en-US" smtClean="0"/>
+              <a:t>8/22/26</a:t>
+            </a:fld>
+            <a:endParaRPr lang="en-US"/>
+          </a:p>
+        </p:txBody>
+      </p:sp>
+      <p:sp>
+        <p:nvSpPr>
+          <p:cNvPr id="4" name="Slide Image Placeholder 3"/>
           <p:cNvSpPr>
             <a:spLocks noGrp="1" noRot="1" noChangeAspect="1"/>
           </p:cNvSpPr>
@@ -213,21 +233,31 @@
           </p:nvPr>
         </p:nvSpPr>
         <p:spPr>
-          <a:prstGeom prst="rect">
-            <a:avLst/>
-          </a:prstGeom>
-        </p:spPr>
-        <p:txBody>
-          <a:bodyPr/>
-          <a:lstStyle/>
-          <a:p>
-            <a:endParaRPr/>
-          </a:p>
-        </p:txBody>
-      </p:sp>
-      <p:sp>
-        <p:nvSpPr>
-          <p:cNvPr id="5" name="Notes Placeholder"/>
+          <a:xfrm>
+            <a:off x="685800" y="1143000"/>
+            <a:ext cx="5486400" cy="3086100"/>
+          </a:xfrm>
+          <a:prstGeom prst="rect">
+            <a:avLst/>
+          </a:prstGeom>
+          <a:noFill/>
+          <a:ln w="12700">
+            <a:solidFill>
+              <a:prstClr val="black"/>
+            </a:solidFill>
+          </a:ln>
+        </p:spPr>
+        <p:txBody>
+          <a:bodyPr vert="horz" lIns="91440" tIns="45720" rIns="91440" bIns="45720" rtlCol="0" anchor="ctr"/>
+          <a:lstStyle/>
+          <a:p>
+            <a:endParaRPr lang="en-US"/>
+          </a:p>
+        </p:txBody>
+      </p:sp>
+      <p:sp>
+        <p:nvSpPr>
+          <p:cNvPr id="5" name="Notes Placeholder 4"/>
           <p:cNvSpPr>
             <a:spLocks noGrp="1"/>
           </p:cNvSpPr>
@@ -236,21 +266,57 @@
           </p:nvPr>
         </p:nvSpPr>
         <p:spPr>
-          <a:prstGeom prst="rect">
-            <a:avLst/>
-          </a:prstGeom>
-        </p:spPr>
-        <p:txBody>
-          <a:bodyPr/>
-          <a:lstStyle/>
-          <a:p>
-            <a:endParaRPr/>
-          </a:p>
-        </p:txBody>
-      </p:sp>
-      <p:sp>
-        <p:nvSpPr>
-          <p:cNvPr id="6" name="Footer Placeholder"/>
+          <a:xfrm>
+            <a:off x="685800" y="4400550"/>
+            <a:ext cx="5486400" cy="3600450"/>
+          </a:xfrm>
+          <a:prstGeom prst="rect">
+            <a:avLst/>
+          </a:prstGeom>
+        </p:spPr>
+        <p:txBody>
+          <a:bodyPr vert="horz" lIns="91440" tIns="45720" rIns="91440" bIns="45720" rtlCol="0"/>
+          <a:lstStyle/>
+          <a:p>
+            <a:pPr lvl="0"/>
+            <a:r>
+              <a:rPr lang="en-US"/>
+              <a:t>Click to edit Master text styles</a:t>
+            </a:r>
+          </a:p>
+          <a:p>
+            <a:pPr lvl="1"/>
+            <a:r>
+              <a:rPr lang="en-US"/>
+              <a:t>Second level</a:t>
+            </a:r>
+          </a:p>
+          <a:p>
+            <a:pPr lvl="2"/>
+            <a:r>
+              <a:rPr lang="en-US"/>
+              <a:t>Third level</a:t>
+            </a:r>
+          </a:p>
+          <a:p>
+            <a:pPr lvl="3"/>
+            <a:r>
+              <a:rPr lang="en-US"/>
+              <a:t>Fourth level</a:t>
+            </a:r>
+          </a:p>
+          <a:p>
+            <a:pPr lvl="4"/>
+            <a:r>
+              <a:rPr lang="en-US"/>
+              <a:t>Fifth level</a:t>
+            </a:r>
+          </a:p>
+        </p:txBody>
+      </p:sp>
+      <p:sp>
+        <p:nvSpPr>
+          <p:cNvPr id="6" name="Footer Placeholder 5"/>
           <p:cNvSpPr>
             <a:spLocks noGrp="1"/>
           </p:cNvSpPr>
@@ -259,21 +325,29 @@
           </p:nvPr>
         </p:nvSpPr>
         <p:spPr>
-          <a:prstGeom prst="rect">
-            <a:avLst/>
-          </a:prstGeom>
-        </p:spPr>
-        <p:txBody>
-          <a:bodyPr/>
-          <a:lstStyle/>
-          <a:p>
-            <a:endParaRPr/>
-          </a:p>
-        </p:txBody>
-      </p:sp>
-      <p:sp>
-        <p:nvSpPr>
-          <p:cNvPr id="7" name="Slide Number Placeholder"/>
+          <a:xfrm>
+            <a:off x="0" y="8685213"/>
+            <a:ext cx="2971800" cy="458787"/>
+          </a:xfrm>
+          <a:prstGeom prst="rect">
+            <a:avLst/>
+          </a:prstGeom>
+        </p:spPr>
+        <p:txBody>
+          <a:bodyPr vert="horz" lIns="91440" tIns="45720" rIns="91440" bIns="45720" rtlCol="0" anchor="b"/>
+          <a:lstStyle>
+            <a:lvl1pPr algn="l">
+              <a:defRPr sz="1200"/>
+            </a:lvl1pPr>
+          </a:lstStyle>
+          <a:p>
+            <a:endParaRPr lang="en-US"/>
+          </a:p>
+        </p:txBody>
+      </p:sp>
+      <p:sp>
+        <p:nvSpPr>
+          <p:cNvPr id="7" name="Slide Number Placeholder 6"/>
           <p:cNvSpPr>
             <a:spLocks noGrp="1"/>
           </p:cNvSpPr>
@@ -282,25 +356,129 @@
           </p:nvPr>
         </p:nvSpPr>
         <p:spPr>
-          <a:prstGeom prst="rect">
-            <a:avLst/>
-          </a:prstGeom>
-        </p:spPr>
-        <p:txBody>
-          <a:bodyPr/>
-          <a:lstStyle/>
-          <a:p>
-            <a:endParaRPr/>
+          <a:xfrm>
+            <a:off x="3884613" y="8685213"/>
+            <a:ext cx="2971800" cy="458787"/>
+          </a:xfrm>
+          <a:prstGeom prst="rect">
+            <a:avLst/>
+          </a:prstGeom>
+        </p:spPr>
+        <p:txBody>
+          <a:bodyPr vert="horz" lIns="91440" tIns="45720" rIns="91440" bIns="45720" rtlCol="0" anchor="b"/>
+          <a:lstStyle>
+            <a:lvl1pPr algn="r">
+              <a:defRPr sz="1200"/>
+            </a:lvl1pPr>
+          </a:lstStyle>
+          <a:p>
+            <a:fld id="{8A5E5069-938F-C84E-A586-694C7FE4A8C1}" type="slidenum">
+              <a:rPr lang="en-US" smtClean="0"/>
+              <a:t>‹#›</a:t>
+            </a:fld>
+            <a:endParaRPr lang="en-US"/>
           </a:p>
         </p:txBody>
       </p:sp>
     </p:spTree>
+    <p:extLst>
+      <p:ext uri="{BB962C8B-B14F-4D97-AF65-F5344CB8AC3E}">
+        <p14:creationId xmlns:p14="http://schemas.microsoft.com/office/powerpoint/2010/main" val="265175574"/>
+      </p:ext>
+    </p:extLst>
   </p:cSld>
   <p:clrMap bg1="lt1" tx1="dk1" bg2="lt2" tx2="dk2" accent1="accent1" accent2="accent2" accent3="accent3" accent4="accent4" accent5="accent5" accent6="accent6" hlink="hlink" folHlink="folHlink"/>
   <p:notesStyle>
     <a:lvl1pPr marL="0" algn="l" defTabSz="914400" rtl="0" eaLnBrk="1" latinLnBrk="0" hangingPunct="1">
-      <a:defRPr sz="1200" kern="1200"/>
+      <a:defRPr sz="1200" kern="1200">
+        <a:solidFill>
+          <a:schemeClr val="tx1"/>
+        </a:solidFill>
+        <a:latin typeface="+mn-lt"/>
+        <a:ea typeface="+mn-ea"/>
+        <a:cs typeface="+mn-cs"/>
+      </a:defRPr>
     </a:lvl1pPr>
+    <a:lvl2pPr marL="457200" algn="l" defTabSz="914400" rtl="0" eaLnBrk="1" latinLnBrk="0" hangingPunct="1">
+      <a:defRPr sz="1200" kern="1200">
+        <a:solidFill>
+          <a:schemeClr val="tx1"/>
+        </a:solidFill>
+        <a:latin typeface="+mn-lt"/>
+        <a:ea typeface="+mn-ea"/>
+        <a:cs typeface="+mn-cs"/>
+      </a:defRPr>
+    </a:lvl2pPr>
+    <a:lvl3pPr marL="914400" algn="l" defTabSz="914400" rtl="0" eaLnBrk="1" latinLnBrk="0" hangingPunct="1">
+      <a:defRPr sz="1200" kern="1200">
+        <a:solidFill>
+          <a:schemeClr val="tx1"/>
+        </a:solidFill>
+        <a:latin typeface="+mn-lt"/>
+        <a:ea typeface="+mn-ea"/>
+        <a:cs typeface="+mn-cs"/>
+      </a:defRPr>
+    </a:lvl3pPr>
+    <a:lvl4pPr marL="1371600" algn="l" defTabSz="914400" rtl="0" eaLnBrk="1" latinLnBrk="0" hangingPunct="1">
+      <a:defRPr sz="1200" kern="1200">
+        <a:solidFill>
+          <a:schemeClr val="tx1"/>
+        </a:solidFill>
+        <a:latin typeface="+mn-lt"/>
+        <a:ea typeface="+mn-ea"/>
+        <a:cs typeface="+mn-cs"/>
+      </a:defRPr>
+    </a:lvl4pPr>
+    <a:lvl5pPr marL="1828800" algn="l" defTabSz="914400" rtl="0" eaLnBrk="1" latinLnBrk="0" hangingPunct="1">
+      <a:defRPr sz="1200" kern="1200">
+        <a:solidFill>
+          <a:schemeClr val="tx1"/>
+        </a:solidFill>
+        <a:latin typeface="+mn-lt"/>
+        <a:ea typeface="+mn-ea"/>
+        <a:cs typeface="+mn-cs"/>
+      </a:defRPr>
+    </a:lvl5pPr>
+    <a:lvl6pPr marL="2286000" algn="l" defTabSz="914400" rtl="0" eaLnBrk="1" latinLnBrk="0" hangingPunct="1">
+      <a:defRPr sz="1200" kern="1200">
+        <a:solidFill>
+          <a:schemeClr val="tx1"/>
+        </a:solidFill>
+        <a:latin typeface="+mn-lt"/>
+        <a:ea typeface="+mn-ea"/>
+        <a:cs typeface="+mn-cs"/>
+      </a:defRPr>
+    </a:lvl6pPr>
+    <a:lvl7pPr marL="2743200" algn="l" defTabSz="914400" rtl="0" eaLnBrk="1" latinLnBrk="0" hangingPunct="1">
+      <a:defRPr sz="1200" kern="1200">
+        <a:solidFill>
+          <a:schemeClr val="tx1"/>
+        </a:solidFill>
+        <a:latin typeface="+mn-lt"/>
+        <a:ea typeface="+mn-ea"/>
+        <a:cs typeface="+mn-cs"/>
+      </a:defRPr>
+    </a:lvl7pPr>
+    <a:lvl8pPr marL="3200400" algn="l" defTabSz="914400" rtl="0" eaLnBrk="1" latinLnBrk="0" hangingPunct="1">
+      <a:defRPr sz="1200" kern="1200">
+        <a:solidFill>
+          <a:schemeClr val="tx1"/>
+        </a:solidFill>
+        <a:latin typeface="+mn-lt"/>
+        <a:ea typeface="+mn-ea"/>
+        <a:cs typeface="+mn-cs"/>
+      </a:defRPr>
+    </a:lvl8pPr>
+    <a:lvl9pPr marL="3657600" algn="l" defTabSz="914400" rtl="0" eaLnBrk="1" latinLnBrk="0" hangingPunct="1">
+      <a:defRPr sz="1200" kern="1200">
+        <a:solidFill>
+          <a:schemeClr val="tx1"/>
+        </a:solidFill>
+        <a:latin typeface="+mn-lt"/>
+        <a:ea typeface="+mn-ea"/>
+        <a:cs typeface="+mn-cs"/>
+      </a:defRPr>
+    </a:lvl9pPr>
   </p:notesStyle>
 </p:notesMaster>
 </file>
@@ -4711,7 +4889,7 @@
 </file>
 
 <file path=ppt/slideLayouts/slideLayout1.xml><?xml version="1.0" encoding="utf-8"?>
-<p:sldLayout xmlns:a="http://schemas.openxmlformats.org/drawingml/2006/main" xmlns:r="http://schemas.openxmlformats.org/officeDocument/2006/relationships" xmlns:p="http://schemas.openxmlformats.org/presentationml/2006/main" type="title">
+<p:sldLayout xmlns:a="http://schemas.openxmlformats.org/drawingml/2006/main" xmlns:r="http://schemas.openxmlformats.org/officeDocument/2006/relationships" xmlns:p="http://schemas.openxmlformats.org/presentationml/2006/main" type="title" preserve="1">
   <p:cSld name="Title Slide">
     <p:spTree>
       <p:nvGrpSpPr>
@@ -4727,7 +4905,2641 @@
           <a:chExt cx="0" cy="0"/>
         </a:xfrm>
       </p:grpSpPr>
+      <p:sp>
+        <p:nvSpPr>
+          <p:cNvPr id="2" name="Title 1">
+            <a:extLst>
+              <a:ext uri="{FF2B5EF4-FFF2-40B4-BE49-F238E27FC236}">
+                <a16:creationId xmlns:a16="http://schemas.microsoft.com/office/drawing/2014/main" id="{F00BB303-EDA5-1C19-8C41-0941CF994D5A}"/>
+              </a:ext>
+            </a:extLst>
+          </p:cNvPr>
+          <p:cNvSpPr>
+            <a:spLocks noGrp="1"/>
+          </p:cNvSpPr>
+          <p:nvPr>
+            <p:ph type="ctrTitle"/>
+          </p:nvPr>
+        </p:nvSpPr>
+        <p:spPr>
+          <a:xfrm>
+            <a:off x="1524000" y="1122363"/>
+            <a:ext cx="9144000" cy="2387600"/>
+          </a:xfrm>
+        </p:spPr>
+        <p:txBody>
+          <a:bodyPr anchor="b"/>
+          <a:lstStyle>
+            <a:lvl1pPr algn="ctr">
+              <a:defRPr sz="6000"/>
+            </a:lvl1pPr>
+          </a:lstStyle>
+          <a:p>
+            <a:r>
+              <a:rPr lang="en-US"/>
+              <a:t>Click to edit Master title style</a:t>
+            </a:r>
+          </a:p>
+        </p:txBody>
+      </p:sp>
+      <p:sp>
+        <p:nvSpPr>
+          <p:cNvPr id="3" name="Subtitle 2">
+            <a:extLst>
+              <a:ext uri="{FF2B5EF4-FFF2-40B4-BE49-F238E27FC236}">
+                <a16:creationId xmlns:a16="http://schemas.microsoft.com/office/drawing/2014/main" id="{1617D73F-143E-C88B-20E5-DE183C2FF32A}"/>
+              </a:ext>
+            </a:extLst>
+          </p:cNvPr>
+          <p:cNvSpPr>
+            <a:spLocks noGrp="1"/>
+          </p:cNvSpPr>
+          <p:nvPr>
+            <p:ph type="subTitle" idx="1"/>
+          </p:nvPr>
+        </p:nvSpPr>
+        <p:spPr>
+          <a:xfrm>
+            <a:off x="1524000" y="3602038"/>
+            <a:ext cx="9144000" cy="1655762"/>
+          </a:xfrm>
+        </p:spPr>
+        <p:txBody>
+          <a:bodyPr/>
+          <a:lstStyle>
+            <a:lvl1pPr marL="0" indent="0" algn="ctr">
+              <a:buNone/>
+              <a:defRPr sz="2400"/>
+            </a:lvl1pPr>
+            <a:lvl2pPr marL="457200" indent="0" algn="ctr">
+              <a:buNone/>
+              <a:defRPr sz="2000"/>
+            </a:lvl2pPr>
+            <a:lvl3pPr marL="914400" indent="0" algn="ctr">
+              <a:buNone/>
+              <a:defRPr sz="1800"/>
+            </a:lvl3pPr>
+            <a:lvl4pPr marL="1371600" indent="0" algn="ctr">
+              <a:buNone/>
+              <a:defRPr sz="1600"/>
+            </a:lvl4pPr>
+            <a:lvl5pPr marL="1828800" indent="0" algn="ctr">
+              <a:buNone/>
+              <a:defRPr sz="1600"/>
+            </a:lvl5pPr>
+            <a:lvl6pPr marL="2286000" indent="0" algn="ctr">
+              <a:buNone/>
+              <a:defRPr sz="1600"/>
+            </a:lvl6pPr>
+            <a:lvl7pPr marL="2743200" indent="0" algn="ctr">
+              <a:buNone/>
+              <a:defRPr sz="1600"/>
+            </a:lvl7pPr>
+            <a:lvl8pPr marL="3200400" indent="0" algn="ctr">
+              <a:buNone/>
+              <a:defRPr sz="1600"/>
+            </a:lvl8pPr>
+            <a:lvl9pPr marL="3657600" indent="0" algn="ctr">
+              <a:buNone/>
+              <a:defRPr sz="1600"/>
+            </a:lvl9pPr>
+          </a:lstStyle>
+          <a:p>
+            <a:r>
+              <a:rPr lang="en-US"/>
+              <a:t>Click to edit Master subtitle style</a:t>
+            </a:r>
+          </a:p>
+        </p:txBody>
+      </p:sp>
+      <p:sp>
+        <p:nvSpPr>
+          <p:cNvPr id="4" name="Date Placeholder 3">
+            <a:extLst>
+              <a:ext uri="{FF2B5EF4-FFF2-40B4-BE49-F238E27FC236}">
+                <a16:creationId xmlns:a16="http://schemas.microsoft.com/office/drawing/2014/main" id="{3AC0A2B8-FB90-5D15-34EE-422500070821}"/>
+              </a:ext>
+            </a:extLst>
+          </p:cNvPr>
+          <p:cNvSpPr>
+            <a:spLocks noGrp="1"/>
+          </p:cNvSpPr>
+          <p:nvPr>
+            <p:ph type="dt" sz="half" idx="10"/>
+          </p:nvPr>
+        </p:nvSpPr>
+        <p:spPr/>
+        <p:txBody>
+          <a:bodyPr/>
+          <a:lstStyle/>
+          <a:p>
+            <a:fld id="{C51537AA-315F-204E-9EA9-888A22916B59}" type="datetimeFigureOut">
+              <a:rPr lang="en-US" smtClean="0"/>
+              <a:t>8/22/26</a:t>
+            </a:fld>
+            <a:endParaRPr lang="en-US"/>
+          </a:p>
+        </p:txBody>
+      </p:sp>
+      <p:sp>
+        <p:nvSpPr>
+          <p:cNvPr id="5" name="Footer Placeholder 4">
+            <a:extLst>
+              <a:ext uri="{FF2B5EF4-FFF2-40B4-BE49-F238E27FC236}">
+                <a16:creationId xmlns:a16="http://schemas.microsoft.com/office/drawing/2014/main" id="{965FB58F-61CC-EBCB-667A-E840596AB8EF}"/>
+              </a:ext>
+            </a:extLst>
+          </p:cNvPr>
+          <p:cNvSpPr>
+            <a:spLocks noGrp="1"/>
+          </p:cNvSpPr>
+          <p:nvPr>
+            <p:ph type="ftr" sz="quarter" idx="11"/>
+          </p:nvPr>
+        </p:nvSpPr>
+        <p:spPr/>
+        <p:txBody>
+          <a:bodyPr/>
+          <a:lstStyle/>
+          <a:p>
+            <a:endParaRPr lang="en-US"/>
+          </a:p>
+        </p:txBody>
+      </p:sp>
+      <p:sp>
+        <p:nvSpPr>
+          <p:cNvPr id="6" name="Slide Number Placeholder 5">
+            <a:extLst>
+              <a:ext uri="{FF2B5EF4-FFF2-40B4-BE49-F238E27FC236}">
+                <a16:creationId xmlns:a16="http://schemas.microsoft.com/office/drawing/2014/main" id="{A8D12900-6FB1-B78C-68D1-D8259222880B}"/>
+              </a:ext>
+            </a:extLst>
+          </p:cNvPr>
+          <p:cNvSpPr>
+            <a:spLocks noGrp="1"/>
+          </p:cNvSpPr>
+          <p:nvPr>
+            <p:ph type="sldNum" sz="quarter" idx="12"/>
+          </p:nvPr>
+        </p:nvSpPr>
+        <p:spPr/>
+        <p:txBody>
+          <a:bodyPr/>
+          <a:lstStyle/>
+          <a:p>
+            <a:fld id="{25E5E6C5-729B-4849-AC0C-1ABDA3863663}" type="slidenum">
+              <a:rPr lang="en-US" smtClean="0"/>
+              <a:t>‹#›</a:t>
+            </a:fld>
+            <a:endParaRPr lang="en-US"/>
+          </a:p>
+        </p:txBody>
+      </p:sp>
     </p:spTree>
+    <p:extLst>
+      <p:ext uri="{BB962C8B-B14F-4D97-AF65-F5344CB8AC3E}">
+        <p14:creationId xmlns:p14="http://schemas.microsoft.com/office/powerpoint/2010/main" val="2687622063"/>
+      </p:ext>
+    </p:extLst>
+  </p:cSld>
+  <p:clrMapOvr>
+    <a:masterClrMapping/>
+  </p:clrMapOvr>
+</p:sldLayout>
+</file>
+
+<file path=ppt/slideLayouts/slideLayout10.xml><?xml version="1.0" encoding="utf-8"?>
+<p:sldLayout xmlns:a="http://schemas.openxmlformats.org/drawingml/2006/main" xmlns:r="http://schemas.openxmlformats.org/officeDocument/2006/relationships" xmlns:p="http://schemas.openxmlformats.org/presentationml/2006/main" type="vertTx" preserve="1">
+  <p:cSld name="Title and Vertical Text">
+    <p:spTree>
+      <p:nvGrpSpPr>
+        <p:cNvPr id="1" name=""/>
+        <p:cNvGrpSpPr/>
+        <p:nvPr/>
+      </p:nvGrpSpPr>
+      <p:grpSpPr>
+        <a:xfrm>
+          <a:off x="0" y="0"/>
+          <a:ext cx="0" cy="0"/>
+          <a:chOff x="0" y="0"/>
+          <a:chExt cx="0" cy="0"/>
+        </a:xfrm>
+      </p:grpSpPr>
+      <p:sp>
+        <p:nvSpPr>
+          <p:cNvPr id="2" name="Title 1">
+            <a:extLst>
+              <a:ext uri="{FF2B5EF4-FFF2-40B4-BE49-F238E27FC236}">
+                <a16:creationId xmlns:a16="http://schemas.microsoft.com/office/drawing/2014/main" id="{87A0F717-7C93-2546-F30F-96A1E9533BBC}"/>
+              </a:ext>
+            </a:extLst>
+          </p:cNvPr>
+          <p:cNvSpPr>
+            <a:spLocks noGrp="1"/>
+          </p:cNvSpPr>
+          <p:nvPr>
+            <p:ph type="title"/>
+          </p:nvPr>
+        </p:nvSpPr>
+        <p:spPr/>
+        <p:txBody>
+          <a:bodyPr/>
+          <a:lstStyle/>
+          <a:p>
+            <a:r>
+              <a:rPr lang="en-US"/>
+              <a:t>Click to edit Master title style</a:t>
+            </a:r>
+          </a:p>
+        </p:txBody>
+      </p:sp>
+      <p:sp>
+        <p:nvSpPr>
+          <p:cNvPr id="3" name="Vertical Text Placeholder 2">
+            <a:extLst>
+              <a:ext uri="{FF2B5EF4-FFF2-40B4-BE49-F238E27FC236}">
+                <a16:creationId xmlns:a16="http://schemas.microsoft.com/office/drawing/2014/main" id="{98BA0402-362F-C691-BBD9-47D2DA7C27B7}"/>
+              </a:ext>
+            </a:extLst>
+          </p:cNvPr>
+          <p:cNvSpPr>
+            <a:spLocks noGrp="1"/>
+          </p:cNvSpPr>
+          <p:nvPr>
+            <p:ph type="body" orient="vert" idx="1"/>
+          </p:nvPr>
+        </p:nvSpPr>
+        <p:spPr/>
+        <p:txBody>
+          <a:bodyPr vert="eaVert"/>
+          <a:lstStyle/>
+          <a:p>
+            <a:pPr lvl="0"/>
+            <a:r>
+              <a:rPr lang="en-US"/>
+              <a:t>Click to edit Master text styles</a:t>
+            </a:r>
+          </a:p>
+          <a:p>
+            <a:pPr lvl="1"/>
+            <a:r>
+              <a:rPr lang="en-US"/>
+              <a:t>Second level</a:t>
+            </a:r>
+          </a:p>
+          <a:p>
+            <a:pPr lvl="2"/>
+            <a:r>
+              <a:rPr lang="en-US"/>
+              <a:t>Third level</a:t>
+            </a:r>
+          </a:p>
+          <a:p>
+            <a:pPr lvl="3"/>
+            <a:r>
+              <a:rPr lang="en-US"/>
+              <a:t>Fourth level</a:t>
+            </a:r>
+          </a:p>
+          <a:p>
+            <a:pPr lvl="4"/>
+            <a:r>
+              <a:rPr lang="en-US"/>
+              <a:t>Fifth level</a:t>
+            </a:r>
+          </a:p>
+        </p:txBody>
+      </p:sp>
+      <p:sp>
+        <p:nvSpPr>
+          <p:cNvPr id="4" name="Date Placeholder 3">
+            <a:extLst>
+              <a:ext uri="{FF2B5EF4-FFF2-40B4-BE49-F238E27FC236}">
+                <a16:creationId xmlns:a16="http://schemas.microsoft.com/office/drawing/2014/main" id="{44B6AEF8-7EEC-08F2-C7AC-ABB8CE15CCFD}"/>
+              </a:ext>
+            </a:extLst>
+          </p:cNvPr>
+          <p:cNvSpPr>
+            <a:spLocks noGrp="1"/>
+          </p:cNvSpPr>
+          <p:nvPr>
+            <p:ph type="dt" sz="half" idx="10"/>
+          </p:nvPr>
+        </p:nvSpPr>
+        <p:spPr/>
+        <p:txBody>
+          <a:bodyPr/>
+          <a:lstStyle/>
+          <a:p>
+            <a:fld id="{C51537AA-315F-204E-9EA9-888A22916B59}" type="datetimeFigureOut">
+              <a:rPr lang="en-US" smtClean="0"/>
+              <a:t>8/22/26</a:t>
+            </a:fld>
+            <a:endParaRPr lang="en-US"/>
+          </a:p>
+        </p:txBody>
+      </p:sp>
+      <p:sp>
+        <p:nvSpPr>
+          <p:cNvPr id="5" name="Footer Placeholder 4">
+            <a:extLst>
+              <a:ext uri="{FF2B5EF4-FFF2-40B4-BE49-F238E27FC236}">
+                <a16:creationId xmlns:a16="http://schemas.microsoft.com/office/drawing/2014/main" id="{C8A788B5-349D-3D3B-E392-62BEE84B245A}"/>
+              </a:ext>
+            </a:extLst>
+          </p:cNvPr>
+          <p:cNvSpPr>
+            <a:spLocks noGrp="1"/>
+          </p:cNvSpPr>
+          <p:nvPr>
+            <p:ph type="ftr" sz="quarter" idx="11"/>
+          </p:nvPr>
+        </p:nvSpPr>
+        <p:spPr/>
+        <p:txBody>
+          <a:bodyPr/>
+          <a:lstStyle/>
+          <a:p>
+            <a:endParaRPr lang="en-US"/>
+          </a:p>
+        </p:txBody>
+      </p:sp>
+      <p:sp>
+        <p:nvSpPr>
+          <p:cNvPr id="6" name="Slide Number Placeholder 5">
+            <a:extLst>
+              <a:ext uri="{FF2B5EF4-FFF2-40B4-BE49-F238E27FC236}">
+                <a16:creationId xmlns:a16="http://schemas.microsoft.com/office/drawing/2014/main" id="{B8632967-4B10-51B3-1FF5-C8A63160888F}"/>
+              </a:ext>
+            </a:extLst>
+          </p:cNvPr>
+          <p:cNvSpPr>
+            <a:spLocks noGrp="1"/>
+          </p:cNvSpPr>
+          <p:nvPr>
+            <p:ph type="sldNum" sz="quarter" idx="12"/>
+          </p:nvPr>
+        </p:nvSpPr>
+        <p:spPr/>
+        <p:txBody>
+          <a:bodyPr/>
+          <a:lstStyle/>
+          <a:p>
+            <a:fld id="{25E5E6C5-729B-4849-AC0C-1ABDA3863663}" type="slidenum">
+              <a:rPr lang="en-US" smtClean="0"/>
+              <a:t>‹#›</a:t>
+            </a:fld>
+            <a:endParaRPr lang="en-US"/>
+          </a:p>
+        </p:txBody>
+      </p:sp>
+    </p:spTree>
+    <p:extLst>
+      <p:ext uri="{BB962C8B-B14F-4D97-AF65-F5344CB8AC3E}">
+        <p14:creationId xmlns:p14="http://schemas.microsoft.com/office/powerpoint/2010/main" val="1397170473"/>
+      </p:ext>
+    </p:extLst>
+  </p:cSld>
+  <p:clrMapOvr>
+    <a:masterClrMapping/>
+  </p:clrMapOvr>
+</p:sldLayout>
+</file>
+
+<file path=ppt/slideLayouts/slideLayout11.xml><?xml version="1.0" encoding="utf-8"?>
+<p:sldLayout xmlns:a="http://schemas.openxmlformats.org/drawingml/2006/main" xmlns:r="http://schemas.openxmlformats.org/officeDocument/2006/relationships" xmlns:p="http://schemas.openxmlformats.org/presentationml/2006/main" type="vertTitleAndTx" preserve="1">
+  <p:cSld name="Vertical Title and Text">
+    <p:spTree>
+      <p:nvGrpSpPr>
+        <p:cNvPr id="1" name=""/>
+        <p:cNvGrpSpPr/>
+        <p:nvPr/>
+      </p:nvGrpSpPr>
+      <p:grpSpPr>
+        <a:xfrm>
+          <a:off x="0" y="0"/>
+          <a:ext cx="0" cy="0"/>
+          <a:chOff x="0" y="0"/>
+          <a:chExt cx="0" cy="0"/>
+        </a:xfrm>
+      </p:grpSpPr>
+      <p:sp>
+        <p:nvSpPr>
+          <p:cNvPr id="2" name="Vertical Title 1">
+            <a:extLst>
+              <a:ext uri="{FF2B5EF4-FFF2-40B4-BE49-F238E27FC236}">
+                <a16:creationId xmlns:a16="http://schemas.microsoft.com/office/drawing/2014/main" id="{05AA6D4B-40FF-3254-4383-3DE95C2FBAF5}"/>
+              </a:ext>
+            </a:extLst>
+          </p:cNvPr>
+          <p:cNvSpPr>
+            <a:spLocks noGrp="1"/>
+          </p:cNvSpPr>
+          <p:nvPr>
+            <p:ph type="title" orient="vert"/>
+          </p:nvPr>
+        </p:nvSpPr>
+        <p:spPr>
+          <a:xfrm>
+            <a:off x="8724900" y="365125"/>
+            <a:ext cx="2628900" cy="5811838"/>
+          </a:xfrm>
+        </p:spPr>
+        <p:txBody>
+          <a:bodyPr vert="eaVert"/>
+          <a:lstStyle/>
+          <a:p>
+            <a:r>
+              <a:rPr lang="en-US"/>
+              <a:t>Click to edit Master title style</a:t>
+            </a:r>
+          </a:p>
+        </p:txBody>
+      </p:sp>
+      <p:sp>
+        <p:nvSpPr>
+          <p:cNvPr id="3" name="Vertical Text Placeholder 2">
+            <a:extLst>
+              <a:ext uri="{FF2B5EF4-FFF2-40B4-BE49-F238E27FC236}">
+                <a16:creationId xmlns:a16="http://schemas.microsoft.com/office/drawing/2014/main" id="{F57516BF-E6C2-FB30-D1E4-3756862AC7E9}"/>
+              </a:ext>
+            </a:extLst>
+          </p:cNvPr>
+          <p:cNvSpPr>
+            <a:spLocks noGrp="1"/>
+          </p:cNvSpPr>
+          <p:nvPr>
+            <p:ph type="body" orient="vert" idx="1"/>
+          </p:nvPr>
+        </p:nvSpPr>
+        <p:spPr>
+          <a:xfrm>
+            <a:off x="838200" y="365125"/>
+            <a:ext cx="7734300" cy="5811838"/>
+          </a:xfrm>
+        </p:spPr>
+        <p:txBody>
+          <a:bodyPr vert="eaVert"/>
+          <a:lstStyle/>
+          <a:p>
+            <a:pPr lvl="0"/>
+            <a:r>
+              <a:rPr lang="en-US"/>
+              <a:t>Click to edit Master text styles</a:t>
+            </a:r>
+          </a:p>
+          <a:p>
+            <a:pPr lvl="1"/>
+            <a:r>
+              <a:rPr lang="en-US"/>
+              <a:t>Second level</a:t>
+            </a:r>
+          </a:p>
+          <a:p>
+            <a:pPr lvl="2"/>
+            <a:r>
+              <a:rPr lang="en-US"/>
+              <a:t>Third level</a:t>
+            </a:r>
+          </a:p>
+          <a:p>
+            <a:pPr lvl="3"/>
+            <a:r>
+              <a:rPr lang="en-US"/>
+              <a:t>Fourth level</a:t>
+            </a:r>
+          </a:p>
+          <a:p>
+            <a:pPr lvl="4"/>
+            <a:r>
+              <a:rPr lang="en-US"/>
+              <a:t>Fifth level</a:t>
+            </a:r>
+          </a:p>
+        </p:txBody>
+      </p:sp>
+      <p:sp>
+        <p:nvSpPr>
+          <p:cNvPr id="4" name="Date Placeholder 3">
+            <a:extLst>
+              <a:ext uri="{FF2B5EF4-FFF2-40B4-BE49-F238E27FC236}">
+                <a16:creationId xmlns:a16="http://schemas.microsoft.com/office/drawing/2014/main" id="{2261E060-DCA5-8D91-E74A-F5F5FEF8DA78}"/>
+              </a:ext>
+            </a:extLst>
+          </p:cNvPr>
+          <p:cNvSpPr>
+            <a:spLocks noGrp="1"/>
+          </p:cNvSpPr>
+          <p:nvPr>
+            <p:ph type="dt" sz="half" idx="10"/>
+          </p:nvPr>
+        </p:nvSpPr>
+        <p:spPr/>
+        <p:txBody>
+          <a:bodyPr/>
+          <a:lstStyle/>
+          <a:p>
+            <a:fld id="{C51537AA-315F-204E-9EA9-888A22916B59}" type="datetimeFigureOut">
+              <a:rPr lang="en-US" smtClean="0"/>
+              <a:t>8/22/26</a:t>
+            </a:fld>
+            <a:endParaRPr lang="en-US"/>
+          </a:p>
+        </p:txBody>
+      </p:sp>
+      <p:sp>
+        <p:nvSpPr>
+          <p:cNvPr id="5" name="Footer Placeholder 4">
+            <a:extLst>
+              <a:ext uri="{FF2B5EF4-FFF2-40B4-BE49-F238E27FC236}">
+                <a16:creationId xmlns:a16="http://schemas.microsoft.com/office/drawing/2014/main" id="{F131D593-9EC8-080D-BD76-DDE228E7E625}"/>
+              </a:ext>
+            </a:extLst>
+          </p:cNvPr>
+          <p:cNvSpPr>
+            <a:spLocks noGrp="1"/>
+          </p:cNvSpPr>
+          <p:nvPr>
+            <p:ph type="ftr" sz="quarter" idx="11"/>
+          </p:nvPr>
+        </p:nvSpPr>
+        <p:spPr/>
+        <p:txBody>
+          <a:bodyPr/>
+          <a:lstStyle/>
+          <a:p>
+            <a:endParaRPr lang="en-US"/>
+          </a:p>
+        </p:txBody>
+      </p:sp>
+      <p:sp>
+        <p:nvSpPr>
+          <p:cNvPr id="6" name="Slide Number Placeholder 5">
+            <a:extLst>
+              <a:ext uri="{FF2B5EF4-FFF2-40B4-BE49-F238E27FC236}">
+                <a16:creationId xmlns:a16="http://schemas.microsoft.com/office/drawing/2014/main" id="{CA2B503E-48B9-52C5-5BD2-06C9C5AC7D0D}"/>
+              </a:ext>
+            </a:extLst>
+          </p:cNvPr>
+          <p:cNvSpPr>
+            <a:spLocks noGrp="1"/>
+          </p:cNvSpPr>
+          <p:nvPr>
+            <p:ph type="sldNum" sz="quarter" idx="12"/>
+          </p:nvPr>
+        </p:nvSpPr>
+        <p:spPr/>
+        <p:txBody>
+          <a:bodyPr/>
+          <a:lstStyle/>
+          <a:p>
+            <a:fld id="{25E5E6C5-729B-4849-AC0C-1ABDA3863663}" type="slidenum">
+              <a:rPr lang="en-US" smtClean="0"/>
+              <a:t>‹#›</a:t>
+            </a:fld>
+            <a:endParaRPr lang="en-US"/>
+          </a:p>
+        </p:txBody>
+      </p:sp>
+    </p:spTree>
+    <p:extLst>
+      <p:ext uri="{BB962C8B-B14F-4D97-AF65-F5344CB8AC3E}">
+        <p14:creationId xmlns:p14="http://schemas.microsoft.com/office/powerpoint/2010/main" val="1297592562"/>
+      </p:ext>
+    </p:extLst>
+  </p:cSld>
+  <p:clrMapOvr>
+    <a:masterClrMapping/>
+  </p:clrMapOvr>
+</p:sldLayout>
+</file>
+
+<file path=ppt/slideLayouts/slideLayout12.xml><?xml version="1.0" encoding="utf-8"?>
+<p:sldLayout xmlns:a="http://schemas.openxmlformats.org/drawingml/2006/main" xmlns:r="http://schemas.openxmlformats.org/officeDocument/2006/relationships" xmlns:p="http://schemas.openxmlformats.org/presentationml/2006/main" type="title">
+  <p:cSld name="1_Title Slide">
+    <p:spTree>
+      <p:nvGrpSpPr>
+        <p:cNvPr id="1" name=""/>
+        <p:cNvGrpSpPr/>
+        <p:nvPr/>
+      </p:nvGrpSpPr>
+      <p:grpSpPr>
+        <a:xfrm>
+          <a:off x="0" y="0"/>
+          <a:ext cx="0" cy="0"/>
+          <a:chOff x="0" y="0"/>
+          <a:chExt cx="0" cy="0"/>
+        </a:xfrm>
+      </p:grpSpPr>
+    </p:spTree>
+    <p:extLst>
+      <p:ext uri="{BB962C8B-B14F-4D97-AF65-F5344CB8AC3E}">
+        <p14:creationId xmlns:p14="http://schemas.microsoft.com/office/powerpoint/2010/main" val="2078275508"/>
+      </p:ext>
+    </p:extLst>
+  </p:cSld>
+  <p:clrMapOvr>
+    <a:masterClrMapping/>
+  </p:clrMapOvr>
+</p:sldLayout>
+</file>
+
+<file path=ppt/slideLayouts/slideLayout2.xml><?xml version="1.0" encoding="utf-8"?>
+<p:sldLayout xmlns:a="http://schemas.openxmlformats.org/drawingml/2006/main" xmlns:r="http://schemas.openxmlformats.org/officeDocument/2006/relationships" xmlns:p="http://schemas.openxmlformats.org/presentationml/2006/main" type="obj" preserve="1">
+  <p:cSld name="Title and Content">
+    <p:spTree>
+      <p:nvGrpSpPr>
+        <p:cNvPr id="1" name=""/>
+        <p:cNvGrpSpPr/>
+        <p:nvPr/>
+      </p:nvGrpSpPr>
+      <p:grpSpPr>
+        <a:xfrm>
+          <a:off x="0" y="0"/>
+          <a:ext cx="0" cy="0"/>
+          <a:chOff x="0" y="0"/>
+          <a:chExt cx="0" cy="0"/>
+        </a:xfrm>
+      </p:grpSpPr>
+      <p:sp>
+        <p:nvSpPr>
+          <p:cNvPr id="2" name="Title 1">
+            <a:extLst>
+              <a:ext uri="{FF2B5EF4-FFF2-40B4-BE49-F238E27FC236}">
+                <a16:creationId xmlns:a16="http://schemas.microsoft.com/office/drawing/2014/main" id="{76B5E568-3781-6941-3197-4ED1908B4170}"/>
+              </a:ext>
+            </a:extLst>
+          </p:cNvPr>
+          <p:cNvSpPr>
+            <a:spLocks noGrp="1"/>
+          </p:cNvSpPr>
+          <p:nvPr>
+            <p:ph type="title"/>
+          </p:nvPr>
+        </p:nvSpPr>
+        <p:spPr/>
+        <p:txBody>
+          <a:bodyPr/>
+          <a:lstStyle/>
+          <a:p>
+            <a:r>
+              <a:rPr lang="en-US"/>
+              <a:t>Click to edit Master title style</a:t>
+            </a:r>
+          </a:p>
+        </p:txBody>
+      </p:sp>
+      <p:sp>
+        <p:nvSpPr>
+          <p:cNvPr id="3" name="Content Placeholder 2">
+            <a:extLst>
+              <a:ext uri="{FF2B5EF4-FFF2-40B4-BE49-F238E27FC236}">
+                <a16:creationId xmlns:a16="http://schemas.microsoft.com/office/drawing/2014/main" id="{291C681C-E0A7-2371-B25E-9A889B7C2F04}"/>
+              </a:ext>
+            </a:extLst>
+          </p:cNvPr>
+          <p:cNvSpPr>
+            <a:spLocks noGrp="1"/>
+          </p:cNvSpPr>
+          <p:nvPr>
+            <p:ph idx="1"/>
+          </p:nvPr>
+        </p:nvSpPr>
+        <p:spPr/>
+        <p:txBody>
+          <a:bodyPr/>
+          <a:lstStyle/>
+          <a:p>
+            <a:pPr lvl="0"/>
+            <a:r>
+              <a:rPr lang="en-US"/>
+              <a:t>Click to edit Master text styles</a:t>
+            </a:r>
+          </a:p>
+          <a:p>
+            <a:pPr lvl="1"/>
+            <a:r>
+              <a:rPr lang="en-US"/>
+              <a:t>Second level</a:t>
+            </a:r>
+          </a:p>
+          <a:p>
+            <a:pPr lvl="2"/>
+            <a:r>
+              <a:rPr lang="en-US"/>
+              <a:t>Third level</a:t>
+            </a:r>
+          </a:p>
+          <a:p>
+            <a:pPr lvl="3"/>
+            <a:r>
+              <a:rPr lang="en-US"/>
+              <a:t>Fourth level</a:t>
+            </a:r>
+          </a:p>
+          <a:p>
+            <a:pPr lvl="4"/>
+            <a:r>
+              <a:rPr lang="en-US"/>
+              <a:t>Fifth level</a:t>
+            </a:r>
+          </a:p>
+        </p:txBody>
+      </p:sp>
+      <p:sp>
+        <p:nvSpPr>
+          <p:cNvPr id="4" name="Date Placeholder 3">
+            <a:extLst>
+              <a:ext uri="{FF2B5EF4-FFF2-40B4-BE49-F238E27FC236}">
+                <a16:creationId xmlns:a16="http://schemas.microsoft.com/office/drawing/2014/main" id="{F76D42C7-F7F9-43FA-CFDF-A762922F02D3}"/>
+              </a:ext>
+            </a:extLst>
+          </p:cNvPr>
+          <p:cNvSpPr>
+            <a:spLocks noGrp="1"/>
+          </p:cNvSpPr>
+          <p:nvPr>
+            <p:ph type="dt" sz="half" idx="10"/>
+          </p:nvPr>
+        </p:nvSpPr>
+        <p:spPr/>
+        <p:txBody>
+          <a:bodyPr/>
+          <a:lstStyle/>
+          <a:p>
+            <a:fld id="{C51537AA-315F-204E-9EA9-888A22916B59}" type="datetimeFigureOut">
+              <a:rPr lang="en-US" smtClean="0"/>
+              <a:t>8/22/26</a:t>
+            </a:fld>
+            <a:endParaRPr lang="en-US"/>
+          </a:p>
+        </p:txBody>
+      </p:sp>
+      <p:sp>
+        <p:nvSpPr>
+          <p:cNvPr id="5" name="Footer Placeholder 4">
+            <a:extLst>
+              <a:ext uri="{FF2B5EF4-FFF2-40B4-BE49-F238E27FC236}">
+                <a16:creationId xmlns:a16="http://schemas.microsoft.com/office/drawing/2014/main" id="{78C6DB6C-4EE3-98DE-42B6-6CBC89A9D190}"/>
+              </a:ext>
+            </a:extLst>
+          </p:cNvPr>
+          <p:cNvSpPr>
+            <a:spLocks noGrp="1"/>
+          </p:cNvSpPr>
+          <p:nvPr>
+            <p:ph type="ftr" sz="quarter" idx="11"/>
+          </p:nvPr>
+        </p:nvSpPr>
+        <p:spPr/>
+        <p:txBody>
+          <a:bodyPr/>
+          <a:lstStyle/>
+          <a:p>
+            <a:endParaRPr lang="en-US"/>
+          </a:p>
+        </p:txBody>
+      </p:sp>
+      <p:sp>
+        <p:nvSpPr>
+          <p:cNvPr id="6" name="Slide Number Placeholder 5">
+            <a:extLst>
+              <a:ext uri="{FF2B5EF4-FFF2-40B4-BE49-F238E27FC236}">
+                <a16:creationId xmlns:a16="http://schemas.microsoft.com/office/drawing/2014/main" id="{23CDC120-9D6D-37A5-AF4A-538F3CCFFE4C}"/>
+              </a:ext>
+            </a:extLst>
+          </p:cNvPr>
+          <p:cNvSpPr>
+            <a:spLocks noGrp="1"/>
+          </p:cNvSpPr>
+          <p:nvPr>
+            <p:ph type="sldNum" sz="quarter" idx="12"/>
+          </p:nvPr>
+        </p:nvSpPr>
+        <p:spPr/>
+        <p:txBody>
+          <a:bodyPr/>
+          <a:lstStyle/>
+          <a:p>
+            <a:fld id="{25E5E6C5-729B-4849-AC0C-1ABDA3863663}" type="slidenum">
+              <a:rPr lang="en-US" smtClean="0"/>
+              <a:t>‹#›</a:t>
+            </a:fld>
+            <a:endParaRPr lang="en-US"/>
+          </a:p>
+        </p:txBody>
+      </p:sp>
+    </p:spTree>
+    <p:extLst>
+      <p:ext uri="{BB962C8B-B14F-4D97-AF65-F5344CB8AC3E}">
+        <p14:creationId xmlns:p14="http://schemas.microsoft.com/office/powerpoint/2010/main" val="2557402552"/>
+      </p:ext>
+    </p:extLst>
+  </p:cSld>
+  <p:clrMapOvr>
+    <a:masterClrMapping/>
+  </p:clrMapOvr>
+</p:sldLayout>
+</file>
+
+<file path=ppt/slideLayouts/slideLayout3.xml><?xml version="1.0" encoding="utf-8"?>
+<p:sldLayout xmlns:a="http://schemas.openxmlformats.org/drawingml/2006/main" xmlns:r="http://schemas.openxmlformats.org/officeDocument/2006/relationships" xmlns:p="http://schemas.openxmlformats.org/presentationml/2006/main" type="secHead" preserve="1">
+  <p:cSld name="Section Header">
+    <p:spTree>
+      <p:nvGrpSpPr>
+        <p:cNvPr id="1" name=""/>
+        <p:cNvGrpSpPr/>
+        <p:nvPr/>
+      </p:nvGrpSpPr>
+      <p:grpSpPr>
+        <a:xfrm>
+          <a:off x="0" y="0"/>
+          <a:ext cx="0" cy="0"/>
+          <a:chOff x="0" y="0"/>
+          <a:chExt cx="0" cy="0"/>
+        </a:xfrm>
+      </p:grpSpPr>
+      <p:sp>
+        <p:nvSpPr>
+          <p:cNvPr id="2" name="Title 1">
+            <a:extLst>
+              <a:ext uri="{FF2B5EF4-FFF2-40B4-BE49-F238E27FC236}">
+                <a16:creationId xmlns:a16="http://schemas.microsoft.com/office/drawing/2014/main" id="{2439D7DE-1CEC-8E53-94E7-6D6CBB6C40A8}"/>
+              </a:ext>
+            </a:extLst>
+          </p:cNvPr>
+          <p:cNvSpPr>
+            <a:spLocks noGrp="1"/>
+          </p:cNvSpPr>
+          <p:nvPr>
+            <p:ph type="title"/>
+          </p:nvPr>
+        </p:nvSpPr>
+        <p:spPr>
+          <a:xfrm>
+            <a:off x="831850" y="1709738"/>
+            <a:ext cx="10515600" cy="2852737"/>
+          </a:xfrm>
+        </p:spPr>
+        <p:txBody>
+          <a:bodyPr anchor="b"/>
+          <a:lstStyle>
+            <a:lvl1pPr>
+              <a:defRPr sz="6000"/>
+            </a:lvl1pPr>
+          </a:lstStyle>
+          <a:p>
+            <a:r>
+              <a:rPr lang="en-US"/>
+              <a:t>Click to edit Master title style</a:t>
+            </a:r>
+          </a:p>
+        </p:txBody>
+      </p:sp>
+      <p:sp>
+        <p:nvSpPr>
+          <p:cNvPr id="3" name="Text Placeholder 2">
+            <a:extLst>
+              <a:ext uri="{FF2B5EF4-FFF2-40B4-BE49-F238E27FC236}">
+                <a16:creationId xmlns:a16="http://schemas.microsoft.com/office/drawing/2014/main" id="{4BDEFC4D-F133-DA36-74C6-382BECC1ACA4}"/>
+              </a:ext>
+            </a:extLst>
+          </p:cNvPr>
+          <p:cNvSpPr>
+            <a:spLocks noGrp="1"/>
+          </p:cNvSpPr>
+          <p:nvPr>
+            <p:ph type="body" idx="1"/>
+          </p:nvPr>
+        </p:nvSpPr>
+        <p:spPr>
+          <a:xfrm>
+            <a:off x="831850" y="4589463"/>
+            <a:ext cx="10515600" cy="1500187"/>
+          </a:xfrm>
+        </p:spPr>
+        <p:txBody>
+          <a:bodyPr/>
+          <a:lstStyle>
+            <a:lvl1pPr marL="0" indent="0">
+              <a:buNone/>
+              <a:defRPr sz="2400">
+                <a:solidFill>
+                  <a:schemeClr val="tx1">
+                    <a:tint val="82000"/>
+                  </a:schemeClr>
+                </a:solidFill>
+              </a:defRPr>
+            </a:lvl1pPr>
+            <a:lvl2pPr marL="457200" indent="0">
+              <a:buNone/>
+              <a:defRPr sz="2000">
+                <a:solidFill>
+                  <a:schemeClr val="tx1">
+                    <a:tint val="82000"/>
+                  </a:schemeClr>
+                </a:solidFill>
+              </a:defRPr>
+            </a:lvl2pPr>
+            <a:lvl3pPr marL="914400" indent="0">
+              <a:buNone/>
+              <a:defRPr sz="1800">
+                <a:solidFill>
+                  <a:schemeClr val="tx1">
+                    <a:tint val="82000"/>
+                  </a:schemeClr>
+                </a:solidFill>
+              </a:defRPr>
+            </a:lvl3pPr>
+            <a:lvl4pPr marL="1371600" indent="0">
+              <a:buNone/>
+              <a:defRPr sz="1600">
+                <a:solidFill>
+                  <a:schemeClr val="tx1">
+                    <a:tint val="82000"/>
+                  </a:schemeClr>
+                </a:solidFill>
+              </a:defRPr>
+            </a:lvl4pPr>
+            <a:lvl5pPr marL="1828800" indent="0">
+              <a:buNone/>
+              <a:defRPr sz="1600">
+                <a:solidFill>
+                  <a:schemeClr val="tx1">
+                    <a:tint val="82000"/>
+                  </a:schemeClr>
+                </a:solidFill>
+              </a:defRPr>
+            </a:lvl5pPr>
+            <a:lvl6pPr marL="2286000" indent="0">
+              <a:buNone/>
+              <a:defRPr sz="1600">
+                <a:solidFill>
+                  <a:schemeClr val="tx1">
+                    <a:tint val="82000"/>
+                  </a:schemeClr>
+                </a:solidFill>
+              </a:defRPr>
+            </a:lvl6pPr>
+            <a:lvl7pPr marL="2743200" indent="0">
+              <a:buNone/>
+              <a:defRPr sz="1600">
+                <a:solidFill>
+                  <a:schemeClr val="tx1">
+                    <a:tint val="82000"/>
+                  </a:schemeClr>
+                </a:solidFill>
+              </a:defRPr>
+            </a:lvl7pPr>
+            <a:lvl8pPr marL="3200400" indent="0">
+              <a:buNone/>
+              <a:defRPr sz="1600">
+                <a:solidFill>
+                  <a:schemeClr val="tx1">
+                    <a:tint val="82000"/>
+                  </a:schemeClr>
+                </a:solidFill>
+              </a:defRPr>
+            </a:lvl8pPr>
+            <a:lvl9pPr marL="3657600" indent="0">
+              <a:buNone/>
+              <a:defRPr sz="1600">
+                <a:solidFill>
+                  <a:schemeClr val="tx1">
+                    <a:tint val="82000"/>
+                  </a:schemeClr>
+                </a:solidFill>
+              </a:defRPr>
+            </a:lvl9pPr>
+          </a:lstStyle>
+          <a:p>
+            <a:pPr lvl="0"/>
+            <a:r>
+              <a:rPr lang="en-US"/>
+              <a:t>Click to edit Master text styles</a:t>
+            </a:r>
+          </a:p>
+        </p:txBody>
+      </p:sp>
+      <p:sp>
+        <p:nvSpPr>
+          <p:cNvPr id="4" name="Date Placeholder 3">
+            <a:extLst>
+              <a:ext uri="{FF2B5EF4-FFF2-40B4-BE49-F238E27FC236}">
+                <a16:creationId xmlns:a16="http://schemas.microsoft.com/office/drawing/2014/main" id="{A854883E-F16D-701D-A1E1-2A216D7F709E}"/>
+              </a:ext>
+            </a:extLst>
+          </p:cNvPr>
+          <p:cNvSpPr>
+            <a:spLocks noGrp="1"/>
+          </p:cNvSpPr>
+          <p:nvPr>
+            <p:ph type="dt" sz="half" idx="10"/>
+          </p:nvPr>
+        </p:nvSpPr>
+        <p:spPr/>
+        <p:txBody>
+          <a:bodyPr/>
+          <a:lstStyle/>
+          <a:p>
+            <a:fld id="{C51537AA-315F-204E-9EA9-888A22916B59}" type="datetimeFigureOut">
+              <a:rPr lang="en-US" smtClean="0"/>
+              <a:t>8/22/26</a:t>
+            </a:fld>
+            <a:endParaRPr lang="en-US"/>
+          </a:p>
+        </p:txBody>
+      </p:sp>
+      <p:sp>
+        <p:nvSpPr>
+          <p:cNvPr id="5" name="Footer Placeholder 4">
+            <a:extLst>
+              <a:ext uri="{FF2B5EF4-FFF2-40B4-BE49-F238E27FC236}">
+                <a16:creationId xmlns:a16="http://schemas.microsoft.com/office/drawing/2014/main" id="{DBF2F618-1CA4-B987-9286-5648198C5149}"/>
+              </a:ext>
+            </a:extLst>
+          </p:cNvPr>
+          <p:cNvSpPr>
+            <a:spLocks noGrp="1"/>
+          </p:cNvSpPr>
+          <p:nvPr>
+            <p:ph type="ftr" sz="quarter" idx="11"/>
+          </p:nvPr>
+        </p:nvSpPr>
+        <p:spPr/>
+        <p:txBody>
+          <a:bodyPr/>
+          <a:lstStyle/>
+          <a:p>
+            <a:endParaRPr lang="en-US"/>
+          </a:p>
+        </p:txBody>
+      </p:sp>
+      <p:sp>
+        <p:nvSpPr>
+          <p:cNvPr id="6" name="Slide Number Placeholder 5">
+            <a:extLst>
+              <a:ext uri="{FF2B5EF4-FFF2-40B4-BE49-F238E27FC236}">
+                <a16:creationId xmlns:a16="http://schemas.microsoft.com/office/drawing/2014/main" id="{E1DCB726-BE3A-9BC9-69E9-BC15DDFFF7DB}"/>
+              </a:ext>
+            </a:extLst>
+          </p:cNvPr>
+          <p:cNvSpPr>
+            <a:spLocks noGrp="1"/>
+          </p:cNvSpPr>
+          <p:nvPr>
+            <p:ph type="sldNum" sz="quarter" idx="12"/>
+          </p:nvPr>
+        </p:nvSpPr>
+        <p:spPr/>
+        <p:txBody>
+          <a:bodyPr/>
+          <a:lstStyle/>
+          <a:p>
+            <a:fld id="{25E5E6C5-729B-4849-AC0C-1ABDA3863663}" type="slidenum">
+              <a:rPr lang="en-US" smtClean="0"/>
+              <a:t>‹#›</a:t>
+            </a:fld>
+            <a:endParaRPr lang="en-US"/>
+          </a:p>
+        </p:txBody>
+      </p:sp>
+    </p:spTree>
+    <p:extLst>
+      <p:ext uri="{BB962C8B-B14F-4D97-AF65-F5344CB8AC3E}">
+        <p14:creationId xmlns:p14="http://schemas.microsoft.com/office/powerpoint/2010/main" val="1165889566"/>
+      </p:ext>
+    </p:extLst>
+  </p:cSld>
+  <p:clrMapOvr>
+    <a:masterClrMapping/>
+  </p:clrMapOvr>
+</p:sldLayout>
+</file>
+
+<file path=ppt/slideLayouts/slideLayout4.xml><?xml version="1.0" encoding="utf-8"?>
+<p:sldLayout xmlns:a="http://schemas.openxmlformats.org/drawingml/2006/main" xmlns:r="http://schemas.openxmlformats.org/officeDocument/2006/relationships" xmlns:p="http://schemas.openxmlformats.org/presentationml/2006/main" type="twoObj" preserve="1">
+  <p:cSld name="Two Content">
+    <p:spTree>
+      <p:nvGrpSpPr>
+        <p:cNvPr id="1" name=""/>
+        <p:cNvGrpSpPr/>
+        <p:nvPr/>
+      </p:nvGrpSpPr>
+      <p:grpSpPr>
+        <a:xfrm>
+          <a:off x="0" y="0"/>
+          <a:ext cx="0" cy="0"/>
+          <a:chOff x="0" y="0"/>
+          <a:chExt cx="0" cy="0"/>
+        </a:xfrm>
+      </p:grpSpPr>
+      <p:sp>
+        <p:nvSpPr>
+          <p:cNvPr id="2" name="Title 1">
+            <a:extLst>
+              <a:ext uri="{FF2B5EF4-FFF2-40B4-BE49-F238E27FC236}">
+                <a16:creationId xmlns:a16="http://schemas.microsoft.com/office/drawing/2014/main" id="{EE7B780E-8B31-49BE-339A-B0692D73E827}"/>
+              </a:ext>
+            </a:extLst>
+          </p:cNvPr>
+          <p:cNvSpPr>
+            <a:spLocks noGrp="1"/>
+          </p:cNvSpPr>
+          <p:nvPr>
+            <p:ph type="title"/>
+          </p:nvPr>
+        </p:nvSpPr>
+        <p:spPr/>
+        <p:txBody>
+          <a:bodyPr/>
+          <a:lstStyle/>
+          <a:p>
+            <a:r>
+              <a:rPr lang="en-US"/>
+              <a:t>Click to edit Master title style</a:t>
+            </a:r>
+          </a:p>
+        </p:txBody>
+      </p:sp>
+      <p:sp>
+        <p:nvSpPr>
+          <p:cNvPr id="3" name="Content Placeholder 2">
+            <a:extLst>
+              <a:ext uri="{FF2B5EF4-FFF2-40B4-BE49-F238E27FC236}">
+                <a16:creationId xmlns:a16="http://schemas.microsoft.com/office/drawing/2014/main" id="{C02A08B9-08A8-6809-F870-F3582F559C47}"/>
+              </a:ext>
+            </a:extLst>
+          </p:cNvPr>
+          <p:cNvSpPr>
+            <a:spLocks noGrp="1"/>
+          </p:cNvSpPr>
+          <p:nvPr>
+            <p:ph sz="half" idx="1"/>
+          </p:nvPr>
+        </p:nvSpPr>
+        <p:spPr>
+          <a:xfrm>
+            <a:off x="838200" y="1825625"/>
+            <a:ext cx="5181600" cy="4351338"/>
+          </a:xfrm>
+        </p:spPr>
+        <p:txBody>
+          <a:bodyPr/>
+          <a:lstStyle/>
+          <a:p>
+            <a:pPr lvl="0"/>
+            <a:r>
+              <a:rPr lang="en-US"/>
+              <a:t>Click to edit Master text styles</a:t>
+            </a:r>
+          </a:p>
+          <a:p>
+            <a:pPr lvl="1"/>
+            <a:r>
+              <a:rPr lang="en-US"/>
+              <a:t>Second level</a:t>
+            </a:r>
+          </a:p>
+          <a:p>
+            <a:pPr lvl="2"/>
+            <a:r>
+              <a:rPr lang="en-US"/>
+              <a:t>Third level</a:t>
+            </a:r>
+          </a:p>
+          <a:p>
+            <a:pPr lvl="3"/>
+            <a:r>
+              <a:rPr lang="en-US"/>
+              <a:t>Fourth level</a:t>
+            </a:r>
+          </a:p>
+          <a:p>
+            <a:pPr lvl="4"/>
+            <a:r>
+              <a:rPr lang="en-US"/>
+              <a:t>Fifth level</a:t>
+            </a:r>
+          </a:p>
+        </p:txBody>
+      </p:sp>
+      <p:sp>
+        <p:nvSpPr>
+          <p:cNvPr id="4" name="Content Placeholder 3">
+            <a:extLst>
+              <a:ext uri="{FF2B5EF4-FFF2-40B4-BE49-F238E27FC236}">
+                <a16:creationId xmlns:a16="http://schemas.microsoft.com/office/drawing/2014/main" id="{05E5A5C9-F1F1-526C-0735-C364087338FF}"/>
+              </a:ext>
+            </a:extLst>
+          </p:cNvPr>
+          <p:cNvSpPr>
+            <a:spLocks noGrp="1"/>
+          </p:cNvSpPr>
+          <p:nvPr>
+            <p:ph sz="half" idx="2"/>
+          </p:nvPr>
+        </p:nvSpPr>
+        <p:spPr>
+          <a:xfrm>
+            <a:off x="6172200" y="1825625"/>
+            <a:ext cx="5181600" cy="4351338"/>
+          </a:xfrm>
+        </p:spPr>
+        <p:txBody>
+          <a:bodyPr/>
+          <a:lstStyle/>
+          <a:p>
+            <a:pPr lvl="0"/>
+            <a:r>
+              <a:rPr lang="en-US"/>
+              <a:t>Click to edit Master text styles</a:t>
+            </a:r>
+          </a:p>
+          <a:p>
+            <a:pPr lvl="1"/>
+            <a:r>
+              <a:rPr lang="en-US"/>
+              <a:t>Second level</a:t>
+            </a:r>
+          </a:p>
+          <a:p>
+            <a:pPr lvl="2"/>
+            <a:r>
+              <a:rPr lang="en-US"/>
+              <a:t>Third level</a:t>
+            </a:r>
+          </a:p>
+          <a:p>
+            <a:pPr lvl="3"/>
+            <a:r>
+              <a:rPr lang="en-US"/>
+              <a:t>Fourth level</a:t>
+            </a:r>
+          </a:p>
+          <a:p>
+            <a:pPr lvl="4"/>
+            <a:r>
+              <a:rPr lang="en-US"/>
+              <a:t>Fifth level</a:t>
+            </a:r>
+          </a:p>
+        </p:txBody>
+      </p:sp>
+      <p:sp>
+        <p:nvSpPr>
+          <p:cNvPr id="5" name="Date Placeholder 4">
+            <a:extLst>
+              <a:ext uri="{FF2B5EF4-FFF2-40B4-BE49-F238E27FC236}">
+                <a16:creationId xmlns:a16="http://schemas.microsoft.com/office/drawing/2014/main" id="{C2049C0B-EFED-6E2E-E8DA-4F749140C869}"/>
+              </a:ext>
+            </a:extLst>
+          </p:cNvPr>
+          <p:cNvSpPr>
+            <a:spLocks noGrp="1"/>
+          </p:cNvSpPr>
+          <p:nvPr>
+            <p:ph type="dt" sz="half" idx="10"/>
+          </p:nvPr>
+        </p:nvSpPr>
+        <p:spPr/>
+        <p:txBody>
+          <a:bodyPr/>
+          <a:lstStyle/>
+          <a:p>
+            <a:fld id="{C51537AA-315F-204E-9EA9-888A22916B59}" type="datetimeFigureOut">
+              <a:rPr lang="en-US" smtClean="0"/>
+              <a:t>8/22/26</a:t>
+            </a:fld>
+            <a:endParaRPr lang="en-US"/>
+          </a:p>
+        </p:txBody>
+      </p:sp>
+      <p:sp>
+        <p:nvSpPr>
+          <p:cNvPr id="6" name="Footer Placeholder 5">
+            <a:extLst>
+              <a:ext uri="{FF2B5EF4-FFF2-40B4-BE49-F238E27FC236}">
+                <a16:creationId xmlns:a16="http://schemas.microsoft.com/office/drawing/2014/main" id="{A9C2E1F6-1401-5FB4-0EF8-E9FF11F9AB81}"/>
+              </a:ext>
+            </a:extLst>
+          </p:cNvPr>
+          <p:cNvSpPr>
+            <a:spLocks noGrp="1"/>
+          </p:cNvSpPr>
+          <p:nvPr>
+            <p:ph type="ftr" sz="quarter" idx="11"/>
+          </p:nvPr>
+        </p:nvSpPr>
+        <p:spPr/>
+        <p:txBody>
+          <a:bodyPr/>
+          <a:lstStyle/>
+          <a:p>
+            <a:endParaRPr lang="en-US"/>
+          </a:p>
+        </p:txBody>
+      </p:sp>
+      <p:sp>
+        <p:nvSpPr>
+          <p:cNvPr id="7" name="Slide Number Placeholder 6">
+            <a:extLst>
+              <a:ext uri="{FF2B5EF4-FFF2-40B4-BE49-F238E27FC236}">
+                <a16:creationId xmlns:a16="http://schemas.microsoft.com/office/drawing/2014/main" id="{91FF8D28-9A1A-0DA1-315B-77E311F628DE}"/>
+              </a:ext>
+            </a:extLst>
+          </p:cNvPr>
+          <p:cNvSpPr>
+            <a:spLocks noGrp="1"/>
+          </p:cNvSpPr>
+          <p:nvPr>
+            <p:ph type="sldNum" sz="quarter" idx="12"/>
+          </p:nvPr>
+        </p:nvSpPr>
+        <p:spPr/>
+        <p:txBody>
+          <a:bodyPr/>
+          <a:lstStyle/>
+          <a:p>
+            <a:fld id="{25E5E6C5-729B-4849-AC0C-1ABDA3863663}" type="slidenum">
+              <a:rPr lang="en-US" smtClean="0"/>
+              <a:t>‹#›</a:t>
+            </a:fld>
+            <a:endParaRPr lang="en-US"/>
+          </a:p>
+        </p:txBody>
+      </p:sp>
+    </p:spTree>
+    <p:extLst>
+      <p:ext uri="{BB962C8B-B14F-4D97-AF65-F5344CB8AC3E}">
+        <p14:creationId xmlns:p14="http://schemas.microsoft.com/office/powerpoint/2010/main" val="747322668"/>
+      </p:ext>
+    </p:extLst>
+  </p:cSld>
+  <p:clrMapOvr>
+    <a:masterClrMapping/>
+  </p:clrMapOvr>
+</p:sldLayout>
+</file>
+
+<file path=ppt/slideLayouts/slideLayout5.xml><?xml version="1.0" encoding="utf-8"?>
+<p:sldLayout xmlns:a="http://schemas.openxmlformats.org/drawingml/2006/main" xmlns:r="http://schemas.openxmlformats.org/officeDocument/2006/relationships" xmlns:p="http://schemas.openxmlformats.org/presentationml/2006/main" type="twoTxTwoObj" preserve="1">
+  <p:cSld name="Comparison">
+    <p:spTree>
+      <p:nvGrpSpPr>
+        <p:cNvPr id="1" name=""/>
+        <p:cNvGrpSpPr/>
+        <p:nvPr/>
+      </p:nvGrpSpPr>
+      <p:grpSpPr>
+        <a:xfrm>
+          <a:off x="0" y="0"/>
+          <a:ext cx="0" cy="0"/>
+          <a:chOff x="0" y="0"/>
+          <a:chExt cx="0" cy="0"/>
+        </a:xfrm>
+      </p:grpSpPr>
+      <p:sp>
+        <p:nvSpPr>
+          <p:cNvPr id="2" name="Title 1">
+            <a:extLst>
+              <a:ext uri="{FF2B5EF4-FFF2-40B4-BE49-F238E27FC236}">
+                <a16:creationId xmlns:a16="http://schemas.microsoft.com/office/drawing/2014/main" id="{1FFBE9A4-CBF7-40B2-2CCA-C1F0B92E3B2D}"/>
+              </a:ext>
+            </a:extLst>
+          </p:cNvPr>
+          <p:cNvSpPr>
+            <a:spLocks noGrp="1"/>
+          </p:cNvSpPr>
+          <p:nvPr>
+            <p:ph type="title"/>
+          </p:nvPr>
+        </p:nvSpPr>
+        <p:spPr>
+          <a:xfrm>
+            <a:off x="839788" y="365125"/>
+            <a:ext cx="10515600" cy="1325563"/>
+          </a:xfrm>
+        </p:spPr>
+        <p:txBody>
+          <a:bodyPr/>
+          <a:lstStyle/>
+          <a:p>
+            <a:r>
+              <a:rPr lang="en-US"/>
+              <a:t>Click to edit Master title style</a:t>
+            </a:r>
+          </a:p>
+        </p:txBody>
+      </p:sp>
+      <p:sp>
+        <p:nvSpPr>
+          <p:cNvPr id="3" name="Text Placeholder 2">
+            <a:extLst>
+              <a:ext uri="{FF2B5EF4-FFF2-40B4-BE49-F238E27FC236}">
+                <a16:creationId xmlns:a16="http://schemas.microsoft.com/office/drawing/2014/main" id="{967501EC-023F-5ECD-839B-878A7236AFF9}"/>
+              </a:ext>
+            </a:extLst>
+          </p:cNvPr>
+          <p:cNvSpPr>
+            <a:spLocks noGrp="1"/>
+          </p:cNvSpPr>
+          <p:nvPr>
+            <p:ph type="body" idx="1"/>
+          </p:nvPr>
+        </p:nvSpPr>
+        <p:spPr>
+          <a:xfrm>
+            <a:off x="839788" y="1681163"/>
+            <a:ext cx="5157787" cy="823912"/>
+          </a:xfrm>
+        </p:spPr>
+        <p:txBody>
+          <a:bodyPr anchor="b"/>
+          <a:lstStyle>
+            <a:lvl1pPr marL="0" indent="0">
+              <a:buNone/>
+              <a:defRPr sz="2400" b="1"/>
+            </a:lvl1pPr>
+            <a:lvl2pPr marL="457200" indent="0">
+              <a:buNone/>
+              <a:defRPr sz="2000" b="1"/>
+            </a:lvl2pPr>
+            <a:lvl3pPr marL="914400" indent="0">
+              <a:buNone/>
+              <a:defRPr sz="1800" b="1"/>
+            </a:lvl3pPr>
+            <a:lvl4pPr marL="1371600" indent="0">
+              <a:buNone/>
+              <a:defRPr sz="1600" b="1"/>
+            </a:lvl4pPr>
+            <a:lvl5pPr marL="1828800" indent="0">
+              <a:buNone/>
+              <a:defRPr sz="1600" b="1"/>
+            </a:lvl5pPr>
+            <a:lvl6pPr marL="2286000" indent="0">
+              <a:buNone/>
+              <a:defRPr sz="1600" b="1"/>
+            </a:lvl6pPr>
+            <a:lvl7pPr marL="2743200" indent="0">
+              <a:buNone/>
+              <a:defRPr sz="1600" b="1"/>
+            </a:lvl7pPr>
+            <a:lvl8pPr marL="3200400" indent="0">
+              <a:buNone/>
+              <a:defRPr sz="1600" b="1"/>
+            </a:lvl8pPr>
+            <a:lvl9pPr marL="3657600" indent="0">
+              <a:buNone/>
+              <a:defRPr sz="1600" b="1"/>
+            </a:lvl9pPr>
+          </a:lstStyle>
+          <a:p>
+            <a:pPr lvl="0"/>
+            <a:r>
+              <a:rPr lang="en-US"/>
+              <a:t>Click to edit Master text styles</a:t>
+            </a:r>
+          </a:p>
+        </p:txBody>
+      </p:sp>
+      <p:sp>
+        <p:nvSpPr>
+          <p:cNvPr id="4" name="Content Placeholder 3">
+            <a:extLst>
+              <a:ext uri="{FF2B5EF4-FFF2-40B4-BE49-F238E27FC236}">
+                <a16:creationId xmlns:a16="http://schemas.microsoft.com/office/drawing/2014/main" id="{E0456712-EA93-09C2-F4D2-BC3251EB463D}"/>
+              </a:ext>
+            </a:extLst>
+          </p:cNvPr>
+          <p:cNvSpPr>
+            <a:spLocks noGrp="1"/>
+          </p:cNvSpPr>
+          <p:nvPr>
+            <p:ph sz="half" idx="2"/>
+          </p:nvPr>
+        </p:nvSpPr>
+        <p:spPr>
+          <a:xfrm>
+            <a:off x="839788" y="2505075"/>
+            <a:ext cx="5157787" cy="3684588"/>
+          </a:xfrm>
+        </p:spPr>
+        <p:txBody>
+          <a:bodyPr/>
+          <a:lstStyle/>
+          <a:p>
+            <a:pPr lvl="0"/>
+            <a:r>
+              <a:rPr lang="en-US"/>
+              <a:t>Click to edit Master text styles</a:t>
+            </a:r>
+          </a:p>
+          <a:p>
+            <a:pPr lvl="1"/>
+            <a:r>
+              <a:rPr lang="en-US"/>
+              <a:t>Second level</a:t>
+            </a:r>
+          </a:p>
+          <a:p>
+            <a:pPr lvl="2"/>
+            <a:r>
+              <a:rPr lang="en-US"/>
+              <a:t>Third level</a:t>
+            </a:r>
+          </a:p>
+          <a:p>
+            <a:pPr lvl="3"/>
+            <a:r>
+              <a:rPr lang="en-US"/>
+              <a:t>Fourth level</a:t>
+            </a:r>
+          </a:p>
+          <a:p>
+            <a:pPr lvl="4"/>
+            <a:r>
+              <a:rPr lang="en-US"/>
+              <a:t>Fifth level</a:t>
+            </a:r>
+          </a:p>
+        </p:txBody>
+      </p:sp>
+      <p:sp>
+        <p:nvSpPr>
+          <p:cNvPr id="5" name="Text Placeholder 4">
+            <a:extLst>
+              <a:ext uri="{FF2B5EF4-FFF2-40B4-BE49-F238E27FC236}">
+                <a16:creationId xmlns:a16="http://schemas.microsoft.com/office/drawing/2014/main" id="{417906A9-3AA0-533A-A2F1-7D93CF619827}"/>
+              </a:ext>
+            </a:extLst>
+          </p:cNvPr>
+          <p:cNvSpPr>
+            <a:spLocks noGrp="1"/>
+          </p:cNvSpPr>
+          <p:nvPr>
+            <p:ph type="body" sz="quarter" idx="3"/>
+          </p:nvPr>
+        </p:nvSpPr>
+        <p:spPr>
+          <a:xfrm>
+            <a:off x="6172200" y="1681163"/>
+            <a:ext cx="5183188" cy="823912"/>
+          </a:xfrm>
+        </p:spPr>
+        <p:txBody>
+          <a:bodyPr anchor="b"/>
+          <a:lstStyle>
+            <a:lvl1pPr marL="0" indent="0">
+              <a:buNone/>
+              <a:defRPr sz="2400" b="1"/>
+            </a:lvl1pPr>
+            <a:lvl2pPr marL="457200" indent="0">
+              <a:buNone/>
+              <a:defRPr sz="2000" b="1"/>
+            </a:lvl2pPr>
+            <a:lvl3pPr marL="914400" indent="0">
+              <a:buNone/>
+              <a:defRPr sz="1800" b="1"/>
+            </a:lvl3pPr>
+            <a:lvl4pPr marL="1371600" indent="0">
+              <a:buNone/>
+              <a:defRPr sz="1600" b="1"/>
+            </a:lvl4pPr>
+            <a:lvl5pPr marL="1828800" indent="0">
+              <a:buNone/>
+              <a:defRPr sz="1600" b="1"/>
+            </a:lvl5pPr>
+            <a:lvl6pPr marL="2286000" indent="0">
+              <a:buNone/>
+              <a:defRPr sz="1600" b="1"/>
+            </a:lvl6pPr>
+            <a:lvl7pPr marL="2743200" indent="0">
+              <a:buNone/>
+              <a:defRPr sz="1600" b="1"/>
+            </a:lvl7pPr>
+            <a:lvl8pPr marL="3200400" indent="0">
+              <a:buNone/>
+              <a:defRPr sz="1600" b="1"/>
+            </a:lvl8pPr>
+            <a:lvl9pPr marL="3657600" indent="0">
+              <a:buNone/>
+              <a:defRPr sz="1600" b="1"/>
+            </a:lvl9pPr>
+          </a:lstStyle>
+          <a:p>
+            <a:pPr lvl="0"/>
+            <a:r>
+              <a:rPr lang="en-US"/>
+              <a:t>Click to edit Master text styles</a:t>
+            </a:r>
+          </a:p>
+        </p:txBody>
+      </p:sp>
+      <p:sp>
+        <p:nvSpPr>
+          <p:cNvPr id="6" name="Content Placeholder 5">
+            <a:extLst>
+              <a:ext uri="{FF2B5EF4-FFF2-40B4-BE49-F238E27FC236}">
+                <a16:creationId xmlns:a16="http://schemas.microsoft.com/office/drawing/2014/main" id="{8B6B8469-F9AB-6C2D-8B56-6C1FEB4651D5}"/>
+              </a:ext>
+            </a:extLst>
+          </p:cNvPr>
+          <p:cNvSpPr>
+            <a:spLocks noGrp="1"/>
+          </p:cNvSpPr>
+          <p:nvPr>
+            <p:ph sz="quarter" idx="4"/>
+          </p:nvPr>
+        </p:nvSpPr>
+        <p:spPr>
+          <a:xfrm>
+            <a:off x="6172200" y="2505075"/>
+            <a:ext cx="5183188" cy="3684588"/>
+          </a:xfrm>
+        </p:spPr>
+        <p:txBody>
+          <a:bodyPr/>
+          <a:lstStyle/>
+          <a:p>
+            <a:pPr lvl="0"/>
+            <a:r>
+              <a:rPr lang="en-US"/>
+              <a:t>Click to edit Master text styles</a:t>
+            </a:r>
+          </a:p>
+          <a:p>
+            <a:pPr lvl="1"/>
+            <a:r>
+              <a:rPr lang="en-US"/>
+              <a:t>Second level</a:t>
+            </a:r>
+          </a:p>
+          <a:p>
+            <a:pPr lvl="2"/>
+            <a:r>
+              <a:rPr lang="en-US"/>
+              <a:t>Third level</a:t>
+            </a:r>
+          </a:p>
+          <a:p>
+            <a:pPr lvl="3"/>
+            <a:r>
+              <a:rPr lang="en-US"/>
+              <a:t>Fourth level</a:t>
+            </a:r>
+          </a:p>
+          <a:p>
+            <a:pPr lvl="4"/>
+            <a:r>
+              <a:rPr lang="en-US"/>
+              <a:t>Fifth level</a:t>
+            </a:r>
+          </a:p>
+        </p:txBody>
+      </p:sp>
+      <p:sp>
+        <p:nvSpPr>
+          <p:cNvPr id="7" name="Date Placeholder 6">
+            <a:extLst>
+              <a:ext uri="{FF2B5EF4-FFF2-40B4-BE49-F238E27FC236}">
+                <a16:creationId xmlns:a16="http://schemas.microsoft.com/office/drawing/2014/main" id="{DD0B7588-305F-340C-6977-744D194C20F0}"/>
+              </a:ext>
+            </a:extLst>
+          </p:cNvPr>
+          <p:cNvSpPr>
+            <a:spLocks noGrp="1"/>
+          </p:cNvSpPr>
+          <p:nvPr>
+            <p:ph type="dt" sz="half" idx="10"/>
+          </p:nvPr>
+        </p:nvSpPr>
+        <p:spPr/>
+        <p:txBody>
+          <a:bodyPr/>
+          <a:lstStyle/>
+          <a:p>
+            <a:fld id="{C51537AA-315F-204E-9EA9-888A22916B59}" type="datetimeFigureOut">
+              <a:rPr lang="en-US" smtClean="0"/>
+              <a:t>8/22/26</a:t>
+            </a:fld>
+            <a:endParaRPr lang="en-US"/>
+          </a:p>
+        </p:txBody>
+      </p:sp>
+      <p:sp>
+        <p:nvSpPr>
+          <p:cNvPr id="8" name="Footer Placeholder 7">
+            <a:extLst>
+              <a:ext uri="{FF2B5EF4-FFF2-40B4-BE49-F238E27FC236}">
+                <a16:creationId xmlns:a16="http://schemas.microsoft.com/office/drawing/2014/main" id="{9D1F9887-9B63-CA62-992E-73053D830C9A}"/>
+              </a:ext>
+            </a:extLst>
+          </p:cNvPr>
+          <p:cNvSpPr>
+            <a:spLocks noGrp="1"/>
+          </p:cNvSpPr>
+          <p:nvPr>
+            <p:ph type="ftr" sz="quarter" idx="11"/>
+          </p:nvPr>
+        </p:nvSpPr>
+        <p:spPr/>
+        <p:txBody>
+          <a:bodyPr/>
+          <a:lstStyle/>
+          <a:p>
+            <a:endParaRPr lang="en-US"/>
+          </a:p>
+        </p:txBody>
+      </p:sp>
+      <p:sp>
+        <p:nvSpPr>
+          <p:cNvPr id="9" name="Slide Number Placeholder 8">
+            <a:extLst>
+              <a:ext uri="{FF2B5EF4-FFF2-40B4-BE49-F238E27FC236}">
+                <a16:creationId xmlns:a16="http://schemas.microsoft.com/office/drawing/2014/main" id="{C078A85D-3729-612B-6FA8-14D1627814D3}"/>
+              </a:ext>
+            </a:extLst>
+          </p:cNvPr>
+          <p:cNvSpPr>
+            <a:spLocks noGrp="1"/>
+          </p:cNvSpPr>
+          <p:nvPr>
+            <p:ph type="sldNum" sz="quarter" idx="12"/>
+          </p:nvPr>
+        </p:nvSpPr>
+        <p:spPr/>
+        <p:txBody>
+          <a:bodyPr/>
+          <a:lstStyle/>
+          <a:p>
+            <a:fld id="{25E5E6C5-729B-4849-AC0C-1ABDA3863663}" type="slidenum">
+              <a:rPr lang="en-US" smtClean="0"/>
+              <a:t>‹#›</a:t>
+            </a:fld>
+            <a:endParaRPr lang="en-US"/>
+          </a:p>
+        </p:txBody>
+      </p:sp>
+    </p:spTree>
+    <p:extLst>
+      <p:ext uri="{BB962C8B-B14F-4D97-AF65-F5344CB8AC3E}">
+        <p14:creationId xmlns:p14="http://schemas.microsoft.com/office/powerpoint/2010/main" val="2514263285"/>
+      </p:ext>
+    </p:extLst>
+  </p:cSld>
+  <p:clrMapOvr>
+    <a:masterClrMapping/>
+  </p:clrMapOvr>
+</p:sldLayout>
+</file>
+
+<file path=ppt/slideLayouts/slideLayout6.xml><?xml version="1.0" encoding="utf-8"?>
+<p:sldLayout xmlns:a="http://schemas.openxmlformats.org/drawingml/2006/main" xmlns:r="http://schemas.openxmlformats.org/officeDocument/2006/relationships" xmlns:p="http://schemas.openxmlformats.org/presentationml/2006/main" type="titleOnly" preserve="1">
+  <p:cSld name="Title Only">
+    <p:spTree>
+      <p:nvGrpSpPr>
+        <p:cNvPr id="1" name=""/>
+        <p:cNvGrpSpPr/>
+        <p:nvPr/>
+      </p:nvGrpSpPr>
+      <p:grpSpPr>
+        <a:xfrm>
+          <a:off x="0" y="0"/>
+          <a:ext cx="0" cy="0"/>
+          <a:chOff x="0" y="0"/>
+          <a:chExt cx="0" cy="0"/>
+        </a:xfrm>
+      </p:grpSpPr>
+      <p:sp>
+        <p:nvSpPr>
+          <p:cNvPr id="2" name="Title 1">
+            <a:extLst>
+              <a:ext uri="{FF2B5EF4-FFF2-40B4-BE49-F238E27FC236}">
+                <a16:creationId xmlns:a16="http://schemas.microsoft.com/office/drawing/2014/main" id="{15A680CD-2AE2-375E-FD42-47C9F4CD5B4B}"/>
+              </a:ext>
+            </a:extLst>
+          </p:cNvPr>
+          <p:cNvSpPr>
+            <a:spLocks noGrp="1"/>
+          </p:cNvSpPr>
+          <p:nvPr>
+            <p:ph type="title"/>
+          </p:nvPr>
+        </p:nvSpPr>
+        <p:spPr/>
+        <p:txBody>
+          <a:bodyPr/>
+          <a:lstStyle/>
+          <a:p>
+            <a:r>
+              <a:rPr lang="en-US"/>
+              <a:t>Click to edit Master title style</a:t>
+            </a:r>
+          </a:p>
+        </p:txBody>
+      </p:sp>
+      <p:sp>
+        <p:nvSpPr>
+          <p:cNvPr id="3" name="Date Placeholder 2">
+            <a:extLst>
+              <a:ext uri="{FF2B5EF4-FFF2-40B4-BE49-F238E27FC236}">
+                <a16:creationId xmlns:a16="http://schemas.microsoft.com/office/drawing/2014/main" id="{2C7EB035-E195-8B4A-5564-170130B532B5}"/>
+              </a:ext>
+            </a:extLst>
+          </p:cNvPr>
+          <p:cNvSpPr>
+            <a:spLocks noGrp="1"/>
+          </p:cNvSpPr>
+          <p:nvPr>
+            <p:ph type="dt" sz="half" idx="10"/>
+          </p:nvPr>
+        </p:nvSpPr>
+        <p:spPr/>
+        <p:txBody>
+          <a:bodyPr/>
+          <a:lstStyle/>
+          <a:p>
+            <a:fld id="{C51537AA-315F-204E-9EA9-888A22916B59}" type="datetimeFigureOut">
+              <a:rPr lang="en-US" smtClean="0"/>
+              <a:t>8/22/26</a:t>
+            </a:fld>
+            <a:endParaRPr lang="en-US"/>
+          </a:p>
+        </p:txBody>
+      </p:sp>
+      <p:sp>
+        <p:nvSpPr>
+          <p:cNvPr id="4" name="Footer Placeholder 3">
+            <a:extLst>
+              <a:ext uri="{FF2B5EF4-FFF2-40B4-BE49-F238E27FC236}">
+                <a16:creationId xmlns:a16="http://schemas.microsoft.com/office/drawing/2014/main" id="{9B717204-8EAD-DFBB-4233-93233248D99F}"/>
+              </a:ext>
+            </a:extLst>
+          </p:cNvPr>
+          <p:cNvSpPr>
+            <a:spLocks noGrp="1"/>
+          </p:cNvSpPr>
+          <p:nvPr>
+            <p:ph type="ftr" sz="quarter" idx="11"/>
+          </p:nvPr>
+        </p:nvSpPr>
+        <p:spPr/>
+        <p:txBody>
+          <a:bodyPr/>
+          <a:lstStyle/>
+          <a:p>
+            <a:endParaRPr lang="en-US"/>
+          </a:p>
+        </p:txBody>
+      </p:sp>
+      <p:sp>
+        <p:nvSpPr>
+          <p:cNvPr id="5" name="Slide Number Placeholder 4">
+            <a:extLst>
+              <a:ext uri="{FF2B5EF4-FFF2-40B4-BE49-F238E27FC236}">
+                <a16:creationId xmlns:a16="http://schemas.microsoft.com/office/drawing/2014/main" id="{7707D31B-D5D6-E949-2FF9-CDD2292B006A}"/>
+              </a:ext>
+            </a:extLst>
+          </p:cNvPr>
+          <p:cNvSpPr>
+            <a:spLocks noGrp="1"/>
+          </p:cNvSpPr>
+          <p:nvPr>
+            <p:ph type="sldNum" sz="quarter" idx="12"/>
+          </p:nvPr>
+        </p:nvSpPr>
+        <p:spPr/>
+        <p:txBody>
+          <a:bodyPr/>
+          <a:lstStyle/>
+          <a:p>
+            <a:fld id="{25E5E6C5-729B-4849-AC0C-1ABDA3863663}" type="slidenum">
+              <a:rPr lang="en-US" smtClean="0"/>
+              <a:t>‹#›</a:t>
+            </a:fld>
+            <a:endParaRPr lang="en-US"/>
+          </a:p>
+        </p:txBody>
+      </p:sp>
+    </p:spTree>
+    <p:extLst>
+      <p:ext uri="{BB962C8B-B14F-4D97-AF65-F5344CB8AC3E}">
+        <p14:creationId xmlns:p14="http://schemas.microsoft.com/office/powerpoint/2010/main" val="909091229"/>
+      </p:ext>
+    </p:extLst>
+  </p:cSld>
+  <p:clrMapOvr>
+    <a:masterClrMapping/>
+  </p:clrMapOvr>
+</p:sldLayout>
+</file>
+
+<file path=ppt/slideLayouts/slideLayout7.xml><?xml version="1.0" encoding="utf-8"?>
+<p:sldLayout xmlns:a="http://schemas.openxmlformats.org/drawingml/2006/main" xmlns:r="http://schemas.openxmlformats.org/officeDocument/2006/relationships" xmlns:p="http://schemas.openxmlformats.org/presentationml/2006/main" type="blank" preserve="1">
+  <p:cSld name="Blank">
+    <p:spTree>
+      <p:nvGrpSpPr>
+        <p:cNvPr id="1" name=""/>
+        <p:cNvGrpSpPr/>
+        <p:nvPr/>
+      </p:nvGrpSpPr>
+      <p:grpSpPr>
+        <a:xfrm>
+          <a:off x="0" y="0"/>
+          <a:ext cx="0" cy="0"/>
+          <a:chOff x="0" y="0"/>
+          <a:chExt cx="0" cy="0"/>
+        </a:xfrm>
+      </p:grpSpPr>
+      <p:sp>
+        <p:nvSpPr>
+          <p:cNvPr id="2" name="Date Placeholder 1">
+            <a:extLst>
+              <a:ext uri="{FF2B5EF4-FFF2-40B4-BE49-F238E27FC236}">
+                <a16:creationId xmlns:a16="http://schemas.microsoft.com/office/drawing/2014/main" id="{822ED2BC-0255-2351-D5D3-A61B33E23699}"/>
+              </a:ext>
+            </a:extLst>
+          </p:cNvPr>
+          <p:cNvSpPr>
+            <a:spLocks noGrp="1"/>
+          </p:cNvSpPr>
+          <p:nvPr>
+            <p:ph type="dt" sz="half" idx="10"/>
+          </p:nvPr>
+        </p:nvSpPr>
+        <p:spPr/>
+        <p:txBody>
+          <a:bodyPr/>
+          <a:lstStyle/>
+          <a:p>
+            <a:fld id="{C51537AA-315F-204E-9EA9-888A22916B59}" type="datetimeFigureOut">
+              <a:rPr lang="en-US" smtClean="0"/>
+              <a:t>8/22/26</a:t>
+            </a:fld>
+            <a:endParaRPr lang="en-US"/>
+          </a:p>
+        </p:txBody>
+      </p:sp>
+      <p:sp>
+        <p:nvSpPr>
+          <p:cNvPr id="3" name="Footer Placeholder 2">
+            <a:extLst>
+              <a:ext uri="{FF2B5EF4-FFF2-40B4-BE49-F238E27FC236}">
+                <a16:creationId xmlns:a16="http://schemas.microsoft.com/office/drawing/2014/main" id="{0F0B7899-3A8F-1FD9-7972-CC5BB5509D31}"/>
+              </a:ext>
+            </a:extLst>
+          </p:cNvPr>
+          <p:cNvSpPr>
+            <a:spLocks noGrp="1"/>
+          </p:cNvSpPr>
+          <p:nvPr>
+            <p:ph type="ftr" sz="quarter" idx="11"/>
+          </p:nvPr>
+        </p:nvSpPr>
+        <p:spPr/>
+        <p:txBody>
+          <a:bodyPr/>
+          <a:lstStyle/>
+          <a:p>
+            <a:endParaRPr lang="en-US"/>
+          </a:p>
+        </p:txBody>
+      </p:sp>
+      <p:sp>
+        <p:nvSpPr>
+          <p:cNvPr id="4" name="Slide Number Placeholder 3">
+            <a:extLst>
+              <a:ext uri="{FF2B5EF4-FFF2-40B4-BE49-F238E27FC236}">
+                <a16:creationId xmlns:a16="http://schemas.microsoft.com/office/drawing/2014/main" id="{6DF4AF48-D81E-2883-10C1-DDAFF22436F1}"/>
+              </a:ext>
+            </a:extLst>
+          </p:cNvPr>
+          <p:cNvSpPr>
+            <a:spLocks noGrp="1"/>
+          </p:cNvSpPr>
+          <p:nvPr>
+            <p:ph type="sldNum" sz="quarter" idx="12"/>
+          </p:nvPr>
+        </p:nvSpPr>
+        <p:spPr/>
+        <p:txBody>
+          <a:bodyPr/>
+          <a:lstStyle/>
+          <a:p>
+            <a:fld id="{25E5E6C5-729B-4849-AC0C-1ABDA3863663}" type="slidenum">
+              <a:rPr lang="en-US" smtClean="0"/>
+              <a:t>‹#›</a:t>
+            </a:fld>
+            <a:endParaRPr lang="en-US"/>
+          </a:p>
+        </p:txBody>
+      </p:sp>
+    </p:spTree>
+    <p:extLst>
+      <p:ext uri="{BB962C8B-B14F-4D97-AF65-F5344CB8AC3E}">
+        <p14:creationId xmlns:p14="http://schemas.microsoft.com/office/powerpoint/2010/main" val="2293672701"/>
+      </p:ext>
+    </p:extLst>
+  </p:cSld>
+  <p:clrMapOvr>
+    <a:masterClrMapping/>
+  </p:clrMapOvr>
+</p:sldLayout>
+</file>
+
+<file path=ppt/slideLayouts/slideLayout8.xml><?xml version="1.0" encoding="utf-8"?>
+<p:sldLayout xmlns:a="http://schemas.openxmlformats.org/drawingml/2006/main" xmlns:r="http://schemas.openxmlformats.org/officeDocument/2006/relationships" xmlns:p="http://schemas.openxmlformats.org/presentationml/2006/main" type="objTx" preserve="1">
+  <p:cSld name="Content with Caption">
+    <p:spTree>
+      <p:nvGrpSpPr>
+        <p:cNvPr id="1" name=""/>
+        <p:cNvGrpSpPr/>
+        <p:nvPr/>
+      </p:nvGrpSpPr>
+      <p:grpSpPr>
+        <a:xfrm>
+          <a:off x="0" y="0"/>
+          <a:ext cx="0" cy="0"/>
+          <a:chOff x="0" y="0"/>
+          <a:chExt cx="0" cy="0"/>
+        </a:xfrm>
+      </p:grpSpPr>
+      <p:sp>
+        <p:nvSpPr>
+          <p:cNvPr id="2" name="Title 1">
+            <a:extLst>
+              <a:ext uri="{FF2B5EF4-FFF2-40B4-BE49-F238E27FC236}">
+                <a16:creationId xmlns:a16="http://schemas.microsoft.com/office/drawing/2014/main" id="{6A694559-90D2-5C4C-8327-C2C93BBB7429}"/>
+              </a:ext>
+            </a:extLst>
+          </p:cNvPr>
+          <p:cNvSpPr>
+            <a:spLocks noGrp="1"/>
+          </p:cNvSpPr>
+          <p:nvPr>
+            <p:ph type="title"/>
+          </p:nvPr>
+        </p:nvSpPr>
+        <p:spPr>
+          <a:xfrm>
+            <a:off x="839788" y="457200"/>
+            <a:ext cx="3932237" cy="1600200"/>
+          </a:xfrm>
+        </p:spPr>
+        <p:txBody>
+          <a:bodyPr anchor="b"/>
+          <a:lstStyle>
+            <a:lvl1pPr>
+              <a:defRPr sz="3200"/>
+            </a:lvl1pPr>
+          </a:lstStyle>
+          <a:p>
+            <a:r>
+              <a:rPr lang="en-US"/>
+              <a:t>Click to edit Master title style</a:t>
+            </a:r>
+          </a:p>
+        </p:txBody>
+      </p:sp>
+      <p:sp>
+        <p:nvSpPr>
+          <p:cNvPr id="3" name="Content Placeholder 2">
+            <a:extLst>
+              <a:ext uri="{FF2B5EF4-FFF2-40B4-BE49-F238E27FC236}">
+                <a16:creationId xmlns:a16="http://schemas.microsoft.com/office/drawing/2014/main" id="{576D56FC-D38F-02B6-C011-831380B1B343}"/>
+              </a:ext>
+            </a:extLst>
+          </p:cNvPr>
+          <p:cNvSpPr>
+            <a:spLocks noGrp="1"/>
+          </p:cNvSpPr>
+          <p:nvPr>
+            <p:ph idx="1"/>
+          </p:nvPr>
+        </p:nvSpPr>
+        <p:spPr>
+          <a:xfrm>
+            <a:off x="5183188" y="987425"/>
+            <a:ext cx="6172200" cy="4873625"/>
+          </a:xfrm>
+        </p:spPr>
+        <p:txBody>
+          <a:bodyPr/>
+          <a:lstStyle>
+            <a:lvl1pPr>
+              <a:defRPr sz="3200"/>
+            </a:lvl1pPr>
+            <a:lvl2pPr>
+              <a:defRPr sz="2800"/>
+            </a:lvl2pPr>
+            <a:lvl3pPr>
+              <a:defRPr sz="2400"/>
+            </a:lvl3pPr>
+            <a:lvl4pPr>
+              <a:defRPr sz="2000"/>
+            </a:lvl4pPr>
+            <a:lvl5pPr>
+              <a:defRPr sz="2000"/>
+            </a:lvl5pPr>
+            <a:lvl6pPr>
+              <a:defRPr sz="2000"/>
+            </a:lvl6pPr>
+            <a:lvl7pPr>
+              <a:defRPr sz="2000"/>
+            </a:lvl7pPr>
+            <a:lvl8pPr>
+              <a:defRPr sz="2000"/>
+            </a:lvl8pPr>
+            <a:lvl9pPr>
+              <a:defRPr sz="2000"/>
+            </a:lvl9pPr>
+          </a:lstStyle>
+          <a:p>
+            <a:pPr lvl="0"/>
+            <a:r>
+              <a:rPr lang="en-US"/>
+              <a:t>Click to edit Master text styles</a:t>
+            </a:r>
+          </a:p>
+          <a:p>
+            <a:pPr lvl="1"/>
+            <a:r>
+              <a:rPr lang="en-US"/>
+              <a:t>Second level</a:t>
+            </a:r>
+          </a:p>
+          <a:p>
+            <a:pPr lvl="2"/>
+            <a:r>
+              <a:rPr lang="en-US"/>
+              <a:t>Third level</a:t>
+            </a:r>
+          </a:p>
+          <a:p>
+            <a:pPr lvl="3"/>
+            <a:r>
+              <a:rPr lang="en-US"/>
+              <a:t>Fourth level</a:t>
+            </a:r>
+          </a:p>
+          <a:p>
+            <a:pPr lvl="4"/>
+            <a:r>
+              <a:rPr lang="en-US"/>
+              <a:t>Fifth level</a:t>
+            </a:r>
+          </a:p>
+        </p:txBody>
+      </p:sp>
+      <p:sp>
+        <p:nvSpPr>
+          <p:cNvPr id="4" name="Text Placeholder 3">
+            <a:extLst>
+              <a:ext uri="{FF2B5EF4-FFF2-40B4-BE49-F238E27FC236}">
+                <a16:creationId xmlns:a16="http://schemas.microsoft.com/office/drawing/2014/main" id="{91EECE74-E287-4118-F76A-0CF7D7EDFF1C}"/>
+              </a:ext>
+            </a:extLst>
+          </p:cNvPr>
+          <p:cNvSpPr>
+            <a:spLocks noGrp="1"/>
+          </p:cNvSpPr>
+          <p:nvPr>
+            <p:ph type="body" sz="half" idx="2"/>
+          </p:nvPr>
+        </p:nvSpPr>
+        <p:spPr>
+          <a:xfrm>
+            <a:off x="839788" y="2057400"/>
+            <a:ext cx="3932237" cy="3811588"/>
+          </a:xfrm>
+        </p:spPr>
+        <p:txBody>
+          <a:bodyPr/>
+          <a:lstStyle>
+            <a:lvl1pPr marL="0" indent="0">
+              <a:buNone/>
+              <a:defRPr sz="1600"/>
+            </a:lvl1pPr>
+            <a:lvl2pPr marL="457200" indent="0">
+              <a:buNone/>
+              <a:defRPr sz="1400"/>
+            </a:lvl2pPr>
+            <a:lvl3pPr marL="914400" indent="0">
+              <a:buNone/>
+              <a:defRPr sz="1200"/>
+            </a:lvl3pPr>
+            <a:lvl4pPr marL="1371600" indent="0">
+              <a:buNone/>
+              <a:defRPr sz="1000"/>
+            </a:lvl4pPr>
+            <a:lvl5pPr marL="1828800" indent="0">
+              <a:buNone/>
+              <a:defRPr sz="1000"/>
+            </a:lvl5pPr>
+            <a:lvl6pPr marL="2286000" indent="0">
+              <a:buNone/>
+              <a:defRPr sz="1000"/>
+            </a:lvl6pPr>
+            <a:lvl7pPr marL="2743200" indent="0">
+              <a:buNone/>
+              <a:defRPr sz="1000"/>
+            </a:lvl7pPr>
+            <a:lvl8pPr marL="3200400" indent="0">
+              <a:buNone/>
+              <a:defRPr sz="1000"/>
+            </a:lvl8pPr>
+            <a:lvl9pPr marL="3657600" indent="0">
+              <a:buNone/>
+              <a:defRPr sz="1000"/>
+            </a:lvl9pPr>
+          </a:lstStyle>
+          <a:p>
+            <a:pPr lvl="0"/>
+            <a:r>
+              <a:rPr lang="en-US"/>
+              <a:t>Click to edit Master text styles</a:t>
+            </a:r>
+          </a:p>
+        </p:txBody>
+      </p:sp>
+      <p:sp>
+        <p:nvSpPr>
+          <p:cNvPr id="5" name="Date Placeholder 4">
+            <a:extLst>
+              <a:ext uri="{FF2B5EF4-FFF2-40B4-BE49-F238E27FC236}">
+                <a16:creationId xmlns:a16="http://schemas.microsoft.com/office/drawing/2014/main" id="{1C27A19D-47AA-50DB-4243-461B9C7D259E}"/>
+              </a:ext>
+            </a:extLst>
+          </p:cNvPr>
+          <p:cNvSpPr>
+            <a:spLocks noGrp="1"/>
+          </p:cNvSpPr>
+          <p:nvPr>
+            <p:ph type="dt" sz="half" idx="10"/>
+          </p:nvPr>
+        </p:nvSpPr>
+        <p:spPr/>
+        <p:txBody>
+          <a:bodyPr/>
+          <a:lstStyle/>
+          <a:p>
+            <a:fld id="{C51537AA-315F-204E-9EA9-888A22916B59}" type="datetimeFigureOut">
+              <a:rPr lang="en-US" smtClean="0"/>
+              <a:t>8/22/26</a:t>
+            </a:fld>
+            <a:endParaRPr lang="en-US"/>
+          </a:p>
+        </p:txBody>
+      </p:sp>
+      <p:sp>
+        <p:nvSpPr>
+          <p:cNvPr id="6" name="Footer Placeholder 5">
+            <a:extLst>
+              <a:ext uri="{FF2B5EF4-FFF2-40B4-BE49-F238E27FC236}">
+                <a16:creationId xmlns:a16="http://schemas.microsoft.com/office/drawing/2014/main" id="{7983A457-4E04-9B33-399C-121AFD84BDF1}"/>
+              </a:ext>
+            </a:extLst>
+          </p:cNvPr>
+          <p:cNvSpPr>
+            <a:spLocks noGrp="1"/>
+          </p:cNvSpPr>
+          <p:nvPr>
+            <p:ph type="ftr" sz="quarter" idx="11"/>
+          </p:nvPr>
+        </p:nvSpPr>
+        <p:spPr/>
+        <p:txBody>
+          <a:bodyPr/>
+          <a:lstStyle/>
+          <a:p>
+            <a:endParaRPr lang="en-US"/>
+          </a:p>
+        </p:txBody>
+      </p:sp>
+      <p:sp>
+        <p:nvSpPr>
+          <p:cNvPr id="7" name="Slide Number Placeholder 6">
+            <a:extLst>
+              <a:ext uri="{FF2B5EF4-FFF2-40B4-BE49-F238E27FC236}">
+                <a16:creationId xmlns:a16="http://schemas.microsoft.com/office/drawing/2014/main" id="{734146A5-31DA-9B61-6A8B-3D4C189B190B}"/>
+              </a:ext>
+            </a:extLst>
+          </p:cNvPr>
+          <p:cNvSpPr>
+            <a:spLocks noGrp="1"/>
+          </p:cNvSpPr>
+          <p:nvPr>
+            <p:ph type="sldNum" sz="quarter" idx="12"/>
+          </p:nvPr>
+        </p:nvSpPr>
+        <p:spPr/>
+        <p:txBody>
+          <a:bodyPr/>
+          <a:lstStyle/>
+          <a:p>
+            <a:fld id="{25E5E6C5-729B-4849-AC0C-1ABDA3863663}" type="slidenum">
+              <a:rPr lang="en-US" smtClean="0"/>
+              <a:t>‹#›</a:t>
+            </a:fld>
+            <a:endParaRPr lang="en-US"/>
+          </a:p>
+        </p:txBody>
+      </p:sp>
+    </p:spTree>
+    <p:extLst>
+      <p:ext uri="{BB962C8B-B14F-4D97-AF65-F5344CB8AC3E}">
+        <p14:creationId xmlns:p14="http://schemas.microsoft.com/office/powerpoint/2010/main" val="2246722109"/>
+      </p:ext>
+    </p:extLst>
+  </p:cSld>
+  <p:clrMapOvr>
+    <a:masterClrMapping/>
+  </p:clrMapOvr>
+</p:sldLayout>
+</file>
+
+<file path=ppt/slideLayouts/slideLayout9.xml><?xml version="1.0" encoding="utf-8"?>
+<p:sldLayout xmlns:a="http://schemas.openxmlformats.org/drawingml/2006/main" xmlns:r="http://schemas.openxmlformats.org/officeDocument/2006/relationships" xmlns:p="http://schemas.openxmlformats.org/presentationml/2006/main" type="picTx" preserve="1">
+  <p:cSld name="Picture with Caption">
+    <p:spTree>
+      <p:nvGrpSpPr>
+        <p:cNvPr id="1" name=""/>
+        <p:cNvGrpSpPr/>
+        <p:nvPr/>
+      </p:nvGrpSpPr>
+      <p:grpSpPr>
+        <a:xfrm>
+          <a:off x="0" y="0"/>
+          <a:ext cx="0" cy="0"/>
+          <a:chOff x="0" y="0"/>
+          <a:chExt cx="0" cy="0"/>
+        </a:xfrm>
+      </p:grpSpPr>
+      <p:sp>
+        <p:nvSpPr>
+          <p:cNvPr id="2" name="Title 1">
+            <a:extLst>
+              <a:ext uri="{FF2B5EF4-FFF2-40B4-BE49-F238E27FC236}">
+                <a16:creationId xmlns:a16="http://schemas.microsoft.com/office/drawing/2014/main" id="{4564655F-479A-885F-A73C-F0EBB17BEC74}"/>
+              </a:ext>
+            </a:extLst>
+          </p:cNvPr>
+          <p:cNvSpPr>
+            <a:spLocks noGrp="1"/>
+          </p:cNvSpPr>
+          <p:nvPr>
+            <p:ph type="title"/>
+          </p:nvPr>
+        </p:nvSpPr>
+        <p:spPr>
+          <a:xfrm>
+            <a:off x="839788" y="457200"/>
+            <a:ext cx="3932237" cy="1600200"/>
+          </a:xfrm>
+        </p:spPr>
+        <p:txBody>
+          <a:bodyPr anchor="b"/>
+          <a:lstStyle>
+            <a:lvl1pPr>
+              <a:defRPr sz="3200"/>
+            </a:lvl1pPr>
+          </a:lstStyle>
+          <a:p>
+            <a:r>
+              <a:rPr lang="en-US"/>
+              <a:t>Click to edit Master title style</a:t>
+            </a:r>
+          </a:p>
+        </p:txBody>
+      </p:sp>
+      <p:sp>
+        <p:nvSpPr>
+          <p:cNvPr id="3" name="Picture Placeholder 2">
+            <a:extLst>
+              <a:ext uri="{FF2B5EF4-FFF2-40B4-BE49-F238E27FC236}">
+                <a16:creationId xmlns:a16="http://schemas.microsoft.com/office/drawing/2014/main" id="{3E283AB7-2464-FB84-7C86-1F08911A253F}"/>
+              </a:ext>
+            </a:extLst>
+          </p:cNvPr>
+          <p:cNvSpPr>
+            <a:spLocks noGrp="1"/>
+          </p:cNvSpPr>
+          <p:nvPr>
+            <p:ph type="pic" idx="1"/>
+          </p:nvPr>
+        </p:nvSpPr>
+        <p:spPr>
+          <a:xfrm>
+            <a:off x="5183188" y="987425"/>
+            <a:ext cx="6172200" cy="4873625"/>
+          </a:xfrm>
+        </p:spPr>
+        <p:txBody>
+          <a:bodyPr/>
+          <a:lstStyle>
+            <a:lvl1pPr marL="0" indent="0">
+              <a:buNone/>
+              <a:defRPr sz="3200"/>
+            </a:lvl1pPr>
+            <a:lvl2pPr marL="457200" indent="0">
+              <a:buNone/>
+              <a:defRPr sz="2800"/>
+            </a:lvl2pPr>
+            <a:lvl3pPr marL="914400" indent="0">
+              <a:buNone/>
+              <a:defRPr sz="2400"/>
+            </a:lvl3pPr>
+            <a:lvl4pPr marL="1371600" indent="0">
+              <a:buNone/>
+              <a:defRPr sz="2000"/>
+            </a:lvl4pPr>
+            <a:lvl5pPr marL="1828800" indent="0">
+              <a:buNone/>
+              <a:defRPr sz="2000"/>
+            </a:lvl5pPr>
+            <a:lvl6pPr marL="2286000" indent="0">
+              <a:buNone/>
+              <a:defRPr sz="2000"/>
+            </a:lvl6pPr>
+            <a:lvl7pPr marL="2743200" indent="0">
+              <a:buNone/>
+              <a:defRPr sz="2000"/>
+            </a:lvl7pPr>
+            <a:lvl8pPr marL="3200400" indent="0">
+              <a:buNone/>
+              <a:defRPr sz="2000"/>
+            </a:lvl8pPr>
+            <a:lvl9pPr marL="3657600" indent="0">
+              <a:buNone/>
+              <a:defRPr sz="2000"/>
+            </a:lvl9pPr>
+          </a:lstStyle>
+          <a:p>
+            <a:endParaRPr lang="en-US"/>
+          </a:p>
+        </p:txBody>
+      </p:sp>
+      <p:sp>
+        <p:nvSpPr>
+          <p:cNvPr id="4" name="Text Placeholder 3">
+            <a:extLst>
+              <a:ext uri="{FF2B5EF4-FFF2-40B4-BE49-F238E27FC236}">
+                <a16:creationId xmlns:a16="http://schemas.microsoft.com/office/drawing/2014/main" id="{795F9AFB-74D1-2C53-6418-A5C89D415B45}"/>
+              </a:ext>
+            </a:extLst>
+          </p:cNvPr>
+          <p:cNvSpPr>
+            <a:spLocks noGrp="1"/>
+          </p:cNvSpPr>
+          <p:nvPr>
+            <p:ph type="body" sz="half" idx="2"/>
+          </p:nvPr>
+        </p:nvSpPr>
+        <p:spPr>
+          <a:xfrm>
+            <a:off x="839788" y="2057400"/>
+            <a:ext cx="3932237" cy="3811588"/>
+          </a:xfrm>
+        </p:spPr>
+        <p:txBody>
+          <a:bodyPr/>
+          <a:lstStyle>
+            <a:lvl1pPr marL="0" indent="0">
+              <a:buNone/>
+              <a:defRPr sz="1600"/>
+            </a:lvl1pPr>
+            <a:lvl2pPr marL="457200" indent="0">
+              <a:buNone/>
+              <a:defRPr sz="1400"/>
+            </a:lvl2pPr>
+            <a:lvl3pPr marL="914400" indent="0">
+              <a:buNone/>
+              <a:defRPr sz="1200"/>
+            </a:lvl3pPr>
+            <a:lvl4pPr marL="1371600" indent="0">
+              <a:buNone/>
+              <a:defRPr sz="1000"/>
+            </a:lvl4pPr>
+            <a:lvl5pPr marL="1828800" indent="0">
+              <a:buNone/>
+              <a:defRPr sz="1000"/>
+            </a:lvl5pPr>
+            <a:lvl6pPr marL="2286000" indent="0">
+              <a:buNone/>
+              <a:defRPr sz="1000"/>
+            </a:lvl6pPr>
+            <a:lvl7pPr marL="2743200" indent="0">
+              <a:buNone/>
+              <a:defRPr sz="1000"/>
+            </a:lvl7pPr>
+            <a:lvl8pPr marL="3200400" indent="0">
+              <a:buNone/>
+              <a:defRPr sz="1000"/>
+            </a:lvl8pPr>
+            <a:lvl9pPr marL="3657600" indent="0">
+              <a:buNone/>
+              <a:defRPr sz="1000"/>
+            </a:lvl9pPr>
+          </a:lstStyle>
+          <a:p>
+            <a:pPr lvl="0"/>
+            <a:r>
+              <a:rPr lang="en-US"/>
+              <a:t>Click to edit Master text styles</a:t>
+            </a:r>
+          </a:p>
+        </p:txBody>
+      </p:sp>
+      <p:sp>
+        <p:nvSpPr>
+          <p:cNvPr id="5" name="Date Placeholder 4">
+            <a:extLst>
+              <a:ext uri="{FF2B5EF4-FFF2-40B4-BE49-F238E27FC236}">
+                <a16:creationId xmlns:a16="http://schemas.microsoft.com/office/drawing/2014/main" id="{5DAE4AE0-486E-99AC-1920-3C2BFD356780}"/>
+              </a:ext>
+            </a:extLst>
+          </p:cNvPr>
+          <p:cNvSpPr>
+            <a:spLocks noGrp="1"/>
+          </p:cNvSpPr>
+          <p:nvPr>
+            <p:ph type="dt" sz="half" idx="10"/>
+          </p:nvPr>
+        </p:nvSpPr>
+        <p:spPr/>
+        <p:txBody>
+          <a:bodyPr/>
+          <a:lstStyle/>
+          <a:p>
+            <a:fld id="{C51537AA-315F-204E-9EA9-888A22916B59}" type="datetimeFigureOut">
+              <a:rPr lang="en-US" smtClean="0"/>
+              <a:t>8/22/26</a:t>
+            </a:fld>
+            <a:endParaRPr lang="en-US"/>
+          </a:p>
+        </p:txBody>
+      </p:sp>
+      <p:sp>
+        <p:nvSpPr>
+          <p:cNvPr id="6" name="Footer Placeholder 5">
+            <a:extLst>
+              <a:ext uri="{FF2B5EF4-FFF2-40B4-BE49-F238E27FC236}">
+                <a16:creationId xmlns:a16="http://schemas.microsoft.com/office/drawing/2014/main" id="{16C47721-C253-7701-19AB-DA73AEF1E679}"/>
+              </a:ext>
+            </a:extLst>
+          </p:cNvPr>
+          <p:cNvSpPr>
+            <a:spLocks noGrp="1"/>
+          </p:cNvSpPr>
+          <p:nvPr>
+            <p:ph type="ftr" sz="quarter" idx="11"/>
+          </p:nvPr>
+        </p:nvSpPr>
+        <p:spPr/>
+        <p:txBody>
+          <a:bodyPr/>
+          <a:lstStyle/>
+          <a:p>
+            <a:endParaRPr lang="en-US"/>
+          </a:p>
+        </p:txBody>
+      </p:sp>
+      <p:sp>
+        <p:nvSpPr>
+          <p:cNvPr id="7" name="Slide Number Placeholder 6">
+            <a:extLst>
+              <a:ext uri="{FF2B5EF4-FFF2-40B4-BE49-F238E27FC236}">
+                <a16:creationId xmlns:a16="http://schemas.microsoft.com/office/drawing/2014/main" id="{3E4C027A-D303-A375-E31D-BCFFF8AEBE1D}"/>
+              </a:ext>
+            </a:extLst>
+          </p:cNvPr>
+          <p:cNvSpPr>
+            <a:spLocks noGrp="1"/>
+          </p:cNvSpPr>
+          <p:nvPr>
+            <p:ph type="sldNum" sz="quarter" idx="12"/>
+          </p:nvPr>
+        </p:nvSpPr>
+        <p:spPr/>
+        <p:txBody>
+          <a:bodyPr/>
+          <a:lstStyle/>
+          <a:p>
+            <a:fld id="{25E5E6C5-729B-4849-AC0C-1ABDA3863663}" type="slidenum">
+              <a:rPr lang="en-US" smtClean="0"/>
+              <a:t>‹#›</a:t>
+            </a:fld>
+            <a:endParaRPr lang="en-US"/>
+          </a:p>
+        </p:txBody>
+      </p:sp>
+    </p:spTree>
+    <p:extLst>
+      <p:ext uri="{BB962C8B-B14F-4D97-AF65-F5344CB8AC3E}">
+        <p14:creationId xmlns:p14="http://schemas.microsoft.com/office/powerpoint/2010/main" val="3631691282"/>
+      </p:ext>
+    </p:extLst>
   </p:cSld>
   <p:clrMapOvr>
     <a:masterClrMapping/>
@@ -4737,7 +7549,7 @@
 
 <file path=ppt/slideMasters/slideMaster1.xml><?xml version="1.0" encoding="utf-8"?>
 <p:sldMaster xmlns:a="http://schemas.openxmlformats.org/drawingml/2006/main" xmlns:r="http://schemas.openxmlformats.org/officeDocument/2006/relationships" xmlns:p="http://schemas.openxmlformats.org/presentationml/2006/main">
-  <p:cSld name="Master">
+  <p:cSld>
     <p:bg>
       <p:bgRef idx="1001">
         <a:schemeClr val="bg1"/>
@@ -4757,285 +7569,546 @@
           <a:chExt cx="0" cy="0"/>
         </a:xfrm>
       </p:grpSpPr>
+      <p:sp>
+        <p:nvSpPr>
+          <p:cNvPr id="2" name="Title Placeholder 1">
+            <a:extLst>
+              <a:ext uri="{FF2B5EF4-FFF2-40B4-BE49-F238E27FC236}">
+                <a16:creationId xmlns:a16="http://schemas.microsoft.com/office/drawing/2014/main" id="{971930C1-3456-7DE7-87E4-F02A00AFA4DA}"/>
+              </a:ext>
+            </a:extLst>
+          </p:cNvPr>
+          <p:cNvSpPr>
+            <a:spLocks noGrp="1"/>
+          </p:cNvSpPr>
+          <p:nvPr>
+            <p:ph type="title"/>
+          </p:nvPr>
+        </p:nvSpPr>
+        <p:spPr>
+          <a:xfrm>
+            <a:off x="838200" y="365125"/>
+            <a:ext cx="10515600" cy="1325563"/>
+          </a:xfrm>
+          <a:prstGeom prst="rect">
+            <a:avLst/>
+          </a:prstGeom>
+        </p:spPr>
+        <p:txBody>
+          <a:bodyPr vert="horz" lIns="91440" tIns="45720" rIns="91440" bIns="45720" rtlCol="0" anchor="ctr">
+            <a:normAutofit/>
+          </a:bodyPr>
+          <a:lstStyle/>
+          <a:p>
+            <a:r>
+              <a:rPr lang="en-US"/>
+              <a:t>Click to edit Master title style</a:t>
+            </a:r>
+          </a:p>
+        </p:txBody>
+      </p:sp>
+      <p:sp>
+        <p:nvSpPr>
+          <p:cNvPr id="3" name="Text Placeholder 2">
+            <a:extLst>
+              <a:ext uri="{FF2B5EF4-FFF2-40B4-BE49-F238E27FC236}">
+                <a16:creationId xmlns:a16="http://schemas.microsoft.com/office/drawing/2014/main" id="{A46C1CDB-D0A1-F91C-A18B-F7E80491B057}"/>
+              </a:ext>
+            </a:extLst>
+          </p:cNvPr>
+          <p:cNvSpPr>
+            <a:spLocks noGrp="1"/>
+          </p:cNvSpPr>
+          <p:nvPr>
+            <p:ph type="body" idx="1"/>
+          </p:nvPr>
+        </p:nvSpPr>
+        <p:spPr>
+          <a:xfrm>
+            <a:off x="838200" y="1825625"/>
+            <a:ext cx="10515600" cy="4351338"/>
+          </a:xfrm>
+          <a:prstGeom prst="rect">
+            <a:avLst/>
+          </a:prstGeom>
+        </p:spPr>
+        <p:txBody>
+          <a:bodyPr vert="horz" lIns="91440" tIns="45720" rIns="91440" bIns="45720" rtlCol="0">
+            <a:normAutofit/>
+          </a:bodyPr>
+          <a:lstStyle/>
+          <a:p>
+            <a:pPr lvl="0"/>
+            <a:r>
+              <a:rPr lang="en-US"/>
+              <a:t>Click to edit Master text styles</a:t>
+            </a:r>
+          </a:p>
+          <a:p>
+            <a:pPr lvl="1"/>
+            <a:r>
+              <a:rPr lang="en-US"/>
+              <a:t>Second level</a:t>
+            </a:r>
+          </a:p>
+          <a:p>
+            <a:pPr lvl="2"/>
+            <a:r>
+              <a:rPr lang="en-US"/>
+              <a:t>Third level</a:t>
+            </a:r>
+          </a:p>
+          <a:p>
+            <a:pPr lvl="3"/>
+            <a:r>
+              <a:rPr lang="en-US"/>
+              <a:t>Fourth level</a:t>
+            </a:r>
+          </a:p>
+          <a:p>
+            <a:pPr lvl="4"/>
+            <a:r>
+              <a:rPr lang="en-US"/>
+              <a:t>Fifth level</a:t>
+            </a:r>
+          </a:p>
+        </p:txBody>
+      </p:sp>
+      <p:sp>
+        <p:nvSpPr>
+          <p:cNvPr id="4" name="Date Placeholder 3">
+            <a:extLst>
+              <a:ext uri="{FF2B5EF4-FFF2-40B4-BE49-F238E27FC236}">
+                <a16:creationId xmlns:a16="http://schemas.microsoft.com/office/drawing/2014/main" id="{BC872719-430F-03A1-F2F3-F317FD2683D0}"/>
+              </a:ext>
+            </a:extLst>
+          </p:cNvPr>
+          <p:cNvSpPr>
+            <a:spLocks noGrp="1"/>
+          </p:cNvSpPr>
+          <p:nvPr>
+            <p:ph type="dt" sz="half" idx="2"/>
+          </p:nvPr>
+        </p:nvSpPr>
+        <p:spPr>
+          <a:xfrm>
+            <a:off x="838200" y="6356350"/>
+            <a:ext cx="2743200" cy="365125"/>
+          </a:xfrm>
+          <a:prstGeom prst="rect">
+            <a:avLst/>
+          </a:prstGeom>
+        </p:spPr>
+        <p:txBody>
+          <a:bodyPr vert="horz" lIns="91440" tIns="45720" rIns="91440" bIns="45720" rtlCol="0" anchor="ctr"/>
+          <a:lstStyle>
+            <a:lvl1pPr algn="l">
+              <a:defRPr sz="1200">
+                <a:solidFill>
+                  <a:schemeClr val="tx1">
+                    <a:tint val="82000"/>
+                  </a:schemeClr>
+                </a:solidFill>
+              </a:defRPr>
+            </a:lvl1pPr>
+          </a:lstStyle>
+          <a:p>
+            <a:fld id="{C51537AA-315F-204E-9EA9-888A22916B59}" type="datetimeFigureOut">
+              <a:rPr lang="en-US" smtClean="0"/>
+              <a:t>8/22/26</a:t>
+            </a:fld>
+            <a:endParaRPr lang="en-US"/>
+          </a:p>
+        </p:txBody>
+      </p:sp>
+      <p:sp>
+        <p:nvSpPr>
+          <p:cNvPr id="5" name="Footer Placeholder 4">
+            <a:extLst>
+              <a:ext uri="{FF2B5EF4-FFF2-40B4-BE49-F238E27FC236}">
+                <a16:creationId xmlns:a16="http://schemas.microsoft.com/office/drawing/2014/main" id="{AF430D48-A7F7-AC94-0637-96BA458942E9}"/>
+              </a:ext>
+            </a:extLst>
+          </p:cNvPr>
+          <p:cNvSpPr>
+            <a:spLocks noGrp="1"/>
+          </p:cNvSpPr>
+          <p:nvPr>
+            <p:ph type="ftr" sz="quarter" idx="3"/>
+          </p:nvPr>
+        </p:nvSpPr>
+        <p:spPr>
+          <a:xfrm>
+            <a:off x="4038600" y="6356350"/>
+            <a:ext cx="4114800" cy="365125"/>
+          </a:xfrm>
+          <a:prstGeom prst="rect">
+            <a:avLst/>
+          </a:prstGeom>
+        </p:spPr>
+        <p:txBody>
+          <a:bodyPr vert="horz" lIns="91440" tIns="45720" rIns="91440" bIns="45720" rtlCol="0" anchor="ctr"/>
+          <a:lstStyle>
+            <a:lvl1pPr algn="ctr">
+              <a:defRPr sz="1200">
+                <a:solidFill>
+                  <a:schemeClr val="tx1">
+                    <a:tint val="82000"/>
+                  </a:schemeClr>
+                </a:solidFill>
+              </a:defRPr>
+            </a:lvl1pPr>
+          </a:lstStyle>
+          <a:p>
+            <a:endParaRPr lang="en-US"/>
+          </a:p>
+        </p:txBody>
+      </p:sp>
+      <p:sp>
+        <p:nvSpPr>
+          <p:cNvPr id="6" name="Slide Number Placeholder 5">
+            <a:extLst>
+              <a:ext uri="{FF2B5EF4-FFF2-40B4-BE49-F238E27FC236}">
+                <a16:creationId xmlns:a16="http://schemas.microsoft.com/office/drawing/2014/main" id="{0B72C786-6B6F-41B4-7D2F-820C14EBBAB4}"/>
+              </a:ext>
+            </a:extLst>
+          </p:cNvPr>
+          <p:cNvSpPr>
+            <a:spLocks noGrp="1"/>
+          </p:cNvSpPr>
+          <p:nvPr>
+            <p:ph type="sldNum" sz="quarter" idx="4"/>
+          </p:nvPr>
+        </p:nvSpPr>
+        <p:spPr>
+          <a:xfrm>
+            <a:off x="8610600" y="6356350"/>
+            <a:ext cx="2743200" cy="365125"/>
+          </a:xfrm>
+          <a:prstGeom prst="rect">
+            <a:avLst/>
+          </a:prstGeom>
+        </p:spPr>
+        <p:txBody>
+          <a:bodyPr vert="horz" lIns="91440" tIns="45720" rIns="91440" bIns="45720" rtlCol="0" anchor="ctr"/>
+          <a:lstStyle>
+            <a:lvl1pPr algn="r">
+              <a:defRPr sz="1200">
+                <a:solidFill>
+                  <a:schemeClr val="tx1">
+                    <a:tint val="82000"/>
+                  </a:schemeClr>
+                </a:solidFill>
+              </a:defRPr>
+            </a:lvl1pPr>
+          </a:lstStyle>
+          <a:p>
+            <a:fld id="{25E5E6C5-729B-4849-AC0C-1ABDA3863663}" type="slidenum">
+              <a:rPr lang="en-US" smtClean="0"/>
+              <a:t>‹#›</a:t>
+            </a:fld>
+            <a:endParaRPr lang="en-US"/>
+          </a:p>
+        </p:txBody>
+      </p:sp>
     </p:spTree>
+    <p:extLst>
+      <p:ext uri="{BB962C8B-B14F-4D97-AF65-F5344CB8AC3E}">
+        <p14:creationId xmlns:p14="http://schemas.microsoft.com/office/powerpoint/2010/main" val="243222077"/>
+      </p:ext>
+    </p:extLst>
   </p:cSld>
   <p:clrMap bg1="lt1" tx1="dk1" bg2="lt2" tx2="dk2" accent1="accent1" accent2="accent2" accent3="accent3" accent4="accent4" accent5="accent5" accent6="accent6" hlink="hlink" folHlink="folHlink"/>
   <p:sldLayoutIdLst>
     <p:sldLayoutId id="2147483649" r:id="rId1"/>
+    <p:sldLayoutId id="2147483650" r:id="rId2"/>
+    <p:sldLayoutId id="2147483651" r:id="rId3"/>
+    <p:sldLayoutId id="2147483652" r:id="rId4"/>
+    <p:sldLayoutId id="2147483653" r:id="rId5"/>
+    <p:sldLayoutId id="2147483654" r:id="rId6"/>
+    <p:sldLayoutId id="2147483655" r:id="rId7"/>
+    <p:sldLayoutId id="2147483656" r:id="rId8"/>
+    <p:sldLayoutId id="2147483657" r:id="rId9"/>
+    <p:sldLayoutId id="2147483658" r:id="rId10"/>
+    <p:sldLayoutId id="2147483659" r:id="rId11"/>
+    <p:sldLayoutId id="2147483660" r:id="rId12"/>
   </p:sldLayoutIdLst>
   <p:txStyles>
     <p:titleStyle>
-      <a:lvl1pPr algn="l">
+      <a:lvl1pPr algn="l" defTabSz="914400" rtl="0" eaLnBrk="1" latinLnBrk="0" hangingPunct="1">
         <a:lnSpc>
           <a:spcPct val="90000"/>
         </a:lnSpc>
         <a:spcBef>
-          <a:spcPts val="0"/>
+          <a:spcPct val="0"/>
         </a:spcBef>
         <a:buNone/>
-        <a:defRPr sz="4400">
+        <a:defRPr sz="4400" kern="1200">
           <a:solidFill>
             <a:schemeClr val="tx1"/>
           </a:solidFill>
           <a:latin typeface="+mj-lt"/>
-          <a:ea typeface="+mj-lt"/>
-          <a:cs typeface="+mj-lt"/>
+          <a:ea typeface="+mj-ea"/>
+          <a:cs typeface="+mj-cs"/>
         </a:defRPr>
       </a:lvl1pPr>
     </p:titleStyle>
     <p:bodyStyle>
-      <a:lvl1pPr marL="228600" indent="-228600" algn="l">
+      <a:lvl1pPr marL="228600" indent="-228600" algn="l" defTabSz="914400" rtl="0" eaLnBrk="1" latinLnBrk="0" hangingPunct="1">
         <a:lnSpc>
           <a:spcPct val="90000"/>
         </a:lnSpc>
         <a:spcBef>
           <a:spcPts val="1000"/>
         </a:spcBef>
+        <a:buFont typeface="Arial" panose="020B0604020202020204" pitchFamily="34" charset="0"/>
         <a:buChar char="•"/>
-        <a:defRPr sz="2800">
+        <a:defRPr sz="2800" kern="1200">
           <a:solidFill>
             <a:schemeClr val="tx1"/>
           </a:solidFill>
           <a:latin typeface="+mn-lt"/>
-          <a:ea typeface="+mn-lt"/>
-          <a:cs typeface="+mn-lt"/>
+          <a:ea typeface="+mn-ea"/>
+          <a:cs typeface="+mn-cs"/>
         </a:defRPr>
       </a:lvl1pPr>
-      <a:lvl2pPr marL="685800" indent="-228600" algn="l">
+      <a:lvl2pPr marL="685800" indent="-228600" algn="l" defTabSz="914400" rtl="0" eaLnBrk="1" latinLnBrk="0" hangingPunct="1">
         <a:lnSpc>
           <a:spcPct val="90000"/>
         </a:lnSpc>
         <a:spcBef>
           <a:spcPts val="500"/>
         </a:spcBef>
+        <a:buFont typeface="Arial" panose="020B0604020202020204" pitchFamily="34" charset="0"/>
         <a:buChar char="•"/>
-        <a:defRPr sz="2400">
+        <a:defRPr sz="2400" kern="1200">
           <a:solidFill>
             <a:schemeClr val="tx1"/>
           </a:solidFill>
           <a:latin typeface="+mn-lt"/>
-          <a:ea typeface="+mn-lt"/>
-          <a:cs typeface="+mn-lt"/>
+          <a:ea typeface="+mn-ea"/>
+          <a:cs typeface="+mn-cs"/>
         </a:defRPr>
       </a:lvl2pPr>
-      <a:lvl3pPr marL="1143000" indent="-228600" algn="l">
+      <a:lvl3pPr marL="1143000" indent="-228600" algn="l" defTabSz="914400" rtl="0" eaLnBrk="1" latinLnBrk="0" hangingPunct="1">
         <a:lnSpc>
           <a:spcPct val="90000"/>
         </a:lnSpc>
         <a:spcBef>
           <a:spcPts val="500"/>
         </a:spcBef>
+        <a:buFont typeface="Arial" panose="020B0604020202020204" pitchFamily="34" charset="0"/>
         <a:buChar char="•"/>
-        <a:defRPr sz="2000">
+        <a:defRPr sz="2000" kern="1200">
           <a:solidFill>
             <a:schemeClr val="tx1"/>
           </a:solidFill>
           <a:latin typeface="+mn-lt"/>
-          <a:ea typeface="+mn-lt"/>
-          <a:cs typeface="+mn-lt"/>
+          <a:ea typeface="+mn-ea"/>
+          <a:cs typeface="+mn-cs"/>
         </a:defRPr>
       </a:lvl3pPr>
-      <a:lvl4pPr marL="1600200" indent="-228600" algn="l">
+      <a:lvl4pPr marL="1600200" indent="-228600" algn="l" defTabSz="914400" rtl="0" eaLnBrk="1" latinLnBrk="0" hangingPunct="1">
         <a:lnSpc>
           <a:spcPct val="90000"/>
         </a:lnSpc>
         <a:spcBef>
           <a:spcPts val="500"/>
         </a:spcBef>
+        <a:buFont typeface="Arial" panose="020B0604020202020204" pitchFamily="34" charset="0"/>
         <a:buChar char="•"/>
-        <a:defRPr sz="1800">
+        <a:defRPr sz="1800" kern="1200">
           <a:solidFill>
             <a:schemeClr val="tx1"/>
           </a:solidFill>
           <a:latin typeface="+mn-lt"/>
-          <a:ea typeface="+mn-lt"/>
-          <a:cs typeface="+mn-lt"/>
+          <a:ea typeface="+mn-ea"/>
+          <a:cs typeface="+mn-cs"/>
         </a:defRPr>
       </a:lvl4pPr>
-      <a:lvl5pPr marL="2057400" indent="-228600" algn="l">
+      <a:lvl5pPr marL="2057400" indent="-228600" algn="l" defTabSz="914400" rtl="0" eaLnBrk="1" latinLnBrk="0" hangingPunct="1">
         <a:lnSpc>
           <a:spcPct val="90000"/>
         </a:lnSpc>
         <a:spcBef>
           <a:spcPts val="500"/>
         </a:spcBef>
+        <a:buFont typeface="Arial" panose="020B0604020202020204" pitchFamily="34" charset="0"/>
         <a:buChar char="•"/>
-        <a:defRPr sz="1800">
+        <a:defRPr sz="1800" kern="1200">
           <a:solidFill>
             <a:schemeClr val="tx1"/>
           </a:solidFill>
           <a:latin typeface="+mn-lt"/>
-          <a:ea typeface="+mn-lt"/>
-          <a:cs typeface="+mn-lt"/>
+          <a:ea typeface="+mn-ea"/>
+          <a:cs typeface="+mn-cs"/>
         </a:defRPr>
       </a:lvl5pPr>
-      <a:lvl6pPr marL="2514600" indent="-228600" algn="l">
+      <a:lvl6pPr marL="2514600" indent="-228600" algn="l" defTabSz="914400" rtl="0" eaLnBrk="1" latinLnBrk="0" hangingPunct="1">
         <a:lnSpc>
           <a:spcPct val="90000"/>
         </a:lnSpc>
         <a:spcBef>
           <a:spcPts val="500"/>
         </a:spcBef>
+        <a:buFont typeface="Arial" panose="020B0604020202020204" pitchFamily="34" charset="0"/>
         <a:buChar char="•"/>
-        <a:defRPr sz="1800">
+        <a:defRPr sz="1800" kern="1200">
           <a:solidFill>
             <a:schemeClr val="tx1"/>
           </a:solidFill>
           <a:latin typeface="+mn-lt"/>
-          <a:ea typeface="+mn-lt"/>
-          <a:cs typeface="+mn-lt"/>
+          <a:ea typeface="+mn-ea"/>
+          <a:cs typeface="+mn-cs"/>
         </a:defRPr>
       </a:lvl6pPr>
-      <a:lvl7pPr marL="2971800" indent="-228600" algn="l">
+      <a:lvl7pPr marL="2971800" indent="-228600" algn="l" defTabSz="914400" rtl="0" eaLnBrk="1" latinLnBrk="0" hangingPunct="1">
         <a:lnSpc>
           <a:spcPct val="90000"/>
         </a:lnSpc>
         <a:spcBef>
           <a:spcPts val="500"/>
         </a:spcBef>
+        <a:buFont typeface="Arial" panose="020B0604020202020204" pitchFamily="34" charset="0"/>
         <a:buChar char="•"/>
-        <a:defRPr sz="1800">
+        <a:defRPr sz="1800" kern="1200">
           <a:solidFill>
             <a:schemeClr val="tx1"/>
           </a:solidFill>
           <a:latin typeface="+mn-lt"/>
-          <a:ea typeface="+mn-lt"/>
-          <a:cs typeface="+mn-lt"/>
+          <a:ea typeface="+mn-ea"/>
+          <a:cs typeface="+mn-cs"/>
         </a:defRPr>
       </a:lvl7pPr>
-      <a:lvl8pPr marL="3429000" indent="-228600" algn="l">
+      <a:lvl8pPr marL="3429000" indent="-228600" algn="l" defTabSz="914400" rtl="0" eaLnBrk="1" latinLnBrk="0" hangingPunct="1">
         <a:lnSpc>
           <a:spcPct val="90000"/>
         </a:lnSpc>
         <a:spcBef>
           <a:spcPts val="500"/>
         </a:spcBef>
+        <a:buFont typeface="Arial" panose="020B0604020202020204" pitchFamily="34" charset="0"/>
         <a:buChar char="•"/>
-        <a:defRPr sz="1800">
+        <a:defRPr sz="1800" kern="1200">
           <a:solidFill>
             <a:schemeClr val="tx1"/>
           </a:solidFill>
           <a:latin typeface="+mn-lt"/>
-          <a:ea typeface="+mn-lt"/>
-          <a:cs typeface="+mn-lt"/>
+          <a:ea typeface="+mn-ea"/>
+          <a:cs typeface="+mn-cs"/>
         </a:defRPr>
       </a:lvl8pPr>
-      <a:lvl9pPr marL="3886200" indent="-228600" algn="l">
+      <a:lvl9pPr marL="3886200" indent="-228600" algn="l" defTabSz="914400" rtl="0" eaLnBrk="1" latinLnBrk="0" hangingPunct="1">
         <a:lnSpc>
           <a:spcPct val="90000"/>
         </a:lnSpc>
         <a:spcBef>
           <a:spcPts val="500"/>
         </a:spcBef>
+        <a:buFont typeface="Arial" panose="020B0604020202020204" pitchFamily="34" charset="0"/>
         <a:buChar char="•"/>
-        <a:defRPr sz="1800">
+        <a:defRPr sz="1800" kern="1200">
           <a:solidFill>
             <a:schemeClr val="tx1"/>
           </a:solidFill>
           <a:latin typeface="+mn-lt"/>
-          <a:ea typeface="+mn-lt"/>
-          <a:cs typeface="+mn-lt"/>
+          <a:ea typeface="+mn-ea"/>
+          <a:cs typeface="+mn-cs"/>
         </a:defRPr>
       </a:lvl9pPr>
     </p:bodyStyle>
     <p:otherStyle>
-      <a:lvl1pPr marL="0" algn="l">
-        <a:buNone/>
-        <a:defRPr sz="1800">
+      <a:defPPr>
+        <a:defRPr lang="en-US"/>
+      </a:defPPr>
+      <a:lvl1pPr marL="0" algn="l" defTabSz="914400" rtl="0" eaLnBrk="1" latinLnBrk="0" hangingPunct="1">
+        <a:defRPr sz="1800" kern="1200">
           <a:solidFill>
             <a:schemeClr val="tx1"/>
           </a:solidFill>
           <a:latin typeface="+mn-lt"/>
-          <a:ea typeface="+mn-lt"/>
-          <a:cs typeface="+mn-lt"/>
+          <a:ea typeface="+mn-ea"/>
+          <a:cs typeface="+mn-cs"/>
         </a:defRPr>
       </a:lvl1pPr>
-      <a:lvl2pPr marL="457200" algn="l">
-        <a:buNone/>
-        <a:defRPr sz="1800">
+      <a:lvl2pPr marL="457200" algn="l" defTabSz="914400" rtl="0" eaLnBrk="1" latinLnBrk="0" hangingPunct="1">
+        <a:defRPr sz="1800" kern="1200">
           <a:solidFill>
             <a:schemeClr val="tx1"/>
           </a:solidFill>
           <a:latin typeface="+mn-lt"/>
-          <a:ea typeface="+mn-lt"/>
-          <a:cs typeface="+mn-lt"/>
+          <a:ea typeface="+mn-ea"/>
+          <a:cs typeface="+mn-cs"/>
         </a:defRPr>
       </a:lvl2pPr>
-      <a:lvl3pPr marL="914400" algn="l">
-        <a:buNone/>
-        <a:defRPr sz="1800">
+      <a:lvl3pPr marL="914400" algn="l" defTabSz="914400" rtl="0" eaLnBrk="1" latinLnBrk="0" hangingPunct="1">
+        <a:defRPr sz="1800" kern="1200">
           <a:solidFill>
             <a:schemeClr val="tx1"/>
           </a:solidFill>
           <a:latin typeface="+mn-lt"/>
-          <a:ea typeface="+mn-lt"/>
-          <a:cs typeface="+mn-lt"/>
+          <a:ea typeface="+mn-ea"/>
+          <a:cs typeface="+mn-cs"/>
         </a:defRPr>
       </a:lvl3pPr>
-      <a:lvl4pPr marL="1371600" algn="l">
-        <a:buNone/>
-        <a:defRPr sz="1800">
+      <a:lvl4pPr marL="1371600" algn="l" defTabSz="914400" rtl="0" eaLnBrk="1" latinLnBrk="0" hangingPunct="1">
+        <a:defRPr sz="1800" kern="1200">
           <a:solidFill>
             <a:schemeClr val="tx1"/>
           </a:solidFill>
           <a:latin typeface="+mn-lt"/>
-          <a:ea typeface="+mn-lt"/>
-          <a:cs typeface="+mn-lt"/>
+          <a:ea typeface="+mn-ea"/>
+          <a:cs typeface="+mn-cs"/>
         </a:defRPr>
       </a:lvl4pPr>
-      <a:lvl5pPr marL="1828800" algn="l">
-        <a:buNone/>
-        <a:defRPr sz="1800">
+      <a:lvl5pPr marL="1828800" algn="l" defTabSz="914400" rtl="0" eaLnBrk="1" latinLnBrk="0" hangingPunct="1">
+        <a:defRPr sz="1800" kern="1200">
           <a:solidFill>
             <a:schemeClr val="tx1"/>
           </a:solidFill>
           <a:latin typeface="+mn-lt"/>
-          <a:ea typeface="+mn-lt"/>
-          <a:cs typeface="+mn-lt"/>
+          <a:ea typeface="+mn-ea"/>
+          <a:cs typeface="+mn-cs"/>
         </a:defRPr>
       </a:lvl5pPr>
-      <a:lvl6pPr marL="2286000" algn="l">
-        <a:buNone/>
-        <a:defRPr sz="1800">
+      <a:lvl6pPr marL="2286000" algn="l" defTabSz="914400" rtl="0" eaLnBrk="1" latinLnBrk="0" hangingPunct="1">
+        <a:defRPr sz="1800" kern="1200">
           <a:solidFill>
             <a:schemeClr val="tx1"/>
           </a:solidFill>
           <a:latin typeface="+mn-lt"/>
-          <a:ea typeface="+mn-lt"/>
-          <a:cs typeface="+mn-lt"/>
+          <a:ea typeface="+mn-ea"/>
+          <a:cs typeface="+mn-cs"/>
         </a:defRPr>
       </a:lvl6pPr>
-      <a:lvl7pPr marL="2743200" algn="l">
-        <a:buNone/>
-        <a:defRPr sz="1800">
+      <a:lvl7pPr marL="2743200" algn="l" defTabSz="914400" rtl="0" eaLnBrk="1" latinLnBrk="0" hangingPunct="1">
+        <a:defRPr sz="1800" kern="1200">
           <a:solidFill>
             <a:schemeClr val="tx1"/>
           </a:solidFill>
           <a:latin typeface="+mn-lt"/>
-          <a:ea typeface="+mn-lt"/>
-          <a:cs typeface="+mn-lt"/>
+          <a:ea typeface="+mn-ea"/>
+          <a:cs typeface="+mn-cs"/>
         </a:defRPr>
       </a:lvl7pPr>
-      <a:lvl8pPr marL="3200400" algn="l">
-        <a:buNone/>
-        <a:defRPr sz="1800">
+      <a:lvl8pPr marL="3200400" algn="l" defTabSz="914400" rtl="0" eaLnBrk="1" latinLnBrk="0" hangingPunct="1">
+        <a:defRPr sz="1800" kern="1200">
           <a:solidFill>
             <a:schemeClr val="tx1"/>
           </a:solidFill>
           <a:latin typeface="+mn-lt"/>
-          <a:ea typeface="+mn-lt"/>
-          <a:cs typeface="+mn-lt"/>
+          <a:ea typeface="+mn-ea"/>
+          <a:cs typeface="+mn-cs"/>
         </a:defRPr>
       </a:lvl8pPr>
-      <a:lvl9pPr marL="3657600" algn="l">
-        <a:buNone/>
-        <a:defRPr sz="1800">
+      <a:lvl9pPr marL="3657600" algn="l" defTabSz="914400" rtl="0" eaLnBrk="1" latinLnBrk="0" hangingPunct="1">
+        <a:defRPr sz="1800" kern="1200">
           <a:solidFill>
             <a:schemeClr val="tx1"/>
           </a:solidFill>
           <a:latin typeface="+mn-lt"/>
-          <a:ea typeface="+mn-lt"/>
-          <a:cs typeface="+mn-lt"/>
+          <a:ea typeface="+mn-ea"/>
+          <a:cs typeface="+mn-cs"/>
         </a:defRPr>
       </a:lvl9pPr>
     </p:otherStyle>
@@ -5046,14 +8119,6 @@
 <file path=ppt/slides/slide1.xml><?xml version="1.0" encoding="utf-8"?>
 <p:sld xmlns:a="http://schemas.openxmlformats.org/drawingml/2006/main" xmlns:r="http://schemas.openxmlformats.org/officeDocument/2006/relationships" xmlns:p="http://schemas.openxmlformats.org/presentationml/2006/main">
   <p:cSld>
-    <p:bg>
-      <p:bgPr>
-        <a:solidFill>
-          <a:srgbClr val="FFFCF5"/>
-        </a:solidFill>
-        <a:effectLst/>
-      </p:bgPr>
-    </p:bg>
     <p:spTree>
       <p:nvGrpSpPr>
         <p:cNvPr id="1" name=""/>
@@ -5885,14 +8950,6 @@
 <file path=ppt/slides/slide10.xml><?xml version="1.0" encoding="utf-8"?>
 <p:sld xmlns:a="http://schemas.openxmlformats.org/drawingml/2006/main" xmlns:r="http://schemas.openxmlformats.org/officeDocument/2006/relationships" xmlns:p="http://schemas.openxmlformats.org/presentationml/2006/main">
   <p:cSld>
-    <p:bg>
-      <p:bgPr>
-        <a:solidFill>
-          <a:srgbClr val="FFFCF5"/>
-        </a:solidFill>
-        <a:effectLst/>
-      </p:bgPr>
-    </p:bg>
     <p:spTree>
       <p:nvGrpSpPr>
         <p:cNvPr id="1" name=""/>
@@ -7233,7 +10290,7 @@
         </p:spPr>
         <p:txBody>
           <a:bodyPr wrap="square" lIns="0" tIns="0" rIns="0" bIns="0" anchor="t">
-            <a:normAutofit fontScale="94478"/>
+            <a:normAutofit fontScale="86978"/>
           </a:bodyPr>
           <a:lstStyle/>
           <a:p>
@@ -7278,14 +10335,6 @@
 <file path=ppt/slides/slide11.xml><?xml version="1.0" encoding="utf-8"?>
 <p:sld xmlns:a="http://schemas.openxmlformats.org/drawingml/2006/main" xmlns:r="http://schemas.openxmlformats.org/officeDocument/2006/relationships" xmlns:p="http://schemas.openxmlformats.org/presentationml/2006/main">
   <p:cSld>
-    <p:bg>
-      <p:bgPr>
-        <a:solidFill>
-          <a:srgbClr val="FFFCF5"/>
-        </a:solidFill>
-        <a:effectLst/>
-      </p:bgPr>
-    </p:bg>
     <p:spTree>
       <p:nvGrpSpPr>
         <p:cNvPr id="1" name=""/>
@@ -9191,14 +12240,6 @@
 <file path=ppt/slides/slide12.xml><?xml version="1.0" encoding="utf-8"?>
 <p:sld xmlns:a="http://schemas.openxmlformats.org/drawingml/2006/main" xmlns:r="http://schemas.openxmlformats.org/officeDocument/2006/relationships" xmlns:p="http://schemas.openxmlformats.org/presentationml/2006/main">
   <p:cSld>
-    <p:bg>
-      <p:bgPr>
-        <a:solidFill>
-          <a:srgbClr val="FFFCF5"/>
-        </a:solidFill>
-        <a:effectLst/>
-      </p:bgPr>
-    </p:bg>
     <p:spTree>
       <p:nvGrpSpPr>
         <p:cNvPr id="1" name=""/>
@@ -10929,14 +13970,6 @@
 <file path=ppt/slides/slide13.xml><?xml version="1.0" encoding="utf-8"?>
 <p:sld xmlns:a="http://schemas.openxmlformats.org/drawingml/2006/main" xmlns:r="http://schemas.openxmlformats.org/officeDocument/2006/relationships" xmlns:p="http://schemas.openxmlformats.org/presentationml/2006/main">
   <p:cSld>
-    <p:bg>
-      <p:bgPr>
-        <a:solidFill>
-          <a:srgbClr val="FFFCF5"/>
-        </a:solidFill>
-        <a:effectLst/>
-      </p:bgPr>
-    </p:bg>
     <p:spTree>
       <p:nvGrpSpPr>
         <p:cNvPr id="1" name=""/>
@@ -13259,14 +16292,6 @@
 <file path=ppt/slides/slide14.xml><?xml version="1.0" encoding="utf-8"?>
 <p:sld xmlns:a="http://schemas.openxmlformats.org/drawingml/2006/main" xmlns:r="http://schemas.openxmlformats.org/officeDocument/2006/relationships" xmlns:p="http://schemas.openxmlformats.org/presentationml/2006/main">
   <p:cSld>
-    <p:bg>
-      <p:bgPr>
-        <a:solidFill>
-          <a:srgbClr val="FFFCF5"/>
-        </a:solidFill>
-        <a:effectLst/>
-      </p:bgPr>
-    </p:bg>
     <p:spTree>
       <p:nvGrpSpPr>
         <p:cNvPr id="1" name=""/>
@@ -15322,14 +18347,6 @@
 <file path=ppt/slides/slide15.xml><?xml version="1.0" encoding="utf-8"?>
 <p:sld xmlns:a="http://schemas.openxmlformats.org/drawingml/2006/main" xmlns:r="http://schemas.openxmlformats.org/officeDocument/2006/relationships" xmlns:p="http://schemas.openxmlformats.org/presentationml/2006/main">
   <p:cSld>
-    <p:bg>
-      <p:bgPr>
-        <a:solidFill>
-          <a:srgbClr val="FFFCF5"/>
-        </a:solidFill>
-        <a:effectLst/>
-      </p:bgPr>
-    </p:bg>
     <p:spTree>
       <p:nvGrpSpPr>
         <p:cNvPr id="1" name=""/>
@@ -16189,7 +19206,7 @@
         </p:spPr>
         <p:txBody>
           <a:bodyPr wrap="square" lIns="0" tIns="0" rIns="0" bIns="0" anchor="t">
-            <a:normAutofit fontScale="95025"/>
+            <a:normAutofit fontScale="87525"/>
           </a:bodyPr>
           <a:lstStyle/>
           <a:p>
@@ -16864,7 +19881,7 @@
         </p:spPr>
         <p:txBody>
           <a:bodyPr wrap="square" lIns="0" tIns="0" rIns="0" bIns="0" anchor="t">
-            <a:normAutofit fontScale="94931"/>
+            <a:normAutofit fontScale="87431"/>
           </a:bodyPr>
           <a:lstStyle/>
           <a:p>
@@ -16909,14 +19926,6 @@
 <file path=ppt/slides/slide16.xml><?xml version="1.0" encoding="utf-8"?>
 <p:sld xmlns:a="http://schemas.openxmlformats.org/drawingml/2006/main" xmlns:r="http://schemas.openxmlformats.org/officeDocument/2006/relationships" xmlns:p="http://schemas.openxmlformats.org/presentationml/2006/main">
   <p:cSld>
-    <p:bg>
-      <p:bgPr>
-        <a:solidFill>
-          <a:srgbClr val="FFFCF5"/>
-        </a:solidFill>
-        <a:effectLst/>
-      </p:bgPr>
-    </p:bg>
     <p:spTree>
       <p:nvGrpSpPr>
         <p:cNvPr id="1" name=""/>
@@ -17793,7 +20802,7 @@
         </p:spPr>
         <p:txBody>
           <a:bodyPr lIns="28575" tIns="19050" rIns="28575" bIns="19050" anchor="ctr">
-            <a:normAutofit fontScale="92593"/>
+            <a:normAutofit fontScale="92593" lnSpcReduction="10000"/>
           </a:bodyPr>
           <a:lstStyle/>
           <a:p>
@@ -17857,7 +20866,7 @@
         </p:spPr>
         <p:txBody>
           <a:bodyPr lIns="28575" tIns="19050" rIns="28575" bIns="19050" anchor="t">
-            <a:normAutofit fontScale="95174"/>
+            <a:normAutofit fontScale="95174" lnSpcReduction="10000"/>
           </a:bodyPr>
           <a:lstStyle/>
           <a:p>
@@ -17959,7 +20968,7 @@
         </p:spPr>
         <p:txBody>
           <a:bodyPr lIns="28575" tIns="19050" rIns="28575" bIns="19050" anchor="ctr">
-            <a:normAutofit fontScale="89744"/>
+            <a:normAutofit fontScale="89744" lnSpcReduction="10000"/>
           </a:bodyPr>
           <a:lstStyle/>
           <a:p>
@@ -18129,7 +21138,7 @@
         </p:spPr>
         <p:txBody>
           <a:bodyPr lIns="28575" tIns="19050" rIns="28575" bIns="19050" anchor="ctr">
-            <a:normAutofit fontScale="92593"/>
+            <a:normAutofit fontScale="92593" lnSpcReduction="10000"/>
           </a:bodyPr>
           <a:lstStyle/>
           <a:p>
@@ -18193,7 +21202,7 @@
         </p:spPr>
         <p:txBody>
           <a:bodyPr lIns="28575" tIns="19050" rIns="28575" bIns="19050" anchor="t">
-            <a:normAutofit fontScale="87302"/>
+            <a:normAutofit fontScale="87302" lnSpcReduction="10000"/>
           </a:bodyPr>
           <a:lstStyle/>
           <a:p>
@@ -18295,7 +21304,7 @@
         </p:spPr>
         <p:txBody>
           <a:bodyPr lIns="28575" tIns="19050" rIns="28575" bIns="19050" anchor="ctr">
-            <a:normAutofit fontScale="89744"/>
+            <a:normAutofit fontScale="89744" lnSpcReduction="10000"/>
           </a:bodyPr>
           <a:lstStyle/>
           <a:p>
@@ -18465,7 +21474,7 @@
         </p:spPr>
         <p:txBody>
           <a:bodyPr lIns="28575" tIns="19050" rIns="28575" bIns="19050" anchor="ctr">
-            <a:normAutofit fontScale="92593"/>
+            <a:normAutofit fontScale="92593" lnSpcReduction="10000"/>
           </a:bodyPr>
           <a:lstStyle/>
           <a:p>
@@ -18529,7 +21538,7 @@
         </p:spPr>
         <p:txBody>
           <a:bodyPr lIns="28575" tIns="19050" rIns="28575" bIns="19050" anchor="t">
-            <a:normAutofit fontScale="87302"/>
+            <a:normAutofit fontScale="87302" lnSpcReduction="10000"/>
           </a:bodyPr>
           <a:lstStyle/>
           <a:p>
@@ -18631,7 +21640,7 @@
         </p:spPr>
         <p:txBody>
           <a:bodyPr lIns="28575" tIns="19050" rIns="28575" bIns="19050" anchor="ctr">
-            <a:normAutofit fontScale="89744"/>
+            <a:normAutofit fontScale="89744" lnSpcReduction="10000"/>
           </a:bodyPr>
           <a:lstStyle/>
           <a:p>
@@ -18801,7 +21810,7 @@
         </p:spPr>
         <p:txBody>
           <a:bodyPr lIns="28575" tIns="19050" rIns="28575" bIns="19050" anchor="ctr">
-            <a:normAutofit fontScale="92593"/>
+            <a:normAutofit fontScale="92593" lnSpcReduction="10000"/>
           </a:bodyPr>
           <a:lstStyle/>
           <a:p>
@@ -18865,7 +21874,7 @@
         </p:spPr>
         <p:txBody>
           <a:bodyPr lIns="28575" tIns="19050" rIns="28575" bIns="19050" anchor="t">
-            <a:normAutofit fontScale="87302"/>
+            <a:normAutofit fontScale="87302" lnSpcReduction="10000"/>
           </a:bodyPr>
           <a:lstStyle/>
           <a:p>
@@ -18967,7 +21976,7 @@
         </p:spPr>
         <p:txBody>
           <a:bodyPr lIns="28575" tIns="19050" rIns="28575" bIns="19050" anchor="ctr">
-            <a:normAutofit fontScale="89744"/>
+            <a:normAutofit fontScale="89744" lnSpcReduction="10000"/>
           </a:bodyPr>
           <a:lstStyle/>
           <a:p>
@@ -19137,7 +22146,7 @@
         </p:spPr>
         <p:txBody>
           <a:bodyPr lIns="28575" tIns="19050" rIns="28575" bIns="19050" anchor="ctr">
-            <a:normAutofit fontScale="92593"/>
+            <a:normAutofit fontScale="92593" lnSpcReduction="10000"/>
           </a:bodyPr>
           <a:lstStyle/>
           <a:p>
@@ -19201,7 +22210,7 @@
         </p:spPr>
         <p:txBody>
           <a:bodyPr lIns="28575" tIns="19050" rIns="28575" bIns="19050" anchor="t">
-            <a:normAutofit fontScale="87302"/>
+            <a:normAutofit fontScale="87302" lnSpcReduction="10000"/>
           </a:bodyPr>
           <a:lstStyle/>
           <a:p>
@@ -19303,7 +22312,7 @@
         </p:spPr>
         <p:txBody>
           <a:bodyPr lIns="28575" tIns="19050" rIns="28575" bIns="19050" anchor="ctr">
-            <a:normAutofit fontScale="89744"/>
+            <a:normAutofit fontScale="89744" lnSpcReduction="10000"/>
           </a:bodyPr>
           <a:lstStyle/>
           <a:p>
@@ -19473,7 +22482,7 @@
         </p:spPr>
         <p:txBody>
           <a:bodyPr lIns="28575" tIns="19050" rIns="28575" bIns="19050" anchor="ctr">
-            <a:normAutofit fontScale="92593"/>
+            <a:normAutofit fontScale="92593" lnSpcReduction="10000"/>
           </a:bodyPr>
           <a:lstStyle/>
           <a:p>
@@ -19537,7 +22546,7 @@
         </p:spPr>
         <p:txBody>
           <a:bodyPr lIns="28575" tIns="19050" rIns="28575" bIns="19050" anchor="t">
-            <a:normAutofit fontScale="87302"/>
+            <a:normAutofit fontScale="87302" lnSpcReduction="10000"/>
           </a:bodyPr>
           <a:lstStyle/>
           <a:p>
@@ -19639,7 +22648,7 @@
         </p:spPr>
         <p:txBody>
           <a:bodyPr lIns="28575" tIns="19050" rIns="28575" bIns="19050" anchor="ctr">
-            <a:normAutofit fontScale="89744"/>
+            <a:normAutofit fontScale="89744" lnSpcReduction="10000"/>
           </a:bodyPr>
           <a:lstStyle/>
           <a:p>
@@ -19809,7 +22818,7 @@
         </p:spPr>
         <p:txBody>
           <a:bodyPr lIns="28575" tIns="19050" rIns="28575" bIns="19050" anchor="ctr">
-            <a:normAutofit fontScale="92593"/>
+            <a:normAutofit fontScale="92593" lnSpcReduction="10000"/>
           </a:bodyPr>
           <a:lstStyle/>
           <a:p>
@@ -19873,7 +22882,7 @@
         </p:spPr>
         <p:txBody>
           <a:bodyPr lIns="28575" tIns="19050" rIns="28575" bIns="19050" anchor="t">
-            <a:normAutofit fontScale="87302"/>
+            <a:normAutofit fontScale="87302" lnSpcReduction="10000"/>
           </a:bodyPr>
           <a:lstStyle/>
           <a:p>
@@ -19975,7 +22984,7 @@
         </p:spPr>
         <p:txBody>
           <a:bodyPr lIns="28575" tIns="19050" rIns="28575" bIns="19050" anchor="ctr">
-            <a:normAutofit fontScale="89744"/>
+            <a:normAutofit fontScale="89744" lnSpcReduction="10000"/>
           </a:bodyPr>
           <a:lstStyle/>
           <a:p>
@@ -20378,14 +23387,6 @@
 <file path=ppt/slides/slide17.xml><?xml version="1.0" encoding="utf-8"?>
 <p:sld xmlns:a="http://schemas.openxmlformats.org/drawingml/2006/main" xmlns:r="http://schemas.openxmlformats.org/officeDocument/2006/relationships" xmlns:p="http://schemas.openxmlformats.org/presentationml/2006/main">
   <p:cSld>
-    <p:bg>
-      <p:bgPr>
-        <a:solidFill>
-          <a:srgbClr val="FFFCF5"/>
-        </a:solidFill>
-        <a:effectLst/>
-      </p:bgPr>
-    </p:bg>
     <p:spTree>
       <p:nvGrpSpPr>
         <p:cNvPr id="1" name=""/>
@@ -21159,7 +24160,7 @@
         </p:spPr>
         <p:txBody>
           <a:bodyPr wrap="square" lIns="0" tIns="0" rIns="0" bIns="0" anchor="t">
-            <a:normAutofit fontScale="99626"/>
+            <a:normAutofit fontScale="92126"/>
           </a:bodyPr>
           <a:lstStyle/>
           <a:p>
@@ -21735,14 +24736,6 @@
 <file path=ppt/slides/slide18.xml><?xml version="1.0" encoding="utf-8"?>
 <p:sld xmlns:a="http://schemas.openxmlformats.org/drawingml/2006/main" xmlns:r="http://schemas.openxmlformats.org/officeDocument/2006/relationships" xmlns:p="http://schemas.openxmlformats.org/presentationml/2006/main">
   <p:cSld>
-    <p:bg>
-      <p:bgPr>
-        <a:solidFill>
-          <a:srgbClr val="FFFCF5"/>
-        </a:solidFill>
-        <a:effectLst/>
-      </p:bgPr>
-    </p:bg>
     <p:spTree>
       <p:nvGrpSpPr>
         <p:cNvPr id="1" name=""/>
@@ -23506,7 +26499,7 @@
         </p:spPr>
         <p:txBody>
           <a:bodyPr wrap="square" lIns="0" tIns="0" rIns="0" bIns="0" anchor="t">
-            <a:normAutofit fontScale="95441"/>
+            <a:normAutofit fontScale="72941" lnSpcReduction="20000"/>
           </a:bodyPr>
           <a:lstStyle/>
           <a:p>
@@ -23565,7 +26558,7 @@
         </p:spPr>
         <p:txBody>
           <a:bodyPr wrap="square" lIns="0" tIns="0" rIns="0" bIns="0" anchor="t">
-            <a:normAutofit fontScale="90000"/>
+            <a:normAutofit fontScale="90000" lnSpcReduction="10000"/>
           </a:bodyPr>
           <a:lstStyle/>
           <a:p>
@@ -23766,14 +26759,6 @@
 <file path=ppt/slides/slide19.xml><?xml version="1.0" encoding="utf-8"?>
 <p:sld xmlns:a="http://schemas.openxmlformats.org/drawingml/2006/main" xmlns:r="http://schemas.openxmlformats.org/officeDocument/2006/relationships" xmlns:p="http://schemas.openxmlformats.org/presentationml/2006/main">
   <p:cSld>
-    <p:bg>
-      <p:bgPr>
-        <a:solidFill>
-          <a:srgbClr val="FFFCF5"/>
-        </a:solidFill>
-        <a:effectLst/>
-      </p:bgPr>
-    </p:bg>
     <p:spTree>
       <p:nvGrpSpPr>
         <p:cNvPr id="1" name=""/>
@@ -24582,7 +27567,7 @@
         </p:spPr>
         <p:txBody>
           <a:bodyPr wrap="square" lIns="0" tIns="0" rIns="0" bIns="0" anchor="t">
-            <a:normAutofit fontScale="98958"/>
+            <a:normAutofit fontScale="98958" lnSpcReduction="10000"/>
           </a:bodyPr>
           <a:lstStyle/>
           <a:p>
@@ -24976,7 +27961,7 @@
         </p:spPr>
         <p:txBody>
           <a:bodyPr wrap="square" lIns="0" tIns="0" rIns="0" bIns="0" anchor="t">
-            <a:normAutofit fontScale="98958"/>
+            <a:normAutofit fontScale="98958" lnSpcReduction="10000"/>
           </a:bodyPr>
           <a:lstStyle/>
           <a:p>
@@ -25370,7 +28355,7 @@
         </p:spPr>
         <p:txBody>
           <a:bodyPr wrap="square" lIns="0" tIns="0" rIns="0" bIns="0" anchor="t">
-            <a:normAutofit fontScale="98958"/>
+            <a:normAutofit fontScale="98958" lnSpcReduction="10000"/>
           </a:bodyPr>
           <a:lstStyle/>
           <a:p>
@@ -25764,7 +28749,7 @@
         </p:spPr>
         <p:txBody>
           <a:bodyPr wrap="square" lIns="0" tIns="0" rIns="0" bIns="0" anchor="t">
-            <a:normAutofit fontScale="98958"/>
+            <a:normAutofit fontScale="98958" lnSpcReduction="10000"/>
           </a:bodyPr>
           <a:lstStyle/>
           <a:p>
@@ -26158,7 +29143,7 @@
         </p:spPr>
         <p:txBody>
           <a:bodyPr wrap="square" lIns="0" tIns="0" rIns="0" bIns="0" anchor="t">
-            <a:normAutofit fontScale="98958"/>
+            <a:normAutofit fontScale="98958" lnSpcReduction="10000"/>
           </a:bodyPr>
           <a:lstStyle/>
           <a:p>
@@ -26203,14 +29188,6 @@
 <file path=ppt/slides/slide2.xml><?xml version="1.0" encoding="utf-8"?>
 <p:sld xmlns:a="http://schemas.openxmlformats.org/drawingml/2006/main" xmlns:r="http://schemas.openxmlformats.org/officeDocument/2006/relationships" xmlns:p="http://schemas.openxmlformats.org/presentationml/2006/main">
   <p:cSld>
-    <p:bg>
-      <p:bgPr>
-        <a:solidFill>
-          <a:srgbClr val="FFFCF5"/>
-        </a:solidFill>
-        <a:effectLst/>
-      </p:bgPr>
-    </p:bg>
     <p:spTree>
       <p:nvGrpSpPr>
         <p:cNvPr id="1" name=""/>
@@ -27967,14 +30944,6 @@
 <file path=ppt/slides/slide20.xml><?xml version="1.0" encoding="utf-8"?>
 <p:sld xmlns:a="http://schemas.openxmlformats.org/drawingml/2006/main" xmlns:r="http://schemas.openxmlformats.org/officeDocument/2006/relationships" xmlns:p="http://schemas.openxmlformats.org/presentationml/2006/main">
   <p:cSld>
-    <p:bg>
-      <p:bgPr>
-        <a:solidFill>
-          <a:srgbClr val="FFFCF5"/>
-        </a:solidFill>
-        <a:effectLst/>
-      </p:bgPr>
-    </p:bg>
     <p:spTree>
       <p:nvGrpSpPr>
         <p:cNvPr id="1" name=""/>
@@ -30023,14 +32992,6 @@
 <file path=ppt/slides/slide21.xml><?xml version="1.0" encoding="utf-8"?>
 <p:sld xmlns:a="http://schemas.openxmlformats.org/drawingml/2006/main" xmlns:r="http://schemas.openxmlformats.org/officeDocument/2006/relationships" xmlns:p="http://schemas.openxmlformats.org/presentationml/2006/main">
   <p:cSld>
-    <p:bg>
-      <p:bgPr>
-        <a:solidFill>
-          <a:srgbClr val="FFFCF5"/>
-        </a:solidFill>
-        <a:effectLst/>
-      </p:bgPr>
-    </p:bg>
     <p:spTree>
       <p:nvGrpSpPr>
         <p:cNvPr id="1" name=""/>
@@ -31581,14 +34542,6 @@
 <file path=ppt/slides/slide22.xml><?xml version="1.0" encoding="utf-8"?>
 <p:sld xmlns:a="http://schemas.openxmlformats.org/drawingml/2006/main" xmlns:r="http://schemas.openxmlformats.org/officeDocument/2006/relationships" xmlns:p="http://schemas.openxmlformats.org/presentationml/2006/main">
   <p:cSld>
-    <p:bg>
-      <p:bgPr>
-        <a:solidFill>
-          <a:srgbClr val="FFFCF5"/>
-        </a:solidFill>
-        <a:effectLst/>
-      </p:bgPr>
-    </p:bg>
     <p:spTree>
       <p:nvGrpSpPr>
         <p:cNvPr id="1" name=""/>
@@ -32572,14 +35525,6 @@
 <file path=ppt/slides/slide23.xml><?xml version="1.0" encoding="utf-8"?>
 <p:sld xmlns:a="http://schemas.openxmlformats.org/drawingml/2006/main" xmlns:r="http://schemas.openxmlformats.org/officeDocument/2006/relationships" xmlns:p="http://schemas.openxmlformats.org/presentationml/2006/main">
   <p:cSld>
-    <p:bg>
-      <p:bgPr>
-        <a:solidFill>
-          <a:srgbClr val="FFFCF5"/>
-        </a:solidFill>
-        <a:effectLst/>
-      </p:bgPr>
-    </p:bg>
     <p:spTree>
       <p:nvGrpSpPr>
         <p:cNvPr id="1" name=""/>
@@ -33563,14 +36508,6 @@
 <file path=ppt/slides/slide24.xml><?xml version="1.0" encoding="utf-8"?>
 <p:sld xmlns:a="http://schemas.openxmlformats.org/drawingml/2006/main" xmlns:r="http://schemas.openxmlformats.org/officeDocument/2006/relationships" xmlns:p="http://schemas.openxmlformats.org/presentationml/2006/main">
   <p:cSld>
-    <p:bg>
-      <p:bgPr>
-        <a:solidFill>
-          <a:srgbClr val="FFFCF5"/>
-        </a:solidFill>
-        <a:effectLst/>
-      </p:bgPr>
-    </p:bg>
     <p:spTree>
       <p:nvGrpSpPr>
         <p:cNvPr id="1" name=""/>
@@ -34475,14 +37412,6 @@
 <file path=ppt/slides/slide25.xml><?xml version="1.0" encoding="utf-8"?>
 <p:sld xmlns:a="http://schemas.openxmlformats.org/drawingml/2006/main" xmlns:r="http://schemas.openxmlformats.org/officeDocument/2006/relationships" xmlns:p="http://schemas.openxmlformats.org/presentationml/2006/main">
   <p:cSld>
-    <p:bg>
-      <p:bgPr>
-        <a:solidFill>
-          <a:srgbClr val="FFFCF5"/>
-        </a:solidFill>
-        <a:effectLst/>
-      </p:bgPr>
-    </p:bg>
     <p:spTree>
       <p:nvGrpSpPr>
         <p:cNvPr id="1" name=""/>
@@ -35838,7 +38767,7 @@
         </p:spPr>
         <p:txBody>
           <a:bodyPr lIns="28575" tIns="19050" rIns="28575" bIns="19050" anchor="ctr">
-            <a:normAutofit fontScale="93137"/>
+            <a:normAutofit fontScale="93137" lnSpcReduction="10000"/>
           </a:bodyPr>
           <a:lstStyle/>
           <a:p>
@@ -37919,14 +40848,6 @@
 <file path=ppt/slides/slide3.xml><?xml version="1.0" encoding="utf-8"?>
 <p:sld xmlns:a="http://schemas.openxmlformats.org/drawingml/2006/main" xmlns:r="http://schemas.openxmlformats.org/officeDocument/2006/relationships" xmlns:p="http://schemas.openxmlformats.org/presentationml/2006/main">
   <p:cSld>
-    <p:bg>
-      <p:bgPr>
-        <a:solidFill>
-          <a:srgbClr val="FFFCF5"/>
-        </a:solidFill>
-        <a:effectLst/>
-      </p:bgPr>
-    </p:bg>
     <p:spTree>
       <p:nvGrpSpPr>
         <p:cNvPr id="1" name=""/>
@@ -40404,7 +43325,7 @@
         </p:spPr>
         <p:txBody>
           <a:bodyPr wrap="square" lIns="0" tIns="0" rIns="0" bIns="0" anchor="t">
-            <a:normAutofit fontScale="86193"/>
+            <a:normAutofit fontScale="86193" lnSpcReduction="20000"/>
           </a:bodyPr>
           <a:lstStyle/>
           <a:p>
@@ -40449,14 +43370,6 @@
 <file path=ppt/slides/slide4.xml><?xml version="1.0" encoding="utf-8"?>
 <p:sld xmlns:a="http://schemas.openxmlformats.org/drawingml/2006/main" xmlns:r="http://schemas.openxmlformats.org/officeDocument/2006/relationships" xmlns:p="http://schemas.openxmlformats.org/presentationml/2006/main">
   <p:cSld>
-    <p:bg>
-      <p:bgPr>
-        <a:solidFill>
-          <a:srgbClr val="FFFCF5"/>
-        </a:solidFill>
-        <a:effectLst/>
-      </p:bgPr>
-    </p:bg>
     <p:spTree>
       <p:nvGrpSpPr>
         <p:cNvPr id="1" name=""/>
@@ -42408,14 +45321,6 @@
 <file path=ppt/slides/slide5.xml><?xml version="1.0" encoding="utf-8"?>
 <p:sld xmlns:a="http://schemas.openxmlformats.org/drawingml/2006/main" xmlns:r="http://schemas.openxmlformats.org/officeDocument/2006/relationships" xmlns:p="http://schemas.openxmlformats.org/presentationml/2006/main">
   <p:cSld>
-    <p:bg>
-      <p:bgPr>
-        <a:solidFill>
-          <a:srgbClr val="FFFCF5"/>
-        </a:solidFill>
-        <a:effectLst/>
-      </p:bgPr>
-    </p:bg>
     <p:spTree>
       <p:nvGrpSpPr>
         <p:cNvPr id="1" name=""/>
@@ -43731,7 +46636,7 @@
         </p:spPr>
         <p:txBody>
           <a:bodyPr wrap="square" lIns="0" tIns="0" rIns="0" bIns="0" anchor="t">
-            <a:normAutofit fontScale="82306"/>
+            <a:normAutofit fontScale="82306" lnSpcReduction="10000"/>
           </a:bodyPr>
           <a:lstStyle/>
           <a:p>
@@ -44201,14 +47106,6 @@
 <file path=ppt/slides/slide6.xml><?xml version="1.0" encoding="utf-8"?>
 <p:sld xmlns:a="http://schemas.openxmlformats.org/drawingml/2006/main" xmlns:r="http://schemas.openxmlformats.org/officeDocument/2006/relationships" xmlns:p="http://schemas.openxmlformats.org/presentationml/2006/main">
   <p:cSld>
-    <p:bg>
-      <p:bgPr>
-        <a:solidFill>
-          <a:srgbClr val="FFFCF5"/>
-        </a:solidFill>
-        <a:effectLst/>
-      </p:bgPr>
-    </p:bg>
     <p:spTree>
       <p:nvGrpSpPr>
         <p:cNvPr id="1" name=""/>
@@ -45336,7 +48233,7 @@
         </p:spPr>
         <p:txBody>
           <a:bodyPr wrap="square" lIns="0" tIns="0" rIns="0" bIns="0" anchor="t">
-            <a:normAutofit fontScale="88765"/>
+            <a:normAutofit fontScale="88765" lnSpcReduction="10000"/>
           </a:bodyPr>
           <a:lstStyle/>
           <a:p>
@@ -45381,14 +48278,6 @@
 <file path=ppt/slides/slide7.xml><?xml version="1.0" encoding="utf-8"?>
 <p:sld xmlns:a="http://schemas.openxmlformats.org/drawingml/2006/main" xmlns:r="http://schemas.openxmlformats.org/officeDocument/2006/relationships" xmlns:p="http://schemas.openxmlformats.org/presentationml/2006/main">
   <p:cSld>
-    <p:bg>
-      <p:bgPr>
-        <a:solidFill>
-          <a:srgbClr val="FFFCF5"/>
-        </a:solidFill>
-        <a:effectLst/>
-      </p:bgPr>
-    </p:bg>
     <p:spTree>
       <p:nvGrpSpPr>
         <p:cNvPr id="1" name=""/>
@@ -46667,7 +49556,7 @@
         </p:spPr>
         <p:txBody>
           <a:bodyPr wrap="square" lIns="0" tIns="0" rIns="0" bIns="0" anchor="t">
-            <a:normAutofit fontScale="95466"/>
+            <a:normAutofit fontScale="87966"/>
           </a:bodyPr>
           <a:lstStyle/>
           <a:p>
@@ -46712,14 +49601,6 @@
 <file path=ppt/slides/slide8.xml><?xml version="1.0" encoding="utf-8"?>
 <p:sld xmlns:a="http://schemas.openxmlformats.org/drawingml/2006/main" xmlns:r="http://schemas.openxmlformats.org/officeDocument/2006/relationships" xmlns:p="http://schemas.openxmlformats.org/presentationml/2006/main">
   <p:cSld>
-    <p:bg>
-      <p:bgPr>
-        <a:solidFill>
-          <a:srgbClr val="FFFCF5"/>
-        </a:solidFill>
-        <a:effectLst/>
-      </p:bgPr>
-    </p:bg>
     <p:spTree>
       <p:nvGrpSpPr>
         <p:cNvPr id="1" name=""/>
@@ -48170,14 +51051,6 @@
 <file path=ppt/slides/slide9.xml><?xml version="1.0" encoding="utf-8"?>
 <p:sld xmlns:a="http://schemas.openxmlformats.org/drawingml/2006/main" xmlns:r="http://schemas.openxmlformats.org/officeDocument/2006/relationships" xmlns:p="http://schemas.openxmlformats.org/presentationml/2006/main">
   <p:cSld>
-    <p:bg>
-      <p:bgPr>
-        <a:solidFill>
-          <a:srgbClr val="FFFCF5"/>
-        </a:solidFill>
-        <a:effectLst/>
-      </p:bgPr>
-    </p:bg>
     <p:spTree>
       <p:nvGrpSpPr>
         <p:cNvPr id="1" name=""/>
@@ -50407,14 +53280,14 @@
 </file>
 
 <file path=ppt/theme/theme1.xml><?xml version="1.0" encoding="utf-8"?>
-<a:theme xmlns:a="http://schemas.openxmlformats.org/drawingml/2006/main" name="ChatGPT">
+<a:theme xmlns:a="http://schemas.openxmlformats.org/drawingml/2006/main" name="Office Theme">
   <a:themeElements>
-    <a:clrScheme name="ChatGPT">
+    <a:clrScheme name="Office">
       <a:dk1>
-        <a:srgbClr val="000000"/>
+        <a:sysClr val="windowText" lastClr="000000"/>
       </a:dk1>
       <a:lt1>
-        <a:srgbClr val="FFFFFF"/>
+        <a:sysClr val="window" lastClr="FFFFFF"/>
       </a:lt1>
       <a:dk2>
         <a:srgbClr val="0E2841"/>
@@ -50449,68 +53322,162 @@
     </a:clrScheme>
     <a:fontScheme name="Office">
       <a:majorFont>
-        <a:latin typeface="Calibri Light"/>
-        <a:ea typeface="Calibri Light"/>
-        <a:cs typeface="Calibri Light"/>
+        <a:latin typeface="Aptos Display" panose="02110004020202020204"/>
+        <a:ea typeface=""/>
+        <a:cs typeface=""/>
+        <a:font script="Jpan" typeface="游ゴシック Light"/>
+        <a:font script="Hang" typeface="맑은 고딕"/>
+        <a:font script="Hans" typeface="等线 Light"/>
+        <a:font script="Hant" typeface="新細明體"/>
+        <a:font script="Arab" typeface="Times New Roman"/>
+        <a:font script="Hebr" typeface="Times New Roman"/>
+        <a:font script="Thai" typeface="Angsana New"/>
+        <a:font script="Ethi" typeface="Nyala"/>
+        <a:font script="Beng" typeface="Vrinda"/>
+        <a:font script="Gujr" typeface="Shruti"/>
+        <a:font script="Khmr" typeface="MoolBoran"/>
+        <a:font script="Knda" typeface="Tunga"/>
+        <a:font script="Guru" typeface="Raavi"/>
+        <a:font script="Cans" typeface="Euphemia"/>
+        <a:font script="Cher" typeface="Plantagenet Cherokee"/>
+        <a:font script="Yiii" typeface="Microsoft Yi Baiti"/>
+        <a:font script="Tibt" typeface="Microsoft Himalaya"/>
+        <a:font script="Thaa" typeface="MV Boli"/>
+        <a:font script="Deva" typeface="Mangal"/>
+        <a:font script="Telu" typeface="Gautami"/>
+        <a:font script="Taml" typeface="Latha"/>
+        <a:font script="Syrc" typeface="Estrangelo Edessa"/>
+        <a:font script="Orya" typeface="Kalinga"/>
+        <a:font script="Mlym" typeface="Kartika"/>
+        <a:font script="Laoo" typeface="DokChampa"/>
+        <a:font script="Sinh" typeface="Iskoola Pota"/>
+        <a:font script="Mong" typeface="Mongolian Baiti"/>
+        <a:font script="Viet" typeface="Times New Roman"/>
+        <a:font script="Uigh" typeface="Microsoft Uighur"/>
+        <a:font script="Geor" typeface="Sylfaen"/>
+        <a:font script="Armn" typeface="Arial"/>
+        <a:font script="Bugi" typeface="Leelawadee UI"/>
+        <a:font script="Bopo" typeface="Microsoft JhengHei"/>
+        <a:font script="Java" typeface="Javanese Text"/>
+        <a:font script="Lisu" typeface="Segoe UI"/>
+        <a:font script="Mymr" typeface="Myanmar Text"/>
+        <a:font script="Nkoo" typeface="Ebrima"/>
+        <a:font script="Olck" typeface="Nirmala UI"/>
+        <a:font script="Osma" typeface="Ebrima"/>
+        <a:font script="Phag" typeface="Phagspa"/>
+        <a:font script="Syrn" typeface="Estrangelo Edessa"/>
+        <a:font script="Syrj" typeface="Estrangelo Edessa"/>
+        <a:font script="Syre" typeface="Estrangelo Edessa"/>
+        <a:font script="Sora" typeface="Nirmala UI"/>
+        <a:font script="Tale" typeface="Microsoft Tai Le"/>
+        <a:font script="Talu" typeface="Microsoft New Tai Lue"/>
+        <a:font script="Tfng" typeface="Ebrima"/>
       </a:majorFont>
       <a:minorFont>
-        <a:latin typeface="Calibri"/>
-        <a:ea typeface="Calibri"/>
-        <a:cs typeface="Calibri"/>
+        <a:latin typeface="Aptos" panose="02110004020202020204"/>
+        <a:ea typeface=""/>
+        <a:cs typeface=""/>
+        <a:font script="Jpan" typeface="游ゴシック"/>
+        <a:font script="Hang" typeface="맑은 고딕"/>
+        <a:font script="Hans" typeface="等线"/>
+        <a:font script="Hant" typeface="新細明體"/>
+        <a:font script="Arab" typeface="Arial"/>
+        <a:font script="Hebr" typeface="Arial"/>
+        <a:font script="Thai" typeface="Cordia New"/>
+        <a:font script="Ethi" typeface="Nyala"/>
+        <a:font script="Beng" typeface="Vrinda"/>
+        <a:font script="Gujr" typeface="Shruti"/>
+        <a:font script="Khmr" typeface="DaunPenh"/>
+        <a:font script="Knda" typeface="Tunga"/>
+        <a:font script="Guru" typeface="Raavi"/>
+        <a:font script="Cans" typeface="Euphemia"/>
+        <a:font script="Cher" typeface="Plantagenet Cherokee"/>
+        <a:font script="Yiii" typeface="Microsoft Yi Baiti"/>
+        <a:font script="Tibt" typeface="Microsoft Himalaya"/>
+        <a:font script="Thaa" typeface="MV Boli"/>
+        <a:font script="Deva" typeface="Mangal"/>
+        <a:font script="Telu" typeface="Gautami"/>
+        <a:font script="Taml" typeface="Latha"/>
+        <a:font script="Syrc" typeface="Estrangelo Edessa"/>
+        <a:font script="Orya" typeface="Kalinga"/>
+        <a:font script="Mlym" typeface="Kartika"/>
+        <a:font script="Laoo" typeface="DokChampa"/>
+        <a:font script="Sinh" typeface="Iskoola Pota"/>
+        <a:font script="Mong" typeface="Mongolian Baiti"/>
+        <a:font script="Viet" typeface="Arial"/>
+        <a:font script="Uigh" typeface="Microsoft Uighur"/>
+        <a:font script="Geor" typeface="Sylfaen"/>
+        <a:font script="Armn" typeface="Arial"/>
+        <a:font script="Bugi" typeface="Leelawadee UI"/>
+        <a:font script="Bopo" typeface="Microsoft JhengHei"/>
+        <a:font script="Java" typeface="Javanese Text"/>
+        <a:font script="Lisu" typeface="Segoe UI"/>
+        <a:font script="Mymr" typeface="Myanmar Text"/>
+        <a:font script="Nkoo" typeface="Ebrima"/>
+        <a:font script="Olck" typeface="Nirmala UI"/>
+        <a:font script="Osma" typeface="Ebrima"/>
+        <a:font script="Phag" typeface="Phagspa"/>
+        <a:font script="Syrn" typeface="Estrangelo Edessa"/>
+        <a:font script="Syrj" typeface="Estrangelo Edessa"/>
+        <a:font script="Syre" typeface="Estrangelo Edessa"/>
+        <a:font script="Sora" typeface="Nirmala UI"/>
+        <a:font script="Tale" typeface="Microsoft Tai Le"/>
+        <a:font script="Talu" typeface="Microsoft New Tai Lue"/>
+        <a:font script="Tfng" typeface="Ebrima"/>
       </a:minorFont>
     </a:fontScheme>
-    <a:fmtScheme name="ChatGPT">
+    <a:fmtScheme name="Office">
       <a:fillStyleLst>
         <a:solidFill>
           <a:schemeClr val="phClr"/>
         </a:solidFill>
-        <a:gradFill>
+        <a:gradFill rotWithShape="1">
           <a:gsLst>
             <a:gs pos="0">
               <a:schemeClr val="phClr">
-                <a:tint val="67000"/>
                 <a:lumMod val="110000"/>
                 <a:satMod val="105000"/>
+                <a:tint val="67000"/>
               </a:schemeClr>
             </a:gs>
             <a:gs pos="50000">
               <a:schemeClr val="phClr">
-                <a:tint val="73000"/>
                 <a:lumMod val="105000"/>
                 <a:satMod val="103000"/>
+                <a:tint val="73000"/>
               </a:schemeClr>
             </a:gs>
             <a:gs pos="100000">
               <a:schemeClr val="phClr">
-                <a:tint val="81000"/>
                 <a:lumMod val="105000"/>
                 <a:satMod val="109000"/>
+                <a:tint val="81000"/>
               </a:schemeClr>
             </a:gs>
           </a:gsLst>
           <a:lin ang="5400000" scaled="0"/>
         </a:gradFill>
-        <a:gradFill>
+        <a:gradFill rotWithShape="1">
           <a:gsLst>
             <a:gs pos="0">
               <a:schemeClr val="phClr">
+                <a:satMod val="103000"/>
+                <a:lumMod val="102000"/>
                 <a:tint val="94000"/>
-                <a:lumMod val="102000"/>
-                <a:satMod val="103000"/>
               </a:schemeClr>
             </a:gs>
             <a:gs pos="50000">
               <a:schemeClr val="phClr">
+                <a:satMod val="110000"/>
+                <a:lumMod val="100000"/>
                 <a:shade val="100000"/>
-                <a:lumMod val="100000"/>
-                <a:satMod val="110000"/>
               </a:schemeClr>
             </a:gs>
             <a:gs pos="100000">
               <a:schemeClr val="phClr">
-                <a:shade val="78000"/>
                 <a:lumMod val="99000"/>
                 <a:satMod val="120000"/>
+                <a:shade val="78000"/>
               </a:schemeClr>
             </a:gs>
           </a:gsLst>
@@ -50518,23 +53485,26 @@
         </a:gradFill>
       </a:fillStyleLst>
       <a:lnStyleLst>
-        <a:ln w="12700">
+        <a:ln w="12700" cap="flat" cmpd="sng" algn="ctr">
           <a:solidFill>
             <a:schemeClr val="phClr"/>
           </a:solidFill>
           <a:prstDash val="solid"/>
+          <a:miter lim="800000"/>
         </a:ln>
-        <a:ln w="19050">
+        <a:ln w="19050" cap="flat" cmpd="sng" algn="ctr">
           <a:solidFill>
             <a:schemeClr val="phClr"/>
           </a:solidFill>
           <a:prstDash val="solid"/>
+          <a:miter lim="800000"/>
         </a:ln>
-        <a:ln w="25400">
+        <a:ln w="25400" cap="flat" cmpd="sng" algn="ctr">
           <a:solidFill>
             <a:schemeClr val="phClr"/>
           </a:solidFill>
           <a:prstDash val="solid"/>
+          <a:miter lim="800000"/>
         </a:ln>
       </a:lnStyleLst>
       <a:effectStyleLst>
@@ -50546,63 +53516,9 @@
         </a:effectStyle>
         <a:effectStyle>
           <a:effectLst>
-            <a:outerShdw blurRad="57150" dist="19050" dir="5400000">
+            <a:outerShdw blurRad="57150" dist="19050" dir="5400000" algn="ctr" rotWithShape="0">
               <a:srgbClr val="000000">
-                <a:alpha val="16000"/>
-              </a:srgbClr>
-            </a:outerShdw>
-          </a:effectLst>
-        </a:effectStyle>
-        <a:effectStyle>
-          <a:effectLst>
-            <a:outerShdw blurRad="19050" dist="9525" dir="5400000">
-              <a:srgbClr val="000000">
-                <a:alpha val="6000"/>
-              </a:srgbClr>
-            </a:outerShdw>
-          </a:effectLst>
-        </a:effectStyle>
-        <a:effectStyle>
-          <a:effectLst>
-            <a:outerShdw blurRad="28575" dist="9525" dir="5400000">
-              <a:srgbClr val="000000">
-                <a:alpha val="8000"/>
-              </a:srgbClr>
-            </a:outerShdw>
-          </a:effectLst>
-        </a:effectStyle>
-        <a:effectStyle>
-          <a:effectLst>
-            <a:outerShdw blurRad="57150" dist="19050" dir="5400000">
-              <a:srgbClr val="000000">
-                <a:alpha val="10000"/>
-              </a:srgbClr>
-            </a:outerShdw>
-          </a:effectLst>
-        </a:effectStyle>
-        <a:effectStyle>
-          <a:effectLst>
-            <a:outerShdw blurRad="114300" dist="38100" dir="5400000">
-              <a:srgbClr val="000000">
-                <a:alpha val="12000"/>
-              </a:srgbClr>
-            </a:outerShdw>
-          </a:effectLst>
-        </a:effectStyle>
-        <a:effectStyle>
-          <a:effectLst>
-            <a:outerShdw blurRad="171450" dist="57150" dir="5400000">
-              <a:srgbClr val="000000">
-                <a:alpha val="16000"/>
-              </a:srgbClr>
-            </a:outerShdw>
-          </a:effectLst>
-        </a:effectStyle>
-        <a:effectStyle>
-          <a:effectLst>
-            <a:outerShdw blurRad="266700" dist="95250" dir="5400000">
-              <a:srgbClr val="000000">
-                <a:alpha val="24000"/>
+                <a:alpha val="63000"/>
               </a:srgbClr>
             </a:outerShdw>
           </a:effectLst>
@@ -50618,22 +53534,22 @@
             <a:satMod val="170000"/>
           </a:schemeClr>
         </a:solidFill>
-        <a:gradFill>
+        <a:gradFill rotWithShape="1">
           <a:gsLst>
             <a:gs pos="0">
               <a:schemeClr val="phClr">
                 <a:tint val="93000"/>
+                <a:satMod val="150000"/>
                 <a:shade val="98000"/>
                 <a:lumMod val="102000"/>
-                <a:satMod val="150000"/>
               </a:schemeClr>
             </a:gs>
             <a:gs pos="50000">
               <a:schemeClr val="phClr">
                 <a:tint val="98000"/>
+                <a:satMod val="130000"/>
                 <a:shade val="90000"/>
                 <a:lumMod val="103000"/>
-                <a:satMod val="130000"/>
               </a:schemeClr>
             </a:gs>
             <a:gs pos="100000">
@@ -50648,20 +53564,45 @@
       </a:bgFillStyleLst>
     </a:fmtScheme>
   </a:themeElements>
-  <a:objectDefaults/>
+  <a:objectDefaults>
+    <a:lnDef>
+      <a:spPr/>
+      <a:bodyPr/>
+      <a:lstStyle/>
+      <a:style>
+        <a:lnRef idx="2">
+          <a:schemeClr val="accent1"/>
+        </a:lnRef>
+        <a:fillRef idx="0">
+          <a:schemeClr val="accent1"/>
+        </a:fillRef>
+        <a:effectRef idx="1">
+          <a:schemeClr val="accent1"/>
+        </a:effectRef>
+        <a:fontRef idx="minor">
+          <a:schemeClr val="tx1"/>
+        </a:fontRef>
+      </a:style>
+    </a:lnDef>
+  </a:objectDefaults>
   <a:extraClrSchemeLst/>
+  <a:extLst>
+    <a:ext uri="{05A4C25C-085E-4340-85A3-A5531E510DB2}">
+      <thm15:themeFamily xmlns:thm15="http://schemas.microsoft.com/office/thememl/2012/main" name="Office Theme" id="{2E142A2C-CD16-42D6-873A-C26D2A0506FA}" vid="{1BDDFF52-6CD6-40A5-AB3C-68EB2F1E4D0A}"/>
+    </a:ext>
+  </a:extLst>
 </a:theme>
 </file>
 
 <file path=ppt/theme/theme2.xml><?xml version="1.0" encoding="utf-8"?>
-<a:theme xmlns:a="http://schemas.openxmlformats.org/drawingml/2006/main" name="ChatGPT">
+<a:theme xmlns:a="http://schemas.openxmlformats.org/drawingml/2006/main" name="Office Theme">
   <a:themeElements>
-    <a:clrScheme name="ChatGPT">
+    <a:clrScheme name="Office">
       <a:dk1>
-        <a:srgbClr val="000000"/>
+        <a:sysClr val="windowText" lastClr="000000"/>
       </a:dk1>
       <a:lt1>
-        <a:srgbClr val="FFFFFF"/>
+        <a:sysClr val="window" lastClr="FFFFFF"/>
       </a:lt1>
       <a:dk2>
         <a:srgbClr val="0E2841"/>
@@ -50696,68 +53637,162 @@
     </a:clrScheme>
     <a:fontScheme name="Office">
       <a:majorFont>
-        <a:latin typeface="Calibri Light"/>
-        <a:ea typeface="Calibri Light"/>
-        <a:cs typeface="Calibri Light"/>
+        <a:latin typeface="Aptos Display" panose="02110004020202020204"/>
+        <a:ea typeface=""/>
+        <a:cs typeface=""/>
+        <a:font script="Jpan" typeface="游ゴシック Light"/>
+        <a:font script="Hang" typeface="맑은 고딕"/>
+        <a:font script="Hans" typeface="等线 Light"/>
+        <a:font script="Hant" typeface="新細明體"/>
+        <a:font script="Arab" typeface="Times New Roman"/>
+        <a:font script="Hebr" typeface="Times New Roman"/>
+        <a:font script="Thai" typeface="Angsana New"/>
+        <a:font script="Ethi" typeface="Nyala"/>
+        <a:font script="Beng" typeface="Vrinda"/>
+        <a:font script="Gujr" typeface="Shruti"/>
+        <a:font script="Khmr" typeface="MoolBoran"/>
+        <a:font script="Knda" typeface="Tunga"/>
+        <a:font script="Guru" typeface="Raavi"/>
+        <a:font script="Cans" typeface="Euphemia"/>
+        <a:font script="Cher" typeface="Plantagenet Cherokee"/>
+        <a:font script="Yiii" typeface="Microsoft Yi Baiti"/>
+        <a:font script="Tibt" typeface="Microsoft Himalaya"/>
+        <a:font script="Thaa" typeface="MV Boli"/>
+        <a:font script="Deva" typeface="Mangal"/>
+        <a:font script="Telu" typeface="Gautami"/>
+        <a:font script="Taml" typeface="Latha"/>
+        <a:font script="Syrc" typeface="Estrangelo Edessa"/>
+        <a:font script="Orya" typeface="Kalinga"/>
+        <a:font script="Mlym" typeface="Kartika"/>
+        <a:font script="Laoo" typeface="DokChampa"/>
+        <a:font script="Sinh" typeface="Iskoola Pota"/>
+        <a:font script="Mong" typeface="Mongolian Baiti"/>
+        <a:font script="Viet" typeface="Times New Roman"/>
+        <a:font script="Uigh" typeface="Microsoft Uighur"/>
+        <a:font script="Geor" typeface="Sylfaen"/>
+        <a:font script="Armn" typeface="Arial"/>
+        <a:font script="Bugi" typeface="Leelawadee UI"/>
+        <a:font script="Bopo" typeface="Microsoft JhengHei"/>
+        <a:font script="Java" typeface="Javanese Text"/>
+        <a:font script="Lisu" typeface="Segoe UI"/>
+        <a:font script="Mymr" typeface="Myanmar Text"/>
+        <a:font script="Nkoo" typeface="Ebrima"/>
+        <a:font script="Olck" typeface="Nirmala UI"/>
+        <a:font script="Osma" typeface="Ebrima"/>
+        <a:font script="Phag" typeface="Phagspa"/>
+        <a:font script="Syrn" typeface="Estrangelo Edessa"/>
+        <a:font script="Syrj" typeface="Estrangelo Edessa"/>
+        <a:font script="Syre" typeface="Estrangelo Edessa"/>
+        <a:font script="Sora" typeface="Nirmala UI"/>
+        <a:font script="Tale" typeface="Microsoft Tai Le"/>
+        <a:font script="Talu" typeface="Microsoft New Tai Lue"/>
+        <a:font script="Tfng" typeface="Ebrima"/>
       </a:majorFont>
       <a:minorFont>
-        <a:latin typeface="Calibri"/>
-        <a:ea typeface="Calibri"/>
-        <a:cs typeface="Calibri"/>
+        <a:latin typeface="Aptos" panose="02110004020202020204"/>
+        <a:ea typeface=""/>
+        <a:cs typeface=""/>
+        <a:font script="Jpan" typeface="游ゴシック"/>
+        <a:font script="Hang" typeface="맑은 고딕"/>
+        <a:font script="Hans" typeface="等线"/>
+        <a:font script="Hant" typeface="新細明體"/>
+        <a:font script="Arab" typeface="Arial"/>
+        <a:font script="Hebr" typeface="Arial"/>
+        <a:font script="Thai" typeface="Cordia New"/>
+        <a:font script="Ethi" typeface="Nyala"/>
+        <a:font script="Beng" typeface="Vrinda"/>
+        <a:font script="Gujr" typeface="Shruti"/>
+        <a:font script="Khmr" typeface="DaunPenh"/>
+        <a:font script="Knda" typeface="Tunga"/>
+        <a:font script="Guru" typeface="Raavi"/>
+        <a:font script="Cans" typeface="Euphemia"/>
+        <a:font script="Cher" typeface="Plantagenet Cherokee"/>
+        <a:font script="Yiii" typeface="Microsoft Yi Baiti"/>
+        <a:font script="Tibt" typeface="Microsoft Himalaya"/>
+        <a:font script="Thaa" typeface="MV Boli"/>
+        <a:font script="Deva" typeface="Mangal"/>
+        <a:font script="Telu" typeface="Gautami"/>
+        <a:font script="Taml" typeface="Latha"/>
+        <a:font script="Syrc" typeface="Estrangelo Edessa"/>
+        <a:font script="Orya" typeface="Kalinga"/>
+        <a:font script="Mlym" typeface="Kartika"/>
+        <a:font script="Laoo" typeface="DokChampa"/>
+        <a:font script="Sinh" typeface="Iskoola Pota"/>
+        <a:font script="Mong" typeface="Mongolian Baiti"/>
+        <a:font script="Viet" typeface="Arial"/>
+        <a:font script="Uigh" typeface="Microsoft Uighur"/>
+        <a:font script="Geor" typeface="Sylfaen"/>
+        <a:font script="Armn" typeface="Arial"/>
+        <a:font script="Bugi" typeface="Leelawadee UI"/>
+        <a:font script="Bopo" typeface="Microsoft JhengHei"/>
+        <a:font script="Java" typeface="Javanese Text"/>
+        <a:font script="Lisu" typeface="Segoe UI"/>
+        <a:font script="Mymr" typeface="Myanmar Text"/>
+        <a:font script="Nkoo" typeface="Ebrima"/>
+        <a:font script="Olck" typeface="Nirmala UI"/>
+        <a:font script="Osma" typeface="Ebrima"/>
+        <a:font script="Phag" typeface="Phagspa"/>
+        <a:font script="Syrn" typeface="Estrangelo Edessa"/>
+        <a:font script="Syrj" typeface="Estrangelo Edessa"/>
+        <a:font script="Syre" typeface="Estrangelo Edessa"/>
+        <a:font script="Sora" typeface="Nirmala UI"/>
+        <a:font script="Tale" typeface="Microsoft Tai Le"/>
+        <a:font script="Talu" typeface="Microsoft New Tai Lue"/>
+        <a:font script="Tfng" typeface="Ebrima"/>
       </a:minorFont>
     </a:fontScheme>
-    <a:fmtScheme name="ChatGPT">
+    <a:fmtScheme name="Office">
       <a:fillStyleLst>
         <a:solidFill>
           <a:schemeClr val="phClr"/>
         </a:solidFill>
-        <a:gradFill>
+        <a:gradFill rotWithShape="1">
           <a:gsLst>
             <a:gs pos="0">
               <a:schemeClr val="phClr">
-                <a:tint val="67000"/>
                 <a:lumMod val="110000"/>
                 <a:satMod val="105000"/>
+                <a:tint val="67000"/>
               </a:schemeClr>
             </a:gs>
             <a:gs pos="50000">
               <a:schemeClr val="phClr">
-                <a:tint val="73000"/>
                 <a:lumMod val="105000"/>
                 <a:satMod val="103000"/>
+                <a:tint val="73000"/>
               </a:schemeClr>
             </a:gs>
             <a:gs pos="100000">
               <a:schemeClr val="phClr">
-                <a:tint val="81000"/>
                 <a:lumMod val="105000"/>
                 <a:satMod val="109000"/>
+                <a:tint val="81000"/>
               </a:schemeClr>
             </a:gs>
           </a:gsLst>
           <a:lin ang="5400000" scaled="0"/>
         </a:gradFill>
-        <a:gradFill>
+        <a:gradFill rotWithShape="1">
           <a:gsLst>
             <a:gs pos="0">
               <a:schemeClr val="phClr">
+                <a:satMod val="103000"/>
+                <a:lumMod val="102000"/>
                 <a:tint val="94000"/>
-                <a:lumMod val="102000"/>
-                <a:satMod val="103000"/>
               </a:schemeClr>
             </a:gs>
             <a:gs pos="50000">
               <a:schemeClr val="phClr">
+                <a:satMod val="110000"/>
+                <a:lumMod val="100000"/>
                 <a:shade val="100000"/>
-                <a:lumMod val="100000"/>
-                <a:satMod val="110000"/>
               </a:schemeClr>
             </a:gs>
             <a:gs pos="100000">
               <a:schemeClr val="phClr">
-                <a:shade val="78000"/>
                 <a:lumMod val="99000"/>
                 <a:satMod val="120000"/>
+                <a:shade val="78000"/>
               </a:schemeClr>
             </a:gs>
           </a:gsLst>
@@ -50765,23 +53800,26 @@
         </a:gradFill>
       </a:fillStyleLst>
       <a:lnStyleLst>
-        <a:ln w="12700">
+        <a:ln w="12700" cap="flat" cmpd="sng" algn="ctr">
           <a:solidFill>
             <a:schemeClr val="phClr"/>
           </a:solidFill>
           <a:prstDash val="solid"/>
+          <a:miter lim="800000"/>
         </a:ln>
-        <a:ln w="19050">
+        <a:ln w="19050" cap="flat" cmpd="sng" algn="ctr">
           <a:solidFill>
             <a:schemeClr val="phClr"/>
           </a:solidFill>
           <a:prstDash val="solid"/>
+          <a:miter lim="800000"/>
         </a:ln>
-        <a:ln w="25400">
+        <a:ln w="25400" cap="flat" cmpd="sng" algn="ctr">
           <a:solidFill>
             <a:schemeClr val="phClr"/>
           </a:solidFill>
           <a:prstDash val="solid"/>
+          <a:miter lim="800000"/>
         </a:ln>
       </a:lnStyleLst>
       <a:effectStyleLst>
@@ -50793,63 +53831,9 @@
         </a:effectStyle>
         <a:effectStyle>
           <a:effectLst>
-            <a:outerShdw blurRad="57150" dist="19050" dir="5400000">
+            <a:outerShdw blurRad="57150" dist="19050" dir="5400000" algn="ctr" rotWithShape="0">
               <a:srgbClr val="000000">
-                <a:alpha val="16000"/>
-              </a:srgbClr>
-            </a:outerShdw>
-          </a:effectLst>
-        </a:effectStyle>
-        <a:effectStyle>
-          <a:effectLst>
-            <a:outerShdw blurRad="19050" dist="9525" dir="5400000">
-              <a:srgbClr val="000000">
-                <a:alpha val="6000"/>
-              </a:srgbClr>
-            </a:outerShdw>
-          </a:effectLst>
-        </a:effectStyle>
-        <a:effectStyle>
-          <a:effectLst>
-            <a:outerShdw blurRad="28575" dist="9525" dir="5400000">
-              <a:srgbClr val="000000">
-                <a:alpha val="8000"/>
-              </a:srgbClr>
-            </a:outerShdw>
-          </a:effectLst>
-        </a:effectStyle>
-        <a:effectStyle>
-          <a:effectLst>
-            <a:outerShdw blurRad="57150" dist="19050" dir="5400000">
-              <a:srgbClr val="000000">
-                <a:alpha val="10000"/>
-              </a:srgbClr>
-            </a:outerShdw>
-          </a:effectLst>
-        </a:effectStyle>
-        <a:effectStyle>
-          <a:effectLst>
-            <a:outerShdw blurRad="114300" dist="38100" dir="5400000">
-              <a:srgbClr val="000000">
-                <a:alpha val="12000"/>
-              </a:srgbClr>
-            </a:outerShdw>
-          </a:effectLst>
-        </a:effectStyle>
-        <a:effectStyle>
-          <a:effectLst>
-            <a:outerShdw blurRad="171450" dist="57150" dir="5400000">
-              <a:srgbClr val="000000">
-                <a:alpha val="16000"/>
-              </a:srgbClr>
-            </a:outerShdw>
-          </a:effectLst>
-        </a:effectStyle>
-        <a:effectStyle>
-          <a:effectLst>
-            <a:outerShdw blurRad="266700" dist="95250" dir="5400000">
-              <a:srgbClr val="000000">
-                <a:alpha val="24000"/>
+                <a:alpha val="63000"/>
               </a:srgbClr>
             </a:outerShdw>
           </a:effectLst>
@@ -50865,22 +53849,22 @@
             <a:satMod val="170000"/>
           </a:schemeClr>
         </a:solidFill>
-        <a:gradFill>
+        <a:gradFill rotWithShape="1">
           <a:gsLst>
             <a:gs pos="0">
               <a:schemeClr val="phClr">
                 <a:tint val="93000"/>
+                <a:satMod val="150000"/>
                 <a:shade val="98000"/>
                 <a:lumMod val="102000"/>
-                <a:satMod val="150000"/>
               </a:schemeClr>
             </a:gs>
             <a:gs pos="50000">
               <a:schemeClr val="phClr">
                 <a:tint val="98000"/>
+                <a:satMod val="130000"/>
                 <a:shade val="90000"/>
                 <a:lumMod val="103000"/>
-                <a:satMod val="130000"/>
               </a:schemeClr>
             </a:gs>
             <a:gs pos="100000">
@@ -50895,7 +53879,32 @@
       </a:bgFillStyleLst>
     </a:fmtScheme>
   </a:themeElements>
-  <a:objectDefaults/>
+  <a:objectDefaults>
+    <a:lnDef>
+      <a:spPr/>
+      <a:bodyPr/>
+      <a:lstStyle/>
+      <a:style>
+        <a:lnRef idx="2">
+          <a:schemeClr val="accent1"/>
+        </a:lnRef>
+        <a:fillRef idx="0">
+          <a:schemeClr val="accent1"/>
+        </a:fillRef>
+        <a:effectRef idx="1">
+          <a:schemeClr val="accent1"/>
+        </a:effectRef>
+        <a:fontRef idx="minor">
+          <a:schemeClr val="tx1"/>
+        </a:fontRef>
+      </a:style>
+    </a:lnDef>
+  </a:objectDefaults>
   <a:extraClrSchemeLst/>
+  <a:extLst>
+    <a:ext uri="{05A4C25C-085E-4340-85A3-A5531E510DB2}">
+      <thm15:themeFamily xmlns:thm15="http://schemas.microsoft.com/office/thememl/2012/main" name="Office Theme" id="{2E142A2C-CD16-42D6-873A-C26D2A0506FA}" vid="{1BDDFF52-6CD6-40A5-AB3C-68EB2F1E4D0A}"/>
+    </a:ext>
+  </a:extLst>
 </a:theme>
 </file>
--- a/presentations/kong-platform-journey-guided.pptx
+++ b/presentations/kong-platform-journey-guided.pptx
@@ -2291,7 +2291,7 @@
           </a:p>
           <a:p>
             <a:r>
-              <a:t>Each mechanism is paired with a measurable outcome and a reviewable artifact. State fidelity, request reliability, trust admission, recovery and safe change are all separate admission dimensions.</a:t>
+              <a:t>Each mechanism is paired with a measurable outcome and a reviewable artifact. Trustworthy active state, business reliability, trust integrity, management recoverability and safe change are all separate admission dimensions.</a:t>
             </a:r>
           </a:p>
           <a:p>
@@ -2635,7 +2635,7 @@
           </a:p>
           <a:p>
             <a:r>
-              <a:t>Capacity and evidence safety matter, but so do adoption, operating sustainability, exit readiness and accurate estate ownership. KO-7 is an outcome: administrative/configuration audit, request and security-decision correlation, business evidence, quantified produced/queued/dropped/delivered gaps, and prohibited-field control. Traceable may be one candidate mechanism, but no product name can make KO-7 pass.</a:t>
+              <a:t>Capacity isolation and evidence safety matter, but so do platform adoption, operating sustainability, reversibility and estate truth. KO-7 is an outcome: administrative/configuration audit, request and security-decision correlation, business evidence, quantified produced/queued/dropped/delivered gaps, and prohibited-field control. Traceable may be one candidate mechanism, but no product name can make KO-7 pass.</a:t>
             </a:r>
           </a:p>
           <a:p>
@@ -8851,7 +8851,7 @@
                 <a:ea typeface="Consolas"/>
                 <a:cs typeface="Consolas"/>
               </a:rPr>
-              <a:t>20 AUG 2026  •  WORKING DECISION BRIEF</a:t>
+              <a:t>22 AUG 2026  •  WORKING DECISION BRIEF</a:t>
             </a:r>
           </a:p>
         </p:txBody>
@@ -23870,9 +23870,9 @@
                 <a:solidFill>
                   <a:srgbClr val="5537D6"/>
                 </a:solidFill>
-                <a:latin typeface="Georgia"/>
-                <a:ea typeface="Georgia"/>
-                <a:cs typeface="Georgia"/>
+                <a:latin typeface="Consolas"/>
+                <a:ea typeface="Consolas"/>
+                <a:cs typeface="Consolas"/>
               </a:defRPr>
             </a:pPr>
             <a:r>
@@ -23880,9 +23880,9 @@
                 <a:solidFill>
                   <a:srgbClr val="5537D6"/>
                 </a:solidFill>
-                <a:latin typeface="Georgia"/>
-                <a:ea typeface="Georgia"/>
-                <a:cs typeface="Georgia"/>
+                <a:latin typeface="Consolas"/>
+                <a:ea typeface="Consolas"/>
+                <a:cs typeface="Consolas"/>
               </a:rPr>
               <a:t>0</a:t>
             </a:r>
@@ -27355,7 +27355,7 @@
                 <a:ea typeface="Georgia"/>
                 <a:cs typeface="Georgia"/>
               </a:rPr>
-              <a:t>State fidelity</a:t>
+              <a:t>Trustworthy active state</a:t>
             </a:r>
           </a:p>
         </p:txBody>
@@ -27749,7 +27749,7 @@
                 <a:ea typeface="Georgia"/>
                 <a:cs typeface="Georgia"/>
               </a:rPr>
-              <a:t>Request reliability</a:t>
+              <a:t>Business reliability</a:t>
             </a:r>
           </a:p>
         </p:txBody>
@@ -28143,7 +28143,7 @@
                 <a:ea typeface="Georgia"/>
                 <a:cs typeface="Georgia"/>
               </a:rPr>
-              <a:t>Trust admission</a:t>
+              <a:t>Trust integrity</a:t>
             </a:r>
           </a:p>
         </p:txBody>
@@ -28537,7 +28537,7 @@
                 <a:ea typeface="Georgia"/>
                 <a:cs typeface="Georgia"/>
               </a:rPr>
-              <a:t>Recovery</a:t>
+              <a:t>Management recoverability</a:t>
             </a:r>
           </a:p>
         </p:txBody>
@@ -30624,7 +30624,7 @@
                 <a:ea typeface="Georgia"/>
                 <a:cs typeface="Georgia"/>
               </a:rPr>
-              <a:t>Security + Traceable adjunct</a:t>
+              <a:t>Security + observability</a:t>
             </a:r>
           </a:p>
         </p:txBody>
@@ -31540,7 +31540,7 @@
                 <a:ea typeface="Georgia"/>
                 <a:cs typeface="Georgia"/>
               </a:rPr>
-              <a:t>Capacity</a:t>
+              <a:t>Capacity isolation</a:t>
             </a:r>
           </a:p>
         </p:txBody>
@@ -31787,7 +31787,7 @@
               </a:defRPr>
             </a:pPr>
             <a:r>
-              <a:rPr sz="2025" b="0" i="0">
+              <a:rPr sz="1400" b="0" i="0">
                 <a:solidFill>
                   <a:srgbClr val="111111"/>
                 </a:solidFill>
@@ -31795,7 +31795,7 @@
                 <a:ea typeface="Georgia"/>
                 <a:cs typeface="Georgia"/>
               </a:rPr>
-              <a:t>Security traceability</a:t>
+              <a:t>Security traceability and evidence safety</a:t>
             </a:r>
           </a:p>
         </p:txBody>
@@ -32050,7 +32050,7 @@
                 <a:ea typeface="Georgia"/>
                 <a:cs typeface="Georgia"/>
               </a:rPr>
-              <a:t>Adoption</a:t>
+              <a:t>Platform adoption</a:t>
             </a:r>
           </a:p>
         </p:txBody>
@@ -32297,7 +32297,7 @@
               </a:defRPr>
             </a:pPr>
             <a:r>
-              <a:rPr sz="2025" b="0" i="0">
+              <a:rPr sz="1650" b="0" i="0">
                 <a:solidFill>
                   <a:srgbClr val="111111"/>
                 </a:solidFill>
@@ -32305,7 +32305,7 @@
                 <a:ea typeface="Georgia"/>
                 <a:cs typeface="Georgia"/>
               </a:rPr>
-              <a:t>Sustainability</a:t>
+              <a:t>Operating sustainability</a:t>
             </a:r>
           </a:p>
         </p:txBody>
@@ -32560,7 +32560,7 @@
                 <a:ea typeface="Georgia"/>
                 <a:cs typeface="Georgia"/>
               </a:rPr>
-              <a:t>Exit readiness</a:t>
+              <a:t>Reversibility</a:t>
             </a:r>
           </a:p>
         </p:txBody>
@@ -35043,6 +35043,11 @@
                     <a:lstStyle/>
                     <a:p>
                       <a:r>
+                        <a:rPr>
+                          <a:latin typeface="Arial"/>
+                          <a:ea typeface="Arial"/>
+                          <a:cs typeface="Arial"/>
+                        </a:rPr>
                         <a:t>Dimension</a:t>
                       </a:r>
                     </a:p>
@@ -35055,6 +35060,11 @@
                     <a:lstStyle/>
                     <a:p>
                       <a:r>
+                        <a:rPr>
+                          <a:latin typeface="Arial"/>
+                          <a:ea typeface="Arial"/>
+                          <a:cs typeface="Arial"/>
+                        </a:rPr>
                         <a:t>Kong</a:t>
                       </a:r>
                     </a:p>
@@ -35067,6 +35077,11 @@
                     <a:lstStyle/>
                     <a:p>
                       <a:r>
+                        <a:rPr>
+                          <a:latin typeface="Arial"/>
+                          <a:ea typeface="Arial"/>
+                          <a:cs typeface="Arial"/>
+                        </a:rPr>
                         <a:t>Apigee</a:t>
                       </a:r>
                     </a:p>
@@ -35079,6 +35094,11 @@
                     <a:lstStyle/>
                     <a:p>
                       <a:r>
+                        <a:rPr>
+                          <a:latin typeface="Arial"/>
+                          <a:ea typeface="Arial"/>
+                          <a:cs typeface="Arial"/>
+                        </a:rPr>
                         <a:t>MuleSoft</a:t>
                       </a:r>
                     </a:p>
@@ -35091,6 +35111,11 @@
                     <a:lstStyle/>
                     <a:p>
                       <a:r>
+                        <a:rPr>
+                          <a:latin typeface="Arial"/>
+                          <a:ea typeface="Arial"/>
+                          <a:cs typeface="Arial"/>
+                        </a:rPr>
                         <a:t>Decision use</a:t>
                       </a:r>
                     </a:p>
@@ -35110,6 +35135,11 @@
                     <a:lstStyle/>
                     <a:p>
                       <a:r>
+                        <a:rPr>
+                          <a:latin typeface="Arial"/>
+                          <a:ea typeface="Arial"/>
+                          <a:cs typeface="Arial"/>
+                        </a:rPr>
                         <a:t>Primary focus</a:t>
                       </a:r>
                     </a:p>
@@ -35122,6 +35152,11 @@
                     <a:lstStyle/>
                     <a:p>
                       <a:r>
+                        <a:rPr>
+                          <a:latin typeface="Arial"/>
+                          <a:ea typeface="Arial"/>
+                          <a:cs typeface="Arial"/>
+                        </a:rPr>
                         <a:t>Connectivity platform</a:t>
                       </a:r>
                     </a:p>
@@ -35134,6 +35169,11 @@
                     <a:lstStyle/>
                     <a:p>
                       <a:r>
+                        <a:rPr>
+                          <a:latin typeface="Arial"/>
+                          <a:ea typeface="Arial"/>
+                          <a:cs typeface="Arial"/>
+                        </a:rPr>
                         <a:t>Enterprise API management</a:t>
                       </a:r>
                     </a:p>
@@ -35146,6 +35186,11 @@
                     <a:lstStyle/>
                     <a:p>
                       <a:r>
+                        <a:rPr>
+                          <a:latin typeface="Arial"/>
+                          <a:ea typeface="Arial"/>
+                          <a:cs typeface="Arial"/>
+                        </a:rPr>
                         <a:t>API mgmt in Anypoint</a:t>
                       </a:r>
                     </a:p>
@@ -35158,6 +35203,11 @@
                     <a:lstStyle/>
                     <a:p>
                       <a:r>
+                        <a:rPr>
+                          <a:latin typeface="Arial"/>
+                          <a:ea typeface="Arial"/>
+                          <a:cs typeface="Arial"/>
+                        </a:rPr>
                         <a:t>Operating model</a:t>
                       </a:r>
                     </a:p>
@@ -35177,6 +35227,11 @@
                     <a:lstStyle/>
                     <a:p>
                       <a:r>
+                        <a:rPr>
+                          <a:latin typeface="Arial"/>
+                          <a:ea typeface="Arial"/>
+                          <a:cs typeface="Arial"/>
+                        </a:rPr>
                         <a:t>Control / runtime</a:t>
                       </a:r>
                     </a:p>
@@ -35189,6 +35244,11 @@
                     <a:lstStyle/>
                     <a:p>
                       <a:r>
+                        <a:rPr>
+                          <a:latin typeface="Arial"/>
+                          <a:ea typeface="Arial"/>
+                          <a:cs typeface="Arial"/>
+                        </a:rPr>
                         <a:t>Hybrid CP / DP</a:t>
                       </a:r>
                     </a:p>
@@ -35201,6 +35261,11 @@
                     <a:lstStyle/>
                     <a:p>
                       <a:r>
+                        <a:rPr>
+                          <a:latin typeface="Arial"/>
+                          <a:ea typeface="Arial"/>
+                          <a:cs typeface="Arial"/>
+                        </a:rPr>
                         <a:t>Google mgmt + K8s runtime</a:t>
                       </a:r>
                     </a:p>
@@ -35213,6 +35278,11 @@
                     <a:lstStyle/>
                     <a:p>
                       <a:r>
+                        <a:rPr>
+                          <a:latin typeface="Arial"/>
+                          <a:ea typeface="Arial"/>
+                          <a:cs typeface="Arial"/>
+                        </a:rPr>
                         <a:t>Managed or self-managed gateway</a:t>
                       </a:r>
                     </a:p>
@@ -35225,6 +35295,11 @@
                     <a:lstStyle/>
                     <a:p>
                       <a:r>
+                        <a:rPr>
+                          <a:latin typeface="Arial"/>
+                          <a:ea typeface="Arial"/>
+                          <a:cs typeface="Arial"/>
+                        </a:rPr>
                         <a:t>Custody + duty</a:t>
                       </a:r>
                     </a:p>
@@ -35244,6 +35319,11 @@
                     <a:lstStyle/>
                     <a:p>
                       <a:r>
+                        <a:rPr>
+                          <a:latin typeface="Arial"/>
+                          <a:ea typeface="Arial"/>
+                          <a:cs typeface="Arial"/>
+                        </a:rPr>
                         <a:t>Kubernetes / GitOps</a:t>
                       </a:r>
                     </a:p>
@@ -35256,6 +35336,11 @@
                     <a:lstStyle/>
                     <a:p>
                       <a:r>
+                        <a:rPr>
+                          <a:latin typeface="Arial"/>
+                          <a:ea typeface="Arial"/>
+                          <a:cs typeface="Arial"/>
+                        </a:rPr>
                         <a:t>Supplied: Excellent</a:t>
                       </a:r>
                     </a:p>
@@ -35268,6 +35353,11 @@
                     <a:lstStyle/>
                     <a:p>
                       <a:r>
+                        <a:rPr>
+                          <a:latin typeface="Arial"/>
+                          <a:ea typeface="Arial"/>
+                          <a:cs typeface="Arial"/>
+                        </a:rPr>
                         <a:t>Hybrid runtime / tools</a:t>
                       </a:r>
                     </a:p>
@@ -35280,6 +35370,11 @@
                     <a:lstStyle/>
                     <a:p>
                       <a:r>
+                        <a:rPr>
+                          <a:latin typeface="Arial"/>
+                          <a:ea typeface="Arial"/>
+                          <a:cs typeface="Arial"/>
+                        </a:rPr>
                         <a:t>Supplied: Good / Moderate</a:t>
                       </a:r>
                     </a:p>
@@ -35292,6 +35387,11 @@
                     <a:lstStyle/>
                     <a:p>
                       <a:r>
+                        <a:rPr>
+                          <a:latin typeface="Arial"/>
+                          <a:ea typeface="Arial"/>
+                          <a:cs typeface="Arial"/>
+                        </a:rPr>
                         <a:t>Versioned delivery proof</a:t>
                       </a:r>
                     </a:p>
@@ -35311,6 +35411,11 @@
                     <a:lstStyle/>
                     <a:p>
                       <a:r>
+                        <a:rPr>
+                          <a:latin typeface="Arial"/>
+                          <a:ea typeface="Arial"/>
+                          <a:cs typeface="Arial"/>
+                        </a:rPr>
                         <a:t>Observability</a:t>
                       </a:r>
                     </a:p>
@@ -35323,6 +35428,11 @@
                     <a:lstStyle/>
                     <a:p>
                       <a:r>
+                        <a:rPr>
+                          <a:latin typeface="Arial"/>
+                          <a:ea typeface="Arial"/>
+                          <a:cs typeface="Arial"/>
+                        </a:rPr>
                         <a:t>OTel / Prometheus</a:t>
                       </a:r>
                     </a:p>
@@ -35335,6 +35445,11 @@
                     <a:lstStyle/>
                     <a:p>
                       <a:r>
+                        <a:rPr>
+                          <a:latin typeface="Arial"/>
+                          <a:ea typeface="Arial"/>
+                          <a:cs typeface="Arial"/>
+                        </a:rPr>
                         <a:t>Analytics + monitoring</a:t>
                       </a:r>
                     </a:p>
@@ -35347,6 +35462,11 @@
                     <a:lstStyle/>
                     <a:p>
                       <a:r>
+                        <a:rPr>
+                          <a:latin typeface="Arial"/>
+                          <a:ea typeface="Arial"/>
+                          <a:cs typeface="Arial"/>
+                        </a:rPr>
                         <a:t>Anypoint monitoring</a:t>
                       </a:r>
                     </a:p>
@@ -35359,6 +35479,11 @@
                     <a:lstStyle/>
                     <a:p>
                       <a:r>
+                        <a:rPr>
+                          <a:latin typeface="Arial"/>
+                          <a:ea typeface="Arial"/>
+                          <a:cs typeface="Arial"/>
+                        </a:rPr>
                         <a:t>Export + custody test</a:t>
                       </a:r>
                     </a:p>
@@ -35378,6 +35503,11 @@
                     <a:lstStyle/>
                     <a:p>
                       <a:r>
+                        <a:rPr>
+                          <a:latin typeface="Arial"/>
+                          <a:ea typeface="Arial"/>
+                          <a:cs typeface="Arial"/>
+                        </a:rPr>
                         <a:t>Multicloud</a:t>
                       </a:r>
                     </a:p>
@@ -35390,6 +35520,11 @@
                     <a:lstStyle/>
                     <a:p>
                       <a:r>
+                        <a:rPr>
+                          <a:latin typeface="Arial"/>
+                          <a:ea typeface="Arial"/>
+                          <a:cs typeface="Arial"/>
+                        </a:rPr>
                         <a:t>Supplied: Excellent</a:t>
                       </a:r>
                     </a:p>
@@ -35402,6 +35537,11 @@
                     <a:lstStyle/>
                     <a:p>
                       <a:r>
+                        <a:rPr>
+                          <a:latin typeface="Arial"/>
+                          <a:ea typeface="Arial"/>
+                          <a:cs typeface="Arial"/>
+                        </a:rPr>
                         <a:t>Hybrid runtime</a:t>
                       </a:r>
                     </a:p>
@@ -35414,6 +35554,11 @@
                     <a:lstStyle/>
                     <a:p>
                       <a:r>
+                        <a:rPr>
+                          <a:latin typeface="Arial"/>
+                          <a:ea typeface="Arial"/>
+                          <a:cs typeface="Arial"/>
+                        </a:rPr>
                         <a:t>Supplied: Good</a:t>
                       </a:r>
                     </a:p>
@@ -35426,6 +35571,11 @@
                     <a:lstStyle/>
                     <a:p>
                       <a:r>
+                        <a:rPr>
+                          <a:latin typeface="Arial"/>
+                          <a:ea typeface="Arial"/>
+                          <a:cs typeface="Arial"/>
+                        </a:rPr>
                         <a:t>Placement + sovereignty</a:t>
                       </a:r>
                     </a:p>
@@ -35445,6 +35595,11 @@
                     <a:lstStyle/>
                     <a:p>
                       <a:r>
+                        <a:rPr>
+                          <a:latin typeface="Arial"/>
+                          <a:ea typeface="Arial"/>
+                          <a:cs typeface="Arial"/>
+                        </a:rPr>
                         <a:t>Scalability / robustness</a:t>
                       </a:r>
                     </a:p>
@@ -35457,6 +35612,11 @@
                     <a:lstStyle/>
                     <a:p>
                       <a:r>
+                        <a:rPr>
+                          <a:latin typeface="Arial"/>
+                          <a:ea typeface="Arial"/>
+                          <a:cs typeface="Arial"/>
+                        </a:rPr>
                         <a:t>Not supplied</a:t>
                       </a:r>
                     </a:p>
@@ -35469,6 +35629,11 @@
                     <a:lstStyle/>
                     <a:p>
                       <a:r>
+                        <a:rPr>
+                          <a:latin typeface="Arial"/>
+                          <a:ea typeface="Arial"/>
+                          <a:cs typeface="Arial"/>
+                        </a:rPr>
                         <a:t>Not supplied</a:t>
                       </a:r>
                     </a:p>
@@ -35481,6 +35646,11 @@
                     <a:lstStyle/>
                     <a:p>
                       <a:r>
+                        <a:rPr>
+                          <a:latin typeface="Arial"/>
+                          <a:ea typeface="Arial"/>
+                          <a:cs typeface="Arial"/>
+                        </a:rPr>
                         <a:t>Not supplied</a:t>
                       </a:r>
                     </a:p>
@@ -35493,6 +35663,11 @@
                     <a:lstStyle/>
                     <a:p>
                       <a:r>
+                        <a:rPr>
+                          <a:latin typeface="Arial"/>
+                          <a:ea typeface="Arial"/>
+                          <a:cs typeface="Arial"/>
+                        </a:rPr>
                         <a:t>Load + failure + recovery</a:t>
                       </a:r>
                     </a:p>
@@ -36026,6 +36201,11 @@
                     <a:lstStyle/>
                     <a:p>
                       <a:r>
+                        <a:rPr>
+                          <a:latin typeface="Arial"/>
+                          <a:ea typeface="Arial"/>
+                          <a:cs typeface="Arial"/>
+                        </a:rPr>
                         <a:t>Dimension</a:t>
                       </a:r>
                     </a:p>
@@ -36038,6 +36218,11 @@
                     <a:lstStyle/>
                     <a:p>
                       <a:r>
+                        <a:rPr>
+                          <a:latin typeface="Arial"/>
+                          <a:ea typeface="Arial"/>
+                          <a:cs typeface="Arial"/>
+                        </a:rPr>
                         <a:t>Kong</a:t>
                       </a:r>
                     </a:p>
@@ -36050,6 +36235,11 @@
                     <a:lstStyle/>
                     <a:p>
                       <a:r>
+                        <a:rPr>
+                          <a:latin typeface="Arial"/>
+                          <a:ea typeface="Arial"/>
+                          <a:cs typeface="Arial"/>
+                        </a:rPr>
                         <a:t>Apigee</a:t>
                       </a:r>
                     </a:p>
@@ -36062,6 +36252,11 @@
                     <a:lstStyle/>
                     <a:p>
                       <a:r>
+                        <a:rPr>
+                          <a:latin typeface="Arial"/>
+                          <a:ea typeface="Arial"/>
+                          <a:cs typeface="Arial"/>
+                        </a:rPr>
                         <a:t>MuleSoft</a:t>
                       </a:r>
                     </a:p>
@@ -36074,6 +36269,11 @@
                     <a:lstStyle/>
                     <a:p>
                       <a:r>
+                        <a:rPr>
+                          <a:latin typeface="Arial"/>
+                          <a:ea typeface="Arial"/>
+                          <a:cs typeface="Arial"/>
+                        </a:rPr>
                         <a:t>Evidence required</a:t>
                       </a:r>
                     </a:p>
@@ -36093,6 +36293,11 @@
                     <a:lstStyle/>
                     <a:p>
                       <a:r>
+                        <a:rPr>
+                          <a:latin typeface="Arial"/>
+                          <a:ea typeface="Arial"/>
+                          <a:cs typeface="Arial"/>
+                        </a:rPr>
                         <a:t>Lifecycle / governance</a:t>
                       </a:r>
                     </a:p>
@@ -36105,6 +36310,11 @@
                     <a:lstStyle/>
                     <a:p>
                       <a:r>
+                        <a:rPr>
+                          <a:latin typeface="Arial"/>
+                          <a:ea typeface="Arial"/>
+                          <a:cs typeface="Arial"/>
+                        </a:rPr>
                         <a:t>Supplied: Good</a:t>
                       </a:r>
                     </a:p>
@@ -36117,6 +36327,11 @@
                     <a:lstStyle/>
                     <a:p>
                       <a:r>
+                        <a:rPr>
+                          <a:latin typeface="Arial"/>
+                          <a:ea typeface="Arial"/>
+                          <a:cs typeface="Arial"/>
+                        </a:rPr>
                         <a:t>Supplied: Excellent</a:t>
                       </a:r>
                     </a:p>
@@ -36129,6 +36344,11 @@
                     <a:lstStyle/>
                     <a:p>
                       <a:r>
+                        <a:rPr>
+                          <a:latin typeface="Arial"/>
+                          <a:ea typeface="Arial"/>
+                          <a:cs typeface="Arial"/>
+                        </a:rPr>
                         <a:t>Supplied: Excellent</a:t>
                       </a:r>
                     </a:p>
@@ -36141,6 +36361,11 @@
                     <a:lstStyle/>
                     <a:p>
                       <a:r>
+                        <a:rPr>
+                          <a:latin typeface="Arial"/>
+                          <a:ea typeface="Arial"/>
+                          <a:cs typeface="Arial"/>
+                        </a:rPr>
                         <a:t>Required product use cases</a:t>
                       </a:r>
                     </a:p>
@@ -36160,6 +36385,11 @@
                     <a:lstStyle/>
                     <a:p>
                       <a:r>
+                        <a:rPr>
+                          <a:latin typeface="Arial"/>
+                          <a:ea typeface="Arial"/>
+                          <a:cs typeface="Arial"/>
+                        </a:rPr>
                         <a:t>Portal / product</a:t>
                       </a:r>
                     </a:p>
@@ -36172,6 +36402,11 @@
                     <a:lstStyle/>
                     <a:p>
                       <a:r>
+                        <a:rPr>
+                          <a:latin typeface="Arial"/>
+                          <a:ea typeface="Arial"/>
+                          <a:cs typeface="Arial"/>
+                        </a:rPr>
                         <a:t>Supplied: Good</a:t>
                       </a:r>
                     </a:p>
@@ -36184,6 +36419,11 @@
                     <a:lstStyle/>
                     <a:p>
                       <a:r>
+                        <a:rPr>
+                          <a:latin typeface="Arial"/>
+                          <a:ea typeface="Arial"/>
+                          <a:cs typeface="Arial"/>
+                        </a:rPr>
                         <a:t>Supplied: Excellent</a:t>
                       </a:r>
                     </a:p>
@@ -36196,6 +36436,11 @@
                     <a:lstStyle/>
                     <a:p>
                       <a:r>
+                        <a:rPr>
+                          <a:latin typeface="Arial"/>
+                          <a:ea typeface="Arial"/>
+                          <a:cs typeface="Arial"/>
+                        </a:rPr>
                         <a:t>Supplied: Excellent</a:t>
                       </a:r>
                     </a:p>
@@ -36208,6 +36453,11 @@
                     <a:lstStyle/>
                     <a:p>
                       <a:r>
+                        <a:rPr>
+                          <a:latin typeface="Arial"/>
+                          <a:ea typeface="Arial"/>
+                          <a:cs typeface="Arial"/>
+                        </a:rPr>
                         <a:t>Adjacent tooling map</a:t>
                       </a:r>
                     </a:p>
@@ -36227,6 +36477,11 @@
                     <a:lstStyle/>
                     <a:p>
                       <a:r>
+                        <a:rPr>
+                          <a:latin typeface="Arial"/>
+                          <a:ea typeface="Arial"/>
+                          <a:cs typeface="Arial"/>
+                        </a:rPr>
                         <a:t>Developer experience</a:t>
                       </a:r>
                     </a:p>
@@ -36239,6 +36494,11 @@
                     <a:lstStyle/>
                     <a:p>
                       <a:r>
+                        <a:rPr>
+                          <a:latin typeface="Arial"/>
+                          <a:ea typeface="Arial"/>
+                          <a:cs typeface="Arial"/>
+                        </a:rPr>
                         <a:t>Supplied: Good</a:t>
                       </a:r>
                     </a:p>
@@ -36251,6 +36511,11 @@
                     <a:lstStyle/>
                     <a:p>
                       <a:r>
+                        <a:rPr>
+                          <a:latin typeface="Arial"/>
+                          <a:ea typeface="Arial"/>
+                          <a:cs typeface="Arial"/>
+                        </a:rPr>
                         <a:t>Supplied: Very Strong</a:t>
                       </a:r>
                     </a:p>
@@ -36263,6 +36528,11 @@
                     <a:lstStyle/>
                     <a:p>
                       <a:r>
+                        <a:rPr>
+                          <a:latin typeface="Arial"/>
+                          <a:ea typeface="Arial"/>
+                          <a:cs typeface="Arial"/>
+                        </a:rPr>
                         <a:t>Supplied: Very Strong</a:t>
                       </a:r>
                     </a:p>
@@ -36275,6 +36545,11 @@
                     <a:lstStyle/>
                     <a:p>
                       <a:r>
+                        <a:rPr>
+                          <a:latin typeface="Arial"/>
+                          <a:ea typeface="Arial"/>
+                          <a:cs typeface="Arial"/>
+                        </a:rPr>
                         <a:t>Paved-road usability</a:t>
                       </a:r>
                     </a:p>
@@ -36294,6 +36569,11 @@
                     <a:lstStyle/>
                     <a:p>
                       <a:r>
+                        <a:rPr>
+                          <a:latin typeface="Arial"/>
+                          <a:ea typeface="Arial"/>
+                          <a:cs typeface="Arial"/>
+                        </a:rPr>
                         <a:t>AI traffic</a:t>
                       </a:r>
                     </a:p>
@@ -36306,6 +36586,11 @@
                     <a:lstStyle/>
                     <a:p>
                       <a:r>
+                        <a:rPr>
+                          <a:latin typeface="Arial"/>
+                          <a:ea typeface="Arial"/>
+                          <a:cs typeface="Arial"/>
+                        </a:rPr>
                         <a:t>AI Gateway incl. MCP/A2A</a:t>
                       </a:r>
                     </a:p>
@@ -36318,6 +36603,11 @@
                     <a:lstStyle/>
                     <a:p>
                       <a:r>
+                        <a:rPr>
+                          <a:latin typeface="Arial"/>
+                          <a:ea typeface="Arial"/>
+                          <a:cs typeface="Arial"/>
+                        </a:rPr>
                         <a:t>AI policy / GenAI features</a:t>
                       </a:r>
                     </a:p>
@@ -36330,6 +36620,11 @@
                     <a:lstStyle/>
                     <a:p>
                       <a:r>
+                        <a:rPr>
+                          <a:latin typeface="Arial"/>
+                          <a:ea typeface="Arial"/>
+                          <a:cs typeface="Arial"/>
+                        </a:rPr>
                         <a:t>MCP/A2A gateway traffic</a:t>
                       </a:r>
                     </a:p>
@@ -36342,6 +36637,11 @@
                     <a:lstStyle/>
                     <a:p>
                       <a:r>
+                        <a:rPr>
+                          <a:latin typeface="Arial"/>
+                          <a:ea typeface="Arial"/>
+                          <a:cs typeface="Arial"/>
+                        </a:rPr>
                         <a:t>Versioned use case</a:t>
                       </a:r>
                     </a:p>
@@ -36361,6 +36661,11 @@
                     <a:lstStyle/>
                     <a:p>
                       <a:r>
+                        <a:rPr>
+                          <a:latin typeface="Arial"/>
+                          <a:ea typeface="Arial"/>
+                          <a:cs typeface="Arial"/>
+                        </a:rPr>
                         <a:t>Customization</a:t>
                       </a:r>
                     </a:p>
@@ -36373,6 +36678,11 @@
                     <a:lstStyle/>
                     <a:p>
                       <a:r>
+                        <a:rPr>
+                          <a:latin typeface="Arial"/>
+                          <a:ea typeface="Arial"/>
+                          <a:cs typeface="Arial"/>
+                        </a:rPr>
                         <a:t>Plugin framework</a:t>
                       </a:r>
                     </a:p>
@@ -36385,6 +36695,11 @@
                     <a:lstStyle/>
                     <a:p>
                       <a:r>
+                        <a:rPr>
+                          <a:latin typeface="Arial"/>
+                          <a:ea typeface="Arial"/>
+                          <a:cs typeface="Arial"/>
+                        </a:rPr>
                         <a:t>Policy framework</a:t>
                       </a:r>
                     </a:p>
@@ -36397,6 +36712,11 @@
                     <a:lstStyle/>
                     <a:p>
                       <a:r>
+                        <a:rPr>
+                          <a:latin typeface="Arial"/>
+                          <a:ea typeface="Arial"/>
+                          <a:cs typeface="Arial"/>
+                        </a:rPr>
                         <a:t>Supplied: Moderate</a:t>
                       </a:r>
                     </a:p>
@@ -36409,6 +36729,11 @@
                     <a:lstStyle/>
                     <a:p>
                       <a:r>
+                        <a:rPr>
+                          <a:latin typeface="Arial"/>
+                          <a:ea typeface="Arial"/>
+                          <a:cs typeface="Arial"/>
+                        </a:rPr>
                         <a:t>Support + upgrade path</a:t>
                       </a:r>
                     </a:p>
@@ -36428,6 +36753,11 @@
                     <a:lstStyle/>
                     <a:p>
                       <a:r>
+                        <a:rPr>
+                          <a:latin typeface="Arial"/>
+                          <a:ea typeface="Arial"/>
+                          <a:cs typeface="Arial"/>
+                        </a:rPr>
                         <a:t>Traceable adjunct</a:t>
                       </a:r>
                     </a:p>
@@ -36440,6 +36770,11 @@
                     <a:lstStyle/>
                     <a:p>
                       <a:r>
+                        <a:rPr>
+                          <a:latin typeface="Arial"/>
+                          <a:ea typeface="Arial"/>
+                          <a:cs typeface="Arial"/>
+                        </a:rPr>
                         <a:t>Plugin → Platform Agent</a:t>
                       </a:r>
                     </a:p>
@@ -36452,6 +36787,11 @@
                     <a:lstStyle/>
                     <a:p>
                       <a:r>
+                        <a:rPr>
+                          <a:latin typeface="Arial"/>
+                          <a:ea typeface="Arial"/>
+                          <a:cs typeface="Arial"/>
+                        </a:rPr>
                         <a:t>Not assessed</a:t>
                       </a:r>
                     </a:p>
@@ -36464,6 +36804,11 @@
                     <a:lstStyle/>
                     <a:p>
                       <a:r>
+                        <a:rPr>
+                          <a:latin typeface="Arial"/>
+                          <a:ea typeface="Arial"/>
+                          <a:cs typeface="Arial"/>
+                        </a:rPr>
                         <a:t>Custom-policy baseline</a:t>
                       </a:r>
                     </a:p>
@@ -36476,6 +36821,11 @@
                     <a:lstStyle/>
                     <a:p>
                       <a:r>
+                        <a:rPr>
+                          <a:latin typeface="Arial"/>
+                          <a:ea typeface="Arial"/>
+                          <a:cs typeface="Arial"/>
+                        </a:rPr>
                         <a:t>Run GEP-07; do not score</a:t>
                       </a:r>
                     </a:p>
@@ -37013,6 +37363,9 @@
                           <a:solidFill>
                             <a:srgbClr val="111111"/>
                           </a:solidFill>
+                          <a:latin typeface="Arial"/>
+                          <a:ea typeface="Arial"/>
+                          <a:cs typeface="Arial"/>
                         </a:rPr>
                         <a:t>Dimension</a:t>
                       </a:r>
@@ -37030,6 +37383,9 @@
                           <a:solidFill>
                             <a:srgbClr val="111111"/>
                           </a:solidFill>
+                          <a:latin typeface="Arial"/>
+                          <a:ea typeface="Arial"/>
+                          <a:cs typeface="Arial"/>
                         </a:rPr>
                         <a:t>Kong</a:t>
                       </a:r>
@@ -37047,6 +37403,9 @@
                           <a:solidFill>
                             <a:srgbClr val="111111"/>
                           </a:solidFill>
+                          <a:latin typeface="Arial"/>
+                          <a:ea typeface="Arial"/>
+                          <a:cs typeface="Arial"/>
                         </a:rPr>
                         <a:t>Apigee</a:t>
                       </a:r>
@@ -37064,6 +37423,9 @@
                           <a:solidFill>
                             <a:srgbClr val="111111"/>
                           </a:solidFill>
+                          <a:latin typeface="Arial"/>
+                          <a:ea typeface="Arial"/>
+                          <a:cs typeface="Arial"/>
                         </a:rPr>
                         <a:t>MuleSoft</a:t>
                       </a:r>
@@ -37081,6 +37443,9 @@
                           <a:solidFill>
                             <a:srgbClr val="111111"/>
                           </a:solidFill>
+                          <a:latin typeface="Arial"/>
+                          <a:ea typeface="Arial"/>
+                          <a:cs typeface="Arial"/>
                         </a:rPr>
                         <a:t>Evidence required</a:t>
                       </a:r>
@@ -37101,6 +37466,11 @@
                     <a:lstStyle/>
                     <a:p>
                       <a:r>
+                        <a:rPr>
+                          <a:latin typeface="Arial"/>
+                          <a:ea typeface="Arial"/>
+                          <a:cs typeface="Arial"/>
+                        </a:rPr>
                         <a:t>Reversibility / lock-in</a:t>
                       </a:r>
                     </a:p>
@@ -37113,6 +37483,11 @@
                     <a:lstStyle/>
                     <a:p>
                       <a:r>
+                        <a:rPr>
+                          <a:latin typeface="Arial"/>
+                          <a:ea typeface="Arial"/>
+                          <a:cs typeface="Arial"/>
+                        </a:rPr>
                         <a:t>Supplied: Low</a:t>
                       </a:r>
                     </a:p>
@@ -37125,6 +37500,11 @@
                     <a:lstStyle/>
                     <a:p>
                       <a:r>
+                        <a:rPr>
+                          <a:latin typeface="Arial"/>
+                          <a:ea typeface="Arial"/>
+                          <a:cs typeface="Arial"/>
+                        </a:rPr>
                         <a:t>Supplied: Medium</a:t>
                       </a:r>
                     </a:p>
@@ -37137,6 +37517,11 @@
                     <a:lstStyle/>
                     <a:p>
                       <a:r>
+                        <a:rPr>
+                          <a:latin typeface="Arial"/>
+                          <a:ea typeface="Arial"/>
+                          <a:cs typeface="Arial"/>
+                        </a:rPr>
                         <a:t>Supplied: High</a:t>
                       </a:r>
                     </a:p>
@@ -37149,6 +37534,11 @@
                     <a:lstStyle/>
                     <a:p>
                       <a:r>
+                        <a:rPr>
+                          <a:latin typeface="Arial"/>
+                          <a:ea typeface="Arial"/>
+                          <a:cs typeface="Arial"/>
+                        </a:rPr>
                         <a:t>Timed rebuild + route-back</a:t>
                       </a:r>
                     </a:p>
@@ -37168,6 +37558,11 @@
                     <a:lstStyle/>
                     <a:p>
                       <a:r>
+                        <a:rPr>
+                          <a:latin typeface="Arial"/>
+                          <a:ea typeface="Arial"/>
+                          <a:cs typeface="Arial"/>
+                        </a:rPr>
                         <a:t>Full TCO / pricing</a:t>
                       </a:r>
                     </a:p>
@@ -37180,6 +37575,11 @@
                     <a:lstStyle/>
                     <a:p>
                       <a:r>
+                        <a:rPr>
+                          <a:latin typeface="Arial"/>
+                          <a:ea typeface="Arial"/>
+                          <a:cs typeface="Arial"/>
+                        </a:rPr>
                         <a:t>Custom quote</a:t>
                       </a:r>
                     </a:p>
@@ -37192,6 +37592,11 @@
                     <a:lstStyle/>
                     <a:p>
                       <a:r>
+                        <a:rPr>
+                          <a:latin typeface="Arial"/>
+                          <a:ea typeface="Arial"/>
+                          <a:cs typeface="Arial"/>
+                        </a:rPr>
                         <a:t>Managed PAYG ≠ Hybrid</a:t>
                       </a:r>
                     </a:p>
@@ -37204,6 +37609,11 @@
                     <a:lstStyle/>
                     <a:p>
                       <a:r>
+                        <a:rPr>
+                          <a:latin typeface="Arial"/>
+                          <a:ea typeface="Arial"/>
+                          <a:cs typeface="Arial"/>
+                        </a:rPr>
                         <a:t>Contact sales</a:t>
                       </a:r>
                     </a:p>
@@ -37216,6 +37626,11 @@
                     <a:lstStyle/>
                     <a:p>
                       <a:r>
+                        <a:rPr>
+                          <a:latin typeface="Arial"/>
+                          <a:ea typeface="Arial"/>
+                          <a:cs typeface="Arial"/>
+                        </a:rPr>
                         <a:t>Quote + labor + infra + HA/DR + adjunct + exit</a:t>
                       </a:r>
                     </a:p>
@@ -37235,6 +37650,11 @@
                     <a:lstStyle/>
                     <a:p>
                       <a:r>
+                        <a:rPr>
+                          <a:latin typeface="Arial"/>
+                          <a:ea typeface="Arial"/>
+                          <a:cs typeface="Arial"/>
+                        </a:rPr>
                         <a:t>Control-plane duty</a:t>
                       </a:r>
                     </a:p>
@@ -37247,6 +37667,11 @@
                     <a:lstStyle/>
                     <a:p>
                       <a:r>
+                        <a:rPr>
+                          <a:latin typeface="Arial"/>
+                          <a:ea typeface="Arial"/>
+                          <a:cs typeface="Arial"/>
+                        </a:rPr>
                         <a:t>Enterprise CP + Postgres</a:t>
                       </a:r>
                     </a:p>
@@ -37259,6 +37684,11 @@
                     <a:lstStyle/>
                     <a:p>
                       <a:r>
+                        <a:rPr>
+                          <a:latin typeface="Arial"/>
+                          <a:ea typeface="Arial"/>
+                          <a:cs typeface="Arial"/>
+                        </a:rPr>
                         <a:t>Google mgmt + own runtime</a:t>
                       </a:r>
                     </a:p>
@@ -37271,6 +37701,11 @@
                     <a:lstStyle/>
                     <a:p>
                       <a:r>
+                        <a:rPr>
+                          <a:latin typeface="Arial"/>
+                          <a:ea typeface="Arial"/>
+                          <a:cs typeface="Arial"/>
+                        </a:rPr>
                         <a:t>Boundary-dependent</a:t>
                       </a:r>
                     </a:p>
@@ -37283,6 +37718,11 @@
                     <a:lstStyle/>
                     <a:p>
                       <a:r>
+                        <a:rPr>
+                          <a:latin typeface="Arial"/>
+                          <a:ea typeface="Arial"/>
+                          <a:cs typeface="Arial"/>
+                        </a:rPr>
                         <a:t>Funded RACI + support + recovery + on-call</a:t>
                       </a:r>
                     </a:p>
@@ -37913,6 +38353,11 @@
                     <a:lstStyle/>
                     <a:p>
                       <a:r>
+                        <a:rPr>
+                          <a:latin typeface="Arial"/>
+                          <a:ea typeface="Arial"/>
+                          <a:cs typeface="Arial"/>
+                        </a:rPr>
                         <a:t>Category</a:t>
                       </a:r>
                     </a:p>
@@ -37925,6 +38370,11 @@
                     <a:lstStyle/>
                     <a:p>
                       <a:r>
+                        <a:rPr>
+                          <a:latin typeface="Arial"/>
+                          <a:ea typeface="Arial"/>
+                          <a:cs typeface="Arial"/>
+                        </a:rPr>
                         <a:t>Weight</a:t>
                       </a:r>
                     </a:p>
@@ -37937,6 +38387,11 @@
                     <a:lstStyle/>
                     <a:p>
                       <a:r>
+                        <a:rPr>
+                          <a:latin typeface="Arial"/>
+                          <a:ea typeface="Arial"/>
+                          <a:cs typeface="Arial"/>
+                        </a:rPr>
                         <a:t>Kong</a:t>
                       </a:r>
                     </a:p>
@@ -37949,6 +38404,11 @@
                     <a:lstStyle/>
                     <a:p>
                       <a:r>
+                        <a:rPr>
+                          <a:latin typeface="Arial"/>
+                          <a:ea typeface="Arial"/>
+                          <a:cs typeface="Arial"/>
+                        </a:rPr>
                         <a:t>Apigee</a:t>
                       </a:r>
                     </a:p>
@@ -37961,6 +38421,11 @@
                     <a:lstStyle/>
                     <a:p>
                       <a:r>
+                        <a:rPr>
+                          <a:latin typeface="Arial"/>
+                          <a:ea typeface="Arial"/>
+                          <a:cs typeface="Arial"/>
+                        </a:rPr>
                         <a:t>MuleSoft</a:t>
                       </a:r>
                     </a:p>
@@ -37980,6 +38445,11 @@
                     <a:lstStyle/>
                     <a:p>
                       <a:r>
+                        <a:rPr>
+                          <a:latin typeface="Arial"/>
+                          <a:ea typeface="Arial"/>
+                          <a:cs typeface="Arial"/>
+                        </a:rPr>
                         <a:t>Kubernetes &amp; cloud native</a:t>
                       </a:r>
                     </a:p>
@@ -37992,6 +38462,11 @@
                     <a:lstStyle/>
                     <a:p>
                       <a:r>
+                        <a:rPr>
+                          <a:latin typeface="Arial"/>
+                          <a:ea typeface="Arial"/>
+                          <a:cs typeface="Arial"/>
+                        </a:rPr>
                         <a:t>20%</a:t>
                       </a:r>
                     </a:p>
@@ -38004,6 +38479,11 @@
                     <a:lstStyle/>
                     <a:p>
                       <a:r>
+                        <a:rPr>
+                          <a:latin typeface="Arial"/>
+                          <a:ea typeface="Arial"/>
+                          <a:cs typeface="Arial"/>
+                        </a:rPr>
                         <a:t>10</a:t>
                       </a:r>
                     </a:p>
@@ -38016,6 +38496,11 @@
                     <a:lstStyle/>
                     <a:p>
                       <a:r>
+                        <a:rPr>
+                          <a:latin typeface="Arial"/>
+                          <a:ea typeface="Arial"/>
+                          <a:cs typeface="Arial"/>
+                        </a:rPr>
                         <a:t>8</a:t>
                       </a:r>
                     </a:p>
@@ -38028,6 +38513,11 @@
                     <a:lstStyle/>
                     <a:p>
                       <a:r>
+                        <a:rPr>
+                          <a:latin typeface="Arial"/>
+                          <a:ea typeface="Arial"/>
+                          <a:cs typeface="Arial"/>
+                        </a:rPr>
                         <a:t>7</a:t>
                       </a:r>
                     </a:p>
@@ -38047,6 +38537,11 @@
                     <a:lstStyle/>
                     <a:p>
                       <a:r>
+                        <a:rPr>
+                          <a:latin typeface="Arial"/>
+                          <a:ea typeface="Arial"/>
+                          <a:cs typeface="Arial"/>
+                        </a:rPr>
                         <a:t>GitOps &amp; DevOps</a:t>
                       </a:r>
                     </a:p>
@@ -38059,6 +38554,11 @@
                     <a:lstStyle/>
                     <a:p>
                       <a:r>
+                        <a:rPr>
+                          <a:latin typeface="Arial"/>
+                          <a:ea typeface="Arial"/>
+                          <a:cs typeface="Arial"/>
+                        </a:rPr>
                         <a:t>15%</a:t>
                       </a:r>
                     </a:p>
@@ -38071,6 +38571,11 @@
                     <a:lstStyle/>
                     <a:p>
                       <a:r>
+                        <a:rPr>
+                          <a:latin typeface="Arial"/>
+                          <a:ea typeface="Arial"/>
+                          <a:cs typeface="Arial"/>
+                        </a:rPr>
                         <a:t>10</a:t>
                       </a:r>
                     </a:p>
@@ -38083,6 +38588,11 @@
                     <a:lstStyle/>
                     <a:p>
                       <a:r>
+                        <a:rPr>
+                          <a:latin typeface="Arial"/>
+                          <a:ea typeface="Arial"/>
+                          <a:cs typeface="Arial"/>
+                        </a:rPr>
                         <a:t>7</a:t>
                       </a:r>
                     </a:p>
@@ -38095,6 +38605,11 @@
                     <a:lstStyle/>
                     <a:p>
                       <a:r>
+                        <a:rPr>
+                          <a:latin typeface="Arial"/>
+                          <a:ea typeface="Arial"/>
+                          <a:cs typeface="Arial"/>
+                        </a:rPr>
                         <a:t>6</a:t>
                       </a:r>
                     </a:p>
@@ -38114,6 +38629,11 @@
                     <a:lstStyle/>
                     <a:p>
                       <a:r>
+                        <a:rPr>
+                          <a:latin typeface="Arial"/>
+                          <a:ea typeface="Arial"/>
+                          <a:cs typeface="Arial"/>
+                        </a:rPr>
                         <a:t>API management</a:t>
                       </a:r>
                     </a:p>
@@ -38126,6 +38646,11 @@
                     <a:lstStyle/>
                     <a:p>
                       <a:r>
+                        <a:rPr>
+                          <a:latin typeface="Arial"/>
+                          <a:ea typeface="Arial"/>
+                          <a:cs typeface="Arial"/>
+                        </a:rPr>
                         <a:t>15%</a:t>
                       </a:r>
                     </a:p>
@@ -38138,6 +38663,11 @@
                     <a:lstStyle/>
                     <a:p>
                       <a:r>
+                        <a:rPr>
+                          <a:latin typeface="Arial"/>
+                          <a:ea typeface="Arial"/>
+                          <a:cs typeface="Arial"/>
+                        </a:rPr>
                         <a:t>8</a:t>
                       </a:r>
                     </a:p>
@@ -38150,6 +38680,11 @@
                     <a:lstStyle/>
                     <a:p>
                       <a:r>
+                        <a:rPr>
+                          <a:latin typeface="Arial"/>
+                          <a:ea typeface="Arial"/>
+                          <a:cs typeface="Arial"/>
+                        </a:rPr>
                         <a:t>10</a:t>
                       </a:r>
                     </a:p>
@@ -38162,6 +38697,11 @@
                     <a:lstStyle/>
                     <a:p>
                       <a:r>
+                        <a:rPr>
+                          <a:latin typeface="Arial"/>
+                          <a:ea typeface="Arial"/>
+                          <a:cs typeface="Arial"/>
+                        </a:rPr>
                         <a:t>10</a:t>
                       </a:r>
                     </a:p>
@@ -38181,6 +38721,11 @@
                     <a:lstStyle/>
                     <a:p>
                       <a:r>
+                        <a:rPr>
+                          <a:latin typeface="Arial"/>
+                          <a:ea typeface="Arial"/>
+                          <a:cs typeface="Arial"/>
+                        </a:rPr>
                         <a:t>API governance</a:t>
                       </a:r>
                     </a:p>
@@ -38193,6 +38738,11 @@
                     <a:lstStyle/>
                     <a:p>
                       <a:r>
+                        <a:rPr>
+                          <a:latin typeface="Arial"/>
+                          <a:ea typeface="Arial"/>
+                          <a:cs typeface="Arial"/>
+                        </a:rPr>
                         <a:t>10%</a:t>
                       </a:r>
                     </a:p>
@@ -38205,6 +38755,11 @@
                     <a:lstStyle/>
                     <a:p>
                       <a:r>
+                        <a:rPr>
+                          <a:latin typeface="Arial"/>
+                          <a:ea typeface="Arial"/>
+                          <a:cs typeface="Arial"/>
+                        </a:rPr>
                         <a:t>8</a:t>
                       </a:r>
                     </a:p>
@@ -38217,6 +38772,11 @@
                     <a:lstStyle/>
                     <a:p>
                       <a:r>
+                        <a:rPr>
+                          <a:latin typeface="Arial"/>
+                          <a:ea typeface="Arial"/>
+                          <a:cs typeface="Arial"/>
+                        </a:rPr>
                         <a:t>10</a:t>
                       </a:r>
                     </a:p>
@@ -38229,6 +38789,11 @@
                     <a:lstStyle/>
                     <a:p>
                       <a:r>
+                        <a:rPr>
+                          <a:latin typeface="Arial"/>
+                          <a:ea typeface="Arial"/>
+                          <a:cs typeface="Arial"/>
+                        </a:rPr>
                         <a:t>10</a:t>
                       </a:r>
                     </a:p>
@@ -38248,6 +38813,11 @@
                     <a:lstStyle/>
                     <a:p>
                       <a:r>
+                        <a:rPr>
+                          <a:latin typeface="Arial"/>
+                          <a:ea typeface="Arial"/>
+                          <a:cs typeface="Arial"/>
+                        </a:rPr>
                         <a:t>Security &amp; compliance</a:t>
                       </a:r>
                     </a:p>
@@ -38260,6 +38830,11 @@
                     <a:lstStyle/>
                     <a:p>
                       <a:r>
+                        <a:rPr>
+                          <a:latin typeface="Arial"/>
+                          <a:ea typeface="Arial"/>
+                          <a:cs typeface="Arial"/>
+                        </a:rPr>
                         <a:t>10%</a:t>
                       </a:r>
                     </a:p>
@@ -38272,6 +38847,11 @@
                     <a:lstStyle/>
                     <a:p>
                       <a:r>
+                        <a:rPr>
+                          <a:latin typeface="Arial"/>
+                          <a:ea typeface="Arial"/>
+                          <a:cs typeface="Arial"/>
+                        </a:rPr>
                         <a:t>9</a:t>
                       </a:r>
                     </a:p>
@@ -38284,6 +38864,11 @@
                     <a:lstStyle/>
                     <a:p>
                       <a:r>
+                        <a:rPr>
+                          <a:latin typeface="Arial"/>
+                          <a:ea typeface="Arial"/>
+                          <a:cs typeface="Arial"/>
+                        </a:rPr>
                         <a:t>10</a:t>
                       </a:r>
                     </a:p>
@@ -38296,6 +38881,11 @@
                     <a:lstStyle/>
                     <a:p>
                       <a:r>
+                        <a:rPr>
+                          <a:latin typeface="Arial"/>
+                          <a:ea typeface="Arial"/>
+                          <a:cs typeface="Arial"/>
+                        </a:rPr>
                         <a:t>9</a:t>
                       </a:r>
                     </a:p>
@@ -38315,6 +38905,11 @@
                     <a:lstStyle/>
                     <a:p>
                       <a:r>
+                        <a:rPr>
+                          <a:latin typeface="Arial"/>
+                          <a:ea typeface="Arial"/>
+                          <a:cs typeface="Arial"/>
+                        </a:rPr>
                         <a:t>Observability</a:t>
                       </a:r>
                     </a:p>
@@ -38327,6 +38922,11 @@
                     <a:lstStyle/>
                     <a:p>
                       <a:r>
+                        <a:rPr>
+                          <a:latin typeface="Arial"/>
+                          <a:ea typeface="Arial"/>
+                          <a:cs typeface="Arial"/>
+                        </a:rPr>
                         <a:t>10%</a:t>
                       </a:r>
                     </a:p>
@@ -38339,6 +38939,11 @@
                     <a:lstStyle/>
                     <a:p>
                       <a:r>
+                        <a:rPr>
+                          <a:latin typeface="Arial"/>
+                          <a:ea typeface="Arial"/>
+                          <a:cs typeface="Arial"/>
+                        </a:rPr>
                         <a:t>9</a:t>
                       </a:r>
                     </a:p>
@@ -38351,6 +38956,11 @@
                     <a:lstStyle/>
                     <a:p>
                       <a:r>
+                        <a:rPr>
+                          <a:latin typeface="Arial"/>
+                          <a:ea typeface="Arial"/>
+                          <a:cs typeface="Arial"/>
+                        </a:rPr>
                         <a:t>9</a:t>
                       </a:r>
                     </a:p>
@@ -38363,6 +38973,11 @@
                     <a:lstStyle/>
                     <a:p>
                       <a:r>
+                        <a:rPr>
+                          <a:latin typeface="Arial"/>
+                          <a:ea typeface="Arial"/>
+                          <a:cs typeface="Arial"/>
+                        </a:rPr>
                         <a:t>8</a:t>
                       </a:r>
                     </a:p>
@@ -38382,6 +38997,11 @@
                     <a:lstStyle/>
                     <a:p>
                       <a:r>
+                        <a:rPr>
+                          <a:latin typeface="Arial"/>
+                          <a:ea typeface="Arial"/>
+                          <a:cs typeface="Arial"/>
+                        </a:rPr>
                         <a:t>AI gateway readiness</a:t>
                       </a:r>
                     </a:p>
@@ -38394,6 +39014,11 @@
                     <a:lstStyle/>
                     <a:p>
                       <a:r>
+                        <a:rPr>
+                          <a:latin typeface="Arial"/>
+                          <a:ea typeface="Arial"/>
+                          <a:cs typeface="Arial"/>
+                        </a:rPr>
                         <a:t>10%</a:t>
                       </a:r>
                     </a:p>
@@ -38406,6 +39031,11 @@
                     <a:lstStyle/>
                     <a:p>
                       <a:r>
+                        <a:rPr>
+                          <a:latin typeface="Arial"/>
+                          <a:ea typeface="Arial"/>
+                          <a:cs typeface="Arial"/>
+                        </a:rPr>
                         <a:t>10</a:t>
                       </a:r>
                     </a:p>
@@ -38418,6 +39048,11 @@
                     <a:lstStyle/>
                     <a:p>
                       <a:r>
+                        <a:rPr>
+                          <a:latin typeface="Arial"/>
+                          <a:ea typeface="Arial"/>
+                          <a:cs typeface="Arial"/>
+                        </a:rPr>
                         <a:t>8</a:t>
                       </a:r>
                     </a:p>
@@ -38430,6 +39065,11 @@
                     <a:lstStyle/>
                     <a:p>
                       <a:r>
+                        <a:rPr>
+                          <a:latin typeface="Arial"/>
+                          <a:ea typeface="Arial"/>
+                          <a:cs typeface="Arial"/>
+                        </a:rPr>
                         <a:t>7</a:t>
                       </a:r>
                     </a:p>
@@ -38449,6 +39089,11 @@
                     <a:lstStyle/>
                     <a:p>
                       <a:r>
+                        <a:rPr>
+                          <a:latin typeface="Arial"/>
+                          <a:ea typeface="Arial"/>
+                          <a:cs typeface="Arial"/>
+                        </a:rPr>
                         <a:t>Cost efficiency</a:t>
                       </a:r>
                     </a:p>
@@ -38461,6 +39106,11 @@
                     <a:lstStyle/>
                     <a:p>
                       <a:r>
+                        <a:rPr>
+                          <a:latin typeface="Arial"/>
+                          <a:ea typeface="Arial"/>
+                          <a:cs typeface="Arial"/>
+                        </a:rPr>
                         <a:t>10%</a:t>
                       </a:r>
                     </a:p>
@@ -38473,6 +39123,11 @@
                     <a:lstStyle/>
                     <a:p>
                       <a:r>
+                        <a:rPr>
+                          <a:latin typeface="Arial"/>
+                          <a:ea typeface="Arial"/>
+                          <a:cs typeface="Arial"/>
+                        </a:rPr>
                         <a:t>10</a:t>
                       </a:r>
                     </a:p>
@@ -38485,6 +39140,11 @@
                     <a:lstStyle/>
                     <a:p>
                       <a:r>
+                        <a:rPr>
+                          <a:latin typeface="Arial"/>
+                          <a:ea typeface="Arial"/>
+                          <a:cs typeface="Arial"/>
+                        </a:rPr>
                         <a:t>7</a:t>
                       </a:r>
                     </a:p>
@@ -38497,6 +39157,11 @@
                     <a:lstStyle/>
                     <a:p>
                       <a:r>
+                        <a:rPr>
+                          <a:latin typeface="Arial"/>
+                          <a:ea typeface="Arial"/>
+                          <a:cs typeface="Arial"/>
+                        </a:rPr>
                         <a:t>5</a:t>
                       </a:r>
                     </a:p>

--- a/presentations/kong-platform-journey-guided.pptx
+++ b/presentations/kong-platform-journey-guided.pptx
@@ -35043,7 +35043,7 @@
                     <a:lstStyle/>
                     <a:p>
                       <a:r>
-                        <a:rPr>
+                        <a:rPr sz="1400">
                           <a:latin typeface="Arial"/>
                           <a:ea typeface="Arial"/>
                           <a:cs typeface="Arial"/>
@@ -35060,7 +35060,7 @@
                     <a:lstStyle/>
                     <a:p>
                       <a:r>
-                        <a:rPr>
+                        <a:rPr sz="1400">
                           <a:latin typeface="Arial"/>
                           <a:ea typeface="Arial"/>
                           <a:cs typeface="Arial"/>
@@ -35077,7 +35077,7 @@
                     <a:lstStyle/>
                     <a:p>
                       <a:r>
-                        <a:rPr>
+                        <a:rPr sz="1400">
                           <a:latin typeface="Arial"/>
                           <a:ea typeface="Arial"/>
                           <a:cs typeface="Arial"/>
@@ -35094,7 +35094,7 @@
                     <a:lstStyle/>
                     <a:p>
                       <a:r>
-                        <a:rPr>
+                        <a:rPr sz="1400">
                           <a:latin typeface="Arial"/>
                           <a:ea typeface="Arial"/>
                           <a:cs typeface="Arial"/>
@@ -35111,7 +35111,7 @@
                     <a:lstStyle/>
                     <a:p>
                       <a:r>
-                        <a:rPr>
+                        <a:rPr sz="1400">
                           <a:latin typeface="Arial"/>
                           <a:ea typeface="Arial"/>
                           <a:cs typeface="Arial"/>
@@ -35135,7 +35135,7 @@
                     <a:lstStyle/>
                     <a:p>
                       <a:r>
-                        <a:rPr>
+                        <a:rPr sz="1400">
                           <a:latin typeface="Arial"/>
                           <a:ea typeface="Arial"/>
                           <a:cs typeface="Arial"/>
@@ -35152,7 +35152,7 @@
                     <a:lstStyle/>
                     <a:p>
                       <a:r>
-                        <a:rPr>
+                        <a:rPr sz="1400">
                           <a:latin typeface="Arial"/>
                           <a:ea typeface="Arial"/>
                           <a:cs typeface="Arial"/>
@@ -35169,7 +35169,7 @@
                     <a:lstStyle/>
                     <a:p>
                       <a:r>
-                        <a:rPr>
+                        <a:rPr sz="1400">
                           <a:latin typeface="Arial"/>
                           <a:ea typeface="Arial"/>
                           <a:cs typeface="Arial"/>
@@ -35186,7 +35186,7 @@
                     <a:lstStyle/>
                     <a:p>
                       <a:r>
-                        <a:rPr>
+                        <a:rPr sz="1400">
                           <a:latin typeface="Arial"/>
                           <a:ea typeface="Arial"/>
                           <a:cs typeface="Arial"/>
@@ -35203,7 +35203,7 @@
                     <a:lstStyle/>
                     <a:p>
                       <a:r>
-                        <a:rPr>
+                        <a:rPr sz="1400">
                           <a:latin typeface="Arial"/>
                           <a:ea typeface="Arial"/>
                           <a:cs typeface="Arial"/>
@@ -35227,7 +35227,7 @@
                     <a:lstStyle/>
                     <a:p>
                       <a:r>
-                        <a:rPr>
+                        <a:rPr sz="1400">
                           <a:latin typeface="Arial"/>
                           <a:ea typeface="Arial"/>
                           <a:cs typeface="Arial"/>
@@ -35244,7 +35244,7 @@
                     <a:lstStyle/>
                     <a:p>
                       <a:r>
-                        <a:rPr>
+                        <a:rPr sz="1400">
                           <a:latin typeface="Arial"/>
                           <a:ea typeface="Arial"/>
                           <a:cs typeface="Arial"/>
@@ -35261,7 +35261,7 @@
                     <a:lstStyle/>
                     <a:p>
                       <a:r>
-                        <a:rPr>
+                        <a:rPr sz="1400">
                           <a:latin typeface="Arial"/>
                           <a:ea typeface="Arial"/>
                           <a:cs typeface="Arial"/>
@@ -35278,7 +35278,7 @@
                     <a:lstStyle/>
                     <a:p>
                       <a:r>
-                        <a:rPr>
+                        <a:rPr sz="1400">
                           <a:latin typeface="Arial"/>
                           <a:ea typeface="Arial"/>
                           <a:cs typeface="Arial"/>
@@ -35295,7 +35295,7 @@
                     <a:lstStyle/>
                     <a:p>
                       <a:r>
-                        <a:rPr>
+                        <a:rPr sz="1400">
                           <a:latin typeface="Arial"/>
                           <a:ea typeface="Arial"/>
                           <a:cs typeface="Arial"/>
@@ -35319,7 +35319,7 @@
                     <a:lstStyle/>
                     <a:p>
                       <a:r>
-                        <a:rPr>
+                        <a:rPr sz="1400">
                           <a:latin typeface="Arial"/>
                           <a:ea typeface="Arial"/>
                           <a:cs typeface="Arial"/>
@@ -35336,7 +35336,7 @@
                     <a:lstStyle/>
                     <a:p>
                       <a:r>
-                        <a:rPr>
+                        <a:rPr sz="1400">
                           <a:latin typeface="Arial"/>
                           <a:ea typeface="Arial"/>
                           <a:cs typeface="Arial"/>
@@ -35353,7 +35353,7 @@
                     <a:lstStyle/>
                     <a:p>
                       <a:r>
-                        <a:rPr>
+                        <a:rPr sz="1400">
                           <a:latin typeface="Arial"/>
                           <a:ea typeface="Arial"/>
                           <a:cs typeface="Arial"/>
@@ -35370,7 +35370,7 @@
                     <a:lstStyle/>
                     <a:p>
                       <a:r>
-                        <a:rPr>
+                        <a:rPr sz="1400">
                           <a:latin typeface="Arial"/>
                           <a:ea typeface="Arial"/>
                           <a:cs typeface="Arial"/>
@@ -35387,7 +35387,7 @@
                     <a:lstStyle/>
                     <a:p>
                       <a:r>
-                        <a:rPr>
+                        <a:rPr sz="1400">
                           <a:latin typeface="Arial"/>
                           <a:ea typeface="Arial"/>
                           <a:cs typeface="Arial"/>
@@ -35411,7 +35411,7 @@
                     <a:lstStyle/>
                     <a:p>
                       <a:r>
-                        <a:rPr>
+                        <a:rPr sz="1400">
                           <a:latin typeface="Arial"/>
                           <a:ea typeface="Arial"/>
                           <a:cs typeface="Arial"/>
@@ -35428,7 +35428,7 @@
                     <a:lstStyle/>
                     <a:p>
                       <a:r>
-                        <a:rPr>
+                        <a:rPr sz="1400">
                           <a:latin typeface="Arial"/>
                           <a:ea typeface="Arial"/>
                           <a:cs typeface="Arial"/>
@@ -35445,7 +35445,7 @@
                     <a:lstStyle/>
                     <a:p>
                       <a:r>
-                        <a:rPr>
+                        <a:rPr sz="1400">
                           <a:latin typeface="Arial"/>
                           <a:ea typeface="Arial"/>
                           <a:cs typeface="Arial"/>
@@ -35462,7 +35462,7 @@
                     <a:lstStyle/>
                     <a:p>
                       <a:r>
-                        <a:rPr>
+                        <a:rPr sz="1400">
                           <a:latin typeface="Arial"/>
                           <a:ea typeface="Arial"/>
                           <a:cs typeface="Arial"/>
@@ -35479,7 +35479,7 @@
                     <a:lstStyle/>
                     <a:p>
                       <a:r>
-                        <a:rPr>
+                        <a:rPr sz="1400">
                           <a:latin typeface="Arial"/>
                           <a:ea typeface="Arial"/>
                           <a:cs typeface="Arial"/>
@@ -35503,7 +35503,7 @@
                     <a:lstStyle/>
                     <a:p>
                       <a:r>
-                        <a:rPr>
+                        <a:rPr sz="1400">
                           <a:latin typeface="Arial"/>
                           <a:ea typeface="Arial"/>
                           <a:cs typeface="Arial"/>
@@ -35520,7 +35520,7 @@
                     <a:lstStyle/>
                     <a:p>
                       <a:r>
-                        <a:rPr>
+                        <a:rPr sz="1400">
                           <a:latin typeface="Arial"/>
                           <a:ea typeface="Arial"/>
                           <a:cs typeface="Arial"/>
@@ -35537,7 +35537,7 @@
                     <a:lstStyle/>
                     <a:p>
                       <a:r>
-                        <a:rPr>
+                        <a:rPr sz="1400">
                           <a:latin typeface="Arial"/>
                           <a:ea typeface="Arial"/>
                           <a:cs typeface="Arial"/>
@@ -35554,7 +35554,7 @@
                     <a:lstStyle/>
                     <a:p>
                       <a:r>
-                        <a:rPr>
+                        <a:rPr sz="1400">
                           <a:latin typeface="Arial"/>
                           <a:ea typeface="Arial"/>
                           <a:cs typeface="Arial"/>
@@ -35571,7 +35571,7 @@
                     <a:lstStyle/>
                     <a:p>
                       <a:r>
-                        <a:rPr>
+                        <a:rPr sz="1400">
                           <a:latin typeface="Arial"/>
                           <a:ea typeface="Arial"/>
                           <a:cs typeface="Arial"/>
@@ -35595,7 +35595,7 @@
                     <a:lstStyle/>
                     <a:p>
                       <a:r>
-                        <a:rPr>
+                        <a:rPr sz="1400">
                           <a:latin typeface="Arial"/>
                           <a:ea typeface="Arial"/>
                           <a:cs typeface="Arial"/>
@@ -35612,7 +35612,7 @@
                     <a:lstStyle/>
                     <a:p>
                       <a:r>
-                        <a:rPr>
+                        <a:rPr sz="1400">
                           <a:latin typeface="Arial"/>
                           <a:ea typeface="Arial"/>
                           <a:cs typeface="Arial"/>
@@ -35629,7 +35629,7 @@
                     <a:lstStyle/>
                     <a:p>
                       <a:r>
-                        <a:rPr>
+                        <a:rPr sz="1400">
                           <a:latin typeface="Arial"/>
                           <a:ea typeface="Arial"/>
                           <a:cs typeface="Arial"/>
@@ -35646,7 +35646,7 @@
                     <a:lstStyle/>
                     <a:p>
                       <a:r>
-                        <a:rPr>
+                        <a:rPr sz="1400">
                           <a:latin typeface="Arial"/>
                           <a:ea typeface="Arial"/>
                           <a:cs typeface="Arial"/>
@@ -35663,7 +35663,7 @@
                     <a:lstStyle/>
                     <a:p>
                       <a:r>
-                        <a:rPr>
+                        <a:rPr sz="1400">
                           <a:latin typeface="Arial"/>
                           <a:ea typeface="Arial"/>
                           <a:cs typeface="Arial"/>
@@ -36201,7 +36201,7 @@
                     <a:lstStyle/>
                     <a:p>
                       <a:r>
-                        <a:rPr>
+                        <a:rPr sz="1400">
                           <a:latin typeface="Arial"/>
                           <a:ea typeface="Arial"/>
                           <a:cs typeface="Arial"/>
@@ -36218,7 +36218,7 @@
                     <a:lstStyle/>
                     <a:p>
                       <a:r>
-                        <a:rPr>
+                        <a:rPr sz="1400">
                           <a:latin typeface="Arial"/>
                           <a:ea typeface="Arial"/>
                           <a:cs typeface="Arial"/>
@@ -36235,7 +36235,7 @@
                     <a:lstStyle/>
                     <a:p>
                       <a:r>
-                        <a:rPr>
+                        <a:rPr sz="1400">
                           <a:latin typeface="Arial"/>
                           <a:ea typeface="Arial"/>
                           <a:cs typeface="Arial"/>
@@ -36252,7 +36252,7 @@
                     <a:lstStyle/>
                     <a:p>
                       <a:r>
-                        <a:rPr>
+                        <a:rPr sz="1400">
                           <a:latin typeface="Arial"/>
                           <a:ea typeface="Arial"/>
                           <a:cs typeface="Arial"/>
@@ -36269,7 +36269,7 @@
                     <a:lstStyle/>
                     <a:p>
                       <a:r>
-                        <a:rPr>
+                        <a:rPr sz="1400">
                           <a:latin typeface="Arial"/>
                           <a:ea typeface="Arial"/>
                           <a:cs typeface="Arial"/>
@@ -36293,7 +36293,7 @@
                     <a:lstStyle/>
                     <a:p>
                       <a:r>
-                        <a:rPr>
+                        <a:rPr sz="1400">
                           <a:latin typeface="Arial"/>
                           <a:ea typeface="Arial"/>
                           <a:cs typeface="Arial"/>
@@ -36310,7 +36310,7 @@
                     <a:lstStyle/>
                     <a:p>
                       <a:r>
-                        <a:rPr>
+                        <a:rPr sz="1400">
                           <a:latin typeface="Arial"/>
                           <a:ea typeface="Arial"/>
                           <a:cs typeface="Arial"/>
@@ -36327,7 +36327,7 @@
                     <a:lstStyle/>
                     <a:p>
                       <a:r>
-                        <a:rPr>
+                        <a:rPr sz="1400">
                           <a:latin typeface="Arial"/>
                           <a:ea typeface="Arial"/>
                           <a:cs typeface="Arial"/>
@@ -36344,7 +36344,7 @@
                     <a:lstStyle/>
                     <a:p>
                       <a:r>
-                        <a:rPr>
+                        <a:rPr sz="1400">
                           <a:latin typeface="Arial"/>
                           <a:ea typeface="Arial"/>
                           <a:cs typeface="Arial"/>
@@ -36361,7 +36361,7 @@
                     <a:lstStyle/>
                     <a:p>
                       <a:r>
-                        <a:rPr>
+                        <a:rPr sz="1400">
                           <a:latin typeface="Arial"/>
                           <a:ea typeface="Arial"/>
                           <a:cs typeface="Arial"/>
@@ -36385,7 +36385,7 @@
                     <a:lstStyle/>
                     <a:p>
                       <a:r>
-                        <a:rPr>
+                        <a:rPr sz="1400">
                           <a:latin typeface="Arial"/>
                           <a:ea typeface="Arial"/>
                           <a:cs typeface="Arial"/>
@@ -36402,7 +36402,7 @@
                     <a:lstStyle/>
                     <a:p>
                       <a:r>
-                        <a:rPr>
+                        <a:rPr sz="1400">
                           <a:latin typeface="Arial"/>
                           <a:ea typeface="Arial"/>
                           <a:cs typeface="Arial"/>
@@ -36419,7 +36419,7 @@
                     <a:lstStyle/>
                     <a:p>
                       <a:r>
-                        <a:rPr>
+                        <a:rPr sz="1400">
                           <a:latin typeface="Arial"/>
                           <a:ea typeface="Arial"/>
                           <a:cs typeface="Arial"/>
@@ -36436,7 +36436,7 @@
                     <a:lstStyle/>
                     <a:p>
                       <a:r>
-                        <a:rPr>
+                        <a:rPr sz="1400">
                           <a:latin typeface="Arial"/>
                           <a:ea typeface="Arial"/>
                           <a:cs typeface="Arial"/>
@@ -36453,7 +36453,7 @@
                     <a:lstStyle/>
                     <a:p>
                       <a:r>
-                        <a:rPr>
+                        <a:rPr sz="1400">
                           <a:latin typeface="Arial"/>
                           <a:ea typeface="Arial"/>
                           <a:cs typeface="Arial"/>
@@ -36477,7 +36477,7 @@
                     <a:lstStyle/>
                     <a:p>
                       <a:r>
-                        <a:rPr>
+                        <a:rPr sz="1400">
                           <a:latin typeface="Arial"/>
                           <a:ea typeface="Arial"/>
                           <a:cs typeface="Arial"/>
@@ -36494,7 +36494,7 @@
                     <a:lstStyle/>
                     <a:p>
                       <a:r>
-                        <a:rPr>
+                        <a:rPr sz="1400">
                           <a:latin typeface="Arial"/>
                           <a:ea typeface="Arial"/>
                           <a:cs typeface="Arial"/>
@@ -36511,7 +36511,7 @@
                     <a:lstStyle/>
                     <a:p>
                       <a:r>
-                        <a:rPr>
+                        <a:rPr sz="1400">
                           <a:latin typeface="Arial"/>
                           <a:ea typeface="Arial"/>
                           <a:cs typeface="Arial"/>
@@ -36528,7 +36528,7 @@
                     <a:lstStyle/>
                     <a:p>
                       <a:r>
-                        <a:rPr>
+                        <a:rPr sz="1400">
                           <a:latin typeface="Arial"/>
                           <a:ea typeface="Arial"/>
                           <a:cs typeface="Arial"/>
@@ -36545,7 +36545,7 @@
                     <a:lstStyle/>
                     <a:p>
                       <a:r>
-                        <a:rPr>
+                        <a:rPr sz="1400">
                           <a:latin typeface="Arial"/>
                           <a:ea typeface="Arial"/>
                           <a:cs typeface="Arial"/>
@@ -36569,7 +36569,7 @@
                     <a:lstStyle/>
                     <a:p>
                       <a:r>
-                        <a:rPr>
+                        <a:rPr sz="1400">
                           <a:latin typeface="Arial"/>
                           <a:ea typeface="Arial"/>
                           <a:cs typeface="Arial"/>
@@ -36586,7 +36586,7 @@
                     <a:lstStyle/>
                     <a:p>
                       <a:r>
-                        <a:rPr>
+                        <a:rPr sz="1400">
                           <a:latin typeface="Arial"/>
                           <a:ea typeface="Arial"/>
                           <a:cs typeface="Arial"/>
@@ -36603,7 +36603,7 @@
                     <a:lstStyle/>
                     <a:p>
                       <a:r>
-                        <a:rPr>
+                        <a:rPr sz="1400">
                           <a:latin typeface="Arial"/>
                           <a:ea typeface="Arial"/>
                           <a:cs typeface="Arial"/>
@@ -36620,7 +36620,7 @@
                     <a:lstStyle/>
                     <a:p>
                       <a:r>
-                        <a:rPr>
+                        <a:rPr sz="1400">
                           <a:latin typeface="Arial"/>
                           <a:ea typeface="Arial"/>
                           <a:cs typeface="Arial"/>
@@ -36637,7 +36637,7 @@
                     <a:lstStyle/>
                     <a:p>
                       <a:r>
-                        <a:rPr>
+                        <a:rPr sz="1400">
                           <a:latin typeface="Arial"/>
                           <a:ea typeface="Arial"/>
                           <a:cs typeface="Arial"/>
@@ -36661,7 +36661,7 @@
                     <a:lstStyle/>
                     <a:p>
                       <a:r>
-                        <a:rPr>
+                        <a:rPr sz="1400">
                           <a:latin typeface="Arial"/>
                           <a:ea typeface="Arial"/>
                           <a:cs typeface="Arial"/>
@@ -36678,7 +36678,7 @@
                     <a:lstStyle/>
                     <a:p>
                       <a:r>
-                        <a:rPr>
+                        <a:rPr sz="1400">
                           <a:latin typeface="Arial"/>
                           <a:ea typeface="Arial"/>
                           <a:cs typeface="Arial"/>
@@ -36695,7 +36695,7 @@
                     <a:lstStyle/>
                     <a:p>
                       <a:r>
-                        <a:rPr>
+                        <a:rPr sz="1400">
                           <a:latin typeface="Arial"/>
                           <a:ea typeface="Arial"/>
                           <a:cs typeface="Arial"/>
@@ -36712,7 +36712,7 @@
                     <a:lstStyle/>
                     <a:p>
                       <a:r>
-                        <a:rPr>
+                        <a:rPr sz="1400">
                           <a:latin typeface="Arial"/>
                           <a:ea typeface="Arial"/>
                           <a:cs typeface="Arial"/>
@@ -36729,7 +36729,7 @@
                     <a:lstStyle/>
                     <a:p>
                       <a:r>
-                        <a:rPr>
+                        <a:rPr sz="1400">
                           <a:latin typeface="Arial"/>
                           <a:ea typeface="Arial"/>
                           <a:cs typeface="Arial"/>
@@ -36753,7 +36753,7 @@
                     <a:lstStyle/>
                     <a:p>
                       <a:r>
-                        <a:rPr>
+                        <a:rPr sz="1400">
                           <a:latin typeface="Arial"/>
                           <a:ea typeface="Arial"/>
                           <a:cs typeface="Arial"/>
@@ -36770,7 +36770,7 @@
                     <a:lstStyle/>
                     <a:p>
                       <a:r>
-                        <a:rPr>
+                        <a:rPr sz="1400">
                           <a:latin typeface="Arial"/>
                           <a:ea typeface="Arial"/>
                           <a:cs typeface="Arial"/>
@@ -36787,7 +36787,7 @@
                     <a:lstStyle/>
                     <a:p>
                       <a:r>
-                        <a:rPr>
+                        <a:rPr sz="1400">
                           <a:latin typeface="Arial"/>
                           <a:ea typeface="Arial"/>
                           <a:cs typeface="Arial"/>
@@ -36804,7 +36804,7 @@
                     <a:lstStyle/>
                     <a:p>
                       <a:r>
-                        <a:rPr>
+                        <a:rPr sz="1400">
                           <a:latin typeface="Arial"/>
                           <a:ea typeface="Arial"/>
                           <a:cs typeface="Arial"/>
@@ -36821,7 +36821,7 @@
                     <a:lstStyle/>
                     <a:p>
                       <a:r>
-                        <a:rPr>
+                        <a:rPr sz="1400">
                           <a:latin typeface="Arial"/>
                           <a:ea typeface="Arial"/>
                           <a:cs typeface="Arial"/>
@@ -37359,7 +37359,7 @@
                     <a:lstStyle/>
                     <a:p>
                       <a:r>
-                        <a:rPr>
+                        <a:rPr sz="1400">
                           <a:solidFill>
                             <a:srgbClr val="111111"/>
                           </a:solidFill>
@@ -37379,7 +37379,7 @@
                     <a:lstStyle/>
                     <a:p>
                       <a:r>
-                        <a:rPr>
+                        <a:rPr sz="1400">
                           <a:solidFill>
                             <a:srgbClr val="111111"/>
                           </a:solidFill>
@@ -37399,7 +37399,7 @@
                     <a:lstStyle/>
                     <a:p>
                       <a:r>
-                        <a:rPr>
+                        <a:rPr sz="1400">
                           <a:solidFill>
                             <a:srgbClr val="111111"/>
                           </a:solidFill>
@@ -37419,7 +37419,7 @@
                     <a:lstStyle/>
                     <a:p>
                       <a:r>
-                        <a:rPr>
+                        <a:rPr sz="1400">
                           <a:solidFill>
                             <a:srgbClr val="111111"/>
                           </a:solidFill>
@@ -37439,7 +37439,7 @@
                     <a:lstStyle/>
                     <a:p>
                       <a:r>
-                        <a:rPr>
+                        <a:rPr sz="1400">
                           <a:solidFill>
                             <a:srgbClr val="111111"/>
                           </a:solidFill>
@@ -37466,7 +37466,7 @@
                     <a:lstStyle/>
                     <a:p>
                       <a:r>
-                        <a:rPr>
+                        <a:rPr sz="1400">
                           <a:latin typeface="Arial"/>
                           <a:ea typeface="Arial"/>
                           <a:cs typeface="Arial"/>
@@ -37483,7 +37483,7 @@
                     <a:lstStyle/>
                     <a:p>
                       <a:r>
-                        <a:rPr>
+                        <a:rPr sz="1400">
                           <a:latin typeface="Arial"/>
                           <a:ea typeface="Arial"/>
                           <a:cs typeface="Arial"/>
@@ -37500,7 +37500,7 @@
                     <a:lstStyle/>
                     <a:p>
                       <a:r>
-                        <a:rPr>
+                        <a:rPr sz="1400">
                           <a:latin typeface="Arial"/>
                           <a:ea typeface="Arial"/>
                           <a:cs typeface="Arial"/>
@@ -37517,7 +37517,7 @@
                     <a:lstStyle/>
                     <a:p>
                       <a:r>
-                        <a:rPr>
+                        <a:rPr sz="1400">
                           <a:latin typeface="Arial"/>
                           <a:ea typeface="Arial"/>
                           <a:cs typeface="Arial"/>
@@ -37534,7 +37534,7 @@
                     <a:lstStyle/>
                     <a:p>
                       <a:r>
-                        <a:rPr>
+                        <a:rPr sz="1400">
                           <a:latin typeface="Arial"/>
                           <a:ea typeface="Arial"/>
                           <a:cs typeface="Arial"/>
@@ -37558,7 +37558,7 @@
                     <a:lstStyle/>
                     <a:p>
                       <a:r>
-                        <a:rPr>
+                        <a:rPr sz="1400">
                           <a:latin typeface="Arial"/>
                           <a:ea typeface="Arial"/>
                           <a:cs typeface="Arial"/>
@@ -37575,7 +37575,7 @@
                     <a:lstStyle/>
                     <a:p>
                       <a:r>
-                        <a:rPr>
+                        <a:rPr sz="1400">
                           <a:latin typeface="Arial"/>
                           <a:ea typeface="Arial"/>
                           <a:cs typeface="Arial"/>
@@ -37592,7 +37592,7 @@
                     <a:lstStyle/>
                     <a:p>
                       <a:r>
-                        <a:rPr>
+                        <a:rPr sz="1400">
                           <a:latin typeface="Arial"/>
                           <a:ea typeface="Arial"/>
                           <a:cs typeface="Arial"/>
@@ -37609,7 +37609,7 @@
                     <a:lstStyle/>
                     <a:p>
                       <a:r>
-                        <a:rPr>
+                        <a:rPr sz="1400">
                           <a:latin typeface="Arial"/>
                           <a:ea typeface="Arial"/>
                           <a:cs typeface="Arial"/>
@@ -37626,7 +37626,7 @@
                     <a:lstStyle/>
                     <a:p>
                       <a:r>
-                        <a:rPr>
+                        <a:rPr sz="1400">
                           <a:latin typeface="Arial"/>
                           <a:ea typeface="Arial"/>
                           <a:cs typeface="Arial"/>
@@ -37650,7 +37650,7 @@
                     <a:lstStyle/>
                     <a:p>
                       <a:r>
-                        <a:rPr>
+                        <a:rPr sz="1400">
                           <a:latin typeface="Arial"/>
                           <a:ea typeface="Arial"/>
                           <a:cs typeface="Arial"/>
@@ -37667,7 +37667,7 @@
                     <a:lstStyle/>
                     <a:p>
                       <a:r>
-                        <a:rPr>
+                        <a:rPr sz="1400">
                           <a:latin typeface="Arial"/>
                           <a:ea typeface="Arial"/>
                           <a:cs typeface="Arial"/>
@@ -37684,7 +37684,7 @@
                     <a:lstStyle/>
                     <a:p>
                       <a:r>
-                        <a:rPr>
+                        <a:rPr sz="1400">
                           <a:latin typeface="Arial"/>
                           <a:ea typeface="Arial"/>
                           <a:cs typeface="Arial"/>
@@ -37701,7 +37701,7 @@
                     <a:lstStyle/>
                     <a:p>
                       <a:r>
-                        <a:rPr>
+                        <a:rPr sz="1400">
                           <a:latin typeface="Arial"/>
                           <a:ea typeface="Arial"/>
                           <a:cs typeface="Arial"/>
@@ -37718,7 +37718,7 @@
                     <a:lstStyle/>
                     <a:p>
                       <a:r>
-                        <a:rPr>
+                        <a:rPr sz="1400">
                           <a:latin typeface="Arial"/>
                           <a:ea typeface="Arial"/>
                           <a:cs typeface="Arial"/>
